--- a/Παρουσίαση.pptx
+++ b/Παρουσίαση.pptx
@@ -23774,7 +23774,15 @@
             <a:pPr lvl="1"/>
             <a:r>
               <a:rPr lang="el-GR" dirty="0"/>
-              <a:t>Η προσομοίωση με εργαλεία όπως το SimPy είναι ένας πανίσχυρος τρόπος για να οπτικοποιήσουμε και να κατανοήσουμε αυτές τις πολύπλοκες δυναμικές του δικτύου.</a:t>
+              <a:t>Η προσομοίωση με εργαλεία όπως το SimPy είναι </a:t>
+            </a:r>
+            <a:r>
+              <a:rPr lang="el-GR"/>
+              <a:t>ένας καλός </a:t>
+            </a:r>
+            <a:r>
+              <a:rPr lang="el-GR" dirty="0"/>
+              <a:t>τρόπος για να οπτικοποιήσουμε και να κατανοήσουμε αυτές τις πολύπλοκες δυναμικές του δικτύου.</a:t>
             </a:r>
           </a:p>
           <a:p>

--- a/Παρουσίαση.pptx
+++ b/Παρουσίαση.pptx
@@ -23774,15 +23774,7 @@
             <a:pPr lvl="1"/>
             <a:r>
               <a:rPr lang="el-GR" dirty="0"/>
-              <a:t>Η προσομοίωση με εργαλεία όπως το SimPy είναι </a:t>
-            </a:r>
-            <a:r>
-              <a:rPr lang="el-GR"/>
-              <a:t>ένας καλός </a:t>
-            </a:r>
-            <a:r>
-              <a:rPr lang="el-GR" dirty="0"/>
-              <a:t>τρόπος για να οπτικοποιήσουμε και να κατανοήσουμε αυτές τις πολύπλοκες δυναμικές του δικτύου.</a:t>
+              <a:t>Η προσομοίωση με εργαλεία όπως το SimPy είναι ένας καλός τρόπος για να οπτικοποιήσουμε και να κατανοήσουμε αυτές τις πολύπλοκες δυναμικές του δικτύου.</a:t>
             </a:r>
           </a:p>
           <a:p>

--- a/Παρουσίαση.pptx
+++ b/Παρουσίαση.pptx
@@ -5,7 +5,7 @@
     <p:sldMasterId id="2147483648" r:id="rId1"/>
   </p:sldMasterIdLst>
   <p:notesMasterIdLst>
-    <p:notesMasterId r:id="rId16"/>
+    <p:notesMasterId r:id="rId23"/>
   </p:notesMasterIdLst>
   <p:sldIdLst>
     <p:sldId id="256" r:id="rId2"/>
@@ -21,7 +21,14 @@
     <p:sldId id="274" r:id="rId12"/>
     <p:sldId id="271" r:id="rId13"/>
     <p:sldId id="275" r:id="rId14"/>
-    <p:sldId id="267" r:id="rId15"/>
+    <p:sldId id="276" r:id="rId15"/>
+    <p:sldId id="277" r:id="rId16"/>
+    <p:sldId id="278" r:id="rId17"/>
+    <p:sldId id="279" r:id="rId18"/>
+    <p:sldId id="280" r:id="rId19"/>
+    <p:sldId id="281" r:id="rId20"/>
+    <p:sldId id="283" r:id="rId21"/>
+    <p:sldId id="282" r:id="rId22"/>
   </p:sldIdLst>
   <p:sldSz cx="12192000" cy="6858000"/>
   <p:notesSz cx="6858000" cy="9144000"/>
@@ -138,7 +145,14 @@
             <p14:sldId id="274"/>
             <p14:sldId id="271"/>
             <p14:sldId id="275"/>
-            <p14:sldId id="267"/>
+            <p14:sldId id="276"/>
+            <p14:sldId id="277"/>
+            <p14:sldId id="278"/>
+            <p14:sldId id="279"/>
+            <p14:sldId id="280"/>
+            <p14:sldId id="281"/>
+            <p14:sldId id="283"/>
+            <p14:sldId id="282"/>
           </p14:sldIdLst>
         </p14:section>
       </p14:sectionLst>
@@ -17323,7 +17337,7 @@
             <a:prstTxWarp prst="textNoShape">
               <a:avLst/>
             </a:prstTxWarp>
-            <a:normAutofit/>
+            <a:normAutofit lnSpcReduction="10000"/>
           </a:bodyPr>
           <a:lstStyle/>
           <a:p>
@@ -17801,6 +17815,20 @@
               </a:rPr>
               <a:t>α 10 Mbps), οποιαδήποτε περαιτέρω αύξηση (100 Mbps) παραμένει ανεκμετάλλευτη για τον συγκεκριμένο φόρτο.</a:t>
             </a:r>
+            <a:br>
+              <a:rPr kumimoji="0" lang="el-GR" altLang="en-US" sz="1500" b="0" i="0" u="none" strike="noStrike" cap="none" normalizeH="0" baseline="0" dirty="0">
+                <a:ln>
+                  <a:noFill/>
+                </a:ln>
+                <a:effectLst/>
+              </a:rPr>
+            </a:br>
+            <a:endParaRPr kumimoji="0" lang="en-US" altLang="en-US" sz="1500" b="0" i="0" u="none" strike="noStrike" cap="none" normalizeH="0" baseline="0" dirty="0">
+              <a:ln>
+                <a:noFill/>
+              </a:ln>
+              <a:effectLst/>
+            </a:endParaRPr>
           </a:p>
           <a:p>
             <a:pPr marL="0" marR="0" lvl="0" indent="-228600" algn="l" fontAlgn="base">
@@ -18042,6 +18070,1805 @@
 </file>
 
 <file path=ppt/slides/slide14.xml><?xml version="1.0" encoding="utf-8"?>
+<p:sld xmlns:a="http://schemas.openxmlformats.org/drawingml/2006/main" xmlns:r="http://schemas.openxmlformats.org/officeDocument/2006/relationships" xmlns:p="http://schemas.openxmlformats.org/presentationml/2006/main">
+  <p:cSld>
+    <p:bg>
+      <p:bgPr>
+        <a:solidFill>
+          <a:schemeClr val="bg1"/>
+        </a:solidFill>
+        <a:effectLst/>
+      </p:bgPr>
+    </p:bg>
+    <p:spTree>
+      <p:nvGrpSpPr>
+        <p:cNvPr id="1" name=""/>
+        <p:cNvGrpSpPr/>
+        <p:nvPr/>
+      </p:nvGrpSpPr>
+      <p:grpSpPr>
+        <a:xfrm>
+          <a:off x="0" y="0"/>
+          <a:ext cx="0" cy="0"/>
+          <a:chOff x="0" y="0"/>
+          <a:chExt cx="0" cy="0"/>
+        </a:xfrm>
+      </p:grpSpPr>
+      <p:sp useBgFill="1">
+        <p:nvSpPr>
+          <p:cNvPr id="8" name="Rectangle 7">
+            <a:extLst>
+              <a:ext uri="{FF2B5EF4-FFF2-40B4-BE49-F238E27FC236}">
+                <a16:creationId xmlns:a16="http://schemas.microsoft.com/office/drawing/2014/main" id="{DEE2AD96-B495-4E06-9291-B71706F728CB}"/>
+              </a:ext>
+              <a:ext uri="{C183D7F6-B498-43B3-948B-1728B52AA6E4}">
+                <adec:decorative xmlns:adec="http://schemas.microsoft.com/office/drawing/2017/decorative" val="1"/>
+              </a:ext>
+            </a:extLst>
+          </p:cNvPr>
+          <p:cNvSpPr>
+            <a:spLocks noGrp="1" noRot="1" noChangeAspect="1" noMove="1" noResize="1" noEditPoints="1" noAdjustHandles="1" noChangeArrowheads="1" noChangeShapeType="1" noTextEdit="1"/>
+          </p:cNvSpPr>
+          <p:nvPr>
+            <p:extLst>
+              <p:ext uri="{386F3935-93C4-4BCD-93E2-E3B085C9AB24}">
+                <p16:designElem xmlns:p16="http://schemas.microsoft.com/office/powerpoint/2015/main" val="1"/>
+              </p:ext>
+            </p:extLst>
+          </p:nvPr>
+        </p:nvSpPr>
+        <p:spPr>
+          <a:xfrm>
+            <a:off x="0" y="0"/>
+            <a:ext cx="12192000" cy="6858000"/>
+          </a:xfrm>
+          <a:prstGeom prst="rect">
+            <a:avLst/>
+          </a:prstGeom>
+          <a:ln w="12700" cap="flat" cmpd="sng" algn="ctr">
+            <a:noFill/>
+            <a:prstDash val="solid"/>
+            <a:miter lim="800000"/>
+          </a:ln>
+          <a:effectLst/>
+          <a:extLst>
+            <a:ext uri="{91240B29-F687-4F45-9708-019B960494DF}">
+              <a14:hiddenLine xmlns:a14="http://schemas.microsoft.com/office/drawing/2010/main" w="12700" cap="flat" cmpd="sng" algn="ctr">
+                <a:solidFill>
+                  <a:schemeClr val="accent1">
+                    <a:shade val="50000"/>
+                  </a:schemeClr>
+                </a:solidFill>
+                <a:prstDash val="solid"/>
+                <a:miter lim="800000"/>
+              </a14:hiddenLine>
+            </a:ext>
+          </a:extLst>
+        </p:spPr>
+        <p:style>
+          <a:lnRef idx="2">
+            <a:schemeClr val="accent1">
+              <a:shade val="50000"/>
+            </a:schemeClr>
+          </a:lnRef>
+          <a:fillRef idx="1">
+            <a:schemeClr val="accent1"/>
+          </a:fillRef>
+          <a:effectRef idx="0">
+            <a:schemeClr val="accent1"/>
+          </a:effectRef>
+          <a:fontRef idx="minor">
+            <a:schemeClr val="lt1"/>
+          </a:fontRef>
+        </p:style>
+        <p:txBody>
+          <a:bodyPr rtlCol="0" anchor="ctr"/>
+          <a:lstStyle/>
+          <a:p>
+            <a:pPr algn="ctr"/>
+            <a:endParaRPr lang="en-US"/>
+          </a:p>
+        </p:txBody>
+      </p:sp>
+      <p:sp>
+        <p:nvSpPr>
+          <p:cNvPr id="10" name="Rectangle 9">
+            <a:extLst>
+              <a:ext uri="{FF2B5EF4-FFF2-40B4-BE49-F238E27FC236}">
+                <a16:creationId xmlns:a16="http://schemas.microsoft.com/office/drawing/2014/main" id="{53CF6D67-C5A8-4ADD-9E8E-1E38CA1D3166}"/>
+              </a:ext>
+              <a:ext uri="{C183D7F6-B498-43B3-948B-1728B52AA6E4}">
+                <adec:decorative xmlns:adec="http://schemas.microsoft.com/office/drawing/2017/decorative" val="1"/>
+              </a:ext>
+            </a:extLst>
+          </p:cNvPr>
+          <p:cNvSpPr>
+            <a:spLocks noGrp="1" noRot="1" noChangeAspect="1" noMove="1" noResize="1" noEditPoints="1" noAdjustHandles="1" noChangeArrowheads="1" noChangeShapeType="1" noTextEdit="1"/>
+          </p:cNvSpPr>
+          <p:nvPr>
+            <p:extLst>
+              <p:ext uri="{386F3935-93C4-4BCD-93E2-E3B085C9AB24}">
+                <p16:designElem xmlns:p16="http://schemas.microsoft.com/office/powerpoint/2015/main" val="1"/>
+              </p:ext>
+            </p:extLst>
+          </p:nvPr>
+        </p:nvSpPr>
+        <p:spPr>
+          <a:xfrm rot="5400000" flipH="1">
+            <a:off x="-638515" y="639280"/>
+            <a:ext cx="6858000" cy="5579440"/>
+          </a:xfrm>
+          <a:prstGeom prst="rect">
+            <a:avLst/>
+          </a:prstGeom>
+          <a:gradFill>
+            <a:gsLst>
+              <a:gs pos="8000">
+                <a:srgbClr val="000000"/>
+              </a:gs>
+              <a:gs pos="100000">
+                <a:schemeClr val="accent1">
+                  <a:lumMod val="75000"/>
+                </a:schemeClr>
+              </a:gs>
+            </a:gsLst>
+            <a:lin ang="3000000" scaled="0"/>
+          </a:gradFill>
+          <a:ln>
+            <a:noFill/>
+          </a:ln>
+        </p:spPr>
+        <p:style>
+          <a:lnRef idx="2">
+            <a:schemeClr val="accent1">
+              <a:shade val="50000"/>
+            </a:schemeClr>
+          </a:lnRef>
+          <a:fillRef idx="1">
+            <a:schemeClr val="accent1"/>
+          </a:fillRef>
+          <a:effectRef idx="0">
+            <a:schemeClr val="accent1"/>
+          </a:effectRef>
+          <a:fontRef idx="minor">
+            <a:schemeClr val="lt1"/>
+          </a:fontRef>
+        </p:style>
+        <p:txBody>
+          <a:bodyPr rtlCol="0" anchor="ctr"/>
+          <a:lstStyle/>
+          <a:p>
+            <a:pPr algn="ctr"/>
+            <a:endParaRPr lang="en-US"/>
+          </a:p>
+        </p:txBody>
+      </p:sp>
+      <p:sp>
+        <p:nvSpPr>
+          <p:cNvPr id="12" name="Rectangle 11">
+            <a:extLst>
+              <a:ext uri="{FF2B5EF4-FFF2-40B4-BE49-F238E27FC236}">
+                <a16:creationId xmlns:a16="http://schemas.microsoft.com/office/drawing/2014/main" id="{86909FA0-B515-4681-B7A8-FA281D133B94}"/>
+              </a:ext>
+              <a:ext uri="{C183D7F6-B498-43B3-948B-1728B52AA6E4}">
+                <adec:decorative xmlns:adec="http://schemas.microsoft.com/office/drawing/2017/decorative" val="1"/>
+              </a:ext>
+            </a:extLst>
+          </p:cNvPr>
+          <p:cNvSpPr>
+            <a:spLocks noGrp="1" noRot="1" noChangeAspect="1" noMove="1" noResize="1" noEditPoints="1" noAdjustHandles="1" noChangeArrowheads="1" noChangeShapeType="1" noTextEdit="1"/>
+          </p:cNvSpPr>
+          <p:nvPr>
+            <p:extLst>
+              <p:ext uri="{386F3935-93C4-4BCD-93E2-E3B085C9AB24}">
+                <p16:designElem xmlns:p16="http://schemas.microsoft.com/office/powerpoint/2015/main" val="1"/>
+              </p:ext>
+            </p:extLst>
+          </p:nvPr>
+        </p:nvSpPr>
+        <p:spPr>
+          <a:xfrm rot="5400000" flipH="1">
+            <a:off x="-393206" y="395206"/>
+            <a:ext cx="6346209" cy="5576080"/>
+          </a:xfrm>
+          <a:prstGeom prst="rect">
+            <a:avLst/>
+          </a:prstGeom>
+          <a:gradFill>
+            <a:gsLst>
+              <a:gs pos="0">
+                <a:srgbClr val="000000">
+                  <a:alpha val="0"/>
+                </a:srgbClr>
+              </a:gs>
+              <a:gs pos="99000">
+                <a:schemeClr val="accent1">
+                  <a:alpha val="0"/>
+                </a:schemeClr>
+              </a:gs>
+            </a:gsLst>
+            <a:lin ang="1800000" scaled="0"/>
+          </a:gradFill>
+          <a:ln>
+            <a:noFill/>
+          </a:ln>
+        </p:spPr>
+        <p:style>
+          <a:lnRef idx="2">
+            <a:schemeClr val="accent1">
+              <a:shade val="50000"/>
+            </a:schemeClr>
+          </a:lnRef>
+          <a:fillRef idx="1">
+            <a:schemeClr val="accent1"/>
+          </a:fillRef>
+          <a:effectRef idx="0">
+            <a:schemeClr val="accent1"/>
+          </a:effectRef>
+          <a:fontRef idx="minor">
+            <a:schemeClr val="lt1"/>
+          </a:fontRef>
+        </p:style>
+        <p:txBody>
+          <a:bodyPr rtlCol="0" anchor="ctr"/>
+          <a:lstStyle/>
+          <a:p>
+            <a:pPr algn="ctr"/>
+            <a:endParaRPr lang="en-US"/>
+          </a:p>
+        </p:txBody>
+      </p:sp>
+      <p:sp>
+        <p:nvSpPr>
+          <p:cNvPr id="14" name="Rectangle 13">
+            <a:extLst>
+              <a:ext uri="{FF2B5EF4-FFF2-40B4-BE49-F238E27FC236}">
+                <a16:creationId xmlns:a16="http://schemas.microsoft.com/office/drawing/2014/main" id="{21C9FE86-FCC3-4A31-AA1C-C882262B7FE7}"/>
+              </a:ext>
+              <a:ext uri="{C183D7F6-B498-43B3-948B-1728B52AA6E4}">
+                <adec:decorative xmlns:adec="http://schemas.microsoft.com/office/drawing/2017/decorative" val="1"/>
+              </a:ext>
+            </a:extLst>
+          </p:cNvPr>
+          <p:cNvSpPr>
+            <a:spLocks noGrp="1" noRot="1" noChangeAspect="1" noMove="1" noResize="1" noEditPoints="1" noAdjustHandles="1" noChangeArrowheads="1" noChangeShapeType="1" noTextEdit="1"/>
+          </p:cNvSpPr>
+          <p:nvPr>
+            <p:extLst>
+              <p:ext uri="{386F3935-93C4-4BCD-93E2-E3B085C9AB24}">
+                <p16:designElem xmlns:p16="http://schemas.microsoft.com/office/powerpoint/2015/main" val="1"/>
+              </p:ext>
+            </p:extLst>
+          </p:nvPr>
+        </p:nvSpPr>
+        <p:spPr>
+          <a:xfrm rot="5400000" flipH="1">
+            <a:off x="1528907" y="2818967"/>
+            <a:ext cx="2501979" cy="5576080"/>
+          </a:xfrm>
+          <a:prstGeom prst="rect">
+            <a:avLst/>
+          </a:prstGeom>
+          <a:gradFill>
+            <a:gsLst>
+              <a:gs pos="2000">
+                <a:schemeClr val="accent1">
+                  <a:alpha val="29000"/>
+                </a:schemeClr>
+              </a:gs>
+              <a:gs pos="100000">
+                <a:srgbClr val="000000">
+                  <a:alpha val="30000"/>
+                </a:srgbClr>
+              </a:gs>
+            </a:gsLst>
+            <a:lin ang="7800000" scaled="0"/>
+          </a:gradFill>
+          <a:ln>
+            <a:noFill/>
+          </a:ln>
+        </p:spPr>
+        <p:style>
+          <a:lnRef idx="2">
+            <a:schemeClr val="accent1">
+              <a:shade val="50000"/>
+            </a:schemeClr>
+          </a:lnRef>
+          <a:fillRef idx="1">
+            <a:schemeClr val="accent1"/>
+          </a:fillRef>
+          <a:effectRef idx="0">
+            <a:schemeClr val="accent1"/>
+          </a:effectRef>
+          <a:fontRef idx="minor">
+            <a:schemeClr val="lt1"/>
+          </a:fontRef>
+        </p:style>
+        <p:txBody>
+          <a:bodyPr rtlCol="0" anchor="ctr"/>
+          <a:lstStyle/>
+          <a:p>
+            <a:pPr algn="ctr"/>
+            <a:endParaRPr lang="en-US" dirty="0"/>
+          </a:p>
+        </p:txBody>
+      </p:sp>
+      <p:sp>
+        <p:nvSpPr>
+          <p:cNvPr id="16" name="Rectangle 15">
+            <a:extLst>
+              <a:ext uri="{FF2B5EF4-FFF2-40B4-BE49-F238E27FC236}">
+                <a16:creationId xmlns:a16="http://schemas.microsoft.com/office/drawing/2014/main" id="{7D96243B-ECED-4B71-8E06-AE9A285EAD20}"/>
+              </a:ext>
+              <a:ext uri="{C183D7F6-B498-43B3-948B-1728B52AA6E4}">
+                <adec:decorative xmlns:adec="http://schemas.microsoft.com/office/drawing/2017/decorative" val="1"/>
+              </a:ext>
+            </a:extLst>
+          </p:cNvPr>
+          <p:cNvSpPr>
+            <a:spLocks noGrp="1" noRot="1" noChangeAspect="1" noMove="1" noResize="1" noEditPoints="1" noAdjustHandles="1" noChangeArrowheads="1" noChangeShapeType="1" noTextEdit="1"/>
+          </p:cNvSpPr>
+          <p:nvPr>
+            <p:extLst>
+              <p:ext uri="{386F3935-93C4-4BCD-93E2-E3B085C9AB24}">
+                <p16:designElem xmlns:p16="http://schemas.microsoft.com/office/powerpoint/2015/main" val="1"/>
+              </p:ext>
+            </p:extLst>
+          </p:nvPr>
+        </p:nvSpPr>
+        <p:spPr>
+          <a:xfrm rot="5400000" flipH="1">
+            <a:off x="-425002" y="852793"/>
+            <a:ext cx="6858001" cy="5152412"/>
+          </a:xfrm>
+          <a:prstGeom prst="rect">
+            <a:avLst/>
+          </a:prstGeom>
+          <a:gradFill>
+            <a:gsLst>
+              <a:gs pos="0">
+                <a:srgbClr val="000000">
+                  <a:alpha val="0"/>
+                </a:srgbClr>
+              </a:gs>
+              <a:gs pos="99000">
+                <a:schemeClr val="accent1">
+                  <a:alpha val="11000"/>
+                </a:schemeClr>
+              </a:gs>
+            </a:gsLst>
+            <a:lin ang="7800000" scaled="0"/>
+          </a:gradFill>
+          <a:ln>
+            <a:noFill/>
+          </a:ln>
+        </p:spPr>
+        <p:style>
+          <a:lnRef idx="2">
+            <a:schemeClr val="accent1">
+              <a:shade val="50000"/>
+            </a:schemeClr>
+          </a:lnRef>
+          <a:fillRef idx="1">
+            <a:schemeClr val="accent1"/>
+          </a:fillRef>
+          <a:effectRef idx="0">
+            <a:schemeClr val="accent1"/>
+          </a:effectRef>
+          <a:fontRef idx="minor">
+            <a:schemeClr val="lt1"/>
+          </a:fontRef>
+        </p:style>
+        <p:txBody>
+          <a:bodyPr rtlCol="0" anchor="ctr"/>
+          <a:lstStyle/>
+          <a:p>
+            <a:pPr algn="ctr"/>
+            <a:endParaRPr lang="en-US"/>
+          </a:p>
+        </p:txBody>
+      </p:sp>
+      <p:sp>
+        <p:nvSpPr>
+          <p:cNvPr id="18" name="Oval 17">
+            <a:extLst>
+              <a:ext uri="{FF2B5EF4-FFF2-40B4-BE49-F238E27FC236}">
+                <a16:creationId xmlns:a16="http://schemas.microsoft.com/office/drawing/2014/main" id="{A09989E4-EFDC-4A90-A633-E0525FB4139E}"/>
+              </a:ext>
+              <a:ext uri="{C183D7F6-B498-43B3-948B-1728B52AA6E4}">
+                <adec:decorative xmlns:adec="http://schemas.microsoft.com/office/drawing/2017/decorative" val="1"/>
+              </a:ext>
+            </a:extLst>
+          </p:cNvPr>
+          <p:cNvSpPr>
+            <a:spLocks noGrp="1" noRot="1" noChangeAspect="1" noMove="1" noResize="1" noEditPoints="1" noAdjustHandles="1" noChangeArrowheads="1" noChangeShapeType="1" noTextEdit="1"/>
+          </p:cNvSpPr>
+          <p:nvPr>
+            <p:extLst>
+              <p:ext uri="{386F3935-93C4-4BCD-93E2-E3B085C9AB24}">
+                <p16:designElem xmlns:p16="http://schemas.microsoft.com/office/powerpoint/2015/main" val="1"/>
+              </p:ext>
+            </p:extLst>
+          </p:nvPr>
+        </p:nvSpPr>
+        <p:spPr>
+          <a:xfrm rot="6097846">
+            <a:off x="818753" y="1128497"/>
+            <a:ext cx="4318303" cy="4318303"/>
+          </a:xfrm>
+          <a:prstGeom prst="ellipse">
+            <a:avLst/>
+          </a:prstGeom>
+          <a:gradFill>
+            <a:gsLst>
+              <a:gs pos="39000">
+                <a:schemeClr val="accent1">
+                  <a:alpha val="0"/>
+                </a:schemeClr>
+              </a:gs>
+              <a:gs pos="100000">
+                <a:schemeClr val="accent1">
+                  <a:lumMod val="60000"/>
+                  <a:lumOff val="40000"/>
+                  <a:alpha val="15000"/>
+                </a:schemeClr>
+              </a:gs>
+            </a:gsLst>
+            <a:lin ang="17400000" scaled="0"/>
+          </a:gradFill>
+          <a:ln>
+            <a:noFill/>
+          </a:ln>
+        </p:spPr>
+        <p:style>
+          <a:lnRef idx="2">
+            <a:schemeClr val="accent1">
+              <a:shade val="50000"/>
+            </a:schemeClr>
+          </a:lnRef>
+          <a:fillRef idx="1">
+            <a:schemeClr val="accent1"/>
+          </a:fillRef>
+          <a:effectRef idx="0">
+            <a:schemeClr val="accent1"/>
+          </a:effectRef>
+          <a:fontRef idx="minor">
+            <a:schemeClr val="lt1"/>
+          </a:fontRef>
+        </p:style>
+        <p:txBody>
+          <a:bodyPr rtlCol="0" anchor="ctr"/>
+          <a:lstStyle/>
+          <a:p>
+            <a:pPr algn="ctr"/>
+            <a:endParaRPr lang="en-US" dirty="0"/>
+          </a:p>
+        </p:txBody>
+      </p:sp>
+      <p:sp>
+        <p:nvSpPr>
+          <p:cNvPr id="2" name="Title 1">
+            <a:extLst>
+              <a:ext uri="{FF2B5EF4-FFF2-40B4-BE49-F238E27FC236}">
+                <a16:creationId xmlns:a16="http://schemas.microsoft.com/office/drawing/2014/main" id="{78DF5BE9-FDD7-CDBB-5A97-B0B6AACBBB65}"/>
+              </a:ext>
+            </a:extLst>
+          </p:cNvPr>
+          <p:cNvSpPr>
+            <a:spLocks noGrp="1"/>
+          </p:cNvSpPr>
+          <p:nvPr>
+            <p:ph type="ctrTitle"/>
+          </p:nvPr>
+        </p:nvSpPr>
+        <p:spPr>
+          <a:xfrm>
+            <a:off x="826396" y="586855"/>
+            <a:ext cx="4230100" cy="3387497"/>
+          </a:xfrm>
+        </p:spPr>
+        <p:txBody>
+          <a:bodyPr vert="horz" lIns="91440" tIns="45720" rIns="91440" bIns="45720" rtlCol="0" anchor="b">
+            <a:normAutofit/>
+          </a:bodyPr>
+          <a:lstStyle/>
+          <a:p>
+            <a:pPr algn="r"/>
+            <a:r>
+              <a:rPr lang="en-US" sz="4000" kern="1200">
+                <a:solidFill>
+                  <a:srgbClr val="FFFFFF"/>
+                </a:solidFill>
+                <a:latin typeface="+mj-lt"/>
+                <a:ea typeface="+mj-ea"/>
+                <a:cs typeface="+mj-cs"/>
+              </a:rPr>
+              <a:t>Επίδραση Μεγέθους Πακέτου (Packet Size)</a:t>
+            </a:r>
+          </a:p>
+        </p:txBody>
+      </p:sp>
+      <p:sp>
+        <p:nvSpPr>
+          <p:cNvPr id="3" name="Subtitle 2">
+            <a:extLst>
+              <a:ext uri="{FF2B5EF4-FFF2-40B4-BE49-F238E27FC236}">
+                <a16:creationId xmlns:a16="http://schemas.microsoft.com/office/drawing/2014/main" id="{DC323905-E22C-E29C-C2A3-C05E0FF14B0E}"/>
+              </a:ext>
+            </a:extLst>
+          </p:cNvPr>
+          <p:cNvSpPr>
+            <a:spLocks noGrp="1"/>
+          </p:cNvSpPr>
+          <p:nvPr>
+            <p:ph type="subTitle" idx="1"/>
+          </p:nvPr>
+        </p:nvSpPr>
+        <p:spPr>
+          <a:xfrm>
+            <a:off x="6503158" y="649480"/>
+            <a:ext cx="4862447" cy="5546047"/>
+          </a:xfrm>
+        </p:spPr>
+        <p:txBody>
+          <a:bodyPr vert="horz" lIns="91440" tIns="45720" rIns="91440" bIns="45720" rtlCol="0" anchor="ctr">
+            <a:normAutofit/>
+          </a:bodyPr>
+          <a:lstStyle/>
+          <a:p>
+            <a:pPr algn="l"/>
+            <a:r>
+              <a:rPr lang="en-US" sz="2000" b="1" dirty="0"/>
+              <a:t>Η </a:t>
+            </a:r>
+            <a:r>
+              <a:rPr lang="en-US" sz="2000" b="1" dirty="0" err="1"/>
+              <a:t>Μεθοδολογί</a:t>
+            </a:r>
+            <a:r>
+              <a:rPr lang="en-US" sz="2000" b="1" dirty="0"/>
+              <a:t>α:  </a:t>
+            </a:r>
+            <a:br>
+              <a:rPr lang="en-US" sz="2000" dirty="0"/>
+            </a:br>
+            <a:r>
+              <a:rPr lang="en-US" sz="2000" dirty="0"/>
+              <a:t>Κρατάμε σταθερά: Bandwidth (1 Mbps) και Ρυθμό Άφιξης (200 pkts/s).  </a:t>
+            </a:r>
+            <a:r>
+              <a:rPr lang="en-US" sz="2000" dirty="0" err="1"/>
+              <a:t>Μετ</a:t>
+            </a:r>
+            <a:r>
+              <a:rPr lang="en-US" sz="2000" dirty="0"/>
+              <a:t>αβάλλουμε το Packet Size: 100, 1000, 3000, 5000 Bytes.</a:t>
+            </a:r>
+            <a:br>
+              <a:rPr lang="en-US" sz="2000" dirty="0"/>
+            </a:br>
+            <a:br>
+              <a:rPr lang="en-US" sz="2000" dirty="0"/>
+            </a:br>
+            <a:r>
+              <a:rPr lang="en-US" sz="2000" dirty="0"/>
+              <a:t>  </a:t>
+            </a:r>
+            <a:r>
+              <a:rPr lang="en-US" sz="2000" b="1" dirty="0" err="1"/>
+              <a:t>Γι</a:t>
+            </a:r>
+            <a:r>
+              <a:rPr lang="en-US" sz="2000" b="1" dirty="0"/>
+              <a:t>ατί το κάνουμε αυτό;  </a:t>
+            </a:r>
+            <a:br>
+              <a:rPr lang="en-US" sz="2000" dirty="0"/>
+            </a:br>
+            <a:r>
+              <a:rPr lang="en-US" sz="2000" dirty="0"/>
+              <a:t>Το μέγεθος πακέτου επηρεάζει άμεσα τον φόρτο (Load) και τον Χρόνο Μετάδοσης (Transmission Delay).  Load=Packet </a:t>
+            </a:r>
+            <a:r>
+              <a:rPr lang="en-US" sz="2000" dirty="0" err="1"/>
+              <a:t>Size×Rate</a:t>
+            </a:r>
+            <a:r>
+              <a:rPr lang="en-US" sz="2000" dirty="0"/>
+              <a:t>. </a:t>
+            </a:r>
+            <a:br>
+              <a:rPr lang="en-US" sz="2000" dirty="0"/>
+            </a:br>
+            <a:br>
+              <a:rPr lang="en-US" sz="2000" dirty="0"/>
+            </a:br>
+            <a:r>
+              <a:rPr lang="en-US" sz="2000" dirty="0"/>
+              <a:t> </a:t>
+            </a:r>
+            <a:r>
+              <a:rPr lang="en-US" sz="2000" b="1" dirty="0" err="1"/>
+              <a:t>Θεωρητική</a:t>
+            </a:r>
+            <a:r>
+              <a:rPr lang="en-US" sz="2000" b="1" dirty="0"/>
+              <a:t> </a:t>
+            </a:r>
+            <a:r>
+              <a:rPr lang="en-US" sz="2000" b="1" dirty="0" err="1"/>
+              <a:t>Πρό</a:t>
+            </a:r>
+            <a:r>
+              <a:rPr lang="en-US" sz="2000" b="1" dirty="0"/>
+              <a:t>βλεψη:  </a:t>
+            </a:r>
+            <a:br>
+              <a:rPr lang="el-GR" sz="2000" b="1" dirty="0"/>
+            </a:br>
+            <a:r>
+              <a:rPr lang="en-US" sz="2000" dirty="0"/>
+              <a:t>100 Bytes: Load 0.16 Mbps (Άνετο).  5000 Bytes: Load 8.0 Mbps (</a:t>
+            </a:r>
+            <a:r>
+              <a:rPr lang="en-US" sz="2000" dirty="0" err="1"/>
+              <a:t>Ακρ</a:t>
+            </a:r>
+            <a:r>
+              <a:rPr lang="en-US" sz="2000" dirty="0"/>
+              <a:t>αία Συμφόρηση).</a:t>
+            </a:r>
+          </a:p>
+        </p:txBody>
+      </p:sp>
+    </p:spTree>
+    <p:extLst>
+      <p:ext uri="{BB962C8B-B14F-4D97-AF65-F5344CB8AC3E}">
+        <p14:creationId xmlns:p14="http://schemas.microsoft.com/office/powerpoint/2010/main" val="1374451285"/>
+      </p:ext>
+    </p:extLst>
+  </p:cSld>
+  <p:clrMapOvr>
+    <a:masterClrMapping/>
+  </p:clrMapOvr>
+</p:sld>
+</file>
+
+<file path=ppt/slides/slide15.xml><?xml version="1.0" encoding="utf-8"?>
+<p:sld xmlns:a="http://schemas.openxmlformats.org/drawingml/2006/main" xmlns:r="http://schemas.openxmlformats.org/officeDocument/2006/relationships" xmlns:p="http://schemas.openxmlformats.org/presentationml/2006/main">
+  <p:cSld>
+    <p:bg>
+      <p:bgPr>
+        <a:solidFill>
+          <a:schemeClr val="bg1"/>
+        </a:solidFill>
+        <a:effectLst/>
+      </p:bgPr>
+    </p:bg>
+    <p:spTree>
+      <p:nvGrpSpPr>
+        <p:cNvPr id="1" name=""/>
+        <p:cNvGrpSpPr/>
+        <p:nvPr/>
+      </p:nvGrpSpPr>
+      <p:grpSpPr>
+        <a:xfrm>
+          <a:off x="0" y="0"/>
+          <a:ext cx="0" cy="0"/>
+          <a:chOff x="0" y="0"/>
+          <a:chExt cx="0" cy="0"/>
+        </a:xfrm>
+      </p:grpSpPr>
+      <p:sp useBgFill="1">
+        <p:nvSpPr>
+          <p:cNvPr id="9" name="Rectangle 8">
+            <a:extLst>
+              <a:ext uri="{FF2B5EF4-FFF2-40B4-BE49-F238E27FC236}">
+                <a16:creationId xmlns:a16="http://schemas.microsoft.com/office/drawing/2014/main" id="{1B15ED52-F352-441B-82BF-E0EA34836D08}"/>
+              </a:ext>
+              <a:ext uri="{C183D7F6-B498-43B3-948B-1728B52AA6E4}">
+                <adec:decorative xmlns:adec="http://schemas.microsoft.com/office/drawing/2017/decorative" val="1"/>
+              </a:ext>
+            </a:extLst>
+          </p:cNvPr>
+          <p:cNvSpPr>
+            <a:spLocks noGrp="1" noRot="1" noChangeAspect="1" noMove="1" noResize="1" noEditPoints="1" noAdjustHandles="1" noChangeArrowheads="1" noChangeShapeType="1" noTextEdit="1"/>
+          </p:cNvSpPr>
+          <p:nvPr>
+            <p:extLst>
+              <p:ext uri="{386F3935-93C4-4BCD-93E2-E3B085C9AB24}">
+                <p16:designElem xmlns:p16="http://schemas.microsoft.com/office/powerpoint/2015/main" val="1"/>
+              </p:ext>
+            </p:extLst>
+          </p:nvPr>
+        </p:nvSpPr>
+        <p:spPr>
+          <a:xfrm>
+            <a:off x="0" y="0"/>
+            <a:ext cx="12192000" cy="6858000"/>
+          </a:xfrm>
+          <a:prstGeom prst="rect">
+            <a:avLst/>
+          </a:prstGeom>
+          <a:ln w="12700" cap="flat" cmpd="sng" algn="ctr">
+            <a:noFill/>
+            <a:prstDash val="solid"/>
+            <a:miter lim="800000"/>
+          </a:ln>
+          <a:effectLst/>
+          <a:extLst>
+            <a:ext uri="{91240B29-F687-4F45-9708-019B960494DF}">
+              <a14:hiddenLine xmlns:a14="http://schemas.microsoft.com/office/drawing/2010/main" w="12700" cap="flat" cmpd="sng" algn="ctr">
+                <a:solidFill>
+                  <a:schemeClr val="accent1">
+                    <a:shade val="50000"/>
+                  </a:schemeClr>
+                </a:solidFill>
+                <a:prstDash val="solid"/>
+                <a:miter lim="800000"/>
+              </a14:hiddenLine>
+            </a:ext>
+          </a:extLst>
+        </p:spPr>
+        <p:style>
+          <a:lnRef idx="2">
+            <a:schemeClr val="accent1">
+              <a:shade val="50000"/>
+            </a:schemeClr>
+          </a:lnRef>
+          <a:fillRef idx="1">
+            <a:schemeClr val="accent1"/>
+          </a:fillRef>
+          <a:effectRef idx="0">
+            <a:schemeClr val="accent1"/>
+          </a:effectRef>
+          <a:fontRef idx="minor">
+            <a:schemeClr val="lt1"/>
+          </a:fontRef>
+        </p:style>
+        <p:txBody>
+          <a:bodyPr rtlCol="0" anchor="ctr"/>
+          <a:lstStyle/>
+          <a:p>
+            <a:pPr algn="ctr"/>
+            <a:endParaRPr lang="en-US"/>
+          </a:p>
+        </p:txBody>
+      </p:sp>
+      <p:sp>
+        <p:nvSpPr>
+          <p:cNvPr id="11" name="Rectangle 10">
+            <a:extLst>
+              <a:ext uri="{FF2B5EF4-FFF2-40B4-BE49-F238E27FC236}">
+                <a16:creationId xmlns:a16="http://schemas.microsoft.com/office/drawing/2014/main" id="{3B2E3793-BFE6-45A2-9B7B-E18844431C99}"/>
+              </a:ext>
+              <a:ext uri="{C183D7F6-B498-43B3-948B-1728B52AA6E4}">
+                <adec:decorative xmlns:adec="http://schemas.microsoft.com/office/drawing/2017/decorative" val="1"/>
+              </a:ext>
+            </a:extLst>
+          </p:cNvPr>
+          <p:cNvSpPr>
+            <a:spLocks noGrp="1" noRot="1" noChangeAspect="1" noMove="1" noResize="1" noEditPoints="1" noAdjustHandles="1" noChangeArrowheads="1" noChangeShapeType="1" noTextEdit="1"/>
+          </p:cNvSpPr>
+          <p:nvPr>
+            <p:extLst>
+              <p:ext uri="{386F3935-93C4-4BCD-93E2-E3B085C9AB24}">
+                <p16:designElem xmlns:p16="http://schemas.microsoft.com/office/powerpoint/2015/main" val="1"/>
+              </p:ext>
+            </p:extLst>
+          </p:nvPr>
+        </p:nvSpPr>
+        <p:spPr>
+          <a:xfrm flipH="1">
+            <a:off x="-1" y="-1"/>
+            <a:ext cx="12191998" cy="1590742"/>
+          </a:xfrm>
+          <a:prstGeom prst="rect">
+            <a:avLst/>
+          </a:prstGeom>
+          <a:gradFill>
+            <a:gsLst>
+              <a:gs pos="0">
+                <a:srgbClr val="000000"/>
+              </a:gs>
+              <a:gs pos="100000">
+                <a:schemeClr val="accent1">
+                  <a:lumMod val="75000"/>
+                </a:schemeClr>
+              </a:gs>
+            </a:gsLst>
+            <a:lin ang="8400000" scaled="0"/>
+          </a:gradFill>
+          <a:ln>
+            <a:noFill/>
+          </a:ln>
+        </p:spPr>
+        <p:style>
+          <a:lnRef idx="2">
+            <a:schemeClr val="accent1">
+              <a:shade val="50000"/>
+            </a:schemeClr>
+          </a:lnRef>
+          <a:fillRef idx="1">
+            <a:schemeClr val="accent1"/>
+          </a:fillRef>
+          <a:effectRef idx="0">
+            <a:schemeClr val="accent1"/>
+          </a:effectRef>
+          <a:fontRef idx="minor">
+            <a:schemeClr val="lt1"/>
+          </a:fontRef>
+        </p:style>
+        <p:txBody>
+          <a:bodyPr rtlCol="0" anchor="ctr"/>
+          <a:lstStyle/>
+          <a:p>
+            <a:pPr algn="ctr"/>
+            <a:endParaRPr lang="en-US"/>
+          </a:p>
+        </p:txBody>
+      </p:sp>
+      <p:sp>
+        <p:nvSpPr>
+          <p:cNvPr id="13" name="Rectangle 12">
+            <a:extLst>
+              <a:ext uri="{FF2B5EF4-FFF2-40B4-BE49-F238E27FC236}">
+                <a16:creationId xmlns:a16="http://schemas.microsoft.com/office/drawing/2014/main" id="{BC4C4868-CB8F-4AF9-9CDB-8108F2C19B67}"/>
+              </a:ext>
+              <a:ext uri="{C183D7F6-B498-43B3-948B-1728B52AA6E4}">
+                <adec:decorative xmlns:adec="http://schemas.microsoft.com/office/drawing/2017/decorative" val="1"/>
+              </a:ext>
+            </a:extLst>
+          </p:cNvPr>
+          <p:cNvSpPr>
+            <a:spLocks noGrp="1" noRot="1" noChangeAspect="1" noMove="1" noResize="1" noEditPoints="1" noAdjustHandles="1" noChangeArrowheads="1" noChangeShapeType="1" noTextEdit="1"/>
+          </p:cNvSpPr>
+          <p:nvPr>
+            <p:extLst>
+              <p:ext uri="{386F3935-93C4-4BCD-93E2-E3B085C9AB24}">
+                <p16:designElem xmlns:p16="http://schemas.microsoft.com/office/powerpoint/2015/main" val="1"/>
+              </p:ext>
+            </p:extLst>
+          </p:nvPr>
+        </p:nvSpPr>
+        <p:spPr>
+          <a:xfrm rot="10800000" flipH="1">
+            <a:off x="-3" y="0"/>
+            <a:ext cx="8115306" cy="1590742"/>
+          </a:xfrm>
+          <a:prstGeom prst="rect">
+            <a:avLst/>
+          </a:prstGeom>
+          <a:gradFill>
+            <a:gsLst>
+              <a:gs pos="20000">
+                <a:schemeClr val="accent1">
+                  <a:alpha val="0"/>
+                </a:schemeClr>
+              </a:gs>
+              <a:gs pos="100000">
+                <a:schemeClr val="accent1">
+                  <a:lumMod val="50000"/>
+                  <a:alpha val="55000"/>
+                </a:schemeClr>
+              </a:gs>
+            </a:gsLst>
+            <a:lin ang="13800000" scaled="0"/>
+          </a:gradFill>
+          <a:ln>
+            <a:noFill/>
+          </a:ln>
+        </p:spPr>
+        <p:style>
+          <a:lnRef idx="2">
+            <a:schemeClr val="accent1">
+              <a:shade val="50000"/>
+            </a:schemeClr>
+          </a:lnRef>
+          <a:fillRef idx="1">
+            <a:schemeClr val="accent1"/>
+          </a:fillRef>
+          <a:effectRef idx="0">
+            <a:schemeClr val="accent1"/>
+          </a:effectRef>
+          <a:fontRef idx="minor">
+            <a:schemeClr val="lt1"/>
+          </a:fontRef>
+        </p:style>
+        <p:txBody>
+          <a:bodyPr rtlCol="0" anchor="ctr"/>
+          <a:lstStyle/>
+          <a:p>
+            <a:pPr algn="ctr"/>
+            <a:endParaRPr lang="en-US"/>
+          </a:p>
+        </p:txBody>
+      </p:sp>
+      <p:sp>
+        <p:nvSpPr>
+          <p:cNvPr id="15" name="Rectangle 14">
+            <a:extLst>
+              <a:ext uri="{FF2B5EF4-FFF2-40B4-BE49-F238E27FC236}">
+                <a16:creationId xmlns:a16="http://schemas.microsoft.com/office/drawing/2014/main" id="{375E0459-6403-40CD-989D-56A4407CA12E}"/>
+              </a:ext>
+              <a:ext uri="{C183D7F6-B498-43B3-948B-1728B52AA6E4}">
+                <adec:decorative xmlns:adec="http://schemas.microsoft.com/office/drawing/2017/decorative" val="1"/>
+              </a:ext>
+            </a:extLst>
+          </p:cNvPr>
+          <p:cNvSpPr>
+            <a:spLocks noGrp="1" noRot="1" noChangeAspect="1" noMove="1" noResize="1" noEditPoints="1" noAdjustHandles="1" noChangeArrowheads="1" noChangeShapeType="1" noTextEdit="1"/>
+          </p:cNvSpPr>
+          <p:nvPr>
+            <p:extLst>
+              <p:ext uri="{386F3935-93C4-4BCD-93E2-E3B085C9AB24}">
+                <p16:designElem xmlns:p16="http://schemas.microsoft.com/office/powerpoint/2015/main" val="1"/>
+              </p:ext>
+            </p:extLst>
+          </p:nvPr>
+        </p:nvSpPr>
+        <p:spPr>
+          <a:xfrm flipH="1">
+            <a:off x="8115299" y="-1"/>
+            <a:ext cx="4076698" cy="1590742"/>
+          </a:xfrm>
+          <a:prstGeom prst="rect">
+            <a:avLst/>
+          </a:prstGeom>
+          <a:gradFill>
+            <a:gsLst>
+              <a:gs pos="0">
+                <a:schemeClr val="accent1">
+                  <a:alpha val="66000"/>
+                </a:schemeClr>
+              </a:gs>
+              <a:gs pos="100000">
+                <a:srgbClr val="000000">
+                  <a:alpha val="30000"/>
+                </a:srgbClr>
+              </a:gs>
+            </a:gsLst>
+            <a:lin ang="13200000" scaled="0"/>
+          </a:gradFill>
+          <a:ln>
+            <a:noFill/>
+          </a:ln>
+        </p:spPr>
+        <p:style>
+          <a:lnRef idx="2">
+            <a:schemeClr val="accent1">
+              <a:shade val="50000"/>
+            </a:schemeClr>
+          </a:lnRef>
+          <a:fillRef idx="1">
+            <a:schemeClr val="accent1"/>
+          </a:fillRef>
+          <a:effectRef idx="0">
+            <a:schemeClr val="accent1"/>
+          </a:effectRef>
+          <a:fontRef idx="minor">
+            <a:schemeClr val="lt1"/>
+          </a:fontRef>
+        </p:style>
+        <p:txBody>
+          <a:bodyPr rtlCol="0" anchor="ctr"/>
+          <a:lstStyle/>
+          <a:p>
+            <a:pPr algn="ctr"/>
+            <a:endParaRPr lang="en-US"/>
+          </a:p>
+        </p:txBody>
+      </p:sp>
+      <p:sp>
+        <p:nvSpPr>
+          <p:cNvPr id="17" name="Rectangle 16">
+            <a:extLst>
+              <a:ext uri="{FF2B5EF4-FFF2-40B4-BE49-F238E27FC236}">
+                <a16:creationId xmlns:a16="http://schemas.microsoft.com/office/drawing/2014/main" id="{53E5B1A8-3AC9-4BD1-9BBC-78CA94F2D1BA}"/>
+              </a:ext>
+              <a:ext uri="{C183D7F6-B498-43B3-948B-1728B52AA6E4}">
+                <adec:decorative xmlns:adec="http://schemas.microsoft.com/office/drawing/2017/decorative" val="1"/>
+              </a:ext>
+            </a:extLst>
+          </p:cNvPr>
+          <p:cNvSpPr>
+            <a:spLocks noGrp="1" noRot="1" noChangeAspect="1" noMove="1" noResize="1" noEditPoints="1" noAdjustHandles="1" noChangeArrowheads="1" noChangeShapeType="1" noTextEdit="1"/>
+          </p:cNvSpPr>
+          <p:nvPr>
+            <p:extLst>
+              <p:ext uri="{386F3935-93C4-4BCD-93E2-E3B085C9AB24}">
+                <p16:designElem xmlns:p16="http://schemas.microsoft.com/office/powerpoint/2015/main" val="1"/>
+              </p:ext>
+            </p:extLst>
+          </p:nvPr>
+        </p:nvSpPr>
+        <p:spPr>
+          <a:xfrm>
+            <a:off x="459350" y="-1"/>
+            <a:ext cx="11732646" cy="1597433"/>
+          </a:xfrm>
+          <a:prstGeom prst="rect">
+            <a:avLst/>
+          </a:prstGeom>
+          <a:gradFill>
+            <a:gsLst>
+              <a:gs pos="50000">
+                <a:srgbClr val="000000">
+                  <a:alpha val="0"/>
+                </a:srgbClr>
+              </a:gs>
+              <a:gs pos="99000">
+                <a:schemeClr val="accent1">
+                  <a:lumMod val="50000"/>
+                  <a:alpha val="52000"/>
+                </a:schemeClr>
+              </a:gs>
+            </a:gsLst>
+            <a:lin ang="16800000" scaled="0"/>
+          </a:gradFill>
+          <a:ln>
+            <a:noFill/>
+          </a:ln>
+        </p:spPr>
+        <p:style>
+          <a:lnRef idx="2">
+            <a:schemeClr val="accent1">
+              <a:shade val="50000"/>
+            </a:schemeClr>
+          </a:lnRef>
+          <a:fillRef idx="1">
+            <a:schemeClr val="accent1"/>
+          </a:fillRef>
+          <a:effectRef idx="0">
+            <a:schemeClr val="accent1"/>
+          </a:effectRef>
+          <a:fontRef idx="minor">
+            <a:schemeClr val="lt1"/>
+          </a:fontRef>
+        </p:style>
+        <p:txBody>
+          <a:bodyPr rtlCol="0" anchor="ctr"/>
+          <a:lstStyle/>
+          <a:p>
+            <a:pPr algn="ctr"/>
+            <a:endParaRPr lang="en-US"/>
+          </a:p>
+        </p:txBody>
+      </p:sp>
+      <p:sp>
+        <p:nvSpPr>
+          <p:cNvPr id="2" name="Title 1">
+            <a:extLst>
+              <a:ext uri="{FF2B5EF4-FFF2-40B4-BE49-F238E27FC236}">
+                <a16:creationId xmlns:a16="http://schemas.microsoft.com/office/drawing/2014/main" id="{C24CCF7B-6909-711E-0280-2DC3690FF0C1}"/>
+              </a:ext>
+            </a:extLst>
+          </p:cNvPr>
+          <p:cNvSpPr>
+            <a:spLocks noGrp="1"/>
+          </p:cNvSpPr>
+          <p:nvPr>
+            <p:ph type="ctrTitle"/>
+          </p:nvPr>
+        </p:nvSpPr>
+        <p:spPr>
+          <a:xfrm>
+            <a:off x="1371599" y="294538"/>
+            <a:ext cx="9895951" cy="1033669"/>
+          </a:xfrm>
+        </p:spPr>
+        <p:txBody>
+          <a:bodyPr vert="horz" lIns="91440" tIns="45720" rIns="91440" bIns="45720" rtlCol="0" anchor="ctr">
+            <a:normAutofit/>
+          </a:bodyPr>
+          <a:lstStyle/>
+          <a:p>
+            <a:pPr algn="l"/>
+            <a:r>
+              <a:rPr lang="en-US" sz="3400" kern="1200" dirty="0" err="1">
+                <a:solidFill>
+                  <a:srgbClr val="FFFFFF"/>
+                </a:solidFill>
+                <a:latin typeface="+mj-lt"/>
+                <a:ea typeface="+mj-ea"/>
+                <a:cs typeface="+mj-cs"/>
+              </a:rPr>
+              <a:t>Μικρά</a:t>
+            </a:r>
+            <a:r>
+              <a:rPr lang="en-US" sz="3400" kern="1200" dirty="0">
+                <a:solidFill>
+                  <a:srgbClr val="FFFFFF"/>
+                </a:solidFill>
+                <a:latin typeface="+mj-lt"/>
+                <a:ea typeface="+mj-ea"/>
+                <a:cs typeface="+mj-cs"/>
+              </a:rPr>
+              <a:t>(100bytes) </a:t>
+            </a:r>
+            <a:r>
+              <a:rPr lang="en-US" sz="3400" kern="1200" dirty="0" err="1">
+                <a:solidFill>
+                  <a:srgbClr val="FFFFFF"/>
+                </a:solidFill>
+                <a:latin typeface="+mj-lt"/>
+                <a:ea typeface="+mj-ea"/>
+                <a:cs typeface="+mj-cs"/>
+              </a:rPr>
+              <a:t>ενάντι</a:t>
+            </a:r>
+            <a:r>
+              <a:rPr lang="en-US" sz="3400" kern="1200" dirty="0">
+                <a:solidFill>
+                  <a:srgbClr val="FFFFFF"/>
+                </a:solidFill>
+                <a:latin typeface="+mj-lt"/>
+                <a:ea typeface="+mj-ea"/>
+                <a:cs typeface="+mj-cs"/>
+              </a:rPr>
+              <a:t>ας Μεσαία Πακέτα(1000bytes)</a:t>
+            </a:r>
+          </a:p>
+        </p:txBody>
+      </p:sp>
+      <p:sp>
+        <p:nvSpPr>
+          <p:cNvPr id="4" name="Rectangle 1">
+            <a:extLst>
+              <a:ext uri="{FF2B5EF4-FFF2-40B4-BE49-F238E27FC236}">
+                <a16:creationId xmlns:a16="http://schemas.microsoft.com/office/drawing/2014/main" id="{A69C52CF-8706-E878-135C-CC7540AD8A31}"/>
+              </a:ext>
+            </a:extLst>
+          </p:cNvPr>
+          <p:cNvSpPr>
+            <a:spLocks noGrp="1" noChangeArrowheads="1"/>
+          </p:cNvSpPr>
+          <p:nvPr>
+            <p:ph type="subTitle" idx="1"/>
+          </p:nvPr>
+        </p:nvSpPr>
+        <p:spPr bwMode="auto">
+          <a:xfrm>
+            <a:off x="1371599" y="2318197"/>
+            <a:ext cx="9724031" cy="3683358"/>
+          </a:xfrm>
+          <a:prstGeom prst="rect">
+            <a:avLst/>
+          </a:prstGeom>
+          <a:extLst>
+            <a:ext uri="{909E8E84-426E-40DD-AFC4-6F175D3DCCD1}">
+              <a14:hiddenFill xmlns:a14="http://schemas.microsoft.com/office/drawing/2010/main">
+                <a:solidFill>
+                  <a:schemeClr val="accent1"/>
+                </a:solidFill>
+              </a14:hiddenFill>
+            </a:ext>
+            <a:ext uri="{91240B29-F687-4F45-9708-019B960494DF}">
+              <a14:hiddenLine xmlns:a14="http://schemas.microsoft.com/office/drawing/2010/main" w="9525">
+                <a:solidFill>
+                  <a:schemeClr val="tx1"/>
+                </a:solidFill>
+                <a:miter lim="800000"/>
+                <a:headEnd/>
+                <a:tailEnd/>
+              </a14:hiddenLine>
+            </a:ext>
+            <a:ext uri="{AF507438-7753-43E0-B8FC-AC1667EBCBE1}">
+              <a14:hiddenEffects xmlns:a14="http://schemas.microsoft.com/office/drawing/2010/main">
+                <a:effectLst>
+                  <a:outerShdw dist="35921" dir="2700000" algn="ctr" rotWithShape="0">
+                    <a:schemeClr val="bg2"/>
+                  </a:outerShdw>
+                </a:effectLst>
+              </a14:hiddenEffects>
+            </a:ext>
+          </a:extLst>
+        </p:spPr>
+        <p:txBody>
+          <a:bodyPr vert="horz" lIns="91440" tIns="45720" rIns="91440" bIns="45720" numCol="1" rtlCol="0" anchor="ctr" anchorCtr="0" compatLnSpc="1">
+            <a:prstTxWarp prst="textNoShape">
+              <a:avLst/>
+            </a:prstTxWarp>
+            <a:normAutofit/>
+          </a:bodyPr>
+          <a:lstStyle/>
+          <a:p>
+            <a:pPr marL="0" marR="0" lvl="0" indent="-228600" algn="l" fontAlgn="base">
+              <a:spcBef>
+                <a:spcPct val="0"/>
+              </a:spcBef>
+              <a:spcAft>
+                <a:spcPts val="600"/>
+              </a:spcAft>
+              <a:buClrTx/>
+              <a:buSzTx/>
+              <a:buFont typeface="Arial" panose="020B0604020202020204" pitchFamily="34" charset="0"/>
+              <a:buChar char="•"/>
+              <a:tabLst/>
+            </a:pPr>
+            <a:r>
+              <a:rPr kumimoji="0" lang="en-US" altLang="en-US" sz="2000" b="1" i="0" u="none" strike="noStrike" cap="none" normalizeH="0" baseline="0" dirty="0" err="1">
+                <a:ln>
+                  <a:noFill/>
+                </a:ln>
+                <a:effectLst/>
+              </a:rPr>
+              <a:t>Μικρά</a:t>
+            </a:r>
+            <a:r>
+              <a:rPr kumimoji="0" lang="en-US" altLang="en-US" sz="2000" b="1" i="0" u="none" strike="noStrike" cap="none" normalizeH="0" baseline="0" dirty="0">
+                <a:ln>
+                  <a:noFill/>
+                </a:ln>
+                <a:effectLst/>
+              </a:rPr>
+              <a:t> Πα</a:t>
+            </a:r>
+            <a:r>
+              <a:rPr kumimoji="0" lang="en-US" altLang="en-US" sz="2000" b="1" i="0" u="none" strike="noStrike" cap="none" normalizeH="0" baseline="0" dirty="0" err="1">
+                <a:ln>
+                  <a:noFill/>
+                </a:ln>
+                <a:effectLst/>
+              </a:rPr>
+              <a:t>κέτ</a:t>
+            </a:r>
+            <a:r>
+              <a:rPr kumimoji="0" lang="en-US" altLang="en-US" sz="2000" b="1" i="0" u="none" strike="noStrike" cap="none" normalizeH="0" baseline="0" dirty="0">
+                <a:ln>
+                  <a:noFill/>
+                </a:ln>
+                <a:effectLst/>
+              </a:rPr>
+              <a:t>α (100 Bytes):</a:t>
+            </a:r>
+            <a:endParaRPr kumimoji="0" lang="en-US" altLang="en-US" sz="2000" b="0" i="0" u="none" strike="noStrike" cap="none" normalizeH="0" baseline="0" dirty="0">
+              <a:ln>
+                <a:noFill/>
+              </a:ln>
+              <a:effectLst/>
+            </a:endParaRPr>
+          </a:p>
+          <a:p>
+            <a:pPr marL="457200" marR="0" lvl="1" indent="-228600" algn="l" fontAlgn="base">
+              <a:spcBef>
+                <a:spcPct val="0"/>
+              </a:spcBef>
+              <a:spcAft>
+                <a:spcPts val="600"/>
+              </a:spcAft>
+              <a:buClrTx/>
+              <a:buSzTx/>
+              <a:buFont typeface="Arial" panose="020B0604020202020204" pitchFamily="34" charset="0"/>
+              <a:buChar char="•"/>
+              <a:tabLst/>
+            </a:pPr>
+            <a:r>
+              <a:rPr kumimoji="0" lang="en-US" altLang="en-US" b="1" i="0" u="none" strike="noStrike" cap="none" normalizeH="0" baseline="0" dirty="0">
+                <a:ln>
+                  <a:noFill/>
+                </a:ln>
+                <a:effectLst/>
+              </a:rPr>
+              <a:t>Κα</a:t>
+            </a:r>
+            <a:r>
+              <a:rPr kumimoji="0" lang="en-US" altLang="en-US" b="1" i="0" u="none" strike="noStrike" cap="none" normalizeH="0" baseline="0" dirty="0" err="1">
+                <a:ln>
+                  <a:noFill/>
+                </a:ln>
+                <a:effectLst/>
+              </a:rPr>
+              <a:t>τάστ</a:t>
+            </a:r>
+            <a:r>
+              <a:rPr kumimoji="0" lang="en-US" altLang="en-US" b="1" i="0" u="none" strike="noStrike" cap="none" normalizeH="0" baseline="0" dirty="0">
+                <a:ln>
+                  <a:noFill/>
+                </a:ln>
+                <a:effectLst/>
+              </a:rPr>
+              <a:t>αση:</a:t>
+            </a:r>
+            <a:r>
+              <a:rPr kumimoji="0" lang="en-US" altLang="en-US" b="0" i="0" u="none" strike="noStrike" cap="none" normalizeH="0" baseline="0" dirty="0">
+                <a:ln>
+                  <a:noFill/>
+                </a:ln>
+                <a:effectLst/>
+              </a:rPr>
+              <a:t> Το δίκτυο υπολειτουργεί.</a:t>
+            </a:r>
+          </a:p>
+          <a:p>
+            <a:pPr marL="457200" marR="0" lvl="1" indent="-228600" algn="l" fontAlgn="base">
+              <a:spcBef>
+                <a:spcPct val="0"/>
+              </a:spcBef>
+              <a:spcAft>
+                <a:spcPts val="600"/>
+              </a:spcAft>
+              <a:buClrTx/>
+              <a:buSzTx/>
+              <a:buFont typeface="Arial" panose="020B0604020202020204" pitchFamily="34" charset="0"/>
+              <a:buChar char="•"/>
+              <a:tabLst/>
+            </a:pPr>
+            <a:r>
+              <a:rPr kumimoji="0" lang="en-US" altLang="en-US" b="1" i="0" u="none" strike="noStrike" cap="none" normalizeH="0" baseline="0" dirty="0">
+                <a:ln>
+                  <a:noFill/>
+                </a:ln>
+                <a:effectLst/>
+              </a:rPr>
+              <a:t>Load:</a:t>
+            </a:r>
+            <a:r>
+              <a:rPr kumimoji="0" lang="en-US" altLang="en-US" b="0" i="0" u="none" strike="noStrike" cap="none" normalizeH="0" baseline="0" dirty="0">
+                <a:ln>
+                  <a:noFill/>
+                </a:ln>
+                <a:effectLst/>
+              </a:rPr>
+              <a:t> </a:t>
+            </a:r>
+            <a:r>
+              <a:rPr kumimoji="0" lang="en-US" altLang="en-US" b="0" i="0" u="none" strike="noStrike" cap="none" normalizeH="0" baseline="0" dirty="0" err="1">
+                <a:ln>
+                  <a:noFill/>
+                </a:ln>
+                <a:effectLst/>
+              </a:rPr>
+              <a:t>Μόλις</a:t>
+            </a:r>
+            <a:r>
+              <a:rPr kumimoji="0" lang="en-US" altLang="en-US" b="0" i="0" u="none" strike="noStrike" cap="none" normalizeH="0" baseline="0" dirty="0">
+                <a:ln>
+                  <a:noFill/>
+                </a:ln>
+                <a:effectLst/>
+              </a:rPr>
+              <a:t> 0.16 Mbps (</a:t>
+            </a:r>
+            <a:r>
+              <a:rPr kumimoji="0" lang="en-US" altLang="en-US" b="0" i="0" u="none" strike="noStrike" cap="none" normalizeH="0" baseline="0" dirty="0" err="1">
+                <a:ln>
+                  <a:noFill/>
+                </a:ln>
+                <a:effectLst/>
+              </a:rPr>
+              <a:t>σε</a:t>
+            </a:r>
+            <a:r>
+              <a:rPr kumimoji="0" lang="en-US" altLang="en-US" b="0" i="0" u="none" strike="noStrike" cap="none" normalizeH="0" baseline="0" dirty="0">
+                <a:ln>
+                  <a:noFill/>
+                </a:ln>
+                <a:effectLst/>
+              </a:rPr>
+              <a:t> κα</a:t>
+            </a:r>
+            <a:r>
+              <a:rPr kumimoji="0" lang="en-US" altLang="en-US" b="0" i="0" u="none" strike="noStrike" cap="none" normalizeH="0" baseline="0" dirty="0" err="1">
+                <a:ln>
+                  <a:noFill/>
+                </a:ln>
+                <a:effectLst/>
+              </a:rPr>
+              <a:t>νάλι</a:t>
+            </a:r>
+            <a:r>
+              <a:rPr kumimoji="0" lang="en-US" altLang="en-US" b="0" i="0" u="none" strike="noStrike" cap="none" normalizeH="0" baseline="0" dirty="0">
+                <a:ln>
+                  <a:noFill/>
+                </a:ln>
+                <a:effectLst/>
+              </a:rPr>
+              <a:t> 1 Mbps).</a:t>
+            </a:r>
+          </a:p>
+          <a:p>
+            <a:pPr marL="457200" marR="0" lvl="1" indent="-228600" algn="l" fontAlgn="base">
+              <a:spcBef>
+                <a:spcPct val="0"/>
+              </a:spcBef>
+              <a:spcAft>
+                <a:spcPts val="600"/>
+              </a:spcAft>
+              <a:buClrTx/>
+              <a:buSzTx/>
+              <a:buFont typeface="Arial" panose="020B0604020202020204" pitchFamily="34" charset="0"/>
+              <a:buChar char="•"/>
+              <a:tabLst/>
+            </a:pPr>
+            <a:r>
+              <a:rPr kumimoji="0" lang="en-US" altLang="en-US" b="1" i="0" u="none" strike="noStrike" cap="none" normalizeH="0" baseline="0" dirty="0">
+                <a:ln>
+                  <a:noFill/>
+                </a:ln>
+                <a:effectLst/>
+              </a:rPr>
+              <a:t>Απ</a:t>
+            </a:r>
+            <a:r>
+              <a:rPr kumimoji="0" lang="en-US" altLang="en-US" b="1" i="0" u="none" strike="noStrike" cap="none" normalizeH="0" baseline="0" dirty="0" err="1">
+                <a:ln>
+                  <a:noFill/>
+                </a:ln>
+                <a:effectLst/>
+              </a:rPr>
+              <a:t>οτέλεσμ</a:t>
+            </a:r>
+            <a:r>
+              <a:rPr kumimoji="0" lang="en-US" altLang="en-US" b="1" i="0" u="none" strike="noStrike" cap="none" normalizeH="0" baseline="0" dirty="0">
+                <a:ln>
+                  <a:noFill/>
+                </a:ln>
+                <a:effectLst/>
+              </a:rPr>
+              <a:t>α:</a:t>
+            </a:r>
+            <a:r>
+              <a:rPr kumimoji="0" lang="en-US" altLang="en-US" b="0" i="0" u="none" strike="noStrike" cap="none" normalizeH="0" baseline="0" dirty="0">
+                <a:ln>
+                  <a:noFill/>
+                </a:ln>
+                <a:effectLst/>
+              </a:rPr>
+              <a:t> Ουρά άδεια, Απώλειες </a:t>
+            </a:r>
+            <a:r>
+              <a:rPr kumimoji="0" lang="en-US" altLang="en-US" b="1" i="0" u="none" strike="noStrike" cap="none" normalizeH="0" baseline="0" dirty="0">
+                <a:ln>
+                  <a:noFill/>
+                </a:ln>
+                <a:effectLst/>
+              </a:rPr>
+              <a:t>0%</a:t>
+            </a:r>
+            <a:r>
+              <a:rPr kumimoji="0" lang="en-US" altLang="en-US" b="0" i="0" u="none" strike="noStrike" cap="none" normalizeH="0" baseline="0" dirty="0">
+                <a:ln>
+                  <a:noFill/>
+                </a:ln>
+                <a:effectLst/>
+              </a:rPr>
+              <a:t>.</a:t>
+            </a:r>
+          </a:p>
+          <a:p>
+            <a:pPr marL="0" marR="0" lvl="0" indent="-228600" algn="l" fontAlgn="base">
+              <a:spcBef>
+                <a:spcPct val="0"/>
+              </a:spcBef>
+              <a:spcAft>
+                <a:spcPts val="600"/>
+              </a:spcAft>
+              <a:buClrTx/>
+              <a:buSzTx/>
+              <a:buFont typeface="Arial" panose="020B0604020202020204" pitchFamily="34" charset="0"/>
+              <a:buChar char="•"/>
+              <a:tabLst/>
+            </a:pPr>
+            <a:r>
+              <a:rPr kumimoji="0" lang="en-US" altLang="en-US" sz="2000" b="1" i="0" u="none" strike="noStrike" cap="none" normalizeH="0" baseline="0" dirty="0">
+                <a:ln>
+                  <a:noFill/>
+                </a:ln>
+                <a:effectLst/>
+              </a:rPr>
+              <a:t>Standard Πα</a:t>
+            </a:r>
+            <a:r>
+              <a:rPr kumimoji="0" lang="en-US" altLang="en-US" sz="2000" b="1" i="0" u="none" strike="noStrike" cap="none" normalizeH="0" baseline="0" dirty="0" err="1">
+                <a:ln>
+                  <a:noFill/>
+                </a:ln>
+                <a:effectLst/>
+              </a:rPr>
+              <a:t>κέτ</a:t>
+            </a:r>
+            <a:r>
+              <a:rPr kumimoji="0" lang="en-US" altLang="en-US" sz="2000" b="1" i="0" u="none" strike="noStrike" cap="none" normalizeH="0" baseline="0" dirty="0">
+                <a:ln>
+                  <a:noFill/>
+                </a:ln>
+                <a:effectLst/>
+              </a:rPr>
+              <a:t>α (1000 Bytes):</a:t>
+            </a:r>
+            <a:endParaRPr kumimoji="0" lang="en-US" altLang="en-US" sz="2000" b="0" i="0" u="none" strike="noStrike" cap="none" normalizeH="0" baseline="0" dirty="0">
+              <a:ln>
+                <a:noFill/>
+              </a:ln>
+              <a:effectLst/>
+            </a:endParaRPr>
+          </a:p>
+          <a:p>
+            <a:pPr marL="457200" marR="0" lvl="1" indent="-228600" algn="l" fontAlgn="base">
+              <a:spcBef>
+                <a:spcPct val="0"/>
+              </a:spcBef>
+              <a:spcAft>
+                <a:spcPts val="600"/>
+              </a:spcAft>
+              <a:buClrTx/>
+              <a:buSzTx/>
+              <a:buFont typeface="Arial" panose="020B0604020202020204" pitchFamily="34" charset="0"/>
+              <a:buChar char="•"/>
+              <a:tabLst/>
+            </a:pPr>
+            <a:r>
+              <a:rPr kumimoji="0" lang="en-US" altLang="en-US" b="1" i="0" u="none" strike="noStrike" cap="none" normalizeH="0" baseline="0" dirty="0">
+                <a:ln>
+                  <a:noFill/>
+                </a:ln>
+                <a:effectLst/>
+              </a:rPr>
+              <a:t>Κα</a:t>
+            </a:r>
+            <a:r>
+              <a:rPr kumimoji="0" lang="en-US" altLang="en-US" b="1" i="0" u="none" strike="noStrike" cap="none" normalizeH="0" baseline="0" dirty="0" err="1">
+                <a:ln>
+                  <a:noFill/>
+                </a:ln>
+                <a:effectLst/>
+              </a:rPr>
+              <a:t>τάστ</a:t>
+            </a:r>
+            <a:r>
+              <a:rPr kumimoji="0" lang="en-US" altLang="en-US" b="1" i="0" u="none" strike="noStrike" cap="none" normalizeH="0" baseline="0" dirty="0">
+                <a:ln>
+                  <a:noFill/>
+                </a:ln>
+                <a:effectLst/>
+              </a:rPr>
+              <a:t>αση:</a:t>
+            </a:r>
+            <a:r>
+              <a:rPr kumimoji="0" lang="en-US" altLang="en-US" b="0" i="0" u="none" strike="noStrike" cap="none" normalizeH="0" baseline="0" dirty="0">
+                <a:ln>
+                  <a:noFill/>
+                </a:ln>
+                <a:effectLst/>
+              </a:rPr>
+              <a:t> Συμφόρηση (όπως είδαμε στο Ερώτημα 4).</a:t>
+            </a:r>
+          </a:p>
+          <a:p>
+            <a:pPr marL="457200" marR="0" lvl="1" indent="-228600" algn="l" fontAlgn="base">
+              <a:spcBef>
+                <a:spcPct val="0"/>
+              </a:spcBef>
+              <a:spcAft>
+                <a:spcPts val="600"/>
+              </a:spcAft>
+              <a:buClrTx/>
+              <a:buSzTx/>
+              <a:buFont typeface="Arial" panose="020B0604020202020204" pitchFamily="34" charset="0"/>
+              <a:buChar char="•"/>
+              <a:tabLst/>
+            </a:pPr>
+            <a:r>
+              <a:rPr kumimoji="0" lang="en-US" altLang="en-US" b="1" i="0" u="none" strike="noStrike" cap="none" normalizeH="0" baseline="0" dirty="0">
+                <a:ln>
+                  <a:noFill/>
+                </a:ln>
+                <a:effectLst/>
+              </a:rPr>
+              <a:t>Load:</a:t>
+            </a:r>
+            <a:r>
+              <a:rPr kumimoji="0" lang="en-US" altLang="en-US" b="0" i="0" u="none" strike="noStrike" cap="none" normalizeH="0" baseline="0" dirty="0">
+                <a:ln>
+                  <a:noFill/>
+                </a:ln>
+                <a:effectLst/>
+              </a:rPr>
+              <a:t> 1.6  Mbps.</a:t>
+            </a:r>
+          </a:p>
+          <a:p>
+            <a:pPr marL="457200" marR="0" lvl="1" indent="-228600" algn="l" fontAlgn="base">
+              <a:spcBef>
+                <a:spcPct val="0"/>
+              </a:spcBef>
+              <a:spcAft>
+                <a:spcPts val="600"/>
+              </a:spcAft>
+              <a:buClrTx/>
+              <a:buSzTx/>
+              <a:buFont typeface="Arial" panose="020B0604020202020204" pitchFamily="34" charset="0"/>
+              <a:buChar char="•"/>
+              <a:tabLst/>
+            </a:pPr>
+            <a:r>
+              <a:rPr kumimoji="0" lang="en-US" altLang="en-US" b="1" i="0" u="none" strike="noStrike" cap="none" normalizeH="0" baseline="0" dirty="0">
+                <a:ln>
+                  <a:noFill/>
+                </a:ln>
+                <a:effectLst/>
+              </a:rPr>
+              <a:t>Απ</a:t>
+            </a:r>
+            <a:r>
+              <a:rPr kumimoji="0" lang="en-US" altLang="en-US" b="1" i="0" u="none" strike="noStrike" cap="none" normalizeH="0" baseline="0" dirty="0" err="1">
+                <a:ln>
+                  <a:noFill/>
+                </a:ln>
+                <a:effectLst/>
+              </a:rPr>
+              <a:t>οτέλεσμ</a:t>
+            </a:r>
+            <a:r>
+              <a:rPr kumimoji="0" lang="en-US" altLang="en-US" b="1" i="0" u="none" strike="noStrike" cap="none" normalizeH="0" baseline="0" dirty="0">
+                <a:ln>
+                  <a:noFill/>
+                </a:ln>
+                <a:effectLst/>
+              </a:rPr>
+              <a:t>α:</a:t>
+            </a:r>
+            <a:r>
+              <a:rPr kumimoji="0" lang="en-US" altLang="en-US" b="0" i="0" u="none" strike="noStrike" cap="none" normalizeH="0" baseline="0" dirty="0">
+                <a:ln>
+                  <a:noFill/>
+                </a:ln>
+                <a:effectLst/>
+              </a:rPr>
+              <a:t> Η ουρά γεμίζει, Απώλειες </a:t>
+            </a:r>
+            <a:r>
+              <a:rPr kumimoji="0" lang="en-US" altLang="en-US" b="1" i="0" u="none" strike="noStrike" cap="none" normalizeH="0" baseline="0" dirty="0">
+                <a:ln>
+                  <a:noFill/>
+                </a:ln>
+                <a:effectLst/>
+              </a:rPr>
+              <a:t>~37.5%</a:t>
+            </a:r>
+            <a:r>
+              <a:rPr kumimoji="0" lang="en-US" altLang="en-US" b="0" i="0" u="none" strike="noStrike" cap="none" normalizeH="0" baseline="0" dirty="0">
+                <a:ln>
+                  <a:noFill/>
+                </a:ln>
+                <a:effectLst/>
+              </a:rPr>
+              <a:t>.</a:t>
+            </a:r>
+          </a:p>
+          <a:p>
+            <a:pPr marL="0" marR="0" lvl="0" indent="-228600" algn="l" fontAlgn="base">
+              <a:spcBef>
+                <a:spcPct val="0"/>
+              </a:spcBef>
+              <a:spcAft>
+                <a:spcPts val="600"/>
+              </a:spcAft>
+              <a:buClrTx/>
+              <a:buSzTx/>
+              <a:buFont typeface="Arial" panose="020B0604020202020204" pitchFamily="34" charset="0"/>
+              <a:buChar char="•"/>
+              <a:tabLst/>
+            </a:pPr>
+            <a:endParaRPr kumimoji="0" lang="en-US" altLang="en-US" sz="2000" b="0" i="0" u="none" strike="noStrike" cap="none" normalizeH="0" baseline="0" dirty="0">
+              <a:ln>
+                <a:noFill/>
+              </a:ln>
+              <a:effectLst/>
+            </a:endParaRPr>
+          </a:p>
+        </p:txBody>
+      </p:sp>
+    </p:spTree>
+    <p:extLst>
+      <p:ext uri="{BB962C8B-B14F-4D97-AF65-F5344CB8AC3E}">
+        <p14:creationId xmlns:p14="http://schemas.microsoft.com/office/powerpoint/2010/main" val="2344349064"/>
+      </p:ext>
+    </p:extLst>
+  </p:cSld>
+  <p:clrMapOvr>
+    <a:masterClrMapping/>
+  </p:clrMapOvr>
+</p:sld>
+</file>
+
+<file path=ppt/slides/slide16.xml><?xml version="1.0" encoding="utf-8"?>
+<p:sld xmlns:a="http://schemas.openxmlformats.org/drawingml/2006/main" xmlns:r="http://schemas.openxmlformats.org/officeDocument/2006/relationships" xmlns:p="http://schemas.openxmlformats.org/presentationml/2006/main">
+  <p:cSld>
+    <p:spTree>
+      <p:nvGrpSpPr>
+        <p:cNvPr id="1" name=""/>
+        <p:cNvGrpSpPr/>
+        <p:nvPr/>
+      </p:nvGrpSpPr>
+      <p:grpSpPr>
+        <a:xfrm>
+          <a:off x="0" y="0"/>
+          <a:ext cx="0" cy="0"/>
+          <a:chOff x="0" y="0"/>
+          <a:chExt cx="0" cy="0"/>
+        </a:xfrm>
+      </p:grpSpPr>
+      <p:pic>
+        <p:nvPicPr>
+          <p:cNvPr id="2" name="Picture 1" descr="A screenshot of a graph&#10;&#10;AI-generated content may be incorrect.">
+            <a:extLst>
+              <a:ext uri="{FF2B5EF4-FFF2-40B4-BE49-F238E27FC236}">
+                <a16:creationId xmlns:a16="http://schemas.microsoft.com/office/drawing/2014/main" id="{5A58B3AD-66A5-AA91-0771-5E26A15C5762}"/>
+              </a:ext>
+            </a:extLst>
+          </p:cNvPr>
+          <p:cNvPicPr>
+            <a:picLocks noChangeAspect="1"/>
+          </p:cNvPicPr>
+          <p:nvPr/>
+        </p:nvPicPr>
+        <p:blipFill>
+          <a:blip r:embed="rId2"/>
+          <a:stretch>
+            <a:fillRect/>
+          </a:stretch>
+        </p:blipFill>
+        <p:spPr>
+          <a:xfrm>
+            <a:off x="0" y="0"/>
+            <a:ext cx="12106275" cy="6857999"/>
+          </a:xfrm>
+          <a:prstGeom prst="rect">
+            <a:avLst/>
+          </a:prstGeom>
+        </p:spPr>
+      </p:pic>
+      <p:sp>
+        <p:nvSpPr>
+          <p:cNvPr id="3" name="TextBox 2">
+            <a:extLst>
+              <a:ext uri="{FF2B5EF4-FFF2-40B4-BE49-F238E27FC236}">
+                <a16:creationId xmlns:a16="http://schemas.microsoft.com/office/drawing/2014/main" id="{77DBD750-C384-58B9-52AB-25EC39E83CE5}"/>
+              </a:ext>
+            </a:extLst>
+          </p:cNvPr>
+          <p:cNvSpPr txBox="1"/>
+          <p:nvPr/>
+        </p:nvSpPr>
+        <p:spPr>
+          <a:xfrm>
+            <a:off x="0" y="114300"/>
+            <a:ext cx="2981325" cy="461665"/>
+          </a:xfrm>
+          <a:prstGeom prst="rect">
+            <a:avLst/>
+          </a:prstGeom>
+          <a:noFill/>
+        </p:spPr>
+        <p:txBody>
+          <a:bodyPr wrap="square" rtlCol="0">
+            <a:spAutoFit/>
+          </a:bodyPr>
+          <a:lstStyle/>
+          <a:p>
+            <a:r>
+              <a:rPr lang="en-US" sz="2400" b="1" dirty="0"/>
+              <a:t>100Bytes</a:t>
+            </a:r>
+          </a:p>
+        </p:txBody>
+      </p:sp>
+    </p:spTree>
+    <p:extLst>
+      <p:ext uri="{BB962C8B-B14F-4D97-AF65-F5344CB8AC3E}">
+        <p14:creationId xmlns:p14="http://schemas.microsoft.com/office/powerpoint/2010/main" val="976718154"/>
+      </p:ext>
+    </p:extLst>
+  </p:cSld>
+  <p:clrMapOvr>
+    <a:masterClrMapping/>
+  </p:clrMapOvr>
+</p:sld>
+</file>
+
+<file path=ppt/slides/slide17.xml><?xml version="1.0" encoding="utf-8"?>
 <p:sld xmlns:a="http://schemas.openxmlformats.org/drawingml/2006/main" xmlns:r="http://schemas.openxmlformats.org/officeDocument/2006/relationships" xmlns:p="http://schemas.openxmlformats.org/presentationml/2006/main">
   <p:cSld>
     <p:bg>
@@ -18447,7 +20274,7 @@
           <p:cNvPr id="2" name="Title 1">
             <a:extLst>
               <a:ext uri="{FF2B5EF4-FFF2-40B4-BE49-F238E27FC236}">
-                <a16:creationId xmlns:a16="http://schemas.microsoft.com/office/drawing/2014/main" id="{26DF9FF6-720B-F5D3-256A-D422129C28BB}"/>
+                <a16:creationId xmlns:a16="http://schemas.microsoft.com/office/drawing/2014/main" id="{6F08BBB8-F199-B08C-581D-D0AFD4126077}"/>
               </a:ext>
             </a:extLst>
           </p:cNvPr>
@@ -18455,7 +20282,7 @@
             <a:spLocks noGrp="1"/>
           </p:cNvSpPr>
           <p:nvPr>
-            <p:ph type="title"/>
+            <p:ph type="ctrTitle"/>
           </p:nvPr>
         </p:nvSpPr>
         <p:spPr>
@@ -18465,33 +20292,32 @@
           </a:xfrm>
         </p:spPr>
         <p:txBody>
-          <a:bodyPr>
+          <a:bodyPr vert="horz" lIns="91440" tIns="45720" rIns="91440" bIns="45720" rtlCol="0" anchor="ctr">
             <a:normAutofit/>
           </a:bodyPr>
           <a:lstStyle/>
           <a:p>
-            <a:r>
-              <a:rPr lang="el-GR" sz="4000" b="1">
+            <a:pPr algn="l"/>
+            <a:r>
+              <a:rPr lang="en-US" sz="4000" kern="1200">
                 <a:solidFill>
                   <a:srgbClr val="FFFFFF"/>
                 </a:solidFill>
+                <a:latin typeface="+mj-lt"/>
+                <a:ea typeface="+mj-ea"/>
+                <a:cs typeface="+mj-cs"/>
               </a:rPr>
-              <a:t>Βασικά Συμπεράσματα </a:t>
-            </a:r>
-            <a:endParaRPr lang="en-US" sz="4000">
-              <a:solidFill>
-                <a:srgbClr val="FFFFFF"/>
-              </a:solidFill>
-            </a:endParaRPr>
+              <a:t>Μεγάλα Πακέτα &amp; Ακραία Συμφόρηση</a:t>
+            </a:r>
           </a:p>
         </p:txBody>
       </p:sp>
       <p:sp>
         <p:nvSpPr>
-          <p:cNvPr id="3" name="Content Placeholder 2">
+          <p:cNvPr id="3" name="Subtitle 2">
             <a:extLst>
               <a:ext uri="{FF2B5EF4-FFF2-40B4-BE49-F238E27FC236}">
-                <a16:creationId xmlns:a16="http://schemas.microsoft.com/office/drawing/2014/main" id="{AE51ABE3-D7E0-70FB-7E8E-3B4F14CD7373}"/>
+                <a16:creationId xmlns:a16="http://schemas.microsoft.com/office/drawing/2014/main" id="{770C7CCB-6718-A6B8-3230-98460FD758E0}"/>
               </a:ext>
             </a:extLst>
           </p:cNvPr>
@@ -18499,7 +20325,7 @@
             <a:spLocks noGrp="1"/>
           </p:cNvSpPr>
           <p:nvPr>
-            <p:ph idx="1"/>
+            <p:ph type="subTitle" idx="1"/>
           </p:nvPr>
         </p:nvSpPr>
         <p:spPr>
@@ -18509,108 +20335,108 @@
           </a:xfrm>
         </p:spPr>
         <p:txBody>
-          <a:bodyPr anchor="ctr">
-            <a:normAutofit fontScale="70000" lnSpcReduction="20000"/>
+          <a:bodyPr vert="horz" lIns="91440" tIns="45720" rIns="91440" bIns="45720" rtlCol="0" anchor="ctr">
+            <a:normAutofit/>
           </a:bodyPr>
           <a:lstStyle/>
           <a:p>
-            <a:r>
-              <a:rPr lang="el-GR" b="1" dirty="0"/>
-              <a:t>Βασικά Συμπεράσματα (Ερωτήματα 1-5):</a:t>
-            </a:r>
-            <a:endParaRPr lang="el-GR" dirty="0"/>
-          </a:p>
-          <a:p>
-            <a:pPr lvl="1"/>
-            <a:r>
-              <a:rPr lang="el-GR" dirty="0"/>
-              <a:t>Η σχέση μεταξύ του ρυθμού άφιξης και του ρυθμού εξυπηρέτησης είναι ο </a:t>
-            </a:r>
-            <a:r>
-              <a:rPr lang="el-GR" b="1" dirty="0"/>
-              <a:t>απόλυτος καθοριστικός παράγοντας</a:t>
-            </a:r>
-            <a:r>
-              <a:rPr lang="el-GR" dirty="0"/>
-              <a:t> για τη δημιουργία συμφόρησης.</a:t>
-            </a:r>
-          </a:p>
-          <a:p>
-            <a:pPr lvl="1"/>
-            <a:r>
-              <a:rPr lang="el-GR" dirty="0"/>
-              <a:t>Η συμφόρηση έχει δύο κύρια, μετρήσιμα συμπτώματα: </a:t>
-            </a:r>
-            <a:r>
-              <a:rPr lang="el-GR" b="1" dirty="0"/>
-              <a:t>δραματική αύξηση της καθυστέρησης</a:t>
-            </a:r>
-            <a:r>
-              <a:rPr lang="el-GR" dirty="0"/>
-              <a:t> και </a:t>
-            </a:r>
-            <a:r>
-              <a:rPr lang="el-GR" b="1" dirty="0"/>
-              <a:t>σημαντική απώλεια πακέτων</a:t>
-            </a:r>
-            <a:r>
-              <a:rPr lang="el-GR" dirty="0"/>
-              <a:t>.</a:t>
-            </a:r>
-          </a:p>
-          <a:p>
-            <a:pPr lvl="1"/>
-            <a:r>
-              <a:rPr lang="el-GR" b="1" dirty="0"/>
-              <a:t>Ο Ρόλος του Bandwidth</a:t>
-            </a:r>
-            <a:r>
-              <a:rPr lang="el-GR" dirty="0"/>
-              <a:t>:Το Bandwidth είναι ο καθοριστικός παράγοντας (Bottleneck). Η αιτία συμφόρησης στα 1 Mbps είναι ότι ο χρόνος μετάδοσης (8ms) είναι μεγαλύτερος από το διάστημα άφιξης (5ms). Ο Router δεν προλαβαίνει, με αποτέλεσμα η ουρά να γεμίζει.</a:t>
+            <a:pPr indent="-228600" algn="l">
+              <a:buFont typeface="Arial" panose="020B0604020202020204" pitchFamily="34" charset="0"/>
+              <a:buChar char="•"/>
+            </a:pPr>
+            <a:r>
+              <a:rPr lang="en-US" sz="2000"/>
+              <a:t>Το Πρόβλημα των Μεγάλων Πακέτων:  Όσο μεγαλώνει το πακέτο, τόσο περισσότερο χρόνο "μπλοκάρει" τον Router για να μεταδοθεί.  </a:t>
             </a:r>
             <a:br>
-              <a:rPr lang="el-GR" dirty="0"/>
+              <a:rPr lang="en-US" sz="2000"/>
             </a:br>
-            <a:endParaRPr lang="el-GR" dirty="0"/>
-          </a:p>
-          <a:p>
-            <a:r>
-              <a:rPr lang="el-GR" b="1" dirty="0"/>
-              <a:t>Τι Ακολουθεί; (Ερωτήματα 6-8)</a:t>
-            </a:r>
-            <a:endParaRPr lang="el-GR" dirty="0"/>
-          </a:p>
-          <a:p>
-            <a:pPr lvl="1"/>
-            <a:r>
-              <a:rPr lang="el-GR" b="1" dirty="0"/>
-              <a:t>Ερώτημα 6:</a:t>
-            </a:r>
-            <a:r>
-              <a:rPr lang="el-GR" dirty="0"/>
-              <a:t> Πώς επηρεάζει η αλλαγή του μεγέθους των πακέτων;</a:t>
-            </a:r>
-          </a:p>
-          <a:p>
-            <a:pPr lvl="1"/>
-            <a:r>
-              <a:rPr lang="el-GR" b="1" dirty="0"/>
-              <a:t>Ερώτημα 7:</a:t>
-            </a:r>
-            <a:r>
-              <a:rPr lang="el-GR" dirty="0"/>
-              <a:t> Πώς η προσθήκη host και router επηρεάζει τις επιδόσεις και τις μετρικές;</a:t>
-            </a:r>
-          </a:p>
-          <a:p>
-            <a:pPr lvl="1"/>
-            <a:r>
-              <a:rPr lang="el-GR" b="1" dirty="0"/>
-              <a:t>Ερώτημα 8:</a:t>
-            </a:r>
-            <a:r>
-              <a:rPr lang="el-GR" dirty="0"/>
-              <a:t> Μπορούμε να διαχειριστούμε την ουρά πιο έξυπνα με διαφορετικούς αλγόριθμους scheduling;</a:t>
+            <a:br>
+              <a:rPr lang="en-US" sz="2000" b="1"/>
+            </a:br>
+            <a:r>
+              <a:rPr lang="en-US" sz="2000" b="1"/>
+              <a:t>3000 Bytes:  </a:t>
+            </a:r>
+            <a:br>
+              <a:rPr lang="en-US" sz="2000"/>
+            </a:br>
+            <a:r>
+              <a:rPr lang="en-US" sz="2000" b="1"/>
+              <a:t>Transmission</a:t>
+            </a:r>
+            <a:r>
+              <a:rPr lang="en-US" sz="2000"/>
+              <a:t> Delay: 24 ms.  </a:t>
+            </a:r>
+            <a:br>
+              <a:rPr lang="en-US" sz="2000"/>
+            </a:br>
+            <a:r>
+              <a:rPr lang="en-US" sz="2000" b="1"/>
+              <a:t>Loss</a:t>
+            </a:r>
+            <a:r>
+              <a:rPr lang="en-US" sz="2000"/>
+              <a:t>: Εκτοξεύεται στο 79%.  </a:t>
+            </a:r>
+            <a:br>
+              <a:rPr lang="en-US" sz="2000"/>
+            </a:br>
+            <a:r>
+              <a:rPr lang="en-US" sz="2000" b="1"/>
+              <a:t>Delay</a:t>
+            </a:r>
+            <a:r>
+              <a:rPr lang="en-US" sz="2000"/>
+              <a:t>: Αυξάνεται στα 0.36s.  </a:t>
+            </a:r>
+            <a:br>
+              <a:rPr lang="en-US" sz="2000"/>
+            </a:br>
+            <a:br>
+              <a:rPr lang="en-US" sz="2000"/>
+            </a:br>
+            <a:r>
+              <a:rPr lang="en-US" sz="2000" b="1"/>
+              <a:t>5000 Bytes </a:t>
+            </a:r>
+            <a:r>
+              <a:rPr lang="en-US" sz="2000"/>
+              <a:t>(Ακραίο Σενάριο): </a:t>
+            </a:r>
+            <a:br>
+              <a:rPr lang="en-US" sz="2000"/>
+            </a:br>
+            <a:r>
+              <a:rPr lang="en-US" sz="2000" b="1"/>
+              <a:t>Transmission Delay</a:t>
+            </a:r>
+            <a:r>
+              <a:rPr lang="en-US" sz="2000"/>
+              <a:t>: 40 ms ανά πακέτο!  </a:t>
+            </a:r>
+            <a:br>
+              <a:rPr lang="en-US" sz="2000"/>
+            </a:br>
+            <a:r>
+              <a:rPr lang="en-US" sz="2000" b="1"/>
+              <a:t>Loss</a:t>
+            </a:r>
+            <a:r>
+              <a:rPr lang="en-US" sz="2000"/>
+              <a:t>: Χάνουμε το 87.5% των δεδομένων.  </a:t>
+            </a:r>
+            <a:br>
+              <a:rPr lang="en-US" sz="2000"/>
+            </a:br>
+            <a:r>
+              <a:rPr lang="en-US" sz="2000" b="1"/>
+              <a:t>Delay</a:t>
+            </a:r>
+            <a:r>
+              <a:rPr lang="en-US" sz="2000"/>
+              <a:t>: Πάνω από 0.54s. Ο Router είναι συνεχώς απασχολημένος.</a:t>
             </a:r>
           </a:p>
         </p:txBody>
@@ -18618,7 +20444,197 @@
     </p:spTree>
     <p:extLst>
       <p:ext uri="{BB962C8B-B14F-4D97-AF65-F5344CB8AC3E}">
-        <p14:creationId xmlns:p14="http://schemas.microsoft.com/office/powerpoint/2010/main" val="2989472669"/>
+        <p14:creationId xmlns:p14="http://schemas.microsoft.com/office/powerpoint/2010/main" val="2470978363"/>
+      </p:ext>
+    </p:extLst>
+  </p:cSld>
+  <p:clrMapOvr>
+    <a:masterClrMapping/>
+  </p:clrMapOvr>
+</p:sld>
+</file>
+
+<file path=ppt/slides/slide18.xml><?xml version="1.0" encoding="utf-8"?>
+<p:sld xmlns:a="http://schemas.openxmlformats.org/drawingml/2006/main" xmlns:r="http://schemas.openxmlformats.org/officeDocument/2006/relationships" xmlns:p="http://schemas.openxmlformats.org/presentationml/2006/main">
+  <p:cSld>
+    <p:spTree>
+      <p:nvGrpSpPr>
+        <p:cNvPr id="1" name=""/>
+        <p:cNvGrpSpPr/>
+        <p:nvPr/>
+      </p:nvGrpSpPr>
+      <p:grpSpPr>
+        <a:xfrm>
+          <a:off x="0" y="0"/>
+          <a:ext cx="0" cy="0"/>
+          <a:chOff x="0" y="0"/>
+          <a:chExt cx="0" cy="0"/>
+        </a:xfrm>
+      </p:grpSpPr>
+      <p:pic>
+        <p:nvPicPr>
+          <p:cNvPr id="2" name="Picture 1" descr="A screenshot of a graph">
+            <a:extLst>
+              <a:ext uri="{FF2B5EF4-FFF2-40B4-BE49-F238E27FC236}">
+                <a16:creationId xmlns:a16="http://schemas.microsoft.com/office/drawing/2014/main" id="{E66F4F5B-D24C-9960-804E-562B9D0A7EDC}"/>
+              </a:ext>
+            </a:extLst>
+          </p:cNvPr>
+          <p:cNvPicPr>
+            <a:picLocks noChangeAspect="1"/>
+          </p:cNvPicPr>
+          <p:nvPr/>
+        </p:nvPicPr>
+        <p:blipFill>
+          <a:blip r:embed="rId2"/>
+          <a:stretch>
+            <a:fillRect/>
+          </a:stretch>
+        </p:blipFill>
+        <p:spPr>
+          <a:xfrm>
+            <a:off x="95250" y="0"/>
+            <a:ext cx="12096750" cy="6858000"/>
+          </a:xfrm>
+          <a:prstGeom prst="rect">
+            <a:avLst/>
+          </a:prstGeom>
+        </p:spPr>
+      </p:pic>
+      <p:sp>
+        <p:nvSpPr>
+          <p:cNvPr id="3" name="TextBox 2">
+            <a:extLst>
+              <a:ext uri="{FF2B5EF4-FFF2-40B4-BE49-F238E27FC236}">
+                <a16:creationId xmlns:a16="http://schemas.microsoft.com/office/drawing/2014/main" id="{419130F5-FD99-74CB-6AC8-69A3A539B04A}"/>
+              </a:ext>
+            </a:extLst>
+          </p:cNvPr>
+          <p:cNvSpPr txBox="1"/>
+          <p:nvPr/>
+        </p:nvSpPr>
+        <p:spPr>
+          <a:xfrm>
+            <a:off x="0" y="133350"/>
+            <a:ext cx="1457325" cy="400110"/>
+          </a:xfrm>
+          <a:prstGeom prst="rect">
+            <a:avLst/>
+          </a:prstGeom>
+          <a:noFill/>
+        </p:spPr>
+        <p:txBody>
+          <a:bodyPr wrap="square" rtlCol="0">
+            <a:spAutoFit/>
+          </a:bodyPr>
+          <a:lstStyle/>
+          <a:p>
+            <a:r>
+              <a:rPr lang="en-US" sz="2000" b="1" dirty="0"/>
+              <a:t>3000Bytes</a:t>
+            </a:r>
+          </a:p>
+        </p:txBody>
+      </p:sp>
+    </p:spTree>
+    <p:extLst>
+      <p:ext uri="{BB962C8B-B14F-4D97-AF65-F5344CB8AC3E}">
+        <p14:creationId xmlns:p14="http://schemas.microsoft.com/office/powerpoint/2010/main" val="3560785531"/>
+      </p:ext>
+    </p:extLst>
+  </p:cSld>
+  <p:clrMapOvr>
+    <a:masterClrMapping/>
+  </p:clrMapOvr>
+</p:sld>
+</file>
+
+<file path=ppt/slides/slide19.xml><?xml version="1.0" encoding="utf-8"?>
+<p:sld xmlns:a="http://schemas.openxmlformats.org/drawingml/2006/main" xmlns:r="http://schemas.openxmlformats.org/officeDocument/2006/relationships" xmlns:p="http://schemas.openxmlformats.org/presentationml/2006/main">
+  <p:cSld>
+    <p:spTree>
+      <p:nvGrpSpPr>
+        <p:cNvPr id="1" name=""/>
+        <p:cNvGrpSpPr/>
+        <p:nvPr/>
+      </p:nvGrpSpPr>
+      <p:grpSpPr>
+        <a:xfrm>
+          <a:off x="0" y="0"/>
+          <a:ext cx="0" cy="0"/>
+          <a:chOff x="0" y="0"/>
+          <a:chExt cx="0" cy="0"/>
+        </a:xfrm>
+      </p:grpSpPr>
+      <p:pic>
+        <p:nvPicPr>
+          <p:cNvPr id="2" name="Picture 1" descr="A screenshot of a graph">
+            <a:extLst>
+              <a:ext uri="{FF2B5EF4-FFF2-40B4-BE49-F238E27FC236}">
+                <a16:creationId xmlns:a16="http://schemas.microsoft.com/office/drawing/2014/main" id="{9F1DB88C-1D81-7386-5057-880B0D427434}"/>
+              </a:ext>
+            </a:extLst>
+          </p:cNvPr>
+          <p:cNvPicPr>
+            <a:picLocks noChangeAspect="1"/>
+          </p:cNvPicPr>
+          <p:nvPr/>
+        </p:nvPicPr>
+        <p:blipFill>
+          <a:blip r:embed="rId2"/>
+          <a:stretch>
+            <a:fillRect/>
+          </a:stretch>
+        </p:blipFill>
+        <p:spPr>
+          <a:xfrm>
+            <a:off x="0" y="0"/>
+            <a:ext cx="12192000" cy="6857999"/>
+          </a:xfrm>
+          <a:prstGeom prst="rect">
+            <a:avLst/>
+          </a:prstGeom>
+        </p:spPr>
+      </p:pic>
+      <p:sp>
+        <p:nvSpPr>
+          <p:cNvPr id="3" name="TextBox 2">
+            <a:extLst>
+              <a:ext uri="{FF2B5EF4-FFF2-40B4-BE49-F238E27FC236}">
+                <a16:creationId xmlns:a16="http://schemas.microsoft.com/office/drawing/2014/main" id="{43FDFCE5-DC48-97D1-FA38-48937609852F}"/>
+              </a:ext>
+            </a:extLst>
+          </p:cNvPr>
+          <p:cNvSpPr txBox="1"/>
+          <p:nvPr/>
+        </p:nvSpPr>
+        <p:spPr>
+          <a:xfrm>
+            <a:off x="0" y="104775"/>
+            <a:ext cx="2152650" cy="400110"/>
+          </a:xfrm>
+          <a:prstGeom prst="rect">
+            <a:avLst/>
+          </a:prstGeom>
+          <a:noFill/>
+        </p:spPr>
+        <p:txBody>
+          <a:bodyPr wrap="square" rtlCol="0">
+            <a:spAutoFit/>
+          </a:bodyPr>
+          <a:lstStyle/>
+          <a:p>
+            <a:r>
+              <a:rPr lang="en-US" sz="2000" b="1" dirty="0"/>
+              <a:t>5000Bytes</a:t>
+            </a:r>
+          </a:p>
+        </p:txBody>
+      </p:sp>
+    </p:spTree>
+    <p:extLst>
+      <p:ext uri="{BB962C8B-B14F-4D97-AF65-F5344CB8AC3E}">
+        <p14:creationId xmlns:p14="http://schemas.microsoft.com/office/powerpoint/2010/main" val="1125618557"/>
       </p:ext>
     </p:extLst>
   </p:cSld>
@@ -19282,6 +21298,1961 @@
   <p:clrMapOvr>
     <a:masterClrMapping/>
   </p:clrMapOvr>
+</p:sld>
+</file>
+
+<file path=ppt/slides/slide20.xml><?xml version="1.0" encoding="utf-8"?>
+<p:sld xmlns:a="http://schemas.openxmlformats.org/drawingml/2006/main" xmlns:r="http://schemas.openxmlformats.org/officeDocument/2006/relationships" xmlns:p="http://schemas.openxmlformats.org/presentationml/2006/main">
+  <p:cSld>
+    <p:bg>
+      <p:bgPr>
+        <a:solidFill>
+          <a:schemeClr val="bg1"/>
+        </a:solidFill>
+        <a:effectLst/>
+      </p:bgPr>
+    </p:bg>
+    <p:spTree>
+      <p:nvGrpSpPr>
+        <p:cNvPr id="1" name=""/>
+        <p:cNvGrpSpPr/>
+        <p:nvPr/>
+      </p:nvGrpSpPr>
+      <p:grpSpPr>
+        <a:xfrm>
+          <a:off x="0" y="0"/>
+          <a:ext cx="0" cy="0"/>
+          <a:chOff x="0" y="0"/>
+          <a:chExt cx="0" cy="0"/>
+        </a:xfrm>
+      </p:grpSpPr>
+      <p:sp useBgFill="1">
+        <p:nvSpPr>
+          <p:cNvPr id="9" name="Rectangle 8">
+            <a:extLst>
+              <a:ext uri="{FF2B5EF4-FFF2-40B4-BE49-F238E27FC236}">
+                <a16:creationId xmlns:a16="http://schemas.microsoft.com/office/drawing/2014/main" id="{09588DA8-065E-4F6F-8EFD-43104AB2E0CF}"/>
+              </a:ext>
+              <a:ext uri="{C183D7F6-B498-43B3-948B-1728B52AA6E4}">
+                <adec:decorative xmlns:adec="http://schemas.microsoft.com/office/drawing/2017/decorative" val="1"/>
+              </a:ext>
+            </a:extLst>
+          </p:cNvPr>
+          <p:cNvSpPr>
+            <a:spLocks noGrp="1" noRot="1" noChangeAspect="1" noMove="1" noResize="1" noEditPoints="1" noAdjustHandles="1" noChangeArrowheads="1" noChangeShapeType="1" noTextEdit="1"/>
+          </p:cNvSpPr>
+          <p:nvPr>
+            <p:extLst>
+              <p:ext uri="{386F3935-93C4-4BCD-93E2-E3B085C9AB24}">
+                <p16:designElem xmlns:p16="http://schemas.microsoft.com/office/powerpoint/2015/main" val="1"/>
+              </p:ext>
+            </p:extLst>
+          </p:nvPr>
+        </p:nvSpPr>
+        <p:spPr>
+          <a:xfrm>
+            <a:off x="0" y="0"/>
+            <a:ext cx="12192000" cy="6858000"/>
+          </a:xfrm>
+          <a:prstGeom prst="rect">
+            <a:avLst/>
+          </a:prstGeom>
+          <a:ln w="12700" cap="flat" cmpd="sng" algn="ctr">
+            <a:noFill/>
+            <a:prstDash val="solid"/>
+            <a:miter lim="800000"/>
+          </a:ln>
+          <a:effectLst/>
+          <a:extLst>
+            <a:ext uri="{91240B29-F687-4F45-9708-019B960494DF}">
+              <a14:hiddenLine xmlns:a14="http://schemas.microsoft.com/office/drawing/2010/main" w="12700" cap="flat" cmpd="sng" algn="ctr">
+                <a:solidFill>
+                  <a:schemeClr val="accent1">
+                    <a:shade val="50000"/>
+                  </a:schemeClr>
+                </a:solidFill>
+                <a:prstDash val="solid"/>
+                <a:miter lim="800000"/>
+              </a14:hiddenLine>
+            </a:ext>
+          </a:extLst>
+        </p:spPr>
+        <p:style>
+          <a:lnRef idx="2">
+            <a:schemeClr val="accent1">
+              <a:shade val="50000"/>
+            </a:schemeClr>
+          </a:lnRef>
+          <a:fillRef idx="1">
+            <a:schemeClr val="accent1"/>
+          </a:fillRef>
+          <a:effectRef idx="0">
+            <a:schemeClr val="accent1"/>
+          </a:effectRef>
+          <a:fontRef idx="minor">
+            <a:schemeClr val="lt1"/>
+          </a:fontRef>
+        </p:style>
+        <p:txBody>
+          <a:bodyPr rtlCol="0" anchor="ctr"/>
+          <a:lstStyle/>
+          <a:p>
+            <a:pPr algn="ctr"/>
+            <a:endParaRPr lang="en-US"/>
+          </a:p>
+        </p:txBody>
+      </p:sp>
+      <p:sp useBgFill="1">
+        <p:nvSpPr>
+          <p:cNvPr id="11" name="Rectangle 10">
+            <a:extLst>
+              <a:ext uri="{FF2B5EF4-FFF2-40B4-BE49-F238E27FC236}">
+                <a16:creationId xmlns:a16="http://schemas.microsoft.com/office/drawing/2014/main" id="{C4285719-470E-454C-AF62-8323075F1F5B}"/>
+              </a:ext>
+              <a:ext uri="{C183D7F6-B498-43B3-948B-1728B52AA6E4}">
+                <adec:decorative xmlns:adec="http://schemas.microsoft.com/office/drawing/2017/decorative" val="1"/>
+              </a:ext>
+            </a:extLst>
+          </p:cNvPr>
+          <p:cNvSpPr>
+            <a:spLocks noGrp="1" noRot="1" noChangeAspect="1" noMove="1" noResize="1" noEditPoints="1" noAdjustHandles="1" noChangeArrowheads="1" noChangeShapeType="1" noTextEdit="1"/>
+          </p:cNvSpPr>
+          <p:nvPr>
+            <p:extLst>
+              <p:ext uri="{386F3935-93C4-4BCD-93E2-E3B085C9AB24}">
+                <p16:designElem xmlns:p16="http://schemas.microsoft.com/office/powerpoint/2015/main" val="1"/>
+              </p:ext>
+            </p:extLst>
+          </p:nvPr>
+        </p:nvSpPr>
+        <p:spPr>
+          <a:xfrm>
+            <a:off x="0" y="0"/>
+            <a:ext cx="12188952" cy="6858000"/>
+          </a:xfrm>
+          <a:prstGeom prst="rect">
+            <a:avLst/>
+          </a:prstGeom>
+          <a:ln w="12700" cap="flat" cmpd="sng" algn="ctr">
+            <a:noFill/>
+            <a:prstDash val="solid"/>
+            <a:miter lim="800000"/>
+          </a:ln>
+          <a:effectLst/>
+          <a:extLst>
+            <a:ext uri="{91240B29-F687-4F45-9708-019B960494DF}">
+              <a14:hiddenLine xmlns:a14="http://schemas.microsoft.com/office/drawing/2010/main" w="12700" cap="flat" cmpd="sng" algn="ctr">
+                <a:solidFill>
+                  <a:schemeClr val="accent1">
+                    <a:shade val="50000"/>
+                  </a:schemeClr>
+                </a:solidFill>
+                <a:prstDash val="solid"/>
+                <a:miter lim="800000"/>
+              </a14:hiddenLine>
+            </a:ext>
+          </a:extLst>
+        </p:spPr>
+        <p:style>
+          <a:lnRef idx="2">
+            <a:schemeClr val="accent1">
+              <a:shade val="50000"/>
+            </a:schemeClr>
+          </a:lnRef>
+          <a:fillRef idx="1">
+            <a:schemeClr val="accent1"/>
+          </a:fillRef>
+          <a:effectRef idx="0">
+            <a:schemeClr val="accent1"/>
+          </a:effectRef>
+          <a:fontRef idx="minor">
+            <a:schemeClr val="lt1"/>
+          </a:fontRef>
+        </p:style>
+        <p:txBody>
+          <a:bodyPr rtlCol="0" anchor="ctr"/>
+          <a:lstStyle/>
+          <a:p>
+            <a:pPr algn="ctr"/>
+            <a:endParaRPr lang="en-US"/>
+          </a:p>
+        </p:txBody>
+      </p:sp>
+      <p:sp>
+        <p:nvSpPr>
+          <p:cNvPr id="13" name="Rectangle 12">
+            <a:extLst>
+              <a:ext uri="{FF2B5EF4-FFF2-40B4-BE49-F238E27FC236}">
+                <a16:creationId xmlns:a16="http://schemas.microsoft.com/office/drawing/2014/main" id="{CD9FE4EF-C4D8-49A0-B2FF-81D8DB7D8A24}"/>
+              </a:ext>
+              <a:ext uri="{C183D7F6-B498-43B3-948B-1728B52AA6E4}">
+                <adec:decorative xmlns:adec="http://schemas.microsoft.com/office/drawing/2017/decorative" val="1"/>
+              </a:ext>
+            </a:extLst>
+          </p:cNvPr>
+          <p:cNvSpPr>
+            <a:spLocks noGrp="1" noRot="1" noChangeAspect="1" noMove="1" noResize="1" noEditPoints="1" noAdjustHandles="1" noChangeArrowheads="1" noChangeShapeType="1" noTextEdit="1"/>
+          </p:cNvSpPr>
+          <p:nvPr>
+            <p:extLst>
+              <p:ext uri="{386F3935-93C4-4BCD-93E2-E3B085C9AB24}">
+                <p16:designElem xmlns:p16="http://schemas.microsoft.com/office/powerpoint/2015/main" val="1"/>
+              </p:ext>
+            </p:extLst>
+          </p:nvPr>
+        </p:nvSpPr>
+        <p:spPr>
+          <a:xfrm rot="5400000" flipH="1">
+            <a:off x="-1410084" y="1410082"/>
+            <a:ext cx="6858000" cy="4037836"/>
+          </a:xfrm>
+          <a:prstGeom prst="rect">
+            <a:avLst/>
+          </a:prstGeom>
+          <a:gradFill>
+            <a:gsLst>
+              <a:gs pos="8000">
+                <a:srgbClr val="000000"/>
+              </a:gs>
+              <a:gs pos="100000">
+                <a:schemeClr val="accent1">
+                  <a:lumMod val="75000"/>
+                </a:schemeClr>
+              </a:gs>
+            </a:gsLst>
+            <a:lin ang="3000000" scaled="0"/>
+          </a:gradFill>
+          <a:ln>
+            <a:noFill/>
+          </a:ln>
+        </p:spPr>
+        <p:style>
+          <a:lnRef idx="2">
+            <a:schemeClr val="accent1">
+              <a:shade val="50000"/>
+            </a:schemeClr>
+          </a:lnRef>
+          <a:fillRef idx="1">
+            <a:schemeClr val="accent1"/>
+          </a:fillRef>
+          <a:effectRef idx="0">
+            <a:schemeClr val="accent1"/>
+          </a:effectRef>
+          <a:fontRef idx="minor">
+            <a:schemeClr val="lt1"/>
+          </a:fontRef>
+        </p:style>
+        <p:txBody>
+          <a:bodyPr rtlCol="0" anchor="ctr"/>
+          <a:lstStyle/>
+          <a:p>
+            <a:pPr algn="ctr"/>
+            <a:endParaRPr lang="en-US"/>
+          </a:p>
+        </p:txBody>
+      </p:sp>
+      <p:sp>
+        <p:nvSpPr>
+          <p:cNvPr id="15" name="Rectangle 14">
+            <a:extLst>
+              <a:ext uri="{FF2B5EF4-FFF2-40B4-BE49-F238E27FC236}">
+                <a16:creationId xmlns:a16="http://schemas.microsoft.com/office/drawing/2014/main" id="{4300840D-0A0B-4512-BACA-B439D5B9C57C}"/>
+              </a:ext>
+              <a:ext uri="{C183D7F6-B498-43B3-948B-1728B52AA6E4}">
+                <adec:decorative xmlns:adec="http://schemas.microsoft.com/office/drawing/2017/decorative" val="1"/>
+              </a:ext>
+            </a:extLst>
+          </p:cNvPr>
+          <p:cNvSpPr>
+            <a:spLocks noGrp="1" noRot="1" noChangeAspect="1" noMove="1" noResize="1" noEditPoints="1" noAdjustHandles="1" noChangeArrowheads="1" noChangeShapeType="1" noTextEdit="1"/>
+          </p:cNvSpPr>
+          <p:nvPr>
+            <p:extLst>
+              <p:ext uri="{386F3935-93C4-4BCD-93E2-E3B085C9AB24}">
+                <p16:designElem xmlns:p16="http://schemas.microsoft.com/office/powerpoint/2015/main" val="1"/>
+              </p:ext>
+            </p:extLst>
+          </p:nvPr>
+        </p:nvSpPr>
+        <p:spPr>
+          <a:xfrm rot="5400000" flipH="1">
+            <a:off x="-1410085" y="1420219"/>
+            <a:ext cx="6857999" cy="4037839"/>
+          </a:xfrm>
+          <a:prstGeom prst="rect">
+            <a:avLst/>
+          </a:prstGeom>
+          <a:gradFill>
+            <a:gsLst>
+              <a:gs pos="0">
+                <a:srgbClr val="000000">
+                  <a:alpha val="0"/>
+                </a:srgbClr>
+              </a:gs>
+              <a:gs pos="99000">
+                <a:schemeClr val="accent1">
+                  <a:alpha val="46000"/>
+                </a:schemeClr>
+              </a:gs>
+            </a:gsLst>
+            <a:lin ang="1800000" scaled="0"/>
+          </a:gradFill>
+          <a:ln>
+            <a:noFill/>
+          </a:ln>
+        </p:spPr>
+        <p:style>
+          <a:lnRef idx="2">
+            <a:schemeClr val="accent1">
+              <a:shade val="50000"/>
+            </a:schemeClr>
+          </a:lnRef>
+          <a:fillRef idx="1">
+            <a:schemeClr val="accent1"/>
+          </a:fillRef>
+          <a:effectRef idx="0">
+            <a:schemeClr val="accent1"/>
+          </a:effectRef>
+          <a:fontRef idx="minor">
+            <a:schemeClr val="lt1"/>
+          </a:fontRef>
+        </p:style>
+        <p:txBody>
+          <a:bodyPr rtlCol="0" anchor="ctr"/>
+          <a:lstStyle/>
+          <a:p>
+            <a:pPr algn="ctr"/>
+            <a:endParaRPr lang="en-US"/>
+          </a:p>
+        </p:txBody>
+      </p:sp>
+      <p:sp>
+        <p:nvSpPr>
+          <p:cNvPr id="17" name="Rectangle 16">
+            <a:extLst>
+              <a:ext uri="{FF2B5EF4-FFF2-40B4-BE49-F238E27FC236}">
+                <a16:creationId xmlns:a16="http://schemas.microsoft.com/office/drawing/2014/main" id="{D2B78728-A580-49A7-84F9-6EF6F583ADE0}"/>
+              </a:ext>
+              <a:ext uri="{C183D7F6-B498-43B3-948B-1728B52AA6E4}">
+                <adec:decorative xmlns:adec="http://schemas.microsoft.com/office/drawing/2017/decorative" val="1"/>
+              </a:ext>
+            </a:extLst>
+          </p:cNvPr>
+          <p:cNvSpPr>
+            <a:spLocks noGrp="1" noRot="1" noChangeAspect="1" noMove="1" noResize="1" noEditPoints="1" noAdjustHandles="1" noChangeArrowheads="1" noChangeShapeType="1" noTextEdit="1"/>
+          </p:cNvSpPr>
+          <p:nvPr>
+            <p:extLst>
+              <p:ext uri="{386F3935-93C4-4BCD-93E2-E3B085C9AB24}">
+                <p16:designElem xmlns:p16="http://schemas.microsoft.com/office/powerpoint/2015/main" val="1"/>
+              </p:ext>
+            </p:extLst>
+          </p:nvPr>
+        </p:nvSpPr>
+        <p:spPr>
+          <a:xfrm rot="5400000" flipH="1">
+            <a:off x="767923" y="3588085"/>
+            <a:ext cx="2501979" cy="4037841"/>
+          </a:xfrm>
+          <a:prstGeom prst="rect">
+            <a:avLst/>
+          </a:prstGeom>
+          <a:gradFill>
+            <a:gsLst>
+              <a:gs pos="2000">
+                <a:schemeClr val="accent1">
+                  <a:alpha val="29000"/>
+                </a:schemeClr>
+              </a:gs>
+              <a:gs pos="100000">
+                <a:srgbClr val="000000">
+                  <a:alpha val="30000"/>
+                </a:srgbClr>
+              </a:gs>
+            </a:gsLst>
+            <a:lin ang="7800000" scaled="0"/>
+          </a:gradFill>
+          <a:ln>
+            <a:noFill/>
+          </a:ln>
+        </p:spPr>
+        <p:style>
+          <a:lnRef idx="2">
+            <a:schemeClr val="accent1">
+              <a:shade val="50000"/>
+            </a:schemeClr>
+          </a:lnRef>
+          <a:fillRef idx="1">
+            <a:schemeClr val="accent1"/>
+          </a:fillRef>
+          <a:effectRef idx="0">
+            <a:schemeClr val="accent1"/>
+          </a:effectRef>
+          <a:fontRef idx="minor">
+            <a:schemeClr val="lt1"/>
+          </a:fontRef>
+        </p:style>
+        <p:txBody>
+          <a:bodyPr rtlCol="0" anchor="ctr"/>
+          <a:lstStyle/>
+          <a:p>
+            <a:pPr algn="ctr"/>
+            <a:endParaRPr lang="en-US" dirty="0"/>
+          </a:p>
+        </p:txBody>
+      </p:sp>
+      <p:sp>
+        <p:nvSpPr>
+          <p:cNvPr id="19" name="Freeform: Shape 18">
+            <a:extLst>
+              <a:ext uri="{FF2B5EF4-FFF2-40B4-BE49-F238E27FC236}">
+                <a16:creationId xmlns:a16="http://schemas.microsoft.com/office/drawing/2014/main" id="{38FAA1A1-D861-433F-88FA-1E9D6FD31D11}"/>
+              </a:ext>
+              <a:ext uri="{C183D7F6-B498-43B3-948B-1728B52AA6E4}">
+                <adec:decorative xmlns:adec="http://schemas.microsoft.com/office/drawing/2017/decorative" val="1"/>
+              </a:ext>
+            </a:extLst>
+          </p:cNvPr>
+          <p:cNvSpPr>
+            <a:spLocks noGrp="1" noRot="1" noChangeAspect="1" noMove="1" noResize="1" noEditPoints="1" noAdjustHandles="1" noChangeArrowheads="1" noChangeShapeType="1" noTextEdit="1"/>
+          </p:cNvSpPr>
+          <p:nvPr>
+            <p:extLst>
+              <p:ext uri="{386F3935-93C4-4BCD-93E2-E3B085C9AB24}">
+                <p16:designElem xmlns:p16="http://schemas.microsoft.com/office/powerpoint/2015/main" val="1"/>
+              </p:ext>
+            </p:extLst>
+          </p:nvPr>
+        </p:nvSpPr>
+        <p:spPr>
+          <a:xfrm rot="20635413">
+            <a:off x="-501737" y="969718"/>
+            <a:ext cx="3900357" cy="4178958"/>
+          </a:xfrm>
+          <a:custGeom>
+            <a:avLst/>
+            <a:gdLst>
+              <a:gd name="connsiteX0" fmla="*/ 2432225 w 3900357"/>
+              <a:gd name="connsiteY0" fmla="*/ 93939 h 4178958"/>
+              <a:gd name="connsiteX1" fmla="*/ 3900357 w 3900357"/>
+              <a:gd name="connsiteY1" fmla="*/ 2089479 h 4178958"/>
+              <a:gd name="connsiteX2" fmla="*/ 1810878 w 3900357"/>
+              <a:gd name="connsiteY2" fmla="*/ 4178958 h 4178958"/>
+              <a:gd name="connsiteX3" fmla="*/ 78249 w 3900357"/>
+              <a:gd name="connsiteY3" fmla="*/ 3257727 h 4178958"/>
+              <a:gd name="connsiteX4" fmla="*/ 0 w 3900357"/>
+              <a:gd name="connsiteY4" fmla="*/ 3128923 h 4178958"/>
+              <a:gd name="connsiteX5" fmla="*/ 831324 w 3900357"/>
+              <a:gd name="connsiteY5" fmla="*/ 244281 h 4178958"/>
+              <a:gd name="connsiteX6" fmla="*/ 997559 w 3900357"/>
+              <a:gd name="connsiteY6" fmla="*/ 164202 h 4178958"/>
+              <a:gd name="connsiteX7" fmla="*/ 1810878 w 3900357"/>
+              <a:gd name="connsiteY7" fmla="*/ 0 h 4178958"/>
+              <a:gd name="connsiteX8" fmla="*/ 2432225 w 3900357"/>
+              <a:gd name="connsiteY8" fmla="*/ 93939 h 4178958"/>
+            </a:gdLst>
+            <a:ahLst/>
+            <a:cxnLst>
+              <a:cxn ang="0">
+                <a:pos x="connsiteX0" y="connsiteY0"/>
+              </a:cxn>
+              <a:cxn ang="0">
+                <a:pos x="connsiteX1" y="connsiteY1"/>
+              </a:cxn>
+              <a:cxn ang="0">
+                <a:pos x="connsiteX2" y="connsiteY2"/>
+              </a:cxn>
+              <a:cxn ang="0">
+                <a:pos x="connsiteX3" y="connsiteY3"/>
+              </a:cxn>
+              <a:cxn ang="0">
+                <a:pos x="connsiteX4" y="connsiteY4"/>
+              </a:cxn>
+              <a:cxn ang="0">
+                <a:pos x="connsiteX5" y="connsiteY5"/>
+              </a:cxn>
+              <a:cxn ang="0">
+                <a:pos x="connsiteX6" y="connsiteY6"/>
+              </a:cxn>
+              <a:cxn ang="0">
+                <a:pos x="connsiteX7" y="connsiteY7"/>
+              </a:cxn>
+              <a:cxn ang="0">
+                <a:pos x="connsiteX8" y="connsiteY8"/>
+              </a:cxn>
+            </a:cxnLst>
+            <a:rect l="l" t="t" r="r" b="b"/>
+            <a:pathLst>
+              <a:path w="3900357" h="4178958">
+                <a:moveTo>
+                  <a:pt x="2432225" y="93939"/>
+                </a:moveTo>
+                <a:cubicBezTo>
+                  <a:pt x="3282786" y="358491"/>
+                  <a:pt x="3900357" y="1151865"/>
+                  <a:pt x="3900357" y="2089479"/>
+                </a:cubicBezTo>
+                <a:cubicBezTo>
+                  <a:pt x="3900357" y="3243466"/>
+                  <a:pt x="2964865" y="4178958"/>
+                  <a:pt x="1810878" y="4178958"/>
+                </a:cubicBezTo>
+                <a:cubicBezTo>
+                  <a:pt x="1089636" y="4178958"/>
+                  <a:pt x="453744" y="3813531"/>
+                  <a:pt x="78249" y="3257727"/>
+                </a:cubicBezTo>
+                <a:lnTo>
+                  <a:pt x="0" y="3128923"/>
+                </a:lnTo>
+                <a:lnTo>
+                  <a:pt x="831324" y="244281"/>
+                </a:lnTo>
+                <a:lnTo>
+                  <a:pt x="997559" y="164202"/>
+                </a:lnTo>
+                <a:cubicBezTo>
+                  <a:pt x="1247540" y="58468"/>
+                  <a:pt x="1522381" y="0"/>
+                  <a:pt x="1810878" y="0"/>
+                </a:cubicBezTo>
+                <a:cubicBezTo>
+                  <a:pt x="2027251" y="0"/>
+                  <a:pt x="2235942" y="32888"/>
+                  <a:pt x="2432225" y="93939"/>
+                </a:cubicBezTo>
+                <a:close/>
+              </a:path>
+            </a:pathLst>
+          </a:custGeom>
+          <a:gradFill>
+            <a:gsLst>
+              <a:gs pos="29000">
+                <a:srgbClr val="000000">
+                  <a:alpha val="0"/>
+                </a:srgbClr>
+              </a:gs>
+              <a:gs pos="100000">
+                <a:schemeClr val="accent1">
+                  <a:alpha val="43000"/>
+                </a:schemeClr>
+              </a:gs>
+            </a:gsLst>
+            <a:lin ang="1800000" scaled="0"/>
+          </a:gradFill>
+          <a:ln>
+            <a:noFill/>
+          </a:ln>
+        </p:spPr>
+        <p:style>
+          <a:lnRef idx="2">
+            <a:schemeClr val="accent1">
+              <a:shade val="50000"/>
+            </a:schemeClr>
+          </a:lnRef>
+          <a:fillRef idx="1">
+            <a:schemeClr val="accent1"/>
+          </a:fillRef>
+          <a:effectRef idx="0">
+            <a:schemeClr val="accent1"/>
+          </a:effectRef>
+          <a:fontRef idx="minor">
+            <a:schemeClr val="lt1"/>
+          </a:fontRef>
+        </p:style>
+        <p:txBody>
+          <a:bodyPr wrap="square" rtlCol="0" anchor="ctr">
+            <a:noAutofit/>
+          </a:bodyPr>
+          <a:lstStyle/>
+          <a:p>
+            <a:pPr algn="ctr"/>
+            <a:endParaRPr lang="en-US" dirty="0"/>
+          </a:p>
+        </p:txBody>
+      </p:sp>
+      <p:sp>
+        <p:nvSpPr>
+          <p:cNvPr id="21" name="Rectangle 20">
+            <a:extLst>
+              <a:ext uri="{FF2B5EF4-FFF2-40B4-BE49-F238E27FC236}">
+                <a16:creationId xmlns:a16="http://schemas.microsoft.com/office/drawing/2014/main" id="{8D71EDA1-87BF-4D5D-AB79-F346FD19278A}"/>
+              </a:ext>
+              <a:ext uri="{C183D7F6-B498-43B3-948B-1728B52AA6E4}">
+                <adec:decorative xmlns:adec="http://schemas.microsoft.com/office/drawing/2017/decorative" val="1"/>
+              </a:ext>
+            </a:extLst>
+          </p:cNvPr>
+          <p:cNvSpPr>
+            <a:spLocks noGrp="1" noRot="1" noChangeAspect="1" noMove="1" noResize="1" noEditPoints="1" noAdjustHandles="1" noChangeArrowheads="1" noChangeShapeType="1" noTextEdit="1"/>
+          </p:cNvSpPr>
+          <p:nvPr>
+            <p:extLst>
+              <p:ext uri="{386F3935-93C4-4BCD-93E2-E3B085C9AB24}">
+                <p16:designElem xmlns:p16="http://schemas.microsoft.com/office/powerpoint/2015/main" val="1"/>
+              </p:ext>
+            </p:extLst>
+          </p:nvPr>
+        </p:nvSpPr>
+        <p:spPr>
+          <a:xfrm rot="5400000" flipH="1">
+            <a:off x="-1410093" y="1399943"/>
+            <a:ext cx="6858003" cy="4037835"/>
+          </a:xfrm>
+          <a:prstGeom prst="rect">
+            <a:avLst/>
+          </a:prstGeom>
+          <a:gradFill>
+            <a:gsLst>
+              <a:gs pos="0">
+                <a:srgbClr val="000000">
+                  <a:alpha val="0"/>
+                </a:srgbClr>
+              </a:gs>
+              <a:gs pos="99000">
+                <a:schemeClr val="accent1">
+                  <a:lumMod val="60000"/>
+                  <a:lumOff val="40000"/>
+                  <a:alpha val="11000"/>
+                </a:schemeClr>
+              </a:gs>
+            </a:gsLst>
+            <a:lin ang="7200000" scaled="0"/>
+          </a:gradFill>
+          <a:ln>
+            <a:noFill/>
+          </a:ln>
+        </p:spPr>
+        <p:style>
+          <a:lnRef idx="2">
+            <a:schemeClr val="accent1">
+              <a:shade val="50000"/>
+            </a:schemeClr>
+          </a:lnRef>
+          <a:fillRef idx="1">
+            <a:schemeClr val="accent1"/>
+          </a:fillRef>
+          <a:effectRef idx="0">
+            <a:schemeClr val="accent1"/>
+          </a:effectRef>
+          <a:fontRef idx="minor">
+            <a:schemeClr val="lt1"/>
+          </a:fontRef>
+        </p:style>
+        <p:txBody>
+          <a:bodyPr rtlCol="0" anchor="ctr"/>
+          <a:lstStyle/>
+          <a:p>
+            <a:pPr algn="ctr"/>
+            <a:endParaRPr lang="en-US"/>
+          </a:p>
+        </p:txBody>
+      </p:sp>
+      <p:sp>
+        <p:nvSpPr>
+          <p:cNvPr id="2" name="Title 1">
+            <a:extLst>
+              <a:ext uri="{FF2B5EF4-FFF2-40B4-BE49-F238E27FC236}">
+                <a16:creationId xmlns:a16="http://schemas.microsoft.com/office/drawing/2014/main" id="{30EDCD59-BDCB-C874-ECEB-20050A508C6C}"/>
+              </a:ext>
+            </a:extLst>
+          </p:cNvPr>
+          <p:cNvSpPr>
+            <a:spLocks noGrp="1"/>
+          </p:cNvSpPr>
+          <p:nvPr>
+            <p:ph type="ctrTitle"/>
+          </p:nvPr>
+        </p:nvSpPr>
+        <p:spPr>
+          <a:xfrm>
+            <a:off x="466722" y="586855"/>
+            <a:ext cx="3201366" cy="3387497"/>
+          </a:xfrm>
+        </p:spPr>
+        <p:txBody>
+          <a:bodyPr vert="horz" lIns="91440" tIns="45720" rIns="91440" bIns="45720" rtlCol="0" anchor="b">
+            <a:normAutofit/>
+          </a:bodyPr>
+          <a:lstStyle/>
+          <a:p>
+            <a:r>
+              <a:rPr lang="en-US" sz="4000" kern="1200" dirty="0" err="1">
+                <a:solidFill>
+                  <a:srgbClr val="FFFFFF"/>
+                </a:solidFill>
+                <a:latin typeface="+mj-lt"/>
+                <a:ea typeface="+mj-ea"/>
+                <a:cs typeface="+mj-cs"/>
+              </a:rPr>
+              <a:t>Συμ</a:t>
+            </a:r>
+            <a:r>
+              <a:rPr lang="en-US" sz="4000" kern="1200" dirty="0">
+                <a:solidFill>
+                  <a:srgbClr val="FFFFFF"/>
+                </a:solidFill>
+                <a:latin typeface="+mj-lt"/>
+                <a:ea typeface="+mj-ea"/>
+                <a:cs typeface="+mj-cs"/>
+              </a:rPr>
+              <a:t>πέρασμα για τα μεγέθοι</a:t>
+            </a:r>
+            <a:r>
+              <a:rPr lang="el-GR" sz="4000" kern="1200" dirty="0">
+                <a:solidFill>
+                  <a:srgbClr val="FFFFFF"/>
+                </a:solidFill>
+                <a:latin typeface="+mj-lt"/>
+                <a:ea typeface="+mj-ea"/>
+                <a:cs typeface="+mj-cs"/>
+              </a:rPr>
+              <a:t> των</a:t>
+            </a:r>
+            <a:r>
+              <a:rPr lang="en-US" sz="4000" kern="1200" dirty="0">
+                <a:solidFill>
+                  <a:srgbClr val="FFFFFF"/>
+                </a:solidFill>
+                <a:latin typeface="+mj-lt"/>
+                <a:ea typeface="+mj-ea"/>
+                <a:cs typeface="+mj-cs"/>
+              </a:rPr>
+              <a:t> πα</a:t>
+            </a:r>
+            <a:r>
+              <a:rPr lang="en-US" sz="4000" kern="1200" dirty="0" err="1">
+                <a:solidFill>
+                  <a:srgbClr val="FFFFFF"/>
+                </a:solidFill>
+                <a:latin typeface="+mj-lt"/>
+                <a:ea typeface="+mj-ea"/>
+                <a:cs typeface="+mj-cs"/>
+              </a:rPr>
+              <a:t>κέτων</a:t>
+            </a:r>
+            <a:endParaRPr lang="en-US" sz="4000" kern="1200" dirty="0">
+              <a:solidFill>
+                <a:srgbClr val="FFFFFF"/>
+              </a:solidFill>
+              <a:latin typeface="+mj-lt"/>
+              <a:ea typeface="+mj-ea"/>
+              <a:cs typeface="+mj-cs"/>
+            </a:endParaRPr>
+          </a:p>
+        </p:txBody>
+      </p:sp>
+      <p:sp>
+        <p:nvSpPr>
+          <p:cNvPr id="4" name="Rectangle 1">
+            <a:extLst>
+              <a:ext uri="{FF2B5EF4-FFF2-40B4-BE49-F238E27FC236}">
+                <a16:creationId xmlns:a16="http://schemas.microsoft.com/office/drawing/2014/main" id="{10F70A4C-7E9E-E0BD-8092-D121DD195EB9}"/>
+              </a:ext>
+            </a:extLst>
+          </p:cNvPr>
+          <p:cNvSpPr>
+            <a:spLocks noGrp="1" noChangeArrowheads="1"/>
+          </p:cNvSpPr>
+          <p:nvPr>
+            <p:ph type="subTitle" idx="1"/>
+          </p:nvPr>
+        </p:nvSpPr>
+        <p:spPr bwMode="auto">
+          <a:xfrm>
+            <a:off x="4810259" y="649480"/>
+            <a:ext cx="6555347" cy="5546047"/>
+          </a:xfrm>
+          <a:prstGeom prst="rect">
+            <a:avLst/>
+          </a:prstGeom>
+          <a:extLst>
+            <a:ext uri="{909E8E84-426E-40DD-AFC4-6F175D3DCCD1}">
+              <a14:hiddenFill xmlns:a14="http://schemas.microsoft.com/office/drawing/2010/main">
+                <a:solidFill>
+                  <a:schemeClr val="accent1"/>
+                </a:solidFill>
+              </a14:hiddenFill>
+            </a:ext>
+            <a:ext uri="{91240B29-F687-4F45-9708-019B960494DF}">
+              <a14:hiddenLine xmlns:a14="http://schemas.microsoft.com/office/drawing/2010/main" w="9525">
+                <a:solidFill>
+                  <a:schemeClr val="tx1"/>
+                </a:solidFill>
+                <a:miter lim="800000"/>
+                <a:headEnd/>
+                <a:tailEnd/>
+              </a14:hiddenLine>
+            </a:ext>
+            <a:ext uri="{AF507438-7753-43E0-B8FC-AC1667EBCBE1}">
+              <a14:hiddenEffects xmlns:a14="http://schemas.microsoft.com/office/drawing/2010/main">
+                <a:effectLst>
+                  <a:outerShdw dist="35921" dir="2700000" algn="ctr" rotWithShape="0">
+                    <a:schemeClr val="bg2"/>
+                  </a:outerShdw>
+                </a:effectLst>
+              </a14:hiddenEffects>
+            </a:ext>
+          </a:extLst>
+        </p:spPr>
+        <p:txBody>
+          <a:bodyPr vert="horz" lIns="91440" tIns="45720" rIns="91440" bIns="45720" numCol="1" rtlCol="0" anchor="ctr" anchorCtr="0" compatLnSpc="1">
+            <a:prstTxWarp prst="textNoShape">
+              <a:avLst/>
+            </a:prstTxWarp>
+            <a:normAutofit/>
+          </a:bodyPr>
+          <a:lstStyle/>
+          <a:p>
+            <a:pPr marL="0" marR="0" lvl="0" indent="-228600" algn="l" fontAlgn="base">
+              <a:spcBef>
+                <a:spcPct val="0"/>
+              </a:spcBef>
+              <a:spcAft>
+                <a:spcPts val="600"/>
+              </a:spcAft>
+              <a:buClrTx/>
+              <a:buSzTx/>
+              <a:buFont typeface="Arial" panose="020B0604020202020204" pitchFamily="34" charset="0"/>
+              <a:buChar char="•"/>
+              <a:tabLst/>
+            </a:pPr>
+            <a:r>
+              <a:rPr kumimoji="0" lang="en-US" altLang="en-US" sz="2000" b="1" i="0" u="none" strike="noStrike" cap="none" normalizeH="0" baseline="0" dirty="0">
+                <a:ln>
+                  <a:noFill/>
+                </a:ln>
+                <a:effectLst/>
+              </a:rPr>
+              <a:t>Ο </a:t>
+            </a:r>
+            <a:r>
+              <a:rPr kumimoji="0" lang="en-US" altLang="en-US" sz="2000" b="1" i="0" u="none" strike="noStrike" cap="none" normalizeH="0" baseline="0" dirty="0" err="1">
+                <a:ln>
+                  <a:noFill/>
+                </a:ln>
+                <a:effectLst/>
+              </a:rPr>
+              <a:t>Ρόλος</a:t>
+            </a:r>
+            <a:r>
+              <a:rPr kumimoji="0" lang="en-US" altLang="en-US" sz="2000" b="1" i="0" u="none" strike="noStrike" cap="none" normalizeH="0" baseline="0" dirty="0">
+                <a:ln>
+                  <a:noFill/>
+                </a:ln>
+                <a:effectLst/>
+              </a:rPr>
+              <a:t> </a:t>
+            </a:r>
+            <a:r>
+              <a:rPr kumimoji="0" lang="en-US" altLang="en-US" sz="2000" b="1" i="0" u="none" strike="noStrike" cap="none" normalizeH="0" baseline="0" dirty="0" err="1">
+                <a:ln>
+                  <a:noFill/>
+                </a:ln>
+                <a:effectLst/>
+              </a:rPr>
+              <a:t>του</a:t>
+            </a:r>
+            <a:r>
+              <a:rPr kumimoji="0" lang="en-US" altLang="en-US" sz="2000" b="1" i="0" u="none" strike="noStrike" cap="none" normalizeH="0" baseline="0" dirty="0">
+                <a:ln>
+                  <a:noFill/>
+                </a:ln>
+                <a:effectLst/>
+              </a:rPr>
+              <a:t> Transmission Delay:</a:t>
+            </a:r>
+            <a:endParaRPr kumimoji="0" lang="en-US" altLang="en-US" sz="2000" b="0" i="0" u="none" strike="noStrike" cap="none" normalizeH="0" baseline="0" dirty="0">
+              <a:ln>
+                <a:noFill/>
+              </a:ln>
+              <a:effectLst/>
+            </a:endParaRPr>
+          </a:p>
+          <a:p>
+            <a:pPr marL="0" marR="0" lvl="0" indent="-228600" algn="l" fontAlgn="base">
+              <a:spcBef>
+                <a:spcPct val="0"/>
+              </a:spcBef>
+              <a:spcAft>
+                <a:spcPts val="600"/>
+              </a:spcAft>
+              <a:buClrTx/>
+              <a:buSzTx/>
+              <a:buFont typeface="Arial" panose="020B0604020202020204" pitchFamily="34" charset="0"/>
+              <a:buChar char="•"/>
+              <a:tabLst/>
+            </a:pPr>
+            <a:r>
+              <a:rPr kumimoji="0" lang="en-US" altLang="en-US" sz="2000" b="0" i="0" u="none" strike="noStrike" cap="none" normalizeH="0" baseline="0" dirty="0">
+                <a:ln>
+                  <a:noFill/>
+                </a:ln>
+                <a:effectLst/>
+              </a:rPr>
+              <a:t>Τα </a:t>
+            </a:r>
+            <a:r>
+              <a:rPr kumimoji="0" lang="en-US" altLang="en-US" sz="2000" b="0" i="0" u="none" strike="noStrike" cap="none" normalizeH="0" baseline="0" dirty="0" err="1">
+                <a:ln>
+                  <a:noFill/>
+                </a:ln>
+                <a:effectLst/>
+              </a:rPr>
+              <a:t>μεγάλ</a:t>
+            </a:r>
+            <a:r>
+              <a:rPr kumimoji="0" lang="en-US" altLang="en-US" sz="2000" b="0" i="0" u="none" strike="noStrike" cap="none" normalizeH="0" baseline="0" dirty="0">
+                <a:ln>
+                  <a:noFill/>
+                </a:ln>
+                <a:effectLst/>
+              </a:rPr>
+              <a:t>α πακέτα αυξάνουν δραματικά τον χρόνο μετάδοσης.</a:t>
+            </a:r>
+          </a:p>
+          <a:p>
+            <a:pPr marL="0" marR="0" lvl="0" indent="-228600" algn="l" fontAlgn="base">
+              <a:spcBef>
+                <a:spcPct val="0"/>
+              </a:spcBef>
+              <a:spcAft>
+                <a:spcPts val="600"/>
+              </a:spcAft>
+              <a:buClrTx/>
+              <a:buSzTx/>
+              <a:buFont typeface="Arial" panose="020B0604020202020204" pitchFamily="34" charset="0"/>
+              <a:buChar char="•"/>
+              <a:tabLst/>
+            </a:pPr>
+            <a:r>
+              <a:rPr kumimoji="0" lang="en-US" altLang="en-US" sz="2000" b="0" i="0" u="none" strike="noStrike" cap="none" normalizeH="0" baseline="0" dirty="0" err="1">
+                <a:ln>
+                  <a:noFill/>
+                </a:ln>
+                <a:effectLst/>
+              </a:rPr>
+              <a:t>Αυτό</a:t>
+            </a:r>
+            <a:r>
+              <a:rPr kumimoji="0" lang="en-US" altLang="en-US" sz="2000" b="0" i="0" u="none" strike="noStrike" cap="none" normalizeH="0" baseline="0" dirty="0">
+                <a:ln>
+                  <a:noFill/>
+                </a:ln>
+                <a:effectLst/>
+              </a:rPr>
+              <a:t> π</a:t>
+            </a:r>
+            <a:r>
+              <a:rPr kumimoji="0" lang="en-US" altLang="en-US" sz="2000" b="0" i="0" u="none" strike="noStrike" cap="none" normalizeH="0" baseline="0" dirty="0" err="1">
+                <a:ln>
+                  <a:noFill/>
+                </a:ln>
+                <a:effectLst/>
+              </a:rPr>
+              <a:t>ροκ</a:t>
+            </a:r>
+            <a:r>
+              <a:rPr kumimoji="0" lang="en-US" altLang="en-US" sz="2000" b="0" i="0" u="none" strike="noStrike" cap="none" normalizeH="0" baseline="0" dirty="0">
+                <a:ln>
+                  <a:noFill/>
+                </a:ln>
+                <a:effectLst/>
+              </a:rPr>
+              <a:t>αλεί ραγδαία συσσώρευση στην ουρά, καθώς τα νέα πακέτα φτάνουν πολύ πιο γρήγορα από ό,τι μπορεί να φύγει ένα "γίγαντας" πακέτο.</a:t>
+            </a:r>
+          </a:p>
+          <a:p>
+            <a:pPr marL="0" marR="0" lvl="0" indent="-228600" algn="l" fontAlgn="base">
+              <a:spcBef>
+                <a:spcPct val="0"/>
+              </a:spcBef>
+              <a:spcAft>
+                <a:spcPts val="600"/>
+              </a:spcAft>
+              <a:buClrTx/>
+              <a:buSzTx/>
+              <a:buFont typeface="Arial" panose="020B0604020202020204" pitchFamily="34" charset="0"/>
+              <a:buChar char="•"/>
+              <a:tabLst/>
+            </a:pPr>
+            <a:r>
+              <a:rPr kumimoji="0" lang="en-US" altLang="en-US" sz="2000" b="1" i="0" u="none" strike="noStrike" cap="none" normalizeH="0" baseline="0" dirty="0" err="1">
+                <a:ln>
+                  <a:noFill/>
+                </a:ln>
+                <a:effectLst/>
+              </a:rPr>
+              <a:t>Γενικό</a:t>
+            </a:r>
+            <a:r>
+              <a:rPr kumimoji="0" lang="en-US" altLang="en-US" sz="2000" b="1" i="0" u="none" strike="noStrike" cap="none" normalizeH="0" baseline="0" dirty="0">
+                <a:ln>
+                  <a:noFill/>
+                </a:ln>
+                <a:effectLst/>
+              </a:rPr>
+              <a:t> </a:t>
+            </a:r>
+            <a:r>
+              <a:rPr kumimoji="0" lang="en-US" altLang="en-US" sz="2000" b="1" i="0" u="none" strike="noStrike" cap="none" normalizeH="0" baseline="0" dirty="0" err="1">
+                <a:ln>
+                  <a:noFill/>
+                </a:ln>
+                <a:effectLst/>
+              </a:rPr>
+              <a:t>Συμ</a:t>
+            </a:r>
+            <a:r>
+              <a:rPr kumimoji="0" lang="en-US" altLang="en-US" sz="2000" b="1" i="0" u="none" strike="noStrike" cap="none" normalizeH="0" baseline="0" dirty="0">
+                <a:ln>
+                  <a:noFill/>
+                </a:ln>
+                <a:effectLst/>
+              </a:rPr>
+              <a:t>πέρασμα:</a:t>
+            </a:r>
+            <a:endParaRPr kumimoji="0" lang="en-US" altLang="en-US" sz="2000" b="0" i="0" u="none" strike="noStrike" cap="none" normalizeH="0" baseline="0" dirty="0">
+              <a:ln>
+                <a:noFill/>
+              </a:ln>
+              <a:effectLst/>
+            </a:endParaRPr>
+          </a:p>
+          <a:p>
+            <a:pPr marL="0" marR="0" lvl="0" indent="-228600" algn="l" fontAlgn="base">
+              <a:spcBef>
+                <a:spcPct val="0"/>
+              </a:spcBef>
+              <a:spcAft>
+                <a:spcPts val="600"/>
+              </a:spcAft>
+              <a:buClrTx/>
+              <a:buSzTx/>
+              <a:buFont typeface="Arial" panose="020B0604020202020204" pitchFamily="34" charset="0"/>
+              <a:buChar char="•"/>
+              <a:tabLst/>
+            </a:pPr>
+            <a:r>
+              <a:rPr kumimoji="0" lang="en-US" altLang="en-US" sz="2000" b="0" i="0" u="none" strike="noStrike" cap="none" normalizeH="0" baseline="0" dirty="0">
+                <a:ln>
+                  <a:noFill/>
+                </a:ln>
+                <a:effectLst/>
+              </a:rPr>
+              <a:t>Η απ</a:t>
+            </a:r>
+            <a:r>
+              <a:rPr kumimoji="0" lang="en-US" altLang="en-US" sz="2000" b="0" i="0" u="none" strike="noStrike" cap="none" normalizeH="0" baseline="0" dirty="0" err="1">
+                <a:ln>
+                  <a:noFill/>
+                </a:ln>
+                <a:effectLst/>
+              </a:rPr>
+              <a:t>όδοση</a:t>
+            </a:r>
+            <a:r>
+              <a:rPr kumimoji="0" lang="en-US" altLang="en-US" sz="2000" b="0" i="0" u="none" strike="noStrike" cap="none" normalizeH="0" baseline="0" dirty="0">
+                <a:ln>
+                  <a:noFill/>
+                </a:ln>
+                <a:effectLst/>
+              </a:rPr>
+              <a:t> </a:t>
+            </a:r>
+            <a:r>
+              <a:rPr kumimoji="0" lang="en-US" altLang="en-US" sz="2000" b="0" i="0" u="none" strike="noStrike" cap="none" normalizeH="0" baseline="0" dirty="0" err="1">
+                <a:ln>
+                  <a:noFill/>
+                </a:ln>
+                <a:effectLst/>
+              </a:rPr>
+              <a:t>του</a:t>
+            </a:r>
+            <a:r>
+              <a:rPr kumimoji="0" lang="en-US" altLang="en-US" sz="2000" b="0" i="0" u="none" strike="noStrike" cap="none" normalizeH="0" baseline="0" dirty="0">
+                <a:ln>
+                  <a:noFill/>
+                </a:ln>
+                <a:effectLst/>
+              </a:rPr>
+              <a:t> </a:t>
+            </a:r>
+            <a:r>
+              <a:rPr kumimoji="0" lang="en-US" altLang="en-US" sz="2000" b="0" i="0" u="none" strike="noStrike" cap="none" normalizeH="0" baseline="0" dirty="0" err="1">
+                <a:ln>
+                  <a:noFill/>
+                </a:ln>
+                <a:effectLst/>
+              </a:rPr>
+              <a:t>δικτύου</a:t>
+            </a:r>
+            <a:r>
+              <a:rPr kumimoji="0" lang="en-US" altLang="en-US" sz="2000" b="0" i="0" u="none" strike="noStrike" cap="none" normalizeH="0" baseline="0" dirty="0">
+                <a:ln>
+                  <a:noFill/>
+                </a:ln>
+                <a:effectLst/>
+              </a:rPr>
+              <a:t> </a:t>
+            </a:r>
+            <a:r>
+              <a:rPr kumimoji="0" lang="en-US" altLang="en-US" sz="2000" b="0" i="0" u="none" strike="noStrike" cap="none" normalizeH="0" baseline="0" dirty="0" err="1">
+                <a:ln>
+                  <a:noFill/>
+                </a:ln>
+                <a:effectLst/>
+              </a:rPr>
+              <a:t>δεν</a:t>
+            </a:r>
+            <a:r>
+              <a:rPr kumimoji="0" lang="en-US" altLang="en-US" sz="2000" b="0" i="0" u="none" strike="noStrike" cap="none" normalizeH="0" baseline="0" dirty="0">
+                <a:ln>
+                  <a:noFill/>
+                </a:ln>
+                <a:effectLst/>
+              </a:rPr>
+              <a:t> </a:t>
+            </a:r>
+            <a:r>
+              <a:rPr kumimoji="0" lang="en-US" altLang="en-US" sz="2000" b="0" i="0" u="none" strike="noStrike" cap="none" normalizeH="0" baseline="0" dirty="0" err="1">
+                <a:ln>
+                  <a:noFill/>
+                </a:ln>
+                <a:effectLst/>
+              </a:rPr>
+              <a:t>εξ</a:t>
+            </a:r>
+            <a:r>
+              <a:rPr kumimoji="0" lang="en-US" altLang="en-US" sz="2000" b="0" i="0" u="none" strike="noStrike" cap="none" normalizeH="0" baseline="0" dirty="0">
+                <a:ln>
+                  <a:noFill/>
+                </a:ln>
+                <a:effectLst/>
+              </a:rPr>
+              <a:t>αρτάται μόνο από το πόσα πακέτα στέλνουμε (pkts/s), αλλά και από το πόσο μεγάλα είναι (Bytes).</a:t>
+            </a:r>
+          </a:p>
+          <a:p>
+            <a:pPr marL="0" marR="0" lvl="0" indent="-228600" algn="l" fontAlgn="base">
+              <a:spcBef>
+                <a:spcPct val="0"/>
+              </a:spcBef>
+              <a:spcAft>
+                <a:spcPts val="600"/>
+              </a:spcAft>
+              <a:buClrTx/>
+              <a:buSzTx/>
+              <a:buFont typeface="Arial" panose="020B0604020202020204" pitchFamily="34" charset="0"/>
+              <a:buChar char="•"/>
+              <a:tabLst/>
+            </a:pPr>
+            <a:r>
+              <a:rPr kumimoji="0" lang="en-US" altLang="en-US" sz="2000" b="0" i="0" u="none" strike="noStrike" cap="none" normalizeH="0" baseline="0" dirty="0" err="1">
+                <a:ln>
+                  <a:noFill/>
+                </a:ln>
+                <a:effectLst/>
+              </a:rPr>
+              <a:t>Μικρά</a:t>
+            </a:r>
+            <a:r>
+              <a:rPr kumimoji="0" lang="en-US" altLang="en-US" sz="2000" b="0" i="0" u="none" strike="noStrike" cap="none" normalizeH="0" baseline="0" dirty="0">
+                <a:ln>
+                  <a:noFill/>
+                </a:ln>
+                <a:effectLst/>
+              </a:rPr>
+              <a:t> πα</a:t>
+            </a:r>
+            <a:r>
+              <a:rPr kumimoji="0" lang="en-US" altLang="en-US" sz="2000" b="0" i="0" u="none" strike="noStrike" cap="none" normalizeH="0" baseline="0" dirty="0" err="1">
+                <a:ln>
+                  <a:noFill/>
+                </a:ln>
+                <a:effectLst/>
+              </a:rPr>
+              <a:t>κέτ</a:t>
+            </a:r>
+            <a:r>
+              <a:rPr kumimoji="0" lang="en-US" altLang="en-US" sz="2000" b="0" i="0" u="none" strike="noStrike" cap="none" normalizeH="0" baseline="0" dirty="0">
+                <a:ln>
+                  <a:noFill/>
+                </a:ln>
+                <a:effectLst/>
+              </a:rPr>
+              <a:t>α = Χαμηλό Delay.</a:t>
+            </a:r>
+          </a:p>
+          <a:p>
+            <a:pPr marL="0" marR="0" lvl="0" indent="-228600" algn="l" fontAlgn="base">
+              <a:spcBef>
+                <a:spcPct val="0"/>
+              </a:spcBef>
+              <a:spcAft>
+                <a:spcPts val="600"/>
+              </a:spcAft>
+              <a:buClrTx/>
+              <a:buSzTx/>
+              <a:buFont typeface="Arial" panose="020B0604020202020204" pitchFamily="34" charset="0"/>
+              <a:buChar char="•"/>
+              <a:tabLst/>
+            </a:pPr>
+            <a:r>
+              <a:rPr kumimoji="0" lang="en-US" altLang="en-US" sz="2000" b="0" i="0" u="none" strike="noStrike" cap="none" normalizeH="0" baseline="0" dirty="0" err="1">
+                <a:ln>
+                  <a:noFill/>
+                </a:ln>
+                <a:effectLst/>
+              </a:rPr>
+              <a:t>Μεγάλ</a:t>
+            </a:r>
+            <a:r>
+              <a:rPr kumimoji="0" lang="en-US" altLang="en-US" sz="2000" b="0" i="0" u="none" strike="noStrike" cap="none" normalizeH="0" baseline="0" dirty="0">
+                <a:ln>
+                  <a:noFill/>
+                </a:ln>
+                <a:effectLst/>
+              </a:rPr>
+              <a:t>α πακέτα σε αργό δίκτυο = Καταστροφική Συμφόρηση.</a:t>
+            </a:r>
+          </a:p>
+          <a:p>
+            <a:pPr marL="0" marR="0" lvl="0" indent="-228600" algn="l" fontAlgn="base">
+              <a:spcBef>
+                <a:spcPct val="0"/>
+              </a:spcBef>
+              <a:spcAft>
+                <a:spcPts val="600"/>
+              </a:spcAft>
+              <a:buClrTx/>
+              <a:buSzTx/>
+              <a:buFont typeface="Arial" panose="020B0604020202020204" pitchFamily="34" charset="0"/>
+              <a:buChar char="•"/>
+              <a:tabLst/>
+            </a:pPr>
+            <a:endParaRPr kumimoji="0" lang="en-US" altLang="en-US" sz="2000" b="0" i="0" u="none" strike="noStrike" cap="none" normalizeH="0" baseline="0" dirty="0">
+              <a:ln>
+                <a:noFill/>
+              </a:ln>
+              <a:effectLst/>
+            </a:endParaRPr>
+          </a:p>
+        </p:txBody>
+      </p:sp>
+    </p:spTree>
+    <p:extLst>
+      <p:ext uri="{BB962C8B-B14F-4D97-AF65-F5344CB8AC3E}">
+        <p14:creationId xmlns:p14="http://schemas.microsoft.com/office/powerpoint/2010/main" val="3550188407"/>
+      </p:ext>
+    </p:extLst>
+  </p:cSld>
+  <p:clrMapOvr>
+    <a:masterClrMapping/>
+  </p:clrMapOvr>
+</p:sld>
+</file>
+
+<file path=ppt/slides/slide21.xml><?xml version="1.0" encoding="utf-8"?>
+<p:sld xmlns:a="http://schemas.openxmlformats.org/drawingml/2006/main" xmlns:r="http://schemas.openxmlformats.org/officeDocument/2006/relationships" xmlns:p="http://schemas.openxmlformats.org/presentationml/2006/main">
+  <p:cSld>
+    <p:bg>
+      <p:bgPr>
+        <a:solidFill>
+          <a:schemeClr val="bg1"/>
+        </a:solidFill>
+        <a:effectLst/>
+      </p:bgPr>
+    </p:bg>
+    <p:spTree>
+      <p:nvGrpSpPr>
+        <p:cNvPr id="1" name=""/>
+        <p:cNvGrpSpPr/>
+        <p:nvPr/>
+      </p:nvGrpSpPr>
+      <p:grpSpPr>
+        <a:xfrm>
+          <a:off x="0" y="0"/>
+          <a:ext cx="0" cy="0"/>
+          <a:chOff x="0" y="0"/>
+          <a:chExt cx="0" cy="0"/>
+        </a:xfrm>
+      </p:grpSpPr>
+      <p:sp useBgFill="1">
+        <p:nvSpPr>
+          <p:cNvPr id="43" name="Rectangle 42">
+            <a:extLst>
+              <a:ext uri="{FF2B5EF4-FFF2-40B4-BE49-F238E27FC236}">
+                <a16:creationId xmlns:a16="http://schemas.microsoft.com/office/drawing/2014/main" id="{0E30439A-8A5B-46EC-8283-9B6B031D40D0}"/>
+              </a:ext>
+              <a:ext uri="{C183D7F6-B498-43B3-948B-1728B52AA6E4}">
+                <adec:decorative xmlns:adec="http://schemas.microsoft.com/office/drawing/2017/decorative" val="1"/>
+              </a:ext>
+            </a:extLst>
+          </p:cNvPr>
+          <p:cNvSpPr>
+            <a:spLocks noGrp="1" noRot="1" noChangeAspect="1" noMove="1" noResize="1" noEditPoints="1" noAdjustHandles="1" noChangeArrowheads="1" noChangeShapeType="1" noTextEdit="1"/>
+          </p:cNvSpPr>
+          <p:nvPr>
+            <p:extLst>
+              <p:ext uri="{386F3935-93C4-4BCD-93E2-E3B085C9AB24}">
+                <p16:designElem xmlns:p16="http://schemas.microsoft.com/office/powerpoint/2015/main" val="1"/>
+              </p:ext>
+            </p:extLst>
+          </p:nvPr>
+        </p:nvSpPr>
+        <p:spPr>
+          <a:xfrm>
+            <a:off x="0" y="0"/>
+            <a:ext cx="12192000" cy="6858000"/>
+          </a:xfrm>
+          <a:prstGeom prst="rect">
+            <a:avLst/>
+          </a:prstGeom>
+          <a:ln w="12700" cap="flat" cmpd="sng" algn="ctr">
+            <a:noFill/>
+            <a:prstDash val="solid"/>
+            <a:miter lim="800000"/>
+          </a:ln>
+          <a:effectLst/>
+          <a:extLst>
+            <a:ext uri="{91240B29-F687-4F45-9708-019B960494DF}">
+              <a14:hiddenLine xmlns:a14="http://schemas.microsoft.com/office/drawing/2010/main" w="12700" cap="flat" cmpd="sng" algn="ctr">
+                <a:solidFill>
+                  <a:schemeClr val="accent1">
+                    <a:shade val="50000"/>
+                  </a:schemeClr>
+                </a:solidFill>
+                <a:prstDash val="solid"/>
+                <a:miter lim="800000"/>
+              </a14:hiddenLine>
+            </a:ext>
+          </a:extLst>
+        </p:spPr>
+        <p:style>
+          <a:lnRef idx="2">
+            <a:schemeClr val="accent1">
+              <a:shade val="50000"/>
+            </a:schemeClr>
+          </a:lnRef>
+          <a:fillRef idx="1">
+            <a:schemeClr val="accent1"/>
+          </a:fillRef>
+          <a:effectRef idx="0">
+            <a:schemeClr val="accent1"/>
+          </a:effectRef>
+          <a:fontRef idx="minor">
+            <a:schemeClr val="lt1"/>
+          </a:fontRef>
+        </p:style>
+        <p:txBody>
+          <a:bodyPr rtlCol="0" anchor="ctr"/>
+          <a:lstStyle/>
+          <a:p>
+            <a:pPr algn="ctr"/>
+            <a:endParaRPr lang="en-US"/>
+          </a:p>
+        </p:txBody>
+      </p:sp>
+      <p:sp>
+        <p:nvSpPr>
+          <p:cNvPr id="45" name="Rectangle 44">
+            <a:extLst>
+              <a:ext uri="{FF2B5EF4-FFF2-40B4-BE49-F238E27FC236}">
+                <a16:creationId xmlns:a16="http://schemas.microsoft.com/office/drawing/2014/main" id="{5CEAD642-85CF-4750-8432-7C80C901F001}"/>
+              </a:ext>
+              <a:ext uri="{C183D7F6-B498-43B3-948B-1728B52AA6E4}">
+                <adec:decorative xmlns:adec="http://schemas.microsoft.com/office/drawing/2017/decorative" val="1"/>
+              </a:ext>
+            </a:extLst>
+          </p:cNvPr>
+          <p:cNvSpPr>
+            <a:spLocks noGrp="1" noRot="1" noChangeAspect="1" noMove="1" noResize="1" noEditPoints="1" noAdjustHandles="1" noChangeArrowheads="1" noChangeShapeType="1" noTextEdit="1"/>
+          </p:cNvSpPr>
+          <p:nvPr>
+            <p:extLst>
+              <p:ext uri="{386F3935-93C4-4BCD-93E2-E3B085C9AB24}">
+                <p16:designElem xmlns:p16="http://schemas.microsoft.com/office/powerpoint/2015/main" val="1"/>
+              </p:ext>
+            </p:extLst>
+          </p:nvPr>
+        </p:nvSpPr>
+        <p:spPr>
+          <a:xfrm>
+            <a:off x="0" y="-427"/>
+            <a:ext cx="12192001" cy="6858000"/>
+          </a:xfrm>
+          <a:prstGeom prst="rect">
+            <a:avLst/>
+          </a:prstGeom>
+          <a:gradFill>
+            <a:gsLst>
+              <a:gs pos="0">
+                <a:srgbClr val="000000"/>
+              </a:gs>
+              <a:gs pos="100000">
+                <a:schemeClr val="accent1">
+                  <a:lumMod val="75000"/>
+                </a:schemeClr>
+              </a:gs>
+            </a:gsLst>
+            <a:lin ang="15000000" scaled="0"/>
+          </a:gradFill>
+          <a:ln>
+            <a:noFill/>
+          </a:ln>
+        </p:spPr>
+        <p:style>
+          <a:lnRef idx="2">
+            <a:schemeClr val="accent1">
+              <a:shade val="50000"/>
+            </a:schemeClr>
+          </a:lnRef>
+          <a:fillRef idx="1">
+            <a:schemeClr val="accent1"/>
+          </a:fillRef>
+          <a:effectRef idx="0">
+            <a:schemeClr val="accent1"/>
+          </a:effectRef>
+          <a:fontRef idx="minor">
+            <a:schemeClr val="lt1"/>
+          </a:fontRef>
+        </p:style>
+        <p:txBody>
+          <a:bodyPr rtlCol="0" anchor="ctr"/>
+          <a:lstStyle/>
+          <a:p>
+            <a:pPr algn="ctr"/>
+            <a:endParaRPr lang="en-US"/>
+          </a:p>
+        </p:txBody>
+      </p:sp>
+      <p:sp>
+        <p:nvSpPr>
+          <p:cNvPr id="47" name="Rectangle 46">
+            <a:extLst>
+              <a:ext uri="{FF2B5EF4-FFF2-40B4-BE49-F238E27FC236}">
+                <a16:creationId xmlns:a16="http://schemas.microsoft.com/office/drawing/2014/main" id="{FA33EEAE-15D5-4119-8C1E-89D943F911EF}"/>
+              </a:ext>
+              <a:ext uri="{C183D7F6-B498-43B3-948B-1728B52AA6E4}">
+                <adec:decorative xmlns:adec="http://schemas.microsoft.com/office/drawing/2017/decorative" val="1"/>
+              </a:ext>
+            </a:extLst>
+          </p:cNvPr>
+          <p:cNvSpPr>
+            <a:spLocks noGrp="1" noRot="1" noChangeAspect="1" noMove="1" noResize="1" noEditPoints="1" noAdjustHandles="1" noChangeArrowheads="1" noChangeShapeType="1" noTextEdit="1"/>
+          </p:cNvSpPr>
+          <p:nvPr>
+            <p:extLst>
+              <p:ext uri="{386F3935-93C4-4BCD-93E2-E3B085C9AB24}">
+                <p16:designElem xmlns:p16="http://schemas.microsoft.com/office/powerpoint/2015/main" val="1"/>
+              </p:ext>
+            </p:extLst>
+          </p:nvPr>
+        </p:nvSpPr>
+        <p:spPr>
+          <a:xfrm rot="10800000" flipH="1">
+            <a:off x="455521" y="-1720"/>
+            <a:ext cx="11750040" cy="6840685"/>
+          </a:xfrm>
+          <a:prstGeom prst="rect">
+            <a:avLst/>
+          </a:prstGeom>
+          <a:gradFill>
+            <a:gsLst>
+              <a:gs pos="21000">
+                <a:schemeClr val="accent1">
+                  <a:lumMod val="50000"/>
+                  <a:alpha val="61000"/>
+                </a:schemeClr>
+              </a:gs>
+              <a:gs pos="100000">
+                <a:schemeClr val="accent1">
+                  <a:alpha val="0"/>
+                </a:schemeClr>
+              </a:gs>
+            </a:gsLst>
+            <a:lin ang="21594000" scaled="0"/>
+          </a:gradFill>
+          <a:ln>
+            <a:noFill/>
+          </a:ln>
+        </p:spPr>
+        <p:style>
+          <a:lnRef idx="2">
+            <a:schemeClr val="accent1">
+              <a:shade val="50000"/>
+            </a:schemeClr>
+          </a:lnRef>
+          <a:fillRef idx="1">
+            <a:schemeClr val="accent1"/>
+          </a:fillRef>
+          <a:effectRef idx="0">
+            <a:schemeClr val="accent1"/>
+          </a:effectRef>
+          <a:fontRef idx="minor">
+            <a:schemeClr val="lt1"/>
+          </a:fontRef>
+        </p:style>
+        <p:txBody>
+          <a:bodyPr rtlCol="0" anchor="ctr"/>
+          <a:lstStyle/>
+          <a:p>
+            <a:pPr algn="ctr"/>
+            <a:endParaRPr lang="en-US"/>
+          </a:p>
+        </p:txBody>
+      </p:sp>
+      <p:sp>
+        <p:nvSpPr>
+          <p:cNvPr id="49" name="Rectangle 48">
+            <a:extLst>
+              <a:ext uri="{FF2B5EF4-FFF2-40B4-BE49-F238E27FC236}">
+                <a16:creationId xmlns:a16="http://schemas.microsoft.com/office/drawing/2014/main" id="{730D8B3B-9B80-4025-B934-26DC7D7CD231}"/>
+              </a:ext>
+              <a:ext uri="{C183D7F6-B498-43B3-948B-1728B52AA6E4}">
+                <adec:decorative xmlns:adec="http://schemas.microsoft.com/office/drawing/2017/decorative" val="1"/>
+              </a:ext>
+            </a:extLst>
+          </p:cNvPr>
+          <p:cNvSpPr>
+            <a:spLocks noGrp="1" noRot="1" noChangeAspect="1" noMove="1" noResize="1" noEditPoints="1" noAdjustHandles="1" noChangeArrowheads="1" noChangeShapeType="1" noTextEdit="1"/>
+          </p:cNvSpPr>
+          <p:nvPr>
+            <p:extLst>
+              <p:ext uri="{386F3935-93C4-4BCD-93E2-E3B085C9AB24}">
+                <p16:designElem xmlns:p16="http://schemas.microsoft.com/office/powerpoint/2015/main" val="1"/>
+              </p:ext>
+            </p:extLst>
+          </p:nvPr>
+        </p:nvSpPr>
+        <p:spPr>
+          <a:xfrm>
+            <a:off x="8606054" y="-1291"/>
+            <a:ext cx="3608179" cy="6858864"/>
+          </a:xfrm>
+          <a:prstGeom prst="rect">
+            <a:avLst/>
+          </a:prstGeom>
+          <a:gradFill>
+            <a:gsLst>
+              <a:gs pos="0">
+                <a:schemeClr val="accent1">
+                  <a:lumMod val="75000"/>
+                  <a:alpha val="0"/>
+                </a:schemeClr>
+              </a:gs>
+              <a:gs pos="99000">
+                <a:srgbClr val="000000">
+                  <a:alpha val="41000"/>
+                </a:srgbClr>
+              </a:gs>
+            </a:gsLst>
+            <a:lin ang="16200000" scaled="0"/>
+          </a:gradFill>
+          <a:ln>
+            <a:noFill/>
+          </a:ln>
+        </p:spPr>
+        <p:style>
+          <a:lnRef idx="2">
+            <a:schemeClr val="accent1">
+              <a:shade val="50000"/>
+            </a:schemeClr>
+          </a:lnRef>
+          <a:fillRef idx="1">
+            <a:schemeClr val="accent1"/>
+          </a:fillRef>
+          <a:effectRef idx="0">
+            <a:schemeClr val="accent1"/>
+          </a:effectRef>
+          <a:fontRef idx="minor">
+            <a:schemeClr val="lt1"/>
+          </a:fontRef>
+        </p:style>
+        <p:txBody>
+          <a:bodyPr rtlCol="0" anchor="ctr"/>
+          <a:lstStyle/>
+          <a:p>
+            <a:pPr algn="ctr"/>
+            <a:endParaRPr lang="en-US"/>
+          </a:p>
+        </p:txBody>
+      </p:sp>
+      <p:sp>
+        <p:nvSpPr>
+          <p:cNvPr id="51" name="Oval 50">
+            <a:extLst>
+              <a:ext uri="{FF2B5EF4-FFF2-40B4-BE49-F238E27FC236}">
+                <a16:creationId xmlns:a16="http://schemas.microsoft.com/office/drawing/2014/main" id="{B5A1B09C-1565-46F8-B70F-621C5EB48A09}"/>
+              </a:ext>
+              <a:ext uri="{C183D7F6-B498-43B3-948B-1728B52AA6E4}">
+                <adec:decorative xmlns:adec="http://schemas.microsoft.com/office/drawing/2017/decorative" val="1"/>
+              </a:ext>
+            </a:extLst>
+          </p:cNvPr>
+          <p:cNvSpPr>
+            <a:spLocks noGrp="1" noRot="1" noChangeAspect="1" noMove="1" noResize="1" noEditPoints="1" noAdjustHandles="1" noChangeArrowheads="1" noChangeShapeType="1" noTextEdit="1"/>
+          </p:cNvSpPr>
+          <p:nvPr>
+            <p:extLst>
+              <p:ext uri="{386F3935-93C4-4BCD-93E2-E3B085C9AB24}">
+                <p16:designElem xmlns:p16="http://schemas.microsoft.com/office/powerpoint/2015/main" val="1"/>
+              </p:ext>
+            </p:extLst>
+          </p:nvPr>
+        </p:nvSpPr>
+        <p:spPr>
+          <a:xfrm rot="15274173">
+            <a:off x="6059728" y="779270"/>
+            <a:ext cx="4967533" cy="4988390"/>
+          </a:xfrm>
+          <a:prstGeom prst="ellipse">
+            <a:avLst/>
+          </a:prstGeom>
+          <a:gradFill>
+            <a:gsLst>
+              <a:gs pos="0">
+                <a:schemeClr val="accent1">
+                  <a:alpha val="24000"/>
+                </a:schemeClr>
+              </a:gs>
+              <a:gs pos="79000">
+                <a:schemeClr val="accent1">
+                  <a:lumMod val="60000"/>
+                  <a:lumOff val="40000"/>
+                  <a:alpha val="0"/>
+                </a:schemeClr>
+              </a:gs>
+            </a:gsLst>
+            <a:lin ang="14400000" scaled="0"/>
+          </a:gradFill>
+          <a:ln>
+            <a:noFill/>
+          </a:ln>
+        </p:spPr>
+        <p:style>
+          <a:lnRef idx="2">
+            <a:schemeClr val="accent1">
+              <a:shade val="50000"/>
+            </a:schemeClr>
+          </a:lnRef>
+          <a:fillRef idx="1">
+            <a:schemeClr val="accent1"/>
+          </a:fillRef>
+          <a:effectRef idx="0">
+            <a:schemeClr val="accent1"/>
+          </a:effectRef>
+          <a:fontRef idx="minor">
+            <a:schemeClr val="lt1"/>
+          </a:fontRef>
+        </p:style>
+        <p:txBody>
+          <a:bodyPr rtlCol="0" anchor="ctr"/>
+          <a:lstStyle/>
+          <a:p>
+            <a:pPr algn="ctr"/>
+            <a:endParaRPr lang="en-US" dirty="0"/>
+          </a:p>
+        </p:txBody>
+      </p:sp>
+      <p:sp>
+        <p:nvSpPr>
+          <p:cNvPr id="2" name="Title 1">
+            <a:extLst>
+              <a:ext uri="{FF2B5EF4-FFF2-40B4-BE49-F238E27FC236}">
+                <a16:creationId xmlns:a16="http://schemas.microsoft.com/office/drawing/2014/main" id="{0657CAE8-535E-E416-9847-2C5FF5FB0FD6}"/>
+              </a:ext>
+            </a:extLst>
+          </p:cNvPr>
+          <p:cNvSpPr>
+            <a:spLocks noGrp="1"/>
+          </p:cNvSpPr>
+          <p:nvPr>
+            <p:ph type="title"/>
+          </p:nvPr>
+        </p:nvSpPr>
+        <p:spPr>
+          <a:xfrm>
+            <a:off x="1386865" y="818984"/>
+            <a:ext cx="6596245" cy="3268520"/>
+          </a:xfrm>
+        </p:spPr>
+        <p:txBody>
+          <a:bodyPr vert="horz" lIns="91440" tIns="45720" rIns="91440" bIns="45720" rtlCol="0" anchor="b">
+            <a:normAutofit/>
+          </a:bodyPr>
+          <a:lstStyle/>
+          <a:p>
+            <a:pPr algn="r"/>
+            <a:r>
+              <a:rPr lang="en-US" sz="4800" b="1" kern="1200">
+                <a:solidFill>
+                  <a:srgbClr val="FFFFFF"/>
+                </a:solidFill>
+                <a:latin typeface="+mj-lt"/>
+                <a:ea typeface="+mj-ea"/>
+                <a:cs typeface="+mj-cs"/>
+              </a:rPr>
+              <a:t>Ευχαριστούμε για τον χρόνο σας!</a:t>
+            </a:r>
+          </a:p>
+        </p:txBody>
+      </p:sp>
+      <p:sp>
+        <p:nvSpPr>
+          <p:cNvPr id="53" name="Rectangle 52">
+            <a:extLst>
+              <a:ext uri="{FF2B5EF4-FFF2-40B4-BE49-F238E27FC236}">
+                <a16:creationId xmlns:a16="http://schemas.microsoft.com/office/drawing/2014/main" id="{8C516CC8-80AC-446C-A56E-9F54B7210402}"/>
+              </a:ext>
+              <a:ext uri="{C183D7F6-B498-43B3-948B-1728B52AA6E4}">
+                <adec:decorative xmlns:adec="http://schemas.microsoft.com/office/drawing/2017/decorative" val="1"/>
+              </a:ext>
+            </a:extLst>
+          </p:cNvPr>
+          <p:cNvSpPr>
+            <a:spLocks noGrp="1" noRot="1" noChangeAspect="1" noMove="1" noResize="1" noEditPoints="1" noAdjustHandles="1" noChangeArrowheads="1" noChangeShapeType="1" noTextEdit="1"/>
+          </p:cNvSpPr>
+          <p:nvPr>
+            <p:extLst>
+              <p:ext uri="{386F3935-93C4-4BCD-93E2-E3B085C9AB24}">
+                <p16:designElem xmlns:p16="http://schemas.microsoft.com/office/powerpoint/2015/main" val="1"/>
+              </p:ext>
+            </p:extLst>
+          </p:nvPr>
+        </p:nvSpPr>
+        <p:spPr>
+          <a:xfrm rot="10800000" flipH="1">
+            <a:off x="6314" y="4480038"/>
+            <a:ext cx="12179371" cy="2377962"/>
+          </a:xfrm>
+          <a:prstGeom prst="rect">
+            <a:avLst/>
+          </a:prstGeom>
+          <a:gradFill>
+            <a:gsLst>
+              <a:gs pos="0">
+                <a:schemeClr val="accent1">
+                  <a:lumMod val="75000"/>
+                  <a:alpha val="50000"/>
+                </a:schemeClr>
+              </a:gs>
+              <a:gs pos="99000">
+                <a:srgbClr val="000000">
+                  <a:alpha val="34000"/>
+                </a:srgbClr>
+              </a:gs>
+            </a:gsLst>
+            <a:lin ang="17400000" scaled="0"/>
+          </a:gradFill>
+          <a:ln>
+            <a:noFill/>
+          </a:ln>
+        </p:spPr>
+        <p:style>
+          <a:lnRef idx="2">
+            <a:schemeClr val="accent1">
+              <a:shade val="50000"/>
+            </a:schemeClr>
+          </a:lnRef>
+          <a:fillRef idx="1">
+            <a:schemeClr val="accent1"/>
+          </a:fillRef>
+          <a:effectRef idx="0">
+            <a:schemeClr val="accent1"/>
+          </a:effectRef>
+          <a:fontRef idx="minor">
+            <a:schemeClr val="lt1"/>
+          </a:fontRef>
+        </p:style>
+        <p:txBody>
+          <a:bodyPr rtlCol="0" anchor="ctr"/>
+          <a:lstStyle/>
+          <a:p>
+            <a:pPr algn="ctr"/>
+            <a:endParaRPr lang="en-US"/>
+          </a:p>
+        </p:txBody>
+      </p:sp>
+      <p:sp>
+        <p:nvSpPr>
+          <p:cNvPr id="55" name="Rectangle 54">
+            <a:extLst>
+              <a:ext uri="{FF2B5EF4-FFF2-40B4-BE49-F238E27FC236}">
+                <a16:creationId xmlns:a16="http://schemas.microsoft.com/office/drawing/2014/main" id="{53947E58-F088-49F1-A3D1-DEA690192E84}"/>
+              </a:ext>
+              <a:ext uri="{C183D7F6-B498-43B3-948B-1728B52AA6E4}">
+                <adec:decorative xmlns:adec="http://schemas.microsoft.com/office/drawing/2017/decorative" val="1"/>
+              </a:ext>
+            </a:extLst>
+          </p:cNvPr>
+          <p:cNvSpPr>
+            <a:spLocks noGrp="1" noRot="1" noChangeAspect="1" noMove="1" noResize="1" noEditPoints="1" noAdjustHandles="1" noChangeArrowheads="1" noChangeShapeType="1" noTextEdit="1"/>
+          </p:cNvSpPr>
+          <p:nvPr>
+            <p:extLst>
+              <p:ext uri="{386F3935-93C4-4BCD-93E2-E3B085C9AB24}">
+                <p16:designElem xmlns:p16="http://schemas.microsoft.com/office/powerpoint/2015/main" val="1"/>
+              </p:ext>
+            </p:extLst>
+          </p:nvPr>
+        </p:nvSpPr>
+        <p:spPr>
+          <a:xfrm rot="16200000" flipH="1">
+            <a:off x="6967085" y="1632660"/>
+            <a:ext cx="6857572" cy="3592258"/>
+          </a:xfrm>
+          <a:prstGeom prst="rect">
+            <a:avLst/>
+          </a:prstGeom>
+          <a:gradFill>
+            <a:gsLst>
+              <a:gs pos="0">
+                <a:schemeClr val="accent1">
+                  <a:lumMod val="75000"/>
+                  <a:alpha val="50000"/>
+                </a:schemeClr>
+              </a:gs>
+              <a:gs pos="99000">
+                <a:srgbClr val="000000">
+                  <a:alpha val="0"/>
+                </a:srgbClr>
+              </a:gs>
+            </a:gsLst>
+            <a:lin ang="15600000" scaled="0"/>
+          </a:gradFill>
+          <a:ln>
+            <a:noFill/>
+          </a:ln>
+        </p:spPr>
+        <p:style>
+          <a:lnRef idx="2">
+            <a:schemeClr val="accent1">
+              <a:shade val="50000"/>
+            </a:schemeClr>
+          </a:lnRef>
+          <a:fillRef idx="1">
+            <a:schemeClr val="accent1"/>
+          </a:fillRef>
+          <a:effectRef idx="0">
+            <a:schemeClr val="accent1"/>
+          </a:effectRef>
+          <a:fontRef idx="minor">
+            <a:schemeClr val="lt1"/>
+          </a:fontRef>
+        </p:style>
+        <p:txBody>
+          <a:bodyPr rtlCol="0" anchor="ctr"/>
+          <a:lstStyle/>
+          <a:p>
+            <a:pPr algn="ctr"/>
+            <a:endParaRPr lang="en-US"/>
+          </a:p>
+        </p:txBody>
+      </p:sp>
+    </p:spTree>
+    <p:extLst>
+      <p:ext uri="{BB962C8B-B14F-4D97-AF65-F5344CB8AC3E}">
+        <p14:creationId xmlns:p14="http://schemas.microsoft.com/office/powerpoint/2010/main" val="3988138943"/>
+      </p:ext>
+    </p:extLst>
+  </p:cSld>
+  <p:clrMapOvr>
+    <a:masterClrMapping/>
+  </p:clrMapOvr>
+  <p:timing>
+    <p:tnLst>
+      <p:par>
+        <p:cTn id="1" dur="indefinite" restart="never" nodeType="tmRoot">
+          <p:childTnLst>
+            <p:seq concurrent="1" nextAc="seek">
+              <p:cTn id="2" dur="indefinite" nodeType="mainSeq">
+                <p:childTnLst>
+                  <p:par>
+                    <p:cTn id="3" fill="hold">
+                      <p:stCondLst>
+                        <p:cond delay="indefinite"/>
+                        <p:cond evt="onBegin" delay="0">
+                          <p:tn val="2"/>
+                        </p:cond>
+                      </p:stCondLst>
+                      <p:childTnLst>
+                        <p:par>
+                          <p:cTn id="4" fill="hold">
+                            <p:stCondLst>
+                              <p:cond delay="0"/>
+                            </p:stCondLst>
+                            <p:childTnLst>
+                              <p:par>
+                                <p:cTn id="5" presetID="10" presetClass="entr" presetSubtype="0" fill="hold" grpId="0" nodeType="withEffect">
+                                  <p:stCondLst>
+                                    <p:cond delay="500"/>
+                                  </p:stCondLst>
+                                  <p:iterate>
+                                    <p:tmPct val="10000"/>
+                                  </p:iterate>
+                                  <p:childTnLst>
+                                    <p:set>
+                                      <p:cBhvr>
+                                        <p:cTn id="6" dur="1" fill="hold">
+                                          <p:stCondLst>
+                                            <p:cond delay="0"/>
+                                          </p:stCondLst>
+                                        </p:cTn>
+                                        <p:tgtEl>
+                                          <p:spTgt spid="2"/>
+                                        </p:tgtEl>
+                                        <p:attrNameLst>
+                                          <p:attrName>style.visibility</p:attrName>
+                                        </p:attrNameLst>
+                                      </p:cBhvr>
+                                      <p:to>
+                                        <p:strVal val="visible"/>
+                                      </p:to>
+                                    </p:set>
+                                    <p:animEffect transition="in" filter="fade">
+                                      <p:cBhvr>
+                                        <p:cTn id="7" dur="700"/>
+                                        <p:tgtEl>
+                                          <p:spTgt spid="2"/>
+                                        </p:tgtEl>
+                                      </p:cBhvr>
+                                    </p:animEffect>
+                                  </p:childTnLst>
+                                </p:cTn>
+                              </p:par>
+                            </p:childTnLst>
+                          </p:cTn>
+                        </p:par>
+                      </p:childTnLst>
+                    </p:cTn>
+                  </p:par>
+                </p:childTnLst>
+              </p:cTn>
+              <p:prevCondLst>
+                <p:cond evt="onPrev" delay="0">
+                  <p:tgtEl>
+                    <p:sldTgt/>
+                  </p:tgtEl>
+                </p:cond>
+              </p:prevCondLst>
+              <p:nextCondLst>
+                <p:cond evt="onNext" delay="0">
+                  <p:tgtEl>
+                    <p:sldTgt/>
+                  </p:tgtEl>
+                </p:cond>
+              </p:nextCondLst>
+            </p:seq>
+          </p:childTnLst>
+        </p:cTn>
+      </p:par>
+    </p:tnLst>
+    <p:bldLst>
+      <p:bldP spid="2" grpId="0"/>
+    </p:bldLst>
+  </p:timing>
 </p:sld>
 </file>
 

--- a/Παρουσίαση.pptx
+++ b/Παρουσίαση.pptx
@@ -5,7 +5,7 @@
     <p:sldMasterId id="2147483648" r:id="rId1"/>
   </p:sldMasterIdLst>
   <p:notesMasterIdLst>
-    <p:notesMasterId r:id="rId23"/>
+    <p:notesMasterId r:id="rId33"/>
   </p:notesMasterIdLst>
   <p:sldIdLst>
     <p:sldId id="256" r:id="rId2"/>
@@ -27,8 +27,18 @@
     <p:sldId id="279" r:id="rId18"/>
     <p:sldId id="280" r:id="rId19"/>
     <p:sldId id="281" r:id="rId20"/>
-    <p:sldId id="283" r:id="rId21"/>
-    <p:sldId id="282" r:id="rId22"/>
+    <p:sldId id="284" r:id="rId21"/>
+    <p:sldId id="285" r:id="rId22"/>
+    <p:sldId id="286" r:id="rId23"/>
+    <p:sldId id="287" r:id="rId24"/>
+    <p:sldId id="288" r:id="rId25"/>
+    <p:sldId id="289" r:id="rId26"/>
+    <p:sldId id="290" r:id="rId27"/>
+    <p:sldId id="291" r:id="rId28"/>
+    <p:sldId id="292" r:id="rId29"/>
+    <p:sldId id="293" r:id="rId30"/>
+    <p:sldId id="294" r:id="rId31"/>
+    <p:sldId id="282" r:id="rId32"/>
   </p:sldIdLst>
   <p:sldSz cx="12192000" cy="6858000"/>
   <p:notesSz cx="6858000" cy="9144000"/>
@@ -151,7 +161,17 @@
             <p14:sldId id="279"/>
             <p14:sldId id="280"/>
             <p14:sldId id="281"/>
-            <p14:sldId id="283"/>
+            <p14:sldId id="284"/>
+            <p14:sldId id="285"/>
+            <p14:sldId id="286"/>
+            <p14:sldId id="287"/>
+            <p14:sldId id="288"/>
+            <p14:sldId id="289"/>
+            <p14:sldId id="290"/>
+            <p14:sldId id="291"/>
+            <p14:sldId id="292"/>
+            <p14:sldId id="293"/>
+            <p14:sldId id="294"/>
             <p14:sldId id="282"/>
           </p14:sldIdLst>
         </p14:section>
@@ -2406,6 +2426,753 @@
 </file>
 
 <file path=ppt/diagrams/colors4.xml><?xml version="1.0" encoding="utf-8"?>
+<dgm:colorsDef xmlns:dgm="http://schemas.openxmlformats.org/drawingml/2006/diagram" xmlns:a="http://schemas.openxmlformats.org/drawingml/2006/main" uniqueId="urn:microsoft.com/office/officeart/2005/8/colors/accent1_2">
+  <dgm:title val=""/>
+  <dgm:desc val=""/>
+  <dgm:catLst>
+    <dgm:cat type="accent1" pri="11200"/>
+  </dgm:catLst>
+  <dgm:styleLbl name="node0">
+    <dgm:fillClrLst meth="repeat">
+      <a:schemeClr val="accent1"/>
+    </dgm:fillClrLst>
+    <dgm:linClrLst meth="repeat">
+      <a:schemeClr val="lt1"/>
+    </dgm:linClrLst>
+    <dgm:effectClrLst/>
+    <dgm:txLinClrLst/>
+    <dgm:txFillClrLst/>
+    <dgm:txEffectClrLst/>
+  </dgm:styleLbl>
+  <dgm:styleLbl name="alignNode1">
+    <dgm:fillClrLst meth="repeat">
+      <a:schemeClr val="accent1"/>
+    </dgm:fillClrLst>
+    <dgm:linClrLst meth="repeat">
+      <a:schemeClr val="accent1"/>
+    </dgm:linClrLst>
+    <dgm:effectClrLst/>
+    <dgm:txLinClrLst/>
+    <dgm:txFillClrLst/>
+    <dgm:txEffectClrLst/>
+  </dgm:styleLbl>
+  <dgm:styleLbl name="node1">
+    <dgm:fillClrLst meth="repeat">
+      <a:schemeClr val="accent1"/>
+    </dgm:fillClrLst>
+    <dgm:linClrLst meth="repeat">
+      <a:schemeClr val="lt1"/>
+    </dgm:linClrLst>
+    <dgm:effectClrLst/>
+    <dgm:txLinClrLst/>
+    <dgm:txFillClrLst/>
+    <dgm:txEffectClrLst/>
+  </dgm:styleLbl>
+  <dgm:styleLbl name="lnNode1">
+    <dgm:fillClrLst meth="repeat">
+      <a:schemeClr val="accent1"/>
+    </dgm:fillClrLst>
+    <dgm:linClrLst meth="repeat">
+      <a:schemeClr val="lt1"/>
+    </dgm:linClrLst>
+    <dgm:effectClrLst/>
+    <dgm:txLinClrLst/>
+    <dgm:txFillClrLst/>
+    <dgm:txEffectClrLst/>
+  </dgm:styleLbl>
+  <dgm:styleLbl name="vennNode1">
+    <dgm:fillClrLst meth="repeat">
+      <a:schemeClr val="accent1">
+        <a:alpha val="50000"/>
+      </a:schemeClr>
+    </dgm:fillClrLst>
+    <dgm:linClrLst meth="repeat">
+      <a:schemeClr val="lt1"/>
+    </dgm:linClrLst>
+    <dgm:effectClrLst/>
+    <dgm:txLinClrLst/>
+    <dgm:txFillClrLst/>
+    <dgm:txEffectClrLst/>
+  </dgm:styleLbl>
+  <dgm:styleLbl name="node2">
+    <dgm:fillClrLst meth="repeat">
+      <a:schemeClr val="accent1"/>
+    </dgm:fillClrLst>
+    <dgm:linClrLst meth="repeat">
+      <a:schemeClr val="lt1"/>
+    </dgm:linClrLst>
+    <dgm:effectClrLst/>
+    <dgm:txLinClrLst/>
+    <dgm:txFillClrLst/>
+    <dgm:txEffectClrLst/>
+  </dgm:styleLbl>
+  <dgm:styleLbl name="node3">
+    <dgm:fillClrLst meth="repeat">
+      <a:schemeClr val="accent1"/>
+    </dgm:fillClrLst>
+    <dgm:linClrLst meth="repeat">
+      <a:schemeClr val="lt1"/>
+    </dgm:linClrLst>
+    <dgm:effectClrLst/>
+    <dgm:txLinClrLst/>
+    <dgm:txFillClrLst/>
+    <dgm:txEffectClrLst/>
+  </dgm:styleLbl>
+  <dgm:styleLbl name="node4">
+    <dgm:fillClrLst meth="repeat">
+      <a:schemeClr val="accent1"/>
+    </dgm:fillClrLst>
+    <dgm:linClrLst meth="repeat">
+      <a:schemeClr val="lt1"/>
+    </dgm:linClrLst>
+    <dgm:effectClrLst/>
+    <dgm:txLinClrLst/>
+    <dgm:txFillClrLst/>
+    <dgm:txEffectClrLst/>
+  </dgm:styleLbl>
+  <dgm:styleLbl name="fgImgPlace1">
+    <dgm:fillClrLst meth="repeat">
+      <a:schemeClr val="accent1">
+        <a:tint val="50000"/>
+      </a:schemeClr>
+    </dgm:fillClrLst>
+    <dgm:linClrLst meth="repeat">
+      <a:schemeClr val="lt1"/>
+    </dgm:linClrLst>
+    <dgm:effectClrLst/>
+    <dgm:txLinClrLst/>
+    <dgm:txFillClrLst meth="repeat">
+      <a:schemeClr val="lt1"/>
+    </dgm:txFillClrLst>
+    <dgm:txEffectClrLst/>
+  </dgm:styleLbl>
+  <dgm:styleLbl name="alignImgPlace1">
+    <dgm:fillClrLst meth="repeat">
+      <a:schemeClr val="accent1">
+        <a:tint val="50000"/>
+      </a:schemeClr>
+    </dgm:fillClrLst>
+    <dgm:linClrLst meth="repeat">
+      <a:schemeClr val="lt1"/>
+    </dgm:linClrLst>
+    <dgm:effectClrLst/>
+    <dgm:txLinClrLst/>
+    <dgm:txFillClrLst meth="repeat">
+      <a:schemeClr val="lt1"/>
+    </dgm:txFillClrLst>
+    <dgm:txEffectClrLst/>
+  </dgm:styleLbl>
+  <dgm:styleLbl name="bgImgPlace1">
+    <dgm:fillClrLst meth="repeat">
+      <a:schemeClr val="accent1">
+        <a:tint val="50000"/>
+      </a:schemeClr>
+    </dgm:fillClrLst>
+    <dgm:linClrLst meth="repeat">
+      <a:schemeClr val="lt1"/>
+    </dgm:linClrLst>
+    <dgm:effectClrLst/>
+    <dgm:txLinClrLst/>
+    <dgm:txFillClrLst meth="repeat">
+      <a:schemeClr val="lt1"/>
+    </dgm:txFillClrLst>
+    <dgm:txEffectClrLst/>
+  </dgm:styleLbl>
+  <dgm:styleLbl name="sibTrans2D1">
+    <dgm:fillClrLst meth="repeat">
+      <a:schemeClr val="accent1">
+        <a:tint val="60000"/>
+      </a:schemeClr>
+    </dgm:fillClrLst>
+    <dgm:linClrLst meth="repeat">
+      <a:schemeClr val="accent1">
+        <a:tint val="60000"/>
+      </a:schemeClr>
+    </dgm:linClrLst>
+    <dgm:effectClrLst/>
+    <dgm:txLinClrLst/>
+    <dgm:txFillClrLst/>
+    <dgm:txEffectClrLst/>
+  </dgm:styleLbl>
+  <dgm:styleLbl name="fgSibTrans2D1">
+    <dgm:fillClrLst meth="repeat">
+      <a:schemeClr val="accent1">
+        <a:tint val="60000"/>
+      </a:schemeClr>
+    </dgm:fillClrLst>
+    <dgm:linClrLst meth="repeat">
+      <a:schemeClr val="accent1">
+        <a:tint val="60000"/>
+      </a:schemeClr>
+    </dgm:linClrLst>
+    <dgm:effectClrLst/>
+    <dgm:txLinClrLst/>
+    <dgm:txFillClrLst/>
+    <dgm:txEffectClrLst/>
+  </dgm:styleLbl>
+  <dgm:styleLbl name="bgSibTrans2D1">
+    <dgm:fillClrLst meth="repeat">
+      <a:schemeClr val="accent1">
+        <a:tint val="60000"/>
+      </a:schemeClr>
+    </dgm:fillClrLst>
+    <dgm:linClrLst meth="repeat">
+      <a:schemeClr val="accent1">
+        <a:tint val="60000"/>
+      </a:schemeClr>
+    </dgm:linClrLst>
+    <dgm:effectClrLst/>
+    <dgm:txLinClrLst/>
+    <dgm:txFillClrLst/>
+    <dgm:txEffectClrLst/>
+  </dgm:styleLbl>
+  <dgm:styleLbl name="sibTrans1D1">
+    <dgm:fillClrLst meth="repeat">
+      <a:schemeClr val="accent1"/>
+    </dgm:fillClrLst>
+    <dgm:linClrLst meth="repeat">
+      <a:schemeClr val="accent1"/>
+    </dgm:linClrLst>
+    <dgm:effectClrLst/>
+    <dgm:txLinClrLst/>
+    <dgm:txFillClrLst meth="repeat">
+      <a:schemeClr val="tx1"/>
+    </dgm:txFillClrLst>
+    <dgm:txEffectClrLst/>
+  </dgm:styleLbl>
+  <dgm:styleLbl name="callout">
+    <dgm:fillClrLst meth="repeat">
+      <a:schemeClr val="accent1"/>
+    </dgm:fillClrLst>
+    <dgm:linClrLst meth="repeat">
+      <a:schemeClr val="accent1">
+        <a:tint val="50000"/>
+      </a:schemeClr>
+    </dgm:linClrLst>
+    <dgm:effectClrLst/>
+    <dgm:txLinClrLst/>
+    <dgm:txFillClrLst meth="repeat">
+      <a:schemeClr val="tx1"/>
+    </dgm:txFillClrLst>
+    <dgm:txEffectClrLst/>
+  </dgm:styleLbl>
+  <dgm:styleLbl name="asst0">
+    <dgm:fillClrLst meth="repeat">
+      <a:schemeClr val="accent1"/>
+    </dgm:fillClrLst>
+    <dgm:linClrLst meth="repeat">
+      <a:schemeClr val="lt1"/>
+    </dgm:linClrLst>
+    <dgm:effectClrLst/>
+    <dgm:txLinClrLst/>
+    <dgm:txFillClrLst/>
+    <dgm:txEffectClrLst/>
+  </dgm:styleLbl>
+  <dgm:styleLbl name="asst1">
+    <dgm:fillClrLst meth="repeat">
+      <a:schemeClr val="accent1"/>
+    </dgm:fillClrLst>
+    <dgm:linClrLst meth="repeat">
+      <a:schemeClr val="lt1"/>
+    </dgm:linClrLst>
+    <dgm:effectClrLst/>
+    <dgm:txLinClrLst/>
+    <dgm:txFillClrLst/>
+    <dgm:txEffectClrLst/>
+  </dgm:styleLbl>
+  <dgm:styleLbl name="asst2">
+    <dgm:fillClrLst meth="repeat">
+      <a:schemeClr val="accent1"/>
+    </dgm:fillClrLst>
+    <dgm:linClrLst meth="repeat">
+      <a:schemeClr val="lt1"/>
+    </dgm:linClrLst>
+    <dgm:effectClrLst/>
+    <dgm:txLinClrLst/>
+    <dgm:txFillClrLst/>
+    <dgm:txEffectClrLst/>
+  </dgm:styleLbl>
+  <dgm:styleLbl name="asst3">
+    <dgm:fillClrLst meth="repeat">
+      <a:schemeClr val="accent1"/>
+    </dgm:fillClrLst>
+    <dgm:linClrLst meth="repeat">
+      <a:schemeClr val="lt1"/>
+    </dgm:linClrLst>
+    <dgm:effectClrLst/>
+    <dgm:txLinClrLst/>
+    <dgm:txFillClrLst/>
+    <dgm:txEffectClrLst/>
+  </dgm:styleLbl>
+  <dgm:styleLbl name="asst4">
+    <dgm:fillClrLst meth="repeat">
+      <a:schemeClr val="accent1"/>
+    </dgm:fillClrLst>
+    <dgm:linClrLst meth="repeat">
+      <a:schemeClr val="lt1"/>
+    </dgm:linClrLst>
+    <dgm:effectClrLst/>
+    <dgm:txLinClrLst/>
+    <dgm:txFillClrLst/>
+    <dgm:txEffectClrLst/>
+  </dgm:styleLbl>
+  <dgm:styleLbl name="parChTrans2D1">
+    <dgm:fillClrLst meth="repeat">
+      <a:schemeClr val="accent1">
+        <a:tint val="60000"/>
+      </a:schemeClr>
+    </dgm:fillClrLst>
+    <dgm:linClrLst meth="repeat">
+      <a:schemeClr val="accent1">
+        <a:tint val="60000"/>
+      </a:schemeClr>
+    </dgm:linClrLst>
+    <dgm:effectClrLst/>
+    <dgm:txLinClrLst/>
+    <dgm:txFillClrLst meth="repeat">
+      <a:schemeClr val="lt1"/>
+    </dgm:txFillClrLst>
+    <dgm:txEffectClrLst/>
+  </dgm:styleLbl>
+  <dgm:styleLbl name="parChTrans2D2">
+    <dgm:fillClrLst meth="repeat">
+      <a:schemeClr val="accent1"/>
+    </dgm:fillClrLst>
+    <dgm:linClrLst meth="repeat">
+      <a:schemeClr val="accent1"/>
+    </dgm:linClrLst>
+    <dgm:effectClrLst/>
+    <dgm:txLinClrLst/>
+    <dgm:txFillClrLst meth="repeat">
+      <a:schemeClr val="lt1"/>
+    </dgm:txFillClrLst>
+    <dgm:txEffectClrLst/>
+  </dgm:styleLbl>
+  <dgm:styleLbl name="parChTrans2D3">
+    <dgm:fillClrLst meth="repeat">
+      <a:schemeClr val="accent1"/>
+    </dgm:fillClrLst>
+    <dgm:linClrLst meth="repeat">
+      <a:schemeClr val="accent1"/>
+    </dgm:linClrLst>
+    <dgm:effectClrLst/>
+    <dgm:txLinClrLst/>
+    <dgm:txFillClrLst meth="repeat">
+      <a:schemeClr val="lt1"/>
+    </dgm:txFillClrLst>
+    <dgm:txEffectClrLst/>
+  </dgm:styleLbl>
+  <dgm:styleLbl name="parChTrans2D4">
+    <dgm:fillClrLst meth="repeat">
+      <a:schemeClr val="accent1"/>
+    </dgm:fillClrLst>
+    <dgm:linClrLst meth="repeat">
+      <a:schemeClr val="accent1"/>
+    </dgm:linClrLst>
+    <dgm:effectClrLst/>
+    <dgm:txLinClrLst/>
+    <dgm:txFillClrLst meth="repeat">
+      <a:schemeClr val="lt1"/>
+    </dgm:txFillClrLst>
+    <dgm:txEffectClrLst/>
+  </dgm:styleLbl>
+  <dgm:styleLbl name="parChTrans1D1">
+    <dgm:fillClrLst meth="repeat">
+      <a:schemeClr val="accent1"/>
+    </dgm:fillClrLst>
+    <dgm:linClrLst meth="repeat">
+      <a:schemeClr val="accent1">
+        <a:shade val="60000"/>
+      </a:schemeClr>
+    </dgm:linClrLst>
+    <dgm:effectClrLst/>
+    <dgm:txLinClrLst/>
+    <dgm:txFillClrLst meth="repeat">
+      <a:schemeClr val="tx1"/>
+    </dgm:txFillClrLst>
+    <dgm:txEffectClrLst/>
+  </dgm:styleLbl>
+  <dgm:styleLbl name="parChTrans1D2">
+    <dgm:fillClrLst meth="repeat">
+      <a:schemeClr val="accent1"/>
+    </dgm:fillClrLst>
+    <dgm:linClrLst meth="repeat">
+      <a:schemeClr val="accent1">
+        <a:shade val="60000"/>
+      </a:schemeClr>
+    </dgm:linClrLst>
+    <dgm:effectClrLst/>
+    <dgm:txLinClrLst/>
+    <dgm:txFillClrLst meth="repeat">
+      <a:schemeClr val="tx1"/>
+    </dgm:txFillClrLst>
+    <dgm:txEffectClrLst/>
+  </dgm:styleLbl>
+  <dgm:styleLbl name="parChTrans1D3">
+    <dgm:fillClrLst meth="repeat">
+      <a:schemeClr val="accent1"/>
+    </dgm:fillClrLst>
+    <dgm:linClrLst meth="repeat">
+      <a:schemeClr val="accent1">
+        <a:shade val="80000"/>
+      </a:schemeClr>
+    </dgm:linClrLst>
+    <dgm:effectClrLst/>
+    <dgm:txLinClrLst/>
+    <dgm:txFillClrLst meth="repeat">
+      <a:schemeClr val="tx1"/>
+    </dgm:txFillClrLst>
+    <dgm:txEffectClrLst/>
+  </dgm:styleLbl>
+  <dgm:styleLbl name="parChTrans1D4">
+    <dgm:fillClrLst meth="repeat">
+      <a:schemeClr val="accent1"/>
+    </dgm:fillClrLst>
+    <dgm:linClrLst meth="repeat">
+      <a:schemeClr val="accent1">
+        <a:shade val="80000"/>
+      </a:schemeClr>
+    </dgm:linClrLst>
+    <dgm:effectClrLst/>
+    <dgm:txLinClrLst/>
+    <dgm:txFillClrLst meth="repeat">
+      <a:schemeClr val="tx1"/>
+    </dgm:txFillClrLst>
+    <dgm:txEffectClrLst/>
+  </dgm:styleLbl>
+  <dgm:styleLbl name="fgAcc1">
+    <dgm:fillClrLst meth="repeat">
+      <a:schemeClr val="lt1">
+        <a:alpha val="90000"/>
+      </a:schemeClr>
+    </dgm:fillClrLst>
+    <dgm:linClrLst meth="repeat">
+      <a:schemeClr val="accent1"/>
+    </dgm:linClrLst>
+    <dgm:effectClrLst/>
+    <dgm:txLinClrLst/>
+    <dgm:txFillClrLst meth="repeat">
+      <a:schemeClr val="dk1"/>
+    </dgm:txFillClrLst>
+    <dgm:txEffectClrLst/>
+  </dgm:styleLbl>
+  <dgm:styleLbl name="conFgAcc1">
+    <dgm:fillClrLst meth="repeat">
+      <a:schemeClr val="lt1">
+        <a:alpha val="90000"/>
+      </a:schemeClr>
+    </dgm:fillClrLst>
+    <dgm:linClrLst meth="repeat">
+      <a:schemeClr val="accent1"/>
+    </dgm:linClrLst>
+    <dgm:effectClrLst/>
+    <dgm:txLinClrLst/>
+    <dgm:txFillClrLst meth="repeat">
+      <a:schemeClr val="dk1"/>
+    </dgm:txFillClrLst>
+    <dgm:txEffectClrLst/>
+  </dgm:styleLbl>
+  <dgm:styleLbl name="alignAcc1">
+    <dgm:fillClrLst meth="repeat">
+      <a:schemeClr val="lt1">
+        <a:alpha val="90000"/>
+      </a:schemeClr>
+    </dgm:fillClrLst>
+    <dgm:linClrLst meth="repeat">
+      <a:schemeClr val="accent1"/>
+    </dgm:linClrLst>
+    <dgm:effectClrLst/>
+    <dgm:txLinClrLst/>
+    <dgm:txFillClrLst meth="repeat">
+      <a:schemeClr val="dk1"/>
+    </dgm:txFillClrLst>
+    <dgm:txEffectClrLst/>
+  </dgm:styleLbl>
+  <dgm:styleLbl name="trAlignAcc1">
+    <dgm:fillClrLst meth="repeat">
+      <a:schemeClr val="lt1">
+        <a:alpha val="40000"/>
+      </a:schemeClr>
+    </dgm:fillClrLst>
+    <dgm:linClrLst meth="repeat">
+      <a:schemeClr val="accent1"/>
+    </dgm:linClrLst>
+    <dgm:effectClrLst/>
+    <dgm:txLinClrLst/>
+    <dgm:txFillClrLst meth="repeat">
+      <a:schemeClr val="dk1"/>
+    </dgm:txFillClrLst>
+    <dgm:txEffectClrLst/>
+  </dgm:styleLbl>
+  <dgm:styleLbl name="bgAcc1">
+    <dgm:fillClrLst meth="repeat">
+      <a:schemeClr val="lt1">
+        <a:alpha val="90000"/>
+      </a:schemeClr>
+    </dgm:fillClrLst>
+    <dgm:linClrLst meth="repeat">
+      <a:schemeClr val="accent1"/>
+    </dgm:linClrLst>
+    <dgm:effectClrLst/>
+    <dgm:txLinClrLst/>
+    <dgm:txFillClrLst meth="repeat">
+      <a:schemeClr val="dk1"/>
+    </dgm:txFillClrLst>
+    <dgm:txEffectClrLst/>
+  </dgm:styleLbl>
+  <dgm:styleLbl name="solidFgAcc1">
+    <dgm:fillClrLst meth="repeat">
+      <a:schemeClr val="lt1"/>
+    </dgm:fillClrLst>
+    <dgm:linClrLst meth="repeat">
+      <a:schemeClr val="accent1"/>
+    </dgm:linClrLst>
+    <dgm:effectClrLst/>
+    <dgm:txLinClrLst/>
+    <dgm:txFillClrLst meth="repeat">
+      <a:schemeClr val="dk1"/>
+    </dgm:txFillClrLst>
+    <dgm:txEffectClrLst/>
+  </dgm:styleLbl>
+  <dgm:styleLbl name="solidAlignAcc1">
+    <dgm:fillClrLst meth="repeat">
+      <a:schemeClr val="lt1"/>
+    </dgm:fillClrLst>
+    <dgm:linClrLst meth="repeat">
+      <a:schemeClr val="accent1"/>
+    </dgm:linClrLst>
+    <dgm:effectClrLst/>
+    <dgm:txLinClrLst/>
+    <dgm:txFillClrLst meth="repeat">
+      <a:schemeClr val="dk1"/>
+    </dgm:txFillClrLst>
+    <dgm:txEffectClrLst/>
+  </dgm:styleLbl>
+  <dgm:styleLbl name="solidBgAcc1">
+    <dgm:fillClrLst meth="repeat">
+      <a:schemeClr val="lt1"/>
+    </dgm:fillClrLst>
+    <dgm:linClrLst meth="repeat">
+      <a:schemeClr val="accent1"/>
+    </dgm:linClrLst>
+    <dgm:effectClrLst/>
+    <dgm:txLinClrLst/>
+    <dgm:txFillClrLst meth="repeat">
+      <a:schemeClr val="dk1"/>
+    </dgm:txFillClrLst>
+    <dgm:txEffectClrLst/>
+  </dgm:styleLbl>
+  <dgm:styleLbl name="fgAccFollowNode1">
+    <dgm:fillClrLst meth="repeat">
+      <a:schemeClr val="accent1">
+        <a:alpha val="90000"/>
+        <a:tint val="40000"/>
+      </a:schemeClr>
+    </dgm:fillClrLst>
+    <dgm:linClrLst meth="repeat">
+      <a:schemeClr val="accent1">
+        <a:alpha val="90000"/>
+        <a:tint val="40000"/>
+      </a:schemeClr>
+    </dgm:linClrLst>
+    <dgm:effectClrLst/>
+    <dgm:txLinClrLst/>
+    <dgm:txFillClrLst meth="repeat">
+      <a:schemeClr val="dk1"/>
+    </dgm:txFillClrLst>
+    <dgm:txEffectClrLst/>
+  </dgm:styleLbl>
+  <dgm:styleLbl name="alignAccFollowNode1">
+    <dgm:fillClrLst meth="repeat">
+      <a:schemeClr val="accent1">
+        <a:alpha val="90000"/>
+        <a:tint val="40000"/>
+      </a:schemeClr>
+    </dgm:fillClrLst>
+    <dgm:linClrLst meth="repeat">
+      <a:schemeClr val="accent1">
+        <a:alpha val="90000"/>
+        <a:tint val="40000"/>
+      </a:schemeClr>
+    </dgm:linClrLst>
+    <dgm:effectClrLst/>
+    <dgm:txLinClrLst/>
+    <dgm:txFillClrLst meth="repeat">
+      <a:schemeClr val="dk1"/>
+    </dgm:txFillClrLst>
+    <dgm:txEffectClrLst/>
+  </dgm:styleLbl>
+  <dgm:styleLbl name="bgAccFollowNode1">
+    <dgm:fillClrLst meth="repeat">
+      <a:schemeClr val="accent1">
+        <a:alpha val="90000"/>
+        <a:tint val="40000"/>
+      </a:schemeClr>
+    </dgm:fillClrLst>
+    <dgm:linClrLst meth="repeat">
+      <a:schemeClr val="accent1">
+        <a:alpha val="90000"/>
+        <a:tint val="40000"/>
+      </a:schemeClr>
+    </dgm:linClrLst>
+    <dgm:effectClrLst/>
+    <dgm:txLinClrLst/>
+    <dgm:txFillClrLst meth="repeat">
+      <a:schemeClr val="dk1"/>
+    </dgm:txFillClrLst>
+    <dgm:txEffectClrLst/>
+  </dgm:styleLbl>
+  <dgm:styleLbl name="fgAcc0">
+    <dgm:fillClrLst meth="repeat">
+      <a:schemeClr val="lt1">
+        <a:alpha val="90000"/>
+      </a:schemeClr>
+    </dgm:fillClrLst>
+    <dgm:linClrLst meth="repeat">
+      <a:schemeClr val="accent1"/>
+    </dgm:linClrLst>
+    <dgm:effectClrLst/>
+    <dgm:txLinClrLst/>
+    <dgm:txFillClrLst meth="repeat">
+      <a:schemeClr val="dk1"/>
+    </dgm:txFillClrLst>
+    <dgm:txEffectClrLst/>
+  </dgm:styleLbl>
+  <dgm:styleLbl name="fgAcc2">
+    <dgm:fillClrLst meth="repeat">
+      <a:schemeClr val="lt1">
+        <a:alpha val="90000"/>
+      </a:schemeClr>
+    </dgm:fillClrLst>
+    <dgm:linClrLst meth="repeat">
+      <a:schemeClr val="accent1"/>
+    </dgm:linClrLst>
+    <dgm:effectClrLst/>
+    <dgm:txLinClrLst/>
+    <dgm:txFillClrLst meth="repeat">
+      <a:schemeClr val="dk1"/>
+    </dgm:txFillClrLst>
+    <dgm:txEffectClrLst/>
+  </dgm:styleLbl>
+  <dgm:styleLbl name="fgAcc3">
+    <dgm:fillClrLst meth="repeat">
+      <a:schemeClr val="lt1">
+        <a:alpha val="90000"/>
+      </a:schemeClr>
+    </dgm:fillClrLst>
+    <dgm:linClrLst meth="repeat">
+      <a:schemeClr val="accent1"/>
+    </dgm:linClrLst>
+    <dgm:effectClrLst/>
+    <dgm:txLinClrLst/>
+    <dgm:txFillClrLst meth="repeat">
+      <a:schemeClr val="dk1"/>
+    </dgm:txFillClrLst>
+    <dgm:txEffectClrLst/>
+  </dgm:styleLbl>
+  <dgm:styleLbl name="fgAcc4">
+    <dgm:fillClrLst meth="repeat">
+      <a:schemeClr val="lt1">
+        <a:alpha val="90000"/>
+      </a:schemeClr>
+    </dgm:fillClrLst>
+    <dgm:linClrLst meth="repeat">
+      <a:schemeClr val="accent1"/>
+    </dgm:linClrLst>
+    <dgm:effectClrLst/>
+    <dgm:txLinClrLst/>
+    <dgm:txFillClrLst meth="repeat">
+      <a:schemeClr val="dk1"/>
+    </dgm:txFillClrLst>
+    <dgm:txEffectClrLst/>
+  </dgm:styleLbl>
+  <dgm:styleLbl name="bgShp">
+    <dgm:fillClrLst meth="repeat">
+      <a:schemeClr val="accent1">
+        <a:tint val="40000"/>
+      </a:schemeClr>
+    </dgm:fillClrLst>
+    <dgm:linClrLst meth="repeat">
+      <a:schemeClr val="accent1"/>
+    </dgm:linClrLst>
+    <dgm:effectClrLst/>
+    <dgm:txLinClrLst/>
+    <dgm:txFillClrLst meth="repeat">
+      <a:schemeClr val="dk1"/>
+    </dgm:txFillClrLst>
+    <dgm:txEffectClrLst/>
+  </dgm:styleLbl>
+  <dgm:styleLbl name="dkBgShp">
+    <dgm:fillClrLst meth="repeat">
+      <a:schemeClr val="accent1">
+        <a:shade val="80000"/>
+      </a:schemeClr>
+    </dgm:fillClrLst>
+    <dgm:linClrLst meth="repeat">
+      <a:schemeClr val="accent1"/>
+    </dgm:linClrLst>
+    <dgm:effectClrLst/>
+    <dgm:txLinClrLst/>
+    <dgm:txFillClrLst meth="repeat">
+      <a:schemeClr val="lt1"/>
+    </dgm:txFillClrLst>
+    <dgm:txEffectClrLst/>
+  </dgm:styleLbl>
+  <dgm:styleLbl name="trBgShp">
+    <dgm:fillClrLst meth="repeat">
+      <a:schemeClr val="accent1">
+        <a:tint val="50000"/>
+        <a:alpha val="40000"/>
+      </a:schemeClr>
+    </dgm:fillClrLst>
+    <dgm:linClrLst meth="repeat">
+      <a:schemeClr val="accent1"/>
+    </dgm:linClrLst>
+    <dgm:effectClrLst/>
+    <dgm:txLinClrLst/>
+    <dgm:txFillClrLst meth="repeat">
+      <a:schemeClr val="lt1"/>
+    </dgm:txFillClrLst>
+    <dgm:txEffectClrLst/>
+  </dgm:styleLbl>
+  <dgm:styleLbl name="fgShp">
+    <dgm:fillClrLst meth="repeat">
+      <a:schemeClr val="accent1">
+        <a:tint val="60000"/>
+      </a:schemeClr>
+    </dgm:fillClrLst>
+    <dgm:linClrLst meth="repeat">
+      <a:schemeClr val="lt1"/>
+    </dgm:linClrLst>
+    <dgm:effectClrLst/>
+    <dgm:txLinClrLst/>
+    <dgm:txFillClrLst meth="repeat">
+      <a:schemeClr val="dk1"/>
+    </dgm:txFillClrLst>
+    <dgm:txEffectClrLst/>
+  </dgm:styleLbl>
+  <dgm:styleLbl name="revTx">
+    <dgm:fillClrLst meth="repeat">
+      <a:schemeClr val="lt1">
+        <a:alpha val="0"/>
+      </a:schemeClr>
+    </dgm:fillClrLst>
+    <dgm:linClrLst meth="repeat">
+      <a:schemeClr val="dk1">
+        <a:alpha val="0"/>
+      </a:schemeClr>
+    </dgm:linClrLst>
+    <dgm:effectClrLst/>
+    <dgm:txLinClrLst/>
+    <dgm:txFillClrLst meth="repeat">
+      <a:schemeClr val="tx1"/>
+    </dgm:txFillClrLst>
+    <dgm:txEffectClrLst/>
+  </dgm:styleLbl>
+</dgm:colorsDef>
+</file>
+
+<file path=ppt/diagrams/colors5.xml><?xml version="1.0" encoding="utf-8"?>
 <dgm:colorsDef xmlns:dgm="http://schemas.openxmlformats.org/drawingml/2006/diagram" xmlns:a="http://schemas.openxmlformats.org/drawingml/2006/main" uniqueId="urn:microsoft.com/office/officeart/2005/8/colors/accent1_2">
   <dgm:title val=""/>
   <dgm:desc val=""/>
@@ -4857,6 +5624,498 @@
   <dgm:extLst>
     <a:ext uri="http://schemas.microsoft.com/office/drawing/2008/diagram">
       <dsp:dataModelExt xmlns:dsp="http://schemas.microsoft.com/office/drawing/2008/diagram" relId="rId12" minVer="http://schemas.openxmlformats.org/drawingml/2006/diagram"/>
+    </a:ext>
+  </dgm:extLst>
+</dgm:dataModel>
+</file>
+
+<file path=ppt/diagrams/data5.xml><?xml version="1.0" encoding="utf-8"?>
+<dgm:dataModel xmlns:dgm="http://schemas.openxmlformats.org/drawingml/2006/diagram" xmlns:a="http://schemas.openxmlformats.org/drawingml/2006/main">
+  <dgm:ptLst>
+    <dgm:pt modelId="{5B4EC66A-3880-4EEC-8269-BE951BDCBF94}" type="doc">
+      <dgm:prSet loTypeId="urn:microsoft.com/office/officeart/2005/8/layout/list1" loCatId="list" qsTypeId="urn:microsoft.com/office/officeart/2005/8/quickstyle/simple1" qsCatId="simple" csTypeId="urn:microsoft.com/office/officeart/2005/8/colors/accent1_2" csCatId="accent1"/>
+      <dgm:spPr/>
+      <dgm:t>
+        <a:bodyPr/>
+        <a:lstStyle/>
+        <a:p>
+          <a:endParaRPr lang="en-US"/>
+        </a:p>
+      </dgm:t>
+    </dgm:pt>
+    <dgm:pt modelId="{1BDC46E5-40EE-4B4C-A6AB-8E14491CBF01}">
+      <dgm:prSet/>
+      <dgm:spPr/>
+      <dgm:t>
+        <a:bodyPr/>
+        <a:lstStyle/>
+        <a:p>
+          <a:r>
+            <a:rPr lang="el-GR" b="1"/>
+            <a:t>Η Νέα Τοπολογία:</a:t>
+          </a:r>
+          <a:endParaRPr lang="en-US"/>
+        </a:p>
+      </dgm:t>
+    </dgm:pt>
+    <dgm:pt modelId="{A0AF79CE-72FC-47B5-872E-406CBD3BD36E}" type="parTrans" cxnId="{3697A46A-3D77-4C15-8C97-C4C7D13A822E}">
+      <dgm:prSet/>
+      <dgm:spPr/>
+      <dgm:t>
+        <a:bodyPr/>
+        <a:lstStyle/>
+        <a:p>
+          <a:endParaRPr lang="en-US"/>
+        </a:p>
+      </dgm:t>
+    </dgm:pt>
+    <dgm:pt modelId="{B948341E-48A3-4343-8718-BCE8121AFEED}" type="sibTrans" cxnId="{3697A46A-3D77-4C15-8C97-C4C7D13A822E}">
+      <dgm:prSet/>
+      <dgm:spPr/>
+      <dgm:t>
+        <a:bodyPr/>
+        <a:lstStyle/>
+        <a:p>
+          <a:endParaRPr lang="en-US"/>
+        </a:p>
+      </dgm:t>
+    </dgm:pt>
+    <dgm:pt modelId="{611CD1E7-E536-4842-B53B-DEEB5FEC4AF0}">
+      <dgm:prSet/>
+      <dgm:spPr/>
+      <dgm:t>
+        <a:bodyPr/>
+        <a:lstStyle/>
+        <a:p>
+          <a:r>
+            <a:rPr lang="el-GR"/>
+            <a:t>Προσθέτουμε πολυπλοκότητα: Από γραμμική αλυσίδα σε δομή "Y".</a:t>
+          </a:r>
+          <a:endParaRPr lang="en-US"/>
+        </a:p>
+      </dgm:t>
+    </dgm:pt>
+    <dgm:pt modelId="{60841768-5D14-476B-A6A1-B3283B82BC3C}" type="parTrans" cxnId="{F29C9A13-1808-4C01-A45D-74EB903E6A66}">
+      <dgm:prSet/>
+      <dgm:spPr/>
+      <dgm:t>
+        <a:bodyPr/>
+        <a:lstStyle/>
+        <a:p>
+          <a:endParaRPr lang="en-US"/>
+        </a:p>
+      </dgm:t>
+    </dgm:pt>
+    <dgm:pt modelId="{C5D69E6B-FEC8-4253-9D02-A59C8AB9C1EA}" type="sibTrans" cxnId="{F29C9A13-1808-4C01-A45D-74EB903E6A66}">
+      <dgm:prSet/>
+      <dgm:spPr/>
+      <dgm:t>
+        <a:bodyPr/>
+        <a:lstStyle/>
+        <a:p>
+          <a:endParaRPr lang="en-US"/>
+        </a:p>
+      </dgm:t>
+    </dgm:pt>
+    <dgm:pt modelId="{EEAA6608-3740-4156-8313-555F51A8EEFE}">
+      <dgm:prSet/>
+      <dgm:spPr/>
+      <dgm:t>
+        <a:bodyPr/>
+        <a:lstStyle/>
+        <a:p>
+          <a:r>
+            <a:rPr lang="el-GR" b="1"/>
+            <a:t>3 Hosts:</a:t>
+          </a:r>
+          <a:r>
+            <a:rPr lang="el-GR"/>
+            <a:t> Δύο Πηγές (Host A &amp; Host B) + Ένας Προορισμός.</a:t>
+          </a:r>
+          <a:endParaRPr lang="en-US"/>
+        </a:p>
+      </dgm:t>
+    </dgm:pt>
+    <dgm:pt modelId="{44668F1A-77CB-4A5D-9594-C1EEF24EDFD1}" type="parTrans" cxnId="{F8454E86-A42D-4460-8C64-6784A2FE9917}">
+      <dgm:prSet/>
+      <dgm:spPr/>
+      <dgm:t>
+        <a:bodyPr/>
+        <a:lstStyle/>
+        <a:p>
+          <a:endParaRPr lang="en-US"/>
+        </a:p>
+      </dgm:t>
+    </dgm:pt>
+    <dgm:pt modelId="{5267FCC9-F893-4FF9-A08A-E6E963BF2EA4}" type="sibTrans" cxnId="{F8454E86-A42D-4460-8C64-6784A2FE9917}">
+      <dgm:prSet/>
+      <dgm:spPr/>
+      <dgm:t>
+        <a:bodyPr/>
+        <a:lstStyle/>
+        <a:p>
+          <a:endParaRPr lang="en-US"/>
+        </a:p>
+      </dgm:t>
+    </dgm:pt>
+    <dgm:pt modelId="{081F292E-B9AE-4473-988D-4F53B563D375}">
+      <dgm:prSet/>
+      <dgm:spPr/>
+      <dgm:t>
+        <a:bodyPr/>
+        <a:lstStyle/>
+        <a:p>
+          <a:r>
+            <a:rPr lang="el-GR" b="1"/>
+            <a:t>2 Routers:</a:t>
+          </a:r>
+          <a:endParaRPr lang="en-US"/>
+        </a:p>
+      </dgm:t>
+    </dgm:pt>
+    <dgm:pt modelId="{0A99F09F-AEAF-42AC-A720-70C634F93F48}" type="parTrans" cxnId="{81698D64-953B-46AC-813C-61F24F2BDFE1}">
+      <dgm:prSet/>
+      <dgm:spPr/>
+      <dgm:t>
+        <a:bodyPr/>
+        <a:lstStyle/>
+        <a:p>
+          <a:endParaRPr lang="en-US"/>
+        </a:p>
+      </dgm:t>
+    </dgm:pt>
+    <dgm:pt modelId="{86DC1D12-B388-443D-A59B-2EEB0610A2B3}" type="sibTrans" cxnId="{81698D64-953B-46AC-813C-61F24F2BDFE1}">
+      <dgm:prSet/>
+      <dgm:spPr/>
+      <dgm:t>
+        <a:bodyPr/>
+        <a:lstStyle/>
+        <a:p>
+          <a:endParaRPr lang="en-US"/>
+        </a:p>
+      </dgm:t>
+    </dgm:pt>
+    <dgm:pt modelId="{F7FD3496-4D19-45E3-8148-9916A0C8A1DE}">
+      <dgm:prSet/>
+      <dgm:spPr/>
+      <dgm:t>
+        <a:bodyPr/>
+        <a:lstStyle/>
+        <a:p>
+          <a:r>
+            <a:rPr lang="el-GR" b="1"/>
+            <a:t>Router 1 (Aggregator):</a:t>
+          </a:r>
+          <a:r>
+            <a:rPr lang="el-GR"/>
+            <a:t> Συγχωνεύει την κίνηση των πηγών.</a:t>
+          </a:r>
+          <a:endParaRPr lang="en-US"/>
+        </a:p>
+      </dgm:t>
+    </dgm:pt>
+    <dgm:pt modelId="{411218D8-3DD7-41FB-BF12-2C1DEFBC2127}" type="parTrans" cxnId="{09928B40-5D39-44EC-9117-14539F44B72B}">
+      <dgm:prSet/>
+      <dgm:spPr/>
+      <dgm:t>
+        <a:bodyPr/>
+        <a:lstStyle/>
+        <a:p>
+          <a:endParaRPr lang="en-US"/>
+        </a:p>
+      </dgm:t>
+    </dgm:pt>
+    <dgm:pt modelId="{9D2F695C-E7D4-4FD0-8611-6FFDBD1450AF}" type="sibTrans" cxnId="{09928B40-5D39-44EC-9117-14539F44B72B}">
+      <dgm:prSet/>
+      <dgm:spPr/>
+      <dgm:t>
+        <a:bodyPr/>
+        <a:lstStyle/>
+        <a:p>
+          <a:endParaRPr lang="en-US"/>
+        </a:p>
+      </dgm:t>
+    </dgm:pt>
+    <dgm:pt modelId="{EF455464-FA7B-4CB7-868A-C13CE21D49E3}">
+      <dgm:prSet/>
+      <dgm:spPr/>
+      <dgm:t>
+        <a:bodyPr/>
+        <a:lstStyle/>
+        <a:p>
+          <a:r>
+            <a:rPr lang="el-GR" b="1"/>
+            <a:t>Router 2 (Backbone):</a:t>
+          </a:r>
+          <a:r>
+            <a:rPr lang="el-GR"/>
+            <a:t> Μεταφέρει την κίνηση στον προορισμό.</a:t>
+          </a:r>
+          <a:endParaRPr lang="en-US"/>
+        </a:p>
+      </dgm:t>
+    </dgm:pt>
+    <dgm:pt modelId="{9339A86E-115F-4755-8EA0-7467B6F5203E}" type="parTrans" cxnId="{61AC89F8-C9A4-41BE-8E49-5C7573E8C9DB}">
+      <dgm:prSet/>
+      <dgm:spPr/>
+      <dgm:t>
+        <a:bodyPr/>
+        <a:lstStyle/>
+        <a:p>
+          <a:endParaRPr lang="en-US"/>
+        </a:p>
+      </dgm:t>
+    </dgm:pt>
+    <dgm:pt modelId="{308FEF9A-3DD8-40A2-BCAB-EAB76BD65C4D}" type="sibTrans" cxnId="{61AC89F8-C9A4-41BE-8E49-5C7573E8C9DB}">
+      <dgm:prSet/>
+      <dgm:spPr/>
+      <dgm:t>
+        <a:bodyPr/>
+        <a:lstStyle/>
+        <a:p>
+          <a:endParaRPr lang="en-US"/>
+        </a:p>
+      </dgm:t>
+    </dgm:pt>
+    <dgm:pt modelId="{E150570A-5F26-4D95-883B-A4D05845DA13}">
+      <dgm:prSet/>
+      <dgm:spPr/>
+      <dgm:t>
+        <a:bodyPr/>
+        <a:lstStyle/>
+        <a:p>
+          <a:r>
+            <a:rPr lang="el-GR" b="1"/>
+            <a:t>Η Πρόκληση:</a:t>
+          </a:r>
+          <a:endParaRPr lang="en-US"/>
+        </a:p>
+      </dgm:t>
+    </dgm:pt>
+    <dgm:pt modelId="{47E95496-8110-4891-8DFF-C7FE53BA6549}" type="parTrans" cxnId="{23A90F7B-CD55-43A5-949A-E8623567437C}">
+      <dgm:prSet/>
+      <dgm:spPr/>
+      <dgm:t>
+        <a:bodyPr/>
+        <a:lstStyle/>
+        <a:p>
+          <a:endParaRPr lang="en-US"/>
+        </a:p>
+      </dgm:t>
+    </dgm:pt>
+    <dgm:pt modelId="{4A839049-0827-44C5-85F3-5114A557DEAA}" type="sibTrans" cxnId="{23A90F7B-CD55-43A5-949A-E8623567437C}">
+      <dgm:prSet/>
+      <dgm:spPr/>
+      <dgm:t>
+        <a:bodyPr/>
+        <a:lstStyle/>
+        <a:p>
+          <a:endParaRPr lang="en-US"/>
+        </a:p>
+      </dgm:t>
+    </dgm:pt>
+    <dgm:pt modelId="{06F5F7E3-D25A-4EB8-B122-0AAEBE714032}">
+      <dgm:prSet/>
+      <dgm:spPr/>
+      <dgm:t>
+        <a:bodyPr/>
+        <a:lstStyle/>
+        <a:p>
+          <a:r>
+            <a:rPr lang="el-GR"/>
+            <a:t>Διπλασιασμός κίνησης εισόδου: </a:t>
+          </a:r>
+          <a:r>
+            <a:rPr lang="el-GR" b="1"/>
+            <a:t>400 pkts/s</a:t>
+          </a:r>
+          <a:r>
+            <a:rPr lang="el-GR"/>
+            <a:t> (200+200).</a:t>
+          </a:r>
+          <a:endParaRPr lang="en-US"/>
+        </a:p>
+      </dgm:t>
+    </dgm:pt>
+    <dgm:pt modelId="{9CD33EE3-59DE-4B30-8EAA-5065D6A5BE45}" type="parTrans" cxnId="{5C2DC5AE-FCD4-468A-93E8-85D1DCA27026}">
+      <dgm:prSet/>
+      <dgm:spPr/>
+      <dgm:t>
+        <a:bodyPr/>
+        <a:lstStyle/>
+        <a:p>
+          <a:endParaRPr lang="en-US"/>
+        </a:p>
+      </dgm:t>
+    </dgm:pt>
+    <dgm:pt modelId="{A6725DD0-B70F-4747-9C5A-03CDC06DFD5F}" type="sibTrans" cxnId="{5C2DC5AE-FCD4-468A-93E8-85D1DCA27026}">
+      <dgm:prSet/>
+      <dgm:spPr/>
+      <dgm:t>
+        <a:bodyPr/>
+        <a:lstStyle/>
+        <a:p>
+          <a:endParaRPr lang="en-US"/>
+        </a:p>
+      </dgm:t>
+    </dgm:pt>
+    <dgm:pt modelId="{D2CD0997-5A59-4AF2-A4D3-57F8A783BDA2}">
+      <dgm:prSet/>
+      <dgm:spPr/>
+      <dgm:t>
+        <a:bodyPr/>
+        <a:lstStyle/>
+        <a:p>
+          <a:r>
+            <a:rPr lang="el-GR"/>
+            <a:t>Το Bandwidth παραμένει αρχικά στο </a:t>
+          </a:r>
+          <a:r>
+            <a:rPr lang="el-GR" b="1"/>
+            <a:t>1 Mbps</a:t>
+          </a:r>
+          <a:r>
+            <a:rPr lang="el-GR"/>
+            <a:t>.</a:t>
+          </a:r>
+          <a:endParaRPr lang="en-US"/>
+        </a:p>
+      </dgm:t>
+    </dgm:pt>
+    <dgm:pt modelId="{B5EE9073-063F-4105-8051-F8750521855C}" type="parTrans" cxnId="{9CF07363-CC4B-411E-8206-4106A9A7E795}">
+      <dgm:prSet/>
+      <dgm:spPr/>
+      <dgm:t>
+        <a:bodyPr/>
+        <a:lstStyle/>
+        <a:p>
+          <a:endParaRPr lang="en-US"/>
+        </a:p>
+      </dgm:t>
+    </dgm:pt>
+    <dgm:pt modelId="{6C24B274-360B-44AE-81B8-495009BB9E29}" type="sibTrans" cxnId="{9CF07363-CC4B-411E-8206-4106A9A7E795}">
+      <dgm:prSet/>
+      <dgm:spPr/>
+      <dgm:t>
+        <a:bodyPr/>
+        <a:lstStyle/>
+        <a:p>
+          <a:endParaRPr lang="en-US"/>
+        </a:p>
+      </dgm:t>
+    </dgm:pt>
+    <dgm:pt modelId="{4E6B6F34-43C3-4A5B-B44D-9300A26CADD6}" type="pres">
+      <dgm:prSet presAssocID="{5B4EC66A-3880-4EEC-8269-BE951BDCBF94}" presName="linear" presStyleCnt="0">
+        <dgm:presLayoutVars>
+          <dgm:dir/>
+          <dgm:animLvl val="lvl"/>
+          <dgm:resizeHandles val="exact"/>
+        </dgm:presLayoutVars>
+      </dgm:prSet>
+      <dgm:spPr/>
+    </dgm:pt>
+    <dgm:pt modelId="{FDA29853-F1A4-42EA-8F52-F8C4E320B98D}" type="pres">
+      <dgm:prSet presAssocID="{1BDC46E5-40EE-4B4C-A6AB-8E14491CBF01}" presName="parentLin" presStyleCnt="0"/>
+      <dgm:spPr/>
+    </dgm:pt>
+    <dgm:pt modelId="{055CBB4B-7B23-41F2-82BF-119EFCB37D85}" type="pres">
+      <dgm:prSet presAssocID="{1BDC46E5-40EE-4B4C-A6AB-8E14491CBF01}" presName="parentLeftMargin" presStyleLbl="node1" presStyleIdx="0" presStyleCnt="2"/>
+      <dgm:spPr/>
+    </dgm:pt>
+    <dgm:pt modelId="{66186752-D304-4F93-BAFE-25D85E9C4092}" type="pres">
+      <dgm:prSet presAssocID="{1BDC46E5-40EE-4B4C-A6AB-8E14491CBF01}" presName="parentText" presStyleLbl="node1" presStyleIdx="0" presStyleCnt="2">
+        <dgm:presLayoutVars>
+          <dgm:chMax val="0"/>
+          <dgm:bulletEnabled val="1"/>
+        </dgm:presLayoutVars>
+      </dgm:prSet>
+      <dgm:spPr/>
+    </dgm:pt>
+    <dgm:pt modelId="{8E721754-08C0-4064-969D-F90702D7B91A}" type="pres">
+      <dgm:prSet presAssocID="{1BDC46E5-40EE-4B4C-A6AB-8E14491CBF01}" presName="negativeSpace" presStyleCnt="0"/>
+      <dgm:spPr/>
+    </dgm:pt>
+    <dgm:pt modelId="{1AD9EA15-F1DD-47AD-BFC2-4F44951CE4F2}" type="pres">
+      <dgm:prSet presAssocID="{1BDC46E5-40EE-4B4C-A6AB-8E14491CBF01}" presName="childText" presStyleLbl="conFgAcc1" presStyleIdx="0" presStyleCnt="2">
+        <dgm:presLayoutVars>
+          <dgm:bulletEnabled val="1"/>
+        </dgm:presLayoutVars>
+      </dgm:prSet>
+      <dgm:spPr/>
+    </dgm:pt>
+    <dgm:pt modelId="{CD8365B0-8767-42CA-8860-0BB4AE80D30E}" type="pres">
+      <dgm:prSet presAssocID="{B948341E-48A3-4343-8718-BCE8121AFEED}" presName="spaceBetweenRectangles" presStyleCnt="0"/>
+      <dgm:spPr/>
+    </dgm:pt>
+    <dgm:pt modelId="{DAE64F66-3F1C-4114-964D-9C151803A488}" type="pres">
+      <dgm:prSet presAssocID="{E150570A-5F26-4D95-883B-A4D05845DA13}" presName="parentLin" presStyleCnt="0"/>
+      <dgm:spPr/>
+    </dgm:pt>
+    <dgm:pt modelId="{19B323EF-0AAB-4333-8DB9-BCD78AFA70C1}" type="pres">
+      <dgm:prSet presAssocID="{E150570A-5F26-4D95-883B-A4D05845DA13}" presName="parentLeftMargin" presStyleLbl="node1" presStyleIdx="0" presStyleCnt="2"/>
+      <dgm:spPr/>
+    </dgm:pt>
+    <dgm:pt modelId="{CBCE80AA-8C09-494B-BF77-E6794A08D8CF}" type="pres">
+      <dgm:prSet presAssocID="{E150570A-5F26-4D95-883B-A4D05845DA13}" presName="parentText" presStyleLbl="node1" presStyleIdx="1" presStyleCnt="2">
+        <dgm:presLayoutVars>
+          <dgm:chMax val="0"/>
+          <dgm:bulletEnabled val="1"/>
+        </dgm:presLayoutVars>
+      </dgm:prSet>
+      <dgm:spPr/>
+    </dgm:pt>
+    <dgm:pt modelId="{E605DDBB-C663-4C6E-ACCF-9A98611B0514}" type="pres">
+      <dgm:prSet presAssocID="{E150570A-5F26-4D95-883B-A4D05845DA13}" presName="negativeSpace" presStyleCnt="0"/>
+      <dgm:spPr/>
+    </dgm:pt>
+    <dgm:pt modelId="{CA36117A-5607-4F93-B4E1-64316CD57DB6}" type="pres">
+      <dgm:prSet presAssocID="{E150570A-5F26-4D95-883B-A4D05845DA13}" presName="childText" presStyleLbl="conFgAcc1" presStyleIdx="1" presStyleCnt="2">
+        <dgm:presLayoutVars>
+          <dgm:bulletEnabled val="1"/>
+        </dgm:presLayoutVars>
+      </dgm:prSet>
+      <dgm:spPr/>
+    </dgm:pt>
+  </dgm:ptLst>
+  <dgm:cxnLst>
+    <dgm:cxn modelId="{4DF0E503-061F-4A0C-A824-DC78B8A701FE}" type="presOf" srcId="{EF455464-FA7B-4CB7-868A-C13CE21D49E3}" destId="{1AD9EA15-F1DD-47AD-BFC2-4F44951CE4F2}" srcOrd="0" destOrd="4" presId="urn:microsoft.com/office/officeart/2005/8/layout/list1"/>
+    <dgm:cxn modelId="{F29C9A13-1808-4C01-A45D-74EB903E6A66}" srcId="{1BDC46E5-40EE-4B4C-A6AB-8E14491CBF01}" destId="{611CD1E7-E536-4842-B53B-DEEB5FEC4AF0}" srcOrd="0" destOrd="0" parTransId="{60841768-5D14-476B-A6A1-B3283B82BC3C}" sibTransId="{C5D69E6B-FEC8-4253-9D02-A59C8AB9C1EA}"/>
+    <dgm:cxn modelId="{811C0515-67C9-4D2E-8206-B59CBF70CF23}" type="presOf" srcId="{E150570A-5F26-4D95-883B-A4D05845DA13}" destId="{19B323EF-0AAB-4333-8DB9-BCD78AFA70C1}" srcOrd="0" destOrd="0" presId="urn:microsoft.com/office/officeart/2005/8/layout/list1"/>
+    <dgm:cxn modelId="{84811021-3104-4F36-A2A8-AC542997945D}" type="presOf" srcId="{611CD1E7-E536-4842-B53B-DEEB5FEC4AF0}" destId="{1AD9EA15-F1DD-47AD-BFC2-4F44951CE4F2}" srcOrd="0" destOrd="0" presId="urn:microsoft.com/office/officeart/2005/8/layout/list1"/>
+    <dgm:cxn modelId="{3EB6FC3D-3E4A-4D61-A79A-BDF0ECB751FC}" type="presOf" srcId="{D2CD0997-5A59-4AF2-A4D3-57F8A783BDA2}" destId="{CA36117A-5607-4F93-B4E1-64316CD57DB6}" srcOrd="0" destOrd="1" presId="urn:microsoft.com/office/officeart/2005/8/layout/list1"/>
+    <dgm:cxn modelId="{09928B40-5D39-44EC-9117-14539F44B72B}" srcId="{081F292E-B9AE-4473-988D-4F53B563D375}" destId="{F7FD3496-4D19-45E3-8148-9916A0C8A1DE}" srcOrd="0" destOrd="0" parTransId="{411218D8-3DD7-41FB-BF12-2C1DEFBC2127}" sibTransId="{9D2F695C-E7D4-4FD0-8611-6FFDBD1450AF}"/>
+    <dgm:cxn modelId="{CF25B95C-F853-4DEF-B10D-1E171EC92EA3}" type="presOf" srcId="{1BDC46E5-40EE-4B4C-A6AB-8E14491CBF01}" destId="{66186752-D304-4F93-BAFE-25D85E9C4092}" srcOrd="1" destOrd="0" presId="urn:microsoft.com/office/officeart/2005/8/layout/list1"/>
+    <dgm:cxn modelId="{9CF07363-CC4B-411E-8206-4106A9A7E795}" srcId="{E150570A-5F26-4D95-883B-A4D05845DA13}" destId="{D2CD0997-5A59-4AF2-A4D3-57F8A783BDA2}" srcOrd="1" destOrd="0" parTransId="{B5EE9073-063F-4105-8051-F8750521855C}" sibTransId="{6C24B274-360B-44AE-81B8-495009BB9E29}"/>
+    <dgm:cxn modelId="{81698D64-953B-46AC-813C-61F24F2BDFE1}" srcId="{1BDC46E5-40EE-4B4C-A6AB-8E14491CBF01}" destId="{081F292E-B9AE-4473-988D-4F53B563D375}" srcOrd="2" destOrd="0" parTransId="{0A99F09F-AEAF-42AC-A720-70C634F93F48}" sibTransId="{86DC1D12-B388-443D-A59B-2EEB0610A2B3}"/>
+    <dgm:cxn modelId="{723B2565-2E60-4099-9834-696FDA1E494A}" type="presOf" srcId="{06F5F7E3-D25A-4EB8-B122-0AAEBE714032}" destId="{CA36117A-5607-4F93-B4E1-64316CD57DB6}" srcOrd="0" destOrd="0" presId="urn:microsoft.com/office/officeart/2005/8/layout/list1"/>
+    <dgm:cxn modelId="{9665424A-58DB-40E0-8C11-B487463142D1}" type="presOf" srcId="{5B4EC66A-3880-4EEC-8269-BE951BDCBF94}" destId="{4E6B6F34-43C3-4A5B-B44D-9300A26CADD6}" srcOrd="0" destOrd="0" presId="urn:microsoft.com/office/officeart/2005/8/layout/list1"/>
+    <dgm:cxn modelId="{3697A46A-3D77-4C15-8C97-C4C7D13A822E}" srcId="{5B4EC66A-3880-4EEC-8269-BE951BDCBF94}" destId="{1BDC46E5-40EE-4B4C-A6AB-8E14491CBF01}" srcOrd="0" destOrd="0" parTransId="{A0AF79CE-72FC-47B5-872E-406CBD3BD36E}" sibTransId="{B948341E-48A3-4343-8718-BCE8121AFEED}"/>
+    <dgm:cxn modelId="{7945336E-65C3-4F84-A6FC-3F03B3F36C52}" type="presOf" srcId="{081F292E-B9AE-4473-988D-4F53B563D375}" destId="{1AD9EA15-F1DD-47AD-BFC2-4F44951CE4F2}" srcOrd="0" destOrd="2" presId="urn:microsoft.com/office/officeart/2005/8/layout/list1"/>
+    <dgm:cxn modelId="{23A90F7B-CD55-43A5-949A-E8623567437C}" srcId="{5B4EC66A-3880-4EEC-8269-BE951BDCBF94}" destId="{E150570A-5F26-4D95-883B-A4D05845DA13}" srcOrd="1" destOrd="0" parTransId="{47E95496-8110-4891-8DFF-C7FE53BA6549}" sibTransId="{4A839049-0827-44C5-85F3-5114A557DEAA}"/>
+    <dgm:cxn modelId="{F8454E86-A42D-4460-8C64-6784A2FE9917}" srcId="{1BDC46E5-40EE-4B4C-A6AB-8E14491CBF01}" destId="{EEAA6608-3740-4156-8313-555F51A8EEFE}" srcOrd="1" destOrd="0" parTransId="{44668F1A-77CB-4A5D-9594-C1EEF24EDFD1}" sibTransId="{5267FCC9-F893-4FF9-A08A-E6E963BF2EA4}"/>
+    <dgm:cxn modelId="{84D6039A-749E-40F8-9DB3-20E0402AB1EF}" type="presOf" srcId="{EEAA6608-3740-4156-8313-555F51A8EEFE}" destId="{1AD9EA15-F1DD-47AD-BFC2-4F44951CE4F2}" srcOrd="0" destOrd="1" presId="urn:microsoft.com/office/officeart/2005/8/layout/list1"/>
+    <dgm:cxn modelId="{5C2DC5AE-FCD4-468A-93E8-85D1DCA27026}" srcId="{E150570A-5F26-4D95-883B-A4D05845DA13}" destId="{06F5F7E3-D25A-4EB8-B122-0AAEBE714032}" srcOrd="0" destOrd="0" parTransId="{9CD33EE3-59DE-4B30-8EAA-5065D6A5BE45}" sibTransId="{A6725DD0-B70F-4747-9C5A-03CDC06DFD5F}"/>
+    <dgm:cxn modelId="{D5D766B6-429B-436E-ADA3-D0D7616AF87A}" type="presOf" srcId="{F7FD3496-4D19-45E3-8148-9916A0C8A1DE}" destId="{1AD9EA15-F1DD-47AD-BFC2-4F44951CE4F2}" srcOrd="0" destOrd="3" presId="urn:microsoft.com/office/officeart/2005/8/layout/list1"/>
+    <dgm:cxn modelId="{81BA14BF-063A-4A88-9B28-726C78DEE4B3}" type="presOf" srcId="{E150570A-5F26-4D95-883B-A4D05845DA13}" destId="{CBCE80AA-8C09-494B-BF77-E6794A08D8CF}" srcOrd="1" destOrd="0" presId="urn:microsoft.com/office/officeart/2005/8/layout/list1"/>
+    <dgm:cxn modelId="{F0CB83EC-70F7-4A1B-B89F-CD3A52737679}" type="presOf" srcId="{1BDC46E5-40EE-4B4C-A6AB-8E14491CBF01}" destId="{055CBB4B-7B23-41F2-82BF-119EFCB37D85}" srcOrd="0" destOrd="0" presId="urn:microsoft.com/office/officeart/2005/8/layout/list1"/>
+    <dgm:cxn modelId="{61AC89F8-C9A4-41BE-8E49-5C7573E8C9DB}" srcId="{081F292E-B9AE-4473-988D-4F53B563D375}" destId="{EF455464-FA7B-4CB7-868A-C13CE21D49E3}" srcOrd="1" destOrd="0" parTransId="{9339A86E-115F-4755-8EA0-7467B6F5203E}" sibTransId="{308FEF9A-3DD8-40A2-BCAB-EAB76BD65C4D}"/>
+    <dgm:cxn modelId="{935E7F8D-901D-4D74-A0FF-57EEDE1B0DE7}" type="presParOf" srcId="{4E6B6F34-43C3-4A5B-B44D-9300A26CADD6}" destId="{FDA29853-F1A4-42EA-8F52-F8C4E320B98D}" srcOrd="0" destOrd="0" presId="urn:microsoft.com/office/officeart/2005/8/layout/list1"/>
+    <dgm:cxn modelId="{1F8ED80D-A5DB-49A0-9F37-85D88FC1D4D9}" type="presParOf" srcId="{FDA29853-F1A4-42EA-8F52-F8C4E320B98D}" destId="{055CBB4B-7B23-41F2-82BF-119EFCB37D85}" srcOrd="0" destOrd="0" presId="urn:microsoft.com/office/officeart/2005/8/layout/list1"/>
+    <dgm:cxn modelId="{A5A49EC0-CECD-46D1-BC7A-82534576E0D1}" type="presParOf" srcId="{FDA29853-F1A4-42EA-8F52-F8C4E320B98D}" destId="{66186752-D304-4F93-BAFE-25D85E9C4092}" srcOrd="1" destOrd="0" presId="urn:microsoft.com/office/officeart/2005/8/layout/list1"/>
+    <dgm:cxn modelId="{1E97FBA9-23EE-469C-AE8C-5184946E8F29}" type="presParOf" srcId="{4E6B6F34-43C3-4A5B-B44D-9300A26CADD6}" destId="{8E721754-08C0-4064-969D-F90702D7B91A}" srcOrd="1" destOrd="0" presId="urn:microsoft.com/office/officeart/2005/8/layout/list1"/>
+    <dgm:cxn modelId="{9BEE7826-BD48-47BE-9C82-C8E3993B34C5}" type="presParOf" srcId="{4E6B6F34-43C3-4A5B-B44D-9300A26CADD6}" destId="{1AD9EA15-F1DD-47AD-BFC2-4F44951CE4F2}" srcOrd="2" destOrd="0" presId="urn:microsoft.com/office/officeart/2005/8/layout/list1"/>
+    <dgm:cxn modelId="{8EC1A532-D730-439F-BD8A-F959C3B51D40}" type="presParOf" srcId="{4E6B6F34-43C3-4A5B-B44D-9300A26CADD6}" destId="{CD8365B0-8767-42CA-8860-0BB4AE80D30E}" srcOrd="3" destOrd="0" presId="urn:microsoft.com/office/officeart/2005/8/layout/list1"/>
+    <dgm:cxn modelId="{71BE9740-83F5-4D0D-BC26-BD3F6B4DB24F}" type="presParOf" srcId="{4E6B6F34-43C3-4A5B-B44D-9300A26CADD6}" destId="{DAE64F66-3F1C-4114-964D-9C151803A488}" srcOrd="4" destOrd="0" presId="urn:microsoft.com/office/officeart/2005/8/layout/list1"/>
+    <dgm:cxn modelId="{1B60E822-5C40-4AA1-A2FB-F8C00E65AB86}" type="presParOf" srcId="{DAE64F66-3F1C-4114-964D-9C151803A488}" destId="{19B323EF-0AAB-4333-8DB9-BCD78AFA70C1}" srcOrd="0" destOrd="0" presId="urn:microsoft.com/office/officeart/2005/8/layout/list1"/>
+    <dgm:cxn modelId="{0B8B8F9F-FBCE-4399-B3D9-A28E47D4BC72}" type="presParOf" srcId="{DAE64F66-3F1C-4114-964D-9C151803A488}" destId="{CBCE80AA-8C09-494B-BF77-E6794A08D8CF}" srcOrd="1" destOrd="0" presId="urn:microsoft.com/office/officeart/2005/8/layout/list1"/>
+    <dgm:cxn modelId="{3ED8A152-B303-41A3-8BF0-035AF69B556C}" type="presParOf" srcId="{4E6B6F34-43C3-4A5B-B44D-9300A26CADD6}" destId="{E605DDBB-C663-4C6E-ACCF-9A98611B0514}" srcOrd="5" destOrd="0" presId="urn:microsoft.com/office/officeart/2005/8/layout/list1"/>
+    <dgm:cxn modelId="{BB6EAAD1-301B-4D50-A074-05837EA015AC}" type="presParOf" srcId="{4E6B6F34-43C3-4A5B-B44D-9300A26CADD6}" destId="{CA36117A-5607-4F93-B4E1-64316CD57DB6}" srcOrd="6" destOrd="0" presId="urn:microsoft.com/office/officeart/2005/8/layout/list1"/>
+  </dgm:cxnLst>
+  <dgm:bg/>
+  <dgm:whole/>
+  <dgm:extLst>
+    <a:ext uri="http://schemas.microsoft.com/office/drawing/2008/diagram">
+      <dsp:dataModelExt xmlns:dsp="http://schemas.microsoft.com/office/drawing/2008/diagram" relId="rId6" minVer="http://schemas.openxmlformats.org/drawingml/2006/diagram"/>
     </a:ext>
   </dgm:extLst>
 </dgm:dataModel>
@@ -6811,6 +8070,455 @@
 </dsp:drawing>
 </file>
 
+<file path=ppt/diagrams/drawing5.xml><?xml version="1.0" encoding="utf-8"?>
+<dsp:drawing xmlns:dgm="http://schemas.openxmlformats.org/drawingml/2006/diagram" xmlns:dsp="http://schemas.microsoft.com/office/drawing/2008/diagram" xmlns:a="http://schemas.openxmlformats.org/drawingml/2006/main">
+  <dsp:spTree>
+    <dsp:nvGrpSpPr>
+      <dsp:cNvPr id="0" name=""/>
+      <dsp:cNvGrpSpPr/>
+    </dsp:nvGrpSpPr>
+    <dsp:grpSpPr/>
+    <dsp:sp modelId="{1AD9EA15-F1DD-47AD-BFC2-4F44951CE4F2}">
+      <dsp:nvSpPr>
+        <dsp:cNvPr id="0" name=""/>
+        <dsp:cNvSpPr/>
+      </dsp:nvSpPr>
+      <dsp:spPr>
+        <a:xfrm>
+          <a:off x="0" y="300113"/>
+          <a:ext cx="10515600" cy="1764000"/>
+        </a:xfrm>
+        <a:prstGeom prst="rect">
+          <a:avLst/>
+        </a:prstGeom>
+        <a:solidFill>
+          <a:schemeClr val="lt1">
+            <a:alpha val="90000"/>
+            <a:hueOff val="0"/>
+            <a:satOff val="0"/>
+            <a:lumOff val="0"/>
+            <a:alphaOff val="0"/>
+          </a:schemeClr>
+        </a:solidFill>
+        <a:ln w="19050" cap="flat" cmpd="sng" algn="ctr">
+          <a:solidFill>
+            <a:schemeClr val="accent1">
+              <a:hueOff val="0"/>
+              <a:satOff val="0"/>
+              <a:lumOff val="0"/>
+              <a:alphaOff val="0"/>
+            </a:schemeClr>
+          </a:solidFill>
+          <a:prstDash val="solid"/>
+          <a:miter lim="800000"/>
+        </a:ln>
+        <a:effectLst/>
+      </dsp:spPr>
+      <dsp:style>
+        <a:lnRef idx="2">
+          <a:scrgbClr r="0" g="0" b="0"/>
+        </a:lnRef>
+        <a:fillRef idx="1">
+          <a:scrgbClr r="0" g="0" b="0"/>
+        </a:fillRef>
+        <a:effectRef idx="0">
+          <a:scrgbClr r="0" g="0" b="0"/>
+        </a:effectRef>
+        <a:fontRef idx="minor"/>
+      </dsp:style>
+      <dsp:txBody>
+        <a:bodyPr spcFirstLastPara="0" vert="horz" wrap="square" lIns="816127" tIns="333248" rIns="816127" bIns="113792" numCol="1" spcCol="1270" anchor="t" anchorCtr="0">
+          <a:noAutofit/>
+        </a:bodyPr>
+        <a:lstStyle/>
+        <a:p>
+          <a:pPr marL="171450" lvl="1" indent="-171450" algn="l" defTabSz="711200">
+            <a:lnSpc>
+              <a:spcPct val="90000"/>
+            </a:lnSpc>
+            <a:spcBef>
+              <a:spcPct val="0"/>
+            </a:spcBef>
+            <a:spcAft>
+              <a:spcPct val="15000"/>
+            </a:spcAft>
+            <a:buChar char="•"/>
+          </a:pPr>
+          <a:r>
+            <a:rPr lang="el-GR" sz="1600" kern="1200"/>
+            <a:t>Προσθέτουμε πολυπλοκότητα: Από γραμμική αλυσίδα σε δομή "Y".</a:t>
+          </a:r>
+          <a:endParaRPr lang="en-US" sz="1600" kern="1200"/>
+        </a:p>
+        <a:p>
+          <a:pPr marL="171450" lvl="1" indent="-171450" algn="l" defTabSz="711200">
+            <a:lnSpc>
+              <a:spcPct val="90000"/>
+            </a:lnSpc>
+            <a:spcBef>
+              <a:spcPct val="0"/>
+            </a:spcBef>
+            <a:spcAft>
+              <a:spcPct val="15000"/>
+            </a:spcAft>
+            <a:buChar char="•"/>
+          </a:pPr>
+          <a:r>
+            <a:rPr lang="el-GR" sz="1600" b="1" kern="1200"/>
+            <a:t>3 Hosts:</a:t>
+          </a:r>
+          <a:r>
+            <a:rPr lang="el-GR" sz="1600" kern="1200"/>
+            <a:t> Δύο Πηγές (Host A &amp; Host B) + Ένας Προορισμός.</a:t>
+          </a:r>
+          <a:endParaRPr lang="en-US" sz="1600" kern="1200"/>
+        </a:p>
+        <a:p>
+          <a:pPr marL="171450" lvl="1" indent="-171450" algn="l" defTabSz="711200">
+            <a:lnSpc>
+              <a:spcPct val="90000"/>
+            </a:lnSpc>
+            <a:spcBef>
+              <a:spcPct val="0"/>
+            </a:spcBef>
+            <a:spcAft>
+              <a:spcPct val="15000"/>
+            </a:spcAft>
+            <a:buChar char="•"/>
+          </a:pPr>
+          <a:r>
+            <a:rPr lang="el-GR" sz="1600" b="1" kern="1200"/>
+            <a:t>2 Routers:</a:t>
+          </a:r>
+          <a:endParaRPr lang="en-US" sz="1600" kern="1200"/>
+        </a:p>
+        <a:p>
+          <a:pPr marL="342900" lvl="2" indent="-171450" algn="l" defTabSz="711200">
+            <a:lnSpc>
+              <a:spcPct val="90000"/>
+            </a:lnSpc>
+            <a:spcBef>
+              <a:spcPct val="0"/>
+            </a:spcBef>
+            <a:spcAft>
+              <a:spcPct val="15000"/>
+            </a:spcAft>
+            <a:buChar char="•"/>
+          </a:pPr>
+          <a:r>
+            <a:rPr lang="el-GR" sz="1600" b="1" kern="1200"/>
+            <a:t>Router 1 (Aggregator):</a:t>
+          </a:r>
+          <a:r>
+            <a:rPr lang="el-GR" sz="1600" kern="1200"/>
+            <a:t> Συγχωνεύει την κίνηση των πηγών.</a:t>
+          </a:r>
+          <a:endParaRPr lang="en-US" sz="1600" kern="1200"/>
+        </a:p>
+        <a:p>
+          <a:pPr marL="342900" lvl="2" indent="-171450" algn="l" defTabSz="711200">
+            <a:lnSpc>
+              <a:spcPct val="90000"/>
+            </a:lnSpc>
+            <a:spcBef>
+              <a:spcPct val="0"/>
+            </a:spcBef>
+            <a:spcAft>
+              <a:spcPct val="15000"/>
+            </a:spcAft>
+            <a:buChar char="•"/>
+          </a:pPr>
+          <a:r>
+            <a:rPr lang="el-GR" sz="1600" b="1" kern="1200"/>
+            <a:t>Router 2 (Backbone):</a:t>
+          </a:r>
+          <a:r>
+            <a:rPr lang="el-GR" sz="1600" kern="1200"/>
+            <a:t> Μεταφέρει την κίνηση στον προορισμό.</a:t>
+          </a:r>
+          <a:endParaRPr lang="en-US" sz="1600" kern="1200"/>
+        </a:p>
+      </dsp:txBody>
+      <dsp:txXfrm>
+        <a:off x="0" y="300113"/>
+        <a:ext cx="10515600" cy="1764000"/>
+      </dsp:txXfrm>
+    </dsp:sp>
+    <dsp:sp modelId="{66186752-D304-4F93-BAFE-25D85E9C4092}">
+      <dsp:nvSpPr>
+        <dsp:cNvPr id="0" name=""/>
+        <dsp:cNvSpPr/>
+      </dsp:nvSpPr>
+      <dsp:spPr>
+        <a:xfrm>
+          <a:off x="525780" y="63953"/>
+          <a:ext cx="7360920" cy="472320"/>
+        </a:xfrm>
+        <a:prstGeom prst="roundRect">
+          <a:avLst/>
+        </a:prstGeom>
+        <a:solidFill>
+          <a:schemeClr val="accent1">
+            <a:hueOff val="0"/>
+            <a:satOff val="0"/>
+            <a:lumOff val="0"/>
+            <a:alphaOff val="0"/>
+          </a:schemeClr>
+        </a:solidFill>
+        <a:ln w="19050" cap="flat" cmpd="sng" algn="ctr">
+          <a:solidFill>
+            <a:schemeClr val="lt1">
+              <a:hueOff val="0"/>
+              <a:satOff val="0"/>
+              <a:lumOff val="0"/>
+              <a:alphaOff val="0"/>
+            </a:schemeClr>
+          </a:solidFill>
+          <a:prstDash val="solid"/>
+          <a:miter lim="800000"/>
+        </a:ln>
+        <a:effectLst/>
+      </dsp:spPr>
+      <dsp:style>
+        <a:lnRef idx="2">
+          <a:scrgbClr r="0" g="0" b="0"/>
+        </a:lnRef>
+        <a:fillRef idx="1">
+          <a:scrgbClr r="0" g="0" b="0"/>
+        </a:fillRef>
+        <a:effectRef idx="0">
+          <a:scrgbClr r="0" g="0" b="0"/>
+        </a:effectRef>
+        <a:fontRef idx="minor">
+          <a:schemeClr val="lt1"/>
+        </a:fontRef>
+      </dsp:style>
+      <dsp:txBody>
+        <a:bodyPr spcFirstLastPara="0" vert="horz" wrap="square" lIns="278225" tIns="0" rIns="278225" bIns="0" numCol="1" spcCol="1270" anchor="ctr" anchorCtr="0">
+          <a:noAutofit/>
+        </a:bodyPr>
+        <a:lstStyle/>
+        <a:p>
+          <a:pPr marL="0" lvl="0" indent="0" algn="l" defTabSz="711200">
+            <a:lnSpc>
+              <a:spcPct val="90000"/>
+            </a:lnSpc>
+            <a:spcBef>
+              <a:spcPct val="0"/>
+            </a:spcBef>
+            <a:spcAft>
+              <a:spcPct val="35000"/>
+            </a:spcAft>
+            <a:buNone/>
+          </a:pPr>
+          <a:r>
+            <a:rPr lang="el-GR" sz="1600" b="1" kern="1200"/>
+            <a:t>Η Νέα Τοπολογία:</a:t>
+          </a:r>
+          <a:endParaRPr lang="en-US" sz="1600" kern="1200"/>
+        </a:p>
+      </dsp:txBody>
+      <dsp:txXfrm>
+        <a:off x="548837" y="87010"/>
+        <a:ext cx="7314806" cy="426206"/>
+      </dsp:txXfrm>
+    </dsp:sp>
+    <dsp:sp modelId="{CA36117A-5607-4F93-B4E1-64316CD57DB6}">
+      <dsp:nvSpPr>
+        <dsp:cNvPr id="0" name=""/>
+        <dsp:cNvSpPr/>
+      </dsp:nvSpPr>
+      <dsp:spPr>
+        <a:xfrm>
+          <a:off x="0" y="2386673"/>
+          <a:ext cx="10515600" cy="932400"/>
+        </a:xfrm>
+        <a:prstGeom prst="rect">
+          <a:avLst/>
+        </a:prstGeom>
+        <a:solidFill>
+          <a:schemeClr val="lt1">
+            <a:alpha val="90000"/>
+            <a:hueOff val="0"/>
+            <a:satOff val="0"/>
+            <a:lumOff val="0"/>
+            <a:alphaOff val="0"/>
+          </a:schemeClr>
+        </a:solidFill>
+        <a:ln w="19050" cap="flat" cmpd="sng" algn="ctr">
+          <a:solidFill>
+            <a:schemeClr val="accent1">
+              <a:hueOff val="0"/>
+              <a:satOff val="0"/>
+              <a:lumOff val="0"/>
+              <a:alphaOff val="0"/>
+            </a:schemeClr>
+          </a:solidFill>
+          <a:prstDash val="solid"/>
+          <a:miter lim="800000"/>
+        </a:ln>
+        <a:effectLst/>
+      </dsp:spPr>
+      <dsp:style>
+        <a:lnRef idx="2">
+          <a:scrgbClr r="0" g="0" b="0"/>
+        </a:lnRef>
+        <a:fillRef idx="1">
+          <a:scrgbClr r="0" g="0" b="0"/>
+        </a:fillRef>
+        <a:effectRef idx="0">
+          <a:scrgbClr r="0" g="0" b="0"/>
+        </a:effectRef>
+        <a:fontRef idx="minor"/>
+      </dsp:style>
+      <dsp:txBody>
+        <a:bodyPr spcFirstLastPara="0" vert="horz" wrap="square" lIns="816127" tIns="333248" rIns="816127" bIns="113792" numCol="1" spcCol="1270" anchor="t" anchorCtr="0">
+          <a:noAutofit/>
+        </a:bodyPr>
+        <a:lstStyle/>
+        <a:p>
+          <a:pPr marL="171450" lvl="1" indent="-171450" algn="l" defTabSz="711200">
+            <a:lnSpc>
+              <a:spcPct val="90000"/>
+            </a:lnSpc>
+            <a:spcBef>
+              <a:spcPct val="0"/>
+            </a:spcBef>
+            <a:spcAft>
+              <a:spcPct val="15000"/>
+            </a:spcAft>
+            <a:buChar char="•"/>
+          </a:pPr>
+          <a:r>
+            <a:rPr lang="el-GR" sz="1600" kern="1200"/>
+            <a:t>Διπλασιασμός κίνησης εισόδου: </a:t>
+          </a:r>
+          <a:r>
+            <a:rPr lang="el-GR" sz="1600" b="1" kern="1200"/>
+            <a:t>400 pkts/s</a:t>
+          </a:r>
+          <a:r>
+            <a:rPr lang="el-GR" sz="1600" kern="1200"/>
+            <a:t> (200+200).</a:t>
+          </a:r>
+          <a:endParaRPr lang="en-US" sz="1600" kern="1200"/>
+        </a:p>
+        <a:p>
+          <a:pPr marL="171450" lvl="1" indent="-171450" algn="l" defTabSz="711200">
+            <a:lnSpc>
+              <a:spcPct val="90000"/>
+            </a:lnSpc>
+            <a:spcBef>
+              <a:spcPct val="0"/>
+            </a:spcBef>
+            <a:spcAft>
+              <a:spcPct val="15000"/>
+            </a:spcAft>
+            <a:buChar char="•"/>
+          </a:pPr>
+          <a:r>
+            <a:rPr lang="el-GR" sz="1600" kern="1200"/>
+            <a:t>Το Bandwidth παραμένει αρχικά στο </a:t>
+          </a:r>
+          <a:r>
+            <a:rPr lang="el-GR" sz="1600" b="1" kern="1200"/>
+            <a:t>1 Mbps</a:t>
+          </a:r>
+          <a:r>
+            <a:rPr lang="el-GR" sz="1600" kern="1200"/>
+            <a:t>.</a:t>
+          </a:r>
+          <a:endParaRPr lang="en-US" sz="1600" kern="1200"/>
+        </a:p>
+      </dsp:txBody>
+      <dsp:txXfrm>
+        <a:off x="0" y="2386673"/>
+        <a:ext cx="10515600" cy="932400"/>
+      </dsp:txXfrm>
+    </dsp:sp>
+    <dsp:sp modelId="{CBCE80AA-8C09-494B-BF77-E6794A08D8CF}">
+      <dsp:nvSpPr>
+        <dsp:cNvPr id="0" name=""/>
+        <dsp:cNvSpPr/>
+      </dsp:nvSpPr>
+      <dsp:spPr>
+        <a:xfrm>
+          <a:off x="525780" y="2150513"/>
+          <a:ext cx="7360920" cy="472320"/>
+        </a:xfrm>
+        <a:prstGeom prst="roundRect">
+          <a:avLst/>
+        </a:prstGeom>
+        <a:solidFill>
+          <a:schemeClr val="accent1">
+            <a:hueOff val="0"/>
+            <a:satOff val="0"/>
+            <a:lumOff val="0"/>
+            <a:alphaOff val="0"/>
+          </a:schemeClr>
+        </a:solidFill>
+        <a:ln w="19050" cap="flat" cmpd="sng" algn="ctr">
+          <a:solidFill>
+            <a:schemeClr val="lt1">
+              <a:hueOff val="0"/>
+              <a:satOff val="0"/>
+              <a:lumOff val="0"/>
+              <a:alphaOff val="0"/>
+            </a:schemeClr>
+          </a:solidFill>
+          <a:prstDash val="solid"/>
+          <a:miter lim="800000"/>
+        </a:ln>
+        <a:effectLst/>
+      </dsp:spPr>
+      <dsp:style>
+        <a:lnRef idx="2">
+          <a:scrgbClr r="0" g="0" b="0"/>
+        </a:lnRef>
+        <a:fillRef idx="1">
+          <a:scrgbClr r="0" g="0" b="0"/>
+        </a:fillRef>
+        <a:effectRef idx="0">
+          <a:scrgbClr r="0" g="0" b="0"/>
+        </a:effectRef>
+        <a:fontRef idx="minor">
+          <a:schemeClr val="lt1"/>
+        </a:fontRef>
+      </dsp:style>
+      <dsp:txBody>
+        <a:bodyPr spcFirstLastPara="0" vert="horz" wrap="square" lIns="278225" tIns="0" rIns="278225" bIns="0" numCol="1" spcCol="1270" anchor="ctr" anchorCtr="0">
+          <a:noAutofit/>
+        </a:bodyPr>
+        <a:lstStyle/>
+        <a:p>
+          <a:pPr marL="0" lvl="0" indent="0" algn="l" defTabSz="711200">
+            <a:lnSpc>
+              <a:spcPct val="90000"/>
+            </a:lnSpc>
+            <a:spcBef>
+              <a:spcPct val="0"/>
+            </a:spcBef>
+            <a:spcAft>
+              <a:spcPct val="35000"/>
+            </a:spcAft>
+            <a:buNone/>
+          </a:pPr>
+          <a:r>
+            <a:rPr lang="el-GR" sz="1600" b="1" kern="1200"/>
+            <a:t>Η Πρόκληση:</a:t>
+          </a:r>
+          <a:endParaRPr lang="en-US" sz="1600" kern="1200"/>
+        </a:p>
+      </dsp:txBody>
+      <dsp:txXfrm>
+        <a:off x="548837" y="2173570"/>
+        <a:ext cx="7314806" cy="426206"/>
+      </dsp:txXfrm>
+    </dsp:sp>
+  </dsp:spTree>
+</dsp:drawing>
+</file>
+
 <file path=ppt/diagrams/layout1.xml><?xml version="1.0" encoding="utf-8"?>
 <dgm:layoutDef xmlns:dgm="http://schemas.openxmlformats.org/drawingml/2006/diagram" xmlns:a="http://schemas.openxmlformats.org/drawingml/2006/main" uniqueId="urn:microsoft.com/office/officeart/2005/8/layout/vList5">
   <dgm:title val=""/>
@@ -7719,6 +9427,231 @@
 </dgm:layoutDef>
 </file>
 
+<file path=ppt/diagrams/layout5.xml><?xml version="1.0" encoding="utf-8"?>
+<dgm:layoutDef xmlns:dgm="http://schemas.openxmlformats.org/drawingml/2006/diagram" xmlns:a="http://schemas.openxmlformats.org/drawingml/2006/main" uniqueId="urn:microsoft.com/office/officeart/2005/8/layout/list1">
+  <dgm:title val=""/>
+  <dgm:desc val=""/>
+  <dgm:catLst>
+    <dgm:cat type="list" pri="4000"/>
+  </dgm:catLst>
+  <dgm:sampData>
+    <dgm:dataModel>
+      <dgm:ptLst>
+        <dgm:pt modelId="0" type="doc"/>
+        <dgm:pt modelId="1">
+          <dgm:prSet phldr="1"/>
+        </dgm:pt>
+        <dgm:pt modelId="2">
+          <dgm:prSet phldr="1"/>
+        </dgm:pt>
+        <dgm:pt modelId="3">
+          <dgm:prSet phldr="1"/>
+        </dgm:pt>
+      </dgm:ptLst>
+      <dgm:cxnLst>
+        <dgm:cxn modelId="4" srcId="0" destId="1" srcOrd="0" destOrd="0"/>
+        <dgm:cxn modelId="5" srcId="0" destId="2" srcOrd="1" destOrd="0"/>
+        <dgm:cxn modelId="6" srcId="0" destId="3" srcOrd="2" destOrd="0"/>
+      </dgm:cxnLst>
+      <dgm:bg/>
+      <dgm:whole/>
+    </dgm:dataModel>
+  </dgm:sampData>
+  <dgm:styleData>
+    <dgm:dataModel>
+      <dgm:ptLst>
+        <dgm:pt modelId="0" type="doc"/>
+        <dgm:pt modelId="1"/>
+        <dgm:pt modelId="2"/>
+      </dgm:ptLst>
+      <dgm:cxnLst>
+        <dgm:cxn modelId="4" srcId="0" destId="1" srcOrd="0" destOrd="0"/>
+        <dgm:cxn modelId="5" srcId="0" destId="2" srcOrd="1" destOrd="0"/>
+      </dgm:cxnLst>
+      <dgm:bg/>
+      <dgm:whole/>
+    </dgm:dataModel>
+  </dgm:styleData>
+  <dgm:clrData>
+    <dgm:dataModel>
+      <dgm:ptLst>
+        <dgm:pt modelId="0" type="doc"/>
+        <dgm:pt modelId="1"/>
+        <dgm:pt modelId="2"/>
+        <dgm:pt modelId="3"/>
+        <dgm:pt modelId="4"/>
+      </dgm:ptLst>
+      <dgm:cxnLst>
+        <dgm:cxn modelId="5" srcId="0" destId="1" srcOrd="0" destOrd="0"/>
+        <dgm:cxn modelId="6" srcId="0" destId="2" srcOrd="1" destOrd="0"/>
+        <dgm:cxn modelId="7" srcId="0" destId="3" srcOrd="2" destOrd="0"/>
+        <dgm:cxn modelId="8" srcId="0" destId="4" srcOrd="3" destOrd="0"/>
+      </dgm:cxnLst>
+      <dgm:bg/>
+      <dgm:whole/>
+    </dgm:dataModel>
+  </dgm:clrData>
+  <dgm:layoutNode name="linear">
+    <dgm:varLst>
+      <dgm:dir/>
+      <dgm:animLvl val="lvl"/>
+      <dgm:resizeHandles val="exact"/>
+    </dgm:varLst>
+    <dgm:choose name="Name0">
+      <dgm:if name="Name1" func="var" arg="dir" op="equ" val="norm">
+        <dgm:alg type="lin">
+          <dgm:param type="linDir" val="fromT"/>
+          <dgm:param type="vertAlign" val="mid"/>
+          <dgm:param type="horzAlign" val="l"/>
+          <dgm:param type="nodeHorzAlign" val="l"/>
+        </dgm:alg>
+      </dgm:if>
+      <dgm:else name="Name2">
+        <dgm:alg type="lin">
+          <dgm:param type="linDir" val="fromT"/>
+          <dgm:param type="vertAlign" val="mid"/>
+          <dgm:param type="horzAlign" val="r"/>
+          <dgm:param type="nodeHorzAlign" val="r"/>
+        </dgm:alg>
+      </dgm:else>
+    </dgm:choose>
+    <dgm:shape xmlns:r="http://schemas.openxmlformats.org/officeDocument/2006/relationships" r:blip="">
+      <dgm:adjLst/>
+    </dgm:shape>
+    <dgm:presOf/>
+    <dgm:constrLst>
+      <dgm:constr type="w" for="ch" forName="parentLin" refType="w"/>
+      <dgm:constr type="h" for="ch" forName="parentLin" val="INF"/>
+      <dgm:constr type="w" for="des" forName="parentLeftMargin" refType="w" fact="0.05"/>
+      <dgm:constr type="w" for="des" forName="parentText" refType="w" fact="0.7"/>
+      <dgm:constr type="h" for="des" forName="parentText" refType="primFontSz" refFor="des" refForName="parentText" fact="0.82"/>
+      <dgm:constr type="h" for="ch" forName="negativeSpace" refType="primFontSz" refFor="des" refForName="parentText" fact="-0.41"/>
+      <dgm:constr type="h" for="ch" forName="negativeSpace" refType="h" refFor="des" refForName="parentText" op="lte" fact="-0.82"/>
+      <dgm:constr type="h" for="ch" forName="negativeSpace" refType="h" refFor="des" refForName="parentText" op="gte" fact="-0.82"/>
+      <dgm:constr type="w" for="ch" forName="childText" refType="w"/>
+      <dgm:constr type="h" for="ch" forName="childText" refType="primFontSz" refFor="des" refForName="parentText" fact="0.7"/>
+      <dgm:constr type="primFontSz" for="des" forName="parentText" val="65"/>
+      <dgm:constr type="primFontSz" for="ch" forName="childText" refType="primFontSz" refFor="des" refForName="parentText"/>
+      <dgm:constr type="tMarg" for="ch" forName="childText" refType="primFontSz" refFor="des" refForName="parentText" fact="1.64"/>
+      <dgm:constr type="tMarg" for="ch" forName="childText" refType="h" refFor="des" refForName="parentText" op="lte" fact="3.28"/>
+      <dgm:constr type="tMarg" for="ch" forName="childText" refType="h" refFor="des" refForName="parentText" op="gte" fact="3.28"/>
+      <dgm:constr type="lMarg" for="ch" forName="childText" refType="w" fact="0.22"/>
+      <dgm:constr type="rMarg" for="ch" forName="childText" refType="lMarg" refFor="ch" refForName="childText"/>
+      <dgm:constr type="lMarg" for="des" forName="parentText" refType="w" fact="0.075"/>
+      <dgm:constr type="rMarg" for="des" forName="parentText" refType="lMarg" refFor="des" refForName="parentText"/>
+      <dgm:constr type="h" for="ch" forName="spaceBetweenRectangles" refType="primFontSz" refFor="des" refForName="parentText" fact="0.15"/>
+    </dgm:constrLst>
+    <dgm:ruleLst>
+      <dgm:rule type="primFontSz" for="des" forName="parentText" val="5" fact="NaN" max="NaN"/>
+    </dgm:ruleLst>
+    <dgm:forEach name="Name3" axis="ch" ptType="node">
+      <dgm:layoutNode name="parentLin">
+        <dgm:choose name="Name4">
+          <dgm:if name="Name5" func="var" arg="dir" op="equ" val="norm">
+            <dgm:alg type="lin">
+              <dgm:param type="linDir" val="fromL"/>
+              <dgm:param type="horzAlign" val="l"/>
+              <dgm:param type="nodeHorzAlign" val="l"/>
+            </dgm:alg>
+          </dgm:if>
+          <dgm:else name="Name6">
+            <dgm:alg type="lin">
+              <dgm:param type="linDir" val="fromR"/>
+              <dgm:param type="horzAlign" val="r"/>
+              <dgm:param type="nodeHorzAlign" val="r"/>
+            </dgm:alg>
+          </dgm:else>
+        </dgm:choose>
+        <dgm:shape xmlns:r="http://schemas.openxmlformats.org/officeDocument/2006/relationships" r:blip="">
+          <dgm:adjLst/>
+        </dgm:shape>
+        <dgm:presOf/>
+        <dgm:constrLst/>
+        <dgm:ruleLst/>
+        <dgm:layoutNode name="parentLeftMargin">
+          <dgm:alg type="sp"/>
+          <dgm:shape xmlns:r="http://schemas.openxmlformats.org/officeDocument/2006/relationships" type="rect" r:blip="" hideGeom="1">
+            <dgm:adjLst/>
+          </dgm:shape>
+          <dgm:presOf axis="self"/>
+          <dgm:constrLst>
+            <dgm:constr type="h"/>
+          </dgm:constrLst>
+          <dgm:ruleLst/>
+        </dgm:layoutNode>
+        <dgm:layoutNode name="parentText" styleLbl="node1">
+          <dgm:varLst>
+            <dgm:chMax val="0"/>
+            <dgm:bulletEnabled val="1"/>
+          </dgm:varLst>
+          <dgm:choose name="Name7">
+            <dgm:if name="Name8" func="var" arg="dir" op="equ" val="norm">
+              <dgm:alg type="tx">
+                <dgm:param type="parTxLTRAlign" val="l"/>
+                <dgm:param type="parTxRTLAlign" val="l"/>
+              </dgm:alg>
+            </dgm:if>
+            <dgm:else name="Name9">
+              <dgm:alg type="tx">
+                <dgm:param type="parTxLTRAlign" val="r"/>
+                <dgm:param type="parTxRTLAlign" val="r"/>
+              </dgm:alg>
+            </dgm:else>
+          </dgm:choose>
+          <dgm:shape xmlns:r="http://schemas.openxmlformats.org/officeDocument/2006/relationships" type="roundRect" r:blip="">
+            <dgm:adjLst/>
+          </dgm:shape>
+          <dgm:presOf axis="self" ptType="node"/>
+          <dgm:constrLst>
+            <dgm:constr type="tMarg"/>
+            <dgm:constr type="bMarg"/>
+          </dgm:constrLst>
+          <dgm:ruleLst/>
+        </dgm:layoutNode>
+      </dgm:layoutNode>
+      <dgm:layoutNode name="negativeSpace">
+        <dgm:alg type="sp"/>
+        <dgm:shape xmlns:r="http://schemas.openxmlformats.org/officeDocument/2006/relationships" r:blip="">
+          <dgm:adjLst/>
+        </dgm:shape>
+        <dgm:presOf/>
+        <dgm:constrLst/>
+        <dgm:ruleLst/>
+      </dgm:layoutNode>
+      <dgm:layoutNode name="childText" styleLbl="conFgAcc1">
+        <dgm:varLst>
+          <dgm:bulletEnabled val="1"/>
+        </dgm:varLst>
+        <dgm:alg type="tx">
+          <dgm:param type="stBulletLvl" val="1"/>
+        </dgm:alg>
+        <dgm:shape xmlns:r="http://schemas.openxmlformats.org/officeDocument/2006/relationships" type="rect" r:blip="" zOrderOff="-2">
+          <dgm:adjLst/>
+        </dgm:shape>
+        <dgm:presOf axis="des" ptType="node"/>
+        <dgm:constrLst>
+          <dgm:constr type="secFontSz" refType="primFontSz"/>
+        </dgm:constrLst>
+        <dgm:ruleLst>
+          <dgm:rule type="h" val="INF" fact="NaN" max="NaN"/>
+        </dgm:ruleLst>
+      </dgm:layoutNode>
+      <dgm:forEach name="Name10" axis="followSib" ptType="sibTrans" cnt="1">
+        <dgm:layoutNode name="spaceBetweenRectangles">
+          <dgm:alg type="sp"/>
+          <dgm:shape xmlns:r="http://schemas.openxmlformats.org/officeDocument/2006/relationships" r:blip="">
+            <dgm:adjLst/>
+          </dgm:shape>
+          <dgm:presOf/>
+          <dgm:constrLst/>
+          <dgm:ruleLst/>
+        </dgm:layoutNode>
+      </dgm:forEach>
+    </dgm:forEach>
+  </dgm:layoutNode>
+</dgm:layoutDef>
+</file>
+
 <file path=ppt/diagrams/quickStyle1.xml><?xml version="1.0" encoding="utf-8"?>
 <dgm:styleDef xmlns:dgm="http://schemas.openxmlformats.org/drawingml/2006/diagram" xmlns:a="http://schemas.openxmlformats.org/drawingml/2006/main" uniqueId="urn:microsoft.com/office/officeart/2005/8/quickstyle/simple1">
   <dgm:title val=""/>
@@ -11827,6 +13760,1040 @@
         <a:scrgbClr r="0" g="0" b="0"/>
       </a:fillRef>
       <a:effectRef idx="2">
+        <a:scrgbClr r="0" g="0" b="0"/>
+      </a:effectRef>
+      <a:fontRef idx="minor"/>
+    </dgm:style>
+  </dgm:styleLbl>
+  <dgm:styleLbl name="revTx">
+    <dgm:scene3d>
+      <a:camera prst="orthographicFront"/>
+      <a:lightRig rig="threePt" dir="t"/>
+    </dgm:scene3d>
+    <dgm:sp3d/>
+    <dgm:txPr/>
+    <dgm:style>
+      <a:lnRef idx="0">
+        <a:scrgbClr r="0" g="0" b="0"/>
+      </a:lnRef>
+      <a:fillRef idx="0">
+        <a:scrgbClr r="0" g="0" b="0"/>
+      </a:fillRef>
+      <a:effectRef idx="0">
+        <a:scrgbClr r="0" g="0" b="0"/>
+      </a:effectRef>
+      <a:fontRef idx="minor"/>
+    </dgm:style>
+  </dgm:styleLbl>
+</dgm:styleDef>
+</file>
+
+<file path=ppt/diagrams/quickStyle5.xml><?xml version="1.0" encoding="utf-8"?>
+<dgm:styleDef xmlns:dgm="http://schemas.openxmlformats.org/drawingml/2006/diagram" xmlns:a="http://schemas.openxmlformats.org/drawingml/2006/main" uniqueId="urn:microsoft.com/office/officeart/2005/8/quickstyle/simple1">
+  <dgm:title val=""/>
+  <dgm:desc val=""/>
+  <dgm:catLst>
+    <dgm:cat type="simple" pri="10100"/>
+  </dgm:catLst>
+  <dgm:scene3d>
+    <a:camera prst="orthographicFront"/>
+    <a:lightRig rig="threePt" dir="t"/>
+  </dgm:scene3d>
+  <dgm:styleLbl name="node0">
+    <dgm:scene3d>
+      <a:camera prst="orthographicFront"/>
+      <a:lightRig rig="threePt" dir="t"/>
+    </dgm:scene3d>
+    <dgm:sp3d/>
+    <dgm:txPr/>
+    <dgm:style>
+      <a:lnRef idx="2">
+        <a:scrgbClr r="0" g="0" b="0"/>
+      </a:lnRef>
+      <a:fillRef idx="1">
+        <a:scrgbClr r="0" g="0" b="0"/>
+      </a:fillRef>
+      <a:effectRef idx="0">
+        <a:scrgbClr r="0" g="0" b="0"/>
+      </a:effectRef>
+      <a:fontRef idx="minor">
+        <a:schemeClr val="lt1"/>
+      </a:fontRef>
+    </dgm:style>
+  </dgm:styleLbl>
+  <dgm:styleLbl name="lnNode1">
+    <dgm:scene3d>
+      <a:camera prst="orthographicFront"/>
+      <a:lightRig rig="threePt" dir="t"/>
+    </dgm:scene3d>
+    <dgm:sp3d/>
+    <dgm:txPr/>
+    <dgm:style>
+      <a:lnRef idx="2">
+        <a:scrgbClr r="0" g="0" b="0"/>
+      </a:lnRef>
+      <a:fillRef idx="1">
+        <a:scrgbClr r="0" g="0" b="0"/>
+      </a:fillRef>
+      <a:effectRef idx="0">
+        <a:scrgbClr r="0" g="0" b="0"/>
+      </a:effectRef>
+      <a:fontRef idx="minor">
+        <a:schemeClr val="lt1"/>
+      </a:fontRef>
+    </dgm:style>
+  </dgm:styleLbl>
+  <dgm:styleLbl name="vennNode1">
+    <dgm:scene3d>
+      <a:camera prst="orthographicFront"/>
+      <a:lightRig rig="threePt" dir="t"/>
+    </dgm:scene3d>
+    <dgm:sp3d/>
+    <dgm:txPr/>
+    <dgm:style>
+      <a:lnRef idx="2">
+        <a:scrgbClr r="0" g="0" b="0"/>
+      </a:lnRef>
+      <a:fillRef idx="1">
+        <a:scrgbClr r="0" g="0" b="0"/>
+      </a:fillRef>
+      <a:effectRef idx="0">
+        <a:scrgbClr r="0" g="0" b="0"/>
+      </a:effectRef>
+      <a:fontRef idx="minor">
+        <a:schemeClr val="tx1"/>
+      </a:fontRef>
+    </dgm:style>
+  </dgm:styleLbl>
+  <dgm:styleLbl name="alignNode1">
+    <dgm:scene3d>
+      <a:camera prst="orthographicFront"/>
+      <a:lightRig rig="threePt" dir="t"/>
+    </dgm:scene3d>
+    <dgm:sp3d/>
+    <dgm:txPr/>
+    <dgm:style>
+      <a:lnRef idx="2">
+        <a:scrgbClr r="0" g="0" b="0"/>
+      </a:lnRef>
+      <a:fillRef idx="1">
+        <a:scrgbClr r="0" g="0" b="0"/>
+      </a:fillRef>
+      <a:effectRef idx="0">
+        <a:scrgbClr r="0" g="0" b="0"/>
+      </a:effectRef>
+      <a:fontRef idx="minor">
+        <a:schemeClr val="lt1"/>
+      </a:fontRef>
+    </dgm:style>
+  </dgm:styleLbl>
+  <dgm:styleLbl name="node1">
+    <dgm:scene3d>
+      <a:camera prst="orthographicFront"/>
+      <a:lightRig rig="threePt" dir="t"/>
+    </dgm:scene3d>
+    <dgm:sp3d/>
+    <dgm:txPr/>
+    <dgm:style>
+      <a:lnRef idx="2">
+        <a:scrgbClr r="0" g="0" b="0"/>
+      </a:lnRef>
+      <a:fillRef idx="1">
+        <a:scrgbClr r="0" g="0" b="0"/>
+      </a:fillRef>
+      <a:effectRef idx="0">
+        <a:scrgbClr r="0" g="0" b="0"/>
+      </a:effectRef>
+      <a:fontRef idx="minor">
+        <a:schemeClr val="lt1"/>
+      </a:fontRef>
+    </dgm:style>
+  </dgm:styleLbl>
+  <dgm:styleLbl name="node2">
+    <dgm:scene3d>
+      <a:camera prst="orthographicFront"/>
+      <a:lightRig rig="threePt" dir="t"/>
+    </dgm:scene3d>
+    <dgm:sp3d/>
+    <dgm:txPr/>
+    <dgm:style>
+      <a:lnRef idx="2">
+        <a:scrgbClr r="0" g="0" b="0"/>
+      </a:lnRef>
+      <a:fillRef idx="1">
+        <a:scrgbClr r="0" g="0" b="0"/>
+      </a:fillRef>
+      <a:effectRef idx="0">
+        <a:scrgbClr r="0" g="0" b="0"/>
+      </a:effectRef>
+      <a:fontRef idx="minor">
+        <a:schemeClr val="lt1"/>
+      </a:fontRef>
+    </dgm:style>
+  </dgm:styleLbl>
+  <dgm:styleLbl name="node3">
+    <dgm:scene3d>
+      <a:camera prst="orthographicFront"/>
+      <a:lightRig rig="threePt" dir="t"/>
+    </dgm:scene3d>
+    <dgm:sp3d/>
+    <dgm:txPr/>
+    <dgm:style>
+      <a:lnRef idx="2">
+        <a:scrgbClr r="0" g="0" b="0"/>
+      </a:lnRef>
+      <a:fillRef idx="1">
+        <a:scrgbClr r="0" g="0" b="0"/>
+      </a:fillRef>
+      <a:effectRef idx="0">
+        <a:scrgbClr r="0" g="0" b="0"/>
+      </a:effectRef>
+      <a:fontRef idx="minor">
+        <a:schemeClr val="lt1"/>
+      </a:fontRef>
+    </dgm:style>
+  </dgm:styleLbl>
+  <dgm:styleLbl name="node4">
+    <dgm:scene3d>
+      <a:camera prst="orthographicFront"/>
+      <a:lightRig rig="threePt" dir="t"/>
+    </dgm:scene3d>
+    <dgm:sp3d/>
+    <dgm:txPr/>
+    <dgm:style>
+      <a:lnRef idx="2">
+        <a:scrgbClr r="0" g="0" b="0"/>
+      </a:lnRef>
+      <a:fillRef idx="1">
+        <a:scrgbClr r="0" g="0" b="0"/>
+      </a:fillRef>
+      <a:effectRef idx="0">
+        <a:scrgbClr r="0" g="0" b="0"/>
+      </a:effectRef>
+      <a:fontRef idx="minor">
+        <a:schemeClr val="lt1"/>
+      </a:fontRef>
+    </dgm:style>
+  </dgm:styleLbl>
+  <dgm:styleLbl name="fgImgPlace1">
+    <dgm:scene3d>
+      <a:camera prst="orthographicFront"/>
+      <a:lightRig rig="threePt" dir="t"/>
+    </dgm:scene3d>
+    <dgm:sp3d/>
+    <dgm:txPr/>
+    <dgm:style>
+      <a:lnRef idx="2">
+        <a:scrgbClr r="0" g="0" b="0"/>
+      </a:lnRef>
+      <a:fillRef idx="1">
+        <a:scrgbClr r="0" g="0" b="0"/>
+      </a:fillRef>
+      <a:effectRef idx="0">
+        <a:scrgbClr r="0" g="0" b="0"/>
+      </a:effectRef>
+      <a:fontRef idx="minor"/>
+    </dgm:style>
+  </dgm:styleLbl>
+  <dgm:styleLbl name="alignImgPlace1">
+    <dgm:scene3d>
+      <a:camera prst="orthographicFront"/>
+      <a:lightRig rig="threePt" dir="t"/>
+    </dgm:scene3d>
+    <dgm:sp3d/>
+    <dgm:txPr/>
+    <dgm:style>
+      <a:lnRef idx="2">
+        <a:scrgbClr r="0" g="0" b="0"/>
+      </a:lnRef>
+      <a:fillRef idx="1">
+        <a:scrgbClr r="0" g="0" b="0"/>
+      </a:fillRef>
+      <a:effectRef idx="0">
+        <a:scrgbClr r="0" g="0" b="0"/>
+      </a:effectRef>
+      <a:fontRef idx="minor"/>
+    </dgm:style>
+  </dgm:styleLbl>
+  <dgm:styleLbl name="bgImgPlace1">
+    <dgm:scene3d>
+      <a:camera prst="orthographicFront"/>
+      <a:lightRig rig="threePt" dir="t"/>
+    </dgm:scene3d>
+    <dgm:sp3d/>
+    <dgm:txPr/>
+    <dgm:style>
+      <a:lnRef idx="2">
+        <a:scrgbClr r="0" g="0" b="0"/>
+      </a:lnRef>
+      <a:fillRef idx="1">
+        <a:scrgbClr r="0" g="0" b="0"/>
+      </a:fillRef>
+      <a:effectRef idx="0">
+        <a:scrgbClr r="0" g="0" b="0"/>
+      </a:effectRef>
+      <a:fontRef idx="minor"/>
+    </dgm:style>
+  </dgm:styleLbl>
+  <dgm:styleLbl name="sibTrans2D1">
+    <dgm:scene3d>
+      <a:camera prst="orthographicFront"/>
+      <a:lightRig rig="threePt" dir="t"/>
+    </dgm:scene3d>
+    <dgm:sp3d/>
+    <dgm:txPr/>
+    <dgm:style>
+      <a:lnRef idx="0">
+        <a:scrgbClr r="0" g="0" b="0"/>
+      </a:lnRef>
+      <a:fillRef idx="1">
+        <a:scrgbClr r="0" g="0" b="0"/>
+      </a:fillRef>
+      <a:effectRef idx="0">
+        <a:scrgbClr r="0" g="0" b="0"/>
+      </a:effectRef>
+      <a:fontRef idx="minor">
+        <a:schemeClr val="lt1"/>
+      </a:fontRef>
+    </dgm:style>
+  </dgm:styleLbl>
+  <dgm:styleLbl name="fgSibTrans2D1">
+    <dgm:scene3d>
+      <a:camera prst="orthographicFront"/>
+      <a:lightRig rig="threePt" dir="t"/>
+    </dgm:scene3d>
+    <dgm:sp3d/>
+    <dgm:txPr/>
+    <dgm:style>
+      <a:lnRef idx="0">
+        <a:scrgbClr r="0" g="0" b="0"/>
+      </a:lnRef>
+      <a:fillRef idx="1">
+        <a:scrgbClr r="0" g="0" b="0"/>
+      </a:fillRef>
+      <a:effectRef idx="0">
+        <a:scrgbClr r="0" g="0" b="0"/>
+      </a:effectRef>
+      <a:fontRef idx="minor">
+        <a:schemeClr val="lt1"/>
+      </a:fontRef>
+    </dgm:style>
+  </dgm:styleLbl>
+  <dgm:styleLbl name="bgSibTrans2D1">
+    <dgm:scene3d>
+      <a:camera prst="orthographicFront"/>
+      <a:lightRig rig="threePt" dir="t"/>
+    </dgm:scene3d>
+    <dgm:sp3d/>
+    <dgm:txPr/>
+    <dgm:style>
+      <a:lnRef idx="0">
+        <a:scrgbClr r="0" g="0" b="0"/>
+      </a:lnRef>
+      <a:fillRef idx="1">
+        <a:scrgbClr r="0" g="0" b="0"/>
+      </a:fillRef>
+      <a:effectRef idx="0">
+        <a:scrgbClr r="0" g="0" b="0"/>
+      </a:effectRef>
+      <a:fontRef idx="minor">
+        <a:schemeClr val="lt1"/>
+      </a:fontRef>
+    </dgm:style>
+  </dgm:styleLbl>
+  <dgm:styleLbl name="sibTrans1D1">
+    <dgm:scene3d>
+      <a:camera prst="orthographicFront"/>
+      <a:lightRig rig="threePt" dir="t"/>
+    </dgm:scene3d>
+    <dgm:sp3d/>
+    <dgm:txPr/>
+    <dgm:style>
+      <a:lnRef idx="1">
+        <a:scrgbClr r="0" g="0" b="0"/>
+      </a:lnRef>
+      <a:fillRef idx="0">
+        <a:scrgbClr r="0" g="0" b="0"/>
+      </a:fillRef>
+      <a:effectRef idx="0">
+        <a:scrgbClr r="0" g="0" b="0"/>
+      </a:effectRef>
+      <a:fontRef idx="minor"/>
+    </dgm:style>
+  </dgm:styleLbl>
+  <dgm:styleLbl name="callout">
+    <dgm:scene3d>
+      <a:camera prst="orthographicFront"/>
+      <a:lightRig rig="threePt" dir="t"/>
+    </dgm:scene3d>
+    <dgm:sp3d/>
+    <dgm:txPr/>
+    <dgm:style>
+      <a:lnRef idx="2">
+        <a:scrgbClr r="0" g="0" b="0"/>
+      </a:lnRef>
+      <a:fillRef idx="1">
+        <a:scrgbClr r="0" g="0" b="0"/>
+      </a:fillRef>
+      <a:effectRef idx="0">
+        <a:scrgbClr r="0" g="0" b="0"/>
+      </a:effectRef>
+      <a:fontRef idx="minor"/>
+    </dgm:style>
+  </dgm:styleLbl>
+  <dgm:styleLbl name="asst0">
+    <dgm:scene3d>
+      <a:camera prst="orthographicFront"/>
+      <a:lightRig rig="threePt" dir="t"/>
+    </dgm:scene3d>
+    <dgm:sp3d/>
+    <dgm:txPr/>
+    <dgm:style>
+      <a:lnRef idx="2">
+        <a:scrgbClr r="0" g="0" b="0"/>
+      </a:lnRef>
+      <a:fillRef idx="1">
+        <a:scrgbClr r="0" g="0" b="0"/>
+      </a:fillRef>
+      <a:effectRef idx="0">
+        <a:scrgbClr r="0" g="0" b="0"/>
+      </a:effectRef>
+      <a:fontRef idx="minor">
+        <a:schemeClr val="lt1"/>
+      </a:fontRef>
+    </dgm:style>
+  </dgm:styleLbl>
+  <dgm:styleLbl name="asst1">
+    <dgm:scene3d>
+      <a:camera prst="orthographicFront"/>
+      <a:lightRig rig="threePt" dir="t"/>
+    </dgm:scene3d>
+    <dgm:sp3d/>
+    <dgm:txPr/>
+    <dgm:style>
+      <a:lnRef idx="2">
+        <a:scrgbClr r="0" g="0" b="0"/>
+      </a:lnRef>
+      <a:fillRef idx="1">
+        <a:scrgbClr r="0" g="0" b="0"/>
+      </a:fillRef>
+      <a:effectRef idx="0">
+        <a:scrgbClr r="0" g="0" b="0"/>
+      </a:effectRef>
+      <a:fontRef idx="minor">
+        <a:schemeClr val="lt1"/>
+      </a:fontRef>
+    </dgm:style>
+  </dgm:styleLbl>
+  <dgm:styleLbl name="asst2">
+    <dgm:scene3d>
+      <a:camera prst="orthographicFront"/>
+      <a:lightRig rig="threePt" dir="t"/>
+    </dgm:scene3d>
+    <dgm:sp3d/>
+    <dgm:txPr/>
+    <dgm:style>
+      <a:lnRef idx="2">
+        <a:scrgbClr r="0" g="0" b="0"/>
+      </a:lnRef>
+      <a:fillRef idx="1">
+        <a:scrgbClr r="0" g="0" b="0"/>
+      </a:fillRef>
+      <a:effectRef idx="0">
+        <a:scrgbClr r="0" g="0" b="0"/>
+      </a:effectRef>
+      <a:fontRef idx="minor">
+        <a:schemeClr val="lt1"/>
+      </a:fontRef>
+    </dgm:style>
+  </dgm:styleLbl>
+  <dgm:styleLbl name="asst3">
+    <dgm:scene3d>
+      <a:camera prst="orthographicFront"/>
+      <a:lightRig rig="threePt" dir="t"/>
+    </dgm:scene3d>
+    <dgm:sp3d/>
+    <dgm:txPr/>
+    <dgm:style>
+      <a:lnRef idx="2">
+        <a:scrgbClr r="0" g="0" b="0"/>
+      </a:lnRef>
+      <a:fillRef idx="1">
+        <a:scrgbClr r="0" g="0" b="0"/>
+      </a:fillRef>
+      <a:effectRef idx="0">
+        <a:scrgbClr r="0" g="0" b="0"/>
+      </a:effectRef>
+      <a:fontRef idx="minor">
+        <a:schemeClr val="lt1"/>
+      </a:fontRef>
+    </dgm:style>
+  </dgm:styleLbl>
+  <dgm:styleLbl name="asst4">
+    <dgm:scene3d>
+      <a:camera prst="orthographicFront"/>
+      <a:lightRig rig="threePt" dir="t"/>
+    </dgm:scene3d>
+    <dgm:sp3d/>
+    <dgm:txPr/>
+    <dgm:style>
+      <a:lnRef idx="2">
+        <a:scrgbClr r="0" g="0" b="0"/>
+      </a:lnRef>
+      <a:fillRef idx="1">
+        <a:scrgbClr r="0" g="0" b="0"/>
+      </a:fillRef>
+      <a:effectRef idx="0">
+        <a:scrgbClr r="0" g="0" b="0"/>
+      </a:effectRef>
+      <a:fontRef idx="minor">
+        <a:schemeClr val="lt1"/>
+      </a:fontRef>
+    </dgm:style>
+  </dgm:styleLbl>
+  <dgm:styleLbl name="parChTrans2D1">
+    <dgm:scene3d>
+      <a:camera prst="orthographicFront"/>
+      <a:lightRig rig="threePt" dir="t"/>
+    </dgm:scene3d>
+    <dgm:sp3d/>
+    <dgm:txPr/>
+    <dgm:style>
+      <a:lnRef idx="2">
+        <a:scrgbClr r="0" g="0" b="0"/>
+      </a:lnRef>
+      <a:fillRef idx="1">
+        <a:scrgbClr r="0" g="0" b="0"/>
+      </a:fillRef>
+      <a:effectRef idx="0">
+        <a:scrgbClr r="0" g="0" b="0"/>
+      </a:effectRef>
+      <a:fontRef idx="minor">
+        <a:schemeClr val="lt1"/>
+      </a:fontRef>
+    </dgm:style>
+  </dgm:styleLbl>
+  <dgm:styleLbl name="parChTrans2D2">
+    <dgm:scene3d>
+      <a:camera prst="orthographicFront"/>
+      <a:lightRig rig="threePt" dir="t"/>
+    </dgm:scene3d>
+    <dgm:sp3d/>
+    <dgm:txPr/>
+    <dgm:style>
+      <a:lnRef idx="2">
+        <a:scrgbClr r="0" g="0" b="0"/>
+      </a:lnRef>
+      <a:fillRef idx="1">
+        <a:scrgbClr r="0" g="0" b="0"/>
+      </a:fillRef>
+      <a:effectRef idx="0">
+        <a:scrgbClr r="0" g="0" b="0"/>
+      </a:effectRef>
+      <a:fontRef idx="minor">
+        <a:schemeClr val="lt1"/>
+      </a:fontRef>
+    </dgm:style>
+  </dgm:styleLbl>
+  <dgm:styleLbl name="parChTrans2D3">
+    <dgm:scene3d>
+      <a:camera prst="orthographicFront"/>
+      <a:lightRig rig="threePt" dir="t"/>
+    </dgm:scene3d>
+    <dgm:sp3d/>
+    <dgm:txPr/>
+    <dgm:style>
+      <a:lnRef idx="2">
+        <a:scrgbClr r="0" g="0" b="0"/>
+      </a:lnRef>
+      <a:fillRef idx="1">
+        <a:scrgbClr r="0" g="0" b="0"/>
+      </a:fillRef>
+      <a:effectRef idx="0">
+        <a:scrgbClr r="0" g="0" b="0"/>
+      </a:effectRef>
+      <a:fontRef idx="minor">
+        <a:schemeClr val="lt1"/>
+      </a:fontRef>
+    </dgm:style>
+  </dgm:styleLbl>
+  <dgm:styleLbl name="parChTrans2D4">
+    <dgm:scene3d>
+      <a:camera prst="orthographicFront"/>
+      <a:lightRig rig="threePt" dir="t"/>
+    </dgm:scene3d>
+    <dgm:sp3d/>
+    <dgm:txPr/>
+    <dgm:style>
+      <a:lnRef idx="2">
+        <a:scrgbClr r="0" g="0" b="0"/>
+      </a:lnRef>
+      <a:fillRef idx="1">
+        <a:scrgbClr r="0" g="0" b="0"/>
+      </a:fillRef>
+      <a:effectRef idx="0">
+        <a:scrgbClr r="0" g="0" b="0"/>
+      </a:effectRef>
+      <a:fontRef idx="minor">
+        <a:schemeClr val="lt1"/>
+      </a:fontRef>
+    </dgm:style>
+  </dgm:styleLbl>
+  <dgm:styleLbl name="parChTrans1D1">
+    <dgm:scene3d>
+      <a:camera prst="orthographicFront"/>
+      <a:lightRig rig="threePt" dir="t"/>
+    </dgm:scene3d>
+    <dgm:sp3d/>
+    <dgm:txPr/>
+    <dgm:style>
+      <a:lnRef idx="2">
+        <a:scrgbClr r="0" g="0" b="0"/>
+      </a:lnRef>
+      <a:fillRef idx="0">
+        <a:scrgbClr r="0" g="0" b="0"/>
+      </a:fillRef>
+      <a:effectRef idx="0">
+        <a:scrgbClr r="0" g="0" b="0"/>
+      </a:effectRef>
+      <a:fontRef idx="minor"/>
+    </dgm:style>
+  </dgm:styleLbl>
+  <dgm:styleLbl name="parChTrans1D2">
+    <dgm:scene3d>
+      <a:camera prst="orthographicFront"/>
+      <a:lightRig rig="threePt" dir="t"/>
+    </dgm:scene3d>
+    <dgm:sp3d/>
+    <dgm:txPr/>
+    <dgm:style>
+      <a:lnRef idx="2">
+        <a:scrgbClr r="0" g="0" b="0"/>
+      </a:lnRef>
+      <a:fillRef idx="0">
+        <a:scrgbClr r="0" g="0" b="0"/>
+      </a:fillRef>
+      <a:effectRef idx="0">
+        <a:scrgbClr r="0" g="0" b="0"/>
+      </a:effectRef>
+      <a:fontRef idx="minor"/>
+    </dgm:style>
+  </dgm:styleLbl>
+  <dgm:styleLbl name="parChTrans1D3">
+    <dgm:scene3d>
+      <a:camera prst="orthographicFront"/>
+      <a:lightRig rig="threePt" dir="t"/>
+    </dgm:scene3d>
+    <dgm:sp3d/>
+    <dgm:txPr/>
+    <dgm:style>
+      <a:lnRef idx="2">
+        <a:scrgbClr r="0" g="0" b="0"/>
+      </a:lnRef>
+      <a:fillRef idx="0">
+        <a:scrgbClr r="0" g="0" b="0"/>
+      </a:fillRef>
+      <a:effectRef idx="0">
+        <a:scrgbClr r="0" g="0" b="0"/>
+      </a:effectRef>
+      <a:fontRef idx="minor"/>
+    </dgm:style>
+  </dgm:styleLbl>
+  <dgm:styleLbl name="parChTrans1D4">
+    <dgm:scene3d>
+      <a:camera prst="orthographicFront"/>
+      <a:lightRig rig="threePt" dir="t"/>
+    </dgm:scene3d>
+    <dgm:sp3d/>
+    <dgm:txPr/>
+    <dgm:style>
+      <a:lnRef idx="2">
+        <a:scrgbClr r="0" g="0" b="0"/>
+      </a:lnRef>
+      <a:fillRef idx="0">
+        <a:scrgbClr r="0" g="0" b="0"/>
+      </a:fillRef>
+      <a:effectRef idx="0">
+        <a:scrgbClr r="0" g="0" b="0"/>
+      </a:effectRef>
+      <a:fontRef idx="minor"/>
+    </dgm:style>
+  </dgm:styleLbl>
+  <dgm:styleLbl name="fgAcc1">
+    <dgm:scene3d>
+      <a:camera prst="orthographicFront"/>
+      <a:lightRig rig="threePt" dir="t"/>
+    </dgm:scene3d>
+    <dgm:sp3d/>
+    <dgm:txPr/>
+    <dgm:style>
+      <a:lnRef idx="2">
+        <a:scrgbClr r="0" g="0" b="0"/>
+      </a:lnRef>
+      <a:fillRef idx="1">
+        <a:scrgbClr r="0" g="0" b="0"/>
+      </a:fillRef>
+      <a:effectRef idx="0">
+        <a:scrgbClr r="0" g="0" b="0"/>
+      </a:effectRef>
+      <a:fontRef idx="minor"/>
+    </dgm:style>
+  </dgm:styleLbl>
+  <dgm:styleLbl name="conFgAcc1">
+    <dgm:scene3d>
+      <a:camera prst="orthographicFront"/>
+      <a:lightRig rig="threePt" dir="t"/>
+    </dgm:scene3d>
+    <dgm:sp3d/>
+    <dgm:txPr/>
+    <dgm:style>
+      <a:lnRef idx="2">
+        <a:scrgbClr r="0" g="0" b="0"/>
+      </a:lnRef>
+      <a:fillRef idx="1">
+        <a:scrgbClr r="0" g="0" b="0"/>
+      </a:fillRef>
+      <a:effectRef idx="0">
+        <a:scrgbClr r="0" g="0" b="0"/>
+      </a:effectRef>
+      <a:fontRef idx="minor"/>
+    </dgm:style>
+  </dgm:styleLbl>
+  <dgm:styleLbl name="alignAcc1">
+    <dgm:scene3d>
+      <a:camera prst="orthographicFront"/>
+      <a:lightRig rig="threePt" dir="t"/>
+    </dgm:scene3d>
+    <dgm:sp3d/>
+    <dgm:txPr/>
+    <dgm:style>
+      <a:lnRef idx="2">
+        <a:scrgbClr r="0" g="0" b="0"/>
+      </a:lnRef>
+      <a:fillRef idx="1">
+        <a:scrgbClr r="0" g="0" b="0"/>
+      </a:fillRef>
+      <a:effectRef idx="0">
+        <a:scrgbClr r="0" g="0" b="0"/>
+      </a:effectRef>
+      <a:fontRef idx="minor"/>
+    </dgm:style>
+  </dgm:styleLbl>
+  <dgm:styleLbl name="trAlignAcc1">
+    <dgm:scene3d>
+      <a:camera prst="orthographicFront"/>
+      <a:lightRig rig="threePt" dir="t"/>
+    </dgm:scene3d>
+    <dgm:sp3d/>
+    <dgm:txPr/>
+    <dgm:style>
+      <a:lnRef idx="1">
+        <a:scrgbClr r="0" g="0" b="0"/>
+      </a:lnRef>
+      <a:fillRef idx="1">
+        <a:scrgbClr r="0" g="0" b="0"/>
+      </a:fillRef>
+      <a:effectRef idx="0">
+        <a:scrgbClr r="0" g="0" b="0"/>
+      </a:effectRef>
+      <a:fontRef idx="minor"/>
+    </dgm:style>
+  </dgm:styleLbl>
+  <dgm:styleLbl name="bgAcc1">
+    <dgm:scene3d>
+      <a:camera prst="orthographicFront"/>
+      <a:lightRig rig="threePt" dir="t"/>
+    </dgm:scene3d>
+    <dgm:sp3d/>
+    <dgm:txPr/>
+    <dgm:style>
+      <a:lnRef idx="2">
+        <a:scrgbClr r="0" g="0" b="0"/>
+      </a:lnRef>
+      <a:fillRef idx="1">
+        <a:scrgbClr r="0" g="0" b="0"/>
+      </a:fillRef>
+      <a:effectRef idx="0">
+        <a:scrgbClr r="0" g="0" b="0"/>
+      </a:effectRef>
+      <a:fontRef idx="minor"/>
+    </dgm:style>
+  </dgm:styleLbl>
+  <dgm:styleLbl name="solidFgAcc1">
+    <dgm:scene3d>
+      <a:camera prst="orthographicFront"/>
+      <a:lightRig rig="threePt" dir="t"/>
+    </dgm:scene3d>
+    <dgm:sp3d/>
+    <dgm:txPr/>
+    <dgm:style>
+      <a:lnRef idx="2">
+        <a:scrgbClr r="0" g="0" b="0"/>
+      </a:lnRef>
+      <a:fillRef idx="1">
+        <a:scrgbClr r="0" g="0" b="0"/>
+      </a:fillRef>
+      <a:effectRef idx="0">
+        <a:scrgbClr r="0" g="0" b="0"/>
+      </a:effectRef>
+      <a:fontRef idx="minor"/>
+    </dgm:style>
+  </dgm:styleLbl>
+  <dgm:styleLbl name="solidAlignAcc1">
+    <dgm:scene3d>
+      <a:camera prst="orthographicFront"/>
+      <a:lightRig rig="threePt" dir="t"/>
+    </dgm:scene3d>
+    <dgm:sp3d/>
+    <dgm:txPr/>
+    <dgm:style>
+      <a:lnRef idx="2">
+        <a:scrgbClr r="0" g="0" b="0"/>
+      </a:lnRef>
+      <a:fillRef idx="1">
+        <a:scrgbClr r="0" g="0" b="0"/>
+      </a:fillRef>
+      <a:effectRef idx="0">
+        <a:scrgbClr r="0" g="0" b="0"/>
+      </a:effectRef>
+      <a:fontRef idx="minor"/>
+    </dgm:style>
+  </dgm:styleLbl>
+  <dgm:styleLbl name="solidBgAcc1">
+    <dgm:scene3d>
+      <a:camera prst="orthographicFront"/>
+      <a:lightRig rig="threePt" dir="t"/>
+    </dgm:scene3d>
+    <dgm:sp3d/>
+    <dgm:txPr/>
+    <dgm:style>
+      <a:lnRef idx="2">
+        <a:scrgbClr r="0" g="0" b="0"/>
+      </a:lnRef>
+      <a:fillRef idx="1">
+        <a:scrgbClr r="0" g="0" b="0"/>
+      </a:fillRef>
+      <a:effectRef idx="0">
+        <a:scrgbClr r="0" g="0" b="0"/>
+      </a:effectRef>
+      <a:fontRef idx="minor"/>
+    </dgm:style>
+  </dgm:styleLbl>
+  <dgm:styleLbl name="fgAccFollowNode1">
+    <dgm:scene3d>
+      <a:camera prst="orthographicFront"/>
+      <a:lightRig rig="threePt" dir="t"/>
+    </dgm:scene3d>
+    <dgm:sp3d/>
+    <dgm:txPr/>
+    <dgm:style>
+      <a:lnRef idx="2">
+        <a:scrgbClr r="0" g="0" b="0"/>
+      </a:lnRef>
+      <a:fillRef idx="1">
+        <a:scrgbClr r="0" g="0" b="0"/>
+      </a:fillRef>
+      <a:effectRef idx="0">
+        <a:scrgbClr r="0" g="0" b="0"/>
+      </a:effectRef>
+      <a:fontRef idx="minor"/>
+    </dgm:style>
+  </dgm:styleLbl>
+  <dgm:styleLbl name="alignAccFollowNode1">
+    <dgm:scene3d>
+      <a:camera prst="orthographicFront"/>
+      <a:lightRig rig="threePt" dir="t"/>
+    </dgm:scene3d>
+    <dgm:sp3d/>
+    <dgm:txPr/>
+    <dgm:style>
+      <a:lnRef idx="2">
+        <a:scrgbClr r="0" g="0" b="0"/>
+      </a:lnRef>
+      <a:fillRef idx="1">
+        <a:scrgbClr r="0" g="0" b="0"/>
+      </a:fillRef>
+      <a:effectRef idx="0">
+        <a:scrgbClr r="0" g="0" b="0"/>
+      </a:effectRef>
+      <a:fontRef idx="minor"/>
+    </dgm:style>
+  </dgm:styleLbl>
+  <dgm:styleLbl name="bgAccFollowNode1">
+    <dgm:scene3d>
+      <a:camera prst="orthographicFront"/>
+      <a:lightRig rig="threePt" dir="t"/>
+    </dgm:scene3d>
+    <dgm:sp3d/>
+    <dgm:txPr/>
+    <dgm:style>
+      <a:lnRef idx="2">
+        <a:scrgbClr r="0" g="0" b="0"/>
+      </a:lnRef>
+      <a:fillRef idx="1">
+        <a:scrgbClr r="0" g="0" b="0"/>
+      </a:fillRef>
+      <a:effectRef idx="0">
+        <a:scrgbClr r="0" g="0" b="0"/>
+      </a:effectRef>
+      <a:fontRef idx="minor"/>
+    </dgm:style>
+  </dgm:styleLbl>
+  <dgm:styleLbl name="fgAcc0">
+    <dgm:scene3d>
+      <a:camera prst="orthographicFront"/>
+      <a:lightRig rig="threePt" dir="t"/>
+    </dgm:scene3d>
+    <dgm:sp3d/>
+    <dgm:txPr/>
+    <dgm:style>
+      <a:lnRef idx="2">
+        <a:scrgbClr r="0" g="0" b="0"/>
+      </a:lnRef>
+      <a:fillRef idx="1">
+        <a:scrgbClr r="0" g="0" b="0"/>
+      </a:fillRef>
+      <a:effectRef idx="0">
+        <a:scrgbClr r="0" g="0" b="0"/>
+      </a:effectRef>
+      <a:fontRef idx="minor"/>
+    </dgm:style>
+  </dgm:styleLbl>
+  <dgm:styleLbl name="fgAcc2">
+    <dgm:scene3d>
+      <a:camera prst="orthographicFront"/>
+      <a:lightRig rig="threePt" dir="t"/>
+    </dgm:scene3d>
+    <dgm:sp3d/>
+    <dgm:txPr/>
+    <dgm:style>
+      <a:lnRef idx="2">
+        <a:scrgbClr r="0" g="0" b="0"/>
+      </a:lnRef>
+      <a:fillRef idx="1">
+        <a:scrgbClr r="0" g="0" b="0"/>
+      </a:fillRef>
+      <a:effectRef idx="0">
+        <a:scrgbClr r="0" g="0" b="0"/>
+      </a:effectRef>
+      <a:fontRef idx="minor"/>
+    </dgm:style>
+  </dgm:styleLbl>
+  <dgm:styleLbl name="fgAcc3">
+    <dgm:scene3d>
+      <a:camera prst="orthographicFront"/>
+      <a:lightRig rig="threePt" dir="t"/>
+    </dgm:scene3d>
+    <dgm:sp3d/>
+    <dgm:txPr/>
+    <dgm:style>
+      <a:lnRef idx="2">
+        <a:scrgbClr r="0" g="0" b="0"/>
+      </a:lnRef>
+      <a:fillRef idx="1">
+        <a:scrgbClr r="0" g="0" b="0"/>
+      </a:fillRef>
+      <a:effectRef idx="0">
+        <a:scrgbClr r="0" g="0" b="0"/>
+      </a:effectRef>
+      <a:fontRef idx="minor"/>
+    </dgm:style>
+  </dgm:styleLbl>
+  <dgm:styleLbl name="fgAcc4">
+    <dgm:scene3d>
+      <a:camera prst="orthographicFront"/>
+      <a:lightRig rig="threePt" dir="t"/>
+    </dgm:scene3d>
+    <dgm:sp3d/>
+    <dgm:txPr/>
+    <dgm:style>
+      <a:lnRef idx="2">
+        <a:scrgbClr r="0" g="0" b="0"/>
+      </a:lnRef>
+      <a:fillRef idx="1">
+        <a:scrgbClr r="0" g="0" b="0"/>
+      </a:fillRef>
+      <a:effectRef idx="0">
+        <a:scrgbClr r="0" g="0" b="0"/>
+      </a:effectRef>
+      <a:fontRef idx="minor"/>
+    </dgm:style>
+  </dgm:styleLbl>
+  <dgm:styleLbl name="bgShp">
+    <dgm:scene3d>
+      <a:camera prst="orthographicFront"/>
+      <a:lightRig rig="threePt" dir="t"/>
+    </dgm:scene3d>
+    <dgm:sp3d/>
+    <dgm:txPr/>
+    <dgm:style>
+      <a:lnRef idx="0">
+        <a:scrgbClr r="0" g="0" b="0"/>
+      </a:lnRef>
+      <a:fillRef idx="1">
+        <a:scrgbClr r="0" g="0" b="0"/>
+      </a:fillRef>
+      <a:effectRef idx="0">
+        <a:scrgbClr r="0" g="0" b="0"/>
+      </a:effectRef>
+      <a:fontRef idx="minor"/>
+    </dgm:style>
+  </dgm:styleLbl>
+  <dgm:styleLbl name="dkBgShp">
+    <dgm:scene3d>
+      <a:camera prst="orthographicFront"/>
+      <a:lightRig rig="threePt" dir="t"/>
+    </dgm:scene3d>
+    <dgm:sp3d/>
+    <dgm:txPr/>
+    <dgm:style>
+      <a:lnRef idx="0">
+        <a:scrgbClr r="0" g="0" b="0"/>
+      </a:lnRef>
+      <a:fillRef idx="1">
+        <a:scrgbClr r="0" g="0" b="0"/>
+      </a:fillRef>
+      <a:effectRef idx="0">
+        <a:scrgbClr r="0" g="0" b="0"/>
+      </a:effectRef>
+      <a:fontRef idx="minor"/>
+    </dgm:style>
+  </dgm:styleLbl>
+  <dgm:styleLbl name="trBgShp">
+    <dgm:scene3d>
+      <a:camera prst="orthographicFront"/>
+      <a:lightRig rig="threePt" dir="t"/>
+    </dgm:scene3d>
+    <dgm:sp3d/>
+    <dgm:txPr/>
+    <dgm:style>
+      <a:lnRef idx="0">
+        <a:scrgbClr r="0" g="0" b="0"/>
+      </a:lnRef>
+      <a:fillRef idx="1">
+        <a:scrgbClr r="0" g="0" b="0"/>
+      </a:fillRef>
+      <a:effectRef idx="0">
+        <a:scrgbClr r="0" g="0" b="0"/>
+      </a:effectRef>
+      <a:fontRef idx="minor"/>
+    </dgm:style>
+  </dgm:styleLbl>
+  <dgm:styleLbl name="fgShp">
+    <dgm:scene3d>
+      <a:camera prst="orthographicFront"/>
+      <a:lightRig rig="threePt" dir="t"/>
+    </dgm:scene3d>
+    <dgm:sp3d/>
+    <dgm:txPr/>
+    <dgm:style>
+      <a:lnRef idx="2">
+        <a:scrgbClr r="0" g="0" b="0"/>
+      </a:lnRef>
+      <a:fillRef idx="1">
+        <a:scrgbClr r="0" g="0" b="0"/>
+      </a:fillRef>
+      <a:effectRef idx="0">
         <a:scrgbClr r="0" g="0" b="0"/>
       </a:effectRef>
       <a:fontRef idx="minor"/>
@@ -11937,7 +14904,7 @@
           <a:p>
             <a:fld id="{C532137C-021D-4A9D-A859-D245201B58F6}" type="datetimeFigureOut">
               <a:rPr lang="en-US" smtClean="0"/>
-              <a:t>11/22/2025</a:t>
+              <a:t>11/23/2025</a:t>
             </a:fld>
             <a:endParaRPr lang="en-US"/>
           </a:p>
@@ -12351,7 +15318,7 @@
           <a:p>
             <a:fld id="{962F6855-2B44-4D26-9C54-0F94AD6A38AE}" type="datetimeFigureOut">
               <a:rPr lang="en-US" smtClean="0"/>
-              <a:t>11/22/2025</a:t>
+              <a:t>11/23/2025</a:t>
             </a:fld>
             <a:endParaRPr lang="en-US"/>
           </a:p>
@@ -12549,7 +15516,7 @@
           <a:p>
             <a:fld id="{962F6855-2B44-4D26-9C54-0F94AD6A38AE}" type="datetimeFigureOut">
               <a:rPr lang="en-US" smtClean="0"/>
-              <a:t>11/22/2025</a:t>
+              <a:t>11/23/2025</a:t>
             </a:fld>
             <a:endParaRPr lang="en-US"/>
           </a:p>
@@ -12757,7 +15724,7 @@
           <a:p>
             <a:fld id="{962F6855-2B44-4D26-9C54-0F94AD6A38AE}" type="datetimeFigureOut">
               <a:rPr lang="en-US" smtClean="0"/>
-              <a:t>11/22/2025</a:t>
+              <a:t>11/23/2025</a:t>
             </a:fld>
             <a:endParaRPr lang="en-US"/>
           </a:p>
@@ -12955,7 +15922,7 @@
           <a:p>
             <a:fld id="{962F6855-2B44-4D26-9C54-0F94AD6A38AE}" type="datetimeFigureOut">
               <a:rPr lang="en-US" smtClean="0"/>
-              <a:t>11/22/2025</a:t>
+              <a:t>11/23/2025</a:t>
             </a:fld>
             <a:endParaRPr lang="en-US"/>
           </a:p>
@@ -13230,7 +16197,7 @@
           <a:p>
             <a:fld id="{962F6855-2B44-4D26-9C54-0F94AD6A38AE}" type="datetimeFigureOut">
               <a:rPr lang="en-US" smtClean="0"/>
-              <a:t>11/22/2025</a:t>
+              <a:t>11/23/2025</a:t>
             </a:fld>
             <a:endParaRPr lang="en-US"/>
           </a:p>
@@ -13495,7 +16462,7 @@
           <a:p>
             <a:fld id="{962F6855-2B44-4D26-9C54-0F94AD6A38AE}" type="datetimeFigureOut">
               <a:rPr lang="en-US" smtClean="0"/>
-              <a:t>11/22/2025</a:t>
+              <a:t>11/23/2025</a:t>
             </a:fld>
             <a:endParaRPr lang="en-US"/>
           </a:p>
@@ -13907,7 +16874,7 @@
           <a:p>
             <a:fld id="{962F6855-2B44-4D26-9C54-0F94AD6A38AE}" type="datetimeFigureOut">
               <a:rPr lang="en-US" smtClean="0"/>
-              <a:t>11/22/2025</a:t>
+              <a:t>11/23/2025</a:t>
             </a:fld>
             <a:endParaRPr lang="en-US"/>
           </a:p>
@@ -14048,7 +17015,7 @@
           <a:p>
             <a:fld id="{962F6855-2B44-4D26-9C54-0F94AD6A38AE}" type="datetimeFigureOut">
               <a:rPr lang="en-US" smtClean="0"/>
-              <a:t>11/22/2025</a:t>
+              <a:t>11/23/2025</a:t>
             </a:fld>
             <a:endParaRPr lang="en-US"/>
           </a:p>
@@ -14161,7 +17128,7 @@
           <a:p>
             <a:fld id="{962F6855-2B44-4D26-9C54-0F94AD6A38AE}" type="datetimeFigureOut">
               <a:rPr lang="en-US" smtClean="0"/>
-              <a:t>11/22/2025</a:t>
+              <a:t>11/23/2025</a:t>
             </a:fld>
             <a:endParaRPr lang="en-US"/>
           </a:p>
@@ -14472,7 +17439,7 @@
           <a:p>
             <a:fld id="{962F6855-2B44-4D26-9C54-0F94AD6A38AE}" type="datetimeFigureOut">
               <a:rPr lang="en-US" smtClean="0"/>
-              <a:t>11/22/2025</a:t>
+              <a:t>11/23/2025</a:t>
             </a:fld>
             <a:endParaRPr lang="en-US"/>
           </a:p>
@@ -14760,7 +17727,7 @@
           <a:p>
             <a:fld id="{962F6855-2B44-4D26-9C54-0F94AD6A38AE}" type="datetimeFigureOut">
               <a:rPr lang="en-US" smtClean="0"/>
-              <a:t>11/22/2025</a:t>
+              <a:t>11/23/2025</a:t>
             </a:fld>
             <a:endParaRPr lang="en-US"/>
           </a:p>
@@ -15001,7 +17968,7 @@
           <a:p>
             <a:fld id="{962F6855-2B44-4D26-9C54-0F94AD6A38AE}" type="datetimeFigureOut">
               <a:rPr lang="en-US" smtClean="0"/>
-              <a:t>11/22/2025</a:t>
+              <a:t>11/23/2025</a:t>
             </a:fld>
             <a:endParaRPr lang="en-US"/>
           </a:p>
@@ -21304,6 +24271,3095 @@
 <file path=ppt/slides/slide20.xml><?xml version="1.0" encoding="utf-8"?>
 <p:sld xmlns:a="http://schemas.openxmlformats.org/drawingml/2006/main" xmlns:r="http://schemas.openxmlformats.org/officeDocument/2006/relationships" xmlns:p="http://schemas.openxmlformats.org/presentationml/2006/main">
   <p:cSld>
+    <p:spTree>
+      <p:nvGrpSpPr>
+        <p:cNvPr id="1" name=""/>
+        <p:cNvGrpSpPr/>
+        <p:nvPr/>
+      </p:nvGrpSpPr>
+      <p:grpSpPr>
+        <a:xfrm>
+          <a:off x="0" y="0"/>
+          <a:ext cx="0" cy="0"/>
+          <a:chOff x="0" y="0"/>
+          <a:chExt cx="0" cy="0"/>
+        </a:xfrm>
+      </p:grpSpPr>
+      <p:sp>
+        <p:nvSpPr>
+          <p:cNvPr id="2" name="Title 1">
+            <a:extLst>
+              <a:ext uri="{FF2B5EF4-FFF2-40B4-BE49-F238E27FC236}">
+                <a16:creationId xmlns:a16="http://schemas.microsoft.com/office/drawing/2014/main" id="{1B84C79D-78DA-F1B6-E65F-040916201A9F}"/>
+              </a:ext>
+            </a:extLst>
+          </p:cNvPr>
+          <p:cNvSpPr>
+            <a:spLocks noGrp="1"/>
+          </p:cNvSpPr>
+          <p:nvPr>
+            <p:ph type="title"/>
+          </p:nvPr>
+        </p:nvSpPr>
+        <p:spPr>
+          <a:xfrm>
+            <a:off x="838200" y="768349"/>
+            <a:ext cx="10515600" cy="1069595"/>
+          </a:xfrm>
+        </p:spPr>
+        <p:txBody>
+          <a:bodyPr/>
+          <a:lstStyle/>
+          <a:p>
+            <a:pPr algn="ctr"/>
+            <a:r>
+              <a:rPr lang="el-GR" dirty="0"/>
+              <a:t>Επέκταση Δικτύου</a:t>
+            </a:r>
+            <a:endParaRPr lang="en-US" dirty="0"/>
+          </a:p>
+        </p:txBody>
+      </p:sp>
+      <p:graphicFrame>
+        <p:nvGraphicFramePr>
+          <p:cNvPr id="5" name="Text Placeholder 2">
+            <a:extLst>
+              <a:ext uri="{FF2B5EF4-FFF2-40B4-BE49-F238E27FC236}">
+                <a16:creationId xmlns:a16="http://schemas.microsoft.com/office/drawing/2014/main" id="{F9D12417-309A-C674-5A34-E20935D1B1D2}"/>
+              </a:ext>
+            </a:extLst>
+          </p:cNvPr>
+          <p:cNvGraphicFramePr/>
+          <p:nvPr/>
+        </p:nvGraphicFramePr>
+        <p:xfrm>
+          <a:off x="831850" y="2706624"/>
+          <a:ext cx="10515600" cy="3383027"/>
+        </p:xfrm>
+        <a:graphic>
+          <a:graphicData uri="http://schemas.openxmlformats.org/drawingml/2006/diagram">
+            <dgm:relIds xmlns:dgm="http://schemas.openxmlformats.org/drawingml/2006/diagram" xmlns:r="http://schemas.openxmlformats.org/officeDocument/2006/relationships" r:dm="rId2" r:lo="rId3" r:qs="rId4" r:cs="rId5"/>
+          </a:graphicData>
+        </a:graphic>
+      </p:graphicFrame>
+    </p:spTree>
+    <p:extLst>
+      <p:ext uri="{BB962C8B-B14F-4D97-AF65-F5344CB8AC3E}">
+        <p14:creationId xmlns:p14="http://schemas.microsoft.com/office/powerpoint/2010/main" val="4087617240"/>
+      </p:ext>
+    </p:extLst>
+  </p:cSld>
+  <p:clrMapOvr>
+    <a:masterClrMapping/>
+  </p:clrMapOvr>
+</p:sld>
+</file>
+
+<file path=ppt/slides/slide21.xml><?xml version="1.0" encoding="utf-8"?>
+<p:sld xmlns:a="http://schemas.openxmlformats.org/drawingml/2006/main" xmlns:r="http://schemas.openxmlformats.org/officeDocument/2006/relationships" xmlns:p="http://schemas.openxmlformats.org/presentationml/2006/main">
+  <p:cSld>
+    <p:bg>
+      <p:bgPr>
+        <a:solidFill>
+          <a:schemeClr val="bg1"/>
+        </a:solidFill>
+        <a:effectLst/>
+      </p:bgPr>
+    </p:bg>
+    <p:spTree>
+      <p:nvGrpSpPr>
+        <p:cNvPr id="1" name=""/>
+        <p:cNvGrpSpPr/>
+        <p:nvPr/>
+      </p:nvGrpSpPr>
+      <p:grpSpPr>
+        <a:xfrm>
+          <a:off x="0" y="0"/>
+          <a:ext cx="0" cy="0"/>
+          <a:chOff x="0" y="0"/>
+          <a:chExt cx="0" cy="0"/>
+        </a:xfrm>
+      </p:grpSpPr>
+      <p:sp useBgFill="1">
+        <p:nvSpPr>
+          <p:cNvPr id="25" name="Rectangle 24">
+            <a:extLst>
+              <a:ext uri="{FF2B5EF4-FFF2-40B4-BE49-F238E27FC236}">
+                <a16:creationId xmlns:a16="http://schemas.microsoft.com/office/drawing/2014/main" id="{09588DA8-065E-4F6F-8EFD-43104AB2E0CF}"/>
+              </a:ext>
+              <a:ext uri="{C183D7F6-B498-43B3-948B-1728B52AA6E4}">
+                <adec:decorative xmlns:adec="http://schemas.microsoft.com/office/drawing/2017/decorative" val="1"/>
+              </a:ext>
+            </a:extLst>
+          </p:cNvPr>
+          <p:cNvSpPr>
+            <a:spLocks noGrp="1" noRot="1" noChangeAspect="1" noMove="1" noResize="1" noEditPoints="1" noAdjustHandles="1" noChangeArrowheads="1" noChangeShapeType="1" noTextEdit="1"/>
+          </p:cNvSpPr>
+          <p:nvPr>
+            <p:extLst>
+              <p:ext uri="{386F3935-93C4-4BCD-93E2-E3B085C9AB24}">
+                <p16:designElem xmlns:p16="http://schemas.microsoft.com/office/powerpoint/2015/main" val="1"/>
+              </p:ext>
+            </p:extLst>
+          </p:nvPr>
+        </p:nvSpPr>
+        <p:spPr>
+          <a:xfrm>
+            <a:off x="0" y="0"/>
+            <a:ext cx="12192000" cy="6858000"/>
+          </a:xfrm>
+          <a:prstGeom prst="rect">
+            <a:avLst/>
+          </a:prstGeom>
+          <a:ln w="12700" cap="flat" cmpd="sng" algn="ctr">
+            <a:noFill/>
+            <a:prstDash val="solid"/>
+            <a:miter lim="800000"/>
+          </a:ln>
+          <a:effectLst/>
+          <a:extLst>
+            <a:ext uri="{91240B29-F687-4F45-9708-019B960494DF}">
+              <a14:hiddenLine xmlns:a14="http://schemas.microsoft.com/office/drawing/2010/main" w="12700" cap="flat" cmpd="sng" algn="ctr">
+                <a:solidFill>
+                  <a:schemeClr val="accent1">
+                    <a:shade val="50000"/>
+                  </a:schemeClr>
+                </a:solidFill>
+                <a:prstDash val="solid"/>
+                <a:miter lim="800000"/>
+              </a14:hiddenLine>
+            </a:ext>
+          </a:extLst>
+        </p:spPr>
+        <p:style>
+          <a:lnRef idx="2">
+            <a:schemeClr val="accent1">
+              <a:shade val="50000"/>
+            </a:schemeClr>
+          </a:lnRef>
+          <a:fillRef idx="1">
+            <a:schemeClr val="accent1"/>
+          </a:fillRef>
+          <a:effectRef idx="0">
+            <a:schemeClr val="accent1"/>
+          </a:effectRef>
+          <a:fontRef idx="minor">
+            <a:schemeClr val="lt1"/>
+          </a:fontRef>
+        </p:style>
+        <p:txBody>
+          <a:bodyPr rtlCol="0" anchor="ctr"/>
+          <a:lstStyle/>
+          <a:p>
+            <a:pPr algn="ctr"/>
+            <a:endParaRPr lang="en-US"/>
+          </a:p>
+        </p:txBody>
+      </p:sp>
+      <p:sp useBgFill="1">
+        <p:nvSpPr>
+          <p:cNvPr id="27" name="Rectangle 26">
+            <a:extLst>
+              <a:ext uri="{FF2B5EF4-FFF2-40B4-BE49-F238E27FC236}">
+                <a16:creationId xmlns:a16="http://schemas.microsoft.com/office/drawing/2014/main" id="{C4285719-470E-454C-AF62-8323075F1F5B}"/>
+              </a:ext>
+              <a:ext uri="{C183D7F6-B498-43B3-948B-1728B52AA6E4}">
+                <adec:decorative xmlns:adec="http://schemas.microsoft.com/office/drawing/2017/decorative" val="1"/>
+              </a:ext>
+            </a:extLst>
+          </p:cNvPr>
+          <p:cNvSpPr>
+            <a:spLocks noGrp="1" noRot="1" noChangeAspect="1" noMove="1" noResize="1" noEditPoints="1" noAdjustHandles="1" noChangeArrowheads="1" noChangeShapeType="1" noTextEdit="1"/>
+          </p:cNvSpPr>
+          <p:nvPr>
+            <p:extLst>
+              <p:ext uri="{386F3935-93C4-4BCD-93E2-E3B085C9AB24}">
+                <p16:designElem xmlns:p16="http://schemas.microsoft.com/office/powerpoint/2015/main" val="1"/>
+              </p:ext>
+            </p:extLst>
+          </p:nvPr>
+        </p:nvSpPr>
+        <p:spPr>
+          <a:xfrm>
+            <a:off x="0" y="0"/>
+            <a:ext cx="12188952" cy="6858000"/>
+          </a:xfrm>
+          <a:prstGeom prst="rect">
+            <a:avLst/>
+          </a:prstGeom>
+          <a:ln w="12700" cap="flat" cmpd="sng" algn="ctr">
+            <a:noFill/>
+            <a:prstDash val="solid"/>
+            <a:miter lim="800000"/>
+          </a:ln>
+          <a:effectLst/>
+          <a:extLst>
+            <a:ext uri="{91240B29-F687-4F45-9708-019B960494DF}">
+              <a14:hiddenLine xmlns:a14="http://schemas.microsoft.com/office/drawing/2010/main" w="12700" cap="flat" cmpd="sng" algn="ctr">
+                <a:solidFill>
+                  <a:schemeClr val="accent1">
+                    <a:shade val="50000"/>
+                  </a:schemeClr>
+                </a:solidFill>
+                <a:prstDash val="solid"/>
+                <a:miter lim="800000"/>
+              </a14:hiddenLine>
+            </a:ext>
+          </a:extLst>
+        </p:spPr>
+        <p:style>
+          <a:lnRef idx="2">
+            <a:schemeClr val="accent1">
+              <a:shade val="50000"/>
+            </a:schemeClr>
+          </a:lnRef>
+          <a:fillRef idx="1">
+            <a:schemeClr val="accent1"/>
+          </a:fillRef>
+          <a:effectRef idx="0">
+            <a:schemeClr val="accent1"/>
+          </a:effectRef>
+          <a:fontRef idx="minor">
+            <a:schemeClr val="lt1"/>
+          </a:fontRef>
+        </p:style>
+        <p:txBody>
+          <a:bodyPr rtlCol="0" anchor="ctr"/>
+          <a:lstStyle/>
+          <a:p>
+            <a:pPr algn="ctr"/>
+            <a:endParaRPr lang="en-US"/>
+          </a:p>
+        </p:txBody>
+      </p:sp>
+      <p:sp>
+        <p:nvSpPr>
+          <p:cNvPr id="29" name="Rectangle 28">
+            <a:extLst>
+              <a:ext uri="{FF2B5EF4-FFF2-40B4-BE49-F238E27FC236}">
+                <a16:creationId xmlns:a16="http://schemas.microsoft.com/office/drawing/2014/main" id="{CD9FE4EF-C4D8-49A0-B2FF-81D8DB7D8A24}"/>
+              </a:ext>
+              <a:ext uri="{C183D7F6-B498-43B3-948B-1728B52AA6E4}">
+                <adec:decorative xmlns:adec="http://schemas.microsoft.com/office/drawing/2017/decorative" val="1"/>
+              </a:ext>
+            </a:extLst>
+          </p:cNvPr>
+          <p:cNvSpPr>
+            <a:spLocks noGrp="1" noRot="1" noChangeAspect="1" noMove="1" noResize="1" noEditPoints="1" noAdjustHandles="1" noChangeArrowheads="1" noChangeShapeType="1" noTextEdit="1"/>
+          </p:cNvSpPr>
+          <p:nvPr>
+            <p:extLst>
+              <p:ext uri="{386F3935-93C4-4BCD-93E2-E3B085C9AB24}">
+                <p16:designElem xmlns:p16="http://schemas.microsoft.com/office/powerpoint/2015/main" val="1"/>
+              </p:ext>
+            </p:extLst>
+          </p:nvPr>
+        </p:nvSpPr>
+        <p:spPr>
+          <a:xfrm rot="5400000" flipH="1">
+            <a:off x="-1410084" y="1410082"/>
+            <a:ext cx="6858000" cy="4037836"/>
+          </a:xfrm>
+          <a:prstGeom prst="rect">
+            <a:avLst/>
+          </a:prstGeom>
+          <a:gradFill>
+            <a:gsLst>
+              <a:gs pos="8000">
+                <a:srgbClr val="000000"/>
+              </a:gs>
+              <a:gs pos="100000">
+                <a:schemeClr val="accent1">
+                  <a:lumMod val="75000"/>
+                </a:schemeClr>
+              </a:gs>
+            </a:gsLst>
+            <a:lin ang="3000000" scaled="0"/>
+          </a:gradFill>
+          <a:ln>
+            <a:noFill/>
+          </a:ln>
+        </p:spPr>
+        <p:style>
+          <a:lnRef idx="2">
+            <a:schemeClr val="accent1">
+              <a:shade val="50000"/>
+            </a:schemeClr>
+          </a:lnRef>
+          <a:fillRef idx="1">
+            <a:schemeClr val="accent1"/>
+          </a:fillRef>
+          <a:effectRef idx="0">
+            <a:schemeClr val="accent1"/>
+          </a:effectRef>
+          <a:fontRef idx="minor">
+            <a:schemeClr val="lt1"/>
+          </a:fontRef>
+        </p:style>
+        <p:txBody>
+          <a:bodyPr rtlCol="0" anchor="ctr"/>
+          <a:lstStyle/>
+          <a:p>
+            <a:pPr algn="ctr"/>
+            <a:endParaRPr lang="en-US"/>
+          </a:p>
+        </p:txBody>
+      </p:sp>
+      <p:sp>
+        <p:nvSpPr>
+          <p:cNvPr id="31" name="Rectangle 30">
+            <a:extLst>
+              <a:ext uri="{FF2B5EF4-FFF2-40B4-BE49-F238E27FC236}">
+                <a16:creationId xmlns:a16="http://schemas.microsoft.com/office/drawing/2014/main" id="{4300840D-0A0B-4512-BACA-B439D5B9C57C}"/>
+              </a:ext>
+              <a:ext uri="{C183D7F6-B498-43B3-948B-1728B52AA6E4}">
+                <adec:decorative xmlns:adec="http://schemas.microsoft.com/office/drawing/2017/decorative" val="1"/>
+              </a:ext>
+            </a:extLst>
+          </p:cNvPr>
+          <p:cNvSpPr>
+            <a:spLocks noGrp="1" noRot="1" noChangeAspect="1" noMove="1" noResize="1" noEditPoints="1" noAdjustHandles="1" noChangeArrowheads="1" noChangeShapeType="1" noTextEdit="1"/>
+          </p:cNvSpPr>
+          <p:nvPr>
+            <p:extLst>
+              <p:ext uri="{386F3935-93C4-4BCD-93E2-E3B085C9AB24}">
+                <p16:designElem xmlns:p16="http://schemas.microsoft.com/office/powerpoint/2015/main" val="1"/>
+              </p:ext>
+            </p:extLst>
+          </p:nvPr>
+        </p:nvSpPr>
+        <p:spPr>
+          <a:xfrm rot="5400000" flipH="1">
+            <a:off x="-1410085" y="1420219"/>
+            <a:ext cx="6857999" cy="4037839"/>
+          </a:xfrm>
+          <a:prstGeom prst="rect">
+            <a:avLst/>
+          </a:prstGeom>
+          <a:gradFill>
+            <a:gsLst>
+              <a:gs pos="0">
+                <a:srgbClr val="000000">
+                  <a:alpha val="0"/>
+                </a:srgbClr>
+              </a:gs>
+              <a:gs pos="99000">
+                <a:schemeClr val="accent1">
+                  <a:alpha val="46000"/>
+                </a:schemeClr>
+              </a:gs>
+            </a:gsLst>
+            <a:lin ang="1800000" scaled="0"/>
+          </a:gradFill>
+          <a:ln>
+            <a:noFill/>
+          </a:ln>
+        </p:spPr>
+        <p:style>
+          <a:lnRef idx="2">
+            <a:schemeClr val="accent1">
+              <a:shade val="50000"/>
+            </a:schemeClr>
+          </a:lnRef>
+          <a:fillRef idx="1">
+            <a:schemeClr val="accent1"/>
+          </a:fillRef>
+          <a:effectRef idx="0">
+            <a:schemeClr val="accent1"/>
+          </a:effectRef>
+          <a:fontRef idx="minor">
+            <a:schemeClr val="lt1"/>
+          </a:fontRef>
+        </p:style>
+        <p:txBody>
+          <a:bodyPr rtlCol="0" anchor="ctr"/>
+          <a:lstStyle/>
+          <a:p>
+            <a:pPr algn="ctr"/>
+            <a:endParaRPr lang="en-US"/>
+          </a:p>
+        </p:txBody>
+      </p:sp>
+      <p:sp>
+        <p:nvSpPr>
+          <p:cNvPr id="33" name="Rectangle 32">
+            <a:extLst>
+              <a:ext uri="{FF2B5EF4-FFF2-40B4-BE49-F238E27FC236}">
+                <a16:creationId xmlns:a16="http://schemas.microsoft.com/office/drawing/2014/main" id="{D2B78728-A580-49A7-84F9-6EF6F583ADE0}"/>
+              </a:ext>
+              <a:ext uri="{C183D7F6-B498-43B3-948B-1728B52AA6E4}">
+                <adec:decorative xmlns:adec="http://schemas.microsoft.com/office/drawing/2017/decorative" val="1"/>
+              </a:ext>
+            </a:extLst>
+          </p:cNvPr>
+          <p:cNvSpPr>
+            <a:spLocks noGrp="1" noRot="1" noChangeAspect="1" noMove="1" noResize="1" noEditPoints="1" noAdjustHandles="1" noChangeArrowheads="1" noChangeShapeType="1" noTextEdit="1"/>
+          </p:cNvSpPr>
+          <p:nvPr>
+            <p:extLst>
+              <p:ext uri="{386F3935-93C4-4BCD-93E2-E3B085C9AB24}">
+                <p16:designElem xmlns:p16="http://schemas.microsoft.com/office/powerpoint/2015/main" val="1"/>
+              </p:ext>
+            </p:extLst>
+          </p:nvPr>
+        </p:nvSpPr>
+        <p:spPr>
+          <a:xfrm rot="5400000" flipH="1">
+            <a:off x="767923" y="3588085"/>
+            <a:ext cx="2501979" cy="4037841"/>
+          </a:xfrm>
+          <a:prstGeom prst="rect">
+            <a:avLst/>
+          </a:prstGeom>
+          <a:gradFill>
+            <a:gsLst>
+              <a:gs pos="2000">
+                <a:schemeClr val="accent1">
+                  <a:alpha val="29000"/>
+                </a:schemeClr>
+              </a:gs>
+              <a:gs pos="100000">
+                <a:srgbClr val="000000">
+                  <a:alpha val="30000"/>
+                </a:srgbClr>
+              </a:gs>
+            </a:gsLst>
+            <a:lin ang="7800000" scaled="0"/>
+          </a:gradFill>
+          <a:ln>
+            <a:noFill/>
+          </a:ln>
+        </p:spPr>
+        <p:style>
+          <a:lnRef idx="2">
+            <a:schemeClr val="accent1">
+              <a:shade val="50000"/>
+            </a:schemeClr>
+          </a:lnRef>
+          <a:fillRef idx="1">
+            <a:schemeClr val="accent1"/>
+          </a:fillRef>
+          <a:effectRef idx="0">
+            <a:schemeClr val="accent1"/>
+          </a:effectRef>
+          <a:fontRef idx="minor">
+            <a:schemeClr val="lt1"/>
+          </a:fontRef>
+        </p:style>
+        <p:txBody>
+          <a:bodyPr rtlCol="0" anchor="ctr"/>
+          <a:lstStyle/>
+          <a:p>
+            <a:pPr algn="ctr"/>
+            <a:endParaRPr lang="en-US" dirty="0"/>
+          </a:p>
+        </p:txBody>
+      </p:sp>
+      <p:sp>
+        <p:nvSpPr>
+          <p:cNvPr id="35" name="Freeform: Shape 34">
+            <a:extLst>
+              <a:ext uri="{FF2B5EF4-FFF2-40B4-BE49-F238E27FC236}">
+                <a16:creationId xmlns:a16="http://schemas.microsoft.com/office/drawing/2014/main" id="{38FAA1A1-D861-433F-88FA-1E9D6FD31D11}"/>
+              </a:ext>
+              <a:ext uri="{C183D7F6-B498-43B3-948B-1728B52AA6E4}">
+                <adec:decorative xmlns:adec="http://schemas.microsoft.com/office/drawing/2017/decorative" val="1"/>
+              </a:ext>
+            </a:extLst>
+          </p:cNvPr>
+          <p:cNvSpPr>
+            <a:spLocks noGrp="1" noRot="1" noChangeAspect="1" noMove="1" noResize="1" noEditPoints="1" noAdjustHandles="1" noChangeArrowheads="1" noChangeShapeType="1" noTextEdit="1"/>
+          </p:cNvSpPr>
+          <p:nvPr>
+            <p:extLst>
+              <p:ext uri="{386F3935-93C4-4BCD-93E2-E3B085C9AB24}">
+                <p16:designElem xmlns:p16="http://schemas.microsoft.com/office/powerpoint/2015/main" val="1"/>
+              </p:ext>
+            </p:extLst>
+          </p:nvPr>
+        </p:nvSpPr>
+        <p:spPr>
+          <a:xfrm rot="20635413">
+            <a:off x="-501737" y="969718"/>
+            <a:ext cx="3900357" cy="4178958"/>
+          </a:xfrm>
+          <a:custGeom>
+            <a:avLst/>
+            <a:gdLst>
+              <a:gd name="connsiteX0" fmla="*/ 2432225 w 3900357"/>
+              <a:gd name="connsiteY0" fmla="*/ 93939 h 4178958"/>
+              <a:gd name="connsiteX1" fmla="*/ 3900357 w 3900357"/>
+              <a:gd name="connsiteY1" fmla="*/ 2089479 h 4178958"/>
+              <a:gd name="connsiteX2" fmla="*/ 1810878 w 3900357"/>
+              <a:gd name="connsiteY2" fmla="*/ 4178958 h 4178958"/>
+              <a:gd name="connsiteX3" fmla="*/ 78249 w 3900357"/>
+              <a:gd name="connsiteY3" fmla="*/ 3257727 h 4178958"/>
+              <a:gd name="connsiteX4" fmla="*/ 0 w 3900357"/>
+              <a:gd name="connsiteY4" fmla="*/ 3128923 h 4178958"/>
+              <a:gd name="connsiteX5" fmla="*/ 831324 w 3900357"/>
+              <a:gd name="connsiteY5" fmla="*/ 244281 h 4178958"/>
+              <a:gd name="connsiteX6" fmla="*/ 997559 w 3900357"/>
+              <a:gd name="connsiteY6" fmla="*/ 164202 h 4178958"/>
+              <a:gd name="connsiteX7" fmla="*/ 1810878 w 3900357"/>
+              <a:gd name="connsiteY7" fmla="*/ 0 h 4178958"/>
+              <a:gd name="connsiteX8" fmla="*/ 2432225 w 3900357"/>
+              <a:gd name="connsiteY8" fmla="*/ 93939 h 4178958"/>
+            </a:gdLst>
+            <a:ahLst/>
+            <a:cxnLst>
+              <a:cxn ang="0">
+                <a:pos x="connsiteX0" y="connsiteY0"/>
+              </a:cxn>
+              <a:cxn ang="0">
+                <a:pos x="connsiteX1" y="connsiteY1"/>
+              </a:cxn>
+              <a:cxn ang="0">
+                <a:pos x="connsiteX2" y="connsiteY2"/>
+              </a:cxn>
+              <a:cxn ang="0">
+                <a:pos x="connsiteX3" y="connsiteY3"/>
+              </a:cxn>
+              <a:cxn ang="0">
+                <a:pos x="connsiteX4" y="connsiteY4"/>
+              </a:cxn>
+              <a:cxn ang="0">
+                <a:pos x="connsiteX5" y="connsiteY5"/>
+              </a:cxn>
+              <a:cxn ang="0">
+                <a:pos x="connsiteX6" y="connsiteY6"/>
+              </a:cxn>
+              <a:cxn ang="0">
+                <a:pos x="connsiteX7" y="connsiteY7"/>
+              </a:cxn>
+              <a:cxn ang="0">
+                <a:pos x="connsiteX8" y="connsiteY8"/>
+              </a:cxn>
+            </a:cxnLst>
+            <a:rect l="l" t="t" r="r" b="b"/>
+            <a:pathLst>
+              <a:path w="3900357" h="4178958">
+                <a:moveTo>
+                  <a:pt x="2432225" y="93939"/>
+                </a:moveTo>
+                <a:cubicBezTo>
+                  <a:pt x="3282786" y="358491"/>
+                  <a:pt x="3900357" y="1151865"/>
+                  <a:pt x="3900357" y="2089479"/>
+                </a:cubicBezTo>
+                <a:cubicBezTo>
+                  <a:pt x="3900357" y="3243466"/>
+                  <a:pt x="2964865" y="4178958"/>
+                  <a:pt x="1810878" y="4178958"/>
+                </a:cubicBezTo>
+                <a:cubicBezTo>
+                  <a:pt x="1089636" y="4178958"/>
+                  <a:pt x="453744" y="3813531"/>
+                  <a:pt x="78249" y="3257727"/>
+                </a:cubicBezTo>
+                <a:lnTo>
+                  <a:pt x="0" y="3128923"/>
+                </a:lnTo>
+                <a:lnTo>
+                  <a:pt x="831324" y="244281"/>
+                </a:lnTo>
+                <a:lnTo>
+                  <a:pt x="997559" y="164202"/>
+                </a:lnTo>
+                <a:cubicBezTo>
+                  <a:pt x="1247540" y="58468"/>
+                  <a:pt x="1522381" y="0"/>
+                  <a:pt x="1810878" y="0"/>
+                </a:cubicBezTo>
+                <a:cubicBezTo>
+                  <a:pt x="2027251" y="0"/>
+                  <a:pt x="2235942" y="32888"/>
+                  <a:pt x="2432225" y="93939"/>
+                </a:cubicBezTo>
+                <a:close/>
+              </a:path>
+            </a:pathLst>
+          </a:custGeom>
+          <a:gradFill>
+            <a:gsLst>
+              <a:gs pos="29000">
+                <a:srgbClr val="000000">
+                  <a:alpha val="0"/>
+                </a:srgbClr>
+              </a:gs>
+              <a:gs pos="100000">
+                <a:schemeClr val="accent1">
+                  <a:alpha val="43000"/>
+                </a:schemeClr>
+              </a:gs>
+            </a:gsLst>
+            <a:lin ang="1800000" scaled="0"/>
+          </a:gradFill>
+          <a:ln>
+            <a:noFill/>
+          </a:ln>
+        </p:spPr>
+        <p:style>
+          <a:lnRef idx="2">
+            <a:schemeClr val="accent1">
+              <a:shade val="50000"/>
+            </a:schemeClr>
+          </a:lnRef>
+          <a:fillRef idx="1">
+            <a:schemeClr val="accent1"/>
+          </a:fillRef>
+          <a:effectRef idx="0">
+            <a:schemeClr val="accent1"/>
+          </a:effectRef>
+          <a:fontRef idx="minor">
+            <a:schemeClr val="lt1"/>
+          </a:fontRef>
+        </p:style>
+        <p:txBody>
+          <a:bodyPr wrap="square" rtlCol="0" anchor="ctr">
+            <a:noAutofit/>
+          </a:bodyPr>
+          <a:lstStyle/>
+          <a:p>
+            <a:pPr algn="ctr"/>
+            <a:endParaRPr lang="en-US" dirty="0"/>
+          </a:p>
+        </p:txBody>
+      </p:sp>
+      <p:sp>
+        <p:nvSpPr>
+          <p:cNvPr id="37" name="Rectangle 36">
+            <a:extLst>
+              <a:ext uri="{FF2B5EF4-FFF2-40B4-BE49-F238E27FC236}">
+                <a16:creationId xmlns:a16="http://schemas.microsoft.com/office/drawing/2014/main" id="{8D71EDA1-87BF-4D5D-AB79-F346FD19278A}"/>
+              </a:ext>
+              <a:ext uri="{C183D7F6-B498-43B3-948B-1728B52AA6E4}">
+                <adec:decorative xmlns:adec="http://schemas.microsoft.com/office/drawing/2017/decorative" val="1"/>
+              </a:ext>
+            </a:extLst>
+          </p:cNvPr>
+          <p:cNvSpPr>
+            <a:spLocks noGrp="1" noRot="1" noChangeAspect="1" noMove="1" noResize="1" noEditPoints="1" noAdjustHandles="1" noChangeArrowheads="1" noChangeShapeType="1" noTextEdit="1"/>
+          </p:cNvSpPr>
+          <p:nvPr>
+            <p:extLst>
+              <p:ext uri="{386F3935-93C4-4BCD-93E2-E3B085C9AB24}">
+                <p16:designElem xmlns:p16="http://schemas.microsoft.com/office/powerpoint/2015/main" val="1"/>
+              </p:ext>
+            </p:extLst>
+          </p:nvPr>
+        </p:nvSpPr>
+        <p:spPr>
+          <a:xfrm rot="5400000" flipH="1">
+            <a:off x="-1410093" y="1399943"/>
+            <a:ext cx="6858003" cy="4037835"/>
+          </a:xfrm>
+          <a:prstGeom prst="rect">
+            <a:avLst/>
+          </a:prstGeom>
+          <a:gradFill>
+            <a:gsLst>
+              <a:gs pos="0">
+                <a:srgbClr val="000000">
+                  <a:alpha val="0"/>
+                </a:srgbClr>
+              </a:gs>
+              <a:gs pos="99000">
+                <a:schemeClr val="accent1">
+                  <a:lumMod val="60000"/>
+                  <a:lumOff val="40000"/>
+                  <a:alpha val="11000"/>
+                </a:schemeClr>
+              </a:gs>
+            </a:gsLst>
+            <a:lin ang="7200000" scaled="0"/>
+          </a:gradFill>
+          <a:ln>
+            <a:noFill/>
+          </a:ln>
+        </p:spPr>
+        <p:style>
+          <a:lnRef idx="2">
+            <a:schemeClr val="accent1">
+              <a:shade val="50000"/>
+            </a:schemeClr>
+          </a:lnRef>
+          <a:fillRef idx="1">
+            <a:schemeClr val="accent1"/>
+          </a:fillRef>
+          <a:effectRef idx="0">
+            <a:schemeClr val="accent1"/>
+          </a:effectRef>
+          <a:fontRef idx="minor">
+            <a:schemeClr val="lt1"/>
+          </a:fontRef>
+        </p:style>
+        <p:txBody>
+          <a:bodyPr rtlCol="0" anchor="ctr"/>
+          <a:lstStyle/>
+          <a:p>
+            <a:pPr algn="ctr"/>
+            <a:endParaRPr lang="en-US"/>
+          </a:p>
+        </p:txBody>
+      </p:sp>
+      <p:sp>
+        <p:nvSpPr>
+          <p:cNvPr id="2" name="Title 1">
+            <a:extLst>
+              <a:ext uri="{FF2B5EF4-FFF2-40B4-BE49-F238E27FC236}">
+                <a16:creationId xmlns:a16="http://schemas.microsoft.com/office/drawing/2014/main" id="{AE9CC3DE-63A2-A107-A5FF-DCE92A5D79B2}"/>
+              </a:ext>
+            </a:extLst>
+          </p:cNvPr>
+          <p:cNvSpPr>
+            <a:spLocks noGrp="1"/>
+          </p:cNvSpPr>
+          <p:nvPr>
+            <p:ph type="title"/>
+          </p:nvPr>
+        </p:nvSpPr>
+        <p:spPr>
+          <a:xfrm>
+            <a:off x="466722" y="586855"/>
+            <a:ext cx="3201366" cy="3387497"/>
+          </a:xfrm>
+        </p:spPr>
+        <p:txBody>
+          <a:bodyPr vert="horz" lIns="91440" tIns="45720" rIns="91440" bIns="45720" rtlCol="0" anchor="b">
+            <a:normAutofit/>
+          </a:bodyPr>
+          <a:lstStyle/>
+          <a:p>
+            <a:pPr algn="r"/>
+            <a:r>
+              <a:rPr lang="en-US" sz="4000" kern="1200">
+                <a:solidFill>
+                  <a:srgbClr val="FFFFFF"/>
+                </a:solidFill>
+                <a:latin typeface="+mj-lt"/>
+                <a:ea typeface="+mj-ea"/>
+                <a:cs typeface="+mj-cs"/>
+              </a:rPr>
+              <a:t>Το</a:t>
+            </a:r>
+            <a:r>
+              <a:rPr lang="en-US" sz="4000" kern="1200" dirty="0">
+                <a:solidFill>
+                  <a:srgbClr val="FFFFFF"/>
+                </a:solidFill>
+                <a:latin typeface="+mj-lt"/>
+                <a:ea typeface="+mj-ea"/>
+                <a:cs typeface="+mj-cs"/>
+              </a:rPr>
+              <a:t> </a:t>
+            </a:r>
+            <a:r>
+              <a:rPr lang="en-US" sz="4000" kern="1200">
+                <a:solidFill>
+                  <a:srgbClr val="FFFFFF"/>
+                </a:solidFill>
+                <a:latin typeface="+mj-lt"/>
+                <a:ea typeface="+mj-ea"/>
+                <a:cs typeface="+mj-cs"/>
+              </a:rPr>
+              <a:t>Σημείο</a:t>
+            </a:r>
+            <a:r>
+              <a:rPr lang="en-US" sz="4000" kern="1200" dirty="0">
+                <a:solidFill>
+                  <a:srgbClr val="FFFFFF"/>
+                </a:solidFill>
+                <a:latin typeface="+mj-lt"/>
+                <a:ea typeface="+mj-ea"/>
+                <a:cs typeface="+mj-cs"/>
+              </a:rPr>
+              <a:t> </a:t>
+            </a:r>
+            <a:r>
+              <a:rPr lang="en-US" sz="4000" kern="1200">
+                <a:solidFill>
+                  <a:srgbClr val="FFFFFF"/>
+                </a:solidFill>
+                <a:latin typeface="+mj-lt"/>
+                <a:ea typeface="+mj-ea"/>
+                <a:cs typeface="+mj-cs"/>
+              </a:rPr>
+              <a:t>Συμφόρησης</a:t>
+            </a:r>
+            <a:r>
+              <a:rPr lang="en-US" sz="4000" kern="1200" dirty="0">
+                <a:solidFill>
+                  <a:srgbClr val="FFFFFF"/>
+                </a:solidFill>
+                <a:latin typeface="+mj-lt"/>
+                <a:ea typeface="+mj-ea"/>
+                <a:cs typeface="+mj-cs"/>
+              </a:rPr>
+              <a:t> (1 Mbps)</a:t>
+            </a:r>
+            <a:endParaRPr lang="en-US" sz="4000" kern="1200">
+              <a:solidFill>
+                <a:srgbClr val="FFFFFF"/>
+              </a:solidFill>
+              <a:latin typeface="+mj-lt"/>
+              <a:ea typeface="+mj-ea"/>
+              <a:cs typeface="+mj-cs"/>
+            </a:endParaRPr>
+          </a:p>
+        </p:txBody>
+      </p:sp>
+      <p:sp>
+        <p:nvSpPr>
+          <p:cNvPr id="4" name="Rectangle 1">
+            <a:extLst>
+              <a:ext uri="{FF2B5EF4-FFF2-40B4-BE49-F238E27FC236}">
+                <a16:creationId xmlns:a16="http://schemas.microsoft.com/office/drawing/2014/main" id="{7C336C72-4F60-C2CA-47AF-2880B7031ECA}"/>
+              </a:ext>
+            </a:extLst>
+          </p:cNvPr>
+          <p:cNvSpPr>
+            <a:spLocks noGrp="1" noChangeArrowheads="1"/>
+          </p:cNvSpPr>
+          <p:nvPr>
+            <p:ph type="body" sz="half" idx="2"/>
+          </p:nvPr>
+        </p:nvSpPr>
+        <p:spPr bwMode="auto">
+          <a:xfrm>
+            <a:off x="4810259" y="649480"/>
+            <a:ext cx="6555347" cy="5546047"/>
+          </a:xfrm>
+          <a:prstGeom prst="rect">
+            <a:avLst/>
+          </a:prstGeom>
+          <a:extLst>
+            <a:ext uri="{909E8E84-426E-40DD-AFC4-6F175D3DCCD1}">
+              <a14:hiddenFill xmlns:a14="http://schemas.microsoft.com/office/drawing/2010/main">
+                <a:solidFill>
+                  <a:schemeClr val="accent1"/>
+                </a:solidFill>
+              </a14:hiddenFill>
+            </a:ext>
+            <a:ext uri="{91240B29-F687-4F45-9708-019B960494DF}">
+              <a14:hiddenLine xmlns:a14="http://schemas.microsoft.com/office/drawing/2010/main" w="9525">
+                <a:solidFill>
+                  <a:schemeClr val="tx1"/>
+                </a:solidFill>
+                <a:miter lim="800000"/>
+                <a:headEnd/>
+                <a:tailEnd/>
+              </a14:hiddenLine>
+            </a:ext>
+            <a:ext uri="{AF507438-7753-43E0-B8FC-AC1667EBCBE1}">
+              <a14:hiddenEffects xmlns:a14="http://schemas.microsoft.com/office/drawing/2010/main">
+                <a:effectLst>
+                  <a:outerShdw dist="35921" dir="2700000" algn="ctr" rotWithShape="0">
+                    <a:schemeClr val="bg2"/>
+                  </a:outerShdw>
+                </a:effectLst>
+              </a14:hiddenEffects>
+            </a:ext>
+          </a:extLst>
+        </p:spPr>
+        <p:txBody>
+          <a:bodyPr vert="horz" lIns="91440" tIns="45720" rIns="91440" bIns="45720" numCol="1" rtlCol="0" anchor="ctr" anchorCtr="0" compatLnSpc="1">
+            <a:prstTxWarp prst="textNoShape">
+              <a:avLst/>
+            </a:prstTxWarp>
+            <a:normAutofit/>
+          </a:bodyPr>
+          <a:lstStyle/>
+          <a:p>
+            <a:pPr marL="0" marR="0" lvl="0" indent="-228600" fontAlgn="base">
+              <a:spcBef>
+                <a:spcPct val="0"/>
+              </a:spcBef>
+              <a:spcAft>
+                <a:spcPts val="600"/>
+              </a:spcAft>
+              <a:buClrTx/>
+              <a:buSzTx/>
+              <a:buFont typeface="Arial" panose="020B0604020202020204" pitchFamily="34" charset="0"/>
+              <a:buChar char="•"/>
+              <a:tabLst/>
+            </a:pPr>
+            <a:r>
+              <a:rPr kumimoji="0" lang="en-US" altLang="en-US" sz="2000" b="1" i="0" u="none" strike="noStrike" cap="none" normalizeH="0" baseline="0">
+                <a:ln>
+                  <a:noFill/>
+                </a:ln>
+                <a:effectLst/>
+              </a:rPr>
+              <a:t>Το</a:t>
+            </a:r>
+            <a:r>
+              <a:rPr kumimoji="0" lang="en-US" altLang="en-US" sz="2000" b="1" i="0" u="none" strike="noStrike" cap="none" normalizeH="0" baseline="0" dirty="0">
+                <a:ln>
+                  <a:noFill/>
+                </a:ln>
+                <a:effectLst/>
+              </a:rPr>
+              <a:t> Φα</a:t>
+            </a:r>
+            <a:r>
+              <a:rPr kumimoji="0" lang="en-US" altLang="en-US" sz="2000" b="1" i="0" u="none" strike="noStrike" cap="none" normalizeH="0" baseline="0">
+                <a:ln>
+                  <a:noFill/>
+                </a:ln>
+                <a:effectLst/>
+              </a:rPr>
+              <a:t>ινόμενο</a:t>
+            </a:r>
+            <a:r>
+              <a:rPr kumimoji="0" lang="en-US" altLang="en-US" sz="2000" b="1" i="0" u="none" strike="noStrike" cap="none" normalizeH="0" baseline="0" dirty="0">
+                <a:ln>
+                  <a:noFill/>
+                </a:ln>
+                <a:effectLst/>
+              </a:rPr>
+              <a:t> </a:t>
+            </a:r>
+            <a:r>
+              <a:rPr kumimoji="0" lang="en-US" altLang="en-US" sz="2000" b="1" i="0" u="none" strike="noStrike" cap="none" normalizeH="0" baseline="0">
+                <a:ln>
+                  <a:noFill/>
+                </a:ln>
+                <a:effectLst/>
+              </a:rPr>
+              <a:t>του</a:t>
+            </a:r>
+            <a:r>
+              <a:rPr kumimoji="0" lang="en-US" altLang="en-US" sz="2000" b="1" i="0" u="none" strike="noStrike" cap="none" normalizeH="0" baseline="0" dirty="0">
+                <a:ln>
+                  <a:noFill/>
+                </a:ln>
+                <a:effectLst/>
+              </a:rPr>
+              <a:t> Bottleneck:</a:t>
+            </a:r>
+            <a:endParaRPr kumimoji="0" lang="en-US" altLang="en-US" sz="2000" b="0" i="0" u="none" strike="noStrike" cap="none" normalizeH="0" baseline="0" dirty="0">
+              <a:ln>
+                <a:noFill/>
+              </a:ln>
+              <a:effectLst/>
+            </a:endParaRPr>
+          </a:p>
+          <a:p>
+            <a:pPr marL="0" marR="0" lvl="0" indent="-228600" fontAlgn="base">
+              <a:spcBef>
+                <a:spcPct val="0"/>
+              </a:spcBef>
+              <a:spcAft>
+                <a:spcPts val="600"/>
+              </a:spcAft>
+              <a:buClrTx/>
+              <a:buSzTx/>
+              <a:buFont typeface="Arial" panose="020B0604020202020204" pitchFamily="34" charset="0"/>
+              <a:buChar char="•"/>
+              <a:tabLst/>
+            </a:pPr>
+            <a:r>
+              <a:rPr kumimoji="0" lang="en-US" altLang="en-US" sz="2000" b="0" i="0" u="none" strike="noStrike" cap="none" normalizeH="0" baseline="0" dirty="0">
+                <a:ln>
+                  <a:noFill/>
+                </a:ln>
+                <a:effectLst/>
+              </a:rPr>
+              <a:t>Input Rate 400 pkts/s &gt; Service Rate125  pkts/s.</a:t>
+            </a:r>
+          </a:p>
+          <a:p>
+            <a:pPr marL="0" marR="0" lvl="0" indent="-228600" fontAlgn="base">
+              <a:spcBef>
+                <a:spcPct val="0"/>
+              </a:spcBef>
+              <a:spcAft>
+                <a:spcPts val="600"/>
+              </a:spcAft>
+              <a:buClrTx/>
+              <a:buSzTx/>
+              <a:buFont typeface="Arial" panose="020B0604020202020204" pitchFamily="34" charset="0"/>
+              <a:buChar char="•"/>
+              <a:tabLst/>
+            </a:pPr>
+            <a:r>
+              <a:rPr kumimoji="0" lang="en-US" altLang="en-US" sz="2000" b="0" i="0" u="none" strike="noStrike" cap="none" normalizeH="0" baseline="0" dirty="0">
+                <a:ln>
+                  <a:noFill/>
+                </a:ln>
+                <a:effectLst/>
+              </a:rPr>
+              <a:t>Ο Router 1 "π</a:t>
+            </a:r>
+            <a:r>
+              <a:rPr kumimoji="0" lang="en-US" altLang="en-US" sz="2000" b="0" i="0" u="none" strike="noStrike" cap="none" normalizeH="0" baseline="0">
+                <a:ln>
+                  <a:noFill/>
+                </a:ln>
+                <a:effectLst/>
+              </a:rPr>
+              <a:t>νίγετ</a:t>
+            </a:r>
+            <a:r>
+              <a:rPr kumimoji="0" lang="en-US" altLang="en-US" sz="2000" b="0" i="0" u="none" strike="noStrike" cap="none" normalizeH="0" baseline="0" dirty="0">
+                <a:ln>
+                  <a:noFill/>
+                </a:ln>
+                <a:effectLst/>
+              </a:rPr>
+              <a:t>αι" από την κίνηση.</a:t>
+            </a:r>
+          </a:p>
+          <a:p>
+            <a:pPr marL="0" marR="0" lvl="0" indent="-228600" fontAlgn="base">
+              <a:spcBef>
+                <a:spcPct val="0"/>
+              </a:spcBef>
+              <a:spcAft>
+                <a:spcPts val="600"/>
+              </a:spcAft>
+              <a:buClrTx/>
+              <a:buSzTx/>
+              <a:buFont typeface="Arial" panose="020B0604020202020204" pitchFamily="34" charset="0"/>
+              <a:buChar char="•"/>
+              <a:tabLst/>
+            </a:pPr>
+            <a:r>
+              <a:rPr kumimoji="0" lang="en-US" altLang="en-US" sz="2000" b="1" i="0" u="none" strike="noStrike" cap="none" normalizeH="0" baseline="0" dirty="0">
+                <a:ln>
+                  <a:noFill/>
+                </a:ln>
+                <a:effectLst/>
+              </a:rPr>
+              <a:t>Απ</a:t>
+            </a:r>
+            <a:r>
+              <a:rPr kumimoji="0" lang="en-US" altLang="en-US" sz="2000" b="1" i="0" u="none" strike="noStrike" cap="none" normalizeH="0" baseline="0">
+                <a:ln>
+                  <a:noFill/>
+                </a:ln>
+                <a:effectLst/>
+              </a:rPr>
+              <a:t>οτελέσμ</a:t>
+            </a:r>
+            <a:r>
+              <a:rPr kumimoji="0" lang="en-US" altLang="en-US" sz="2000" b="1" i="0" u="none" strike="noStrike" cap="none" normalizeH="0" baseline="0" dirty="0">
+                <a:ln>
+                  <a:noFill/>
+                </a:ln>
+                <a:effectLst/>
+              </a:rPr>
+              <a:t>ατα:</a:t>
+            </a:r>
+            <a:endParaRPr kumimoji="0" lang="en-US" altLang="en-US" sz="2000" b="0" i="0" u="none" strike="noStrike" cap="none" normalizeH="0" baseline="0" dirty="0">
+              <a:ln>
+                <a:noFill/>
+              </a:ln>
+              <a:effectLst/>
+            </a:endParaRPr>
+          </a:p>
+          <a:p>
+            <a:pPr marL="0" marR="0" lvl="0" indent="-228600" fontAlgn="base">
+              <a:spcBef>
+                <a:spcPct val="0"/>
+              </a:spcBef>
+              <a:spcAft>
+                <a:spcPts val="600"/>
+              </a:spcAft>
+              <a:buClrTx/>
+              <a:buSzTx/>
+              <a:buFont typeface="Arial" panose="020B0604020202020204" pitchFamily="34" charset="0"/>
+              <a:buChar char="•"/>
+              <a:tabLst/>
+            </a:pPr>
+            <a:r>
+              <a:rPr kumimoji="0" lang="en-US" altLang="en-US" sz="2000" b="1" i="0" u="none" strike="noStrike" cap="none" normalizeH="0" baseline="0" dirty="0">
+                <a:ln>
+                  <a:noFill/>
+                </a:ln>
+                <a:effectLst/>
+              </a:rPr>
+              <a:t>Packet Loss:</a:t>
+            </a:r>
+            <a:r>
+              <a:rPr kumimoji="0" lang="en-US" altLang="en-US" sz="2000" b="0" i="0" u="none" strike="noStrike" cap="none" normalizeH="0" baseline="0" dirty="0">
+                <a:ln>
+                  <a:noFill/>
+                </a:ln>
+                <a:effectLst/>
+              </a:rPr>
+              <a:t> </a:t>
+            </a:r>
+            <a:r>
+              <a:rPr kumimoji="0" lang="en-US" altLang="en-US" sz="2000" b="0" i="0" u="none" strike="noStrike" cap="none" normalizeH="0" baseline="0">
+                <a:ln>
+                  <a:noFill/>
+                </a:ln>
+                <a:effectLst/>
+              </a:rPr>
+              <a:t>Εκτοξεύετ</a:t>
+            </a:r>
+            <a:r>
+              <a:rPr kumimoji="0" lang="en-US" altLang="en-US" sz="2000" b="0" i="0" u="none" strike="noStrike" cap="none" normalizeH="0" baseline="0" dirty="0">
+                <a:ln>
+                  <a:noFill/>
+                </a:ln>
+                <a:effectLst/>
+              </a:rPr>
+              <a:t>αι στο </a:t>
+            </a:r>
+            <a:r>
+              <a:rPr kumimoji="0" lang="en-US" altLang="en-US" sz="2000" b="1" i="0" u="none" strike="noStrike" cap="none" normalizeH="0" baseline="0" dirty="0">
+                <a:ln>
+                  <a:noFill/>
+                </a:ln>
+                <a:effectLst/>
+              </a:rPr>
+              <a:t>~68%</a:t>
+            </a:r>
+            <a:r>
+              <a:rPr kumimoji="0" lang="en-US" altLang="en-US" sz="2000" b="0" i="0" u="none" strike="noStrike" cap="none" normalizeH="0" baseline="0" dirty="0">
+                <a:ln>
+                  <a:noFill/>
+                </a:ln>
+                <a:effectLst/>
+              </a:rPr>
+              <a:t>. </a:t>
+            </a:r>
+            <a:r>
+              <a:rPr kumimoji="0" lang="en-US" altLang="en-US" sz="2000" b="0" i="0" u="none" strike="noStrike" cap="none" normalizeH="0" baseline="0">
+                <a:ln>
+                  <a:noFill/>
+                </a:ln>
+                <a:effectLst/>
+              </a:rPr>
+              <a:t>Χάνουμε</a:t>
+            </a:r>
+            <a:r>
+              <a:rPr kumimoji="0" lang="en-US" altLang="en-US" sz="2000" b="0" i="0" u="none" strike="noStrike" cap="none" normalizeH="0" baseline="0" dirty="0">
+                <a:ln>
+                  <a:noFill/>
+                </a:ln>
+                <a:effectLst/>
+              </a:rPr>
+              <a:t> τα 2/3 </a:t>
+            </a:r>
+            <a:r>
+              <a:rPr kumimoji="0" lang="en-US" altLang="en-US" sz="2000" b="0" i="0" u="none" strike="noStrike" cap="none" normalizeH="0" baseline="0">
+                <a:ln>
+                  <a:noFill/>
+                </a:ln>
+                <a:effectLst/>
+              </a:rPr>
+              <a:t>των</a:t>
+            </a:r>
+            <a:r>
+              <a:rPr kumimoji="0" lang="en-US" altLang="en-US" sz="2000" b="0" i="0" u="none" strike="noStrike" cap="none" normalizeH="0" baseline="0" dirty="0">
+                <a:ln>
+                  <a:noFill/>
+                </a:ln>
+                <a:effectLst/>
+              </a:rPr>
+              <a:t> </a:t>
+            </a:r>
+            <a:r>
+              <a:rPr kumimoji="0" lang="en-US" altLang="en-US" sz="2000" b="0" i="0" u="none" strike="noStrike" cap="none" normalizeH="0" baseline="0">
+                <a:ln>
+                  <a:noFill/>
+                </a:ln>
+                <a:effectLst/>
+              </a:rPr>
+              <a:t>δεδομένων</a:t>
+            </a:r>
+            <a:r>
+              <a:rPr kumimoji="0" lang="en-US" altLang="en-US" sz="2000" b="0" i="0" u="none" strike="noStrike" cap="none" normalizeH="0" baseline="0" dirty="0">
+                <a:ln>
+                  <a:noFill/>
+                </a:ln>
+                <a:effectLst/>
+              </a:rPr>
+              <a:t>.</a:t>
+            </a:r>
+          </a:p>
+          <a:p>
+            <a:pPr marL="0" marR="0" lvl="0" indent="-228600" fontAlgn="base">
+              <a:spcBef>
+                <a:spcPct val="0"/>
+              </a:spcBef>
+              <a:spcAft>
+                <a:spcPts val="600"/>
+              </a:spcAft>
+              <a:buClrTx/>
+              <a:buSzTx/>
+              <a:buFont typeface="Arial" panose="020B0604020202020204" pitchFamily="34" charset="0"/>
+              <a:buChar char="•"/>
+              <a:tabLst/>
+            </a:pPr>
+            <a:r>
+              <a:rPr kumimoji="0" lang="en-US" altLang="en-US" sz="2000" b="1" i="0" u="none" strike="noStrike" cap="none" normalizeH="0" baseline="0" dirty="0">
+                <a:ln>
+                  <a:noFill/>
+                </a:ln>
+                <a:effectLst/>
+              </a:rPr>
+              <a:t>Queue Size:</a:t>
+            </a:r>
+            <a:endParaRPr kumimoji="0" lang="en-US" altLang="en-US" sz="2000" b="0" i="0" u="none" strike="noStrike" cap="none" normalizeH="0" baseline="0" dirty="0">
+              <a:ln>
+                <a:noFill/>
+              </a:ln>
+              <a:effectLst/>
+            </a:endParaRPr>
+          </a:p>
+          <a:p>
+            <a:pPr marL="457200" marR="0" lvl="1" indent="-228600" fontAlgn="base">
+              <a:spcBef>
+                <a:spcPct val="0"/>
+              </a:spcBef>
+              <a:spcAft>
+                <a:spcPts val="600"/>
+              </a:spcAft>
+              <a:buClrTx/>
+              <a:buSzTx/>
+              <a:buFont typeface="Arial" panose="020B0604020202020204" pitchFamily="34" charset="0"/>
+              <a:buChar char="•"/>
+              <a:tabLst/>
+            </a:pPr>
+            <a:r>
+              <a:rPr kumimoji="0" lang="en-US" altLang="en-US" sz="2000" b="1" i="0" u="none" strike="noStrike" cap="none" normalizeH="0" baseline="0" dirty="0">
+                <a:ln>
+                  <a:noFill/>
+                </a:ln>
+                <a:effectLst/>
+              </a:rPr>
+              <a:t>Router 1:</a:t>
+            </a:r>
+            <a:r>
+              <a:rPr kumimoji="0" lang="en-US" altLang="en-US" sz="2000" b="0" i="0" u="none" strike="noStrike" cap="none" normalizeH="0" baseline="0" dirty="0">
+                <a:ln>
+                  <a:noFill/>
+                </a:ln>
+                <a:effectLst/>
+              </a:rPr>
+              <a:t> </a:t>
+            </a:r>
+            <a:r>
+              <a:rPr kumimoji="0" lang="en-US" altLang="en-US" sz="2000" b="0" i="0" u="none" strike="noStrike" cap="none" normalizeH="0" baseline="0">
+                <a:ln>
+                  <a:noFill/>
+                </a:ln>
+                <a:effectLst/>
+              </a:rPr>
+              <a:t>Μόνιμ</a:t>
+            </a:r>
+            <a:r>
+              <a:rPr kumimoji="0" lang="en-US" altLang="en-US" sz="2000" b="0" i="0" u="none" strike="noStrike" cap="none" normalizeH="0" baseline="0" dirty="0">
+                <a:ln>
+                  <a:noFill/>
+                </a:ln>
+                <a:effectLst/>
+              </a:rPr>
+              <a:t>α γεμάτη (πορτοκαλί γραμμή).</a:t>
+            </a:r>
+          </a:p>
+          <a:p>
+            <a:pPr marL="457200" marR="0" lvl="1" indent="-228600" fontAlgn="base">
+              <a:spcBef>
+                <a:spcPct val="0"/>
+              </a:spcBef>
+              <a:spcAft>
+                <a:spcPts val="600"/>
+              </a:spcAft>
+              <a:buClrTx/>
+              <a:buSzTx/>
+              <a:buFont typeface="Arial" panose="020B0604020202020204" pitchFamily="34" charset="0"/>
+              <a:buChar char="•"/>
+              <a:tabLst/>
+            </a:pPr>
+            <a:r>
+              <a:rPr kumimoji="0" lang="en-US" altLang="en-US" sz="2000" b="1" i="0" u="none" strike="noStrike" cap="none" normalizeH="0" baseline="0" dirty="0">
+                <a:ln>
+                  <a:noFill/>
+                </a:ln>
+                <a:effectLst/>
+              </a:rPr>
+              <a:t>Router 2:</a:t>
+            </a:r>
+            <a:r>
+              <a:rPr kumimoji="0" lang="en-US" altLang="en-US" sz="2000" b="0" i="0" u="none" strike="noStrike" cap="none" normalizeH="0" baseline="0" dirty="0">
+                <a:ln>
+                  <a:noFill/>
+                </a:ln>
+                <a:effectLst/>
+              </a:rPr>
+              <a:t> </a:t>
+            </a:r>
+            <a:r>
+              <a:rPr kumimoji="0" lang="en-US" altLang="en-US" sz="2000" b="0" i="0" u="none" strike="noStrike" cap="none" normalizeH="0" baseline="0">
+                <a:ln>
+                  <a:noFill/>
+                </a:ln>
+                <a:effectLst/>
+              </a:rPr>
+              <a:t>Μόνιμ</a:t>
+            </a:r>
+            <a:r>
+              <a:rPr kumimoji="0" lang="en-US" altLang="en-US" sz="2000" b="0" i="0" u="none" strike="noStrike" cap="none" normalizeH="0" baseline="0" dirty="0">
+                <a:ln>
+                  <a:noFill/>
+                </a:ln>
+                <a:effectLst/>
+              </a:rPr>
+              <a:t>α άδεια (μπλε γραμμή). Ο R2 υπ</a:t>
+            </a:r>
+            <a:r>
+              <a:rPr kumimoji="0" lang="en-US" altLang="en-US" sz="2000" b="0" i="0" u="none" strike="noStrike" cap="none" normalizeH="0" baseline="0">
+                <a:ln>
+                  <a:noFill/>
+                </a:ln>
+                <a:effectLst/>
+              </a:rPr>
+              <a:t>ολειτουργεί</a:t>
+            </a:r>
+            <a:r>
+              <a:rPr kumimoji="0" lang="en-US" altLang="en-US" sz="2000" b="0" i="0" u="none" strike="noStrike" cap="none" normalizeH="0" baseline="0" dirty="0">
+                <a:ln>
+                  <a:noFill/>
+                </a:ln>
+                <a:effectLst/>
+              </a:rPr>
+              <a:t>.</a:t>
+            </a:r>
+          </a:p>
+          <a:p>
+            <a:pPr marL="0" marR="0" lvl="0" indent="-228600" fontAlgn="base">
+              <a:spcBef>
+                <a:spcPct val="0"/>
+              </a:spcBef>
+              <a:spcAft>
+                <a:spcPts val="600"/>
+              </a:spcAft>
+              <a:buClrTx/>
+              <a:buSzTx/>
+              <a:buFont typeface="Arial" panose="020B0604020202020204" pitchFamily="34" charset="0"/>
+              <a:buChar char="•"/>
+              <a:tabLst/>
+            </a:pPr>
+            <a:r>
+              <a:rPr kumimoji="0" lang="en-US" altLang="en-US" sz="2000" b="1" i="0" u="none" strike="noStrike" cap="none" normalizeH="0" baseline="0" dirty="0">
+                <a:ln>
+                  <a:noFill/>
+                </a:ln>
+                <a:effectLst/>
+              </a:rPr>
+              <a:t>Delay:</a:t>
+            </a:r>
+            <a:r>
+              <a:rPr kumimoji="0" lang="en-US" altLang="en-US" sz="2000" b="0" i="0" u="none" strike="noStrike" cap="none" normalizeH="0" baseline="0" dirty="0">
+                <a:ln>
+                  <a:noFill/>
+                </a:ln>
+                <a:effectLst/>
+              </a:rPr>
+              <a:t> </a:t>
+            </a:r>
+            <a:r>
+              <a:rPr kumimoji="0" lang="en-US" altLang="en-US" sz="2000" b="0" i="0" u="none" strike="noStrike" cap="none" normalizeH="0" baseline="0">
+                <a:ln>
+                  <a:noFill/>
+                </a:ln>
+                <a:effectLst/>
+              </a:rPr>
+              <a:t>Αυξήθηκε</a:t>
+            </a:r>
+            <a:r>
+              <a:rPr kumimoji="0" lang="en-US" altLang="en-US" sz="2000" b="0" i="0" u="none" strike="noStrike" cap="none" normalizeH="0" baseline="0" dirty="0">
+                <a:ln>
+                  <a:noFill/>
+                </a:ln>
+                <a:effectLst/>
+              </a:rPr>
+              <a:t> </a:t>
+            </a:r>
+            <a:r>
+              <a:rPr kumimoji="0" lang="en-US" altLang="en-US" sz="2000" b="0" i="0" u="none" strike="noStrike" cap="none" normalizeH="0" baseline="0">
+                <a:ln>
+                  <a:noFill/>
+                </a:ln>
+                <a:effectLst/>
+              </a:rPr>
+              <a:t>στ</a:t>
+            </a:r>
+            <a:r>
+              <a:rPr kumimoji="0" lang="en-US" altLang="en-US" sz="2000" b="0" i="0" u="none" strike="noStrike" cap="none" normalizeH="0" baseline="0" dirty="0">
+                <a:ln>
+                  <a:noFill/>
+                </a:ln>
+                <a:effectLst/>
+              </a:rPr>
+              <a:t>α </a:t>
+            </a:r>
+            <a:r>
+              <a:rPr kumimoji="0" lang="en-US" altLang="en-US" sz="2000" b="1" i="0" u="none" strike="noStrike" cap="none" normalizeH="0" baseline="0" dirty="0">
+                <a:ln>
+                  <a:noFill/>
+                </a:ln>
+                <a:effectLst/>
+              </a:rPr>
+              <a:t>0.25s</a:t>
+            </a:r>
+            <a:r>
+              <a:rPr kumimoji="0" lang="en-US" altLang="en-US" sz="2000" b="0" i="0" u="none" strike="noStrike" cap="none" normalizeH="0" baseline="0" dirty="0">
+                <a:ln>
+                  <a:noFill/>
+                </a:ln>
+                <a:effectLst/>
+              </a:rPr>
+              <a:t> λόγω των επιπλέον hops.</a:t>
+            </a:r>
+          </a:p>
+          <a:p>
+            <a:pPr marL="0" marR="0" lvl="0" indent="-228600" fontAlgn="base">
+              <a:spcBef>
+                <a:spcPct val="0"/>
+              </a:spcBef>
+              <a:spcAft>
+                <a:spcPts val="600"/>
+              </a:spcAft>
+              <a:buClrTx/>
+              <a:buSzTx/>
+              <a:buFont typeface="Arial" panose="020B0604020202020204" pitchFamily="34" charset="0"/>
+              <a:buChar char="•"/>
+              <a:tabLst/>
+            </a:pPr>
+            <a:endParaRPr kumimoji="0" lang="en-US" altLang="en-US" sz="2000" b="0" i="0" u="none" strike="noStrike" cap="none" normalizeH="0" baseline="0" dirty="0">
+              <a:ln>
+                <a:noFill/>
+              </a:ln>
+              <a:effectLst/>
+            </a:endParaRPr>
+          </a:p>
+        </p:txBody>
+      </p:sp>
+    </p:spTree>
+    <p:extLst>
+      <p:ext uri="{BB962C8B-B14F-4D97-AF65-F5344CB8AC3E}">
+        <p14:creationId xmlns:p14="http://schemas.microsoft.com/office/powerpoint/2010/main" val="3203761737"/>
+      </p:ext>
+    </p:extLst>
+  </p:cSld>
+  <p:clrMapOvr>
+    <a:masterClrMapping/>
+  </p:clrMapOvr>
+</p:sld>
+</file>
+
+<file path=ppt/slides/slide22.xml><?xml version="1.0" encoding="utf-8"?>
+<p:sld xmlns:a="http://schemas.openxmlformats.org/drawingml/2006/main" xmlns:r="http://schemas.openxmlformats.org/officeDocument/2006/relationships" xmlns:p="http://schemas.openxmlformats.org/presentationml/2006/main">
+  <p:cSld>
+    <p:spTree>
+      <p:nvGrpSpPr>
+        <p:cNvPr id="1" name=""/>
+        <p:cNvGrpSpPr/>
+        <p:nvPr/>
+      </p:nvGrpSpPr>
+      <p:grpSpPr>
+        <a:xfrm>
+          <a:off x="0" y="0"/>
+          <a:ext cx="0" cy="0"/>
+          <a:chOff x="0" y="0"/>
+          <a:chExt cx="0" cy="0"/>
+        </a:xfrm>
+      </p:grpSpPr>
+      <p:pic>
+        <p:nvPicPr>
+          <p:cNvPr id="2" name="Picture 1" descr="A screenshot of a graph&#10;&#10;AI-generated content may be incorrect.">
+            <a:extLst>
+              <a:ext uri="{FF2B5EF4-FFF2-40B4-BE49-F238E27FC236}">
+                <a16:creationId xmlns:a16="http://schemas.microsoft.com/office/drawing/2014/main" id="{FE1D3E65-2F89-F016-ECF0-AFF4AC8D6301}"/>
+              </a:ext>
+            </a:extLst>
+          </p:cNvPr>
+          <p:cNvPicPr>
+            <a:picLocks noChangeAspect="1"/>
+          </p:cNvPicPr>
+          <p:nvPr/>
+        </p:nvPicPr>
+        <p:blipFill>
+          <a:blip r:embed="rId2"/>
+          <a:stretch>
+            <a:fillRect/>
+          </a:stretch>
+        </p:blipFill>
+        <p:spPr>
+          <a:xfrm>
+            <a:off x="262" y="0"/>
+            <a:ext cx="12102874" cy="6857999"/>
+          </a:xfrm>
+          <a:prstGeom prst="rect">
+            <a:avLst/>
+          </a:prstGeom>
+        </p:spPr>
+      </p:pic>
+      <p:sp>
+        <p:nvSpPr>
+          <p:cNvPr id="3" name="TextBox 2">
+            <a:extLst>
+              <a:ext uri="{FF2B5EF4-FFF2-40B4-BE49-F238E27FC236}">
+                <a16:creationId xmlns:a16="http://schemas.microsoft.com/office/drawing/2014/main" id="{581D285E-9598-3DE7-081E-5B394A9B43AB}"/>
+              </a:ext>
+            </a:extLst>
+          </p:cNvPr>
+          <p:cNvSpPr txBox="1"/>
+          <p:nvPr/>
+        </p:nvSpPr>
+        <p:spPr>
+          <a:xfrm>
+            <a:off x="0" y="104775"/>
+            <a:ext cx="2211888" cy="400110"/>
+          </a:xfrm>
+          <a:prstGeom prst="rect">
+            <a:avLst/>
+          </a:prstGeom>
+          <a:noFill/>
+        </p:spPr>
+        <p:txBody>
+          <a:bodyPr wrap="none" rtlCol="0">
+            <a:spAutoFit/>
+          </a:bodyPr>
+          <a:lstStyle/>
+          <a:p>
+            <a:r>
+              <a:rPr lang="el-GR" sz="2000" b="1" dirty="0"/>
+              <a:t>1</a:t>
+            </a:r>
+            <a:r>
+              <a:rPr lang="en-US" sz="2000" b="1" dirty="0"/>
+              <a:t>Mbps 1000Bytes</a:t>
+            </a:r>
+          </a:p>
+        </p:txBody>
+      </p:sp>
+    </p:spTree>
+    <p:extLst>
+      <p:ext uri="{BB962C8B-B14F-4D97-AF65-F5344CB8AC3E}">
+        <p14:creationId xmlns:p14="http://schemas.microsoft.com/office/powerpoint/2010/main" val="3326772294"/>
+      </p:ext>
+    </p:extLst>
+  </p:cSld>
+  <p:clrMapOvr>
+    <a:masterClrMapping/>
+  </p:clrMapOvr>
+</p:sld>
+</file>
+
+<file path=ppt/slides/slide23.xml><?xml version="1.0" encoding="utf-8"?>
+<p:sld xmlns:a="http://schemas.openxmlformats.org/drawingml/2006/main" xmlns:r="http://schemas.openxmlformats.org/officeDocument/2006/relationships" xmlns:p="http://schemas.openxmlformats.org/presentationml/2006/main">
+  <p:cSld>
+    <p:bg>
+      <p:bgPr>
+        <a:solidFill>
+          <a:schemeClr val="bg1"/>
+        </a:solidFill>
+        <a:effectLst/>
+      </p:bgPr>
+    </p:bg>
+    <p:spTree>
+      <p:nvGrpSpPr>
+        <p:cNvPr id="1" name=""/>
+        <p:cNvGrpSpPr/>
+        <p:nvPr/>
+      </p:nvGrpSpPr>
+      <p:grpSpPr>
+        <a:xfrm>
+          <a:off x="0" y="0"/>
+          <a:ext cx="0" cy="0"/>
+          <a:chOff x="0" y="0"/>
+          <a:chExt cx="0" cy="0"/>
+        </a:xfrm>
+      </p:grpSpPr>
+      <p:sp useBgFill="1">
+        <p:nvSpPr>
+          <p:cNvPr id="9" name="Rectangle 8">
+            <a:extLst>
+              <a:ext uri="{FF2B5EF4-FFF2-40B4-BE49-F238E27FC236}">
+                <a16:creationId xmlns:a16="http://schemas.microsoft.com/office/drawing/2014/main" id="{8E2CC403-21CD-41DF-BAC4-329D7FF03C5C}"/>
+              </a:ext>
+              <a:ext uri="{C183D7F6-B498-43B3-948B-1728B52AA6E4}">
+                <adec:decorative xmlns:adec="http://schemas.microsoft.com/office/drawing/2017/decorative" val="1"/>
+              </a:ext>
+            </a:extLst>
+          </p:cNvPr>
+          <p:cNvSpPr>
+            <a:spLocks noGrp="1" noRot="1" noChangeAspect="1" noMove="1" noResize="1" noEditPoints="1" noAdjustHandles="1" noChangeArrowheads="1" noChangeShapeType="1" noTextEdit="1"/>
+          </p:cNvSpPr>
+          <p:nvPr>
+            <p:extLst>
+              <p:ext uri="{386F3935-93C4-4BCD-93E2-E3B085C9AB24}">
+                <p16:designElem xmlns:p16="http://schemas.microsoft.com/office/powerpoint/2015/main" val="1"/>
+              </p:ext>
+            </p:extLst>
+          </p:nvPr>
+        </p:nvSpPr>
+        <p:spPr>
+          <a:xfrm>
+            <a:off x="0" y="0"/>
+            <a:ext cx="12191999" cy="6857365"/>
+          </a:xfrm>
+          <a:prstGeom prst="rect">
+            <a:avLst/>
+          </a:prstGeom>
+          <a:ln>
+            <a:noFill/>
+          </a:ln>
+        </p:spPr>
+        <p:style>
+          <a:lnRef idx="2">
+            <a:schemeClr val="accent1">
+              <a:shade val="50000"/>
+            </a:schemeClr>
+          </a:lnRef>
+          <a:fillRef idx="1">
+            <a:schemeClr val="accent1"/>
+          </a:fillRef>
+          <a:effectRef idx="0">
+            <a:schemeClr val="accent1"/>
+          </a:effectRef>
+          <a:fontRef idx="minor">
+            <a:schemeClr val="lt1"/>
+          </a:fontRef>
+        </p:style>
+        <p:txBody>
+          <a:bodyPr rtlCol="0" anchor="ctr"/>
+          <a:lstStyle/>
+          <a:p>
+            <a:pPr algn="ctr"/>
+            <a:endParaRPr lang="en-US"/>
+          </a:p>
+        </p:txBody>
+      </p:sp>
+      <p:sp>
+        <p:nvSpPr>
+          <p:cNvPr id="2" name="Title 1">
+            <a:extLst>
+              <a:ext uri="{FF2B5EF4-FFF2-40B4-BE49-F238E27FC236}">
+                <a16:creationId xmlns:a16="http://schemas.microsoft.com/office/drawing/2014/main" id="{502CF064-855B-2E4B-00C5-749A510AB718}"/>
+              </a:ext>
+            </a:extLst>
+          </p:cNvPr>
+          <p:cNvSpPr>
+            <a:spLocks noGrp="1"/>
+          </p:cNvSpPr>
+          <p:nvPr>
+            <p:ph type="title"/>
+          </p:nvPr>
+        </p:nvSpPr>
+        <p:spPr>
+          <a:xfrm>
+            <a:off x="1078828" y="1147158"/>
+            <a:ext cx="6038470" cy="4713316"/>
+          </a:xfrm>
+        </p:spPr>
+        <p:txBody>
+          <a:bodyPr vert="horz" lIns="91440" tIns="45720" rIns="91440" bIns="45720" rtlCol="0" anchor="ctr">
+            <a:normAutofit/>
+          </a:bodyPr>
+          <a:lstStyle/>
+          <a:p>
+            <a:r>
+              <a:rPr lang="en-US" kern="1200" dirty="0">
+                <a:solidFill>
+                  <a:schemeClr val="tx1"/>
+                </a:solidFill>
+                <a:latin typeface="+mj-lt"/>
+                <a:ea typeface="+mj-ea"/>
+                <a:cs typeface="+mj-cs"/>
+              </a:rPr>
+              <a:t>Η </a:t>
+            </a:r>
+            <a:r>
+              <a:rPr lang="en-US" kern="1200" dirty="0" err="1">
+                <a:solidFill>
+                  <a:schemeClr val="tx1"/>
+                </a:solidFill>
+                <a:latin typeface="+mj-lt"/>
+                <a:ea typeface="+mj-ea"/>
+                <a:cs typeface="+mj-cs"/>
+              </a:rPr>
+              <a:t>Λύση</a:t>
+            </a:r>
+            <a:r>
+              <a:rPr lang="en-US" kern="1200" dirty="0">
+                <a:solidFill>
+                  <a:schemeClr val="tx1"/>
+                </a:solidFill>
+                <a:latin typeface="+mj-lt"/>
+                <a:ea typeface="+mj-ea"/>
+                <a:cs typeface="+mj-cs"/>
+              </a:rPr>
+              <a:t> </a:t>
+            </a:r>
+            <a:r>
+              <a:rPr lang="en-US" kern="1200" dirty="0" err="1">
+                <a:solidFill>
+                  <a:schemeClr val="tx1"/>
+                </a:solidFill>
+                <a:latin typeface="+mj-lt"/>
+                <a:ea typeface="+mj-ea"/>
+                <a:cs typeface="+mj-cs"/>
+              </a:rPr>
+              <a:t>του</a:t>
+            </a:r>
+            <a:r>
+              <a:rPr lang="en-US" kern="1200" dirty="0">
+                <a:solidFill>
+                  <a:schemeClr val="tx1"/>
+                </a:solidFill>
+                <a:latin typeface="+mj-lt"/>
+                <a:ea typeface="+mj-ea"/>
+                <a:cs typeface="+mj-cs"/>
+              </a:rPr>
+              <a:t> Bandwidth (10 &amp; 100 Mbps)</a:t>
+            </a:r>
+          </a:p>
+        </p:txBody>
+      </p:sp>
+      <p:grpSp>
+        <p:nvGrpSpPr>
+          <p:cNvPr id="11" name="Group 10">
+            <a:extLst>
+              <a:ext uri="{FF2B5EF4-FFF2-40B4-BE49-F238E27FC236}">
+                <a16:creationId xmlns:a16="http://schemas.microsoft.com/office/drawing/2014/main" id="{B13AA5FE-3FFC-4725-9ADD-E428544EC61B}"/>
+              </a:ext>
+              <a:ext uri="{C183D7F6-B498-43B3-948B-1728B52AA6E4}">
+                <adec:decorative xmlns:adec="http://schemas.microsoft.com/office/drawing/2017/decorative" val="1"/>
+              </a:ext>
+            </a:extLst>
+          </p:cNvPr>
+          <p:cNvGrpSpPr>
+            <a:grpSpLocks noGrp="1" noUngrp="1" noRot="1" noChangeAspect="1" noMove="1" noResize="1"/>
+          </p:cNvGrpSpPr>
+          <p:nvPr>
+            <p:extLst>
+              <p:ext uri="{386F3935-93C4-4BCD-93E2-E3B085C9AB24}">
+                <p16:designElem xmlns:p16="http://schemas.microsoft.com/office/powerpoint/2015/main" val="1"/>
+              </p:ext>
+            </p:extLst>
+          </p:nvPr>
+        </p:nvGrpSpPr>
+        <p:grpSpPr>
+          <a:xfrm>
+            <a:off x="0" y="3154317"/>
+            <a:ext cx="731521" cy="673460"/>
+            <a:chOff x="3940602" y="308034"/>
+            <a:chExt cx="2116791" cy="3428999"/>
+          </a:xfrm>
+          <a:solidFill>
+            <a:schemeClr val="accent4"/>
+          </a:solidFill>
+        </p:grpSpPr>
+        <p:sp>
+          <p:nvSpPr>
+            <p:cNvPr id="12" name="Rectangle 11">
+              <a:extLst>
+                <a:ext uri="{FF2B5EF4-FFF2-40B4-BE49-F238E27FC236}">
+                  <a16:creationId xmlns:a16="http://schemas.microsoft.com/office/drawing/2014/main" id="{4FA70700-3F72-44D4-8175-FEB2B9B2332B}"/>
+                </a:ext>
+                <a:ext uri="{C183D7F6-B498-43B3-948B-1728B52AA6E4}">
+                  <adec:decorative xmlns:adec="http://schemas.microsoft.com/office/drawing/2017/decorative" val="1"/>
+                </a:ext>
+              </a:extLst>
+            </p:cNvPr>
+            <p:cNvSpPr/>
+            <p:nvPr>
+              <p:extLst>
+                <p:ext uri="{386F3935-93C4-4BCD-93E2-E3B085C9AB24}">
+                  <p16:designElem xmlns:p16="http://schemas.microsoft.com/office/powerpoint/2015/main" val="1"/>
+                </p:ext>
+              </p:extLst>
+            </p:nvPr>
+          </p:nvSpPr>
+          <p:spPr>
+            <a:xfrm>
+              <a:off x="3940602" y="308034"/>
+              <a:ext cx="566743" cy="3428999"/>
+            </a:xfrm>
+            <a:prstGeom prst="rect">
+              <a:avLst/>
+            </a:prstGeom>
+            <a:grpFill/>
+            <a:ln>
+              <a:noFill/>
+            </a:ln>
+          </p:spPr>
+          <p:style>
+            <a:lnRef idx="2">
+              <a:schemeClr val="accent1">
+                <a:shade val="50000"/>
+              </a:schemeClr>
+            </a:lnRef>
+            <a:fillRef idx="1">
+              <a:schemeClr val="accent1"/>
+            </a:fillRef>
+            <a:effectRef idx="0">
+              <a:schemeClr val="accent1"/>
+            </a:effectRef>
+            <a:fontRef idx="minor">
+              <a:schemeClr val="lt1"/>
+            </a:fontRef>
+          </p:style>
+          <p:txBody>
+            <a:bodyPr rtlCol="0" anchor="ctr"/>
+            <a:lstStyle/>
+            <a:p>
+              <a:pPr algn="ctr"/>
+              <a:endParaRPr lang="en-US"/>
+            </a:p>
+          </p:txBody>
+        </p:sp>
+        <p:sp>
+          <p:nvSpPr>
+            <p:cNvPr id="6" name="Rectangle 5">
+              <a:extLst>
+                <a:ext uri="{FF2B5EF4-FFF2-40B4-BE49-F238E27FC236}">
+                  <a16:creationId xmlns:a16="http://schemas.microsoft.com/office/drawing/2014/main" id="{7093C0F6-5741-4C9D-90FF-A25824BFC579}"/>
+                </a:ext>
+                <a:ext uri="{C183D7F6-B498-43B3-948B-1728B52AA6E4}">
+                  <adec:decorative xmlns:adec="http://schemas.microsoft.com/office/drawing/2017/decorative" val="1"/>
+                </a:ext>
+              </a:extLst>
+            </p:cNvPr>
+            <p:cNvSpPr/>
+            <p:nvPr>
+              <p:extLst>
+                <p:ext uri="{386F3935-93C4-4BCD-93E2-E3B085C9AB24}">
+                  <p16:designElem xmlns:p16="http://schemas.microsoft.com/office/powerpoint/2015/main" val="1"/>
+                </p:ext>
+              </p:extLst>
+            </p:nvPr>
+          </p:nvSpPr>
+          <p:spPr>
+            <a:xfrm>
+              <a:off x="4715626" y="308034"/>
+              <a:ext cx="566743" cy="3428999"/>
+            </a:xfrm>
+            <a:prstGeom prst="rect">
+              <a:avLst/>
+            </a:prstGeom>
+            <a:grpFill/>
+            <a:ln>
+              <a:noFill/>
+            </a:ln>
+          </p:spPr>
+          <p:style>
+            <a:lnRef idx="2">
+              <a:schemeClr val="accent1">
+                <a:shade val="50000"/>
+              </a:schemeClr>
+            </a:lnRef>
+            <a:fillRef idx="1">
+              <a:schemeClr val="accent1"/>
+            </a:fillRef>
+            <a:effectRef idx="0">
+              <a:schemeClr val="accent1"/>
+            </a:effectRef>
+            <a:fontRef idx="minor">
+              <a:schemeClr val="lt1"/>
+            </a:fontRef>
+          </p:style>
+          <p:txBody>
+            <a:bodyPr rtlCol="0" anchor="ctr"/>
+            <a:lstStyle/>
+            <a:p>
+              <a:pPr algn="ctr"/>
+              <a:endParaRPr lang="en-US"/>
+            </a:p>
+          </p:txBody>
+        </p:sp>
+        <p:sp>
+          <p:nvSpPr>
+            <p:cNvPr id="14" name="Rectangle 13">
+              <a:extLst>
+                <a:ext uri="{FF2B5EF4-FFF2-40B4-BE49-F238E27FC236}">
+                  <a16:creationId xmlns:a16="http://schemas.microsoft.com/office/drawing/2014/main" id="{921B2E1B-E962-432C-ADA1-2934CE3C5498}"/>
+                </a:ext>
+                <a:ext uri="{C183D7F6-B498-43B3-948B-1728B52AA6E4}">
+                  <adec:decorative xmlns:adec="http://schemas.microsoft.com/office/drawing/2017/decorative" val="1"/>
+                </a:ext>
+              </a:extLst>
+            </p:cNvPr>
+            <p:cNvSpPr/>
+            <p:nvPr>
+              <p:extLst>
+                <p:ext uri="{386F3935-93C4-4BCD-93E2-E3B085C9AB24}">
+                  <p16:designElem xmlns:p16="http://schemas.microsoft.com/office/powerpoint/2015/main" val="1"/>
+                </p:ext>
+              </p:extLst>
+            </p:nvPr>
+          </p:nvSpPr>
+          <p:spPr>
+            <a:xfrm>
+              <a:off x="5490650" y="308034"/>
+              <a:ext cx="566743" cy="3428999"/>
+            </a:xfrm>
+            <a:prstGeom prst="rect">
+              <a:avLst/>
+            </a:prstGeom>
+            <a:grpFill/>
+            <a:ln>
+              <a:noFill/>
+            </a:ln>
+          </p:spPr>
+          <p:style>
+            <a:lnRef idx="2">
+              <a:schemeClr val="accent1">
+                <a:shade val="50000"/>
+              </a:schemeClr>
+            </a:lnRef>
+            <a:fillRef idx="1">
+              <a:schemeClr val="accent1"/>
+            </a:fillRef>
+            <a:effectRef idx="0">
+              <a:schemeClr val="accent1"/>
+            </a:effectRef>
+            <a:fontRef idx="minor">
+              <a:schemeClr val="lt1"/>
+            </a:fontRef>
+          </p:style>
+          <p:txBody>
+            <a:bodyPr rtlCol="0" anchor="ctr"/>
+            <a:lstStyle/>
+            <a:p>
+              <a:pPr algn="ctr"/>
+              <a:endParaRPr lang="en-US"/>
+            </a:p>
+          </p:txBody>
+        </p:sp>
+      </p:grpSp>
+      <p:sp>
+        <p:nvSpPr>
+          <p:cNvPr id="16" name="Rectangle 15">
+            <a:extLst>
+              <a:ext uri="{FF2B5EF4-FFF2-40B4-BE49-F238E27FC236}">
+                <a16:creationId xmlns:a16="http://schemas.microsoft.com/office/drawing/2014/main" id="{7653717E-6F8C-43E0-9893-C03AE87D18D6}"/>
+              </a:ext>
+              <a:ext uri="{C183D7F6-B498-43B3-948B-1728B52AA6E4}">
+                <adec:decorative xmlns:adec="http://schemas.microsoft.com/office/drawing/2017/decorative" val="1"/>
+              </a:ext>
+            </a:extLst>
+          </p:cNvPr>
+          <p:cNvSpPr>
+            <a:spLocks noGrp="1" noRot="1" noChangeAspect="1" noMove="1" noResize="1" noEditPoints="1" noAdjustHandles="1" noChangeArrowheads="1" noChangeShapeType="1" noTextEdit="1"/>
+          </p:cNvSpPr>
+          <p:nvPr>
+            <p:extLst>
+              <p:ext uri="{386F3935-93C4-4BCD-93E2-E3B085C9AB24}">
+                <p16:designElem xmlns:p16="http://schemas.microsoft.com/office/powerpoint/2015/main" val="1"/>
+              </p:ext>
+            </p:extLst>
+          </p:nvPr>
+        </p:nvSpPr>
+        <p:spPr>
+          <a:xfrm flipH="1">
+            <a:off x="10697670" y="0"/>
+            <a:ext cx="1494330" cy="6858000"/>
+          </a:xfrm>
+          <a:prstGeom prst="rect">
+            <a:avLst/>
+          </a:prstGeom>
+          <a:solidFill>
+            <a:schemeClr val="accent4"/>
+          </a:solidFill>
+          <a:ln>
+            <a:noFill/>
+          </a:ln>
+        </p:spPr>
+        <p:style>
+          <a:lnRef idx="2">
+            <a:schemeClr val="accent1">
+              <a:shade val="50000"/>
+            </a:schemeClr>
+          </a:lnRef>
+          <a:fillRef idx="1">
+            <a:schemeClr val="accent1"/>
+          </a:fillRef>
+          <a:effectRef idx="0">
+            <a:schemeClr val="accent1"/>
+          </a:effectRef>
+          <a:fontRef idx="minor">
+            <a:schemeClr val="lt1"/>
+          </a:fontRef>
+        </p:style>
+        <p:txBody>
+          <a:bodyPr rtlCol="0" anchor="ctr"/>
+          <a:lstStyle/>
+          <a:p>
+            <a:pPr algn="ctr"/>
+            <a:endParaRPr lang="en-US"/>
+          </a:p>
+        </p:txBody>
+      </p:sp>
+      <p:sp>
+        <p:nvSpPr>
+          <p:cNvPr id="18" name="Rectangle 17">
+            <a:extLst>
+              <a:ext uri="{FF2B5EF4-FFF2-40B4-BE49-F238E27FC236}">
+                <a16:creationId xmlns:a16="http://schemas.microsoft.com/office/drawing/2014/main" id="{35BB14B4-EC3F-47C7-9AF3-B0E017B75C42}"/>
+              </a:ext>
+              <a:ext uri="{C183D7F6-B498-43B3-948B-1728B52AA6E4}">
+                <adec:decorative xmlns:adec="http://schemas.microsoft.com/office/drawing/2017/decorative" val="1"/>
+              </a:ext>
+            </a:extLst>
+          </p:cNvPr>
+          <p:cNvSpPr>
+            <a:spLocks noGrp="1" noRot="1" noChangeAspect="1" noMove="1" noResize="1" noEditPoints="1" noAdjustHandles="1" noChangeArrowheads="1" noChangeShapeType="1" noTextEdit="1"/>
+          </p:cNvSpPr>
+          <p:nvPr>
+            <p:extLst>
+              <p:ext uri="{386F3935-93C4-4BCD-93E2-E3B085C9AB24}">
+                <p16:designElem xmlns:p16="http://schemas.microsoft.com/office/powerpoint/2015/main" val="1"/>
+              </p:ext>
+            </p:extLst>
+          </p:nvPr>
+        </p:nvSpPr>
+        <p:spPr>
+          <a:xfrm>
+            <a:off x="7666160" y="391886"/>
+            <a:ext cx="4029016" cy="6017078"/>
+          </a:xfrm>
+          <a:prstGeom prst="rect">
+            <a:avLst/>
+          </a:prstGeom>
+          <a:solidFill>
+            <a:schemeClr val="bg1"/>
+          </a:solidFill>
+          <a:ln>
+            <a:noFill/>
+          </a:ln>
+          <a:effectLst>
+            <a:outerShdw blurRad="139700" dist="127000" dir="5400000" algn="t" rotWithShape="0">
+              <a:prstClr val="black">
+                <a:alpha val="15000"/>
+              </a:prstClr>
+            </a:outerShdw>
+          </a:effectLst>
+        </p:spPr>
+        <p:style>
+          <a:lnRef idx="2">
+            <a:schemeClr val="accent1">
+              <a:shade val="50000"/>
+            </a:schemeClr>
+          </a:lnRef>
+          <a:fillRef idx="1">
+            <a:schemeClr val="accent1"/>
+          </a:fillRef>
+          <a:effectRef idx="0">
+            <a:schemeClr val="accent1"/>
+          </a:effectRef>
+          <a:fontRef idx="minor">
+            <a:schemeClr val="lt1"/>
+          </a:fontRef>
+        </p:style>
+        <p:txBody>
+          <a:bodyPr rtlCol="0" anchor="ctr"/>
+          <a:lstStyle/>
+          <a:p>
+            <a:pPr algn="ctr"/>
+            <a:endParaRPr lang="en-US"/>
+          </a:p>
+        </p:txBody>
+      </p:sp>
+      <p:sp>
+        <p:nvSpPr>
+          <p:cNvPr id="4" name="Rectangle 1">
+            <a:extLst>
+              <a:ext uri="{FF2B5EF4-FFF2-40B4-BE49-F238E27FC236}">
+                <a16:creationId xmlns:a16="http://schemas.microsoft.com/office/drawing/2014/main" id="{B401548B-12FE-F3AC-7252-4BD25E053FB3}"/>
+              </a:ext>
+            </a:extLst>
+          </p:cNvPr>
+          <p:cNvSpPr>
+            <a:spLocks noGrp="1" noChangeArrowheads="1"/>
+          </p:cNvSpPr>
+          <p:nvPr>
+            <p:ph type="body" idx="1"/>
+          </p:nvPr>
+        </p:nvSpPr>
+        <p:spPr bwMode="auto">
+          <a:xfrm>
+            <a:off x="8030590" y="449035"/>
+            <a:ext cx="3300156" cy="5808889"/>
+          </a:xfrm>
+          <a:prstGeom prst="rect">
+            <a:avLst/>
+          </a:prstGeom>
+          <a:extLst>
+            <a:ext uri="{909E8E84-426E-40DD-AFC4-6F175D3DCCD1}">
+              <a14:hiddenFill xmlns:a14="http://schemas.microsoft.com/office/drawing/2010/main">
+                <a:solidFill>
+                  <a:schemeClr val="accent1"/>
+                </a:solidFill>
+              </a14:hiddenFill>
+            </a:ext>
+            <a:ext uri="{91240B29-F687-4F45-9708-019B960494DF}">
+              <a14:hiddenLine xmlns:a14="http://schemas.microsoft.com/office/drawing/2010/main" w="9525">
+                <a:solidFill>
+                  <a:schemeClr val="tx1"/>
+                </a:solidFill>
+                <a:miter lim="800000"/>
+                <a:headEnd/>
+                <a:tailEnd/>
+              </a14:hiddenLine>
+            </a:ext>
+            <a:ext uri="{AF507438-7753-43E0-B8FC-AC1667EBCBE1}">
+              <a14:hiddenEffects xmlns:a14="http://schemas.microsoft.com/office/drawing/2010/main">
+                <a:effectLst>
+                  <a:outerShdw dist="35921" dir="2700000" algn="ctr" rotWithShape="0">
+                    <a:schemeClr val="bg2"/>
+                  </a:outerShdw>
+                </a:effectLst>
+              </a14:hiddenEffects>
+            </a:ext>
+          </a:extLst>
+        </p:spPr>
+        <p:txBody>
+          <a:bodyPr vert="horz" lIns="91440" tIns="45720" rIns="91440" bIns="45720" numCol="1" rtlCol="0" anchor="ctr" anchorCtr="0" compatLnSpc="1">
+            <a:prstTxWarp prst="textNoShape">
+              <a:avLst/>
+            </a:prstTxWarp>
+            <a:normAutofit/>
+          </a:bodyPr>
+          <a:lstStyle/>
+          <a:p>
+            <a:pPr marR="0" lvl="0" fontAlgn="base">
+              <a:spcAft>
+                <a:spcPct val="0"/>
+              </a:spcAft>
+              <a:buClrTx/>
+              <a:buSzTx/>
+              <a:tabLst/>
+            </a:pPr>
+            <a:r>
+              <a:rPr kumimoji="0" lang="en-US" altLang="en-US" sz="1400" b="1" i="0" u="none" strike="noStrike" kern="1200" cap="none" normalizeH="0" baseline="0" dirty="0">
+                <a:ln>
+                  <a:noFill/>
+                </a:ln>
+                <a:solidFill>
+                  <a:schemeClr val="tx1"/>
+                </a:solidFill>
+                <a:effectLst/>
+                <a:latin typeface="+mn-lt"/>
+                <a:ea typeface="+mn-ea"/>
+                <a:cs typeface="+mn-cs"/>
+              </a:rPr>
+              <a:t>10 Mbps - </a:t>
+            </a:r>
+            <a:r>
+              <a:rPr kumimoji="0" lang="en-US" altLang="en-US" sz="1400" b="1" i="0" u="none" strike="noStrike" kern="1200" cap="none" normalizeH="0" baseline="0" dirty="0" err="1">
+                <a:ln>
+                  <a:noFill/>
+                </a:ln>
+                <a:solidFill>
+                  <a:schemeClr val="tx1"/>
+                </a:solidFill>
+                <a:effectLst/>
+                <a:latin typeface="+mn-lt"/>
+                <a:ea typeface="+mn-ea"/>
+                <a:cs typeface="+mn-cs"/>
+              </a:rPr>
+              <a:t>Εξάλειψη</a:t>
+            </a:r>
+            <a:r>
+              <a:rPr kumimoji="0" lang="en-US" altLang="en-US" sz="1400" b="1" i="0" u="none" strike="noStrike" kern="1200" cap="none" normalizeH="0" baseline="0" dirty="0">
+                <a:ln>
+                  <a:noFill/>
+                </a:ln>
+                <a:solidFill>
+                  <a:schemeClr val="tx1"/>
+                </a:solidFill>
+                <a:effectLst/>
+                <a:latin typeface="+mn-lt"/>
+                <a:ea typeface="+mn-ea"/>
+                <a:cs typeface="+mn-cs"/>
+              </a:rPr>
+              <a:t> </a:t>
+            </a:r>
+            <a:r>
+              <a:rPr kumimoji="0" lang="en-US" altLang="en-US" sz="1400" b="1" i="0" u="none" strike="noStrike" kern="1200" cap="none" normalizeH="0" baseline="0" dirty="0" err="1">
+                <a:ln>
+                  <a:noFill/>
+                </a:ln>
+                <a:solidFill>
+                  <a:schemeClr val="tx1"/>
+                </a:solidFill>
+                <a:effectLst/>
+                <a:latin typeface="+mn-lt"/>
+                <a:ea typeface="+mn-ea"/>
+                <a:cs typeface="+mn-cs"/>
+              </a:rPr>
+              <a:t>Συμφόρησης</a:t>
+            </a:r>
+            <a:r>
+              <a:rPr kumimoji="0" lang="en-US" altLang="en-US" sz="1400" b="1" i="0" u="none" strike="noStrike" kern="1200" cap="none" normalizeH="0" baseline="0" dirty="0">
+                <a:ln>
+                  <a:noFill/>
+                </a:ln>
+                <a:solidFill>
+                  <a:schemeClr val="tx1"/>
+                </a:solidFill>
+                <a:effectLst/>
+                <a:latin typeface="+mn-lt"/>
+                <a:ea typeface="+mn-ea"/>
+                <a:cs typeface="+mn-cs"/>
+              </a:rPr>
+              <a:t>:</a:t>
+            </a:r>
+            <a:endParaRPr kumimoji="0" lang="en-US" altLang="en-US" sz="1400" b="0" i="0" u="none" strike="noStrike" kern="1200" cap="none" normalizeH="0" baseline="0" dirty="0">
+              <a:ln>
+                <a:noFill/>
+              </a:ln>
+              <a:solidFill>
+                <a:schemeClr val="tx1"/>
+              </a:solidFill>
+              <a:effectLst/>
+              <a:latin typeface="+mn-lt"/>
+              <a:ea typeface="+mn-ea"/>
+              <a:cs typeface="+mn-cs"/>
+            </a:endParaRPr>
+          </a:p>
+          <a:p>
+            <a:pPr marR="0" lvl="0" fontAlgn="base">
+              <a:spcAft>
+                <a:spcPct val="0"/>
+              </a:spcAft>
+              <a:buClrTx/>
+              <a:buSzTx/>
+              <a:tabLst/>
+            </a:pPr>
+            <a:r>
+              <a:rPr kumimoji="0" lang="en-US" altLang="en-US" sz="1400" b="0" i="0" u="none" strike="noStrike" kern="1200" cap="none" normalizeH="0" baseline="0" dirty="0" err="1">
+                <a:ln>
+                  <a:noFill/>
+                </a:ln>
+                <a:solidFill>
+                  <a:schemeClr val="tx1"/>
+                </a:solidFill>
+                <a:effectLst/>
+                <a:latin typeface="+mn-lt"/>
+                <a:ea typeface="+mn-ea"/>
+                <a:cs typeface="+mn-cs"/>
+              </a:rPr>
+              <a:t>Φόρτος</a:t>
+            </a:r>
+            <a:r>
+              <a:rPr kumimoji="0" lang="en-US" altLang="en-US" sz="1400" b="0" i="0" u="none" strike="noStrike" kern="1200" cap="none" normalizeH="0" baseline="0" dirty="0">
+                <a:ln>
+                  <a:noFill/>
+                </a:ln>
+                <a:solidFill>
+                  <a:schemeClr val="tx1"/>
+                </a:solidFill>
+                <a:effectLst/>
+                <a:latin typeface="+mn-lt"/>
+                <a:ea typeface="+mn-ea"/>
+                <a:cs typeface="+mn-cs"/>
+              </a:rPr>
+              <a:t>: 3.2 Mbps (400 </a:t>
+            </a:r>
+            <a:r>
+              <a:rPr lang="en-US" altLang="en-US" sz="1400" kern="1200" dirty="0">
+                <a:solidFill>
+                  <a:schemeClr val="tx1"/>
+                </a:solidFill>
+                <a:latin typeface="+mn-lt"/>
+                <a:ea typeface="+mn-ea"/>
+                <a:cs typeface="+mn-cs"/>
+              </a:rPr>
+              <a:t>x </a:t>
+            </a:r>
+            <a:r>
+              <a:rPr kumimoji="0" lang="en-US" altLang="en-US" sz="1400" b="0" i="0" u="none" strike="noStrike" kern="1200" cap="none" normalizeH="0" baseline="0" dirty="0">
+                <a:ln>
+                  <a:noFill/>
+                </a:ln>
+                <a:solidFill>
+                  <a:schemeClr val="tx1"/>
+                </a:solidFill>
+                <a:effectLst/>
+                <a:latin typeface="+mn-lt"/>
+                <a:ea typeface="+mn-ea"/>
+                <a:cs typeface="+mn-cs"/>
+              </a:rPr>
+              <a:t>8000).</a:t>
+            </a:r>
+          </a:p>
+          <a:p>
+            <a:pPr marR="0" lvl="0" fontAlgn="base">
+              <a:spcAft>
+                <a:spcPct val="0"/>
+              </a:spcAft>
+              <a:buClrTx/>
+              <a:buSzTx/>
+              <a:tabLst/>
+            </a:pPr>
+            <a:r>
+              <a:rPr kumimoji="0" lang="en-US" altLang="en-US" sz="1400" b="0" i="0" u="none" strike="noStrike" kern="1200" cap="none" normalizeH="0" baseline="0" dirty="0" err="1">
+                <a:ln>
+                  <a:noFill/>
+                </a:ln>
+                <a:solidFill>
+                  <a:schemeClr val="tx1"/>
+                </a:solidFill>
+                <a:effectLst/>
+                <a:latin typeface="+mn-lt"/>
+                <a:ea typeface="+mn-ea"/>
+                <a:cs typeface="+mn-cs"/>
+              </a:rPr>
+              <a:t>Χωρητικότητ</a:t>
+            </a:r>
+            <a:r>
+              <a:rPr kumimoji="0" lang="en-US" altLang="en-US" sz="1400" b="0" i="0" u="none" strike="noStrike" kern="1200" cap="none" normalizeH="0" baseline="0" dirty="0">
+                <a:ln>
+                  <a:noFill/>
+                </a:ln>
+                <a:solidFill>
+                  <a:schemeClr val="tx1"/>
+                </a:solidFill>
+                <a:effectLst/>
+                <a:latin typeface="+mn-lt"/>
+                <a:ea typeface="+mn-ea"/>
+                <a:cs typeface="+mn-cs"/>
+              </a:rPr>
+              <a:t>α: 10 Mbps.</a:t>
+            </a:r>
+          </a:p>
+          <a:p>
+            <a:pPr marR="0" lvl="0" fontAlgn="base">
+              <a:spcAft>
+                <a:spcPct val="0"/>
+              </a:spcAft>
+              <a:buClrTx/>
+              <a:buSzTx/>
+              <a:tabLst/>
+            </a:pPr>
+            <a:r>
+              <a:rPr kumimoji="0" lang="en-US" altLang="en-US" sz="1400" b="1" i="0" u="none" strike="noStrike" kern="1200" cap="none" normalizeH="0" baseline="0" dirty="0">
+                <a:ln>
+                  <a:noFill/>
+                </a:ln>
+                <a:solidFill>
+                  <a:schemeClr val="tx1"/>
+                </a:solidFill>
+                <a:effectLst/>
+                <a:latin typeface="+mn-lt"/>
+                <a:ea typeface="+mn-ea"/>
+                <a:cs typeface="+mn-cs"/>
+              </a:rPr>
+              <a:t>Απ</a:t>
+            </a:r>
+            <a:r>
+              <a:rPr kumimoji="0" lang="en-US" altLang="en-US" sz="1400" b="1" i="0" u="none" strike="noStrike" kern="1200" cap="none" normalizeH="0" baseline="0" dirty="0" err="1">
+                <a:ln>
+                  <a:noFill/>
+                </a:ln>
+                <a:solidFill>
+                  <a:schemeClr val="tx1"/>
+                </a:solidFill>
+                <a:effectLst/>
+                <a:latin typeface="+mn-lt"/>
+                <a:ea typeface="+mn-ea"/>
+                <a:cs typeface="+mn-cs"/>
+              </a:rPr>
+              <a:t>οτέλεσμ</a:t>
+            </a:r>
+            <a:r>
+              <a:rPr kumimoji="0" lang="en-US" altLang="en-US" sz="1400" b="1" i="0" u="none" strike="noStrike" kern="1200" cap="none" normalizeH="0" baseline="0" dirty="0">
+                <a:ln>
+                  <a:noFill/>
+                </a:ln>
+                <a:solidFill>
+                  <a:schemeClr val="tx1"/>
+                </a:solidFill>
+                <a:effectLst/>
+                <a:latin typeface="+mn-lt"/>
+                <a:ea typeface="+mn-ea"/>
+                <a:cs typeface="+mn-cs"/>
+              </a:rPr>
+              <a:t>α:</a:t>
+            </a:r>
+            <a:r>
+              <a:rPr kumimoji="0" lang="en-US" altLang="en-US" sz="1400" b="0" i="0" u="none" strike="noStrike" kern="1200" cap="none" normalizeH="0" baseline="0" dirty="0">
+                <a:ln>
+                  <a:noFill/>
+                </a:ln>
+                <a:solidFill>
+                  <a:schemeClr val="tx1"/>
+                </a:solidFill>
+                <a:effectLst/>
+                <a:latin typeface="+mn-lt"/>
+                <a:ea typeface="+mn-ea"/>
+                <a:cs typeface="+mn-cs"/>
+              </a:rPr>
+              <a:t> Απώλειες </a:t>
+            </a:r>
+            <a:r>
+              <a:rPr kumimoji="0" lang="en-US" altLang="en-US" sz="1400" b="1" i="0" u="none" strike="noStrike" kern="1200" cap="none" normalizeH="0" baseline="0" dirty="0">
+                <a:ln>
+                  <a:noFill/>
+                </a:ln>
+                <a:solidFill>
+                  <a:schemeClr val="tx1"/>
+                </a:solidFill>
+                <a:effectLst/>
+                <a:latin typeface="+mn-lt"/>
+                <a:ea typeface="+mn-ea"/>
+                <a:cs typeface="+mn-cs"/>
+              </a:rPr>
+              <a:t>0%</a:t>
+            </a:r>
+            <a:r>
+              <a:rPr kumimoji="0" lang="en-US" altLang="en-US" sz="1400" b="0" i="0" u="none" strike="noStrike" kern="1200" cap="none" normalizeH="0" baseline="0" dirty="0">
+                <a:ln>
+                  <a:noFill/>
+                </a:ln>
+                <a:solidFill>
+                  <a:schemeClr val="tx1"/>
+                </a:solidFill>
+                <a:effectLst/>
+                <a:latin typeface="+mn-lt"/>
+                <a:ea typeface="+mn-ea"/>
+                <a:cs typeface="+mn-cs"/>
+              </a:rPr>
+              <a:t>, Ουρές άδειες.</a:t>
+            </a:r>
+          </a:p>
+          <a:p>
+            <a:pPr marR="0" lvl="0" fontAlgn="base">
+              <a:spcAft>
+                <a:spcPct val="0"/>
+              </a:spcAft>
+              <a:buClrTx/>
+              <a:buSzTx/>
+              <a:tabLst/>
+            </a:pPr>
+            <a:r>
+              <a:rPr kumimoji="0" lang="en-US" altLang="en-US" sz="1400" b="1" i="0" u="none" strike="noStrike" kern="1200" cap="none" normalizeH="0" baseline="0" dirty="0">
+                <a:ln>
+                  <a:noFill/>
+                </a:ln>
+                <a:solidFill>
+                  <a:schemeClr val="tx1"/>
+                </a:solidFill>
+                <a:effectLst/>
+                <a:latin typeface="+mn-lt"/>
+                <a:ea typeface="+mn-ea"/>
+                <a:cs typeface="+mn-cs"/>
+              </a:rPr>
+              <a:t>Delay:</a:t>
+            </a:r>
+            <a:r>
+              <a:rPr kumimoji="0" lang="en-US" altLang="en-US" sz="1400" b="0" i="0" u="none" strike="noStrike" kern="1200" cap="none" normalizeH="0" baseline="0" dirty="0">
+                <a:ln>
+                  <a:noFill/>
+                </a:ln>
+                <a:solidFill>
+                  <a:schemeClr val="tx1"/>
+                </a:solidFill>
+                <a:effectLst/>
+                <a:latin typeface="+mn-lt"/>
+                <a:ea typeface="+mn-ea"/>
+                <a:cs typeface="+mn-cs"/>
+              </a:rPr>
+              <a:t> </a:t>
+            </a:r>
+            <a:r>
+              <a:rPr kumimoji="0" lang="en-US" altLang="en-US" sz="1400" b="0" i="0" u="none" strike="noStrike" kern="1200" cap="none" normalizeH="0" baseline="0" dirty="0" err="1">
+                <a:ln>
+                  <a:noFill/>
+                </a:ln>
+                <a:solidFill>
+                  <a:schemeClr val="tx1"/>
+                </a:solidFill>
+                <a:effectLst/>
+                <a:latin typeface="+mn-lt"/>
+                <a:ea typeface="+mn-ea"/>
+                <a:cs typeface="+mn-cs"/>
+              </a:rPr>
+              <a:t>Ελάχιστο</a:t>
+            </a:r>
+            <a:r>
+              <a:rPr kumimoji="0" lang="en-US" altLang="en-US" sz="1400" b="0" i="0" u="none" strike="noStrike" kern="1200" cap="none" normalizeH="0" baseline="0" dirty="0">
+                <a:ln>
+                  <a:noFill/>
+                </a:ln>
+                <a:solidFill>
+                  <a:schemeClr val="tx1"/>
+                </a:solidFill>
+                <a:effectLst/>
+                <a:latin typeface="+mn-lt"/>
+                <a:ea typeface="+mn-ea"/>
+                <a:cs typeface="+mn-cs"/>
+              </a:rPr>
+              <a:t> (~0.15s), β</a:t>
+            </a:r>
+            <a:r>
+              <a:rPr kumimoji="0" lang="en-US" altLang="en-US" sz="1400" b="0" i="0" u="none" strike="noStrike" kern="1200" cap="none" normalizeH="0" baseline="0" dirty="0" err="1">
+                <a:ln>
+                  <a:noFill/>
+                </a:ln>
+                <a:solidFill>
+                  <a:schemeClr val="tx1"/>
+                </a:solidFill>
+                <a:effectLst/>
+                <a:latin typeface="+mn-lt"/>
+                <a:ea typeface="+mn-ea"/>
+                <a:cs typeface="+mn-cs"/>
+              </a:rPr>
+              <a:t>λέ</a:t>
+            </a:r>
+            <a:r>
+              <a:rPr kumimoji="0" lang="en-US" altLang="en-US" sz="1400" b="0" i="0" u="none" strike="noStrike" kern="1200" cap="none" normalizeH="0" baseline="0" dirty="0">
+                <a:ln>
+                  <a:noFill/>
+                </a:ln>
+                <a:solidFill>
+                  <a:schemeClr val="tx1"/>
+                </a:solidFill>
+                <a:effectLst/>
+                <a:latin typeface="+mn-lt"/>
+                <a:ea typeface="+mn-ea"/>
+                <a:cs typeface="+mn-cs"/>
+              </a:rPr>
+              <a:t>πουμε την καθυστέρηση μετάδοσης λόγω ταυτόχρονης άφιξης πακέτων.</a:t>
+            </a:r>
+          </a:p>
+          <a:p>
+            <a:pPr marR="0" lvl="0" fontAlgn="base">
+              <a:spcAft>
+                <a:spcPct val="0"/>
+              </a:spcAft>
+              <a:buClrTx/>
+              <a:buSzTx/>
+              <a:tabLst/>
+            </a:pPr>
+            <a:r>
+              <a:rPr kumimoji="0" lang="en-US" altLang="en-US" sz="1400" b="1" i="0" u="none" strike="noStrike" kern="1200" cap="none" normalizeH="0" baseline="0" dirty="0">
+                <a:ln>
+                  <a:noFill/>
+                </a:ln>
+                <a:solidFill>
+                  <a:schemeClr val="tx1"/>
+                </a:solidFill>
+                <a:effectLst/>
+                <a:latin typeface="+mn-lt"/>
+                <a:ea typeface="+mn-ea"/>
+                <a:cs typeface="+mn-cs"/>
+              </a:rPr>
+              <a:t>100 Mbps - Υπ</a:t>
+            </a:r>
+            <a:r>
+              <a:rPr kumimoji="0" lang="en-US" altLang="en-US" sz="1400" b="1" i="0" u="none" strike="noStrike" kern="1200" cap="none" normalizeH="0" baseline="0" dirty="0" err="1">
+                <a:ln>
+                  <a:noFill/>
+                </a:ln>
+                <a:solidFill>
+                  <a:schemeClr val="tx1"/>
+                </a:solidFill>
+                <a:effectLst/>
+                <a:latin typeface="+mn-lt"/>
+                <a:ea typeface="+mn-ea"/>
+                <a:cs typeface="+mn-cs"/>
+              </a:rPr>
+              <a:t>ερ</a:t>
+            </a:r>
+            <a:r>
+              <a:rPr kumimoji="0" lang="en-US" altLang="en-US" sz="1400" b="1" i="0" u="none" strike="noStrike" kern="1200" cap="none" normalizeH="0" baseline="0" dirty="0">
+                <a:ln>
+                  <a:noFill/>
+                </a:ln>
+                <a:solidFill>
+                  <a:schemeClr val="tx1"/>
+                </a:solidFill>
+                <a:effectLst/>
+                <a:latin typeface="+mn-lt"/>
+                <a:ea typeface="+mn-ea"/>
+                <a:cs typeface="+mn-cs"/>
+              </a:rPr>
+              <a:t>-επ</a:t>
+            </a:r>
+            <a:r>
+              <a:rPr kumimoji="0" lang="en-US" altLang="en-US" sz="1400" b="1" i="0" u="none" strike="noStrike" kern="1200" cap="none" normalizeH="0" baseline="0" dirty="0" err="1">
+                <a:ln>
+                  <a:noFill/>
+                </a:ln>
+                <a:solidFill>
+                  <a:schemeClr val="tx1"/>
+                </a:solidFill>
+                <a:effectLst/>
+                <a:latin typeface="+mn-lt"/>
+                <a:ea typeface="+mn-ea"/>
+                <a:cs typeface="+mn-cs"/>
+              </a:rPr>
+              <a:t>άρκει</a:t>
+            </a:r>
+            <a:r>
+              <a:rPr kumimoji="0" lang="en-US" altLang="en-US" sz="1400" b="1" i="0" u="none" strike="noStrike" kern="1200" cap="none" normalizeH="0" baseline="0" dirty="0">
+                <a:ln>
+                  <a:noFill/>
+                </a:ln>
+                <a:solidFill>
+                  <a:schemeClr val="tx1"/>
+                </a:solidFill>
+                <a:effectLst/>
+                <a:latin typeface="+mn-lt"/>
+                <a:ea typeface="+mn-ea"/>
+                <a:cs typeface="+mn-cs"/>
+              </a:rPr>
+              <a:t>α:</a:t>
+            </a:r>
+            <a:endParaRPr kumimoji="0" lang="en-US" altLang="en-US" sz="1400" b="0" i="0" u="none" strike="noStrike" kern="1200" cap="none" normalizeH="0" baseline="0" dirty="0">
+              <a:ln>
+                <a:noFill/>
+              </a:ln>
+              <a:solidFill>
+                <a:schemeClr val="tx1"/>
+              </a:solidFill>
+              <a:effectLst/>
+              <a:latin typeface="+mn-lt"/>
+              <a:ea typeface="+mn-ea"/>
+              <a:cs typeface="+mn-cs"/>
+            </a:endParaRPr>
+          </a:p>
+          <a:p>
+            <a:pPr marR="0" lvl="0" fontAlgn="base">
+              <a:spcAft>
+                <a:spcPct val="0"/>
+              </a:spcAft>
+              <a:buClrTx/>
+              <a:buSzTx/>
+              <a:tabLst/>
+            </a:pPr>
+            <a:r>
+              <a:rPr kumimoji="0" lang="en-US" altLang="en-US" sz="1400" b="0" i="0" u="none" strike="noStrike" kern="1200" cap="none" normalizeH="0" baseline="0" dirty="0" err="1">
+                <a:ln>
+                  <a:noFill/>
+                </a:ln>
+                <a:solidFill>
+                  <a:schemeClr val="tx1"/>
+                </a:solidFill>
+                <a:effectLst/>
+                <a:latin typeface="+mn-lt"/>
+                <a:ea typeface="+mn-ea"/>
+                <a:cs typeface="+mn-cs"/>
+              </a:rPr>
+              <a:t>Δεν</a:t>
+            </a:r>
+            <a:r>
+              <a:rPr kumimoji="0" lang="en-US" altLang="en-US" sz="1400" b="0" i="0" u="none" strike="noStrike" kern="1200" cap="none" normalizeH="0" baseline="0" dirty="0">
+                <a:ln>
+                  <a:noFill/>
+                </a:ln>
+                <a:solidFill>
+                  <a:schemeClr val="tx1"/>
+                </a:solidFill>
+                <a:effectLst/>
+                <a:latin typeface="+mn-lt"/>
+                <a:ea typeface="+mn-ea"/>
+                <a:cs typeface="+mn-cs"/>
+              </a:rPr>
+              <a:t> υπ</a:t>
+            </a:r>
+            <a:r>
+              <a:rPr kumimoji="0" lang="en-US" altLang="en-US" sz="1400" b="0" i="0" u="none" strike="noStrike" kern="1200" cap="none" normalizeH="0" baseline="0" dirty="0" err="1">
+                <a:ln>
+                  <a:noFill/>
+                </a:ln>
+                <a:solidFill>
+                  <a:schemeClr val="tx1"/>
+                </a:solidFill>
+                <a:effectLst/>
+                <a:latin typeface="+mn-lt"/>
+                <a:ea typeface="+mn-ea"/>
+                <a:cs typeface="+mn-cs"/>
+              </a:rPr>
+              <a:t>άρχει</a:t>
+            </a:r>
+            <a:r>
+              <a:rPr kumimoji="0" lang="en-US" altLang="en-US" sz="1400" b="0" i="0" u="none" strike="noStrike" kern="1200" cap="none" normalizeH="0" baseline="0" dirty="0">
+                <a:ln>
+                  <a:noFill/>
+                </a:ln>
+                <a:solidFill>
+                  <a:schemeClr val="tx1"/>
+                </a:solidFill>
+                <a:effectLst/>
+                <a:latin typeface="+mn-lt"/>
+                <a:ea typeface="+mn-ea"/>
+                <a:cs typeface="+mn-cs"/>
+              </a:rPr>
+              <a:t> </a:t>
+            </a:r>
+            <a:r>
+              <a:rPr kumimoji="0" lang="en-US" altLang="en-US" sz="1400" b="0" i="0" u="none" strike="noStrike" kern="1200" cap="none" normalizeH="0" baseline="0" dirty="0" err="1">
+                <a:ln>
+                  <a:noFill/>
+                </a:ln>
+                <a:solidFill>
+                  <a:schemeClr val="tx1"/>
+                </a:solidFill>
+                <a:effectLst/>
+                <a:latin typeface="+mn-lt"/>
+                <a:ea typeface="+mn-ea"/>
+                <a:cs typeface="+mn-cs"/>
+              </a:rPr>
+              <a:t>ορ</a:t>
+            </a:r>
+            <a:r>
+              <a:rPr kumimoji="0" lang="en-US" altLang="en-US" sz="1400" b="0" i="0" u="none" strike="noStrike" kern="1200" cap="none" normalizeH="0" baseline="0" dirty="0">
+                <a:ln>
+                  <a:noFill/>
+                </a:ln>
+                <a:solidFill>
+                  <a:schemeClr val="tx1"/>
+                </a:solidFill>
+                <a:effectLst/>
+                <a:latin typeface="+mn-lt"/>
+                <a:ea typeface="+mn-ea"/>
+                <a:cs typeface="+mn-cs"/>
+              </a:rPr>
+              <a:t>ατή διαφορά από τα 10 Mbps.</a:t>
+            </a:r>
+          </a:p>
+          <a:p>
+            <a:pPr marR="0" lvl="0" fontAlgn="base">
+              <a:spcAft>
+                <a:spcPct val="0"/>
+              </a:spcAft>
+              <a:buClrTx/>
+              <a:buSzTx/>
+              <a:tabLst/>
+            </a:pPr>
+            <a:r>
+              <a:rPr kumimoji="0" lang="en-US" altLang="en-US" sz="1400" b="0" i="0" u="none" strike="noStrike" kern="1200" cap="none" normalizeH="0" baseline="0" dirty="0" err="1">
+                <a:ln>
+                  <a:noFill/>
+                </a:ln>
+                <a:solidFill>
+                  <a:schemeClr val="tx1"/>
+                </a:solidFill>
+                <a:effectLst/>
+                <a:latin typeface="+mn-lt"/>
+                <a:ea typeface="+mn-ea"/>
+                <a:cs typeface="+mn-cs"/>
+              </a:rPr>
+              <a:t>Το</a:t>
+            </a:r>
+            <a:r>
+              <a:rPr kumimoji="0" lang="en-US" altLang="en-US" sz="1400" b="0" i="0" u="none" strike="noStrike" kern="1200" cap="none" normalizeH="0" baseline="0" dirty="0">
+                <a:ln>
+                  <a:noFill/>
+                </a:ln>
+                <a:solidFill>
+                  <a:schemeClr val="tx1"/>
+                </a:solidFill>
+                <a:effectLst/>
+                <a:latin typeface="+mn-lt"/>
+                <a:ea typeface="+mn-ea"/>
+                <a:cs typeface="+mn-cs"/>
+              </a:rPr>
+              <a:t> </a:t>
+            </a:r>
+            <a:r>
+              <a:rPr kumimoji="0" lang="en-US" altLang="en-US" sz="1400" b="0" i="0" u="none" strike="noStrike" kern="1200" cap="none" normalizeH="0" baseline="0" dirty="0" err="1">
+                <a:ln>
+                  <a:noFill/>
+                </a:ln>
+                <a:solidFill>
+                  <a:schemeClr val="tx1"/>
+                </a:solidFill>
+                <a:effectLst/>
+                <a:latin typeface="+mn-lt"/>
+                <a:ea typeface="+mn-ea"/>
+                <a:cs typeface="+mn-cs"/>
+              </a:rPr>
+              <a:t>δίκτυο</a:t>
+            </a:r>
+            <a:r>
+              <a:rPr kumimoji="0" lang="en-US" altLang="en-US" sz="1400" b="0" i="0" u="none" strike="noStrike" kern="1200" cap="none" normalizeH="0" baseline="0" dirty="0">
+                <a:ln>
+                  <a:noFill/>
+                </a:ln>
+                <a:solidFill>
+                  <a:schemeClr val="tx1"/>
+                </a:solidFill>
+                <a:effectLst/>
+                <a:latin typeface="+mn-lt"/>
+                <a:ea typeface="+mn-ea"/>
+                <a:cs typeface="+mn-cs"/>
+              </a:rPr>
+              <a:t> </a:t>
+            </a:r>
+            <a:r>
+              <a:rPr kumimoji="0" lang="en-US" altLang="en-US" sz="1400" b="0" i="0" u="none" strike="noStrike" kern="1200" cap="none" normalizeH="0" baseline="0" dirty="0" err="1">
+                <a:ln>
+                  <a:noFill/>
+                </a:ln>
+                <a:solidFill>
+                  <a:schemeClr val="tx1"/>
+                </a:solidFill>
+                <a:effectLst/>
+                <a:latin typeface="+mn-lt"/>
+                <a:ea typeface="+mn-ea"/>
+                <a:cs typeface="+mn-cs"/>
+              </a:rPr>
+              <a:t>είν</a:t>
+            </a:r>
+            <a:r>
+              <a:rPr kumimoji="0" lang="en-US" altLang="en-US" sz="1400" b="0" i="0" u="none" strike="noStrike" kern="1200" cap="none" normalizeH="0" baseline="0" dirty="0">
+                <a:ln>
+                  <a:noFill/>
+                </a:ln>
+                <a:solidFill>
+                  <a:schemeClr val="tx1"/>
+                </a:solidFill>
+                <a:effectLst/>
+                <a:latin typeface="+mn-lt"/>
+                <a:ea typeface="+mn-ea"/>
+                <a:cs typeface="+mn-cs"/>
+              </a:rPr>
+              <a:t>αι "άνετο" και περιορίζεται μόνο από την ταχύτητα των πηγών.</a:t>
+            </a:r>
+          </a:p>
+          <a:p>
+            <a:pPr marR="0" lvl="0" fontAlgn="base">
+              <a:spcAft>
+                <a:spcPct val="0"/>
+              </a:spcAft>
+              <a:buClrTx/>
+              <a:buSzTx/>
+              <a:tabLst/>
+            </a:pPr>
+            <a:endParaRPr kumimoji="0" lang="en-US" altLang="en-US" sz="1300" b="0" i="0" u="none" strike="noStrike" kern="1200" cap="none" normalizeH="0" baseline="0" dirty="0">
+              <a:ln>
+                <a:noFill/>
+              </a:ln>
+              <a:solidFill>
+                <a:schemeClr val="tx1"/>
+              </a:solidFill>
+              <a:effectLst/>
+              <a:latin typeface="+mn-lt"/>
+              <a:ea typeface="+mn-ea"/>
+              <a:cs typeface="+mn-cs"/>
+            </a:endParaRPr>
+          </a:p>
+        </p:txBody>
+      </p:sp>
+    </p:spTree>
+    <p:extLst>
+      <p:ext uri="{BB962C8B-B14F-4D97-AF65-F5344CB8AC3E}">
+        <p14:creationId xmlns:p14="http://schemas.microsoft.com/office/powerpoint/2010/main" val="1417020233"/>
+      </p:ext>
+    </p:extLst>
+  </p:cSld>
+  <p:clrMapOvr>
+    <a:masterClrMapping/>
+  </p:clrMapOvr>
+</p:sld>
+</file>
+
+<file path=ppt/slides/slide24.xml><?xml version="1.0" encoding="utf-8"?>
+<p:sld xmlns:a="http://schemas.openxmlformats.org/drawingml/2006/main" xmlns:r="http://schemas.openxmlformats.org/officeDocument/2006/relationships" xmlns:p="http://schemas.openxmlformats.org/presentationml/2006/main">
+  <p:cSld>
+    <p:spTree>
+      <p:nvGrpSpPr>
+        <p:cNvPr id="1" name=""/>
+        <p:cNvGrpSpPr/>
+        <p:nvPr/>
+      </p:nvGrpSpPr>
+      <p:grpSpPr>
+        <a:xfrm>
+          <a:off x="0" y="0"/>
+          <a:ext cx="0" cy="0"/>
+          <a:chOff x="0" y="0"/>
+          <a:chExt cx="0" cy="0"/>
+        </a:xfrm>
+      </p:grpSpPr>
+      <p:pic>
+        <p:nvPicPr>
+          <p:cNvPr id="2" name="Picture 1" descr="A screenshot of a graph&#10;&#10;AI-generated content may be incorrect.">
+            <a:extLst>
+              <a:ext uri="{FF2B5EF4-FFF2-40B4-BE49-F238E27FC236}">
+                <a16:creationId xmlns:a16="http://schemas.microsoft.com/office/drawing/2014/main" id="{FB176907-7F05-4D96-94CB-5FBEA3305219}"/>
+              </a:ext>
+            </a:extLst>
+          </p:cNvPr>
+          <p:cNvPicPr>
+            <a:picLocks noChangeAspect="1"/>
+          </p:cNvPicPr>
+          <p:nvPr/>
+        </p:nvPicPr>
+        <p:blipFill>
+          <a:blip r:embed="rId2"/>
+          <a:stretch>
+            <a:fillRect/>
+          </a:stretch>
+        </p:blipFill>
+        <p:spPr>
+          <a:xfrm>
+            <a:off x="0" y="0"/>
+            <a:ext cx="12192000" cy="6858000"/>
+          </a:xfrm>
+          <a:prstGeom prst="rect">
+            <a:avLst/>
+          </a:prstGeom>
+        </p:spPr>
+      </p:pic>
+      <p:sp>
+        <p:nvSpPr>
+          <p:cNvPr id="3" name="TextBox 2">
+            <a:extLst>
+              <a:ext uri="{FF2B5EF4-FFF2-40B4-BE49-F238E27FC236}">
+                <a16:creationId xmlns:a16="http://schemas.microsoft.com/office/drawing/2014/main" id="{8AFF1912-A0C7-413F-BA59-B197EBAFE16C}"/>
+              </a:ext>
+            </a:extLst>
+          </p:cNvPr>
+          <p:cNvSpPr txBox="1"/>
+          <p:nvPr/>
+        </p:nvSpPr>
+        <p:spPr>
+          <a:xfrm>
+            <a:off x="0" y="142875"/>
+            <a:ext cx="1101584" cy="400110"/>
+          </a:xfrm>
+          <a:prstGeom prst="rect">
+            <a:avLst/>
+          </a:prstGeom>
+          <a:noFill/>
+        </p:spPr>
+        <p:txBody>
+          <a:bodyPr wrap="none" rtlCol="0">
+            <a:spAutoFit/>
+          </a:bodyPr>
+          <a:lstStyle/>
+          <a:p>
+            <a:r>
+              <a:rPr lang="en-US" sz="2000" b="1" dirty="0"/>
+              <a:t>10Mbps</a:t>
+            </a:r>
+          </a:p>
+        </p:txBody>
+      </p:sp>
+    </p:spTree>
+    <p:extLst>
+      <p:ext uri="{BB962C8B-B14F-4D97-AF65-F5344CB8AC3E}">
+        <p14:creationId xmlns:p14="http://schemas.microsoft.com/office/powerpoint/2010/main" val="685185041"/>
+      </p:ext>
+    </p:extLst>
+  </p:cSld>
+  <p:clrMapOvr>
+    <a:masterClrMapping/>
+  </p:clrMapOvr>
+</p:sld>
+</file>
+
+<file path=ppt/slides/slide25.xml><?xml version="1.0" encoding="utf-8"?>
+<p:sld xmlns:a="http://schemas.openxmlformats.org/drawingml/2006/main" xmlns:r="http://schemas.openxmlformats.org/officeDocument/2006/relationships" xmlns:p="http://schemas.openxmlformats.org/presentationml/2006/main">
+  <p:cSld>
+    <p:spTree>
+      <p:nvGrpSpPr>
+        <p:cNvPr id="1" name=""/>
+        <p:cNvGrpSpPr/>
+        <p:nvPr/>
+      </p:nvGrpSpPr>
+      <p:grpSpPr>
+        <a:xfrm>
+          <a:off x="0" y="0"/>
+          <a:ext cx="0" cy="0"/>
+          <a:chOff x="0" y="0"/>
+          <a:chExt cx="0" cy="0"/>
+        </a:xfrm>
+      </p:grpSpPr>
+      <p:pic>
+        <p:nvPicPr>
+          <p:cNvPr id="2" name="Picture 1" descr="A screenshot of a graph">
+            <a:extLst>
+              <a:ext uri="{FF2B5EF4-FFF2-40B4-BE49-F238E27FC236}">
+                <a16:creationId xmlns:a16="http://schemas.microsoft.com/office/drawing/2014/main" id="{C6E1BA2A-1E36-01F1-6DE1-614E7ED6AB3F}"/>
+              </a:ext>
+            </a:extLst>
+          </p:cNvPr>
+          <p:cNvPicPr>
+            <a:picLocks noChangeAspect="1"/>
+          </p:cNvPicPr>
+          <p:nvPr/>
+        </p:nvPicPr>
+        <p:blipFill>
+          <a:blip r:embed="rId2"/>
+          <a:stretch>
+            <a:fillRect/>
+          </a:stretch>
+        </p:blipFill>
+        <p:spPr>
+          <a:xfrm>
+            <a:off x="0" y="0"/>
+            <a:ext cx="12191999" cy="6858000"/>
+          </a:xfrm>
+          <a:prstGeom prst="rect">
+            <a:avLst/>
+          </a:prstGeom>
+        </p:spPr>
+      </p:pic>
+      <p:sp>
+        <p:nvSpPr>
+          <p:cNvPr id="3" name="TextBox 2">
+            <a:extLst>
+              <a:ext uri="{FF2B5EF4-FFF2-40B4-BE49-F238E27FC236}">
+                <a16:creationId xmlns:a16="http://schemas.microsoft.com/office/drawing/2014/main" id="{AB358E77-8653-30BA-225A-642CD5CF7A1B}"/>
+              </a:ext>
+            </a:extLst>
+          </p:cNvPr>
+          <p:cNvSpPr txBox="1"/>
+          <p:nvPr/>
+        </p:nvSpPr>
+        <p:spPr>
+          <a:xfrm>
+            <a:off x="0" y="152400"/>
+            <a:ext cx="1237839" cy="400110"/>
+          </a:xfrm>
+          <a:prstGeom prst="rect">
+            <a:avLst/>
+          </a:prstGeom>
+          <a:noFill/>
+        </p:spPr>
+        <p:txBody>
+          <a:bodyPr wrap="none" rtlCol="0">
+            <a:spAutoFit/>
+          </a:bodyPr>
+          <a:lstStyle/>
+          <a:p>
+            <a:r>
+              <a:rPr lang="en-US" sz="2000" b="1" dirty="0"/>
+              <a:t>100Mbps</a:t>
+            </a:r>
+          </a:p>
+        </p:txBody>
+      </p:sp>
+    </p:spTree>
+    <p:extLst>
+      <p:ext uri="{BB962C8B-B14F-4D97-AF65-F5344CB8AC3E}">
+        <p14:creationId xmlns:p14="http://schemas.microsoft.com/office/powerpoint/2010/main" val="3305677099"/>
+      </p:ext>
+    </p:extLst>
+  </p:cSld>
+  <p:clrMapOvr>
+    <a:masterClrMapping/>
+  </p:clrMapOvr>
+</p:sld>
+</file>
+
+<file path=ppt/slides/slide26.xml><?xml version="1.0" encoding="utf-8"?>
+<p:sld xmlns:a="http://schemas.openxmlformats.org/drawingml/2006/main" xmlns:r="http://schemas.openxmlformats.org/officeDocument/2006/relationships" xmlns:p="http://schemas.openxmlformats.org/presentationml/2006/main">
+  <p:cSld>
     <p:bg>
       <p:bgPr>
         <a:solidFill>
@@ -21953,7 +28009,7 @@
           <p:cNvPr id="2" name="Title 1">
             <a:extLst>
               <a:ext uri="{FF2B5EF4-FFF2-40B4-BE49-F238E27FC236}">
-                <a16:creationId xmlns:a16="http://schemas.microsoft.com/office/drawing/2014/main" id="{30EDCD59-BDCB-C874-ECEB-20050A508C6C}"/>
+                <a16:creationId xmlns:a16="http://schemas.microsoft.com/office/drawing/2014/main" id="{958822FB-AC4A-9C90-E4AB-7C5FA06DCBEC}"/>
               </a:ext>
             </a:extLst>
           </p:cNvPr>
@@ -21976,8 +28032,9 @@
           </a:bodyPr>
           <a:lstStyle/>
           <a:p>
-            <a:r>
-              <a:rPr lang="en-US" sz="4000" kern="1200" dirty="0" err="1">
+            <a:pPr algn="r"/>
+            <a:r>
+              <a:rPr lang="en-US" sz="4000" kern="1200">
                 <a:solidFill>
                   <a:srgbClr val="FFFFFF"/>
                 </a:solidFill>
@@ -21985,60 +28042,8 @@
                 <a:ea typeface="+mj-ea"/>
                 <a:cs typeface="+mj-cs"/>
               </a:rPr>
-              <a:t>Συμ</a:t>
-            </a:r>
-            <a:r>
-              <a:rPr lang="en-US" sz="4000" kern="1200" dirty="0">
-                <a:solidFill>
-                  <a:srgbClr val="FFFFFF"/>
-                </a:solidFill>
-                <a:latin typeface="+mj-lt"/>
-                <a:ea typeface="+mj-ea"/>
-                <a:cs typeface="+mj-cs"/>
-              </a:rPr>
-              <a:t>πέρασμα για τα μεγέθοι</a:t>
-            </a:r>
-            <a:r>
-              <a:rPr lang="el-GR" sz="4000" kern="1200" dirty="0">
-                <a:solidFill>
-                  <a:srgbClr val="FFFFFF"/>
-                </a:solidFill>
-                <a:latin typeface="+mj-lt"/>
-                <a:ea typeface="+mj-ea"/>
-                <a:cs typeface="+mj-cs"/>
-              </a:rPr>
-              <a:t> των</a:t>
-            </a:r>
-            <a:r>
-              <a:rPr lang="en-US" sz="4000" kern="1200" dirty="0">
-                <a:solidFill>
-                  <a:srgbClr val="FFFFFF"/>
-                </a:solidFill>
-                <a:latin typeface="+mj-lt"/>
-                <a:ea typeface="+mj-ea"/>
-                <a:cs typeface="+mj-cs"/>
-              </a:rPr>
-              <a:t> πα</a:t>
-            </a:r>
-            <a:r>
-              <a:rPr lang="en-US" sz="4000" kern="1200" dirty="0" err="1">
-                <a:solidFill>
-                  <a:srgbClr val="FFFFFF"/>
-                </a:solidFill>
-                <a:latin typeface="+mj-lt"/>
-                <a:ea typeface="+mj-ea"/>
-                <a:cs typeface="+mj-cs"/>
-              </a:rPr>
-              <a:t>κέτων</a:t>
-            </a:r>
-            <a:endParaRPr lang="en-US" sz="4000" kern="1200" dirty="0">
-              <a:solidFill>
-                <a:srgbClr val="FFFFFF"/>
-              </a:solidFill>
-              <a:latin typeface="+mj-lt"/>
-              <a:ea typeface="+mj-ea"/>
-              <a:cs typeface="+mj-cs"/>
-            </a:endParaRPr>
+              <a:t>Επίδραση Μεγέθους: Μικρά Πακέτα (100 Bytes)</a:t>
+            </a:r>
           </a:p>
         </p:txBody>
       </p:sp>
@@ -22047,7 +28052,7 @@
           <p:cNvPr id="4" name="Rectangle 1">
             <a:extLst>
               <a:ext uri="{FF2B5EF4-FFF2-40B4-BE49-F238E27FC236}">
-                <a16:creationId xmlns:a16="http://schemas.microsoft.com/office/drawing/2014/main" id="{10F70A4C-7E9E-E0BD-8092-D121DD195EB9}"/>
+                <a16:creationId xmlns:a16="http://schemas.microsoft.com/office/drawing/2014/main" id="{6A346B39-7FFF-E3C7-22AC-0BED4254DAF7}"/>
               </a:ext>
             </a:extLst>
           </p:cNvPr>
@@ -22118,51 +28123,15 @@
               <a:tabLst/>
             </a:pPr>
             <a:r>
-              <a:rPr kumimoji="0" lang="en-US" altLang="en-US" sz="2000" b="1" i="0" u="none" strike="noStrike" cap="none" normalizeH="0" baseline="0" dirty="0">
+              <a:rPr kumimoji="0" lang="en-US" altLang="en-US" sz="2000" b="1" i="0" u="none" strike="noStrike" cap="none" normalizeH="0" baseline="0">
                 <a:ln>
                   <a:noFill/>
                 </a:ln>
                 <a:effectLst/>
               </a:rPr>
-              <a:t>Ο </a:t>
-            </a:r>
-            <a:r>
-              <a:rPr kumimoji="0" lang="en-US" altLang="en-US" sz="2000" b="1" i="0" u="none" strike="noStrike" cap="none" normalizeH="0" baseline="0" dirty="0" err="1">
-                <a:ln>
-                  <a:noFill/>
-                </a:ln>
-                <a:effectLst/>
-              </a:rPr>
-              <a:t>Ρόλος</a:t>
-            </a:r>
-            <a:r>
-              <a:rPr kumimoji="0" lang="en-US" altLang="en-US" sz="2000" b="1" i="0" u="none" strike="noStrike" cap="none" normalizeH="0" baseline="0" dirty="0">
-                <a:ln>
-                  <a:noFill/>
-                </a:ln>
-                <a:effectLst/>
-              </a:rPr>
-              <a:t> </a:t>
-            </a:r>
-            <a:r>
-              <a:rPr kumimoji="0" lang="en-US" altLang="en-US" sz="2000" b="1" i="0" u="none" strike="noStrike" cap="none" normalizeH="0" baseline="0" dirty="0" err="1">
-                <a:ln>
-                  <a:noFill/>
-                </a:ln>
-                <a:effectLst/>
-              </a:rPr>
-              <a:t>του</a:t>
-            </a:r>
-            <a:r>
-              <a:rPr kumimoji="0" lang="en-US" altLang="en-US" sz="2000" b="1" i="0" u="none" strike="noStrike" cap="none" normalizeH="0" baseline="0" dirty="0">
-                <a:ln>
-                  <a:noFill/>
-                </a:ln>
-                <a:effectLst/>
-              </a:rPr>
-              <a:t> Transmission Delay:</a:t>
-            </a:r>
-            <a:endParaRPr kumimoji="0" lang="en-US" altLang="en-US" sz="2000" b="0" i="0" u="none" strike="noStrike" cap="none" normalizeH="0" baseline="0" dirty="0">
+              <a:t>Μείωση Φόρτου:</a:t>
+            </a:r>
+            <a:endParaRPr kumimoji="0" lang="en-US" altLang="en-US" sz="2000" b="0" i="0" u="none" strike="noStrike" cap="none" normalizeH="0" baseline="0">
               <a:ln>
                 <a:noFill/>
               </a:ln>
@@ -22184,31 +28153,13 @@
               <a:tabLst/>
             </a:pPr>
             <a:r>
-              <a:rPr kumimoji="0" lang="en-US" altLang="en-US" sz="2000" b="0" i="0" u="none" strike="noStrike" cap="none" normalizeH="0" baseline="0" dirty="0">
+              <a:rPr kumimoji="0" lang="en-US" altLang="en-US" sz="2000" b="0" i="0" u="none" strike="noStrike" cap="none" normalizeH="0" baseline="0">
                 <a:ln>
                   <a:noFill/>
                 </a:ln>
                 <a:effectLst/>
               </a:rPr>
-              <a:t>Τα </a:t>
-            </a:r>
-            <a:r>
-              <a:rPr kumimoji="0" lang="en-US" altLang="en-US" sz="2000" b="0" i="0" u="none" strike="noStrike" cap="none" normalizeH="0" baseline="0" dirty="0" err="1">
-                <a:ln>
-                  <a:noFill/>
-                </a:ln>
-                <a:effectLst/>
-              </a:rPr>
-              <a:t>μεγάλ</a:t>
-            </a:r>
-            <a:r>
-              <a:rPr kumimoji="0" lang="en-US" altLang="en-US" sz="2000" b="0" i="0" u="none" strike="noStrike" cap="none" normalizeH="0" baseline="0" dirty="0">
-                <a:ln>
-                  <a:noFill/>
-                </a:ln>
-                <a:effectLst/>
-              </a:rPr>
-              <a:t>α πακέτα αυξάνουν δραματικά τον χρόνο μετάδοσης.</a:t>
+              <a:t>Παρόλο που έχουμε 400 πακέτα/sec, ο όγκος είναι μικρός 100B</a:t>
             </a:r>
           </a:p>
           <a:p>
@@ -22226,40 +28177,31 @@
               <a:tabLst/>
             </a:pPr>
             <a:r>
-              <a:rPr kumimoji="0" lang="en-US" altLang="en-US" sz="2000" b="0" i="0" u="none" strike="noStrike" cap="none" normalizeH="0" baseline="0" dirty="0" err="1">
+              <a:rPr kumimoji="0" lang="en-US" altLang="en-US" sz="2000" b="0" i="0" u="none" strike="noStrike" cap="none" normalizeH="0" baseline="0">
                 <a:ln>
                   <a:noFill/>
                 </a:ln>
                 <a:effectLst/>
               </a:rPr>
-              <a:t>Αυτό</a:t>
-            </a:r>
-            <a:r>
-              <a:rPr kumimoji="0" lang="en-US" altLang="en-US" sz="2000" b="0" i="0" u="none" strike="noStrike" cap="none" normalizeH="0" baseline="0" dirty="0">
+              <a:t>Συνολικός Φόρτος: </a:t>
+            </a:r>
+            <a:r>
+              <a:rPr kumimoji="0" lang="en-US" altLang="en-US" sz="2000" b="1" i="0" u="none" strike="noStrike" cap="none" normalizeH="0" baseline="0">
                 <a:ln>
                   <a:noFill/>
                 </a:ln>
                 <a:effectLst/>
               </a:rPr>
-              <a:t> π</a:t>
-            </a:r>
-            <a:r>
-              <a:rPr kumimoji="0" lang="en-US" altLang="en-US" sz="2000" b="0" i="0" u="none" strike="noStrike" cap="none" normalizeH="0" baseline="0" dirty="0" err="1">
+              <a:t>0.32 Mbps</a:t>
+            </a:r>
+            <a:r>
+              <a:rPr kumimoji="0" lang="en-US" altLang="en-US" sz="2000" b="0" i="0" u="none" strike="noStrike" cap="none" normalizeH="0" baseline="0">
                 <a:ln>
                   <a:noFill/>
                 </a:ln>
                 <a:effectLst/>
               </a:rPr>
-              <a:t>ροκ</a:t>
-            </a:r>
-            <a:r>
-              <a:rPr kumimoji="0" lang="en-US" altLang="en-US" sz="2000" b="0" i="0" u="none" strike="noStrike" cap="none" normalizeH="0" baseline="0" dirty="0">
-                <a:ln>
-                  <a:noFill/>
-                </a:ln>
-                <a:effectLst/>
-              </a:rPr>
-              <a:t>αλεί ραγδαία συσσώρευση στην ουρά, καθώς τα νέα πακέτα φτάνουν πολύ πιο γρήγορα από ό,τι μπορεί να φύγει ένα "γίγαντας" πακέτο.</a:t>
+              <a:t>.</a:t>
             </a:r>
           </a:p>
           <a:p>
@@ -22277,42 +28219,15 @@
               <a:tabLst/>
             </a:pPr>
             <a:r>
-              <a:rPr kumimoji="0" lang="en-US" altLang="en-US" sz="2000" b="1" i="0" u="none" strike="noStrike" cap="none" normalizeH="0" baseline="0" dirty="0" err="1">
+              <a:rPr kumimoji="0" lang="en-US" altLang="en-US" sz="2000" b="1" i="0" u="none" strike="noStrike" cap="none" normalizeH="0" baseline="0">
                 <a:ln>
                   <a:noFill/>
                 </a:ln>
                 <a:effectLst/>
               </a:rPr>
-              <a:t>Γενικό</a:t>
-            </a:r>
-            <a:r>
-              <a:rPr kumimoji="0" lang="en-US" altLang="en-US" sz="2000" b="1" i="0" u="none" strike="noStrike" cap="none" normalizeH="0" baseline="0" dirty="0">
-                <a:ln>
-                  <a:noFill/>
-                </a:ln>
-                <a:effectLst/>
-              </a:rPr>
-              <a:t> </a:t>
-            </a:r>
-            <a:r>
-              <a:rPr kumimoji="0" lang="en-US" altLang="en-US" sz="2000" b="1" i="0" u="none" strike="noStrike" cap="none" normalizeH="0" baseline="0" dirty="0" err="1">
-                <a:ln>
-                  <a:noFill/>
-                </a:ln>
-                <a:effectLst/>
-              </a:rPr>
-              <a:t>Συμ</a:t>
-            </a:r>
-            <a:r>
-              <a:rPr kumimoji="0" lang="en-US" altLang="en-US" sz="2000" b="1" i="0" u="none" strike="noStrike" cap="none" normalizeH="0" baseline="0" dirty="0">
-                <a:ln>
-                  <a:noFill/>
-                </a:ln>
-                <a:effectLst/>
-              </a:rPr>
-              <a:t>πέρασμα:</a:t>
-            </a:r>
-            <a:endParaRPr kumimoji="0" lang="en-US" altLang="en-US" sz="2000" b="0" i="0" u="none" strike="noStrike" cap="none" normalizeH="0" baseline="0" dirty="0">
+              <a:t>Αποτέλεσμα στα 1 Mbps:</a:t>
+            </a:r>
+            <a:endParaRPr kumimoji="0" lang="en-US" altLang="en-US" sz="2000" b="0" i="0" u="none" strike="noStrike" cap="none" normalizeH="0" baseline="0">
               <a:ln>
                 <a:noFill/>
               </a:ln>
@@ -22334,103 +28249,13 @@
               <a:tabLst/>
             </a:pPr>
             <a:r>
-              <a:rPr kumimoji="0" lang="en-US" altLang="en-US" sz="2000" b="0" i="0" u="none" strike="noStrike" cap="none" normalizeH="0" baseline="0" dirty="0">
+              <a:rPr kumimoji="0" lang="en-US" altLang="en-US" sz="2000" b="0" i="0" u="none" strike="noStrike" cap="none" normalizeH="0" baseline="0">
                 <a:ln>
                   <a:noFill/>
                 </a:ln>
                 <a:effectLst/>
               </a:rPr>
-              <a:t>Η απ</a:t>
-            </a:r>
-            <a:r>
-              <a:rPr kumimoji="0" lang="en-US" altLang="en-US" sz="2000" b="0" i="0" u="none" strike="noStrike" cap="none" normalizeH="0" baseline="0" dirty="0" err="1">
-                <a:ln>
-                  <a:noFill/>
-                </a:ln>
-                <a:effectLst/>
-              </a:rPr>
-              <a:t>όδοση</a:t>
-            </a:r>
-            <a:r>
-              <a:rPr kumimoji="0" lang="en-US" altLang="en-US" sz="2000" b="0" i="0" u="none" strike="noStrike" cap="none" normalizeH="0" baseline="0" dirty="0">
-                <a:ln>
-                  <a:noFill/>
-                </a:ln>
-                <a:effectLst/>
-              </a:rPr>
-              <a:t> </a:t>
-            </a:r>
-            <a:r>
-              <a:rPr kumimoji="0" lang="en-US" altLang="en-US" sz="2000" b="0" i="0" u="none" strike="noStrike" cap="none" normalizeH="0" baseline="0" dirty="0" err="1">
-                <a:ln>
-                  <a:noFill/>
-                </a:ln>
-                <a:effectLst/>
-              </a:rPr>
-              <a:t>του</a:t>
-            </a:r>
-            <a:r>
-              <a:rPr kumimoji="0" lang="en-US" altLang="en-US" sz="2000" b="0" i="0" u="none" strike="noStrike" cap="none" normalizeH="0" baseline="0" dirty="0">
-                <a:ln>
-                  <a:noFill/>
-                </a:ln>
-                <a:effectLst/>
-              </a:rPr>
-              <a:t> </a:t>
-            </a:r>
-            <a:r>
-              <a:rPr kumimoji="0" lang="en-US" altLang="en-US" sz="2000" b="0" i="0" u="none" strike="noStrike" cap="none" normalizeH="0" baseline="0" dirty="0" err="1">
-                <a:ln>
-                  <a:noFill/>
-                </a:ln>
-                <a:effectLst/>
-              </a:rPr>
-              <a:t>δικτύου</a:t>
-            </a:r>
-            <a:r>
-              <a:rPr kumimoji="0" lang="en-US" altLang="en-US" sz="2000" b="0" i="0" u="none" strike="noStrike" cap="none" normalizeH="0" baseline="0" dirty="0">
-                <a:ln>
-                  <a:noFill/>
-                </a:ln>
-                <a:effectLst/>
-              </a:rPr>
-              <a:t> </a:t>
-            </a:r>
-            <a:r>
-              <a:rPr kumimoji="0" lang="en-US" altLang="en-US" sz="2000" b="0" i="0" u="none" strike="noStrike" cap="none" normalizeH="0" baseline="0" dirty="0" err="1">
-                <a:ln>
-                  <a:noFill/>
-                </a:ln>
-                <a:effectLst/>
-              </a:rPr>
-              <a:t>δεν</a:t>
-            </a:r>
-            <a:r>
-              <a:rPr kumimoji="0" lang="en-US" altLang="en-US" sz="2000" b="0" i="0" u="none" strike="noStrike" cap="none" normalizeH="0" baseline="0" dirty="0">
-                <a:ln>
-                  <a:noFill/>
-                </a:ln>
-                <a:effectLst/>
-              </a:rPr>
-              <a:t> </a:t>
-            </a:r>
-            <a:r>
-              <a:rPr kumimoji="0" lang="en-US" altLang="en-US" sz="2000" b="0" i="0" u="none" strike="noStrike" cap="none" normalizeH="0" baseline="0" dirty="0" err="1">
-                <a:ln>
-                  <a:noFill/>
-                </a:ln>
-                <a:effectLst/>
-              </a:rPr>
-              <a:t>εξ</a:t>
-            </a:r>
-            <a:r>
-              <a:rPr kumimoji="0" lang="en-US" altLang="en-US" sz="2000" b="0" i="0" u="none" strike="noStrike" cap="none" normalizeH="0" baseline="0" dirty="0">
-                <a:ln>
-                  <a:noFill/>
-                </a:ln>
-                <a:effectLst/>
-              </a:rPr>
-              <a:t>αρτάται μόνο από το πόσα πακέτα στέλνουμε (pkts/s), αλλά και από το πόσο μεγάλα είναι (Bytes).</a:t>
+              <a:t>Το δίκτυο "ανασαίνει" ξανά.</a:t>
             </a:r>
           </a:p>
           <a:p>
@@ -22448,40 +28273,40 @@
               <a:tabLst/>
             </a:pPr>
             <a:r>
-              <a:rPr kumimoji="0" lang="en-US" altLang="en-US" sz="2000" b="0" i="0" u="none" strike="noStrike" cap="none" normalizeH="0" baseline="0" dirty="0" err="1">
+              <a:rPr kumimoji="0" lang="en-US" altLang="en-US" sz="2000" b="1" i="0" u="none" strike="noStrike" cap="none" normalizeH="0" baseline="0">
                 <a:ln>
                   <a:noFill/>
                 </a:ln>
                 <a:effectLst/>
               </a:rPr>
-              <a:t>Μικρά</a:t>
-            </a:r>
-            <a:r>
-              <a:rPr kumimoji="0" lang="en-US" altLang="en-US" sz="2000" b="0" i="0" u="none" strike="noStrike" cap="none" normalizeH="0" baseline="0" dirty="0">
+              <a:t>Packet Loss:</a:t>
+            </a:r>
+            <a:r>
+              <a:rPr kumimoji="0" lang="en-US" altLang="en-US" sz="2000" b="0" i="0" u="none" strike="noStrike" cap="none" normalizeH="0" baseline="0">
                 <a:ln>
                   <a:noFill/>
                 </a:ln>
                 <a:effectLst/>
               </a:rPr>
-              <a:t> πα</a:t>
-            </a:r>
-            <a:r>
-              <a:rPr kumimoji="0" lang="en-US" altLang="en-US" sz="2000" b="0" i="0" u="none" strike="noStrike" cap="none" normalizeH="0" baseline="0" dirty="0" err="1">
+              <a:t> </a:t>
+            </a:r>
+            <a:r>
+              <a:rPr kumimoji="0" lang="en-US" altLang="en-US" sz="2000" b="1" i="0" u="none" strike="noStrike" cap="none" normalizeH="0" baseline="0">
                 <a:ln>
                   <a:noFill/>
                 </a:ln>
                 <a:effectLst/>
               </a:rPr>
-              <a:t>κέτ</a:t>
-            </a:r>
-            <a:r>
-              <a:rPr kumimoji="0" lang="en-US" altLang="en-US" sz="2000" b="0" i="0" u="none" strike="noStrike" cap="none" normalizeH="0" baseline="0" dirty="0">
+              <a:t>0%</a:t>
+            </a:r>
+            <a:r>
+              <a:rPr kumimoji="0" lang="en-US" altLang="en-US" sz="2000" b="0" i="0" u="none" strike="noStrike" cap="none" normalizeH="0" baseline="0">
                 <a:ln>
                   <a:noFill/>
                 </a:ln>
                 <a:effectLst/>
               </a:rPr>
-              <a:t>α = Χαμηλό Delay.</a:t>
+              <a:t>.</a:t>
             </a:r>
           </a:p>
           <a:p>
@@ -22499,22 +28324,22 @@
               <a:tabLst/>
             </a:pPr>
             <a:r>
-              <a:rPr kumimoji="0" lang="en-US" altLang="en-US" sz="2000" b="0" i="0" u="none" strike="noStrike" cap="none" normalizeH="0" baseline="0" dirty="0" err="1">
+              <a:rPr kumimoji="0" lang="en-US" altLang="en-US" sz="2000" b="1" i="0" u="none" strike="noStrike" cap="none" normalizeH="0" baseline="0">
                 <a:ln>
                   <a:noFill/>
                 </a:ln>
                 <a:effectLst/>
               </a:rPr>
-              <a:t>Μεγάλ</a:t>
-            </a:r>
-            <a:r>
-              <a:rPr kumimoji="0" lang="en-US" altLang="en-US" sz="2000" b="0" i="0" u="none" strike="noStrike" cap="none" normalizeH="0" baseline="0" dirty="0">
+              <a:t>Queue:</a:t>
+            </a:r>
+            <a:r>
+              <a:rPr kumimoji="0" lang="en-US" altLang="en-US" sz="2000" b="0" i="0" u="none" strike="noStrike" cap="none" normalizeH="0" baseline="0">
                 <a:ln>
                   <a:noFill/>
                 </a:ln>
                 <a:effectLst/>
               </a:rPr>
-              <a:t>α πακέτα σε αργό δίκτυο = Καταστροφική Συμφόρηση.</a:t>
+              <a:t> Στιγμιαία spikes που αδειάζουν αμέσως.</a:t>
             </a:r>
           </a:p>
           <a:p>
@@ -22531,19 +28356,31 @@
               <a:buChar char="•"/>
               <a:tabLst/>
             </a:pPr>
-            <a:endParaRPr kumimoji="0" lang="en-US" altLang="en-US" sz="2000" b="0" i="0" u="none" strike="noStrike" cap="none" normalizeH="0" baseline="0" dirty="0">
-              <a:ln>
-                <a:noFill/>
-              </a:ln>
-              <a:effectLst/>
-            </a:endParaRPr>
+            <a:r>
+              <a:rPr kumimoji="0" lang="en-US" altLang="en-US" sz="2000" b="1" i="0" u="none" strike="noStrike" cap="none" normalizeH="0" baseline="0">
+                <a:ln>
+                  <a:noFill/>
+                </a:ln>
+                <a:effectLst/>
+              </a:rPr>
+              <a:t>Συμπέρασμα:</a:t>
+            </a:r>
+            <a:r>
+              <a:rPr kumimoji="0" lang="en-US" altLang="en-US" sz="2000" b="0" i="0" u="none" strike="noStrike" cap="none" normalizeH="0" baseline="0">
+                <a:ln>
+                  <a:noFill/>
+                </a:ln>
+                <a:effectLst/>
+              </a:rPr>
+              <a:t> Μικρότερα πακέτα = Μεγαλύτερη αντοχή σε traffic storms.</a:t>
+            </a:r>
           </a:p>
         </p:txBody>
       </p:sp>
     </p:spTree>
     <p:extLst>
       <p:ext uri="{BB962C8B-B14F-4D97-AF65-F5344CB8AC3E}">
-        <p14:creationId xmlns:p14="http://schemas.microsoft.com/office/powerpoint/2010/main" val="3550188407"/>
+        <p14:creationId xmlns:p14="http://schemas.microsoft.com/office/powerpoint/2010/main" val="3877755158"/>
       </p:ext>
     </p:extLst>
   </p:cSld>
@@ -22553,7 +28390,1398 @@
 </p:sld>
 </file>
 
-<file path=ppt/slides/slide21.xml><?xml version="1.0" encoding="utf-8"?>
+<file path=ppt/slides/slide27.xml><?xml version="1.0" encoding="utf-8"?>
+<p:sld xmlns:a="http://schemas.openxmlformats.org/drawingml/2006/main" xmlns:r="http://schemas.openxmlformats.org/officeDocument/2006/relationships" xmlns:p="http://schemas.openxmlformats.org/presentationml/2006/main">
+  <p:cSld>
+    <p:spTree>
+      <p:nvGrpSpPr>
+        <p:cNvPr id="1" name=""/>
+        <p:cNvGrpSpPr/>
+        <p:nvPr/>
+      </p:nvGrpSpPr>
+      <p:grpSpPr>
+        <a:xfrm>
+          <a:off x="0" y="0"/>
+          <a:ext cx="0" cy="0"/>
+          <a:chOff x="0" y="0"/>
+          <a:chExt cx="0" cy="0"/>
+        </a:xfrm>
+      </p:grpSpPr>
+      <p:pic>
+        <p:nvPicPr>
+          <p:cNvPr id="2" name="Picture 1" descr="A screenshot of a graph">
+            <a:extLst>
+              <a:ext uri="{FF2B5EF4-FFF2-40B4-BE49-F238E27FC236}">
+                <a16:creationId xmlns:a16="http://schemas.microsoft.com/office/drawing/2014/main" id="{C6C9C20D-6300-080A-44F6-8342DF6391A7}"/>
+              </a:ext>
+            </a:extLst>
+          </p:cNvPr>
+          <p:cNvPicPr>
+            <a:picLocks noChangeAspect="1"/>
+          </p:cNvPicPr>
+          <p:nvPr/>
+        </p:nvPicPr>
+        <p:blipFill>
+          <a:blip r:embed="rId2"/>
+          <a:stretch>
+            <a:fillRect/>
+          </a:stretch>
+        </p:blipFill>
+        <p:spPr>
+          <a:xfrm>
+            <a:off x="0" y="0"/>
+            <a:ext cx="12192000" cy="6857999"/>
+          </a:xfrm>
+          <a:prstGeom prst="rect">
+            <a:avLst/>
+          </a:prstGeom>
+        </p:spPr>
+      </p:pic>
+      <p:sp>
+        <p:nvSpPr>
+          <p:cNvPr id="3" name="TextBox 2">
+            <a:extLst>
+              <a:ext uri="{FF2B5EF4-FFF2-40B4-BE49-F238E27FC236}">
+                <a16:creationId xmlns:a16="http://schemas.microsoft.com/office/drawing/2014/main" id="{B4487F4A-7AE8-564B-FE5B-E84B1505441A}"/>
+              </a:ext>
+            </a:extLst>
+          </p:cNvPr>
+          <p:cNvSpPr txBox="1"/>
+          <p:nvPr/>
+        </p:nvSpPr>
+        <p:spPr>
+          <a:xfrm>
+            <a:off x="0" y="171450"/>
+            <a:ext cx="1242071" cy="400110"/>
+          </a:xfrm>
+          <a:prstGeom prst="rect">
+            <a:avLst/>
+          </a:prstGeom>
+          <a:noFill/>
+        </p:spPr>
+        <p:txBody>
+          <a:bodyPr wrap="none" rtlCol="0">
+            <a:spAutoFit/>
+          </a:bodyPr>
+          <a:lstStyle/>
+          <a:p>
+            <a:r>
+              <a:rPr lang="en-US" sz="2000" b="1" dirty="0"/>
+              <a:t>100Bytes</a:t>
+            </a:r>
+          </a:p>
+        </p:txBody>
+      </p:sp>
+    </p:spTree>
+    <p:extLst>
+      <p:ext uri="{BB962C8B-B14F-4D97-AF65-F5344CB8AC3E}">
+        <p14:creationId xmlns:p14="http://schemas.microsoft.com/office/powerpoint/2010/main" val="3512999743"/>
+      </p:ext>
+    </p:extLst>
+  </p:cSld>
+  <p:clrMapOvr>
+    <a:masterClrMapping/>
+  </p:clrMapOvr>
+</p:sld>
+</file>
+
+<file path=ppt/slides/slide28.xml><?xml version="1.0" encoding="utf-8"?>
+<p:sld xmlns:a="http://schemas.openxmlformats.org/drawingml/2006/main" xmlns:r="http://schemas.openxmlformats.org/officeDocument/2006/relationships" xmlns:p="http://schemas.openxmlformats.org/presentationml/2006/main">
+  <p:cSld>
+    <p:bg>
+      <p:bgPr>
+        <a:solidFill>
+          <a:schemeClr val="bg1"/>
+        </a:solidFill>
+        <a:effectLst/>
+      </p:bgPr>
+    </p:bg>
+    <p:spTree>
+      <p:nvGrpSpPr>
+        <p:cNvPr id="1" name=""/>
+        <p:cNvGrpSpPr/>
+        <p:nvPr/>
+      </p:nvGrpSpPr>
+      <p:grpSpPr>
+        <a:xfrm>
+          <a:off x="0" y="0"/>
+          <a:ext cx="0" cy="0"/>
+          <a:chOff x="0" y="0"/>
+          <a:chExt cx="0" cy="0"/>
+        </a:xfrm>
+      </p:grpSpPr>
+      <p:sp useBgFill="1">
+        <p:nvSpPr>
+          <p:cNvPr id="8" name="Rectangle 7">
+            <a:extLst>
+              <a:ext uri="{FF2B5EF4-FFF2-40B4-BE49-F238E27FC236}">
+                <a16:creationId xmlns:a16="http://schemas.microsoft.com/office/drawing/2014/main" id="{09588DA8-065E-4F6F-8EFD-43104AB2E0CF}"/>
+              </a:ext>
+              <a:ext uri="{C183D7F6-B498-43B3-948B-1728B52AA6E4}">
+                <adec:decorative xmlns:adec="http://schemas.microsoft.com/office/drawing/2017/decorative" val="1"/>
+              </a:ext>
+            </a:extLst>
+          </p:cNvPr>
+          <p:cNvSpPr>
+            <a:spLocks noGrp="1" noRot="1" noChangeAspect="1" noMove="1" noResize="1" noEditPoints="1" noAdjustHandles="1" noChangeArrowheads="1" noChangeShapeType="1" noTextEdit="1"/>
+          </p:cNvSpPr>
+          <p:nvPr>
+            <p:extLst>
+              <p:ext uri="{386F3935-93C4-4BCD-93E2-E3B085C9AB24}">
+                <p16:designElem xmlns:p16="http://schemas.microsoft.com/office/powerpoint/2015/main" val="1"/>
+              </p:ext>
+            </p:extLst>
+          </p:nvPr>
+        </p:nvSpPr>
+        <p:spPr>
+          <a:xfrm>
+            <a:off x="0" y="0"/>
+            <a:ext cx="12192000" cy="6858000"/>
+          </a:xfrm>
+          <a:prstGeom prst="rect">
+            <a:avLst/>
+          </a:prstGeom>
+          <a:ln w="12700" cap="flat" cmpd="sng" algn="ctr">
+            <a:noFill/>
+            <a:prstDash val="solid"/>
+            <a:miter lim="800000"/>
+          </a:ln>
+          <a:effectLst/>
+          <a:extLst>
+            <a:ext uri="{91240B29-F687-4F45-9708-019B960494DF}">
+              <a14:hiddenLine xmlns:a14="http://schemas.microsoft.com/office/drawing/2010/main" w="12700" cap="flat" cmpd="sng" algn="ctr">
+                <a:solidFill>
+                  <a:schemeClr val="accent1">
+                    <a:shade val="50000"/>
+                  </a:schemeClr>
+                </a:solidFill>
+                <a:prstDash val="solid"/>
+                <a:miter lim="800000"/>
+              </a14:hiddenLine>
+            </a:ext>
+          </a:extLst>
+        </p:spPr>
+        <p:style>
+          <a:lnRef idx="2">
+            <a:schemeClr val="accent1">
+              <a:shade val="50000"/>
+            </a:schemeClr>
+          </a:lnRef>
+          <a:fillRef idx="1">
+            <a:schemeClr val="accent1"/>
+          </a:fillRef>
+          <a:effectRef idx="0">
+            <a:schemeClr val="accent1"/>
+          </a:effectRef>
+          <a:fontRef idx="minor">
+            <a:schemeClr val="lt1"/>
+          </a:fontRef>
+        </p:style>
+        <p:txBody>
+          <a:bodyPr rtlCol="0" anchor="ctr"/>
+          <a:lstStyle/>
+          <a:p>
+            <a:pPr algn="ctr"/>
+            <a:endParaRPr lang="en-US"/>
+          </a:p>
+        </p:txBody>
+      </p:sp>
+      <p:sp useBgFill="1">
+        <p:nvSpPr>
+          <p:cNvPr id="10" name="Rectangle 9">
+            <a:extLst>
+              <a:ext uri="{FF2B5EF4-FFF2-40B4-BE49-F238E27FC236}">
+                <a16:creationId xmlns:a16="http://schemas.microsoft.com/office/drawing/2014/main" id="{C4285719-470E-454C-AF62-8323075F1F5B}"/>
+              </a:ext>
+              <a:ext uri="{C183D7F6-B498-43B3-948B-1728B52AA6E4}">
+                <adec:decorative xmlns:adec="http://schemas.microsoft.com/office/drawing/2017/decorative" val="1"/>
+              </a:ext>
+            </a:extLst>
+          </p:cNvPr>
+          <p:cNvSpPr>
+            <a:spLocks noGrp="1" noRot="1" noChangeAspect="1" noMove="1" noResize="1" noEditPoints="1" noAdjustHandles="1" noChangeArrowheads="1" noChangeShapeType="1" noTextEdit="1"/>
+          </p:cNvSpPr>
+          <p:nvPr>
+            <p:extLst>
+              <p:ext uri="{386F3935-93C4-4BCD-93E2-E3B085C9AB24}">
+                <p16:designElem xmlns:p16="http://schemas.microsoft.com/office/powerpoint/2015/main" val="1"/>
+              </p:ext>
+            </p:extLst>
+          </p:nvPr>
+        </p:nvSpPr>
+        <p:spPr>
+          <a:xfrm>
+            <a:off x="0" y="0"/>
+            <a:ext cx="12188952" cy="6858000"/>
+          </a:xfrm>
+          <a:prstGeom prst="rect">
+            <a:avLst/>
+          </a:prstGeom>
+          <a:ln w="12700" cap="flat" cmpd="sng" algn="ctr">
+            <a:noFill/>
+            <a:prstDash val="solid"/>
+            <a:miter lim="800000"/>
+          </a:ln>
+          <a:effectLst/>
+          <a:extLst>
+            <a:ext uri="{91240B29-F687-4F45-9708-019B960494DF}">
+              <a14:hiddenLine xmlns:a14="http://schemas.microsoft.com/office/drawing/2010/main" w="12700" cap="flat" cmpd="sng" algn="ctr">
+                <a:solidFill>
+                  <a:schemeClr val="accent1">
+                    <a:shade val="50000"/>
+                  </a:schemeClr>
+                </a:solidFill>
+                <a:prstDash val="solid"/>
+                <a:miter lim="800000"/>
+              </a14:hiddenLine>
+            </a:ext>
+          </a:extLst>
+        </p:spPr>
+        <p:style>
+          <a:lnRef idx="2">
+            <a:schemeClr val="accent1">
+              <a:shade val="50000"/>
+            </a:schemeClr>
+          </a:lnRef>
+          <a:fillRef idx="1">
+            <a:schemeClr val="accent1"/>
+          </a:fillRef>
+          <a:effectRef idx="0">
+            <a:schemeClr val="accent1"/>
+          </a:effectRef>
+          <a:fontRef idx="minor">
+            <a:schemeClr val="lt1"/>
+          </a:fontRef>
+        </p:style>
+        <p:txBody>
+          <a:bodyPr rtlCol="0" anchor="ctr"/>
+          <a:lstStyle/>
+          <a:p>
+            <a:pPr algn="ctr"/>
+            <a:endParaRPr lang="en-US"/>
+          </a:p>
+        </p:txBody>
+      </p:sp>
+      <p:sp>
+        <p:nvSpPr>
+          <p:cNvPr id="12" name="Rectangle 11">
+            <a:extLst>
+              <a:ext uri="{FF2B5EF4-FFF2-40B4-BE49-F238E27FC236}">
+                <a16:creationId xmlns:a16="http://schemas.microsoft.com/office/drawing/2014/main" id="{CD9FE4EF-C4D8-49A0-B2FF-81D8DB7D8A24}"/>
+              </a:ext>
+              <a:ext uri="{C183D7F6-B498-43B3-948B-1728B52AA6E4}">
+                <adec:decorative xmlns:adec="http://schemas.microsoft.com/office/drawing/2017/decorative" val="1"/>
+              </a:ext>
+            </a:extLst>
+          </p:cNvPr>
+          <p:cNvSpPr>
+            <a:spLocks noGrp="1" noRot="1" noChangeAspect="1" noMove="1" noResize="1" noEditPoints="1" noAdjustHandles="1" noChangeArrowheads="1" noChangeShapeType="1" noTextEdit="1"/>
+          </p:cNvSpPr>
+          <p:nvPr>
+            <p:extLst>
+              <p:ext uri="{386F3935-93C4-4BCD-93E2-E3B085C9AB24}">
+                <p16:designElem xmlns:p16="http://schemas.microsoft.com/office/powerpoint/2015/main" val="1"/>
+              </p:ext>
+            </p:extLst>
+          </p:nvPr>
+        </p:nvSpPr>
+        <p:spPr>
+          <a:xfrm rot="5400000" flipH="1">
+            <a:off x="-1410084" y="1410082"/>
+            <a:ext cx="6858000" cy="4037836"/>
+          </a:xfrm>
+          <a:prstGeom prst="rect">
+            <a:avLst/>
+          </a:prstGeom>
+          <a:gradFill>
+            <a:gsLst>
+              <a:gs pos="8000">
+                <a:srgbClr val="000000"/>
+              </a:gs>
+              <a:gs pos="100000">
+                <a:schemeClr val="accent1">
+                  <a:lumMod val="75000"/>
+                </a:schemeClr>
+              </a:gs>
+            </a:gsLst>
+            <a:lin ang="3000000" scaled="0"/>
+          </a:gradFill>
+          <a:ln>
+            <a:noFill/>
+          </a:ln>
+        </p:spPr>
+        <p:style>
+          <a:lnRef idx="2">
+            <a:schemeClr val="accent1">
+              <a:shade val="50000"/>
+            </a:schemeClr>
+          </a:lnRef>
+          <a:fillRef idx="1">
+            <a:schemeClr val="accent1"/>
+          </a:fillRef>
+          <a:effectRef idx="0">
+            <a:schemeClr val="accent1"/>
+          </a:effectRef>
+          <a:fontRef idx="minor">
+            <a:schemeClr val="lt1"/>
+          </a:fontRef>
+        </p:style>
+        <p:txBody>
+          <a:bodyPr rtlCol="0" anchor="ctr"/>
+          <a:lstStyle/>
+          <a:p>
+            <a:pPr algn="ctr"/>
+            <a:endParaRPr lang="en-US"/>
+          </a:p>
+        </p:txBody>
+      </p:sp>
+      <p:sp>
+        <p:nvSpPr>
+          <p:cNvPr id="14" name="Rectangle 13">
+            <a:extLst>
+              <a:ext uri="{FF2B5EF4-FFF2-40B4-BE49-F238E27FC236}">
+                <a16:creationId xmlns:a16="http://schemas.microsoft.com/office/drawing/2014/main" id="{4300840D-0A0B-4512-BACA-B439D5B9C57C}"/>
+              </a:ext>
+              <a:ext uri="{C183D7F6-B498-43B3-948B-1728B52AA6E4}">
+                <adec:decorative xmlns:adec="http://schemas.microsoft.com/office/drawing/2017/decorative" val="1"/>
+              </a:ext>
+            </a:extLst>
+          </p:cNvPr>
+          <p:cNvSpPr>
+            <a:spLocks noGrp="1" noRot="1" noChangeAspect="1" noMove="1" noResize="1" noEditPoints="1" noAdjustHandles="1" noChangeArrowheads="1" noChangeShapeType="1" noTextEdit="1"/>
+          </p:cNvSpPr>
+          <p:nvPr>
+            <p:extLst>
+              <p:ext uri="{386F3935-93C4-4BCD-93E2-E3B085C9AB24}">
+                <p16:designElem xmlns:p16="http://schemas.microsoft.com/office/powerpoint/2015/main" val="1"/>
+              </p:ext>
+            </p:extLst>
+          </p:nvPr>
+        </p:nvSpPr>
+        <p:spPr>
+          <a:xfrm rot="5400000" flipH="1">
+            <a:off x="-1410085" y="1420219"/>
+            <a:ext cx="6857999" cy="4037839"/>
+          </a:xfrm>
+          <a:prstGeom prst="rect">
+            <a:avLst/>
+          </a:prstGeom>
+          <a:gradFill>
+            <a:gsLst>
+              <a:gs pos="0">
+                <a:srgbClr val="000000">
+                  <a:alpha val="0"/>
+                </a:srgbClr>
+              </a:gs>
+              <a:gs pos="99000">
+                <a:schemeClr val="accent1">
+                  <a:alpha val="46000"/>
+                </a:schemeClr>
+              </a:gs>
+            </a:gsLst>
+            <a:lin ang="1800000" scaled="0"/>
+          </a:gradFill>
+          <a:ln>
+            <a:noFill/>
+          </a:ln>
+        </p:spPr>
+        <p:style>
+          <a:lnRef idx="2">
+            <a:schemeClr val="accent1">
+              <a:shade val="50000"/>
+            </a:schemeClr>
+          </a:lnRef>
+          <a:fillRef idx="1">
+            <a:schemeClr val="accent1"/>
+          </a:fillRef>
+          <a:effectRef idx="0">
+            <a:schemeClr val="accent1"/>
+          </a:effectRef>
+          <a:fontRef idx="minor">
+            <a:schemeClr val="lt1"/>
+          </a:fontRef>
+        </p:style>
+        <p:txBody>
+          <a:bodyPr rtlCol="0" anchor="ctr"/>
+          <a:lstStyle/>
+          <a:p>
+            <a:pPr algn="ctr"/>
+            <a:endParaRPr lang="en-US"/>
+          </a:p>
+        </p:txBody>
+      </p:sp>
+      <p:sp>
+        <p:nvSpPr>
+          <p:cNvPr id="16" name="Rectangle 15">
+            <a:extLst>
+              <a:ext uri="{FF2B5EF4-FFF2-40B4-BE49-F238E27FC236}">
+                <a16:creationId xmlns:a16="http://schemas.microsoft.com/office/drawing/2014/main" id="{D2B78728-A580-49A7-84F9-6EF6F583ADE0}"/>
+              </a:ext>
+              <a:ext uri="{C183D7F6-B498-43B3-948B-1728B52AA6E4}">
+                <adec:decorative xmlns:adec="http://schemas.microsoft.com/office/drawing/2017/decorative" val="1"/>
+              </a:ext>
+            </a:extLst>
+          </p:cNvPr>
+          <p:cNvSpPr>
+            <a:spLocks noGrp="1" noRot="1" noChangeAspect="1" noMove="1" noResize="1" noEditPoints="1" noAdjustHandles="1" noChangeArrowheads="1" noChangeShapeType="1" noTextEdit="1"/>
+          </p:cNvSpPr>
+          <p:nvPr>
+            <p:extLst>
+              <p:ext uri="{386F3935-93C4-4BCD-93E2-E3B085C9AB24}">
+                <p16:designElem xmlns:p16="http://schemas.microsoft.com/office/powerpoint/2015/main" val="1"/>
+              </p:ext>
+            </p:extLst>
+          </p:nvPr>
+        </p:nvSpPr>
+        <p:spPr>
+          <a:xfrm rot="5400000" flipH="1">
+            <a:off x="767923" y="3588085"/>
+            <a:ext cx="2501979" cy="4037841"/>
+          </a:xfrm>
+          <a:prstGeom prst="rect">
+            <a:avLst/>
+          </a:prstGeom>
+          <a:gradFill>
+            <a:gsLst>
+              <a:gs pos="2000">
+                <a:schemeClr val="accent1">
+                  <a:alpha val="29000"/>
+                </a:schemeClr>
+              </a:gs>
+              <a:gs pos="100000">
+                <a:srgbClr val="000000">
+                  <a:alpha val="30000"/>
+                </a:srgbClr>
+              </a:gs>
+            </a:gsLst>
+            <a:lin ang="7800000" scaled="0"/>
+          </a:gradFill>
+          <a:ln>
+            <a:noFill/>
+          </a:ln>
+        </p:spPr>
+        <p:style>
+          <a:lnRef idx="2">
+            <a:schemeClr val="accent1">
+              <a:shade val="50000"/>
+            </a:schemeClr>
+          </a:lnRef>
+          <a:fillRef idx="1">
+            <a:schemeClr val="accent1"/>
+          </a:fillRef>
+          <a:effectRef idx="0">
+            <a:schemeClr val="accent1"/>
+          </a:effectRef>
+          <a:fontRef idx="minor">
+            <a:schemeClr val="lt1"/>
+          </a:fontRef>
+        </p:style>
+        <p:txBody>
+          <a:bodyPr rtlCol="0" anchor="ctr"/>
+          <a:lstStyle/>
+          <a:p>
+            <a:pPr algn="ctr"/>
+            <a:endParaRPr lang="en-US" dirty="0"/>
+          </a:p>
+        </p:txBody>
+      </p:sp>
+      <p:sp>
+        <p:nvSpPr>
+          <p:cNvPr id="18" name="Freeform: Shape 17">
+            <a:extLst>
+              <a:ext uri="{FF2B5EF4-FFF2-40B4-BE49-F238E27FC236}">
+                <a16:creationId xmlns:a16="http://schemas.microsoft.com/office/drawing/2014/main" id="{38FAA1A1-D861-433F-88FA-1E9D6FD31D11}"/>
+              </a:ext>
+              <a:ext uri="{C183D7F6-B498-43B3-948B-1728B52AA6E4}">
+                <adec:decorative xmlns:adec="http://schemas.microsoft.com/office/drawing/2017/decorative" val="1"/>
+              </a:ext>
+            </a:extLst>
+          </p:cNvPr>
+          <p:cNvSpPr>
+            <a:spLocks noGrp="1" noRot="1" noChangeAspect="1" noMove="1" noResize="1" noEditPoints="1" noAdjustHandles="1" noChangeArrowheads="1" noChangeShapeType="1" noTextEdit="1"/>
+          </p:cNvSpPr>
+          <p:nvPr>
+            <p:extLst>
+              <p:ext uri="{386F3935-93C4-4BCD-93E2-E3B085C9AB24}">
+                <p16:designElem xmlns:p16="http://schemas.microsoft.com/office/powerpoint/2015/main" val="1"/>
+              </p:ext>
+            </p:extLst>
+          </p:nvPr>
+        </p:nvSpPr>
+        <p:spPr>
+          <a:xfrm rot="20635413">
+            <a:off x="-501737" y="969718"/>
+            <a:ext cx="3900357" cy="4178958"/>
+          </a:xfrm>
+          <a:custGeom>
+            <a:avLst/>
+            <a:gdLst>
+              <a:gd name="connsiteX0" fmla="*/ 2432225 w 3900357"/>
+              <a:gd name="connsiteY0" fmla="*/ 93939 h 4178958"/>
+              <a:gd name="connsiteX1" fmla="*/ 3900357 w 3900357"/>
+              <a:gd name="connsiteY1" fmla="*/ 2089479 h 4178958"/>
+              <a:gd name="connsiteX2" fmla="*/ 1810878 w 3900357"/>
+              <a:gd name="connsiteY2" fmla="*/ 4178958 h 4178958"/>
+              <a:gd name="connsiteX3" fmla="*/ 78249 w 3900357"/>
+              <a:gd name="connsiteY3" fmla="*/ 3257727 h 4178958"/>
+              <a:gd name="connsiteX4" fmla="*/ 0 w 3900357"/>
+              <a:gd name="connsiteY4" fmla="*/ 3128923 h 4178958"/>
+              <a:gd name="connsiteX5" fmla="*/ 831324 w 3900357"/>
+              <a:gd name="connsiteY5" fmla="*/ 244281 h 4178958"/>
+              <a:gd name="connsiteX6" fmla="*/ 997559 w 3900357"/>
+              <a:gd name="connsiteY6" fmla="*/ 164202 h 4178958"/>
+              <a:gd name="connsiteX7" fmla="*/ 1810878 w 3900357"/>
+              <a:gd name="connsiteY7" fmla="*/ 0 h 4178958"/>
+              <a:gd name="connsiteX8" fmla="*/ 2432225 w 3900357"/>
+              <a:gd name="connsiteY8" fmla="*/ 93939 h 4178958"/>
+            </a:gdLst>
+            <a:ahLst/>
+            <a:cxnLst>
+              <a:cxn ang="0">
+                <a:pos x="connsiteX0" y="connsiteY0"/>
+              </a:cxn>
+              <a:cxn ang="0">
+                <a:pos x="connsiteX1" y="connsiteY1"/>
+              </a:cxn>
+              <a:cxn ang="0">
+                <a:pos x="connsiteX2" y="connsiteY2"/>
+              </a:cxn>
+              <a:cxn ang="0">
+                <a:pos x="connsiteX3" y="connsiteY3"/>
+              </a:cxn>
+              <a:cxn ang="0">
+                <a:pos x="connsiteX4" y="connsiteY4"/>
+              </a:cxn>
+              <a:cxn ang="0">
+                <a:pos x="connsiteX5" y="connsiteY5"/>
+              </a:cxn>
+              <a:cxn ang="0">
+                <a:pos x="connsiteX6" y="connsiteY6"/>
+              </a:cxn>
+              <a:cxn ang="0">
+                <a:pos x="connsiteX7" y="connsiteY7"/>
+              </a:cxn>
+              <a:cxn ang="0">
+                <a:pos x="connsiteX8" y="connsiteY8"/>
+              </a:cxn>
+            </a:cxnLst>
+            <a:rect l="l" t="t" r="r" b="b"/>
+            <a:pathLst>
+              <a:path w="3900357" h="4178958">
+                <a:moveTo>
+                  <a:pt x="2432225" y="93939"/>
+                </a:moveTo>
+                <a:cubicBezTo>
+                  <a:pt x="3282786" y="358491"/>
+                  <a:pt x="3900357" y="1151865"/>
+                  <a:pt x="3900357" y="2089479"/>
+                </a:cubicBezTo>
+                <a:cubicBezTo>
+                  <a:pt x="3900357" y="3243466"/>
+                  <a:pt x="2964865" y="4178958"/>
+                  <a:pt x="1810878" y="4178958"/>
+                </a:cubicBezTo>
+                <a:cubicBezTo>
+                  <a:pt x="1089636" y="4178958"/>
+                  <a:pt x="453744" y="3813531"/>
+                  <a:pt x="78249" y="3257727"/>
+                </a:cubicBezTo>
+                <a:lnTo>
+                  <a:pt x="0" y="3128923"/>
+                </a:lnTo>
+                <a:lnTo>
+                  <a:pt x="831324" y="244281"/>
+                </a:lnTo>
+                <a:lnTo>
+                  <a:pt x="997559" y="164202"/>
+                </a:lnTo>
+                <a:cubicBezTo>
+                  <a:pt x="1247540" y="58468"/>
+                  <a:pt x="1522381" y="0"/>
+                  <a:pt x="1810878" y="0"/>
+                </a:cubicBezTo>
+                <a:cubicBezTo>
+                  <a:pt x="2027251" y="0"/>
+                  <a:pt x="2235942" y="32888"/>
+                  <a:pt x="2432225" y="93939"/>
+                </a:cubicBezTo>
+                <a:close/>
+              </a:path>
+            </a:pathLst>
+          </a:custGeom>
+          <a:gradFill>
+            <a:gsLst>
+              <a:gs pos="29000">
+                <a:srgbClr val="000000">
+                  <a:alpha val="0"/>
+                </a:srgbClr>
+              </a:gs>
+              <a:gs pos="100000">
+                <a:schemeClr val="accent1">
+                  <a:alpha val="43000"/>
+                </a:schemeClr>
+              </a:gs>
+            </a:gsLst>
+            <a:lin ang="1800000" scaled="0"/>
+          </a:gradFill>
+          <a:ln>
+            <a:noFill/>
+          </a:ln>
+        </p:spPr>
+        <p:style>
+          <a:lnRef idx="2">
+            <a:schemeClr val="accent1">
+              <a:shade val="50000"/>
+            </a:schemeClr>
+          </a:lnRef>
+          <a:fillRef idx="1">
+            <a:schemeClr val="accent1"/>
+          </a:fillRef>
+          <a:effectRef idx="0">
+            <a:schemeClr val="accent1"/>
+          </a:effectRef>
+          <a:fontRef idx="minor">
+            <a:schemeClr val="lt1"/>
+          </a:fontRef>
+        </p:style>
+        <p:txBody>
+          <a:bodyPr wrap="square" rtlCol="0" anchor="ctr">
+            <a:noAutofit/>
+          </a:bodyPr>
+          <a:lstStyle/>
+          <a:p>
+            <a:pPr algn="ctr"/>
+            <a:endParaRPr lang="en-US" dirty="0"/>
+          </a:p>
+        </p:txBody>
+      </p:sp>
+      <p:sp>
+        <p:nvSpPr>
+          <p:cNvPr id="20" name="Rectangle 19">
+            <a:extLst>
+              <a:ext uri="{FF2B5EF4-FFF2-40B4-BE49-F238E27FC236}">
+                <a16:creationId xmlns:a16="http://schemas.microsoft.com/office/drawing/2014/main" id="{8D71EDA1-87BF-4D5D-AB79-F346FD19278A}"/>
+              </a:ext>
+              <a:ext uri="{C183D7F6-B498-43B3-948B-1728B52AA6E4}">
+                <adec:decorative xmlns:adec="http://schemas.microsoft.com/office/drawing/2017/decorative" val="1"/>
+              </a:ext>
+            </a:extLst>
+          </p:cNvPr>
+          <p:cNvSpPr>
+            <a:spLocks noGrp="1" noRot="1" noChangeAspect="1" noMove="1" noResize="1" noEditPoints="1" noAdjustHandles="1" noChangeArrowheads="1" noChangeShapeType="1" noTextEdit="1"/>
+          </p:cNvSpPr>
+          <p:nvPr>
+            <p:extLst>
+              <p:ext uri="{386F3935-93C4-4BCD-93E2-E3B085C9AB24}">
+                <p16:designElem xmlns:p16="http://schemas.microsoft.com/office/powerpoint/2015/main" val="1"/>
+              </p:ext>
+            </p:extLst>
+          </p:nvPr>
+        </p:nvSpPr>
+        <p:spPr>
+          <a:xfrm rot="5400000" flipH="1">
+            <a:off x="-1410093" y="1399943"/>
+            <a:ext cx="6858003" cy="4037835"/>
+          </a:xfrm>
+          <a:prstGeom prst="rect">
+            <a:avLst/>
+          </a:prstGeom>
+          <a:gradFill>
+            <a:gsLst>
+              <a:gs pos="0">
+                <a:srgbClr val="000000">
+                  <a:alpha val="0"/>
+                </a:srgbClr>
+              </a:gs>
+              <a:gs pos="99000">
+                <a:schemeClr val="accent1">
+                  <a:lumMod val="60000"/>
+                  <a:lumOff val="40000"/>
+                  <a:alpha val="11000"/>
+                </a:schemeClr>
+              </a:gs>
+            </a:gsLst>
+            <a:lin ang="7200000" scaled="0"/>
+          </a:gradFill>
+          <a:ln>
+            <a:noFill/>
+          </a:ln>
+        </p:spPr>
+        <p:style>
+          <a:lnRef idx="2">
+            <a:schemeClr val="accent1">
+              <a:shade val="50000"/>
+            </a:schemeClr>
+          </a:lnRef>
+          <a:fillRef idx="1">
+            <a:schemeClr val="accent1"/>
+          </a:fillRef>
+          <a:effectRef idx="0">
+            <a:schemeClr val="accent1"/>
+          </a:effectRef>
+          <a:fontRef idx="minor">
+            <a:schemeClr val="lt1"/>
+          </a:fontRef>
+        </p:style>
+        <p:txBody>
+          <a:bodyPr rtlCol="0" anchor="ctr"/>
+          <a:lstStyle/>
+          <a:p>
+            <a:pPr algn="ctr"/>
+            <a:endParaRPr lang="en-US"/>
+          </a:p>
+        </p:txBody>
+      </p:sp>
+      <p:sp>
+        <p:nvSpPr>
+          <p:cNvPr id="2" name="Title 1">
+            <a:extLst>
+              <a:ext uri="{FF2B5EF4-FFF2-40B4-BE49-F238E27FC236}">
+                <a16:creationId xmlns:a16="http://schemas.microsoft.com/office/drawing/2014/main" id="{B81E0CB0-8EFD-8751-D0A9-98ED4280411A}"/>
+              </a:ext>
+            </a:extLst>
+          </p:cNvPr>
+          <p:cNvSpPr>
+            <a:spLocks noGrp="1"/>
+          </p:cNvSpPr>
+          <p:nvPr>
+            <p:ph type="ctrTitle"/>
+          </p:nvPr>
+        </p:nvSpPr>
+        <p:spPr>
+          <a:xfrm>
+            <a:off x="466722" y="586855"/>
+            <a:ext cx="3201366" cy="3387497"/>
+          </a:xfrm>
+        </p:spPr>
+        <p:txBody>
+          <a:bodyPr vert="horz" lIns="91440" tIns="45720" rIns="91440" bIns="45720" rtlCol="0" anchor="b">
+            <a:normAutofit/>
+          </a:bodyPr>
+          <a:lstStyle/>
+          <a:p>
+            <a:pPr algn="r"/>
+            <a:r>
+              <a:rPr lang="en-US" sz="4000" kern="1200">
+                <a:solidFill>
+                  <a:srgbClr val="FFFFFF"/>
+                </a:solidFill>
+                <a:latin typeface="+mj-lt"/>
+                <a:ea typeface="+mj-ea"/>
+                <a:cs typeface="+mj-cs"/>
+              </a:rPr>
+              <a:t>Καταστροφική Συμφόρηση (3000B &amp; 5000B)</a:t>
+            </a:r>
+          </a:p>
+        </p:txBody>
+      </p:sp>
+      <p:sp>
+        <p:nvSpPr>
+          <p:cNvPr id="3" name="Subtitle 2">
+            <a:extLst>
+              <a:ext uri="{FF2B5EF4-FFF2-40B4-BE49-F238E27FC236}">
+                <a16:creationId xmlns:a16="http://schemas.microsoft.com/office/drawing/2014/main" id="{189FA43A-FED2-B5E4-7CCB-E37133EC033A}"/>
+              </a:ext>
+            </a:extLst>
+          </p:cNvPr>
+          <p:cNvSpPr>
+            <a:spLocks noGrp="1"/>
+          </p:cNvSpPr>
+          <p:nvPr>
+            <p:ph type="subTitle" idx="1"/>
+          </p:nvPr>
+        </p:nvSpPr>
+        <p:spPr>
+          <a:xfrm>
+            <a:off x="4810259" y="649480"/>
+            <a:ext cx="6555347" cy="5546047"/>
+          </a:xfrm>
+        </p:spPr>
+        <p:txBody>
+          <a:bodyPr vert="horz" lIns="91440" tIns="45720" rIns="91440" bIns="45720" rtlCol="0" anchor="ctr">
+            <a:normAutofit/>
+          </a:bodyPr>
+          <a:lstStyle/>
+          <a:p>
+            <a:pPr indent="-228600" algn="l">
+              <a:buFont typeface="Arial" panose="020B0604020202020204" pitchFamily="34" charset="0"/>
+              <a:buChar char="•"/>
+            </a:pPr>
+            <a:r>
+              <a:rPr lang="en-US" sz="2000" b="1" dirty="0" err="1"/>
+              <a:t>Το</a:t>
+            </a:r>
+            <a:r>
+              <a:rPr lang="en-US" sz="2000" b="1" dirty="0"/>
+              <a:t> </a:t>
+            </a:r>
+            <a:r>
+              <a:rPr lang="en-US" sz="2000" b="1" dirty="0" err="1"/>
+              <a:t>Πρό</a:t>
+            </a:r>
+            <a:r>
+              <a:rPr lang="en-US" sz="2000" b="1" dirty="0"/>
+              <a:t>βλημα:</a:t>
+            </a:r>
+            <a:endParaRPr lang="en-US" sz="2000" dirty="0"/>
+          </a:p>
+          <a:p>
+            <a:pPr lvl="1" indent="-228600" algn="l">
+              <a:buFont typeface="Arial" panose="020B0604020202020204" pitchFamily="34" charset="0"/>
+              <a:buChar char="•"/>
+            </a:pPr>
+            <a:r>
+              <a:rPr lang="en-US" dirty="0"/>
+              <a:t>Ο Router 1 μπ</a:t>
+            </a:r>
+            <a:r>
+              <a:rPr lang="en-US" dirty="0" err="1"/>
+              <a:t>λοκάρει</a:t>
+            </a:r>
+            <a:r>
+              <a:rPr lang="en-US" dirty="0"/>
+              <a:t> </a:t>
+            </a:r>
+            <a:r>
+              <a:rPr lang="en-US" dirty="0" err="1"/>
+              <a:t>γι</a:t>
+            </a:r>
+            <a:r>
+              <a:rPr lang="en-US" dirty="0"/>
+              <a:t>α μεγάλο διάστημα (24ms - 40ms) για να στείλει κάθε "γίγαντα" πακέτο.</a:t>
+            </a:r>
+          </a:p>
+          <a:p>
+            <a:pPr indent="-228600" algn="l">
+              <a:buFont typeface="Arial" panose="020B0604020202020204" pitchFamily="34" charset="0"/>
+              <a:buChar char="•"/>
+            </a:pPr>
+            <a:r>
+              <a:rPr lang="en-US" sz="2000" b="1" dirty="0"/>
+              <a:t>3000 Bytes:</a:t>
+            </a:r>
+            <a:endParaRPr lang="en-US" sz="2000" dirty="0"/>
+          </a:p>
+          <a:p>
+            <a:pPr lvl="1" indent="-228600" algn="l">
+              <a:buFont typeface="Arial" panose="020B0604020202020204" pitchFamily="34" charset="0"/>
+              <a:buChar char="•"/>
+            </a:pPr>
+            <a:r>
+              <a:rPr lang="en-US" dirty="0" err="1"/>
+              <a:t>Φόρτος</a:t>
+            </a:r>
+            <a:r>
+              <a:rPr lang="en-US" dirty="0"/>
+              <a:t>: </a:t>
+            </a:r>
+            <a:r>
+              <a:rPr lang="en-US" b="1" dirty="0"/>
+              <a:t>9.6 Mbps</a:t>
+            </a:r>
+            <a:r>
+              <a:rPr lang="en-US" dirty="0"/>
+              <a:t> (</a:t>
+            </a:r>
+            <a:r>
+              <a:rPr lang="en-US" dirty="0" err="1"/>
+              <a:t>σε</a:t>
+            </a:r>
+            <a:r>
+              <a:rPr lang="en-US" dirty="0"/>
+              <a:t> κα</a:t>
+            </a:r>
+            <a:r>
+              <a:rPr lang="en-US" dirty="0" err="1"/>
+              <a:t>νάλι</a:t>
+            </a:r>
+            <a:r>
+              <a:rPr lang="en-US" dirty="0"/>
+              <a:t> 1 Mbps).</a:t>
+            </a:r>
+          </a:p>
+          <a:p>
+            <a:pPr lvl="1" indent="-228600" algn="l">
+              <a:buFont typeface="Arial" panose="020B0604020202020204" pitchFamily="34" charset="0"/>
+              <a:buChar char="•"/>
+            </a:pPr>
+            <a:r>
+              <a:rPr lang="en-US" b="1" dirty="0"/>
+              <a:t>Packet Loss:</a:t>
+            </a:r>
+            <a:r>
+              <a:rPr lang="en-US" dirty="0"/>
+              <a:t> </a:t>
+            </a:r>
+            <a:r>
+              <a:rPr lang="en-US" b="1" dirty="0"/>
+              <a:t>~89%</a:t>
+            </a:r>
+            <a:r>
+              <a:rPr lang="en-US" dirty="0"/>
+              <a:t>.</a:t>
+            </a:r>
+          </a:p>
+          <a:p>
+            <a:pPr indent="-228600" algn="l">
+              <a:buFont typeface="Arial" panose="020B0604020202020204" pitchFamily="34" charset="0"/>
+              <a:buChar char="•"/>
+            </a:pPr>
+            <a:r>
+              <a:rPr lang="en-US" sz="2000" b="1" dirty="0"/>
+              <a:t>5000 Bytes:</a:t>
+            </a:r>
+            <a:endParaRPr lang="en-US" sz="2000" dirty="0"/>
+          </a:p>
+          <a:p>
+            <a:pPr lvl="1" indent="-228600" algn="l">
+              <a:buFont typeface="Arial" panose="020B0604020202020204" pitchFamily="34" charset="0"/>
+              <a:buChar char="•"/>
+            </a:pPr>
+            <a:r>
+              <a:rPr lang="en-US" dirty="0" err="1"/>
+              <a:t>Φόρτος</a:t>
+            </a:r>
+            <a:r>
+              <a:rPr lang="en-US" dirty="0"/>
+              <a:t>: </a:t>
+            </a:r>
+            <a:r>
+              <a:rPr lang="en-US" b="1" dirty="0"/>
+              <a:t>16 Mbps</a:t>
+            </a:r>
+            <a:r>
+              <a:rPr lang="en-US" dirty="0"/>
+              <a:t>.</a:t>
+            </a:r>
+          </a:p>
+          <a:p>
+            <a:pPr lvl="1" indent="-228600" algn="l">
+              <a:buFont typeface="Arial" panose="020B0604020202020204" pitchFamily="34" charset="0"/>
+              <a:buChar char="•"/>
+            </a:pPr>
+            <a:r>
+              <a:rPr lang="en-US" b="1" dirty="0"/>
+              <a:t>Packet Loss:</a:t>
+            </a:r>
+            <a:r>
+              <a:rPr lang="en-US" dirty="0"/>
+              <a:t> </a:t>
+            </a:r>
+            <a:r>
+              <a:rPr lang="en-US" b="1" dirty="0"/>
+              <a:t>~93%</a:t>
+            </a:r>
+            <a:r>
+              <a:rPr lang="en-US" dirty="0"/>
+              <a:t>.</a:t>
+            </a:r>
+          </a:p>
+          <a:p>
+            <a:pPr lvl="1" indent="-228600" algn="l">
+              <a:buFont typeface="Arial" panose="020B0604020202020204" pitchFamily="34" charset="0"/>
+              <a:buChar char="•"/>
+            </a:pPr>
+            <a:r>
+              <a:rPr lang="en-US" b="1" dirty="0"/>
+              <a:t>Κα</a:t>
+            </a:r>
+            <a:r>
+              <a:rPr lang="en-US" b="1" dirty="0" err="1"/>
+              <a:t>τάρρευση</a:t>
+            </a:r>
+            <a:r>
+              <a:rPr lang="en-US" b="1" dirty="0"/>
+              <a:t>:</a:t>
+            </a:r>
+            <a:r>
+              <a:rPr lang="en-US" dirty="0"/>
+              <a:t> </a:t>
+            </a:r>
+            <a:r>
+              <a:rPr lang="en-US" dirty="0" err="1"/>
+              <a:t>Το</a:t>
+            </a:r>
+            <a:r>
+              <a:rPr lang="en-US" dirty="0"/>
+              <a:t> </a:t>
+            </a:r>
+            <a:r>
+              <a:rPr lang="en-US" dirty="0" err="1"/>
+              <a:t>δίκτυο</a:t>
+            </a:r>
+            <a:r>
+              <a:rPr lang="en-US" dirty="0"/>
+              <a:t> </a:t>
+            </a:r>
+            <a:r>
+              <a:rPr lang="en-US" dirty="0" err="1"/>
+              <a:t>μετ</a:t>
+            </a:r>
+            <a:r>
+              <a:rPr lang="en-US" dirty="0"/>
+              <a:t>αφέρει επιτυχώς λιγότερο από το 7% της πληροφορίας.</a:t>
+            </a:r>
+          </a:p>
+          <a:p>
+            <a:pPr indent="-228600" algn="l">
+              <a:buFont typeface="Arial" panose="020B0604020202020204" pitchFamily="34" charset="0"/>
+              <a:buChar char="•"/>
+            </a:pPr>
+            <a:endParaRPr lang="en-US" sz="2000" dirty="0"/>
+          </a:p>
+        </p:txBody>
+      </p:sp>
+    </p:spTree>
+    <p:extLst>
+      <p:ext uri="{BB962C8B-B14F-4D97-AF65-F5344CB8AC3E}">
+        <p14:creationId xmlns:p14="http://schemas.microsoft.com/office/powerpoint/2010/main" val="2330438733"/>
+      </p:ext>
+    </p:extLst>
+  </p:cSld>
+  <p:clrMapOvr>
+    <a:masterClrMapping/>
+  </p:clrMapOvr>
+</p:sld>
+</file>
+
+<file path=ppt/slides/slide29.xml><?xml version="1.0" encoding="utf-8"?>
+<p:sld xmlns:a="http://schemas.openxmlformats.org/drawingml/2006/main" xmlns:r="http://schemas.openxmlformats.org/officeDocument/2006/relationships" xmlns:p="http://schemas.openxmlformats.org/presentationml/2006/main">
+  <p:cSld>
+    <p:spTree>
+      <p:nvGrpSpPr>
+        <p:cNvPr id="1" name=""/>
+        <p:cNvGrpSpPr/>
+        <p:nvPr/>
+      </p:nvGrpSpPr>
+      <p:grpSpPr>
+        <a:xfrm>
+          <a:off x="0" y="0"/>
+          <a:ext cx="0" cy="0"/>
+          <a:chOff x="0" y="0"/>
+          <a:chExt cx="0" cy="0"/>
+        </a:xfrm>
+      </p:grpSpPr>
+      <p:pic>
+        <p:nvPicPr>
+          <p:cNvPr id="2" name="Picture 1" descr="A screenshot of a graph&#10;&#10;AI-generated content may be incorrect.">
+            <a:extLst>
+              <a:ext uri="{FF2B5EF4-FFF2-40B4-BE49-F238E27FC236}">
+                <a16:creationId xmlns:a16="http://schemas.microsoft.com/office/drawing/2014/main" id="{3BCA8BD5-5AE2-44E0-D9E6-2877AECE43B1}"/>
+              </a:ext>
+            </a:extLst>
+          </p:cNvPr>
+          <p:cNvPicPr>
+            <a:picLocks noChangeAspect="1"/>
+          </p:cNvPicPr>
+          <p:nvPr/>
+        </p:nvPicPr>
+        <p:blipFill>
+          <a:blip r:embed="rId2"/>
+          <a:stretch>
+            <a:fillRect/>
+          </a:stretch>
+        </p:blipFill>
+        <p:spPr>
+          <a:xfrm>
+            <a:off x="-1" y="0"/>
+            <a:ext cx="12192001" cy="6857999"/>
+          </a:xfrm>
+          <a:prstGeom prst="rect">
+            <a:avLst/>
+          </a:prstGeom>
+        </p:spPr>
+      </p:pic>
+      <p:sp>
+        <p:nvSpPr>
+          <p:cNvPr id="3" name="TextBox 2">
+            <a:extLst>
+              <a:ext uri="{FF2B5EF4-FFF2-40B4-BE49-F238E27FC236}">
+                <a16:creationId xmlns:a16="http://schemas.microsoft.com/office/drawing/2014/main" id="{B1A3528C-9DBE-2196-2065-FF634219C25C}"/>
+              </a:ext>
+            </a:extLst>
+          </p:cNvPr>
+          <p:cNvSpPr txBox="1"/>
+          <p:nvPr/>
+        </p:nvSpPr>
+        <p:spPr>
+          <a:xfrm>
+            <a:off x="-1" y="123825"/>
+            <a:ext cx="1378326" cy="400110"/>
+          </a:xfrm>
+          <a:prstGeom prst="rect">
+            <a:avLst/>
+          </a:prstGeom>
+          <a:noFill/>
+        </p:spPr>
+        <p:txBody>
+          <a:bodyPr wrap="none" rtlCol="0">
+            <a:spAutoFit/>
+          </a:bodyPr>
+          <a:lstStyle/>
+          <a:p>
+            <a:r>
+              <a:rPr lang="en-US" sz="2000" b="1" dirty="0"/>
+              <a:t>3000Bytes</a:t>
+            </a:r>
+          </a:p>
+        </p:txBody>
+      </p:sp>
+    </p:spTree>
+    <p:extLst>
+      <p:ext uri="{BB962C8B-B14F-4D97-AF65-F5344CB8AC3E}">
+        <p14:creationId xmlns:p14="http://schemas.microsoft.com/office/powerpoint/2010/main" val="873796934"/>
+      </p:ext>
+    </p:extLst>
+  </p:cSld>
+  <p:clrMapOvr>
+    <a:masterClrMapping/>
+  </p:clrMapOvr>
+</p:sld>
+</file>
+
+<file path=ppt/slides/slide3.xml><?xml version="1.0" encoding="utf-8"?>
+<p:sld xmlns:a="http://schemas.openxmlformats.org/drawingml/2006/main" xmlns:r="http://schemas.openxmlformats.org/officeDocument/2006/relationships" xmlns:p="http://schemas.openxmlformats.org/presentationml/2006/main">
+  <p:cSld>
+    <p:spTree>
+      <p:nvGrpSpPr>
+        <p:cNvPr id="1" name=""/>
+        <p:cNvGrpSpPr/>
+        <p:nvPr/>
+      </p:nvGrpSpPr>
+      <p:grpSpPr>
+        <a:xfrm>
+          <a:off x="0" y="0"/>
+          <a:ext cx="0" cy="0"/>
+          <a:chOff x="0" y="0"/>
+          <a:chExt cx="0" cy="0"/>
+        </a:xfrm>
+      </p:grpSpPr>
+      <p:sp>
+        <p:nvSpPr>
+          <p:cNvPr id="2" name="Title 1">
+            <a:extLst>
+              <a:ext uri="{FF2B5EF4-FFF2-40B4-BE49-F238E27FC236}">
+                <a16:creationId xmlns:a16="http://schemas.microsoft.com/office/drawing/2014/main" id="{98F6A3E1-6CEC-0B57-9022-68D06F490168}"/>
+              </a:ext>
+            </a:extLst>
+          </p:cNvPr>
+          <p:cNvSpPr>
+            <a:spLocks noGrp="1"/>
+          </p:cNvSpPr>
+          <p:nvPr>
+            <p:ph type="title"/>
+          </p:nvPr>
+        </p:nvSpPr>
+        <p:spPr/>
+        <p:txBody>
+          <a:bodyPr/>
+          <a:lstStyle/>
+          <a:p>
+            <a:r>
+              <a:rPr lang="el-GR" b="1" dirty="0"/>
+              <a:t>Οι Ιδιότητες του Δικτύου &amp; της Κίνησης</a:t>
+            </a:r>
+            <a:endParaRPr lang="en-US" dirty="0"/>
+          </a:p>
+        </p:txBody>
+      </p:sp>
+      <p:graphicFrame>
+        <p:nvGraphicFramePr>
+          <p:cNvPr id="5" name="Content Placeholder 2">
+            <a:extLst>
+              <a:ext uri="{FF2B5EF4-FFF2-40B4-BE49-F238E27FC236}">
+                <a16:creationId xmlns:a16="http://schemas.microsoft.com/office/drawing/2014/main" id="{E06E0085-64CE-D8F3-2585-FBC149C9D2F7}"/>
+              </a:ext>
+            </a:extLst>
+          </p:cNvPr>
+          <p:cNvGraphicFramePr>
+            <a:graphicFrameLocks noGrp="1"/>
+          </p:cNvGraphicFramePr>
+          <p:nvPr>
+            <p:ph idx="1"/>
+            <p:extLst>
+              <p:ext uri="{D42A27DB-BD31-4B8C-83A1-F6EECF244321}">
+                <p14:modId xmlns:p14="http://schemas.microsoft.com/office/powerpoint/2010/main" val="1704655081"/>
+              </p:ext>
+            </p:extLst>
+          </p:nvPr>
+        </p:nvGraphicFramePr>
+        <p:xfrm>
+          <a:off x="838200" y="1825625"/>
+          <a:ext cx="10515600" cy="4351338"/>
+        </p:xfrm>
+        <a:graphic>
+          <a:graphicData uri="http://schemas.openxmlformats.org/drawingml/2006/diagram">
+            <dgm:relIds xmlns:dgm="http://schemas.openxmlformats.org/drawingml/2006/diagram" xmlns:r="http://schemas.openxmlformats.org/officeDocument/2006/relationships" r:dm="rId2" r:lo="rId3" r:qs="rId4" r:cs="rId5"/>
+          </a:graphicData>
+        </a:graphic>
+      </p:graphicFrame>
+      <p:sp>
+        <p:nvSpPr>
+          <p:cNvPr id="6" name="TextBox 5">
+            <a:extLst>
+              <a:ext uri="{FF2B5EF4-FFF2-40B4-BE49-F238E27FC236}">
+                <a16:creationId xmlns:a16="http://schemas.microsoft.com/office/drawing/2014/main" id="{2162E5BD-25FB-FCAE-DE35-5255E989595B}"/>
+              </a:ext>
+            </a:extLst>
+          </p:cNvPr>
+          <p:cNvSpPr txBox="1"/>
+          <p:nvPr/>
+        </p:nvSpPr>
+        <p:spPr>
+          <a:xfrm>
+            <a:off x="204216" y="6163438"/>
+            <a:ext cx="11987784" cy="646331"/>
+          </a:xfrm>
+          <a:prstGeom prst="rect">
+            <a:avLst/>
+          </a:prstGeom>
+          <a:noFill/>
+        </p:spPr>
+        <p:txBody>
+          <a:bodyPr wrap="square" rtlCol="0">
+            <a:spAutoFit/>
+          </a:bodyPr>
+          <a:lstStyle/>
+          <a:p>
+            <a:r>
+              <a:rPr lang="el-GR" b="1" dirty="0"/>
+              <a:t>Η Σύγκρουση:</a:t>
+            </a:r>
+            <a:r>
+              <a:rPr lang="el-GR" dirty="0"/>
+              <a:t> Η πηγή στέλνει ένα νέο πακέτο κάθε </a:t>
+            </a:r>
+            <a:r>
+              <a:rPr lang="el-GR" b="1" dirty="0"/>
+              <a:t>5ms</a:t>
+            </a:r>
+            <a:r>
+              <a:rPr lang="el-GR" dirty="0"/>
+              <a:t>. Ο router όμως χρειάζεται </a:t>
+            </a:r>
+            <a:r>
+              <a:rPr lang="el-GR" b="1" dirty="0"/>
+              <a:t>8ms</a:t>
+            </a:r>
+            <a:r>
+              <a:rPr lang="el-GR" dirty="0"/>
+              <a:t> για να ολοκληρώσει την αποστολή ενός πακέτου (8ms μετάδοση).</a:t>
+            </a:r>
+            <a:endParaRPr lang="en-US" dirty="0"/>
+          </a:p>
+        </p:txBody>
+      </p:sp>
+    </p:spTree>
+    <p:extLst>
+      <p:ext uri="{BB962C8B-B14F-4D97-AF65-F5344CB8AC3E}">
+        <p14:creationId xmlns:p14="http://schemas.microsoft.com/office/powerpoint/2010/main" val="874597135"/>
+      </p:ext>
+    </p:extLst>
+  </p:cSld>
+  <p:clrMapOvr>
+    <a:masterClrMapping/>
+  </p:clrMapOvr>
+</p:sld>
+</file>
+
+<file path=ppt/slides/slide30.xml><?xml version="1.0" encoding="utf-8"?>
+<p:sld xmlns:a="http://schemas.openxmlformats.org/drawingml/2006/main" xmlns:r="http://schemas.openxmlformats.org/officeDocument/2006/relationships" xmlns:p="http://schemas.openxmlformats.org/presentationml/2006/main">
+  <p:cSld>
+    <p:spTree>
+      <p:nvGrpSpPr>
+        <p:cNvPr id="1" name=""/>
+        <p:cNvGrpSpPr/>
+        <p:nvPr/>
+      </p:nvGrpSpPr>
+      <p:grpSpPr>
+        <a:xfrm>
+          <a:off x="0" y="0"/>
+          <a:ext cx="0" cy="0"/>
+          <a:chOff x="0" y="0"/>
+          <a:chExt cx="0" cy="0"/>
+        </a:xfrm>
+      </p:grpSpPr>
+      <p:pic>
+        <p:nvPicPr>
+          <p:cNvPr id="2" name="Picture 1" descr="A screenshot of a graph&#10;&#10;AI-generated content may be incorrect.">
+            <a:extLst>
+              <a:ext uri="{FF2B5EF4-FFF2-40B4-BE49-F238E27FC236}">
+                <a16:creationId xmlns:a16="http://schemas.microsoft.com/office/drawing/2014/main" id="{C67C2757-1BD3-354A-DD7D-9A80F2FA1510}"/>
+              </a:ext>
+            </a:extLst>
+          </p:cNvPr>
+          <p:cNvPicPr>
+            <a:picLocks noChangeAspect="1"/>
+          </p:cNvPicPr>
+          <p:nvPr/>
+        </p:nvPicPr>
+        <p:blipFill>
+          <a:blip r:embed="rId2"/>
+          <a:stretch>
+            <a:fillRect/>
+          </a:stretch>
+        </p:blipFill>
+        <p:spPr>
+          <a:xfrm>
+            <a:off x="0" y="0"/>
+            <a:ext cx="12192000" cy="6857999"/>
+          </a:xfrm>
+          <a:prstGeom prst="rect">
+            <a:avLst/>
+          </a:prstGeom>
+        </p:spPr>
+      </p:pic>
+      <p:sp>
+        <p:nvSpPr>
+          <p:cNvPr id="3" name="TextBox 2">
+            <a:extLst>
+              <a:ext uri="{FF2B5EF4-FFF2-40B4-BE49-F238E27FC236}">
+                <a16:creationId xmlns:a16="http://schemas.microsoft.com/office/drawing/2014/main" id="{405B8CC8-55C0-F9A7-C5B6-304D58C7CBF0}"/>
+              </a:ext>
+            </a:extLst>
+          </p:cNvPr>
+          <p:cNvSpPr txBox="1"/>
+          <p:nvPr/>
+        </p:nvSpPr>
+        <p:spPr>
+          <a:xfrm>
+            <a:off x="0" y="123825"/>
+            <a:ext cx="1378326" cy="400110"/>
+          </a:xfrm>
+          <a:prstGeom prst="rect">
+            <a:avLst/>
+          </a:prstGeom>
+          <a:noFill/>
+        </p:spPr>
+        <p:txBody>
+          <a:bodyPr wrap="none" rtlCol="0">
+            <a:spAutoFit/>
+          </a:bodyPr>
+          <a:lstStyle/>
+          <a:p>
+            <a:r>
+              <a:rPr lang="en-US" sz="2000" b="1" dirty="0"/>
+              <a:t>5000Bytes</a:t>
+            </a:r>
+          </a:p>
+        </p:txBody>
+      </p:sp>
+    </p:spTree>
+    <p:extLst>
+      <p:ext uri="{BB962C8B-B14F-4D97-AF65-F5344CB8AC3E}">
+        <p14:creationId xmlns:p14="http://schemas.microsoft.com/office/powerpoint/2010/main" val="4048588611"/>
+      </p:ext>
+    </p:extLst>
+  </p:cSld>
+  <p:clrMapOvr>
+    <a:masterClrMapping/>
+  </p:clrMapOvr>
+</p:sld>
+</file>
+
+<file path=ppt/slides/slide31.xml><?xml version="1.0" encoding="utf-8"?>
 <p:sld xmlns:a="http://schemas.openxmlformats.org/drawingml/2006/main" xmlns:r="http://schemas.openxmlformats.org/officeDocument/2006/relationships" xmlns:p="http://schemas.openxmlformats.org/presentationml/2006/main">
   <p:cSld>
     <p:bg>
@@ -23253,152 +30481,6 @@
       <p:bldP spid="2" grpId="0"/>
     </p:bldLst>
   </p:timing>
-</p:sld>
-</file>
-
-<file path=ppt/slides/slide3.xml><?xml version="1.0" encoding="utf-8"?>
-<p:sld xmlns:a="http://schemas.openxmlformats.org/drawingml/2006/main" xmlns:r="http://schemas.openxmlformats.org/officeDocument/2006/relationships" xmlns:p="http://schemas.openxmlformats.org/presentationml/2006/main">
-  <p:cSld>
-    <p:spTree>
-      <p:nvGrpSpPr>
-        <p:cNvPr id="1" name=""/>
-        <p:cNvGrpSpPr/>
-        <p:nvPr/>
-      </p:nvGrpSpPr>
-      <p:grpSpPr>
-        <a:xfrm>
-          <a:off x="0" y="0"/>
-          <a:ext cx="0" cy="0"/>
-          <a:chOff x="0" y="0"/>
-          <a:chExt cx="0" cy="0"/>
-        </a:xfrm>
-      </p:grpSpPr>
-      <p:sp>
-        <p:nvSpPr>
-          <p:cNvPr id="2" name="Title 1">
-            <a:extLst>
-              <a:ext uri="{FF2B5EF4-FFF2-40B4-BE49-F238E27FC236}">
-                <a16:creationId xmlns:a16="http://schemas.microsoft.com/office/drawing/2014/main" id="{98F6A3E1-6CEC-0B57-9022-68D06F490168}"/>
-              </a:ext>
-            </a:extLst>
-          </p:cNvPr>
-          <p:cNvSpPr>
-            <a:spLocks noGrp="1"/>
-          </p:cNvSpPr>
-          <p:nvPr>
-            <p:ph type="title"/>
-          </p:nvPr>
-        </p:nvSpPr>
-        <p:spPr/>
-        <p:txBody>
-          <a:bodyPr/>
-          <a:lstStyle/>
-          <a:p>
-            <a:r>
-              <a:rPr lang="el-GR" b="1" dirty="0"/>
-              <a:t>Οι Ιδιότητες του Δικτύου &amp; της Κίνησης</a:t>
-            </a:r>
-            <a:endParaRPr lang="en-US" dirty="0"/>
-          </a:p>
-        </p:txBody>
-      </p:sp>
-      <p:graphicFrame>
-        <p:nvGraphicFramePr>
-          <p:cNvPr id="5" name="Content Placeholder 2">
-            <a:extLst>
-              <a:ext uri="{FF2B5EF4-FFF2-40B4-BE49-F238E27FC236}">
-                <a16:creationId xmlns:a16="http://schemas.microsoft.com/office/drawing/2014/main" id="{E06E0085-64CE-D8F3-2585-FBC149C9D2F7}"/>
-              </a:ext>
-            </a:extLst>
-          </p:cNvPr>
-          <p:cNvGraphicFramePr>
-            <a:graphicFrameLocks noGrp="1"/>
-          </p:cNvGraphicFramePr>
-          <p:nvPr>
-            <p:ph idx="1"/>
-            <p:extLst>
-              <p:ext uri="{D42A27DB-BD31-4B8C-83A1-F6EECF244321}">
-                <p14:modId xmlns:p14="http://schemas.microsoft.com/office/powerpoint/2010/main" val="1704655081"/>
-              </p:ext>
-            </p:extLst>
-          </p:nvPr>
-        </p:nvGraphicFramePr>
-        <p:xfrm>
-          <a:off x="838200" y="1825625"/>
-          <a:ext cx="10515600" cy="4351338"/>
-        </p:xfrm>
-        <a:graphic>
-          <a:graphicData uri="http://schemas.openxmlformats.org/drawingml/2006/diagram">
-            <dgm:relIds xmlns:dgm="http://schemas.openxmlformats.org/drawingml/2006/diagram" xmlns:r="http://schemas.openxmlformats.org/officeDocument/2006/relationships" r:dm="rId2" r:lo="rId3" r:qs="rId4" r:cs="rId5"/>
-          </a:graphicData>
-        </a:graphic>
-      </p:graphicFrame>
-      <p:sp>
-        <p:nvSpPr>
-          <p:cNvPr id="6" name="TextBox 5">
-            <a:extLst>
-              <a:ext uri="{FF2B5EF4-FFF2-40B4-BE49-F238E27FC236}">
-                <a16:creationId xmlns:a16="http://schemas.microsoft.com/office/drawing/2014/main" id="{2162E5BD-25FB-FCAE-DE35-5255E989595B}"/>
-              </a:ext>
-            </a:extLst>
-          </p:cNvPr>
-          <p:cNvSpPr txBox="1"/>
-          <p:nvPr/>
-        </p:nvSpPr>
-        <p:spPr>
-          <a:xfrm>
-            <a:off x="204216" y="6163438"/>
-            <a:ext cx="11987784" cy="646331"/>
-          </a:xfrm>
-          <a:prstGeom prst="rect">
-            <a:avLst/>
-          </a:prstGeom>
-          <a:noFill/>
-        </p:spPr>
-        <p:txBody>
-          <a:bodyPr wrap="square" rtlCol="0">
-            <a:spAutoFit/>
-          </a:bodyPr>
-          <a:lstStyle/>
-          <a:p>
-            <a:r>
-              <a:rPr lang="el-GR" b="1" dirty="0"/>
-              <a:t>Η Σύγκρουση:</a:t>
-            </a:r>
-            <a:r>
-              <a:rPr lang="el-GR" dirty="0"/>
-              <a:t> Η πηγή στέλνει ένα νέο πακέτο κάθε </a:t>
-            </a:r>
-            <a:r>
-              <a:rPr lang="el-GR" b="1" dirty="0"/>
-              <a:t>5ms</a:t>
-            </a:r>
-            <a:r>
-              <a:rPr lang="el-GR" dirty="0"/>
-              <a:t>. Ο router όμως χρειάζεται </a:t>
-            </a:r>
-            <a:r>
-              <a:rPr lang="el-GR" b="1" dirty="0"/>
-              <a:t>8ms</a:t>
-            </a:r>
-            <a:r>
-              <a:rPr lang="el-GR" dirty="0"/>
-              <a:t> για να ολοκληρώσει την αποστολή ενός πακέτου (8ms μετάδοση).</a:t>
-            </a:r>
-            <a:endParaRPr lang="en-US" dirty="0"/>
-          </a:p>
-        </p:txBody>
-      </p:sp>
-    </p:spTree>
-    <p:extLst>
-      <p:ext uri="{BB962C8B-B14F-4D97-AF65-F5344CB8AC3E}">
-        <p14:creationId xmlns:p14="http://schemas.microsoft.com/office/powerpoint/2010/main" val="874597135"/>
-      </p:ext>
-    </p:extLst>
-  </p:cSld>
-  <p:clrMapOvr>
-    <a:masterClrMapping/>
-  </p:clrMapOvr>
 </p:sld>
 </file>
 

--- a/Παρουσίαση.pptx
+++ b/Παρουσίαση.pptx
@@ -5,7 +5,7 @@
     <p:sldMasterId id="2147483648" r:id="rId1"/>
   </p:sldMasterIdLst>
   <p:notesMasterIdLst>
-    <p:notesMasterId r:id="rId33"/>
+    <p:notesMasterId r:id="rId40"/>
   </p:notesMasterIdLst>
   <p:sldIdLst>
     <p:sldId id="256" r:id="rId2"/>
@@ -38,7 +38,14 @@
     <p:sldId id="292" r:id="rId29"/>
     <p:sldId id="293" r:id="rId30"/>
     <p:sldId id="294" r:id="rId31"/>
-    <p:sldId id="282" r:id="rId32"/>
+    <p:sldId id="295" r:id="rId32"/>
+    <p:sldId id="296" r:id="rId33"/>
+    <p:sldId id="297" r:id="rId34"/>
+    <p:sldId id="298" r:id="rId35"/>
+    <p:sldId id="299" r:id="rId36"/>
+    <p:sldId id="300" r:id="rId37"/>
+    <p:sldId id="301" r:id="rId38"/>
+    <p:sldId id="282" r:id="rId39"/>
   </p:sldIdLst>
   <p:sldSz cx="12192000" cy="6858000"/>
   <p:notesSz cx="6858000" cy="9144000"/>
@@ -172,6 +179,13 @@
             <p14:sldId id="292"/>
             <p14:sldId id="293"/>
             <p14:sldId id="294"/>
+            <p14:sldId id="295"/>
+            <p14:sldId id="296"/>
+            <p14:sldId id="297"/>
+            <p14:sldId id="298"/>
+            <p14:sldId id="299"/>
+            <p14:sldId id="300"/>
+            <p14:sldId id="301"/>
             <p14:sldId id="282"/>
           </p14:sldIdLst>
         </p14:section>
@@ -14904,7 +14918,7 @@
           <a:p>
             <a:fld id="{C532137C-021D-4A9D-A859-D245201B58F6}" type="datetimeFigureOut">
               <a:rPr lang="en-US" smtClean="0"/>
-              <a:t>11/23/2025</a:t>
+              <a:t>11/24/2025</a:t>
             </a:fld>
             <a:endParaRPr lang="en-US"/>
           </a:p>
@@ -15318,7 +15332,7 @@
           <a:p>
             <a:fld id="{962F6855-2B44-4D26-9C54-0F94AD6A38AE}" type="datetimeFigureOut">
               <a:rPr lang="en-US" smtClean="0"/>
-              <a:t>11/23/2025</a:t>
+              <a:t>11/24/2025</a:t>
             </a:fld>
             <a:endParaRPr lang="en-US"/>
           </a:p>
@@ -15516,7 +15530,7 @@
           <a:p>
             <a:fld id="{962F6855-2B44-4D26-9C54-0F94AD6A38AE}" type="datetimeFigureOut">
               <a:rPr lang="en-US" smtClean="0"/>
-              <a:t>11/23/2025</a:t>
+              <a:t>11/24/2025</a:t>
             </a:fld>
             <a:endParaRPr lang="en-US"/>
           </a:p>
@@ -15724,7 +15738,7 @@
           <a:p>
             <a:fld id="{962F6855-2B44-4D26-9C54-0F94AD6A38AE}" type="datetimeFigureOut">
               <a:rPr lang="en-US" smtClean="0"/>
-              <a:t>11/23/2025</a:t>
+              <a:t>11/24/2025</a:t>
             </a:fld>
             <a:endParaRPr lang="en-US"/>
           </a:p>
@@ -15922,7 +15936,7 @@
           <a:p>
             <a:fld id="{962F6855-2B44-4D26-9C54-0F94AD6A38AE}" type="datetimeFigureOut">
               <a:rPr lang="en-US" smtClean="0"/>
-              <a:t>11/23/2025</a:t>
+              <a:t>11/24/2025</a:t>
             </a:fld>
             <a:endParaRPr lang="en-US"/>
           </a:p>
@@ -16197,7 +16211,7 @@
           <a:p>
             <a:fld id="{962F6855-2B44-4D26-9C54-0F94AD6A38AE}" type="datetimeFigureOut">
               <a:rPr lang="en-US" smtClean="0"/>
-              <a:t>11/23/2025</a:t>
+              <a:t>11/24/2025</a:t>
             </a:fld>
             <a:endParaRPr lang="en-US"/>
           </a:p>
@@ -16462,7 +16476,7 @@
           <a:p>
             <a:fld id="{962F6855-2B44-4D26-9C54-0F94AD6A38AE}" type="datetimeFigureOut">
               <a:rPr lang="en-US" smtClean="0"/>
-              <a:t>11/23/2025</a:t>
+              <a:t>11/24/2025</a:t>
             </a:fld>
             <a:endParaRPr lang="en-US"/>
           </a:p>
@@ -16874,7 +16888,7 @@
           <a:p>
             <a:fld id="{962F6855-2B44-4D26-9C54-0F94AD6A38AE}" type="datetimeFigureOut">
               <a:rPr lang="en-US" smtClean="0"/>
-              <a:t>11/23/2025</a:t>
+              <a:t>11/24/2025</a:t>
             </a:fld>
             <a:endParaRPr lang="en-US"/>
           </a:p>
@@ -17015,7 +17029,7 @@
           <a:p>
             <a:fld id="{962F6855-2B44-4D26-9C54-0F94AD6A38AE}" type="datetimeFigureOut">
               <a:rPr lang="en-US" smtClean="0"/>
-              <a:t>11/23/2025</a:t>
+              <a:t>11/24/2025</a:t>
             </a:fld>
             <a:endParaRPr lang="en-US"/>
           </a:p>
@@ -17128,7 +17142,7 @@
           <a:p>
             <a:fld id="{962F6855-2B44-4D26-9C54-0F94AD6A38AE}" type="datetimeFigureOut">
               <a:rPr lang="en-US" smtClean="0"/>
-              <a:t>11/23/2025</a:t>
+              <a:t>11/24/2025</a:t>
             </a:fld>
             <a:endParaRPr lang="en-US"/>
           </a:p>
@@ -17439,7 +17453,7 @@
           <a:p>
             <a:fld id="{962F6855-2B44-4D26-9C54-0F94AD6A38AE}" type="datetimeFigureOut">
               <a:rPr lang="en-US" smtClean="0"/>
-              <a:t>11/23/2025</a:t>
+              <a:t>11/24/2025</a:t>
             </a:fld>
             <a:endParaRPr lang="en-US"/>
           </a:p>
@@ -17727,7 +17741,7 @@
           <a:p>
             <a:fld id="{962F6855-2B44-4D26-9C54-0F94AD6A38AE}" type="datetimeFigureOut">
               <a:rPr lang="en-US" smtClean="0"/>
-              <a:t>11/23/2025</a:t>
+              <a:t>11/24/2025</a:t>
             </a:fld>
             <a:endParaRPr lang="en-US"/>
           </a:p>
@@ -17968,7 +17982,7 @@
           <a:p>
             <a:fld id="{962F6855-2B44-4D26-9C54-0F94AD6A38AE}" type="datetimeFigureOut">
               <a:rPr lang="en-US" smtClean="0"/>
-              <a:t>11/23/2025</a:t>
+              <a:t>11/24/2025</a:t>
             </a:fld>
             <a:endParaRPr lang="en-US"/>
           </a:p>
@@ -29808,6 +29822,6427 @@
       </p:grpSpPr>
       <p:sp useBgFill="1">
         <p:nvSpPr>
+          <p:cNvPr id="9" name="Rectangle 8">
+            <a:extLst>
+              <a:ext uri="{FF2B5EF4-FFF2-40B4-BE49-F238E27FC236}">
+                <a16:creationId xmlns:a16="http://schemas.microsoft.com/office/drawing/2014/main" id="{09588DA8-065E-4F6F-8EFD-43104AB2E0CF}"/>
+              </a:ext>
+              <a:ext uri="{C183D7F6-B498-43B3-948B-1728B52AA6E4}">
+                <adec:decorative xmlns:adec="http://schemas.microsoft.com/office/drawing/2017/decorative" val="1"/>
+              </a:ext>
+            </a:extLst>
+          </p:cNvPr>
+          <p:cNvSpPr>
+            <a:spLocks noGrp="1" noRot="1" noChangeAspect="1" noMove="1" noResize="1" noEditPoints="1" noAdjustHandles="1" noChangeArrowheads="1" noChangeShapeType="1" noTextEdit="1"/>
+          </p:cNvSpPr>
+          <p:nvPr>
+            <p:extLst>
+              <p:ext uri="{386F3935-93C4-4BCD-93E2-E3B085C9AB24}">
+                <p16:designElem xmlns:p16="http://schemas.microsoft.com/office/powerpoint/2015/main" val="1"/>
+              </p:ext>
+            </p:extLst>
+          </p:nvPr>
+        </p:nvSpPr>
+        <p:spPr>
+          <a:xfrm>
+            <a:off x="0" y="0"/>
+            <a:ext cx="12192000" cy="6858000"/>
+          </a:xfrm>
+          <a:prstGeom prst="rect">
+            <a:avLst/>
+          </a:prstGeom>
+          <a:ln w="12700" cap="flat" cmpd="sng" algn="ctr">
+            <a:noFill/>
+            <a:prstDash val="solid"/>
+            <a:miter lim="800000"/>
+          </a:ln>
+          <a:effectLst/>
+          <a:extLst>
+            <a:ext uri="{91240B29-F687-4F45-9708-019B960494DF}">
+              <a14:hiddenLine xmlns:a14="http://schemas.microsoft.com/office/drawing/2010/main" w="12700" cap="flat" cmpd="sng" algn="ctr">
+                <a:solidFill>
+                  <a:schemeClr val="accent1">
+                    <a:shade val="50000"/>
+                  </a:schemeClr>
+                </a:solidFill>
+                <a:prstDash val="solid"/>
+                <a:miter lim="800000"/>
+              </a14:hiddenLine>
+            </a:ext>
+          </a:extLst>
+        </p:spPr>
+        <p:style>
+          <a:lnRef idx="2">
+            <a:schemeClr val="accent1">
+              <a:shade val="50000"/>
+            </a:schemeClr>
+          </a:lnRef>
+          <a:fillRef idx="1">
+            <a:schemeClr val="accent1"/>
+          </a:fillRef>
+          <a:effectRef idx="0">
+            <a:schemeClr val="accent1"/>
+          </a:effectRef>
+          <a:fontRef idx="minor">
+            <a:schemeClr val="lt1"/>
+          </a:fontRef>
+        </p:style>
+        <p:txBody>
+          <a:bodyPr rtlCol="0" anchor="ctr"/>
+          <a:lstStyle/>
+          <a:p>
+            <a:pPr algn="ctr"/>
+            <a:endParaRPr lang="en-US"/>
+          </a:p>
+        </p:txBody>
+      </p:sp>
+      <p:sp useBgFill="1">
+        <p:nvSpPr>
+          <p:cNvPr id="11" name="Rectangle 10">
+            <a:extLst>
+              <a:ext uri="{FF2B5EF4-FFF2-40B4-BE49-F238E27FC236}">
+                <a16:creationId xmlns:a16="http://schemas.microsoft.com/office/drawing/2014/main" id="{C4285719-470E-454C-AF62-8323075F1F5B}"/>
+              </a:ext>
+              <a:ext uri="{C183D7F6-B498-43B3-948B-1728B52AA6E4}">
+                <adec:decorative xmlns:adec="http://schemas.microsoft.com/office/drawing/2017/decorative" val="1"/>
+              </a:ext>
+            </a:extLst>
+          </p:cNvPr>
+          <p:cNvSpPr>
+            <a:spLocks noGrp="1" noRot="1" noChangeAspect="1" noMove="1" noResize="1" noEditPoints="1" noAdjustHandles="1" noChangeArrowheads="1" noChangeShapeType="1" noTextEdit="1"/>
+          </p:cNvSpPr>
+          <p:nvPr>
+            <p:extLst>
+              <p:ext uri="{386F3935-93C4-4BCD-93E2-E3B085C9AB24}">
+                <p16:designElem xmlns:p16="http://schemas.microsoft.com/office/powerpoint/2015/main" val="1"/>
+              </p:ext>
+            </p:extLst>
+          </p:nvPr>
+        </p:nvSpPr>
+        <p:spPr>
+          <a:xfrm>
+            <a:off x="0" y="0"/>
+            <a:ext cx="12188952" cy="6858000"/>
+          </a:xfrm>
+          <a:prstGeom prst="rect">
+            <a:avLst/>
+          </a:prstGeom>
+          <a:ln w="12700" cap="flat" cmpd="sng" algn="ctr">
+            <a:noFill/>
+            <a:prstDash val="solid"/>
+            <a:miter lim="800000"/>
+          </a:ln>
+          <a:effectLst/>
+          <a:extLst>
+            <a:ext uri="{91240B29-F687-4F45-9708-019B960494DF}">
+              <a14:hiddenLine xmlns:a14="http://schemas.microsoft.com/office/drawing/2010/main" w="12700" cap="flat" cmpd="sng" algn="ctr">
+                <a:solidFill>
+                  <a:schemeClr val="accent1">
+                    <a:shade val="50000"/>
+                  </a:schemeClr>
+                </a:solidFill>
+                <a:prstDash val="solid"/>
+                <a:miter lim="800000"/>
+              </a14:hiddenLine>
+            </a:ext>
+          </a:extLst>
+        </p:spPr>
+        <p:style>
+          <a:lnRef idx="2">
+            <a:schemeClr val="accent1">
+              <a:shade val="50000"/>
+            </a:schemeClr>
+          </a:lnRef>
+          <a:fillRef idx="1">
+            <a:schemeClr val="accent1"/>
+          </a:fillRef>
+          <a:effectRef idx="0">
+            <a:schemeClr val="accent1"/>
+          </a:effectRef>
+          <a:fontRef idx="minor">
+            <a:schemeClr val="lt1"/>
+          </a:fontRef>
+        </p:style>
+        <p:txBody>
+          <a:bodyPr rtlCol="0" anchor="ctr"/>
+          <a:lstStyle/>
+          <a:p>
+            <a:pPr algn="ctr"/>
+            <a:endParaRPr lang="en-US"/>
+          </a:p>
+        </p:txBody>
+      </p:sp>
+      <p:sp>
+        <p:nvSpPr>
+          <p:cNvPr id="13" name="Rectangle 12">
+            <a:extLst>
+              <a:ext uri="{FF2B5EF4-FFF2-40B4-BE49-F238E27FC236}">
+                <a16:creationId xmlns:a16="http://schemas.microsoft.com/office/drawing/2014/main" id="{CD9FE4EF-C4D8-49A0-B2FF-81D8DB7D8A24}"/>
+              </a:ext>
+              <a:ext uri="{C183D7F6-B498-43B3-948B-1728B52AA6E4}">
+                <adec:decorative xmlns:adec="http://schemas.microsoft.com/office/drawing/2017/decorative" val="1"/>
+              </a:ext>
+            </a:extLst>
+          </p:cNvPr>
+          <p:cNvSpPr>
+            <a:spLocks noGrp="1" noRot="1" noChangeAspect="1" noMove="1" noResize="1" noEditPoints="1" noAdjustHandles="1" noChangeArrowheads="1" noChangeShapeType="1" noTextEdit="1"/>
+          </p:cNvSpPr>
+          <p:nvPr>
+            <p:extLst>
+              <p:ext uri="{386F3935-93C4-4BCD-93E2-E3B085C9AB24}">
+                <p16:designElem xmlns:p16="http://schemas.microsoft.com/office/powerpoint/2015/main" val="1"/>
+              </p:ext>
+            </p:extLst>
+          </p:nvPr>
+        </p:nvSpPr>
+        <p:spPr>
+          <a:xfrm rot="5400000" flipH="1">
+            <a:off x="-1410084" y="1410082"/>
+            <a:ext cx="6858000" cy="4037836"/>
+          </a:xfrm>
+          <a:prstGeom prst="rect">
+            <a:avLst/>
+          </a:prstGeom>
+          <a:gradFill>
+            <a:gsLst>
+              <a:gs pos="8000">
+                <a:srgbClr val="000000"/>
+              </a:gs>
+              <a:gs pos="100000">
+                <a:schemeClr val="accent1">
+                  <a:lumMod val="75000"/>
+                </a:schemeClr>
+              </a:gs>
+            </a:gsLst>
+            <a:lin ang="3000000" scaled="0"/>
+          </a:gradFill>
+          <a:ln>
+            <a:noFill/>
+          </a:ln>
+        </p:spPr>
+        <p:style>
+          <a:lnRef idx="2">
+            <a:schemeClr val="accent1">
+              <a:shade val="50000"/>
+            </a:schemeClr>
+          </a:lnRef>
+          <a:fillRef idx="1">
+            <a:schemeClr val="accent1"/>
+          </a:fillRef>
+          <a:effectRef idx="0">
+            <a:schemeClr val="accent1"/>
+          </a:effectRef>
+          <a:fontRef idx="minor">
+            <a:schemeClr val="lt1"/>
+          </a:fontRef>
+        </p:style>
+        <p:txBody>
+          <a:bodyPr rtlCol="0" anchor="ctr"/>
+          <a:lstStyle/>
+          <a:p>
+            <a:pPr algn="ctr"/>
+            <a:endParaRPr lang="en-US"/>
+          </a:p>
+        </p:txBody>
+      </p:sp>
+      <p:sp>
+        <p:nvSpPr>
+          <p:cNvPr id="15" name="Rectangle 14">
+            <a:extLst>
+              <a:ext uri="{FF2B5EF4-FFF2-40B4-BE49-F238E27FC236}">
+                <a16:creationId xmlns:a16="http://schemas.microsoft.com/office/drawing/2014/main" id="{4300840D-0A0B-4512-BACA-B439D5B9C57C}"/>
+              </a:ext>
+              <a:ext uri="{C183D7F6-B498-43B3-948B-1728B52AA6E4}">
+                <adec:decorative xmlns:adec="http://schemas.microsoft.com/office/drawing/2017/decorative" val="1"/>
+              </a:ext>
+            </a:extLst>
+          </p:cNvPr>
+          <p:cNvSpPr>
+            <a:spLocks noGrp="1" noRot="1" noChangeAspect="1" noMove="1" noResize="1" noEditPoints="1" noAdjustHandles="1" noChangeArrowheads="1" noChangeShapeType="1" noTextEdit="1"/>
+          </p:cNvSpPr>
+          <p:nvPr>
+            <p:extLst>
+              <p:ext uri="{386F3935-93C4-4BCD-93E2-E3B085C9AB24}">
+                <p16:designElem xmlns:p16="http://schemas.microsoft.com/office/powerpoint/2015/main" val="1"/>
+              </p:ext>
+            </p:extLst>
+          </p:nvPr>
+        </p:nvSpPr>
+        <p:spPr>
+          <a:xfrm rot="5400000" flipH="1">
+            <a:off x="-1410085" y="1420219"/>
+            <a:ext cx="6857999" cy="4037839"/>
+          </a:xfrm>
+          <a:prstGeom prst="rect">
+            <a:avLst/>
+          </a:prstGeom>
+          <a:gradFill>
+            <a:gsLst>
+              <a:gs pos="0">
+                <a:srgbClr val="000000">
+                  <a:alpha val="0"/>
+                </a:srgbClr>
+              </a:gs>
+              <a:gs pos="99000">
+                <a:schemeClr val="accent1">
+                  <a:alpha val="46000"/>
+                </a:schemeClr>
+              </a:gs>
+            </a:gsLst>
+            <a:lin ang="1800000" scaled="0"/>
+          </a:gradFill>
+          <a:ln>
+            <a:noFill/>
+          </a:ln>
+        </p:spPr>
+        <p:style>
+          <a:lnRef idx="2">
+            <a:schemeClr val="accent1">
+              <a:shade val="50000"/>
+            </a:schemeClr>
+          </a:lnRef>
+          <a:fillRef idx="1">
+            <a:schemeClr val="accent1"/>
+          </a:fillRef>
+          <a:effectRef idx="0">
+            <a:schemeClr val="accent1"/>
+          </a:effectRef>
+          <a:fontRef idx="minor">
+            <a:schemeClr val="lt1"/>
+          </a:fontRef>
+        </p:style>
+        <p:txBody>
+          <a:bodyPr rtlCol="0" anchor="ctr"/>
+          <a:lstStyle/>
+          <a:p>
+            <a:pPr algn="ctr"/>
+            <a:endParaRPr lang="en-US"/>
+          </a:p>
+        </p:txBody>
+      </p:sp>
+      <p:sp>
+        <p:nvSpPr>
+          <p:cNvPr id="17" name="Rectangle 16">
+            <a:extLst>
+              <a:ext uri="{FF2B5EF4-FFF2-40B4-BE49-F238E27FC236}">
+                <a16:creationId xmlns:a16="http://schemas.microsoft.com/office/drawing/2014/main" id="{D2B78728-A580-49A7-84F9-6EF6F583ADE0}"/>
+              </a:ext>
+              <a:ext uri="{C183D7F6-B498-43B3-948B-1728B52AA6E4}">
+                <adec:decorative xmlns:adec="http://schemas.microsoft.com/office/drawing/2017/decorative" val="1"/>
+              </a:ext>
+            </a:extLst>
+          </p:cNvPr>
+          <p:cNvSpPr>
+            <a:spLocks noGrp="1" noRot="1" noChangeAspect="1" noMove="1" noResize="1" noEditPoints="1" noAdjustHandles="1" noChangeArrowheads="1" noChangeShapeType="1" noTextEdit="1"/>
+          </p:cNvSpPr>
+          <p:nvPr>
+            <p:extLst>
+              <p:ext uri="{386F3935-93C4-4BCD-93E2-E3B085C9AB24}">
+                <p16:designElem xmlns:p16="http://schemas.microsoft.com/office/powerpoint/2015/main" val="1"/>
+              </p:ext>
+            </p:extLst>
+          </p:nvPr>
+        </p:nvSpPr>
+        <p:spPr>
+          <a:xfrm rot="5400000" flipH="1">
+            <a:off x="767923" y="3588085"/>
+            <a:ext cx="2501979" cy="4037841"/>
+          </a:xfrm>
+          <a:prstGeom prst="rect">
+            <a:avLst/>
+          </a:prstGeom>
+          <a:gradFill>
+            <a:gsLst>
+              <a:gs pos="2000">
+                <a:schemeClr val="accent1">
+                  <a:alpha val="29000"/>
+                </a:schemeClr>
+              </a:gs>
+              <a:gs pos="100000">
+                <a:srgbClr val="000000">
+                  <a:alpha val="30000"/>
+                </a:srgbClr>
+              </a:gs>
+            </a:gsLst>
+            <a:lin ang="7800000" scaled="0"/>
+          </a:gradFill>
+          <a:ln>
+            <a:noFill/>
+          </a:ln>
+        </p:spPr>
+        <p:style>
+          <a:lnRef idx="2">
+            <a:schemeClr val="accent1">
+              <a:shade val="50000"/>
+            </a:schemeClr>
+          </a:lnRef>
+          <a:fillRef idx="1">
+            <a:schemeClr val="accent1"/>
+          </a:fillRef>
+          <a:effectRef idx="0">
+            <a:schemeClr val="accent1"/>
+          </a:effectRef>
+          <a:fontRef idx="minor">
+            <a:schemeClr val="lt1"/>
+          </a:fontRef>
+        </p:style>
+        <p:txBody>
+          <a:bodyPr rtlCol="0" anchor="ctr"/>
+          <a:lstStyle/>
+          <a:p>
+            <a:pPr algn="ctr"/>
+            <a:endParaRPr lang="en-US" dirty="0"/>
+          </a:p>
+        </p:txBody>
+      </p:sp>
+      <p:sp>
+        <p:nvSpPr>
+          <p:cNvPr id="19" name="Freeform: Shape 18">
+            <a:extLst>
+              <a:ext uri="{FF2B5EF4-FFF2-40B4-BE49-F238E27FC236}">
+                <a16:creationId xmlns:a16="http://schemas.microsoft.com/office/drawing/2014/main" id="{38FAA1A1-D861-433F-88FA-1E9D6FD31D11}"/>
+              </a:ext>
+              <a:ext uri="{C183D7F6-B498-43B3-948B-1728B52AA6E4}">
+                <adec:decorative xmlns:adec="http://schemas.microsoft.com/office/drawing/2017/decorative" val="1"/>
+              </a:ext>
+            </a:extLst>
+          </p:cNvPr>
+          <p:cNvSpPr>
+            <a:spLocks noGrp="1" noRot="1" noChangeAspect="1" noMove="1" noResize="1" noEditPoints="1" noAdjustHandles="1" noChangeArrowheads="1" noChangeShapeType="1" noTextEdit="1"/>
+          </p:cNvSpPr>
+          <p:nvPr>
+            <p:extLst>
+              <p:ext uri="{386F3935-93C4-4BCD-93E2-E3B085C9AB24}">
+                <p16:designElem xmlns:p16="http://schemas.microsoft.com/office/powerpoint/2015/main" val="1"/>
+              </p:ext>
+            </p:extLst>
+          </p:nvPr>
+        </p:nvSpPr>
+        <p:spPr>
+          <a:xfrm rot="20635413">
+            <a:off x="-501737" y="969718"/>
+            <a:ext cx="3900357" cy="4178958"/>
+          </a:xfrm>
+          <a:custGeom>
+            <a:avLst/>
+            <a:gdLst>
+              <a:gd name="connsiteX0" fmla="*/ 2432225 w 3900357"/>
+              <a:gd name="connsiteY0" fmla="*/ 93939 h 4178958"/>
+              <a:gd name="connsiteX1" fmla="*/ 3900357 w 3900357"/>
+              <a:gd name="connsiteY1" fmla="*/ 2089479 h 4178958"/>
+              <a:gd name="connsiteX2" fmla="*/ 1810878 w 3900357"/>
+              <a:gd name="connsiteY2" fmla="*/ 4178958 h 4178958"/>
+              <a:gd name="connsiteX3" fmla="*/ 78249 w 3900357"/>
+              <a:gd name="connsiteY3" fmla="*/ 3257727 h 4178958"/>
+              <a:gd name="connsiteX4" fmla="*/ 0 w 3900357"/>
+              <a:gd name="connsiteY4" fmla="*/ 3128923 h 4178958"/>
+              <a:gd name="connsiteX5" fmla="*/ 831324 w 3900357"/>
+              <a:gd name="connsiteY5" fmla="*/ 244281 h 4178958"/>
+              <a:gd name="connsiteX6" fmla="*/ 997559 w 3900357"/>
+              <a:gd name="connsiteY6" fmla="*/ 164202 h 4178958"/>
+              <a:gd name="connsiteX7" fmla="*/ 1810878 w 3900357"/>
+              <a:gd name="connsiteY7" fmla="*/ 0 h 4178958"/>
+              <a:gd name="connsiteX8" fmla="*/ 2432225 w 3900357"/>
+              <a:gd name="connsiteY8" fmla="*/ 93939 h 4178958"/>
+            </a:gdLst>
+            <a:ahLst/>
+            <a:cxnLst>
+              <a:cxn ang="0">
+                <a:pos x="connsiteX0" y="connsiteY0"/>
+              </a:cxn>
+              <a:cxn ang="0">
+                <a:pos x="connsiteX1" y="connsiteY1"/>
+              </a:cxn>
+              <a:cxn ang="0">
+                <a:pos x="connsiteX2" y="connsiteY2"/>
+              </a:cxn>
+              <a:cxn ang="0">
+                <a:pos x="connsiteX3" y="connsiteY3"/>
+              </a:cxn>
+              <a:cxn ang="0">
+                <a:pos x="connsiteX4" y="connsiteY4"/>
+              </a:cxn>
+              <a:cxn ang="0">
+                <a:pos x="connsiteX5" y="connsiteY5"/>
+              </a:cxn>
+              <a:cxn ang="0">
+                <a:pos x="connsiteX6" y="connsiteY6"/>
+              </a:cxn>
+              <a:cxn ang="0">
+                <a:pos x="connsiteX7" y="connsiteY7"/>
+              </a:cxn>
+              <a:cxn ang="0">
+                <a:pos x="connsiteX8" y="connsiteY8"/>
+              </a:cxn>
+            </a:cxnLst>
+            <a:rect l="l" t="t" r="r" b="b"/>
+            <a:pathLst>
+              <a:path w="3900357" h="4178958">
+                <a:moveTo>
+                  <a:pt x="2432225" y="93939"/>
+                </a:moveTo>
+                <a:cubicBezTo>
+                  <a:pt x="3282786" y="358491"/>
+                  <a:pt x="3900357" y="1151865"/>
+                  <a:pt x="3900357" y="2089479"/>
+                </a:cubicBezTo>
+                <a:cubicBezTo>
+                  <a:pt x="3900357" y="3243466"/>
+                  <a:pt x="2964865" y="4178958"/>
+                  <a:pt x="1810878" y="4178958"/>
+                </a:cubicBezTo>
+                <a:cubicBezTo>
+                  <a:pt x="1089636" y="4178958"/>
+                  <a:pt x="453744" y="3813531"/>
+                  <a:pt x="78249" y="3257727"/>
+                </a:cubicBezTo>
+                <a:lnTo>
+                  <a:pt x="0" y="3128923"/>
+                </a:lnTo>
+                <a:lnTo>
+                  <a:pt x="831324" y="244281"/>
+                </a:lnTo>
+                <a:lnTo>
+                  <a:pt x="997559" y="164202"/>
+                </a:lnTo>
+                <a:cubicBezTo>
+                  <a:pt x="1247540" y="58468"/>
+                  <a:pt x="1522381" y="0"/>
+                  <a:pt x="1810878" y="0"/>
+                </a:cubicBezTo>
+                <a:cubicBezTo>
+                  <a:pt x="2027251" y="0"/>
+                  <a:pt x="2235942" y="32888"/>
+                  <a:pt x="2432225" y="93939"/>
+                </a:cubicBezTo>
+                <a:close/>
+              </a:path>
+            </a:pathLst>
+          </a:custGeom>
+          <a:gradFill>
+            <a:gsLst>
+              <a:gs pos="29000">
+                <a:srgbClr val="000000">
+                  <a:alpha val="0"/>
+                </a:srgbClr>
+              </a:gs>
+              <a:gs pos="100000">
+                <a:schemeClr val="accent1">
+                  <a:alpha val="43000"/>
+                </a:schemeClr>
+              </a:gs>
+            </a:gsLst>
+            <a:lin ang="1800000" scaled="0"/>
+          </a:gradFill>
+          <a:ln>
+            <a:noFill/>
+          </a:ln>
+        </p:spPr>
+        <p:style>
+          <a:lnRef idx="2">
+            <a:schemeClr val="accent1">
+              <a:shade val="50000"/>
+            </a:schemeClr>
+          </a:lnRef>
+          <a:fillRef idx="1">
+            <a:schemeClr val="accent1"/>
+          </a:fillRef>
+          <a:effectRef idx="0">
+            <a:schemeClr val="accent1"/>
+          </a:effectRef>
+          <a:fontRef idx="minor">
+            <a:schemeClr val="lt1"/>
+          </a:fontRef>
+        </p:style>
+        <p:txBody>
+          <a:bodyPr wrap="square" rtlCol="0" anchor="ctr">
+            <a:noAutofit/>
+          </a:bodyPr>
+          <a:lstStyle/>
+          <a:p>
+            <a:pPr algn="ctr"/>
+            <a:endParaRPr lang="en-US" dirty="0"/>
+          </a:p>
+        </p:txBody>
+      </p:sp>
+      <p:sp>
+        <p:nvSpPr>
+          <p:cNvPr id="21" name="Rectangle 20">
+            <a:extLst>
+              <a:ext uri="{FF2B5EF4-FFF2-40B4-BE49-F238E27FC236}">
+                <a16:creationId xmlns:a16="http://schemas.microsoft.com/office/drawing/2014/main" id="{8D71EDA1-87BF-4D5D-AB79-F346FD19278A}"/>
+              </a:ext>
+              <a:ext uri="{C183D7F6-B498-43B3-948B-1728B52AA6E4}">
+                <adec:decorative xmlns:adec="http://schemas.microsoft.com/office/drawing/2017/decorative" val="1"/>
+              </a:ext>
+            </a:extLst>
+          </p:cNvPr>
+          <p:cNvSpPr>
+            <a:spLocks noGrp="1" noRot="1" noChangeAspect="1" noMove="1" noResize="1" noEditPoints="1" noAdjustHandles="1" noChangeArrowheads="1" noChangeShapeType="1" noTextEdit="1"/>
+          </p:cNvSpPr>
+          <p:nvPr>
+            <p:extLst>
+              <p:ext uri="{386F3935-93C4-4BCD-93E2-E3B085C9AB24}">
+                <p16:designElem xmlns:p16="http://schemas.microsoft.com/office/powerpoint/2015/main" val="1"/>
+              </p:ext>
+            </p:extLst>
+          </p:nvPr>
+        </p:nvSpPr>
+        <p:spPr>
+          <a:xfrm rot="5400000" flipH="1">
+            <a:off x="-1410093" y="1399943"/>
+            <a:ext cx="6858003" cy="4037835"/>
+          </a:xfrm>
+          <a:prstGeom prst="rect">
+            <a:avLst/>
+          </a:prstGeom>
+          <a:gradFill>
+            <a:gsLst>
+              <a:gs pos="0">
+                <a:srgbClr val="000000">
+                  <a:alpha val="0"/>
+                </a:srgbClr>
+              </a:gs>
+              <a:gs pos="99000">
+                <a:schemeClr val="accent1">
+                  <a:lumMod val="60000"/>
+                  <a:lumOff val="40000"/>
+                  <a:alpha val="11000"/>
+                </a:schemeClr>
+              </a:gs>
+            </a:gsLst>
+            <a:lin ang="7200000" scaled="0"/>
+          </a:gradFill>
+          <a:ln>
+            <a:noFill/>
+          </a:ln>
+        </p:spPr>
+        <p:style>
+          <a:lnRef idx="2">
+            <a:schemeClr val="accent1">
+              <a:shade val="50000"/>
+            </a:schemeClr>
+          </a:lnRef>
+          <a:fillRef idx="1">
+            <a:schemeClr val="accent1"/>
+          </a:fillRef>
+          <a:effectRef idx="0">
+            <a:schemeClr val="accent1"/>
+          </a:effectRef>
+          <a:fontRef idx="minor">
+            <a:schemeClr val="lt1"/>
+          </a:fontRef>
+        </p:style>
+        <p:txBody>
+          <a:bodyPr rtlCol="0" anchor="ctr"/>
+          <a:lstStyle/>
+          <a:p>
+            <a:pPr algn="ctr"/>
+            <a:endParaRPr lang="en-US"/>
+          </a:p>
+        </p:txBody>
+      </p:sp>
+      <p:sp>
+        <p:nvSpPr>
+          <p:cNvPr id="2" name="Title 1">
+            <a:extLst>
+              <a:ext uri="{FF2B5EF4-FFF2-40B4-BE49-F238E27FC236}">
+                <a16:creationId xmlns:a16="http://schemas.microsoft.com/office/drawing/2014/main" id="{46E8B0D8-B19A-A5A5-DCF8-4AC7F6306B46}"/>
+              </a:ext>
+            </a:extLst>
+          </p:cNvPr>
+          <p:cNvSpPr>
+            <a:spLocks noGrp="1"/>
+          </p:cNvSpPr>
+          <p:nvPr>
+            <p:ph type="ctrTitle"/>
+          </p:nvPr>
+        </p:nvSpPr>
+        <p:spPr>
+          <a:xfrm>
+            <a:off x="466722" y="586855"/>
+            <a:ext cx="3201366" cy="3387497"/>
+          </a:xfrm>
+        </p:spPr>
+        <p:txBody>
+          <a:bodyPr vert="horz" lIns="91440" tIns="45720" rIns="91440" bIns="45720" rtlCol="0" anchor="b">
+            <a:normAutofit/>
+          </a:bodyPr>
+          <a:lstStyle/>
+          <a:p>
+            <a:pPr algn="r"/>
+            <a:r>
+              <a:rPr lang="en-US" sz="3700" b="1" kern="1200">
+                <a:solidFill>
+                  <a:srgbClr val="FFFFFF"/>
+                </a:solidFill>
+                <a:latin typeface="+mj-lt"/>
+                <a:ea typeface="+mj-ea"/>
+                <a:cs typeface="+mj-cs"/>
+              </a:rPr>
+              <a:t>Αλγόριθμοι Δρομολόγησης (Packet Scheduling)</a:t>
+            </a:r>
+            <a:br>
+              <a:rPr lang="en-US" sz="3700" kern="1200">
+                <a:solidFill>
+                  <a:srgbClr val="FFFFFF"/>
+                </a:solidFill>
+                <a:latin typeface="+mj-lt"/>
+                <a:ea typeface="+mj-ea"/>
+                <a:cs typeface="+mj-cs"/>
+              </a:rPr>
+            </a:br>
+            <a:endParaRPr lang="en-US" sz="3700" kern="1200">
+              <a:solidFill>
+                <a:srgbClr val="FFFFFF"/>
+              </a:solidFill>
+              <a:latin typeface="+mj-lt"/>
+              <a:ea typeface="+mj-ea"/>
+              <a:cs typeface="+mj-cs"/>
+            </a:endParaRPr>
+          </a:p>
+        </p:txBody>
+      </p:sp>
+      <p:sp>
+        <p:nvSpPr>
+          <p:cNvPr id="4" name="Rectangle 1">
+            <a:extLst>
+              <a:ext uri="{FF2B5EF4-FFF2-40B4-BE49-F238E27FC236}">
+                <a16:creationId xmlns:a16="http://schemas.microsoft.com/office/drawing/2014/main" id="{8B4A9130-7BB4-9E05-E108-123BBF57E729}"/>
+              </a:ext>
+            </a:extLst>
+          </p:cNvPr>
+          <p:cNvSpPr>
+            <a:spLocks noGrp="1" noChangeArrowheads="1"/>
+          </p:cNvSpPr>
+          <p:nvPr>
+            <p:ph type="subTitle" idx="1"/>
+          </p:nvPr>
+        </p:nvSpPr>
+        <p:spPr bwMode="auto">
+          <a:xfrm>
+            <a:off x="4810259" y="649480"/>
+            <a:ext cx="6555347" cy="5546047"/>
+          </a:xfrm>
+          <a:prstGeom prst="rect">
+            <a:avLst/>
+          </a:prstGeom>
+          <a:extLst>
+            <a:ext uri="{909E8E84-426E-40DD-AFC4-6F175D3DCCD1}">
+              <a14:hiddenFill xmlns:a14="http://schemas.microsoft.com/office/drawing/2010/main">
+                <a:solidFill>
+                  <a:schemeClr val="accent1"/>
+                </a:solidFill>
+              </a14:hiddenFill>
+            </a:ext>
+            <a:ext uri="{91240B29-F687-4F45-9708-019B960494DF}">
+              <a14:hiddenLine xmlns:a14="http://schemas.microsoft.com/office/drawing/2010/main" w="9525">
+                <a:solidFill>
+                  <a:schemeClr val="tx1"/>
+                </a:solidFill>
+                <a:miter lim="800000"/>
+                <a:headEnd/>
+                <a:tailEnd/>
+              </a14:hiddenLine>
+            </a:ext>
+            <a:ext uri="{AF507438-7753-43E0-B8FC-AC1667EBCBE1}">
+              <a14:hiddenEffects xmlns:a14="http://schemas.microsoft.com/office/drawing/2010/main">
+                <a:effectLst>
+                  <a:outerShdw dist="35921" dir="2700000" algn="ctr" rotWithShape="0">
+                    <a:schemeClr val="bg2"/>
+                  </a:outerShdw>
+                </a:effectLst>
+              </a14:hiddenEffects>
+            </a:ext>
+          </a:extLst>
+        </p:spPr>
+        <p:txBody>
+          <a:bodyPr vert="horz" lIns="91440" tIns="45720" rIns="91440" bIns="45720" numCol="1" rtlCol="0" anchor="ctr" anchorCtr="0" compatLnSpc="1">
+            <a:prstTxWarp prst="textNoShape">
+              <a:avLst/>
+            </a:prstTxWarp>
+            <a:normAutofit/>
+          </a:bodyPr>
+          <a:lstStyle/>
+          <a:p>
+            <a:pPr marL="0" marR="0" lvl="0" indent="-228600" algn="l" fontAlgn="base">
+              <a:spcBef>
+                <a:spcPct val="0"/>
+              </a:spcBef>
+              <a:spcAft>
+                <a:spcPts val="600"/>
+              </a:spcAft>
+              <a:buClrTx/>
+              <a:buSzTx/>
+              <a:buFont typeface="Arial" panose="020B0604020202020204" pitchFamily="34" charset="0"/>
+              <a:buChar char="•"/>
+              <a:tabLst/>
+            </a:pPr>
+            <a:r>
+              <a:rPr kumimoji="0" lang="en-US" altLang="en-US" sz="2000" b="1" i="0" u="none" strike="noStrike" cap="none" normalizeH="0" baseline="0" dirty="0">
+                <a:ln>
+                  <a:noFill/>
+                </a:ln>
+                <a:effectLst/>
+              </a:rPr>
+              <a:t>Ο </a:t>
+            </a:r>
+            <a:r>
+              <a:rPr kumimoji="0" lang="en-US" altLang="en-US" sz="2000" b="1" i="0" u="none" strike="noStrike" cap="none" normalizeH="0" baseline="0" dirty="0" err="1">
+                <a:ln>
+                  <a:noFill/>
+                </a:ln>
+                <a:effectLst/>
+              </a:rPr>
+              <a:t>Στόχος</a:t>
+            </a:r>
+            <a:r>
+              <a:rPr kumimoji="0" lang="en-US" altLang="en-US" sz="2000" b="1" i="0" u="none" strike="noStrike" cap="none" normalizeH="0" baseline="0" dirty="0">
+                <a:ln>
+                  <a:noFill/>
+                </a:ln>
+                <a:effectLst/>
+              </a:rPr>
+              <a:t>:</a:t>
+            </a:r>
+            <a:endParaRPr kumimoji="0" lang="en-US" altLang="en-US" sz="2000" b="0" i="0" u="none" strike="noStrike" cap="none" normalizeH="0" baseline="0" dirty="0">
+              <a:ln>
+                <a:noFill/>
+              </a:ln>
+              <a:effectLst/>
+            </a:endParaRPr>
+          </a:p>
+          <a:p>
+            <a:pPr marL="0" marR="0" lvl="0" indent="-228600" algn="l" fontAlgn="base">
+              <a:spcBef>
+                <a:spcPct val="0"/>
+              </a:spcBef>
+              <a:spcAft>
+                <a:spcPts val="600"/>
+              </a:spcAft>
+              <a:buClrTx/>
+              <a:buSzTx/>
+              <a:buFont typeface="Arial" panose="020B0604020202020204" pitchFamily="34" charset="0"/>
+              <a:buChar char="•"/>
+              <a:tabLst/>
+            </a:pPr>
+            <a:r>
+              <a:rPr kumimoji="0" lang="en-US" altLang="en-US" sz="2000" b="0" i="0" u="none" strike="noStrike" cap="none" normalizeH="0" baseline="0" dirty="0">
+                <a:ln>
+                  <a:noFill/>
+                </a:ln>
+                <a:effectLst/>
+              </a:rPr>
+              <a:t>Να </a:t>
+            </a:r>
+            <a:r>
+              <a:rPr kumimoji="0" lang="en-US" altLang="en-US" sz="2000" b="0" i="0" u="none" strike="noStrike" cap="none" normalizeH="0" baseline="0" dirty="0" err="1">
+                <a:ln>
+                  <a:noFill/>
+                </a:ln>
+                <a:effectLst/>
+              </a:rPr>
+              <a:t>συγκρίνουμε</a:t>
+            </a:r>
+            <a:r>
+              <a:rPr kumimoji="0" lang="en-US" altLang="en-US" sz="2000" b="0" i="0" u="none" strike="noStrike" cap="none" normalizeH="0" baseline="0" dirty="0">
+                <a:ln>
+                  <a:noFill/>
+                </a:ln>
+                <a:effectLst/>
+              </a:rPr>
+              <a:t> π</a:t>
+            </a:r>
+            <a:r>
+              <a:rPr kumimoji="0" lang="en-US" altLang="en-US" sz="2000" b="0" i="0" u="none" strike="noStrike" cap="none" normalizeH="0" baseline="0" dirty="0" err="1">
+                <a:ln>
+                  <a:noFill/>
+                </a:ln>
+                <a:effectLst/>
+              </a:rPr>
+              <a:t>ώς</a:t>
+            </a:r>
+            <a:r>
+              <a:rPr kumimoji="0" lang="en-US" altLang="en-US" sz="2000" b="0" i="0" u="none" strike="noStrike" cap="none" normalizeH="0" baseline="0" dirty="0">
+                <a:ln>
+                  <a:noFill/>
+                </a:ln>
+                <a:effectLst/>
+              </a:rPr>
+              <a:t> </a:t>
+            </a:r>
+            <a:r>
+              <a:rPr kumimoji="0" lang="en-US" altLang="en-US" sz="2000" b="0" i="0" u="none" strike="noStrike" cap="none" normalizeH="0" baseline="0" dirty="0" err="1">
+                <a:ln>
+                  <a:noFill/>
+                </a:ln>
+                <a:effectLst/>
+              </a:rPr>
+              <a:t>δι</a:t>
+            </a:r>
+            <a:r>
+              <a:rPr kumimoji="0" lang="en-US" altLang="en-US" sz="2000" b="0" i="0" u="none" strike="noStrike" cap="none" normalizeH="0" baseline="0" dirty="0">
+                <a:ln>
+                  <a:noFill/>
+                </a:ln>
+                <a:effectLst/>
+              </a:rPr>
+              <a:t>αχειρίζονται την ουρά δύο διαφορετικοί αλγόριθμοι: </a:t>
+            </a:r>
+            <a:r>
+              <a:rPr kumimoji="0" lang="en-US" altLang="en-US" sz="2000" b="1" i="0" u="none" strike="noStrike" cap="none" normalizeH="0" baseline="0" dirty="0">
+                <a:ln>
+                  <a:noFill/>
+                </a:ln>
+                <a:effectLst/>
+              </a:rPr>
+              <a:t>FCFS</a:t>
+            </a:r>
+            <a:r>
+              <a:rPr kumimoji="0" lang="en-US" altLang="en-US" sz="2000" b="0" i="0" u="none" strike="noStrike" cap="none" normalizeH="0" baseline="0" dirty="0">
+                <a:ln>
+                  <a:noFill/>
+                </a:ln>
+                <a:effectLst/>
+              </a:rPr>
+              <a:t> vs. </a:t>
+            </a:r>
+            <a:r>
+              <a:rPr kumimoji="0" lang="en-US" altLang="en-US" sz="2000" b="1" i="0" u="none" strike="noStrike" cap="none" normalizeH="0" baseline="0" dirty="0">
+                <a:ln>
+                  <a:noFill/>
+                </a:ln>
+                <a:effectLst/>
+              </a:rPr>
+              <a:t>Round-Robin</a:t>
+            </a:r>
+            <a:r>
+              <a:rPr kumimoji="0" lang="en-US" altLang="en-US" sz="2000" b="0" i="0" u="none" strike="noStrike" cap="none" normalizeH="0" baseline="0" dirty="0">
+                <a:ln>
+                  <a:noFill/>
+                </a:ln>
+                <a:effectLst/>
+              </a:rPr>
+              <a:t>.</a:t>
+            </a:r>
+          </a:p>
+          <a:p>
+            <a:pPr marL="0" marR="0" lvl="0" indent="-228600" algn="l" fontAlgn="base">
+              <a:spcBef>
+                <a:spcPct val="0"/>
+              </a:spcBef>
+              <a:spcAft>
+                <a:spcPts val="600"/>
+              </a:spcAft>
+              <a:buClrTx/>
+              <a:buSzTx/>
+              <a:buFont typeface="Arial" panose="020B0604020202020204" pitchFamily="34" charset="0"/>
+              <a:buChar char="•"/>
+              <a:tabLst/>
+            </a:pPr>
+            <a:r>
+              <a:rPr kumimoji="0" lang="en-US" altLang="en-US" sz="2000" b="1" i="0" u="none" strike="noStrike" cap="none" normalizeH="0" baseline="0" dirty="0" err="1">
+                <a:ln>
+                  <a:noFill/>
+                </a:ln>
+                <a:effectLst/>
+              </a:rPr>
+              <a:t>Το</a:t>
+            </a:r>
+            <a:r>
+              <a:rPr kumimoji="0" lang="en-US" altLang="en-US" sz="2000" b="1" i="0" u="none" strike="noStrike" cap="none" normalizeH="0" baseline="0" dirty="0">
+                <a:ln>
+                  <a:noFill/>
+                </a:ln>
+                <a:effectLst/>
+              </a:rPr>
+              <a:t> </a:t>
+            </a:r>
+            <a:r>
+              <a:rPr kumimoji="0" lang="en-US" altLang="en-US" sz="2000" b="1" i="0" u="none" strike="noStrike" cap="none" normalizeH="0" baseline="0" dirty="0" err="1">
+                <a:ln>
+                  <a:noFill/>
+                </a:ln>
+                <a:effectLst/>
+              </a:rPr>
+              <a:t>Σενάριο</a:t>
+            </a:r>
+            <a:r>
+              <a:rPr kumimoji="0" lang="en-US" altLang="en-US" sz="2000" b="1" i="0" u="none" strike="noStrike" cap="none" normalizeH="0" baseline="0" dirty="0">
+                <a:ln>
+                  <a:noFill/>
+                </a:ln>
+                <a:effectLst/>
+              </a:rPr>
+              <a:t> "Mixed Traffic" (</a:t>
+            </a:r>
+            <a:r>
+              <a:rPr kumimoji="0" lang="en-US" altLang="en-US" sz="2000" b="1" i="0" u="none" strike="noStrike" cap="none" normalizeH="0" baseline="0" dirty="0" err="1">
+                <a:ln>
+                  <a:noFill/>
+                </a:ln>
+                <a:effectLst/>
+              </a:rPr>
+              <a:t>Ασύμμετρη</a:t>
+            </a:r>
+            <a:r>
+              <a:rPr kumimoji="0" lang="en-US" altLang="en-US" sz="2000" b="1" i="0" u="none" strike="noStrike" cap="none" normalizeH="0" baseline="0" dirty="0">
+                <a:ln>
+                  <a:noFill/>
+                </a:ln>
+                <a:effectLst/>
+              </a:rPr>
+              <a:t> </a:t>
+            </a:r>
+            <a:r>
+              <a:rPr kumimoji="0" lang="en-US" altLang="en-US" sz="2000" b="1" i="0" u="none" strike="noStrike" cap="none" normalizeH="0" baseline="0" dirty="0" err="1">
+                <a:ln>
+                  <a:noFill/>
+                </a:ln>
+                <a:effectLst/>
+              </a:rPr>
+              <a:t>Κίνηση</a:t>
+            </a:r>
+            <a:r>
+              <a:rPr kumimoji="0" lang="en-US" altLang="en-US" sz="2000" b="1" i="0" u="none" strike="noStrike" cap="none" normalizeH="0" baseline="0" dirty="0">
+                <a:ln>
+                  <a:noFill/>
+                </a:ln>
+                <a:effectLst/>
+              </a:rPr>
+              <a:t>):</a:t>
+            </a:r>
+            <a:endParaRPr kumimoji="0" lang="en-US" altLang="en-US" sz="2000" b="0" i="0" u="none" strike="noStrike" cap="none" normalizeH="0" baseline="0" dirty="0">
+              <a:ln>
+                <a:noFill/>
+              </a:ln>
+              <a:effectLst/>
+            </a:endParaRPr>
+          </a:p>
+          <a:p>
+            <a:pPr marL="0" marR="0" lvl="0" indent="-228600" algn="l" fontAlgn="base">
+              <a:spcBef>
+                <a:spcPct val="0"/>
+              </a:spcBef>
+              <a:spcAft>
+                <a:spcPts val="600"/>
+              </a:spcAft>
+              <a:buClrTx/>
+              <a:buSzTx/>
+              <a:buFont typeface="Arial" panose="020B0604020202020204" pitchFamily="34" charset="0"/>
+              <a:buChar char="•"/>
+              <a:tabLst/>
+            </a:pPr>
+            <a:r>
+              <a:rPr kumimoji="0" lang="en-US" altLang="en-US" sz="2000" b="0" i="0" u="none" strike="noStrike" cap="none" normalizeH="0" baseline="0" dirty="0" err="1">
+                <a:ln>
+                  <a:noFill/>
+                </a:ln>
+                <a:effectLst/>
+              </a:rPr>
+              <a:t>Χρησιμο</a:t>
+            </a:r>
+            <a:r>
+              <a:rPr kumimoji="0" lang="en-US" altLang="en-US" sz="2000" b="0" i="0" u="none" strike="noStrike" cap="none" normalizeH="0" baseline="0" dirty="0">
+                <a:ln>
+                  <a:noFill/>
+                </a:ln>
+                <a:effectLst/>
+              </a:rPr>
+              <a:t>ποιούμε το δίκτυο του Ερωτήματος 7.</a:t>
+            </a:r>
+          </a:p>
+          <a:p>
+            <a:pPr marL="0" marR="0" lvl="0" indent="-228600" algn="l" fontAlgn="base">
+              <a:spcBef>
+                <a:spcPct val="0"/>
+              </a:spcBef>
+              <a:spcAft>
+                <a:spcPts val="600"/>
+              </a:spcAft>
+              <a:buClrTx/>
+              <a:buSzTx/>
+              <a:buFont typeface="Arial" panose="020B0604020202020204" pitchFamily="34" charset="0"/>
+              <a:buChar char="•"/>
+              <a:tabLst/>
+            </a:pPr>
+            <a:r>
+              <a:rPr kumimoji="0" lang="en-US" altLang="en-US" sz="2000" b="1" i="0" u="none" strike="noStrike" cap="none" normalizeH="0" baseline="0" dirty="0">
+                <a:ln>
+                  <a:noFill/>
+                </a:ln>
+                <a:effectLst/>
+              </a:rPr>
+              <a:t>Host A:</a:t>
+            </a:r>
+            <a:r>
+              <a:rPr kumimoji="0" lang="en-US" altLang="en-US" sz="2000" b="0" i="0" u="none" strike="noStrike" cap="none" normalizeH="0" baseline="0" dirty="0">
+                <a:ln>
+                  <a:noFill/>
+                </a:ln>
+                <a:effectLst/>
+              </a:rPr>
+              <a:t> </a:t>
+            </a:r>
+            <a:r>
+              <a:rPr kumimoji="0" lang="en-US" altLang="en-US" sz="2000" b="0" i="0" u="none" strike="noStrike" cap="none" normalizeH="0" baseline="0" dirty="0" err="1">
+                <a:ln>
+                  <a:noFill/>
+                </a:ln>
+                <a:effectLst/>
+              </a:rPr>
+              <a:t>Στέλνει</a:t>
+            </a:r>
+            <a:r>
+              <a:rPr kumimoji="0" lang="en-US" altLang="en-US" sz="2000" b="0" i="0" u="none" strike="noStrike" cap="none" normalizeH="0" baseline="0" dirty="0">
+                <a:ln>
+                  <a:noFill/>
+                </a:ln>
+                <a:effectLst/>
+              </a:rPr>
+              <a:t> </a:t>
+            </a:r>
+            <a:r>
+              <a:rPr kumimoji="0" lang="en-US" altLang="en-US" sz="2000" b="1" i="0" u="none" strike="noStrike" cap="none" normalizeH="0" baseline="0" dirty="0" err="1">
+                <a:ln>
+                  <a:noFill/>
+                </a:ln>
+                <a:effectLst/>
+              </a:rPr>
+              <a:t>μικρά</a:t>
+            </a:r>
+            <a:r>
+              <a:rPr kumimoji="0" lang="en-US" altLang="en-US" sz="2000" b="1" i="0" u="none" strike="noStrike" cap="none" normalizeH="0" baseline="0" dirty="0">
+                <a:ln>
+                  <a:noFill/>
+                </a:ln>
+                <a:effectLst/>
+              </a:rPr>
+              <a:t> πα</a:t>
+            </a:r>
+            <a:r>
+              <a:rPr kumimoji="0" lang="en-US" altLang="en-US" sz="2000" b="1" i="0" u="none" strike="noStrike" cap="none" normalizeH="0" baseline="0" dirty="0" err="1">
+                <a:ln>
+                  <a:noFill/>
+                </a:ln>
+                <a:effectLst/>
+              </a:rPr>
+              <a:t>κέτ</a:t>
+            </a:r>
+            <a:r>
+              <a:rPr kumimoji="0" lang="en-US" altLang="en-US" sz="2000" b="1" i="0" u="none" strike="noStrike" cap="none" normalizeH="0" baseline="0" dirty="0">
+                <a:ln>
+                  <a:noFill/>
+                </a:ln>
+                <a:effectLst/>
+              </a:rPr>
+              <a:t>α</a:t>
+            </a:r>
+            <a:r>
+              <a:rPr kumimoji="0" lang="en-US" altLang="en-US" sz="2000" b="0" i="0" u="none" strike="noStrike" cap="none" normalizeH="0" baseline="0" dirty="0">
+                <a:ln>
+                  <a:noFill/>
+                </a:ln>
+                <a:effectLst/>
+              </a:rPr>
+              <a:t>.</a:t>
+            </a:r>
+          </a:p>
+          <a:p>
+            <a:pPr marL="0" marR="0" lvl="0" indent="-228600" algn="l" fontAlgn="base">
+              <a:spcBef>
+                <a:spcPct val="0"/>
+              </a:spcBef>
+              <a:spcAft>
+                <a:spcPts val="600"/>
+              </a:spcAft>
+              <a:buClrTx/>
+              <a:buSzTx/>
+              <a:buFont typeface="Arial" panose="020B0604020202020204" pitchFamily="34" charset="0"/>
+              <a:buChar char="•"/>
+              <a:tabLst/>
+            </a:pPr>
+            <a:r>
+              <a:rPr kumimoji="0" lang="en-US" altLang="en-US" sz="2000" b="1" i="0" u="none" strike="noStrike" cap="none" normalizeH="0" baseline="0" dirty="0">
+                <a:ln>
+                  <a:noFill/>
+                </a:ln>
+                <a:effectLst/>
+              </a:rPr>
+              <a:t>Host B:</a:t>
+            </a:r>
+            <a:r>
+              <a:rPr kumimoji="0" lang="en-US" altLang="en-US" sz="2000" b="0" i="0" u="none" strike="noStrike" cap="none" normalizeH="0" baseline="0" dirty="0">
+                <a:ln>
+                  <a:noFill/>
+                </a:ln>
+                <a:effectLst/>
+              </a:rPr>
+              <a:t> </a:t>
+            </a:r>
+            <a:r>
+              <a:rPr kumimoji="0" lang="en-US" altLang="en-US" sz="2000" b="0" i="0" u="none" strike="noStrike" cap="none" normalizeH="0" baseline="0" dirty="0" err="1">
+                <a:ln>
+                  <a:noFill/>
+                </a:ln>
+                <a:effectLst/>
+              </a:rPr>
+              <a:t>Στέλνει</a:t>
+            </a:r>
+            <a:r>
+              <a:rPr kumimoji="0" lang="en-US" altLang="en-US" sz="2000" b="0" i="0" u="none" strike="noStrike" cap="none" normalizeH="0" baseline="0" dirty="0">
+                <a:ln>
+                  <a:noFill/>
+                </a:ln>
+                <a:effectLst/>
+              </a:rPr>
+              <a:t> </a:t>
+            </a:r>
+            <a:r>
+              <a:rPr kumimoji="0" lang="en-US" altLang="en-US" sz="2000" b="1" i="0" u="none" strike="noStrike" cap="none" normalizeH="0" baseline="0" dirty="0" err="1">
+                <a:ln>
+                  <a:noFill/>
+                </a:ln>
+                <a:effectLst/>
+              </a:rPr>
+              <a:t>μεγάλ</a:t>
+            </a:r>
+            <a:r>
+              <a:rPr kumimoji="0" lang="en-US" altLang="en-US" sz="2000" b="1" i="0" u="none" strike="noStrike" cap="none" normalizeH="0" baseline="0" dirty="0">
+                <a:ln>
+                  <a:noFill/>
+                </a:ln>
+                <a:effectLst/>
+              </a:rPr>
+              <a:t>α πακέτα</a:t>
+            </a:r>
+            <a:r>
+              <a:rPr kumimoji="0" lang="en-US" altLang="en-US" sz="2000" b="0" i="0" u="none" strike="noStrike" cap="none" normalizeH="0" baseline="0" dirty="0">
+                <a:ln>
+                  <a:noFill/>
+                </a:ln>
+                <a:effectLst/>
+              </a:rPr>
+              <a:t> (3000 Bytes).</a:t>
+            </a:r>
+          </a:p>
+          <a:p>
+            <a:pPr marL="0" marR="0" lvl="0" indent="-228600" algn="l" fontAlgn="base">
+              <a:spcBef>
+                <a:spcPct val="0"/>
+              </a:spcBef>
+              <a:spcAft>
+                <a:spcPts val="600"/>
+              </a:spcAft>
+              <a:buClrTx/>
+              <a:buSzTx/>
+              <a:buFont typeface="Arial" panose="020B0604020202020204" pitchFamily="34" charset="0"/>
+              <a:buChar char="•"/>
+              <a:tabLst/>
+            </a:pPr>
+            <a:r>
+              <a:rPr kumimoji="0" lang="en-US" altLang="en-US" sz="2000" b="1" i="0" u="none" strike="noStrike" cap="none" normalizeH="0" baseline="0" dirty="0" err="1">
+                <a:ln>
+                  <a:noFill/>
+                </a:ln>
+                <a:effectLst/>
+              </a:rPr>
+              <a:t>Το</a:t>
+            </a:r>
+            <a:r>
+              <a:rPr kumimoji="0" lang="en-US" altLang="en-US" sz="2000" b="1" i="0" u="none" strike="noStrike" cap="none" normalizeH="0" baseline="0" dirty="0">
+                <a:ln>
+                  <a:noFill/>
+                </a:ln>
+                <a:effectLst/>
+              </a:rPr>
+              <a:t> </a:t>
+            </a:r>
+            <a:r>
+              <a:rPr kumimoji="0" lang="en-US" altLang="en-US" sz="2000" b="1" i="0" u="none" strike="noStrike" cap="none" normalizeH="0" baseline="0" dirty="0" err="1">
+                <a:ln>
+                  <a:noFill/>
+                </a:ln>
+                <a:effectLst/>
+              </a:rPr>
+              <a:t>Ερώτημ</a:t>
+            </a:r>
+            <a:r>
+              <a:rPr kumimoji="0" lang="en-US" altLang="en-US" sz="2000" b="1" i="0" u="none" strike="noStrike" cap="none" normalizeH="0" baseline="0" dirty="0">
+                <a:ln>
+                  <a:noFill/>
+                </a:ln>
+                <a:effectLst/>
+              </a:rPr>
+              <a:t>α:</a:t>
+            </a:r>
+            <a:endParaRPr kumimoji="0" lang="en-US" altLang="en-US" sz="2000" b="0" i="0" u="none" strike="noStrike" cap="none" normalizeH="0" baseline="0" dirty="0">
+              <a:ln>
+                <a:noFill/>
+              </a:ln>
+              <a:effectLst/>
+            </a:endParaRPr>
+          </a:p>
+          <a:p>
+            <a:pPr marL="0" marR="0" lvl="0" indent="-228600" algn="l" fontAlgn="base">
+              <a:spcBef>
+                <a:spcPct val="0"/>
+              </a:spcBef>
+              <a:spcAft>
+                <a:spcPts val="600"/>
+              </a:spcAft>
+              <a:buClrTx/>
+              <a:buSzTx/>
+              <a:buFont typeface="Arial" panose="020B0604020202020204" pitchFamily="34" charset="0"/>
+              <a:buChar char="•"/>
+              <a:tabLst/>
+            </a:pPr>
+            <a:r>
+              <a:rPr kumimoji="0" lang="en-US" altLang="en-US" sz="2000" b="0" i="0" u="none" strike="noStrike" cap="none" normalizeH="0" baseline="0" dirty="0">
+                <a:ln>
+                  <a:noFill/>
+                </a:ln>
+                <a:effectLst/>
+              </a:rPr>
+              <a:t>Θα επ</a:t>
+            </a:r>
+            <a:r>
+              <a:rPr kumimoji="0" lang="en-US" altLang="en-US" sz="2000" b="0" i="0" u="none" strike="noStrike" cap="none" normalizeH="0" baseline="0" dirty="0" err="1">
+                <a:ln>
+                  <a:noFill/>
+                </a:ln>
+                <a:effectLst/>
+              </a:rPr>
+              <a:t>ηρεάσουν</a:t>
+            </a:r>
+            <a:r>
+              <a:rPr kumimoji="0" lang="en-US" altLang="en-US" sz="2000" b="0" i="0" u="none" strike="noStrike" cap="none" normalizeH="0" baseline="0" dirty="0">
+                <a:ln>
+                  <a:noFill/>
+                </a:ln>
+                <a:effectLst/>
+              </a:rPr>
+              <a:t> τα "βα</a:t>
+            </a:r>
+            <a:r>
+              <a:rPr kumimoji="0" lang="en-US" altLang="en-US" sz="2000" b="0" i="0" u="none" strike="noStrike" cap="none" normalizeH="0" baseline="0" dirty="0" err="1">
+                <a:ln>
+                  <a:noFill/>
+                </a:ln>
+                <a:effectLst/>
+              </a:rPr>
+              <a:t>ριά</a:t>
+            </a:r>
+            <a:r>
+              <a:rPr kumimoji="0" lang="en-US" altLang="en-US" sz="2000" b="0" i="0" u="none" strike="noStrike" cap="none" normalizeH="0" baseline="0" dirty="0">
+                <a:ln>
+                  <a:noFill/>
+                </a:ln>
+                <a:effectLst/>
+              </a:rPr>
+              <a:t>" πα</a:t>
+            </a:r>
+            <a:r>
+              <a:rPr kumimoji="0" lang="en-US" altLang="en-US" sz="2000" b="0" i="0" u="none" strike="noStrike" cap="none" normalizeH="0" baseline="0" dirty="0" err="1">
+                <a:ln>
+                  <a:noFill/>
+                </a:ln>
+                <a:effectLst/>
+              </a:rPr>
+              <a:t>κέτ</a:t>
+            </a:r>
+            <a:r>
+              <a:rPr kumimoji="0" lang="en-US" altLang="en-US" sz="2000" b="0" i="0" u="none" strike="noStrike" cap="none" normalizeH="0" baseline="0" dirty="0">
+                <a:ln>
+                  <a:noFill/>
+                </a:ln>
+                <a:effectLst/>
+              </a:rPr>
+              <a:t>α του Host B την ταχύτητα των "γρήγορων" πακέτων του Host A;</a:t>
+            </a:r>
+          </a:p>
+          <a:p>
+            <a:pPr marL="0" marR="0" lvl="0" indent="-228600" algn="l" fontAlgn="base">
+              <a:spcBef>
+                <a:spcPct val="0"/>
+              </a:spcBef>
+              <a:spcAft>
+                <a:spcPts val="600"/>
+              </a:spcAft>
+              <a:buClrTx/>
+              <a:buSzTx/>
+              <a:buFont typeface="Arial" panose="020B0604020202020204" pitchFamily="34" charset="0"/>
+              <a:buChar char="•"/>
+              <a:tabLst/>
+            </a:pPr>
+            <a:endParaRPr kumimoji="0" lang="en-US" altLang="en-US" sz="2000" b="0" i="0" u="none" strike="noStrike" cap="none" normalizeH="0" baseline="0" dirty="0">
+              <a:ln>
+                <a:noFill/>
+              </a:ln>
+              <a:effectLst/>
+            </a:endParaRPr>
+          </a:p>
+        </p:txBody>
+      </p:sp>
+    </p:spTree>
+    <p:extLst>
+      <p:ext uri="{BB962C8B-B14F-4D97-AF65-F5344CB8AC3E}">
+        <p14:creationId xmlns:p14="http://schemas.microsoft.com/office/powerpoint/2010/main" val="1257977303"/>
+      </p:ext>
+    </p:extLst>
+  </p:cSld>
+  <p:clrMapOvr>
+    <a:masterClrMapping/>
+  </p:clrMapOvr>
+</p:sld>
+</file>
+
+<file path=ppt/slides/slide32.xml><?xml version="1.0" encoding="utf-8"?>
+<p:sld xmlns:a="http://schemas.openxmlformats.org/drawingml/2006/main" xmlns:r="http://schemas.openxmlformats.org/officeDocument/2006/relationships" xmlns:p="http://schemas.openxmlformats.org/presentationml/2006/main">
+  <p:cSld>
+    <p:bg>
+      <p:bgPr>
+        <a:solidFill>
+          <a:schemeClr val="bg1"/>
+        </a:solidFill>
+        <a:effectLst/>
+      </p:bgPr>
+    </p:bg>
+    <p:spTree>
+      <p:nvGrpSpPr>
+        <p:cNvPr id="1" name=""/>
+        <p:cNvGrpSpPr/>
+        <p:nvPr/>
+      </p:nvGrpSpPr>
+      <p:grpSpPr>
+        <a:xfrm>
+          <a:off x="0" y="0"/>
+          <a:ext cx="0" cy="0"/>
+          <a:chOff x="0" y="0"/>
+          <a:chExt cx="0" cy="0"/>
+        </a:xfrm>
+      </p:grpSpPr>
+      <p:sp useBgFill="1">
+        <p:nvSpPr>
+          <p:cNvPr id="9" name="Rectangle 8">
+            <a:extLst>
+              <a:ext uri="{FF2B5EF4-FFF2-40B4-BE49-F238E27FC236}">
+                <a16:creationId xmlns:a16="http://schemas.microsoft.com/office/drawing/2014/main" id="{09588DA8-065E-4F6F-8EFD-43104AB2E0CF}"/>
+              </a:ext>
+              <a:ext uri="{C183D7F6-B498-43B3-948B-1728B52AA6E4}">
+                <adec:decorative xmlns:adec="http://schemas.microsoft.com/office/drawing/2017/decorative" val="1"/>
+              </a:ext>
+            </a:extLst>
+          </p:cNvPr>
+          <p:cNvSpPr>
+            <a:spLocks noGrp="1" noRot="1" noChangeAspect="1" noMove="1" noResize="1" noEditPoints="1" noAdjustHandles="1" noChangeArrowheads="1" noChangeShapeType="1" noTextEdit="1"/>
+          </p:cNvSpPr>
+          <p:nvPr>
+            <p:extLst>
+              <p:ext uri="{386F3935-93C4-4BCD-93E2-E3B085C9AB24}">
+                <p16:designElem xmlns:p16="http://schemas.microsoft.com/office/powerpoint/2015/main" val="1"/>
+              </p:ext>
+            </p:extLst>
+          </p:nvPr>
+        </p:nvSpPr>
+        <p:spPr>
+          <a:xfrm>
+            <a:off x="0" y="0"/>
+            <a:ext cx="12192000" cy="6858000"/>
+          </a:xfrm>
+          <a:prstGeom prst="rect">
+            <a:avLst/>
+          </a:prstGeom>
+          <a:ln w="12700" cap="flat" cmpd="sng" algn="ctr">
+            <a:noFill/>
+            <a:prstDash val="solid"/>
+            <a:miter lim="800000"/>
+          </a:ln>
+          <a:effectLst/>
+          <a:extLst>
+            <a:ext uri="{91240B29-F687-4F45-9708-019B960494DF}">
+              <a14:hiddenLine xmlns:a14="http://schemas.microsoft.com/office/drawing/2010/main" w="12700" cap="flat" cmpd="sng" algn="ctr">
+                <a:solidFill>
+                  <a:schemeClr val="accent1">
+                    <a:shade val="50000"/>
+                  </a:schemeClr>
+                </a:solidFill>
+                <a:prstDash val="solid"/>
+                <a:miter lim="800000"/>
+              </a14:hiddenLine>
+            </a:ext>
+          </a:extLst>
+        </p:spPr>
+        <p:style>
+          <a:lnRef idx="2">
+            <a:schemeClr val="accent1">
+              <a:shade val="50000"/>
+            </a:schemeClr>
+          </a:lnRef>
+          <a:fillRef idx="1">
+            <a:schemeClr val="accent1"/>
+          </a:fillRef>
+          <a:effectRef idx="0">
+            <a:schemeClr val="accent1"/>
+          </a:effectRef>
+          <a:fontRef idx="minor">
+            <a:schemeClr val="lt1"/>
+          </a:fontRef>
+        </p:style>
+        <p:txBody>
+          <a:bodyPr rtlCol="0" anchor="ctr"/>
+          <a:lstStyle/>
+          <a:p>
+            <a:pPr algn="ctr"/>
+            <a:endParaRPr lang="en-US"/>
+          </a:p>
+        </p:txBody>
+      </p:sp>
+      <p:sp useBgFill="1">
+        <p:nvSpPr>
+          <p:cNvPr id="11" name="Rectangle 10">
+            <a:extLst>
+              <a:ext uri="{FF2B5EF4-FFF2-40B4-BE49-F238E27FC236}">
+                <a16:creationId xmlns:a16="http://schemas.microsoft.com/office/drawing/2014/main" id="{C4285719-470E-454C-AF62-8323075F1F5B}"/>
+              </a:ext>
+              <a:ext uri="{C183D7F6-B498-43B3-948B-1728B52AA6E4}">
+                <adec:decorative xmlns:adec="http://schemas.microsoft.com/office/drawing/2017/decorative" val="1"/>
+              </a:ext>
+            </a:extLst>
+          </p:cNvPr>
+          <p:cNvSpPr>
+            <a:spLocks noGrp="1" noRot="1" noChangeAspect="1" noMove="1" noResize="1" noEditPoints="1" noAdjustHandles="1" noChangeArrowheads="1" noChangeShapeType="1" noTextEdit="1"/>
+          </p:cNvSpPr>
+          <p:nvPr>
+            <p:extLst>
+              <p:ext uri="{386F3935-93C4-4BCD-93E2-E3B085C9AB24}">
+                <p16:designElem xmlns:p16="http://schemas.microsoft.com/office/powerpoint/2015/main" val="1"/>
+              </p:ext>
+            </p:extLst>
+          </p:nvPr>
+        </p:nvSpPr>
+        <p:spPr>
+          <a:xfrm>
+            <a:off x="0" y="0"/>
+            <a:ext cx="12188952" cy="6858000"/>
+          </a:xfrm>
+          <a:prstGeom prst="rect">
+            <a:avLst/>
+          </a:prstGeom>
+          <a:ln w="12700" cap="flat" cmpd="sng" algn="ctr">
+            <a:noFill/>
+            <a:prstDash val="solid"/>
+            <a:miter lim="800000"/>
+          </a:ln>
+          <a:effectLst/>
+          <a:extLst>
+            <a:ext uri="{91240B29-F687-4F45-9708-019B960494DF}">
+              <a14:hiddenLine xmlns:a14="http://schemas.microsoft.com/office/drawing/2010/main" w="12700" cap="flat" cmpd="sng" algn="ctr">
+                <a:solidFill>
+                  <a:schemeClr val="accent1">
+                    <a:shade val="50000"/>
+                  </a:schemeClr>
+                </a:solidFill>
+                <a:prstDash val="solid"/>
+                <a:miter lim="800000"/>
+              </a14:hiddenLine>
+            </a:ext>
+          </a:extLst>
+        </p:spPr>
+        <p:style>
+          <a:lnRef idx="2">
+            <a:schemeClr val="accent1">
+              <a:shade val="50000"/>
+            </a:schemeClr>
+          </a:lnRef>
+          <a:fillRef idx="1">
+            <a:schemeClr val="accent1"/>
+          </a:fillRef>
+          <a:effectRef idx="0">
+            <a:schemeClr val="accent1"/>
+          </a:effectRef>
+          <a:fontRef idx="minor">
+            <a:schemeClr val="lt1"/>
+          </a:fontRef>
+        </p:style>
+        <p:txBody>
+          <a:bodyPr rtlCol="0" anchor="ctr"/>
+          <a:lstStyle/>
+          <a:p>
+            <a:pPr algn="ctr"/>
+            <a:endParaRPr lang="en-US"/>
+          </a:p>
+        </p:txBody>
+      </p:sp>
+      <p:sp>
+        <p:nvSpPr>
+          <p:cNvPr id="13" name="Rectangle 12">
+            <a:extLst>
+              <a:ext uri="{FF2B5EF4-FFF2-40B4-BE49-F238E27FC236}">
+                <a16:creationId xmlns:a16="http://schemas.microsoft.com/office/drawing/2014/main" id="{CD9FE4EF-C4D8-49A0-B2FF-81D8DB7D8A24}"/>
+              </a:ext>
+              <a:ext uri="{C183D7F6-B498-43B3-948B-1728B52AA6E4}">
+                <adec:decorative xmlns:adec="http://schemas.microsoft.com/office/drawing/2017/decorative" val="1"/>
+              </a:ext>
+            </a:extLst>
+          </p:cNvPr>
+          <p:cNvSpPr>
+            <a:spLocks noGrp="1" noRot="1" noChangeAspect="1" noMove="1" noResize="1" noEditPoints="1" noAdjustHandles="1" noChangeArrowheads="1" noChangeShapeType="1" noTextEdit="1"/>
+          </p:cNvSpPr>
+          <p:nvPr>
+            <p:extLst>
+              <p:ext uri="{386F3935-93C4-4BCD-93E2-E3B085C9AB24}">
+                <p16:designElem xmlns:p16="http://schemas.microsoft.com/office/powerpoint/2015/main" val="1"/>
+              </p:ext>
+            </p:extLst>
+          </p:nvPr>
+        </p:nvSpPr>
+        <p:spPr>
+          <a:xfrm rot="5400000" flipH="1">
+            <a:off x="-1410084" y="1410082"/>
+            <a:ext cx="6858000" cy="4037836"/>
+          </a:xfrm>
+          <a:prstGeom prst="rect">
+            <a:avLst/>
+          </a:prstGeom>
+          <a:gradFill>
+            <a:gsLst>
+              <a:gs pos="8000">
+                <a:srgbClr val="000000"/>
+              </a:gs>
+              <a:gs pos="100000">
+                <a:schemeClr val="accent1">
+                  <a:lumMod val="75000"/>
+                </a:schemeClr>
+              </a:gs>
+            </a:gsLst>
+            <a:lin ang="3000000" scaled="0"/>
+          </a:gradFill>
+          <a:ln>
+            <a:noFill/>
+          </a:ln>
+        </p:spPr>
+        <p:style>
+          <a:lnRef idx="2">
+            <a:schemeClr val="accent1">
+              <a:shade val="50000"/>
+            </a:schemeClr>
+          </a:lnRef>
+          <a:fillRef idx="1">
+            <a:schemeClr val="accent1"/>
+          </a:fillRef>
+          <a:effectRef idx="0">
+            <a:schemeClr val="accent1"/>
+          </a:effectRef>
+          <a:fontRef idx="minor">
+            <a:schemeClr val="lt1"/>
+          </a:fontRef>
+        </p:style>
+        <p:txBody>
+          <a:bodyPr rtlCol="0" anchor="ctr"/>
+          <a:lstStyle/>
+          <a:p>
+            <a:pPr algn="ctr"/>
+            <a:endParaRPr lang="en-US"/>
+          </a:p>
+        </p:txBody>
+      </p:sp>
+      <p:sp>
+        <p:nvSpPr>
+          <p:cNvPr id="15" name="Rectangle 14">
+            <a:extLst>
+              <a:ext uri="{FF2B5EF4-FFF2-40B4-BE49-F238E27FC236}">
+                <a16:creationId xmlns:a16="http://schemas.microsoft.com/office/drawing/2014/main" id="{4300840D-0A0B-4512-BACA-B439D5B9C57C}"/>
+              </a:ext>
+              <a:ext uri="{C183D7F6-B498-43B3-948B-1728B52AA6E4}">
+                <adec:decorative xmlns:adec="http://schemas.microsoft.com/office/drawing/2017/decorative" val="1"/>
+              </a:ext>
+            </a:extLst>
+          </p:cNvPr>
+          <p:cNvSpPr>
+            <a:spLocks noGrp="1" noRot="1" noChangeAspect="1" noMove="1" noResize="1" noEditPoints="1" noAdjustHandles="1" noChangeArrowheads="1" noChangeShapeType="1" noTextEdit="1"/>
+          </p:cNvSpPr>
+          <p:nvPr>
+            <p:extLst>
+              <p:ext uri="{386F3935-93C4-4BCD-93E2-E3B085C9AB24}">
+                <p16:designElem xmlns:p16="http://schemas.microsoft.com/office/powerpoint/2015/main" val="1"/>
+              </p:ext>
+            </p:extLst>
+          </p:nvPr>
+        </p:nvSpPr>
+        <p:spPr>
+          <a:xfrm rot="5400000" flipH="1">
+            <a:off x="-1410085" y="1420219"/>
+            <a:ext cx="6857999" cy="4037839"/>
+          </a:xfrm>
+          <a:prstGeom prst="rect">
+            <a:avLst/>
+          </a:prstGeom>
+          <a:gradFill>
+            <a:gsLst>
+              <a:gs pos="0">
+                <a:srgbClr val="000000">
+                  <a:alpha val="0"/>
+                </a:srgbClr>
+              </a:gs>
+              <a:gs pos="99000">
+                <a:schemeClr val="accent1">
+                  <a:alpha val="46000"/>
+                </a:schemeClr>
+              </a:gs>
+            </a:gsLst>
+            <a:lin ang="1800000" scaled="0"/>
+          </a:gradFill>
+          <a:ln>
+            <a:noFill/>
+          </a:ln>
+        </p:spPr>
+        <p:style>
+          <a:lnRef idx="2">
+            <a:schemeClr val="accent1">
+              <a:shade val="50000"/>
+            </a:schemeClr>
+          </a:lnRef>
+          <a:fillRef idx="1">
+            <a:schemeClr val="accent1"/>
+          </a:fillRef>
+          <a:effectRef idx="0">
+            <a:schemeClr val="accent1"/>
+          </a:effectRef>
+          <a:fontRef idx="minor">
+            <a:schemeClr val="lt1"/>
+          </a:fontRef>
+        </p:style>
+        <p:txBody>
+          <a:bodyPr rtlCol="0" anchor="ctr"/>
+          <a:lstStyle/>
+          <a:p>
+            <a:pPr algn="ctr"/>
+            <a:endParaRPr lang="en-US"/>
+          </a:p>
+        </p:txBody>
+      </p:sp>
+      <p:sp>
+        <p:nvSpPr>
+          <p:cNvPr id="17" name="Rectangle 16">
+            <a:extLst>
+              <a:ext uri="{FF2B5EF4-FFF2-40B4-BE49-F238E27FC236}">
+                <a16:creationId xmlns:a16="http://schemas.microsoft.com/office/drawing/2014/main" id="{D2B78728-A580-49A7-84F9-6EF6F583ADE0}"/>
+              </a:ext>
+              <a:ext uri="{C183D7F6-B498-43B3-948B-1728B52AA6E4}">
+                <adec:decorative xmlns:adec="http://schemas.microsoft.com/office/drawing/2017/decorative" val="1"/>
+              </a:ext>
+            </a:extLst>
+          </p:cNvPr>
+          <p:cNvSpPr>
+            <a:spLocks noGrp="1" noRot="1" noChangeAspect="1" noMove="1" noResize="1" noEditPoints="1" noAdjustHandles="1" noChangeArrowheads="1" noChangeShapeType="1" noTextEdit="1"/>
+          </p:cNvSpPr>
+          <p:nvPr>
+            <p:extLst>
+              <p:ext uri="{386F3935-93C4-4BCD-93E2-E3B085C9AB24}">
+                <p16:designElem xmlns:p16="http://schemas.microsoft.com/office/powerpoint/2015/main" val="1"/>
+              </p:ext>
+            </p:extLst>
+          </p:nvPr>
+        </p:nvSpPr>
+        <p:spPr>
+          <a:xfrm rot="5400000" flipH="1">
+            <a:off x="767923" y="3588085"/>
+            <a:ext cx="2501979" cy="4037841"/>
+          </a:xfrm>
+          <a:prstGeom prst="rect">
+            <a:avLst/>
+          </a:prstGeom>
+          <a:gradFill>
+            <a:gsLst>
+              <a:gs pos="2000">
+                <a:schemeClr val="accent1">
+                  <a:alpha val="29000"/>
+                </a:schemeClr>
+              </a:gs>
+              <a:gs pos="100000">
+                <a:srgbClr val="000000">
+                  <a:alpha val="30000"/>
+                </a:srgbClr>
+              </a:gs>
+            </a:gsLst>
+            <a:lin ang="7800000" scaled="0"/>
+          </a:gradFill>
+          <a:ln>
+            <a:noFill/>
+          </a:ln>
+        </p:spPr>
+        <p:style>
+          <a:lnRef idx="2">
+            <a:schemeClr val="accent1">
+              <a:shade val="50000"/>
+            </a:schemeClr>
+          </a:lnRef>
+          <a:fillRef idx="1">
+            <a:schemeClr val="accent1"/>
+          </a:fillRef>
+          <a:effectRef idx="0">
+            <a:schemeClr val="accent1"/>
+          </a:effectRef>
+          <a:fontRef idx="minor">
+            <a:schemeClr val="lt1"/>
+          </a:fontRef>
+        </p:style>
+        <p:txBody>
+          <a:bodyPr rtlCol="0" anchor="ctr"/>
+          <a:lstStyle/>
+          <a:p>
+            <a:pPr algn="ctr"/>
+            <a:endParaRPr lang="en-US" dirty="0"/>
+          </a:p>
+        </p:txBody>
+      </p:sp>
+      <p:sp>
+        <p:nvSpPr>
+          <p:cNvPr id="19" name="Freeform: Shape 18">
+            <a:extLst>
+              <a:ext uri="{FF2B5EF4-FFF2-40B4-BE49-F238E27FC236}">
+                <a16:creationId xmlns:a16="http://schemas.microsoft.com/office/drawing/2014/main" id="{38FAA1A1-D861-433F-88FA-1E9D6FD31D11}"/>
+              </a:ext>
+              <a:ext uri="{C183D7F6-B498-43B3-948B-1728B52AA6E4}">
+                <adec:decorative xmlns:adec="http://schemas.microsoft.com/office/drawing/2017/decorative" val="1"/>
+              </a:ext>
+            </a:extLst>
+          </p:cNvPr>
+          <p:cNvSpPr>
+            <a:spLocks noGrp="1" noRot="1" noChangeAspect="1" noMove="1" noResize="1" noEditPoints="1" noAdjustHandles="1" noChangeArrowheads="1" noChangeShapeType="1" noTextEdit="1"/>
+          </p:cNvSpPr>
+          <p:nvPr>
+            <p:extLst>
+              <p:ext uri="{386F3935-93C4-4BCD-93E2-E3B085C9AB24}">
+                <p16:designElem xmlns:p16="http://schemas.microsoft.com/office/powerpoint/2015/main" val="1"/>
+              </p:ext>
+            </p:extLst>
+          </p:nvPr>
+        </p:nvSpPr>
+        <p:spPr>
+          <a:xfrm rot="20635413">
+            <a:off x="-501737" y="969718"/>
+            <a:ext cx="3900357" cy="4178958"/>
+          </a:xfrm>
+          <a:custGeom>
+            <a:avLst/>
+            <a:gdLst>
+              <a:gd name="connsiteX0" fmla="*/ 2432225 w 3900357"/>
+              <a:gd name="connsiteY0" fmla="*/ 93939 h 4178958"/>
+              <a:gd name="connsiteX1" fmla="*/ 3900357 w 3900357"/>
+              <a:gd name="connsiteY1" fmla="*/ 2089479 h 4178958"/>
+              <a:gd name="connsiteX2" fmla="*/ 1810878 w 3900357"/>
+              <a:gd name="connsiteY2" fmla="*/ 4178958 h 4178958"/>
+              <a:gd name="connsiteX3" fmla="*/ 78249 w 3900357"/>
+              <a:gd name="connsiteY3" fmla="*/ 3257727 h 4178958"/>
+              <a:gd name="connsiteX4" fmla="*/ 0 w 3900357"/>
+              <a:gd name="connsiteY4" fmla="*/ 3128923 h 4178958"/>
+              <a:gd name="connsiteX5" fmla="*/ 831324 w 3900357"/>
+              <a:gd name="connsiteY5" fmla="*/ 244281 h 4178958"/>
+              <a:gd name="connsiteX6" fmla="*/ 997559 w 3900357"/>
+              <a:gd name="connsiteY6" fmla="*/ 164202 h 4178958"/>
+              <a:gd name="connsiteX7" fmla="*/ 1810878 w 3900357"/>
+              <a:gd name="connsiteY7" fmla="*/ 0 h 4178958"/>
+              <a:gd name="connsiteX8" fmla="*/ 2432225 w 3900357"/>
+              <a:gd name="connsiteY8" fmla="*/ 93939 h 4178958"/>
+            </a:gdLst>
+            <a:ahLst/>
+            <a:cxnLst>
+              <a:cxn ang="0">
+                <a:pos x="connsiteX0" y="connsiteY0"/>
+              </a:cxn>
+              <a:cxn ang="0">
+                <a:pos x="connsiteX1" y="connsiteY1"/>
+              </a:cxn>
+              <a:cxn ang="0">
+                <a:pos x="connsiteX2" y="connsiteY2"/>
+              </a:cxn>
+              <a:cxn ang="0">
+                <a:pos x="connsiteX3" y="connsiteY3"/>
+              </a:cxn>
+              <a:cxn ang="0">
+                <a:pos x="connsiteX4" y="connsiteY4"/>
+              </a:cxn>
+              <a:cxn ang="0">
+                <a:pos x="connsiteX5" y="connsiteY5"/>
+              </a:cxn>
+              <a:cxn ang="0">
+                <a:pos x="connsiteX6" y="connsiteY6"/>
+              </a:cxn>
+              <a:cxn ang="0">
+                <a:pos x="connsiteX7" y="connsiteY7"/>
+              </a:cxn>
+              <a:cxn ang="0">
+                <a:pos x="connsiteX8" y="connsiteY8"/>
+              </a:cxn>
+            </a:cxnLst>
+            <a:rect l="l" t="t" r="r" b="b"/>
+            <a:pathLst>
+              <a:path w="3900357" h="4178958">
+                <a:moveTo>
+                  <a:pt x="2432225" y="93939"/>
+                </a:moveTo>
+                <a:cubicBezTo>
+                  <a:pt x="3282786" y="358491"/>
+                  <a:pt x="3900357" y="1151865"/>
+                  <a:pt x="3900357" y="2089479"/>
+                </a:cubicBezTo>
+                <a:cubicBezTo>
+                  <a:pt x="3900357" y="3243466"/>
+                  <a:pt x="2964865" y="4178958"/>
+                  <a:pt x="1810878" y="4178958"/>
+                </a:cubicBezTo>
+                <a:cubicBezTo>
+                  <a:pt x="1089636" y="4178958"/>
+                  <a:pt x="453744" y="3813531"/>
+                  <a:pt x="78249" y="3257727"/>
+                </a:cubicBezTo>
+                <a:lnTo>
+                  <a:pt x="0" y="3128923"/>
+                </a:lnTo>
+                <a:lnTo>
+                  <a:pt x="831324" y="244281"/>
+                </a:lnTo>
+                <a:lnTo>
+                  <a:pt x="997559" y="164202"/>
+                </a:lnTo>
+                <a:cubicBezTo>
+                  <a:pt x="1247540" y="58468"/>
+                  <a:pt x="1522381" y="0"/>
+                  <a:pt x="1810878" y="0"/>
+                </a:cubicBezTo>
+                <a:cubicBezTo>
+                  <a:pt x="2027251" y="0"/>
+                  <a:pt x="2235942" y="32888"/>
+                  <a:pt x="2432225" y="93939"/>
+                </a:cubicBezTo>
+                <a:close/>
+              </a:path>
+            </a:pathLst>
+          </a:custGeom>
+          <a:gradFill>
+            <a:gsLst>
+              <a:gs pos="29000">
+                <a:srgbClr val="000000">
+                  <a:alpha val="0"/>
+                </a:srgbClr>
+              </a:gs>
+              <a:gs pos="100000">
+                <a:schemeClr val="accent1">
+                  <a:alpha val="43000"/>
+                </a:schemeClr>
+              </a:gs>
+            </a:gsLst>
+            <a:lin ang="1800000" scaled="0"/>
+          </a:gradFill>
+          <a:ln>
+            <a:noFill/>
+          </a:ln>
+        </p:spPr>
+        <p:style>
+          <a:lnRef idx="2">
+            <a:schemeClr val="accent1">
+              <a:shade val="50000"/>
+            </a:schemeClr>
+          </a:lnRef>
+          <a:fillRef idx="1">
+            <a:schemeClr val="accent1"/>
+          </a:fillRef>
+          <a:effectRef idx="0">
+            <a:schemeClr val="accent1"/>
+          </a:effectRef>
+          <a:fontRef idx="minor">
+            <a:schemeClr val="lt1"/>
+          </a:fontRef>
+        </p:style>
+        <p:txBody>
+          <a:bodyPr wrap="square" rtlCol="0" anchor="ctr">
+            <a:noAutofit/>
+          </a:bodyPr>
+          <a:lstStyle/>
+          <a:p>
+            <a:pPr algn="ctr"/>
+            <a:endParaRPr lang="en-US" dirty="0"/>
+          </a:p>
+        </p:txBody>
+      </p:sp>
+      <p:sp>
+        <p:nvSpPr>
+          <p:cNvPr id="21" name="Rectangle 20">
+            <a:extLst>
+              <a:ext uri="{FF2B5EF4-FFF2-40B4-BE49-F238E27FC236}">
+                <a16:creationId xmlns:a16="http://schemas.microsoft.com/office/drawing/2014/main" id="{8D71EDA1-87BF-4D5D-AB79-F346FD19278A}"/>
+              </a:ext>
+              <a:ext uri="{C183D7F6-B498-43B3-948B-1728B52AA6E4}">
+                <adec:decorative xmlns:adec="http://schemas.microsoft.com/office/drawing/2017/decorative" val="1"/>
+              </a:ext>
+            </a:extLst>
+          </p:cNvPr>
+          <p:cNvSpPr>
+            <a:spLocks noGrp="1" noRot="1" noChangeAspect="1" noMove="1" noResize="1" noEditPoints="1" noAdjustHandles="1" noChangeArrowheads="1" noChangeShapeType="1" noTextEdit="1"/>
+          </p:cNvSpPr>
+          <p:nvPr>
+            <p:extLst>
+              <p:ext uri="{386F3935-93C4-4BCD-93E2-E3B085C9AB24}">
+                <p16:designElem xmlns:p16="http://schemas.microsoft.com/office/powerpoint/2015/main" val="1"/>
+              </p:ext>
+            </p:extLst>
+          </p:nvPr>
+        </p:nvSpPr>
+        <p:spPr>
+          <a:xfrm rot="5400000" flipH="1">
+            <a:off x="-1410093" y="1399943"/>
+            <a:ext cx="6858003" cy="4037835"/>
+          </a:xfrm>
+          <a:prstGeom prst="rect">
+            <a:avLst/>
+          </a:prstGeom>
+          <a:gradFill>
+            <a:gsLst>
+              <a:gs pos="0">
+                <a:srgbClr val="000000">
+                  <a:alpha val="0"/>
+                </a:srgbClr>
+              </a:gs>
+              <a:gs pos="99000">
+                <a:schemeClr val="accent1">
+                  <a:lumMod val="60000"/>
+                  <a:lumOff val="40000"/>
+                  <a:alpha val="11000"/>
+                </a:schemeClr>
+              </a:gs>
+            </a:gsLst>
+            <a:lin ang="7200000" scaled="0"/>
+          </a:gradFill>
+          <a:ln>
+            <a:noFill/>
+          </a:ln>
+        </p:spPr>
+        <p:style>
+          <a:lnRef idx="2">
+            <a:schemeClr val="accent1">
+              <a:shade val="50000"/>
+            </a:schemeClr>
+          </a:lnRef>
+          <a:fillRef idx="1">
+            <a:schemeClr val="accent1"/>
+          </a:fillRef>
+          <a:effectRef idx="0">
+            <a:schemeClr val="accent1"/>
+          </a:effectRef>
+          <a:fontRef idx="minor">
+            <a:schemeClr val="lt1"/>
+          </a:fontRef>
+        </p:style>
+        <p:txBody>
+          <a:bodyPr rtlCol="0" anchor="ctr"/>
+          <a:lstStyle/>
+          <a:p>
+            <a:pPr algn="ctr"/>
+            <a:endParaRPr lang="en-US"/>
+          </a:p>
+        </p:txBody>
+      </p:sp>
+      <p:sp>
+        <p:nvSpPr>
+          <p:cNvPr id="2" name="Title 1">
+            <a:extLst>
+              <a:ext uri="{FF2B5EF4-FFF2-40B4-BE49-F238E27FC236}">
+                <a16:creationId xmlns:a16="http://schemas.microsoft.com/office/drawing/2014/main" id="{A2ACDD01-EB94-2E76-BEEB-BDC8D76D2320}"/>
+              </a:ext>
+            </a:extLst>
+          </p:cNvPr>
+          <p:cNvSpPr>
+            <a:spLocks noGrp="1"/>
+          </p:cNvSpPr>
+          <p:nvPr>
+            <p:ph type="ctrTitle"/>
+          </p:nvPr>
+        </p:nvSpPr>
+        <p:spPr>
+          <a:xfrm>
+            <a:off x="466722" y="586855"/>
+            <a:ext cx="3201366" cy="3387497"/>
+          </a:xfrm>
+        </p:spPr>
+        <p:txBody>
+          <a:bodyPr vert="horz" lIns="91440" tIns="45720" rIns="91440" bIns="45720" rtlCol="0" anchor="b">
+            <a:normAutofit/>
+          </a:bodyPr>
+          <a:lstStyle/>
+          <a:p>
+            <a:r>
+              <a:rPr lang="en-US" sz="4000" kern="1200" dirty="0">
+                <a:solidFill>
+                  <a:srgbClr val="FFFFFF"/>
+                </a:solidFill>
+                <a:latin typeface="+mj-lt"/>
+                <a:ea typeface="+mj-ea"/>
+                <a:cs typeface="+mj-cs"/>
+              </a:rPr>
+              <a:t>First-Come-First-Serve (FCFS): </a:t>
+            </a:r>
+            <a:r>
+              <a:rPr lang="en-US" sz="4000" kern="1200" dirty="0" err="1">
+                <a:solidFill>
+                  <a:srgbClr val="FFFFFF"/>
+                </a:solidFill>
+                <a:latin typeface="+mj-lt"/>
+                <a:ea typeface="+mj-ea"/>
+                <a:cs typeface="+mj-cs"/>
+              </a:rPr>
+              <a:t>Το</a:t>
+            </a:r>
+            <a:r>
+              <a:rPr lang="en-US" sz="4000" kern="1200" dirty="0">
+                <a:solidFill>
+                  <a:srgbClr val="FFFFFF"/>
+                </a:solidFill>
+                <a:latin typeface="+mj-lt"/>
+                <a:ea typeface="+mj-ea"/>
+                <a:cs typeface="+mj-cs"/>
+              </a:rPr>
+              <a:t> </a:t>
+            </a:r>
+            <a:r>
+              <a:rPr lang="en-US" sz="4000" kern="1200" dirty="0" err="1">
+                <a:solidFill>
+                  <a:srgbClr val="FFFFFF"/>
+                </a:solidFill>
+                <a:latin typeface="+mj-lt"/>
+                <a:ea typeface="+mj-ea"/>
+                <a:cs typeface="+mj-cs"/>
+              </a:rPr>
+              <a:t>Πρό</a:t>
+            </a:r>
+            <a:r>
+              <a:rPr lang="en-US" sz="4000" kern="1200" dirty="0">
+                <a:solidFill>
+                  <a:srgbClr val="FFFFFF"/>
+                </a:solidFill>
+                <a:latin typeface="+mj-lt"/>
+                <a:ea typeface="+mj-ea"/>
+                <a:cs typeface="+mj-cs"/>
+              </a:rPr>
+              <a:t>βλημα</a:t>
+            </a:r>
+          </a:p>
+        </p:txBody>
+      </p:sp>
+      <p:sp>
+        <p:nvSpPr>
+          <p:cNvPr id="4" name="Rectangle 1">
+            <a:extLst>
+              <a:ext uri="{FF2B5EF4-FFF2-40B4-BE49-F238E27FC236}">
+                <a16:creationId xmlns:a16="http://schemas.microsoft.com/office/drawing/2014/main" id="{0B836619-28D4-C291-AC90-0F1A315AC8CD}"/>
+              </a:ext>
+            </a:extLst>
+          </p:cNvPr>
+          <p:cNvSpPr>
+            <a:spLocks noGrp="1" noChangeArrowheads="1"/>
+          </p:cNvSpPr>
+          <p:nvPr>
+            <p:ph type="subTitle" idx="1"/>
+          </p:nvPr>
+        </p:nvSpPr>
+        <p:spPr bwMode="auto">
+          <a:xfrm>
+            <a:off x="4810259" y="649480"/>
+            <a:ext cx="6555347" cy="5546047"/>
+          </a:xfrm>
+          <a:prstGeom prst="rect">
+            <a:avLst/>
+          </a:prstGeom>
+          <a:extLst>
+            <a:ext uri="{909E8E84-426E-40DD-AFC4-6F175D3DCCD1}">
+              <a14:hiddenFill xmlns:a14="http://schemas.microsoft.com/office/drawing/2010/main">
+                <a:solidFill>
+                  <a:schemeClr val="accent1"/>
+                </a:solidFill>
+              </a14:hiddenFill>
+            </a:ext>
+            <a:ext uri="{91240B29-F687-4F45-9708-019B960494DF}">
+              <a14:hiddenLine xmlns:a14="http://schemas.microsoft.com/office/drawing/2010/main" w="9525">
+                <a:solidFill>
+                  <a:schemeClr val="tx1"/>
+                </a:solidFill>
+                <a:miter lim="800000"/>
+                <a:headEnd/>
+                <a:tailEnd/>
+              </a14:hiddenLine>
+            </a:ext>
+            <a:ext uri="{AF507438-7753-43E0-B8FC-AC1667EBCBE1}">
+              <a14:hiddenEffects xmlns:a14="http://schemas.microsoft.com/office/drawing/2010/main">
+                <a:effectLst>
+                  <a:outerShdw dist="35921" dir="2700000" algn="ctr" rotWithShape="0">
+                    <a:schemeClr val="bg2"/>
+                  </a:outerShdw>
+                </a:effectLst>
+              </a14:hiddenEffects>
+            </a:ext>
+          </a:extLst>
+        </p:spPr>
+        <p:txBody>
+          <a:bodyPr vert="horz" lIns="91440" tIns="45720" rIns="91440" bIns="45720" numCol="1" rtlCol="0" anchor="ctr" anchorCtr="0" compatLnSpc="1">
+            <a:prstTxWarp prst="textNoShape">
+              <a:avLst/>
+            </a:prstTxWarp>
+            <a:normAutofit/>
+          </a:bodyPr>
+          <a:lstStyle/>
+          <a:p>
+            <a:pPr marL="0" marR="0" lvl="0" indent="-228600" algn="l" fontAlgn="base">
+              <a:spcBef>
+                <a:spcPct val="0"/>
+              </a:spcBef>
+              <a:spcAft>
+                <a:spcPts val="600"/>
+              </a:spcAft>
+              <a:buClrTx/>
+              <a:buSzTx/>
+              <a:buFont typeface="Arial" panose="020B0604020202020204" pitchFamily="34" charset="0"/>
+              <a:buChar char="•"/>
+              <a:tabLst/>
+            </a:pPr>
+            <a:r>
+              <a:rPr kumimoji="0" lang="en-US" altLang="en-US" sz="2000" b="1" i="0" u="none" strike="noStrike" cap="none" normalizeH="0" baseline="0" dirty="0">
+                <a:ln>
+                  <a:noFill/>
+                </a:ln>
+                <a:effectLst/>
+              </a:rPr>
+              <a:t>Η </a:t>
+            </a:r>
+            <a:r>
+              <a:rPr kumimoji="0" lang="en-US" altLang="en-US" sz="2000" b="1" i="0" u="none" strike="noStrike" cap="none" normalizeH="0" baseline="0" dirty="0" err="1">
+                <a:ln>
+                  <a:noFill/>
+                </a:ln>
+                <a:effectLst/>
+              </a:rPr>
+              <a:t>Λογική</a:t>
+            </a:r>
+            <a:r>
+              <a:rPr kumimoji="0" lang="en-US" altLang="en-US" sz="2000" b="1" i="0" u="none" strike="noStrike" cap="none" normalizeH="0" baseline="0" dirty="0">
+                <a:ln>
+                  <a:noFill/>
+                </a:ln>
+                <a:effectLst/>
+              </a:rPr>
+              <a:t>:</a:t>
+            </a:r>
+            <a:endParaRPr kumimoji="0" lang="en-US" altLang="en-US" sz="2000" b="0" i="0" u="none" strike="noStrike" cap="none" normalizeH="0" baseline="0" dirty="0">
+              <a:ln>
+                <a:noFill/>
+              </a:ln>
+              <a:effectLst/>
+            </a:endParaRPr>
+          </a:p>
+          <a:p>
+            <a:pPr marL="0" marR="0" lvl="0" indent="-228600" algn="l" fontAlgn="base">
+              <a:spcBef>
+                <a:spcPct val="0"/>
+              </a:spcBef>
+              <a:spcAft>
+                <a:spcPts val="600"/>
+              </a:spcAft>
+              <a:buClrTx/>
+              <a:buSzTx/>
+              <a:buFont typeface="Arial" panose="020B0604020202020204" pitchFamily="34" charset="0"/>
+              <a:buChar char="•"/>
+              <a:tabLst/>
+            </a:pPr>
+            <a:r>
+              <a:rPr kumimoji="0" lang="en-US" altLang="en-US" sz="2000" b="0" i="0" u="none" strike="noStrike" cap="none" normalizeH="0" baseline="0" dirty="0" err="1">
+                <a:ln>
+                  <a:noFill/>
+                </a:ln>
+                <a:effectLst/>
+              </a:rPr>
+              <a:t>Μί</a:t>
+            </a:r>
+            <a:r>
+              <a:rPr kumimoji="0" lang="en-US" altLang="en-US" sz="2000" b="0" i="0" u="none" strike="noStrike" cap="none" normalizeH="0" baseline="0" dirty="0">
+                <a:ln>
+                  <a:noFill/>
+                </a:ln>
+                <a:effectLst/>
+              </a:rPr>
+              <a:t>α κοινή ουρά για όλους. "Όπ</a:t>
+            </a:r>
+            <a:r>
+              <a:rPr kumimoji="0" lang="en-US" altLang="en-US" sz="2000" b="0" i="0" u="none" strike="noStrike" cap="none" normalizeH="0" baseline="0" dirty="0" err="1">
+                <a:ln>
+                  <a:noFill/>
+                </a:ln>
+                <a:effectLst/>
+              </a:rPr>
+              <a:t>οιος</a:t>
+            </a:r>
+            <a:r>
+              <a:rPr kumimoji="0" lang="en-US" altLang="en-US" sz="2000" b="0" i="0" u="none" strike="noStrike" cap="none" normalizeH="0" baseline="0" dirty="0">
+                <a:ln>
+                  <a:noFill/>
+                </a:ln>
+                <a:effectLst/>
+              </a:rPr>
+              <a:t> π</a:t>
+            </a:r>
+            <a:r>
+              <a:rPr kumimoji="0" lang="en-US" altLang="en-US" sz="2000" b="0" i="0" u="none" strike="noStrike" cap="none" normalizeH="0" baseline="0" dirty="0" err="1">
+                <a:ln>
+                  <a:noFill/>
+                </a:ln>
+                <a:effectLst/>
+              </a:rPr>
+              <a:t>ρόλ</a:t>
+            </a:r>
+            <a:r>
+              <a:rPr kumimoji="0" lang="en-US" altLang="en-US" sz="2000" b="0" i="0" u="none" strike="noStrike" cap="none" normalizeH="0" baseline="0" dirty="0">
+                <a:ln>
+                  <a:noFill/>
+                </a:ln>
+                <a:effectLst/>
+              </a:rPr>
+              <a:t>αβε, μπήκε".</a:t>
+            </a:r>
+          </a:p>
+          <a:p>
+            <a:pPr marL="0" marR="0" lvl="0" indent="-228600" algn="l" fontAlgn="base">
+              <a:spcBef>
+                <a:spcPct val="0"/>
+              </a:spcBef>
+              <a:spcAft>
+                <a:spcPts val="600"/>
+              </a:spcAft>
+              <a:buClrTx/>
+              <a:buSzTx/>
+              <a:buFont typeface="Arial" panose="020B0604020202020204" pitchFamily="34" charset="0"/>
+              <a:buChar char="•"/>
+              <a:tabLst/>
+            </a:pPr>
+            <a:r>
+              <a:rPr kumimoji="0" lang="en-US" altLang="en-US" sz="2000" b="1" i="0" u="none" strike="noStrike" cap="none" normalizeH="0" baseline="0" dirty="0" err="1">
+                <a:ln>
+                  <a:noFill/>
+                </a:ln>
+                <a:effectLst/>
+              </a:rPr>
+              <a:t>Το</a:t>
+            </a:r>
+            <a:r>
+              <a:rPr kumimoji="0" lang="en-US" altLang="en-US" sz="2000" b="1" i="0" u="none" strike="noStrike" cap="none" normalizeH="0" baseline="0" dirty="0">
+                <a:ln>
+                  <a:noFill/>
+                </a:ln>
+                <a:effectLst/>
+              </a:rPr>
+              <a:t> Φα</a:t>
+            </a:r>
+            <a:r>
+              <a:rPr kumimoji="0" lang="en-US" altLang="en-US" sz="2000" b="1" i="0" u="none" strike="noStrike" cap="none" normalizeH="0" baseline="0" dirty="0" err="1">
+                <a:ln>
+                  <a:noFill/>
+                </a:ln>
+                <a:effectLst/>
+              </a:rPr>
+              <a:t>ινόμενο</a:t>
+            </a:r>
+            <a:r>
+              <a:rPr kumimoji="0" lang="en-US" altLang="en-US" sz="2000" b="1" i="0" u="none" strike="noStrike" cap="none" normalizeH="0" baseline="0" dirty="0">
+                <a:ln>
+                  <a:noFill/>
+                </a:ln>
+                <a:effectLst/>
+              </a:rPr>
+              <a:t> "Head-of-Line Blocking":</a:t>
+            </a:r>
+            <a:endParaRPr kumimoji="0" lang="en-US" altLang="en-US" sz="2000" b="0" i="0" u="none" strike="noStrike" cap="none" normalizeH="0" baseline="0" dirty="0">
+              <a:ln>
+                <a:noFill/>
+              </a:ln>
+              <a:effectLst/>
+            </a:endParaRPr>
+          </a:p>
+          <a:p>
+            <a:pPr marL="0" marR="0" lvl="0" indent="-228600" algn="l" fontAlgn="base">
+              <a:spcBef>
+                <a:spcPct val="0"/>
+              </a:spcBef>
+              <a:spcAft>
+                <a:spcPts val="600"/>
+              </a:spcAft>
+              <a:buClrTx/>
+              <a:buSzTx/>
+              <a:buFont typeface="Arial" panose="020B0604020202020204" pitchFamily="34" charset="0"/>
+              <a:buChar char="•"/>
+              <a:tabLst/>
+            </a:pPr>
+            <a:r>
+              <a:rPr kumimoji="0" lang="en-US" altLang="en-US" sz="2000" b="0" i="0" u="none" strike="noStrike" cap="none" normalizeH="0" baseline="0" dirty="0" err="1">
+                <a:ln>
+                  <a:noFill/>
+                </a:ln>
+                <a:effectLst/>
+              </a:rPr>
+              <a:t>Αν</a:t>
+            </a:r>
+            <a:r>
+              <a:rPr kumimoji="0" lang="en-US" altLang="en-US" sz="2000" b="0" i="0" u="none" strike="noStrike" cap="none" normalizeH="0" baseline="0" dirty="0">
+                <a:ln>
+                  <a:noFill/>
+                </a:ln>
+                <a:effectLst/>
+              </a:rPr>
+              <a:t> </a:t>
+            </a:r>
+            <a:r>
+              <a:rPr kumimoji="0" lang="en-US" altLang="en-US" sz="2000" b="0" i="0" u="none" strike="noStrike" cap="none" normalizeH="0" baseline="0" dirty="0" err="1">
+                <a:ln>
+                  <a:noFill/>
+                </a:ln>
+                <a:effectLst/>
+              </a:rPr>
+              <a:t>έν</a:t>
+            </a:r>
+            <a:r>
+              <a:rPr kumimoji="0" lang="en-US" altLang="en-US" sz="2000" b="0" i="0" u="none" strike="noStrike" cap="none" normalizeH="0" baseline="0" dirty="0">
+                <a:ln>
+                  <a:noFill/>
+                </a:ln>
+                <a:effectLst/>
+              </a:rPr>
+              <a:t>α μικρό πακέτο (Host A) φτάσει πίσω από ένα μεγάλο (Host B), πρέπει να περιμένει να μεταδοθούν και τα 24.000 bits του μεγάλου.</a:t>
+            </a:r>
+          </a:p>
+          <a:p>
+            <a:pPr marL="0" marR="0" lvl="0" indent="-228600" algn="l" fontAlgn="base">
+              <a:spcBef>
+                <a:spcPct val="0"/>
+              </a:spcBef>
+              <a:spcAft>
+                <a:spcPts val="600"/>
+              </a:spcAft>
+              <a:buClrTx/>
+              <a:buSzTx/>
+              <a:buFont typeface="Arial" panose="020B0604020202020204" pitchFamily="34" charset="0"/>
+              <a:buChar char="•"/>
+              <a:tabLst/>
+            </a:pPr>
+            <a:r>
+              <a:rPr kumimoji="0" lang="en-US" altLang="en-US" sz="2000" b="1" i="0" u="none" strike="noStrike" cap="none" normalizeH="0" baseline="0" dirty="0">
+                <a:ln>
+                  <a:noFill/>
+                </a:ln>
+                <a:effectLst/>
+              </a:rPr>
+              <a:t>Απ</a:t>
+            </a:r>
+            <a:r>
+              <a:rPr kumimoji="0" lang="en-US" altLang="en-US" sz="2000" b="1" i="0" u="none" strike="noStrike" cap="none" normalizeH="0" baseline="0" dirty="0" err="1">
+                <a:ln>
+                  <a:noFill/>
+                </a:ln>
+                <a:effectLst/>
+              </a:rPr>
+              <a:t>οτέλεσμ</a:t>
+            </a:r>
+            <a:r>
+              <a:rPr kumimoji="0" lang="en-US" altLang="en-US" sz="2000" b="1" i="0" u="none" strike="noStrike" cap="none" normalizeH="0" baseline="0" dirty="0">
+                <a:ln>
+                  <a:noFill/>
+                </a:ln>
+                <a:effectLst/>
+              </a:rPr>
+              <a:t>α:</a:t>
+            </a:r>
+            <a:endParaRPr kumimoji="0" lang="en-US" altLang="en-US" sz="2000" b="0" i="0" u="none" strike="noStrike" cap="none" normalizeH="0" baseline="0" dirty="0">
+              <a:ln>
+                <a:noFill/>
+              </a:ln>
+              <a:effectLst/>
+            </a:endParaRPr>
+          </a:p>
+          <a:p>
+            <a:pPr marL="0" marR="0" lvl="0" indent="-228600" algn="l" fontAlgn="base">
+              <a:spcBef>
+                <a:spcPct val="0"/>
+              </a:spcBef>
+              <a:spcAft>
+                <a:spcPts val="600"/>
+              </a:spcAft>
+              <a:buClrTx/>
+              <a:buSzTx/>
+              <a:buFont typeface="Arial" panose="020B0604020202020204" pitchFamily="34" charset="0"/>
+              <a:buChar char="•"/>
+              <a:tabLst/>
+            </a:pPr>
+            <a:r>
+              <a:rPr kumimoji="0" lang="en-US" altLang="en-US" sz="2000" b="0" i="0" u="none" strike="noStrike" cap="none" normalizeH="0" baseline="0" dirty="0">
+                <a:ln>
+                  <a:noFill/>
+                </a:ln>
+                <a:effectLst/>
+              </a:rPr>
+              <a:t>Τα </a:t>
+            </a:r>
+            <a:r>
+              <a:rPr kumimoji="0" lang="en-US" altLang="en-US" sz="2000" b="0" i="0" u="none" strike="noStrike" cap="none" normalizeH="0" baseline="0" dirty="0" err="1">
+                <a:ln>
+                  <a:noFill/>
+                </a:ln>
+                <a:effectLst/>
+              </a:rPr>
+              <a:t>μικρά</a:t>
+            </a:r>
+            <a:r>
+              <a:rPr kumimoji="0" lang="en-US" altLang="en-US" sz="2000" b="0" i="0" u="none" strike="noStrike" cap="none" normalizeH="0" baseline="0" dirty="0">
+                <a:ln>
+                  <a:noFill/>
+                </a:ln>
+                <a:effectLst/>
+              </a:rPr>
+              <a:t> πα</a:t>
+            </a:r>
+            <a:r>
+              <a:rPr kumimoji="0" lang="en-US" altLang="en-US" sz="2000" b="0" i="0" u="none" strike="noStrike" cap="none" normalizeH="0" baseline="0" dirty="0" err="1">
+                <a:ln>
+                  <a:noFill/>
+                </a:ln>
+                <a:effectLst/>
+              </a:rPr>
+              <a:t>κέτ</a:t>
+            </a:r>
+            <a:r>
+              <a:rPr kumimoji="0" lang="en-US" altLang="en-US" sz="2000" b="0" i="0" u="none" strike="noStrike" cap="none" normalizeH="0" baseline="0" dirty="0">
+                <a:ln>
+                  <a:noFill/>
+                </a:ln>
+                <a:effectLst/>
+              </a:rPr>
+              <a:t>α "εγκλωβίζονται".</a:t>
+            </a:r>
+          </a:p>
+          <a:p>
+            <a:pPr marL="0" marR="0" lvl="0" indent="-228600" algn="l" fontAlgn="base">
+              <a:spcBef>
+                <a:spcPct val="0"/>
+              </a:spcBef>
+              <a:spcAft>
+                <a:spcPts val="600"/>
+              </a:spcAft>
+              <a:buClrTx/>
+              <a:buSzTx/>
+              <a:buFont typeface="Arial" panose="020B0604020202020204" pitchFamily="34" charset="0"/>
+              <a:buChar char="•"/>
+              <a:tabLst/>
+            </a:pPr>
+            <a:r>
+              <a:rPr kumimoji="0" lang="en-US" altLang="en-US" sz="2000" b="0" i="0" u="none" strike="noStrike" cap="none" normalizeH="0" baseline="0" dirty="0">
+                <a:ln>
+                  <a:noFill/>
+                </a:ln>
+                <a:effectLst/>
+              </a:rPr>
+              <a:t>Η κα</a:t>
+            </a:r>
+            <a:r>
+              <a:rPr kumimoji="0" lang="en-US" altLang="en-US" sz="2000" b="0" i="0" u="none" strike="noStrike" cap="none" normalizeH="0" baseline="0" dirty="0" err="1">
+                <a:ln>
+                  <a:noFill/>
+                </a:ln>
+                <a:effectLst/>
+              </a:rPr>
+              <a:t>θυστέρηση</a:t>
+            </a:r>
+            <a:r>
+              <a:rPr kumimoji="0" lang="en-US" altLang="en-US" sz="2000" b="0" i="0" u="none" strike="noStrike" cap="none" normalizeH="0" baseline="0" dirty="0">
+                <a:ln>
+                  <a:noFill/>
+                </a:ln>
+                <a:effectLst/>
+              </a:rPr>
+              <a:t> </a:t>
+            </a:r>
+            <a:r>
+              <a:rPr kumimoji="0" lang="en-US" altLang="en-US" sz="2000" b="0" i="0" u="none" strike="noStrike" cap="none" normalizeH="0" baseline="0" dirty="0" err="1">
+                <a:ln>
+                  <a:noFill/>
+                </a:ln>
+                <a:effectLst/>
+              </a:rPr>
+              <a:t>γι</a:t>
+            </a:r>
+            <a:r>
+              <a:rPr kumimoji="0" lang="en-US" altLang="en-US" sz="2000" b="0" i="0" u="none" strike="noStrike" cap="none" normalizeH="0" baseline="0" dirty="0">
+                <a:ln>
+                  <a:noFill/>
+                </a:ln>
+                <a:effectLst/>
+              </a:rPr>
+              <a:t>α τον Host A είναι υψηλή και ασταθής, εξαρτώμενη από την κίνηση του Host B.</a:t>
+            </a:r>
+          </a:p>
+          <a:p>
+            <a:pPr marL="0" marR="0" lvl="0" indent="-228600" algn="l" fontAlgn="base">
+              <a:spcBef>
+                <a:spcPct val="0"/>
+              </a:spcBef>
+              <a:spcAft>
+                <a:spcPts val="600"/>
+              </a:spcAft>
+              <a:buClrTx/>
+              <a:buSzTx/>
+              <a:buFont typeface="Arial" panose="020B0604020202020204" pitchFamily="34" charset="0"/>
+              <a:buChar char="•"/>
+              <a:tabLst/>
+            </a:pPr>
+            <a:endParaRPr kumimoji="0" lang="en-US" altLang="en-US" sz="2000" b="0" i="0" u="none" strike="noStrike" cap="none" normalizeH="0" baseline="0" dirty="0">
+              <a:ln>
+                <a:noFill/>
+              </a:ln>
+              <a:effectLst/>
+            </a:endParaRPr>
+          </a:p>
+        </p:txBody>
+      </p:sp>
+    </p:spTree>
+    <p:extLst>
+      <p:ext uri="{BB962C8B-B14F-4D97-AF65-F5344CB8AC3E}">
+        <p14:creationId xmlns:p14="http://schemas.microsoft.com/office/powerpoint/2010/main" val="2785337643"/>
+      </p:ext>
+    </p:extLst>
+  </p:cSld>
+  <p:clrMapOvr>
+    <a:masterClrMapping/>
+  </p:clrMapOvr>
+</p:sld>
+</file>
+
+<file path=ppt/slides/slide33.xml><?xml version="1.0" encoding="utf-8"?>
+<p:sld xmlns:a="http://schemas.openxmlformats.org/drawingml/2006/main" xmlns:r="http://schemas.openxmlformats.org/officeDocument/2006/relationships" xmlns:p="http://schemas.openxmlformats.org/presentationml/2006/main">
+  <p:cSld>
+    <p:spTree>
+      <p:nvGrpSpPr>
+        <p:cNvPr id="1" name=""/>
+        <p:cNvGrpSpPr/>
+        <p:nvPr/>
+      </p:nvGrpSpPr>
+      <p:grpSpPr>
+        <a:xfrm>
+          <a:off x="0" y="0"/>
+          <a:ext cx="0" cy="0"/>
+          <a:chOff x="0" y="0"/>
+          <a:chExt cx="0" cy="0"/>
+        </a:xfrm>
+      </p:grpSpPr>
+      <p:pic>
+        <p:nvPicPr>
+          <p:cNvPr id="2" name="Picture 1" descr="A screenshot of a graph&#10;&#10;AI-generated content may be incorrect.">
+            <a:extLst>
+              <a:ext uri="{FF2B5EF4-FFF2-40B4-BE49-F238E27FC236}">
+                <a16:creationId xmlns:a16="http://schemas.microsoft.com/office/drawing/2014/main" id="{08BFC549-7E73-2A79-7636-E3900891CB1E}"/>
+              </a:ext>
+            </a:extLst>
+          </p:cNvPr>
+          <p:cNvPicPr>
+            <a:picLocks noChangeAspect="1"/>
+          </p:cNvPicPr>
+          <p:nvPr/>
+        </p:nvPicPr>
+        <p:blipFill>
+          <a:blip r:embed="rId2"/>
+          <a:stretch>
+            <a:fillRect/>
+          </a:stretch>
+        </p:blipFill>
+        <p:spPr>
+          <a:xfrm>
+            <a:off x="0" y="0"/>
+            <a:ext cx="12192000" cy="6857999"/>
+          </a:xfrm>
+          <a:prstGeom prst="rect">
+            <a:avLst/>
+          </a:prstGeom>
+        </p:spPr>
+      </p:pic>
+      <p:sp>
+        <p:nvSpPr>
+          <p:cNvPr id="3" name="TextBox 2">
+            <a:extLst>
+              <a:ext uri="{FF2B5EF4-FFF2-40B4-BE49-F238E27FC236}">
+                <a16:creationId xmlns:a16="http://schemas.microsoft.com/office/drawing/2014/main" id="{4DD52446-7057-93B6-0595-F751655670FF}"/>
+              </a:ext>
+            </a:extLst>
+          </p:cNvPr>
+          <p:cNvSpPr txBox="1"/>
+          <p:nvPr/>
+        </p:nvSpPr>
+        <p:spPr>
+          <a:xfrm>
+            <a:off x="0" y="142875"/>
+            <a:ext cx="794128" cy="400110"/>
+          </a:xfrm>
+          <a:prstGeom prst="rect">
+            <a:avLst/>
+          </a:prstGeom>
+          <a:noFill/>
+        </p:spPr>
+        <p:txBody>
+          <a:bodyPr wrap="none" rtlCol="0">
+            <a:spAutoFit/>
+          </a:bodyPr>
+          <a:lstStyle/>
+          <a:p>
+            <a:r>
+              <a:rPr lang="en-US" sz="2000" b="1" dirty="0"/>
+              <a:t>FCFS</a:t>
+            </a:r>
+          </a:p>
+        </p:txBody>
+      </p:sp>
+    </p:spTree>
+    <p:extLst>
+      <p:ext uri="{BB962C8B-B14F-4D97-AF65-F5344CB8AC3E}">
+        <p14:creationId xmlns:p14="http://schemas.microsoft.com/office/powerpoint/2010/main" val="2035683903"/>
+      </p:ext>
+    </p:extLst>
+  </p:cSld>
+  <p:clrMapOvr>
+    <a:masterClrMapping/>
+  </p:clrMapOvr>
+</p:sld>
+</file>
+
+<file path=ppt/slides/slide34.xml><?xml version="1.0" encoding="utf-8"?>
+<p:sld xmlns:a="http://schemas.openxmlformats.org/drawingml/2006/main" xmlns:r="http://schemas.openxmlformats.org/officeDocument/2006/relationships" xmlns:p="http://schemas.openxmlformats.org/presentationml/2006/main">
+  <p:cSld>
+    <p:bg>
+      <p:bgPr>
+        <a:solidFill>
+          <a:schemeClr val="bg1"/>
+        </a:solidFill>
+        <a:effectLst/>
+      </p:bgPr>
+    </p:bg>
+    <p:spTree>
+      <p:nvGrpSpPr>
+        <p:cNvPr id="1" name=""/>
+        <p:cNvGrpSpPr/>
+        <p:nvPr/>
+      </p:nvGrpSpPr>
+      <p:grpSpPr>
+        <a:xfrm>
+          <a:off x="0" y="0"/>
+          <a:ext cx="0" cy="0"/>
+          <a:chOff x="0" y="0"/>
+          <a:chExt cx="0" cy="0"/>
+        </a:xfrm>
+      </p:grpSpPr>
+      <p:sp useBgFill="1">
+        <p:nvSpPr>
+          <p:cNvPr id="9" name="Rectangle 8">
+            <a:extLst>
+              <a:ext uri="{FF2B5EF4-FFF2-40B4-BE49-F238E27FC236}">
+                <a16:creationId xmlns:a16="http://schemas.microsoft.com/office/drawing/2014/main" id="{09588DA8-065E-4F6F-8EFD-43104AB2E0CF}"/>
+              </a:ext>
+              <a:ext uri="{C183D7F6-B498-43B3-948B-1728B52AA6E4}">
+                <adec:decorative xmlns:adec="http://schemas.microsoft.com/office/drawing/2017/decorative" val="1"/>
+              </a:ext>
+            </a:extLst>
+          </p:cNvPr>
+          <p:cNvSpPr>
+            <a:spLocks noGrp="1" noRot="1" noChangeAspect="1" noMove="1" noResize="1" noEditPoints="1" noAdjustHandles="1" noChangeArrowheads="1" noChangeShapeType="1" noTextEdit="1"/>
+          </p:cNvSpPr>
+          <p:nvPr>
+            <p:extLst>
+              <p:ext uri="{386F3935-93C4-4BCD-93E2-E3B085C9AB24}">
+                <p16:designElem xmlns:p16="http://schemas.microsoft.com/office/powerpoint/2015/main" val="1"/>
+              </p:ext>
+            </p:extLst>
+          </p:nvPr>
+        </p:nvSpPr>
+        <p:spPr>
+          <a:xfrm>
+            <a:off x="0" y="0"/>
+            <a:ext cx="12192000" cy="6858000"/>
+          </a:xfrm>
+          <a:prstGeom prst="rect">
+            <a:avLst/>
+          </a:prstGeom>
+          <a:ln w="12700" cap="flat" cmpd="sng" algn="ctr">
+            <a:noFill/>
+            <a:prstDash val="solid"/>
+            <a:miter lim="800000"/>
+          </a:ln>
+          <a:effectLst/>
+          <a:extLst>
+            <a:ext uri="{91240B29-F687-4F45-9708-019B960494DF}">
+              <a14:hiddenLine xmlns:a14="http://schemas.microsoft.com/office/drawing/2010/main" w="12700" cap="flat" cmpd="sng" algn="ctr">
+                <a:solidFill>
+                  <a:schemeClr val="accent1">
+                    <a:shade val="50000"/>
+                  </a:schemeClr>
+                </a:solidFill>
+                <a:prstDash val="solid"/>
+                <a:miter lim="800000"/>
+              </a14:hiddenLine>
+            </a:ext>
+          </a:extLst>
+        </p:spPr>
+        <p:style>
+          <a:lnRef idx="2">
+            <a:schemeClr val="accent1">
+              <a:shade val="50000"/>
+            </a:schemeClr>
+          </a:lnRef>
+          <a:fillRef idx="1">
+            <a:schemeClr val="accent1"/>
+          </a:fillRef>
+          <a:effectRef idx="0">
+            <a:schemeClr val="accent1"/>
+          </a:effectRef>
+          <a:fontRef idx="minor">
+            <a:schemeClr val="lt1"/>
+          </a:fontRef>
+        </p:style>
+        <p:txBody>
+          <a:bodyPr rtlCol="0" anchor="ctr"/>
+          <a:lstStyle/>
+          <a:p>
+            <a:pPr algn="ctr"/>
+            <a:endParaRPr lang="en-US"/>
+          </a:p>
+        </p:txBody>
+      </p:sp>
+      <p:sp useBgFill="1">
+        <p:nvSpPr>
+          <p:cNvPr id="11" name="Rectangle 10">
+            <a:extLst>
+              <a:ext uri="{FF2B5EF4-FFF2-40B4-BE49-F238E27FC236}">
+                <a16:creationId xmlns:a16="http://schemas.microsoft.com/office/drawing/2014/main" id="{C4285719-470E-454C-AF62-8323075F1F5B}"/>
+              </a:ext>
+              <a:ext uri="{C183D7F6-B498-43B3-948B-1728B52AA6E4}">
+                <adec:decorative xmlns:adec="http://schemas.microsoft.com/office/drawing/2017/decorative" val="1"/>
+              </a:ext>
+            </a:extLst>
+          </p:cNvPr>
+          <p:cNvSpPr>
+            <a:spLocks noGrp="1" noRot="1" noChangeAspect="1" noMove="1" noResize="1" noEditPoints="1" noAdjustHandles="1" noChangeArrowheads="1" noChangeShapeType="1" noTextEdit="1"/>
+          </p:cNvSpPr>
+          <p:nvPr>
+            <p:extLst>
+              <p:ext uri="{386F3935-93C4-4BCD-93E2-E3B085C9AB24}">
+                <p16:designElem xmlns:p16="http://schemas.microsoft.com/office/powerpoint/2015/main" val="1"/>
+              </p:ext>
+            </p:extLst>
+          </p:nvPr>
+        </p:nvSpPr>
+        <p:spPr>
+          <a:xfrm>
+            <a:off x="0" y="0"/>
+            <a:ext cx="12188952" cy="6858000"/>
+          </a:xfrm>
+          <a:prstGeom prst="rect">
+            <a:avLst/>
+          </a:prstGeom>
+          <a:ln w="12700" cap="flat" cmpd="sng" algn="ctr">
+            <a:noFill/>
+            <a:prstDash val="solid"/>
+            <a:miter lim="800000"/>
+          </a:ln>
+          <a:effectLst/>
+          <a:extLst>
+            <a:ext uri="{91240B29-F687-4F45-9708-019B960494DF}">
+              <a14:hiddenLine xmlns:a14="http://schemas.microsoft.com/office/drawing/2010/main" w="12700" cap="flat" cmpd="sng" algn="ctr">
+                <a:solidFill>
+                  <a:schemeClr val="accent1">
+                    <a:shade val="50000"/>
+                  </a:schemeClr>
+                </a:solidFill>
+                <a:prstDash val="solid"/>
+                <a:miter lim="800000"/>
+              </a14:hiddenLine>
+            </a:ext>
+          </a:extLst>
+        </p:spPr>
+        <p:style>
+          <a:lnRef idx="2">
+            <a:schemeClr val="accent1">
+              <a:shade val="50000"/>
+            </a:schemeClr>
+          </a:lnRef>
+          <a:fillRef idx="1">
+            <a:schemeClr val="accent1"/>
+          </a:fillRef>
+          <a:effectRef idx="0">
+            <a:schemeClr val="accent1"/>
+          </a:effectRef>
+          <a:fontRef idx="minor">
+            <a:schemeClr val="lt1"/>
+          </a:fontRef>
+        </p:style>
+        <p:txBody>
+          <a:bodyPr rtlCol="0" anchor="ctr"/>
+          <a:lstStyle/>
+          <a:p>
+            <a:pPr algn="ctr"/>
+            <a:endParaRPr lang="en-US"/>
+          </a:p>
+        </p:txBody>
+      </p:sp>
+      <p:sp>
+        <p:nvSpPr>
+          <p:cNvPr id="13" name="Rectangle 12">
+            <a:extLst>
+              <a:ext uri="{FF2B5EF4-FFF2-40B4-BE49-F238E27FC236}">
+                <a16:creationId xmlns:a16="http://schemas.microsoft.com/office/drawing/2014/main" id="{CD9FE4EF-C4D8-49A0-B2FF-81D8DB7D8A24}"/>
+              </a:ext>
+              <a:ext uri="{C183D7F6-B498-43B3-948B-1728B52AA6E4}">
+                <adec:decorative xmlns:adec="http://schemas.microsoft.com/office/drawing/2017/decorative" val="1"/>
+              </a:ext>
+            </a:extLst>
+          </p:cNvPr>
+          <p:cNvSpPr>
+            <a:spLocks noGrp="1" noRot="1" noChangeAspect="1" noMove="1" noResize="1" noEditPoints="1" noAdjustHandles="1" noChangeArrowheads="1" noChangeShapeType="1" noTextEdit="1"/>
+          </p:cNvSpPr>
+          <p:nvPr>
+            <p:extLst>
+              <p:ext uri="{386F3935-93C4-4BCD-93E2-E3B085C9AB24}">
+                <p16:designElem xmlns:p16="http://schemas.microsoft.com/office/powerpoint/2015/main" val="1"/>
+              </p:ext>
+            </p:extLst>
+          </p:nvPr>
+        </p:nvSpPr>
+        <p:spPr>
+          <a:xfrm rot="5400000" flipH="1">
+            <a:off x="-1410084" y="1410082"/>
+            <a:ext cx="6858000" cy="4037836"/>
+          </a:xfrm>
+          <a:prstGeom prst="rect">
+            <a:avLst/>
+          </a:prstGeom>
+          <a:gradFill>
+            <a:gsLst>
+              <a:gs pos="8000">
+                <a:srgbClr val="000000"/>
+              </a:gs>
+              <a:gs pos="100000">
+                <a:schemeClr val="accent1">
+                  <a:lumMod val="75000"/>
+                </a:schemeClr>
+              </a:gs>
+            </a:gsLst>
+            <a:lin ang="3000000" scaled="0"/>
+          </a:gradFill>
+          <a:ln>
+            <a:noFill/>
+          </a:ln>
+        </p:spPr>
+        <p:style>
+          <a:lnRef idx="2">
+            <a:schemeClr val="accent1">
+              <a:shade val="50000"/>
+            </a:schemeClr>
+          </a:lnRef>
+          <a:fillRef idx="1">
+            <a:schemeClr val="accent1"/>
+          </a:fillRef>
+          <a:effectRef idx="0">
+            <a:schemeClr val="accent1"/>
+          </a:effectRef>
+          <a:fontRef idx="minor">
+            <a:schemeClr val="lt1"/>
+          </a:fontRef>
+        </p:style>
+        <p:txBody>
+          <a:bodyPr rtlCol="0" anchor="ctr"/>
+          <a:lstStyle/>
+          <a:p>
+            <a:pPr algn="ctr"/>
+            <a:endParaRPr lang="en-US"/>
+          </a:p>
+        </p:txBody>
+      </p:sp>
+      <p:sp>
+        <p:nvSpPr>
+          <p:cNvPr id="15" name="Rectangle 14">
+            <a:extLst>
+              <a:ext uri="{FF2B5EF4-FFF2-40B4-BE49-F238E27FC236}">
+                <a16:creationId xmlns:a16="http://schemas.microsoft.com/office/drawing/2014/main" id="{4300840D-0A0B-4512-BACA-B439D5B9C57C}"/>
+              </a:ext>
+              <a:ext uri="{C183D7F6-B498-43B3-948B-1728B52AA6E4}">
+                <adec:decorative xmlns:adec="http://schemas.microsoft.com/office/drawing/2017/decorative" val="1"/>
+              </a:ext>
+            </a:extLst>
+          </p:cNvPr>
+          <p:cNvSpPr>
+            <a:spLocks noGrp="1" noRot="1" noChangeAspect="1" noMove="1" noResize="1" noEditPoints="1" noAdjustHandles="1" noChangeArrowheads="1" noChangeShapeType="1" noTextEdit="1"/>
+          </p:cNvSpPr>
+          <p:nvPr>
+            <p:extLst>
+              <p:ext uri="{386F3935-93C4-4BCD-93E2-E3B085C9AB24}">
+                <p16:designElem xmlns:p16="http://schemas.microsoft.com/office/powerpoint/2015/main" val="1"/>
+              </p:ext>
+            </p:extLst>
+          </p:nvPr>
+        </p:nvSpPr>
+        <p:spPr>
+          <a:xfrm rot="5400000" flipH="1">
+            <a:off x="-1410085" y="1420219"/>
+            <a:ext cx="6857999" cy="4037839"/>
+          </a:xfrm>
+          <a:prstGeom prst="rect">
+            <a:avLst/>
+          </a:prstGeom>
+          <a:gradFill>
+            <a:gsLst>
+              <a:gs pos="0">
+                <a:srgbClr val="000000">
+                  <a:alpha val="0"/>
+                </a:srgbClr>
+              </a:gs>
+              <a:gs pos="99000">
+                <a:schemeClr val="accent1">
+                  <a:alpha val="46000"/>
+                </a:schemeClr>
+              </a:gs>
+            </a:gsLst>
+            <a:lin ang="1800000" scaled="0"/>
+          </a:gradFill>
+          <a:ln>
+            <a:noFill/>
+          </a:ln>
+        </p:spPr>
+        <p:style>
+          <a:lnRef idx="2">
+            <a:schemeClr val="accent1">
+              <a:shade val="50000"/>
+            </a:schemeClr>
+          </a:lnRef>
+          <a:fillRef idx="1">
+            <a:schemeClr val="accent1"/>
+          </a:fillRef>
+          <a:effectRef idx="0">
+            <a:schemeClr val="accent1"/>
+          </a:effectRef>
+          <a:fontRef idx="minor">
+            <a:schemeClr val="lt1"/>
+          </a:fontRef>
+        </p:style>
+        <p:txBody>
+          <a:bodyPr rtlCol="0" anchor="ctr"/>
+          <a:lstStyle/>
+          <a:p>
+            <a:pPr algn="ctr"/>
+            <a:endParaRPr lang="en-US"/>
+          </a:p>
+        </p:txBody>
+      </p:sp>
+      <p:sp>
+        <p:nvSpPr>
+          <p:cNvPr id="17" name="Rectangle 16">
+            <a:extLst>
+              <a:ext uri="{FF2B5EF4-FFF2-40B4-BE49-F238E27FC236}">
+                <a16:creationId xmlns:a16="http://schemas.microsoft.com/office/drawing/2014/main" id="{D2B78728-A580-49A7-84F9-6EF6F583ADE0}"/>
+              </a:ext>
+              <a:ext uri="{C183D7F6-B498-43B3-948B-1728B52AA6E4}">
+                <adec:decorative xmlns:adec="http://schemas.microsoft.com/office/drawing/2017/decorative" val="1"/>
+              </a:ext>
+            </a:extLst>
+          </p:cNvPr>
+          <p:cNvSpPr>
+            <a:spLocks noGrp="1" noRot="1" noChangeAspect="1" noMove="1" noResize="1" noEditPoints="1" noAdjustHandles="1" noChangeArrowheads="1" noChangeShapeType="1" noTextEdit="1"/>
+          </p:cNvSpPr>
+          <p:nvPr>
+            <p:extLst>
+              <p:ext uri="{386F3935-93C4-4BCD-93E2-E3B085C9AB24}">
+                <p16:designElem xmlns:p16="http://schemas.microsoft.com/office/powerpoint/2015/main" val="1"/>
+              </p:ext>
+            </p:extLst>
+          </p:nvPr>
+        </p:nvSpPr>
+        <p:spPr>
+          <a:xfrm rot="5400000" flipH="1">
+            <a:off x="767923" y="3588085"/>
+            <a:ext cx="2501979" cy="4037841"/>
+          </a:xfrm>
+          <a:prstGeom prst="rect">
+            <a:avLst/>
+          </a:prstGeom>
+          <a:gradFill>
+            <a:gsLst>
+              <a:gs pos="2000">
+                <a:schemeClr val="accent1">
+                  <a:alpha val="29000"/>
+                </a:schemeClr>
+              </a:gs>
+              <a:gs pos="100000">
+                <a:srgbClr val="000000">
+                  <a:alpha val="30000"/>
+                </a:srgbClr>
+              </a:gs>
+            </a:gsLst>
+            <a:lin ang="7800000" scaled="0"/>
+          </a:gradFill>
+          <a:ln>
+            <a:noFill/>
+          </a:ln>
+        </p:spPr>
+        <p:style>
+          <a:lnRef idx="2">
+            <a:schemeClr val="accent1">
+              <a:shade val="50000"/>
+            </a:schemeClr>
+          </a:lnRef>
+          <a:fillRef idx="1">
+            <a:schemeClr val="accent1"/>
+          </a:fillRef>
+          <a:effectRef idx="0">
+            <a:schemeClr val="accent1"/>
+          </a:effectRef>
+          <a:fontRef idx="minor">
+            <a:schemeClr val="lt1"/>
+          </a:fontRef>
+        </p:style>
+        <p:txBody>
+          <a:bodyPr rtlCol="0" anchor="ctr"/>
+          <a:lstStyle/>
+          <a:p>
+            <a:pPr algn="ctr"/>
+            <a:endParaRPr lang="en-US" dirty="0"/>
+          </a:p>
+        </p:txBody>
+      </p:sp>
+      <p:sp>
+        <p:nvSpPr>
+          <p:cNvPr id="19" name="Freeform: Shape 18">
+            <a:extLst>
+              <a:ext uri="{FF2B5EF4-FFF2-40B4-BE49-F238E27FC236}">
+                <a16:creationId xmlns:a16="http://schemas.microsoft.com/office/drawing/2014/main" id="{38FAA1A1-D861-433F-88FA-1E9D6FD31D11}"/>
+              </a:ext>
+              <a:ext uri="{C183D7F6-B498-43B3-948B-1728B52AA6E4}">
+                <adec:decorative xmlns:adec="http://schemas.microsoft.com/office/drawing/2017/decorative" val="1"/>
+              </a:ext>
+            </a:extLst>
+          </p:cNvPr>
+          <p:cNvSpPr>
+            <a:spLocks noGrp="1" noRot="1" noChangeAspect="1" noMove="1" noResize="1" noEditPoints="1" noAdjustHandles="1" noChangeArrowheads="1" noChangeShapeType="1" noTextEdit="1"/>
+          </p:cNvSpPr>
+          <p:nvPr>
+            <p:extLst>
+              <p:ext uri="{386F3935-93C4-4BCD-93E2-E3B085C9AB24}">
+                <p16:designElem xmlns:p16="http://schemas.microsoft.com/office/powerpoint/2015/main" val="1"/>
+              </p:ext>
+            </p:extLst>
+          </p:nvPr>
+        </p:nvSpPr>
+        <p:spPr>
+          <a:xfrm rot="20635413">
+            <a:off x="-501737" y="969718"/>
+            <a:ext cx="3900357" cy="4178958"/>
+          </a:xfrm>
+          <a:custGeom>
+            <a:avLst/>
+            <a:gdLst>
+              <a:gd name="connsiteX0" fmla="*/ 2432225 w 3900357"/>
+              <a:gd name="connsiteY0" fmla="*/ 93939 h 4178958"/>
+              <a:gd name="connsiteX1" fmla="*/ 3900357 w 3900357"/>
+              <a:gd name="connsiteY1" fmla="*/ 2089479 h 4178958"/>
+              <a:gd name="connsiteX2" fmla="*/ 1810878 w 3900357"/>
+              <a:gd name="connsiteY2" fmla="*/ 4178958 h 4178958"/>
+              <a:gd name="connsiteX3" fmla="*/ 78249 w 3900357"/>
+              <a:gd name="connsiteY3" fmla="*/ 3257727 h 4178958"/>
+              <a:gd name="connsiteX4" fmla="*/ 0 w 3900357"/>
+              <a:gd name="connsiteY4" fmla="*/ 3128923 h 4178958"/>
+              <a:gd name="connsiteX5" fmla="*/ 831324 w 3900357"/>
+              <a:gd name="connsiteY5" fmla="*/ 244281 h 4178958"/>
+              <a:gd name="connsiteX6" fmla="*/ 997559 w 3900357"/>
+              <a:gd name="connsiteY6" fmla="*/ 164202 h 4178958"/>
+              <a:gd name="connsiteX7" fmla="*/ 1810878 w 3900357"/>
+              <a:gd name="connsiteY7" fmla="*/ 0 h 4178958"/>
+              <a:gd name="connsiteX8" fmla="*/ 2432225 w 3900357"/>
+              <a:gd name="connsiteY8" fmla="*/ 93939 h 4178958"/>
+            </a:gdLst>
+            <a:ahLst/>
+            <a:cxnLst>
+              <a:cxn ang="0">
+                <a:pos x="connsiteX0" y="connsiteY0"/>
+              </a:cxn>
+              <a:cxn ang="0">
+                <a:pos x="connsiteX1" y="connsiteY1"/>
+              </a:cxn>
+              <a:cxn ang="0">
+                <a:pos x="connsiteX2" y="connsiteY2"/>
+              </a:cxn>
+              <a:cxn ang="0">
+                <a:pos x="connsiteX3" y="connsiteY3"/>
+              </a:cxn>
+              <a:cxn ang="0">
+                <a:pos x="connsiteX4" y="connsiteY4"/>
+              </a:cxn>
+              <a:cxn ang="0">
+                <a:pos x="connsiteX5" y="connsiteY5"/>
+              </a:cxn>
+              <a:cxn ang="0">
+                <a:pos x="connsiteX6" y="connsiteY6"/>
+              </a:cxn>
+              <a:cxn ang="0">
+                <a:pos x="connsiteX7" y="connsiteY7"/>
+              </a:cxn>
+              <a:cxn ang="0">
+                <a:pos x="connsiteX8" y="connsiteY8"/>
+              </a:cxn>
+            </a:cxnLst>
+            <a:rect l="l" t="t" r="r" b="b"/>
+            <a:pathLst>
+              <a:path w="3900357" h="4178958">
+                <a:moveTo>
+                  <a:pt x="2432225" y="93939"/>
+                </a:moveTo>
+                <a:cubicBezTo>
+                  <a:pt x="3282786" y="358491"/>
+                  <a:pt x="3900357" y="1151865"/>
+                  <a:pt x="3900357" y="2089479"/>
+                </a:cubicBezTo>
+                <a:cubicBezTo>
+                  <a:pt x="3900357" y="3243466"/>
+                  <a:pt x="2964865" y="4178958"/>
+                  <a:pt x="1810878" y="4178958"/>
+                </a:cubicBezTo>
+                <a:cubicBezTo>
+                  <a:pt x="1089636" y="4178958"/>
+                  <a:pt x="453744" y="3813531"/>
+                  <a:pt x="78249" y="3257727"/>
+                </a:cubicBezTo>
+                <a:lnTo>
+                  <a:pt x="0" y="3128923"/>
+                </a:lnTo>
+                <a:lnTo>
+                  <a:pt x="831324" y="244281"/>
+                </a:lnTo>
+                <a:lnTo>
+                  <a:pt x="997559" y="164202"/>
+                </a:lnTo>
+                <a:cubicBezTo>
+                  <a:pt x="1247540" y="58468"/>
+                  <a:pt x="1522381" y="0"/>
+                  <a:pt x="1810878" y="0"/>
+                </a:cubicBezTo>
+                <a:cubicBezTo>
+                  <a:pt x="2027251" y="0"/>
+                  <a:pt x="2235942" y="32888"/>
+                  <a:pt x="2432225" y="93939"/>
+                </a:cubicBezTo>
+                <a:close/>
+              </a:path>
+            </a:pathLst>
+          </a:custGeom>
+          <a:gradFill>
+            <a:gsLst>
+              <a:gs pos="29000">
+                <a:srgbClr val="000000">
+                  <a:alpha val="0"/>
+                </a:srgbClr>
+              </a:gs>
+              <a:gs pos="100000">
+                <a:schemeClr val="accent1">
+                  <a:alpha val="43000"/>
+                </a:schemeClr>
+              </a:gs>
+            </a:gsLst>
+            <a:lin ang="1800000" scaled="0"/>
+          </a:gradFill>
+          <a:ln>
+            <a:noFill/>
+          </a:ln>
+        </p:spPr>
+        <p:style>
+          <a:lnRef idx="2">
+            <a:schemeClr val="accent1">
+              <a:shade val="50000"/>
+            </a:schemeClr>
+          </a:lnRef>
+          <a:fillRef idx="1">
+            <a:schemeClr val="accent1"/>
+          </a:fillRef>
+          <a:effectRef idx="0">
+            <a:schemeClr val="accent1"/>
+          </a:effectRef>
+          <a:fontRef idx="minor">
+            <a:schemeClr val="lt1"/>
+          </a:fontRef>
+        </p:style>
+        <p:txBody>
+          <a:bodyPr wrap="square" rtlCol="0" anchor="ctr">
+            <a:noAutofit/>
+          </a:bodyPr>
+          <a:lstStyle/>
+          <a:p>
+            <a:pPr algn="ctr"/>
+            <a:endParaRPr lang="en-US" dirty="0"/>
+          </a:p>
+        </p:txBody>
+      </p:sp>
+      <p:sp>
+        <p:nvSpPr>
+          <p:cNvPr id="21" name="Rectangle 20">
+            <a:extLst>
+              <a:ext uri="{FF2B5EF4-FFF2-40B4-BE49-F238E27FC236}">
+                <a16:creationId xmlns:a16="http://schemas.microsoft.com/office/drawing/2014/main" id="{8D71EDA1-87BF-4D5D-AB79-F346FD19278A}"/>
+              </a:ext>
+              <a:ext uri="{C183D7F6-B498-43B3-948B-1728B52AA6E4}">
+                <adec:decorative xmlns:adec="http://schemas.microsoft.com/office/drawing/2017/decorative" val="1"/>
+              </a:ext>
+            </a:extLst>
+          </p:cNvPr>
+          <p:cNvSpPr>
+            <a:spLocks noGrp="1" noRot="1" noChangeAspect="1" noMove="1" noResize="1" noEditPoints="1" noAdjustHandles="1" noChangeArrowheads="1" noChangeShapeType="1" noTextEdit="1"/>
+          </p:cNvSpPr>
+          <p:nvPr>
+            <p:extLst>
+              <p:ext uri="{386F3935-93C4-4BCD-93E2-E3B085C9AB24}">
+                <p16:designElem xmlns:p16="http://schemas.microsoft.com/office/powerpoint/2015/main" val="1"/>
+              </p:ext>
+            </p:extLst>
+          </p:nvPr>
+        </p:nvSpPr>
+        <p:spPr>
+          <a:xfrm rot="5400000" flipH="1">
+            <a:off x="-1410093" y="1399943"/>
+            <a:ext cx="6858003" cy="4037835"/>
+          </a:xfrm>
+          <a:prstGeom prst="rect">
+            <a:avLst/>
+          </a:prstGeom>
+          <a:gradFill>
+            <a:gsLst>
+              <a:gs pos="0">
+                <a:srgbClr val="000000">
+                  <a:alpha val="0"/>
+                </a:srgbClr>
+              </a:gs>
+              <a:gs pos="99000">
+                <a:schemeClr val="accent1">
+                  <a:lumMod val="60000"/>
+                  <a:lumOff val="40000"/>
+                  <a:alpha val="11000"/>
+                </a:schemeClr>
+              </a:gs>
+            </a:gsLst>
+            <a:lin ang="7200000" scaled="0"/>
+          </a:gradFill>
+          <a:ln>
+            <a:noFill/>
+          </a:ln>
+        </p:spPr>
+        <p:style>
+          <a:lnRef idx="2">
+            <a:schemeClr val="accent1">
+              <a:shade val="50000"/>
+            </a:schemeClr>
+          </a:lnRef>
+          <a:fillRef idx="1">
+            <a:schemeClr val="accent1"/>
+          </a:fillRef>
+          <a:effectRef idx="0">
+            <a:schemeClr val="accent1"/>
+          </a:effectRef>
+          <a:fontRef idx="minor">
+            <a:schemeClr val="lt1"/>
+          </a:fontRef>
+        </p:style>
+        <p:txBody>
+          <a:bodyPr rtlCol="0" anchor="ctr"/>
+          <a:lstStyle/>
+          <a:p>
+            <a:pPr algn="ctr"/>
+            <a:endParaRPr lang="en-US"/>
+          </a:p>
+        </p:txBody>
+      </p:sp>
+      <p:sp>
+        <p:nvSpPr>
+          <p:cNvPr id="2" name="Title 1">
+            <a:extLst>
+              <a:ext uri="{FF2B5EF4-FFF2-40B4-BE49-F238E27FC236}">
+                <a16:creationId xmlns:a16="http://schemas.microsoft.com/office/drawing/2014/main" id="{C22D24CD-96A4-FFE1-9578-B2A28CDABCED}"/>
+              </a:ext>
+            </a:extLst>
+          </p:cNvPr>
+          <p:cNvSpPr>
+            <a:spLocks noGrp="1"/>
+          </p:cNvSpPr>
+          <p:nvPr>
+            <p:ph type="ctrTitle"/>
+          </p:nvPr>
+        </p:nvSpPr>
+        <p:spPr>
+          <a:xfrm>
+            <a:off x="466722" y="586855"/>
+            <a:ext cx="3201366" cy="3387497"/>
+          </a:xfrm>
+        </p:spPr>
+        <p:txBody>
+          <a:bodyPr vert="horz" lIns="91440" tIns="45720" rIns="91440" bIns="45720" rtlCol="0" anchor="b">
+            <a:normAutofit/>
+          </a:bodyPr>
+          <a:lstStyle/>
+          <a:p>
+            <a:pPr algn="r"/>
+            <a:r>
+              <a:rPr lang="en-US" sz="4000" kern="1200">
+                <a:solidFill>
+                  <a:srgbClr val="FFFFFF"/>
+                </a:solidFill>
+                <a:latin typeface="+mj-lt"/>
+                <a:ea typeface="+mj-ea"/>
+                <a:cs typeface="+mj-cs"/>
+              </a:rPr>
+              <a:t>Round-Robin (RR): Η Λύση</a:t>
+            </a:r>
+          </a:p>
+        </p:txBody>
+      </p:sp>
+      <p:sp>
+        <p:nvSpPr>
+          <p:cNvPr id="4" name="Rectangle 1">
+            <a:extLst>
+              <a:ext uri="{FF2B5EF4-FFF2-40B4-BE49-F238E27FC236}">
+                <a16:creationId xmlns:a16="http://schemas.microsoft.com/office/drawing/2014/main" id="{A1B6FE21-B5A4-FCD0-A13A-F74FD93DFD6A}"/>
+              </a:ext>
+            </a:extLst>
+          </p:cNvPr>
+          <p:cNvSpPr>
+            <a:spLocks noGrp="1" noChangeArrowheads="1"/>
+          </p:cNvSpPr>
+          <p:nvPr>
+            <p:ph type="subTitle" idx="1"/>
+          </p:nvPr>
+        </p:nvSpPr>
+        <p:spPr bwMode="auto">
+          <a:xfrm>
+            <a:off x="4810259" y="649480"/>
+            <a:ext cx="6555347" cy="5546047"/>
+          </a:xfrm>
+          <a:prstGeom prst="rect">
+            <a:avLst/>
+          </a:prstGeom>
+          <a:extLst>
+            <a:ext uri="{909E8E84-426E-40DD-AFC4-6F175D3DCCD1}">
+              <a14:hiddenFill xmlns:a14="http://schemas.microsoft.com/office/drawing/2010/main">
+                <a:solidFill>
+                  <a:schemeClr val="accent1"/>
+                </a:solidFill>
+              </a14:hiddenFill>
+            </a:ext>
+            <a:ext uri="{91240B29-F687-4F45-9708-019B960494DF}">
+              <a14:hiddenLine xmlns:a14="http://schemas.microsoft.com/office/drawing/2010/main" w="9525">
+                <a:solidFill>
+                  <a:schemeClr val="tx1"/>
+                </a:solidFill>
+                <a:miter lim="800000"/>
+                <a:headEnd/>
+                <a:tailEnd/>
+              </a14:hiddenLine>
+            </a:ext>
+            <a:ext uri="{AF507438-7753-43E0-B8FC-AC1667EBCBE1}">
+              <a14:hiddenEffects xmlns:a14="http://schemas.microsoft.com/office/drawing/2010/main">
+                <a:effectLst>
+                  <a:outerShdw dist="35921" dir="2700000" algn="ctr" rotWithShape="0">
+                    <a:schemeClr val="bg2"/>
+                  </a:outerShdw>
+                </a:effectLst>
+              </a14:hiddenEffects>
+            </a:ext>
+          </a:extLst>
+        </p:spPr>
+        <p:txBody>
+          <a:bodyPr vert="horz" lIns="91440" tIns="45720" rIns="91440" bIns="45720" numCol="1" rtlCol="0" anchor="ctr" anchorCtr="0" compatLnSpc="1">
+            <a:prstTxWarp prst="textNoShape">
+              <a:avLst/>
+            </a:prstTxWarp>
+            <a:normAutofit/>
+          </a:bodyPr>
+          <a:lstStyle/>
+          <a:p>
+            <a:pPr marL="0" marR="0" lvl="0" indent="-228600" algn="l" fontAlgn="base">
+              <a:spcBef>
+                <a:spcPct val="0"/>
+              </a:spcBef>
+              <a:spcAft>
+                <a:spcPts val="600"/>
+              </a:spcAft>
+              <a:buClrTx/>
+              <a:buSzTx/>
+              <a:buFont typeface="Arial" panose="020B0604020202020204" pitchFamily="34" charset="0"/>
+              <a:buChar char="•"/>
+              <a:tabLst/>
+            </a:pPr>
+            <a:r>
+              <a:rPr kumimoji="0" lang="en-US" altLang="en-US" sz="2000" b="1" i="0" u="none" strike="noStrike" cap="none" normalizeH="0" baseline="0" dirty="0">
+                <a:ln>
+                  <a:noFill/>
+                </a:ln>
+                <a:effectLst/>
+              </a:rPr>
+              <a:t>Η </a:t>
+            </a:r>
+            <a:r>
+              <a:rPr kumimoji="0" lang="en-US" altLang="en-US" sz="2000" b="1" i="0" u="none" strike="noStrike" cap="none" normalizeH="0" baseline="0" dirty="0" err="1">
+                <a:ln>
+                  <a:noFill/>
+                </a:ln>
+                <a:effectLst/>
+              </a:rPr>
+              <a:t>Λογική</a:t>
+            </a:r>
+            <a:r>
+              <a:rPr kumimoji="0" lang="en-US" altLang="en-US" sz="2000" b="1" i="0" u="none" strike="noStrike" cap="none" normalizeH="0" baseline="0" dirty="0">
+                <a:ln>
+                  <a:noFill/>
+                </a:ln>
+                <a:effectLst/>
+              </a:rPr>
+              <a:t>:</a:t>
+            </a:r>
+            <a:endParaRPr kumimoji="0" lang="en-US" altLang="en-US" sz="2000" b="0" i="0" u="none" strike="noStrike" cap="none" normalizeH="0" baseline="0" dirty="0">
+              <a:ln>
+                <a:noFill/>
+              </a:ln>
+              <a:effectLst/>
+            </a:endParaRPr>
+          </a:p>
+          <a:p>
+            <a:pPr marL="0" marR="0" lvl="0" indent="-228600" algn="l" fontAlgn="base">
+              <a:spcBef>
+                <a:spcPct val="0"/>
+              </a:spcBef>
+              <a:spcAft>
+                <a:spcPts val="600"/>
+              </a:spcAft>
+              <a:buClrTx/>
+              <a:buSzTx/>
+              <a:buFont typeface="Arial" panose="020B0604020202020204" pitchFamily="34" charset="0"/>
+              <a:buChar char="•"/>
+              <a:tabLst/>
+            </a:pPr>
+            <a:r>
+              <a:rPr kumimoji="0" lang="en-US" altLang="en-US" sz="2000" b="0" i="0" u="none" strike="noStrike" cap="none" normalizeH="0" baseline="0" dirty="0" err="1">
+                <a:ln>
+                  <a:noFill/>
+                </a:ln>
+                <a:effectLst/>
+              </a:rPr>
+              <a:t>Ξεχωριστές</a:t>
+            </a:r>
+            <a:r>
+              <a:rPr kumimoji="0" lang="en-US" altLang="en-US" sz="2000" b="0" i="0" u="none" strike="noStrike" cap="none" normalizeH="0" baseline="0" dirty="0">
+                <a:ln>
+                  <a:noFill/>
+                </a:ln>
+                <a:effectLst/>
+              </a:rPr>
+              <a:t> </a:t>
+            </a:r>
+            <a:r>
+              <a:rPr kumimoji="0" lang="en-US" altLang="en-US" sz="2000" b="0" i="0" u="none" strike="noStrike" cap="none" normalizeH="0" baseline="0" dirty="0" err="1">
+                <a:ln>
+                  <a:noFill/>
+                </a:ln>
+                <a:effectLst/>
+              </a:rPr>
+              <a:t>ουρές</a:t>
+            </a:r>
+            <a:r>
+              <a:rPr kumimoji="0" lang="en-US" altLang="en-US" sz="2000" b="0" i="0" u="none" strike="noStrike" cap="none" normalizeH="0" baseline="0" dirty="0">
+                <a:ln>
+                  <a:noFill/>
+                </a:ln>
+                <a:effectLst/>
+              </a:rPr>
+              <a:t> </a:t>
+            </a:r>
+            <a:r>
+              <a:rPr kumimoji="0" lang="en-US" altLang="en-US" sz="2000" b="0" i="0" u="none" strike="noStrike" cap="none" normalizeH="0" baseline="0" dirty="0" err="1">
+                <a:ln>
+                  <a:noFill/>
+                </a:ln>
+                <a:effectLst/>
+              </a:rPr>
+              <a:t>γι</a:t>
+            </a:r>
+            <a:r>
+              <a:rPr kumimoji="0" lang="en-US" altLang="en-US" sz="2000" b="0" i="0" u="none" strike="noStrike" cap="none" normalizeH="0" baseline="0" dirty="0">
+                <a:ln>
+                  <a:noFill/>
+                </a:ln>
+                <a:effectLst/>
+              </a:rPr>
+              <a:t>α κάθε Host (Isolation).</a:t>
+            </a:r>
+          </a:p>
+          <a:p>
+            <a:pPr marL="0" marR="0" lvl="0" indent="-228600" algn="l" fontAlgn="base">
+              <a:spcBef>
+                <a:spcPct val="0"/>
+              </a:spcBef>
+              <a:spcAft>
+                <a:spcPts val="600"/>
+              </a:spcAft>
+              <a:buClrTx/>
+              <a:buSzTx/>
+              <a:buFont typeface="Arial" panose="020B0604020202020204" pitchFamily="34" charset="0"/>
+              <a:buChar char="•"/>
+              <a:tabLst/>
+            </a:pPr>
+            <a:r>
+              <a:rPr kumimoji="0" lang="en-US" altLang="en-US" sz="2000" b="0" i="0" u="none" strike="noStrike" cap="none" normalizeH="0" baseline="0" dirty="0">
+                <a:ln>
+                  <a:noFill/>
+                </a:ln>
+                <a:effectLst/>
+              </a:rPr>
+              <a:t>Ο Router </a:t>
+            </a:r>
+            <a:r>
+              <a:rPr kumimoji="0" lang="en-US" altLang="en-US" sz="2000" b="0" i="0" u="none" strike="noStrike" cap="none" normalizeH="0" baseline="0" dirty="0" err="1">
+                <a:ln>
+                  <a:noFill/>
+                </a:ln>
+                <a:effectLst/>
+              </a:rPr>
+              <a:t>εξυ</a:t>
+            </a:r>
+            <a:r>
+              <a:rPr kumimoji="0" lang="en-US" altLang="en-US" sz="2000" b="0" i="0" u="none" strike="noStrike" cap="none" normalizeH="0" baseline="0" dirty="0">
+                <a:ln>
+                  <a:noFill/>
+                </a:ln>
+                <a:effectLst/>
+              </a:rPr>
+              <a:t>πηρετεί κυκλικά: Ένα από τον A, ένα από τον B.</a:t>
+            </a:r>
+          </a:p>
+          <a:p>
+            <a:pPr marL="0" marR="0" lvl="0" indent="-228600" algn="l" fontAlgn="base">
+              <a:spcBef>
+                <a:spcPct val="0"/>
+              </a:spcBef>
+              <a:spcAft>
+                <a:spcPts val="600"/>
+              </a:spcAft>
+              <a:buClrTx/>
+              <a:buSzTx/>
+              <a:buFont typeface="Arial" panose="020B0604020202020204" pitchFamily="34" charset="0"/>
+              <a:buChar char="•"/>
+              <a:tabLst/>
+            </a:pPr>
+            <a:r>
+              <a:rPr kumimoji="0" lang="en-US" altLang="en-US" sz="2000" b="1" i="0" u="none" strike="noStrike" cap="none" normalizeH="0" baseline="0" dirty="0" err="1">
+                <a:ln>
+                  <a:noFill/>
+                </a:ln>
+                <a:effectLst/>
+              </a:rPr>
+              <a:t>Το</a:t>
+            </a:r>
+            <a:r>
+              <a:rPr kumimoji="0" lang="en-US" altLang="en-US" sz="2000" b="1" i="0" u="none" strike="noStrike" cap="none" normalizeH="0" baseline="0" dirty="0">
+                <a:ln>
+                  <a:noFill/>
+                </a:ln>
+                <a:effectLst/>
+              </a:rPr>
+              <a:t> Απ</a:t>
+            </a:r>
+            <a:r>
+              <a:rPr kumimoji="0" lang="en-US" altLang="en-US" sz="2000" b="1" i="0" u="none" strike="noStrike" cap="none" normalizeH="0" baseline="0" dirty="0" err="1">
+                <a:ln>
+                  <a:noFill/>
+                </a:ln>
+                <a:effectLst/>
+              </a:rPr>
+              <a:t>οτέλεσμ</a:t>
+            </a:r>
+            <a:r>
+              <a:rPr kumimoji="0" lang="en-US" altLang="en-US" sz="2000" b="1" i="0" u="none" strike="noStrike" cap="none" normalizeH="0" baseline="0" dirty="0">
+                <a:ln>
+                  <a:noFill/>
+                </a:ln>
+                <a:effectLst/>
+              </a:rPr>
+              <a:t>α:</a:t>
+            </a:r>
+            <a:endParaRPr kumimoji="0" lang="en-US" altLang="en-US" sz="2000" b="0" i="0" u="none" strike="noStrike" cap="none" normalizeH="0" baseline="0" dirty="0">
+              <a:ln>
+                <a:noFill/>
+              </a:ln>
+              <a:effectLst/>
+            </a:endParaRPr>
+          </a:p>
+          <a:p>
+            <a:pPr marL="0" marR="0" lvl="0" indent="-228600" algn="l" fontAlgn="base">
+              <a:spcBef>
+                <a:spcPct val="0"/>
+              </a:spcBef>
+              <a:spcAft>
+                <a:spcPts val="600"/>
+              </a:spcAft>
+              <a:buClrTx/>
+              <a:buSzTx/>
+              <a:buFont typeface="Arial" panose="020B0604020202020204" pitchFamily="34" charset="0"/>
+              <a:buChar char="•"/>
+              <a:tabLst/>
+            </a:pPr>
+            <a:r>
+              <a:rPr kumimoji="0" lang="en-US" altLang="en-US" sz="2000" b="1" i="0" u="none" strike="noStrike" cap="none" normalizeH="0" baseline="0" dirty="0">
+                <a:ln>
+                  <a:noFill/>
+                </a:ln>
+                <a:effectLst/>
+              </a:rPr>
+              <a:t>Fairness (</a:t>
+            </a:r>
+            <a:r>
+              <a:rPr kumimoji="0" lang="en-US" altLang="en-US" sz="2000" b="1" i="0" u="none" strike="noStrike" cap="none" normalizeH="0" baseline="0" dirty="0" err="1">
+                <a:ln>
+                  <a:noFill/>
+                </a:ln>
+                <a:effectLst/>
+              </a:rPr>
+              <a:t>Δικ</a:t>
+            </a:r>
+            <a:r>
+              <a:rPr kumimoji="0" lang="en-US" altLang="en-US" sz="2000" b="1" i="0" u="none" strike="noStrike" cap="none" normalizeH="0" baseline="0" dirty="0">
+                <a:ln>
+                  <a:noFill/>
+                </a:ln>
+                <a:effectLst/>
+              </a:rPr>
+              <a:t>αιοσύνη):</a:t>
+            </a:r>
+            <a:r>
+              <a:rPr kumimoji="0" lang="en-US" altLang="en-US" sz="2000" b="0" i="0" u="none" strike="noStrike" cap="none" normalizeH="0" baseline="0" dirty="0">
+                <a:ln>
+                  <a:noFill/>
+                </a:ln>
+                <a:effectLst/>
+              </a:rPr>
+              <a:t> Τα μικρά πακέτα δεν περιμένουν πίσω από </a:t>
+            </a:r>
+            <a:r>
+              <a:rPr kumimoji="0" lang="en-US" altLang="en-US" sz="2000" b="0" i="1" u="none" strike="noStrike" cap="none" normalizeH="0" baseline="0" dirty="0">
+                <a:ln>
+                  <a:noFill/>
+                </a:ln>
+                <a:effectLst/>
+              </a:rPr>
+              <a:t>όλα</a:t>
+            </a:r>
+            <a:r>
+              <a:rPr kumimoji="0" lang="en-US" altLang="en-US" sz="2000" b="0" i="0" u="none" strike="noStrike" cap="none" normalizeH="0" baseline="0" dirty="0">
+                <a:ln>
+                  <a:noFill/>
+                </a:ln>
+                <a:effectLst/>
+              </a:rPr>
+              <a:t> τα μεγάλα.</a:t>
+            </a:r>
+          </a:p>
+          <a:p>
+            <a:pPr marL="0" marR="0" lvl="0" indent="-228600" algn="l" fontAlgn="base">
+              <a:spcBef>
+                <a:spcPct val="0"/>
+              </a:spcBef>
+              <a:spcAft>
+                <a:spcPts val="600"/>
+              </a:spcAft>
+              <a:buClrTx/>
+              <a:buSzTx/>
+              <a:buFont typeface="Arial" panose="020B0604020202020204" pitchFamily="34" charset="0"/>
+              <a:buChar char="•"/>
+              <a:tabLst/>
+            </a:pPr>
+            <a:r>
+              <a:rPr kumimoji="0" lang="en-US" altLang="en-US" sz="2000" b="1" i="0" u="none" strike="noStrike" cap="none" normalizeH="0" baseline="0" dirty="0">
+                <a:ln>
+                  <a:noFill/>
+                </a:ln>
+                <a:effectLst/>
+              </a:rPr>
+              <a:t>Low Delay:</a:t>
+            </a:r>
+            <a:r>
+              <a:rPr kumimoji="0" lang="en-US" altLang="en-US" sz="2000" b="0" i="0" u="none" strike="noStrike" cap="none" normalizeH="0" baseline="0" dirty="0">
+                <a:ln>
+                  <a:noFill/>
+                </a:ln>
+                <a:effectLst/>
+              </a:rPr>
+              <a:t> Ο Host A </a:t>
+            </a:r>
+            <a:r>
+              <a:rPr kumimoji="0" lang="en-US" altLang="en-US" sz="2000" b="0" i="0" u="none" strike="noStrike" cap="none" normalizeH="0" baseline="0" dirty="0" err="1">
+                <a:ln>
+                  <a:noFill/>
+                </a:ln>
+                <a:effectLst/>
+              </a:rPr>
+              <a:t>εξυ</a:t>
+            </a:r>
+            <a:r>
+              <a:rPr kumimoji="0" lang="en-US" altLang="en-US" sz="2000" b="0" i="0" u="none" strike="noStrike" cap="none" normalizeH="0" baseline="0" dirty="0">
+                <a:ln>
+                  <a:noFill/>
+                </a:ln>
+                <a:effectLst/>
+              </a:rPr>
+              <a:t>πηρετείται άμεσα στον κύκλο του.</a:t>
+            </a:r>
+          </a:p>
+          <a:p>
+            <a:pPr marL="0" marR="0" lvl="0" indent="-228600" algn="l" fontAlgn="base">
+              <a:spcBef>
+                <a:spcPct val="0"/>
+              </a:spcBef>
+              <a:spcAft>
+                <a:spcPts val="600"/>
+              </a:spcAft>
+              <a:buClrTx/>
+              <a:buSzTx/>
+              <a:buFont typeface="Arial" panose="020B0604020202020204" pitchFamily="34" charset="0"/>
+              <a:buChar char="•"/>
+              <a:tabLst/>
+            </a:pPr>
+            <a:r>
+              <a:rPr kumimoji="0" lang="en-US" altLang="en-US" sz="2000" b="0" i="0" u="none" strike="noStrike" cap="none" normalizeH="0" baseline="0" dirty="0">
+                <a:ln>
+                  <a:noFill/>
+                </a:ln>
+                <a:effectLst/>
+              </a:rPr>
+              <a:t>Στο </a:t>
+            </a:r>
+            <a:r>
+              <a:rPr kumimoji="0" lang="en-US" altLang="en-US" sz="2000" b="0" i="0" u="none" strike="noStrike" cap="none" normalizeH="0" baseline="0" dirty="0" err="1">
+                <a:ln>
+                  <a:noFill/>
+                </a:ln>
+                <a:effectLst/>
+              </a:rPr>
+              <a:t>γράφημ</a:t>
+            </a:r>
+            <a:r>
+              <a:rPr kumimoji="0" lang="en-US" altLang="en-US" sz="2000" b="0" i="0" u="none" strike="noStrike" cap="none" normalizeH="0" baseline="0" dirty="0">
+                <a:ln>
+                  <a:noFill/>
+                </a:ln>
+                <a:effectLst/>
+              </a:rPr>
+              <a:t>α βλέπουμε ξεκάθαρο διαχωρισμό: Τα μικρά πακέτα έχουν πολύ χαμηλότερη καθυστέρηση.</a:t>
+            </a:r>
+          </a:p>
+          <a:p>
+            <a:pPr marL="0" marR="0" lvl="0" indent="-228600" algn="l" fontAlgn="base">
+              <a:spcBef>
+                <a:spcPct val="0"/>
+              </a:spcBef>
+              <a:spcAft>
+                <a:spcPts val="600"/>
+              </a:spcAft>
+              <a:buClrTx/>
+              <a:buSzTx/>
+              <a:buFont typeface="Arial" panose="020B0604020202020204" pitchFamily="34" charset="0"/>
+              <a:buChar char="•"/>
+              <a:tabLst/>
+            </a:pPr>
+            <a:endParaRPr kumimoji="0" lang="en-US" altLang="en-US" sz="2000" b="0" i="0" u="none" strike="noStrike" cap="none" normalizeH="0" baseline="0" dirty="0">
+              <a:ln>
+                <a:noFill/>
+              </a:ln>
+              <a:effectLst/>
+            </a:endParaRPr>
+          </a:p>
+        </p:txBody>
+      </p:sp>
+    </p:spTree>
+    <p:extLst>
+      <p:ext uri="{BB962C8B-B14F-4D97-AF65-F5344CB8AC3E}">
+        <p14:creationId xmlns:p14="http://schemas.microsoft.com/office/powerpoint/2010/main" val="1357535890"/>
+      </p:ext>
+    </p:extLst>
+  </p:cSld>
+  <p:clrMapOvr>
+    <a:masterClrMapping/>
+  </p:clrMapOvr>
+</p:sld>
+</file>
+
+<file path=ppt/slides/slide35.xml><?xml version="1.0" encoding="utf-8"?>
+<p:sld xmlns:a="http://schemas.openxmlformats.org/drawingml/2006/main" xmlns:r="http://schemas.openxmlformats.org/officeDocument/2006/relationships" xmlns:p="http://schemas.openxmlformats.org/presentationml/2006/main">
+  <p:cSld>
+    <p:spTree>
+      <p:nvGrpSpPr>
+        <p:cNvPr id="1" name=""/>
+        <p:cNvGrpSpPr/>
+        <p:nvPr/>
+      </p:nvGrpSpPr>
+      <p:grpSpPr>
+        <a:xfrm>
+          <a:off x="0" y="0"/>
+          <a:ext cx="0" cy="0"/>
+          <a:chOff x="0" y="0"/>
+          <a:chExt cx="0" cy="0"/>
+        </a:xfrm>
+      </p:grpSpPr>
+      <p:pic>
+        <p:nvPicPr>
+          <p:cNvPr id="2" name="Picture 1" descr="A screenshot of a graph&#10;&#10;AI-generated content may be incorrect.">
+            <a:extLst>
+              <a:ext uri="{FF2B5EF4-FFF2-40B4-BE49-F238E27FC236}">
+                <a16:creationId xmlns:a16="http://schemas.microsoft.com/office/drawing/2014/main" id="{CE8ABB29-1192-1C67-B741-20932D4A6E64}"/>
+              </a:ext>
+            </a:extLst>
+          </p:cNvPr>
+          <p:cNvPicPr>
+            <a:picLocks noChangeAspect="1"/>
+          </p:cNvPicPr>
+          <p:nvPr/>
+        </p:nvPicPr>
+        <p:blipFill>
+          <a:blip r:embed="rId2"/>
+          <a:stretch>
+            <a:fillRect/>
+          </a:stretch>
+        </p:blipFill>
+        <p:spPr>
+          <a:xfrm>
+            <a:off x="0" y="0"/>
+            <a:ext cx="12192000" cy="6857999"/>
+          </a:xfrm>
+          <a:prstGeom prst="rect">
+            <a:avLst/>
+          </a:prstGeom>
+        </p:spPr>
+      </p:pic>
+      <p:sp>
+        <p:nvSpPr>
+          <p:cNvPr id="4" name="TextBox 3">
+            <a:extLst>
+              <a:ext uri="{FF2B5EF4-FFF2-40B4-BE49-F238E27FC236}">
+                <a16:creationId xmlns:a16="http://schemas.microsoft.com/office/drawing/2014/main" id="{5C310738-23A1-CFAF-30B5-541B21A9D060}"/>
+              </a:ext>
+            </a:extLst>
+          </p:cNvPr>
+          <p:cNvSpPr txBox="1"/>
+          <p:nvPr/>
+        </p:nvSpPr>
+        <p:spPr>
+          <a:xfrm>
+            <a:off x="0" y="146304"/>
+            <a:ext cx="1673856" cy="400110"/>
+          </a:xfrm>
+          <a:prstGeom prst="rect">
+            <a:avLst/>
+          </a:prstGeom>
+          <a:noFill/>
+        </p:spPr>
+        <p:txBody>
+          <a:bodyPr wrap="none" rtlCol="0">
+            <a:spAutoFit/>
+          </a:bodyPr>
+          <a:lstStyle/>
+          <a:p>
+            <a:r>
+              <a:rPr lang="en-US" sz="2000" b="1" dirty="0"/>
+              <a:t>Round Robin</a:t>
+            </a:r>
+          </a:p>
+        </p:txBody>
+      </p:sp>
+    </p:spTree>
+    <p:extLst>
+      <p:ext uri="{BB962C8B-B14F-4D97-AF65-F5344CB8AC3E}">
+        <p14:creationId xmlns:p14="http://schemas.microsoft.com/office/powerpoint/2010/main" val="1325233034"/>
+      </p:ext>
+    </p:extLst>
+  </p:cSld>
+  <p:clrMapOvr>
+    <a:masterClrMapping/>
+  </p:clrMapOvr>
+</p:sld>
+</file>
+
+<file path=ppt/slides/slide36.xml><?xml version="1.0" encoding="utf-8"?>
+<p:sld xmlns:a="http://schemas.openxmlformats.org/drawingml/2006/main" xmlns:r="http://schemas.openxmlformats.org/officeDocument/2006/relationships" xmlns:p="http://schemas.openxmlformats.org/presentationml/2006/main">
+  <p:cSld>
+    <p:bg>
+      <p:bgPr>
+        <a:solidFill>
+          <a:schemeClr val="bg1"/>
+        </a:solidFill>
+        <a:effectLst/>
+      </p:bgPr>
+    </p:bg>
+    <p:spTree>
+      <p:nvGrpSpPr>
+        <p:cNvPr id="1" name=""/>
+        <p:cNvGrpSpPr/>
+        <p:nvPr/>
+      </p:nvGrpSpPr>
+      <p:grpSpPr>
+        <a:xfrm>
+          <a:off x="0" y="0"/>
+          <a:ext cx="0" cy="0"/>
+          <a:chOff x="0" y="0"/>
+          <a:chExt cx="0" cy="0"/>
+        </a:xfrm>
+      </p:grpSpPr>
+      <p:sp useBgFill="1">
+        <p:nvSpPr>
+          <p:cNvPr id="9" name="Rectangle 8">
+            <a:extLst>
+              <a:ext uri="{FF2B5EF4-FFF2-40B4-BE49-F238E27FC236}">
+                <a16:creationId xmlns:a16="http://schemas.microsoft.com/office/drawing/2014/main" id="{1B15ED52-F352-441B-82BF-E0EA34836D08}"/>
+              </a:ext>
+              <a:ext uri="{C183D7F6-B498-43B3-948B-1728B52AA6E4}">
+                <adec:decorative xmlns:adec="http://schemas.microsoft.com/office/drawing/2017/decorative" val="1"/>
+              </a:ext>
+            </a:extLst>
+          </p:cNvPr>
+          <p:cNvSpPr>
+            <a:spLocks noGrp="1" noRot="1" noChangeAspect="1" noMove="1" noResize="1" noEditPoints="1" noAdjustHandles="1" noChangeArrowheads="1" noChangeShapeType="1" noTextEdit="1"/>
+          </p:cNvSpPr>
+          <p:nvPr>
+            <p:extLst>
+              <p:ext uri="{386F3935-93C4-4BCD-93E2-E3B085C9AB24}">
+                <p16:designElem xmlns:p16="http://schemas.microsoft.com/office/powerpoint/2015/main" val="1"/>
+              </p:ext>
+            </p:extLst>
+          </p:nvPr>
+        </p:nvSpPr>
+        <p:spPr>
+          <a:xfrm>
+            <a:off x="0" y="0"/>
+            <a:ext cx="12192000" cy="6858000"/>
+          </a:xfrm>
+          <a:prstGeom prst="rect">
+            <a:avLst/>
+          </a:prstGeom>
+          <a:ln w="12700" cap="flat" cmpd="sng" algn="ctr">
+            <a:noFill/>
+            <a:prstDash val="solid"/>
+            <a:miter lim="800000"/>
+          </a:ln>
+          <a:effectLst/>
+          <a:extLst>
+            <a:ext uri="{91240B29-F687-4F45-9708-019B960494DF}">
+              <a14:hiddenLine xmlns:a14="http://schemas.microsoft.com/office/drawing/2010/main" w="12700" cap="flat" cmpd="sng" algn="ctr">
+                <a:solidFill>
+                  <a:schemeClr val="accent1">
+                    <a:shade val="50000"/>
+                  </a:schemeClr>
+                </a:solidFill>
+                <a:prstDash val="solid"/>
+                <a:miter lim="800000"/>
+              </a14:hiddenLine>
+            </a:ext>
+          </a:extLst>
+        </p:spPr>
+        <p:style>
+          <a:lnRef idx="2">
+            <a:schemeClr val="accent1">
+              <a:shade val="50000"/>
+            </a:schemeClr>
+          </a:lnRef>
+          <a:fillRef idx="1">
+            <a:schemeClr val="accent1"/>
+          </a:fillRef>
+          <a:effectRef idx="0">
+            <a:schemeClr val="accent1"/>
+          </a:effectRef>
+          <a:fontRef idx="minor">
+            <a:schemeClr val="lt1"/>
+          </a:fontRef>
+        </p:style>
+        <p:txBody>
+          <a:bodyPr rtlCol="0" anchor="ctr"/>
+          <a:lstStyle/>
+          <a:p>
+            <a:pPr algn="ctr"/>
+            <a:endParaRPr lang="en-US"/>
+          </a:p>
+        </p:txBody>
+      </p:sp>
+      <p:sp>
+        <p:nvSpPr>
+          <p:cNvPr id="11" name="Rectangle 10">
+            <a:extLst>
+              <a:ext uri="{FF2B5EF4-FFF2-40B4-BE49-F238E27FC236}">
+                <a16:creationId xmlns:a16="http://schemas.microsoft.com/office/drawing/2014/main" id="{3B2E3793-BFE6-45A2-9B7B-E18844431C99}"/>
+              </a:ext>
+              <a:ext uri="{C183D7F6-B498-43B3-948B-1728B52AA6E4}">
+                <adec:decorative xmlns:adec="http://schemas.microsoft.com/office/drawing/2017/decorative" val="1"/>
+              </a:ext>
+            </a:extLst>
+          </p:cNvPr>
+          <p:cNvSpPr>
+            <a:spLocks noGrp="1" noRot="1" noChangeAspect="1" noMove="1" noResize="1" noEditPoints="1" noAdjustHandles="1" noChangeArrowheads="1" noChangeShapeType="1" noTextEdit="1"/>
+          </p:cNvSpPr>
+          <p:nvPr>
+            <p:extLst>
+              <p:ext uri="{386F3935-93C4-4BCD-93E2-E3B085C9AB24}">
+                <p16:designElem xmlns:p16="http://schemas.microsoft.com/office/powerpoint/2015/main" val="1"/>
+              </p:ext>
+            </p:extLst>
+          </p:nvPr>
+        </p:nvSpPr>
+        <p:spPr>
+          <a:xfrm flipH="1">
+            <a:off x="-1" y="-1"/>
+            <a:ext cx="12191998" cy="1590742"/>
+          </a:xfrm>
+          <a:prstGeom prst="rect">
+            <a:avLst/>
+          </a:prstGeom>
+          <a:gradFill>
+            <a:gsLst>
+              <a:gs pos="0">
+                <a:srgbClr val="000000"/>
+              </a:gs>
+              <a:gs pos="100000">
+                <a:schemeClr val="accent1">
+                  <a:lumMod val="75000"/>
+                </a:schemeClr>
+              </a:gs>
+            </a:gsLst>
+            <a:lin ang="8400000" scaled="0"/>
+          </a:gradFill>
+          <a:ln>
+            <a:noFill/>
+          </a:ln>
+        </p:spPr>
+        <p:style>
+          <a:lnRef idx="2">
+            <a:schemeClr val="accent1">
+              <a:shade val="50000"/>
+            </a:schemeClr>
+          </a:lnRef>
+          <a:fillRef idx="1">
+            <a:schemeClr val="accent1"/>
+          </a:fillRef>
+          <a:effectRef idx="0">
+            <a:schemeClr val="accent1"/>
+          </a:effectRef>
+          <a:fontRef idx="minor">
+            <a:schemeClr val="lt1"/>
+          </a:fontRef>
+        </p:style>
+        <p:txBody>
+          <a:bodyPr rtlCol="0" anchor="ctr"/>
+          <a:lstStyle/>
+          <a:p>
+            <a:pPr algn="ctr"/>
+            <a:endParaRPr lang="en-US"/>
+          </a:p>
+        </p:txBody>
+      </p:sp>
+      <p:sp>
+        <p:nvSpPr>
+          <p:cNvPr id="13" name="Rectangle 12">
+            <a:extLst>
+              <a:ext uri="{FF2B5EF4-FFF2-40B4-BE49-F238E27FC236}">
+                <a16:creationId xmlns:a16="http://schemas.microsoft.com/office/drawing/2014/main" id="{BC4C4868-CB8F-4AF9-9CDB-8108F2C19B67}"/>
+              </a:ext>
+              <a:ext uri="{C183D7F6-B498-43B3-948B-1728B52AA6E4}">
+                <adec:decorative xmlns:adec="http://schemas.microsoft.com/office/drawing/2017/decorative" val="1"/>
+              </a:ext>
+            </a:extLst>
+          </p:cNvPr>
+          <p:cNvSpPr>
+            <a:spLocks noGrp="1" noRot="1" noChangeAspect="1" noMove="1" noResize="1" noEditPoints="1" noAdjustHandles="1" noChangeArrowheads="1" noChangeShapeType="1" noTextEdit="1"/>
+          </p:cNvSpPr>
+          <p:nvPr>
+            <p:extLst>
+              <p:ext uri="{386F3935-93C4-4BCD-93E2-E3B085C9AB24}">
+                <p16:designElem xmlns:p16="http://schemas.microsoft.com/office/powerpoint/2015/main" val="1"/>
+              </p:ext>
+            </p:extLst>
+          </p:nvPr>
+        </p:nvSpPr>
+        <p:spPr>
+          <a:xfrm rot="10800000" flipH="1">
+            <a:off x="-3" y="0"/>
+            <a:ext cx="8115306" cy="1590742"/>
+          </a:xfrm>
+          <a:prstGeom prst="rect">
+            <a:avLst/>
+          </a:prstGeom>
+          <a:gradFill>
+            <a:gsLst>
+              <a:gs pos="20000">
+                <a:schemeClr val="accent1">
+                  <a:alpha val="0"/>
+                </a:schemeClr>
+              </a:gs>
+              <a:gs pos="100000">
+                <a:schemeClr val="accent1">
+                  <a:lumMod val="50000"/>
+                  <a:alpha val="55000"/>
+                </a:schemeClr>
+              </a:gs>
+            </a:gsLst>
+            <a:lin ang="13800000" scaled="0"/>
+          </a:gradFill>
+          <a:ln>
+            <a:noFill/>
+          </a:ln>
+        </p:spPr>
+        <p:style>
+          <a:lnRef idx="2">
+            <a:schemeClr val="accent1">
+              <a:shade val="50000"/>
+            </a:schemeClr>
+          </a:lnRef>
+          <a:fillRef idx="1">
+            <a:schemeClr val="accent1"/>
+          </a:fillRef>
+          <a:effectRef idx="0">
+            <a:schemeClr val="accent1"/>
+          </a:effectRef>
+          <a:fontRef idx="minor">
+            <a:schemeClr val="lt1"/>
+          </a:fontRef>
+        </p:style>
+        <p:txBody>
+          <a:bodyPr rtlCol="0" anchor="ctr"/>
+          <a:lstStyle/>
+          <a:p>
+            <a:pPr algn="ctr"/>
+            <a:endParaRPr lang="en-US"/>
+          </a:p>
+        </p:txBody>
+      </p:sp>
+      <p:sp>
+        <p:nvSpPr>
+          <p:cNvPr id="15" name="Rectangle 14">
+            <a:extLst>
+              <a:ext uri="{FF2B5EF4-FFF2-40B4-BE49-F238E27FC236}">
+                <a16:creationId xmlns:a16="http://schemas.microsoft.com/office/drawing/2014/main" id="{375E0459-6403-40CD-989D-56A4407CA12E}"/>
+              </a:ext>
+              <a:ext uri="{C183D7F6-B498-43B3-948B-1728B52AA6E4}">
+                <adec:decorative xmlns:adec="http://schemas.microsoft.com/office/drawing/2017/decorative" val="1"/>
+              </a:ext>
+            </a:extLst>
+          </p:cNvPr>
+          <p:cNvSpPr>
+            <a:spLocks noGrp="1" noRot="1" noChangeAspect="1" noMove="1" noResize="1" noEditPoints="1" noAdjustHandles="1" noChangeArrowheads="1" noChangeShapeType="1" noTextEdit="1"/>
+          </p:cNvSpPr>
+          <p:nvPr>
+            <p:extLst>
+              <p:ext uri="{386F3935-93C4-4BCD-93E2-E3B085C9AB24}">
+                <p16:designElem xmlns:p16="http://schemas.microsoft.com/office/powerpoint/2015/main" val="1"/>
+              </p:ext>
+            </p:extLst>
+          </p:nvPr>
+        </p:nvSpPr>
+        <p:spPr>
+          <a:xfrm flipH="1">
+            <a:off x="8115299" y="-1"/>
+            <a:ext cx="4076698" cy="1590742"/>
+          </a:xfrm>
+          <a:prstGeom prst="rect">
+            <a:avLst/>
+          </a:prstGeom>
+          <a:gradFill>
+            <a:gsLst>
+              <a:gs pos="0">
+                <a:schemeClr val="accent1">
+                  <a:alpha val="66000"/>
+                </a:schemeClr>
+              </a:gs>
+              <a:gs pos="100000">
+                <a:srgbClr val="000000">
+                  <a:alpha val="30000"/>
+                </a:srgbClr>
+              </a:gs>
+            </a:gsLst>
+            <a:lin ang="13200000" scaled="0"/>
+          </a:gradFill>
+          <a:ln>
+            <a:noFill/>
+          </a:ln>
+        </p:spPr>
+        <p:style>
+          <a:lnRef idx="2">
+            <a:schemeClr val="accent1">
+              <a:shade val="50000"/>
+            </a:schemeClr>
+          </a:lnRef>
+          <a:fillRef idx="1">
+            <a:schemeClr val="accent1"/>
+          </a:fillRef>
+          <a:effectRef idx="0">
+            <a:schemeClr val="accent1"/>
+          </a:effectRef>
+          <a:fontRef idx="minor">
+            <a:schemeClr val="lt1"/>
+          </a:fontRef>
+        </p:style>
+        <p:txBody>
+          <a:bodyPr rtlCol="0" anchor="ctr"/>
+          <a:lstStyle/>
+          <a:p>
+            <a:pPr algn="ctr"/>
+            <a:endParaRPr lang="en-US"/>
+          </a:p>
+        </p:txBody>
+      </p:sp>
+      <p:sp>
+        <p:nvSpPr>
+          <p:cNvPr id="17" name="Rectangle 16">
+            <a:extLst>
+              <a:ext uri="{FF2B5EF4-FFF2-40B4-BE49-F238E27FC236}">
+                <a16:creationId xmlns:a16="http://schemas.microsoft.com/office/drawing/2014/main" id="{53E5B1A8-3AC9-4BD1-9BBC-78CA94F2D1BA}"/>
+              </a:ext>
+              <a:ext uri="{C183D7F6-B498-43B3-948B-1728B52AA6E4}">
+                <adec:decorative xmlns:adec="http://schemas.microsoft.com/office/drawing/2017/decorative" val="1"/>
+              </a:ext>
+            </a:extLst>
+          </p:cNvPr>
+          <p:cNvSpPr>
+            <a:spLocks noGrp="1" noRot="1" noChangeAspect="1" noMove="1" noResize="1" noEditPoints="1" noAdjustHandles="1" noChangeArrowheads="1" noChangeShapeType="1" noTextEdit="1"/>
+          </p:cNvSpPr>
+          <p:nvPr>
+            <p:extLst>
+              <p:ext uri="{386F3935-93C4-4BCD-93E2-E3B085C9AB24}">
+                <p16:designElem xmlns:p16="http://schemas.microsoft.com/office/powerpoint/2015/main" val="1"/>
+              </p:ext>
+            </p:extLst>
+          </p:nvPr>
+        </p:nvSpPr>
+        <p:spPr>
+          <a:xfrm>
+            <a:off x="459350" y="-1"/>
+            <a:ext cx="11732646" cy="1597433"/>
+          </a:xfrm>
+          <a:prstGeom prst="rect">
+            <a:avLst/>
+          </a:prstGeom>
+          <a:gradFill>
+            <a:gsLst>
+              <a:gs pos="50000">
+                <a:srgbClr val="000000">
+                  <a:alpha val="0"/>
+                </a:srgbClr>
+              </a:gs>
+              <a:gs pos="99000">
+                <a:schemeClr val="accent1">
+                  <a:lumMod val="50000"/>
+                  <a:alpha val="52000"/>
+                </a:schemeClr>
+              </a:gs>
+            </a:gsLst>
+            <a:lin ang="16800000" scaled="0"/>
+          </a:gradFill>
+          <a:ln>
+            <a:noFill/>
+          </a:ln>
+        </p:spPr>
+        <p:style>
+          <a:lnRef idx="2">
+            <a:schemeClr val="accent1">
+              <a:shade val="50000"/>
+            </a:schemeClr>
+          </a:lnRef>
+          <a:fillRef idx="1">
+            <a:schemeClr val="accent1"/>
+          </a:fillRef>
+          <a:effectRef idx="0">
+            <a:schemeClr val="accent1"/>
+          </a:effectRef>
+          <a:fontRef idx="minor">
+            <a:schemeClr val="lt1"/>
+          </a:fontRef>
+        </p:style>
+        <p:txBody>
+          <a:bodyPr rtlCol="0" anchor="ctr"/>
+          <a:lstStyle/>
+          <a:p>
+            <a:pPr algn="ctr"/>
+            <a:endParaRPr lang="en-US"/>
+          </a:p>
+        </p:txBody>
+      </p:sp>
+      <p:sp>
+        <p:nvSpPr>
+          <p:cNvPr id="2" name="Title 1">
+            <a:extLst>
+              <a:ext uri="{FF2B5EF4-FFF2-40B4-BE49-F238E27FC236}">
+                <a16:creationId xmlns:a16="http://schemas.microsoft.com/office/drawing/2014/main" id="{871E060A-15B0-695E-13CF-00B2D85C5E7B}"/>
+              </a:ext>
+            </a:extLst>
+          </p:cNvPr>
+          <p:cNvSpPr>
+            <a:spLocks noGrp="1"/>
+          </p:cNvSpPr>
+          <p:nvPr>
+            <p:ph type="ctrTitle"/>
+          </p:nvPr>
+        </p:nvSpPr>
+        <p:spPr>
+          <a:xfrm>
+            <a:off x="1371599" y="294538"/>
+            <a:ext cx="9895951" cy="1033669"/>
+          </a:xfrm>
+        </p:spPr>
+        <p:txBody>
+          <a:bodyPr vert="horz" lIns="91440" tIns="45720" rIns="91440" bIns="45720" rtlCol="0" anchor="ctr">
+            <a:normAutofit/>
+          </a:bodyPr>
+          <a:lstStyle/>
+          <a:p>
+            <a:pPr algn="l"/>
+            <a:r>
+              <a:rPr lang="en-US" sz="4000" kern="1200">
+                <a:solidFill>
+                  <a:srgbClr val="FFFFFF"/>
+                </a:solidFill>
+                <a:latin typeface="+mj-lt"/>
+                <a:ea typeface="+mj-ea"/>
+                <a:cs typeface="+mj-cs"/>
+              </a:rPr>
+              <a:t>Σύγκριση &amp; Συμπεράσματα</a:t>
+            </a:r>
+          </a:p>
+        </p:txBody>
+      </p:sp>
+      <p:sp>
+        <p:nvSpPr>
+          <p:cNvPr id="4" name="Rectangle 1">
+            <a:extLst>
+              <a:ext uri="{FF2B5EF4-FFF2-40B4-BE49-F238E27FC236}">
+                <a16:creationId xmlns:a16="http://schemas.microsoft.com/office/drawing/2014/main" id="{352A290C-8528-28F9-0CCD-AA0DB91D2696}"/>
+              </a:ext>
+            </a:extLst>
+          </p:cNvPr>
+          <p:cNvSpPr>
+            <a:spLocks noGrp="1" noChangeArrowheads="1"/>
+          </p:cNvSpPr>
+          <p:nvPr>
+            <p:ph type="subTitle" idx="1"/>
+          </p:nvPr>
+        </p:nvSpPr>
+        <p:spPr bwMode="auto">
+          <a:xfrm>
+            <a:off x="1371599" y="2318197"/>
+            <a:ext cx="9724031" cy="3683358"/>
+          </a:xfrm>
+          <a:prstGeom prst="rect">
+            <a:avLst/>
+          </a:prstGeom>
+          <a:extLst>
+            <a:ext uri="{909E8E84-426E-40DD-AFC4-6F175D3DCCD1}">
+              <a14:hiddenFill xmlns:a14="http://schemas.microsoft.com/office/drawing/2010/main">
+                <a:solidFill>
+                  <a:schemeClr val="accent1"/>
+                </a:solidFill>
+              </a14:hiddenFill>
+            </a:ext>
+            <a:ext uri="{91240B29-F687-4F45-9708-019B960494DF}">
+              <a14:hiddenLine xmlns:a14="http://schemas.microsoft.com/office/drawing/2010/main" w="9525">
+                <a:solidFill>
+                  <a:schemeClr val="tx1"/>
+                </a:solidFill>
+                <a:miter lim="800000"/>
+                <a:headEnd/>
+                <a:tailEnd/>
+              </a14:hiddenLine>
+            </a:ext>
+            <a:ext uri="{AF507438-7753-43E0-B8FC-AC1667EBCBE1}">
+              <a14:hiddenEffects xmlns:a14="http://schemas.microsoft.com/office/drawing/2010/main">
+                <a:effectLst>
+                  <a:outerShdw dist="35921" dir="2700000" algn="ctr" rotWithShape="0">
+                    <a:schemeClr val="bg2"/>
+                  </a:outerShdw>
+                </a:effectLst>
+              </a14:hiddenEffects>
+            </a:ext>
+          </a:extLst>
+        </p:spPr>
+        <p:txBody>
+          <a:bodyPr vert="horz" lIns="91440" tIns="45720" rIns="91440" bIns="45720" numCol="1" rtlCol="0" anchor="ctr" anchorCtr="0" compatLnSpc="1">
+            <a:prstTxWarp prst="textNoShape">
+              <a:avLst/>
+            </a:prstTxWarp>
+            <a:normAutofit/>
+          </a:bodyPr>
+          <a:lstStyle/>
+          <a:p>
+            <a:pPr marL="0" marR="0" lvl="0" indent="-228600" algn="l" fontAlgn="base">
+              <a:spcBef>
+                <a:spcPct val="0"/>
+              </a:spcBef>
+              <a:spcAft>
+                <a:spcPts val="600"/>
+              </a:spcAft>
+              <a:buClrTx/>
+              <a:buSzTx/>
+              <a:buFont typeface="Arial" panose="020B0604020202020204" pitchFamily="34" charset="0"/>
+              <a:buChar char="•"/>
+              <a:tabLst/>
+            </a:pPr>
+            <a:r>
+              <a:rPr kumimoji="0" lang="en-US" altLang="en-US" sz="2000" b="1" i="0" u="none" strike="noStrike" cap="none" normalizeH="0" baseline="0" dirty="0">
+                <a:ln>
+                  <a:noFill/>
+                </a:ln>
+                <a:effectLst/>
+              </a:rPr>
+              <a:t>FCFS:</a:t>
+            </a:r>
+            <a:endParaRPr kumimoji="0" lang="en-US" altLang="en-US" sz="2000" b="0" i="0" u="none" strike="noStrike" cap="none" normalizeH="0" baseline="0" dirty="0">
+              <a:ln>
+                <a:noFill/>
+              </a:ln>
+              <a:effectLst/>
+            </a:endParaRPr>
+          </a:p>
+          <a:p>
+            <a:pPr marL="0" marR="0" lvl="0" indent="-228600" algn="l" fontAlgn="base">
+              <a:spcBef>
+                <a:spcPct val="0"/>
+              </a:spcBef>
+              <a:spcAft>
+                <a:spcPts val="600"/>
+              </a:spcAft>
+              <a:buClrTx/>
+              <a:buSzTx/>
+              <a:buFont typeface="Arial" panose="020B0604020202020204" pitchFamily="34" charset="0"/>
+              <a:buChar char="•"/>
+              <a:tabLst/>
+            </a:pPr>
+            <a:r>
+              <a:rPr kumimoji="0" lang="en-US" altLang="en-US" sz="2000" b="0" i="0" u="none" strike="noStrike" cap="none" normalizeH="0" baseline="0" dirty="0">
+                <a:ln>
+                  <a:noFill/>
+                </a:ln>
+                <a:effectLst/>
+              </a:rPr>
+              <a:t>Απ</a:t>
+            </a:r>
+            <a:r>
+              <a:rPr kumimoji="0" lang="en-US" altLang="en-US" sz="2000" b="0" i="0" u="none" strike="noStrike" cap="none" normalizeH="0" baseline="0" dirty="0" err="1">
+                <a:ln>
+                  <a:noFill/>
+                </a:ln>
+                <a:effectLst/>
+              </a:rPr>
+              <a:t>λός</a:t>
+            </a:r>
+            <a:r>
+              <a:rPr kumimoji="0" lang="en-US" altLang="en-US" sz="2000" b="0" i="0" u="none" strike="noStrike" cap="none" normalizeH="0" baseline="0" dirty="0">
+                <a:ln>
+                  <a:noFill/>
+                </a:ln>
+                <a:effectLst/>
+              </a:rPr>
+              <a:t> </a:t>
+            </a:r>
+            <a:r>
+              <a:rPr kumimoji="0" lang="en-US" altLang="en-US" sz="2000" b="0" i="0" u="none" strike="noStrike" cap="none" normalizeH="0" baseline="0" dirty="0" err="1">
+                <a:ln>
+                  <a:noFill/>
+                </a:ln>
+                <a:effectLst/>
+              </a:rPr>
+              <a:t>στην</a:t>
+            </a:r>
+            <a:r>
+              <a:rPr kumimoji="0" lang="en-US" altLang="en-US" sz="2000" b="0" i="0" u="none" strike="noStrike" cap="none" normalizeH="0" baseline="0" dirty="0">
+                <a:ln>
+                  <a:noFill/>
+                </a:ln>
+                <a:effectLst/>
+              </a:rPr>
+              <a:t> </a:t>
+            </a:r>
+            <a:r>
+              <a:rPr kumimoji="0" lang="en-US" altLang="en-US" sz="2000" b="0" i="0" u="none" strike="noStrike" cap="none" normalizeH="0" baseline="0" dirty="0" err="1">
+                <a:ln>
+                  <a:noFill/>
+                </a:ln>
+                <a:effectLst/>
+              </a:rPr>
+              <a:t>υλο</a:t>
+            </a:r>
+            <a:r>
+              <a:rPr kumimoji="0" lang="en-US" altLang="en-US" sz="2000" b="0" i="0" u="none" strike="noStrike" cap="none" normalizeH="0" baseline="0" dirty="0">
+                <a:ln>
+                  <a:noFill/>
+                </a:ln>
+                <a:effectLst/>
+              </a:rPr>
+              <a:t>ποίηση.</a:t>
+            </a:r>
+          </a:p>
+          <a:p>
+            <a:pPr marL="0" marR="0" lvl="0" indent="-228600" algn="l" fontAlgn="base">
+              <a:spcBef>
+                <a:spcPct val="0"/>
+              </a:spcBef>
+              <a:spcAft>
+                <a:spcPts val="600"/>
+              </a:spcAft>
+              <a:buClrTx/>
+              <a:buSzTx/>
+              <a:buFont typeface="Arial" panose="020B0604020202020204" pitchFamily="34" charset="0"/>
+              <a:buChar char="•"/>
+              <a:tabLst/>
+            </a:pPr>
+            <a:r>
+              <a:rPr kumimoji="0" lang="en-US" altLang="en-US" sz="2000" b="1" i="0" u="none" strike="noStrike" cap="none" normalizeH="0" baseline="0" dirty="0" err="1">
+                <a:ln>
+                  <a:noFill/>
+                </a:ln>
+                <a:effectLst/>
+              </a:rPr>
+              <a:t>Ακ</a:t>
+            </a:r>
+            <a:r>
+              <a:rPr kumimoji="0" lang="en-US" altLang="en-US" sz="2000" b="1" i="0" u="none" strike="noStrike" cap="none" normalizeH="0" baseline="0" dirty="0">
+                <a:ln>
+                  <a:noFill/>
+                </a:ln>
+                <a:effectLst/>
+              </a:rPr>
+              <a:t>ατάλληλος</a:t>
+            </a:r>
+            <a:r>
+              <a:rPr kumimoji="0" lang="en-US" altLang="en-US" sz="2000" b="0" i="0" u="none" strike="noStrike" cap="none" normalizeH="0" baseline="0" dirty="0">
+                <a:ln>
+                  <a:noFill/>
+                </a:ln>
+                <a:effectLst/>
+              </a:rPr>
+              <a:t> για μικτή κίνηση (Mixed Load), καθώς οι βαριές ροές πνίγουν τις ευαίσθητες ροές.</a:t>
+            </a:r>
+          </a:p>
+          <a:p>
+            <a:pPr marL="0" marR="0" lvl="0" indent="-228600" algn="l" fontAlgn="base">
+              <a:spcBef>
+                <a:spcPct val="0"/>
+              </a:spcBef>
+              <a:spcAft>
+                <a:spcPts val="600"/>
+              </a:spcAft>
+              <a:buClrTx/>
+              <a:buSzTx/>
+              <a:buFont typeface="Arial" panose="020B0604020202020204" pitchFamily="34" charset="0"/>
+              <a:buChar char="•"/>
+              <a:tabLst/>
+            </a:pPr>
+            <a:r>
+              <a:rPr kumimoji="0" lang="en-US" altLang="en-US" sz="2000" b="1" i="0" u="none" strike="noStrike" cap="none" normalizeH="0" baseline="0" dirty="0">
+                <a:ln>
+                  <a:noFill/>
+                </a:ln>
+                <a:effectLst/>
+              </a:rPr>
+              <a:t>Round-Robin:</a:t>
+            </a:r>
+            <a:endParaRPr kumimoji="0" lang="en-US" altLang="en-US" sz="2000" b="0" i="0" u="none" strike="noStrike" cap="none" normalizeH="0" baseline="0" dirty="0">
+              <a:ln>
+                <a:noFill/>
+              </a:ln>
+              <a:effectLst/>
+            </a:endParaRPr>
+          </a:p>
+          <a:p>
+            <a:pPr marL="0" marR="0" lvl="0" indent="-228600" algn="l" fontAlgn="base">
+              <a:spcBef>
+                <a:spcPct val="0"/>
+              </a:spcBef>
+              <a:spcAft>
+                <a:spcPts val="600"/>
+              </a:spcAft>
+              <a:buClrTx/>
+              <a:buSzTx/>
+              <a:buFont typeface="Arial" panose="020B0604020202020204" pitchFamily="34" charset="0"/>
+              <a:buChar char="•"/>
+              <a:tabLst/>
+            </a:pPr>
+            <a:r>
+              <a:rPr kumimoji="0" lang="en-US" altLang="en-US" sz="2000" b="0" i="0" u="none" strike="noStrike" cap="none" normalizeH="0" baseline="0" dirty="0" err="1">
+                <a:ln>
+                  <a:noFill/>
+                </a:ln>
+                <a:effectLst/>
+              </a:rPr>
+              <a:t>Πιο</a:t>
+            </a:r>
+            <a:r>
+              <a:rPr kumimoji="0" lang="en-US" altLang="en-US" sz="2000" b="0" i="0" u="none" strike="noStrike" cap="none" normalizeH="0" baseline="0" dirty="0">
+                <a:ln>
+                  <a:noFill/>
+                </a:ln>
+                <a:effectLst/>
+              </a:rPr>
+              <a:t> </a:t>
+            </a:r>
+            <a:r>
+              <a:rPr kumimoji="0" lang="en-US" altLang="en-US" sz="2000" b="0" i="0" u="none" strike="noStrike" cap="none" normalizeH="0" baseline="0" dirty="0" err="1">
+                <a:ln>
+                  <a:noFill/>
+                </a:ln>
+                <a:effectLst/>
+              </a:rPr>
+              <a:t>σύνθετος</a:t>
+            </a:r>
+            <a:r>
+              <a:rPr kumimoji="0" lang="en-US" altLang="en-US" sz="2000" b="0" i="0" u="none" strike="noStrike" cap="none" normalizeH="0" baseline="0" dirty="0">
+                <a:ln>
+                  <a:noFill/>
+                </a:ln>
+                <a:effectLst/>
+              </a:rPr>
+              <a:t>.</a:t>
+            </a:r>
+          </a:p>
+          <a:p>
+            <a:pPr marL="0" marR="0" lvl="0" indent="-228600" algn="l" fontAlgn="base">
+              <a:spcBef>
+                <a:spcPct val="0"/>
+              </a:spcBef>
+              <a:spcAft>
+                <a:spcPts val="600"/>
+              </a:spcAft>
+              <a:buClrTx/>
+              <a:buSzTx/>
+              <a:buFont typeface="Arial" panose="020B0604020202020204" pitchFamily="34" charset="0"/>
+              <a:buChar char="•"/>
+              <a:tabLst/>
+            </a:pPr>
+            <a:r>
+              <a:rPr kumimoji="0" lang="en-US" altLang="en-US" sz="2000" b="1" i="0" u="none" strike="noStrike" cap="none" normalizeH="0" baseline="0" dirty="0" err="1">
+                <a:ln>
+                  <a:noFill/>
+                </a:ln>
+                <a:effectLst/>
+              </a:rPr>
+              <a:t>Ιδ</a:t>
+            </a:r>
+            <a:r>
+              <a:rPr kumimoji="0" lang="en-US" altLang="en-US" sz="2000" b="1" i="0" u="none" strike="noStrike" cap="none" normalizeH="0" baseline="0" dirty="0">
+                <a:ln>
+                  <a:noFill/>
+                </a:ln>
+                <a:effectLst/>
+              </a:rPr>
+              <a:t>ανικός</a:t>
+            </a:r>
+            <a:r>
+              <a:rPr kumimoji="0" lang="en-US" altLang="en-US" sz="2000" b="0" i="0" u="none" strike="noStrike" cap="none" normalizeH="0" baseline="0" dirty="0">
+                <a:ln>
+                  <a:noFill/>
+                </a:ln>
+                <a:effectLst/>
+              </a:rPr>
+              <a:t> για Quality of Service.</a:t>
+            </a:r>
+          </a:p>
+          <a:p>
+            <a:pPr marL="0" marR="0" lvl="0" indent="-228600" algn="l" fontAlgn="base">
+              <a:spcBef>
+                <a:spcPct val="0"/>
+              </a:spcBef>
+              <a:spcAft>
+                <a:spcPts val="600"/>
+              </a:spcAft>
+              <a:buClrTx/>
+              <a:buSzTx/>
+              <a:buFont typeface="Arial" panose="020B0604020202020204" pitchFamily="34" charset="0"/>
+              <a:buChar char="•"/>
+              <a:tabLst/>
+            </a:pPr>
+            <a:r>
+              <a:rPr kumimoji="0" lang="en-US" altLang="en-US" sz="2000" b="0" i="0" u="none" strike="noStrike" cap="none" normalizeH="0" baseline="0" dirty="0" err="1">
+                <a:ln>
+                  <a:noFill/>
+                </a:ln>
+                <a:effectLst/>
+              </a:rPr>
+              <a:t>Εξ</a:t>
+            </a:r>
+            <a:r>
+              <a:rPr kumimoji="0" lang="en-US" altLang="en-US" sz="2000" b="0" i="0" u="none" strike="noStrike" cap="none" normalizeH="0" baseline="0" dirty="0">
+                <a:ln>
+                  <a:noFill/>
+                </a:ln>
+                <a:effectLst/>
+              </a:rPr>
+              <a:t>ασφαλίζει ότι η διαδραστική κίνηση (μικρά πακέτα) περνάει γρήγορα, ακόμα κι αν το δίκτυο είναι φορτωμένο με μεγάλα αρχεία.</a:t>
+            </a:r>
+          </a:p>
+          <a:p>
+            <a:pPr marL="0" marR="0" lvl="0" indent="-228600" algn="l" fontAlgn="base">
+              <a:spcBef>
+                <a:spcPct val="0"/>
+              </a:spcBef>
+              <a:spcAft>
+                <a:spcPts val="600"/>
+              </a:spcAft>
+              <a:buClrTx/>
+              <a:buSzTx/>
+              <a:buFont typeface="Arial" panose="020B0604020202020204" pitchFamily="34" charset="0"/>
+              <a:buChar char="•"/>
+              <a:tabLst/>
+            </a:pPr>
+            <a:endParaRPr kumimoji="0" lang="en-US" altLang="en-US" sz="2000" b="0" i="0" u="none" strike="noStrike" cap="none" normalizeH="0" baseline="0" dirty="0">
+              <a:ln>
+                <a:noFill/>
+              </a:ln>
+              <a:effectLst/>
+            </a:endParaRPr>
+          </a:p>
+        </p:txBody>
+      </p:sp>
+    </p:spTree>
+    <p:extLst>
+      <p:ext uri="{BB962C8B-B14F-4D97-AF65-F5344CB8AC3E}">
+        <p14:creationId xmlns:p14="http://schemas.microsoft.com/office/powerpoint/2010/main" val="258071408"/>
+      </p:ext>
+    </p:extLst>
+  </p:cSld>
+  <p:clrMapOvr>
+    <a:masterClrMapping/>
+  </p:clrMapOvr>
+</p:sld>
+</file>
+
+<file path=ppt/slides/slide37.xml><?xml version="1.0" encoding="utf-8"?>
+<p:sld xmlns:a="http://schemas.openxmlformats.org/drawingml/2006/main" xmlns:r="http://schemas.openxmlformats.org/officeDocument/2006/relationships" xmlns:p="http://schemas.openxmlformats.org/presentationml/2006/main">
+  <p:cSld>
+    <p:bg>
+      <p:bgPr>
+        <a:solidFill>
+          <a:schemeClr val="bg1"/>
+        </a:solidFill>
+        <a:effectLst/>
+      </p:bgPr>
+    </p:bg>
+    <p:spTree>
+      <p:nvGrpSpPr>
+        <p:cNvPr id="1" name=""/>
+        <p:cNvGrpSpPr/>
+        <p:nvPr/>
+      </p:nvGrpSpPr>
+      <p:grpSpPr>
+        <a:xfrm>
+          <a:off x="0" y="0"/>
+          <a:ext cx="0" cy="0"/>
+          <a:chOff x="0" y="0"/>
+          <a:chExt cx="0" cy="0"/>
+        </a:xfrm>
+      </p:grpSpPr>
+      <p:sp useBgFill="1">
+        <p:nvSpPr>
+          <p:cNvPr id="9" name="Rectangle 8">
+            <a:extLst>
+              <a:ext uri="{FF2B5EF4-FFF2-40B4-BE49-F238E27FC236}">
+                <a16:creationId xmlns:a16="http://schemas.microsoft.com/office/drawing/2014/main" id="{1B15ED52-F352-441B-82BF-E0EA34836D08}"/>
+              </a:ext>
+              <a:ext uri="{C183D7F6-B498-43B3-948B-1728B52AA6E4}">
+                <adec:decorative xmlns:adec="http://schemas.microsoft.com/office/drawing/2017/decorative" val="1"/>
+              </a:ext>
+            </a:extLst>
+          </p:cNvPr>
+          <p:cNvSpPr>
+            <a:spLocks noGrp="1" noRot="1" noChangeAspect="1" noMove="1" noResize="1" noEditPoints="1" noAdjustHandles="1" noChangeArrowheads="1" noChangeShapeType="1" noTextEdit="1"/>
+          </p:cNvSpPr>
+          <p:nvPr>
+            <p:extLst>
+              <p:ext uri="{386F3935-93C4-4BCD-93E2-E3B085C9AB24}">
+                <p16:designElem xmlns:p16="http://schemas.microsoft.com/office/powerpoint/2015/main" val="1"/>
+              </p:ext>
+            </p:extLst>
+          </p:nvPr>
+        </p:nvSpPr>
+        <p:spPr>
+          <a:xfrm>
+            <a:off x="0" y="0"/>
+            <a:ext cx="12192000" cy="6858000"/>
+          </a:xfrm>
+          <a:prstGeom prst="rect">
+            <a:avLst/>
+          </a:prstGeom>
+          <a:ln w="12700" cap="flat" cmpd="sng" algn="ctr">
+            <a:noFill/>
+            <a:prstDash val="solid"/>
+            <a:miter lim="800000"/>
+          </a:ln>
+          <a:effectLst/>
+          <a:extLst>
+            <a:ext uri="{91240B29-F687-4F45-9708-019B960494DF}">
+              <a14:hiddenLine xmlns:a14="http://schemas.microsoft.com/office/drawing/2010/main" w="12700" cap="flat" cmpd="sng" algn="ctr">
+                <a:solidFill>
+                  <a:schemeClr val="accent1">
+                    <a:shade val="50000"/>
+                  </a:schemeClr>
+                </a:solidFill>
+                <a:prstDash val="solid"/>
+                <a:miter lim="800000"/>
+              </a14:hiddenLine>
+            </a:ext>
+          </a:extLst>
+        </p:spPr>
+        <p:style>
+          <a:lnRef idx="2">
+            <a:schemeClr val="accent1">
+              <a:shade val="50000"/>
+            </a:schemeClr>
+          </a:lnRef>
+          <a:fillRef idx="1">
+            <a:schemeClr val="accent1"/>
+          </a:fillRef>
+          <a:effectRef idx="0">
+            <a:schemeClr val="accent1"/>
+          </a:effectRef>
+          <a:fontRef idx="minor">
+            <a:schemeClr val="lt1"/>
+          </a:fontRef>
+        </p:style>
+        <p:txBody>
+          <a:bodyPr rtlCol="0" anchor="ctr"/>
+          <a:lstStyle/>
+          <a:p>
+            <a:pPr algn="ctr"/>
+            <a:endParaRPr lang="en-US"/>
+          </a:p>
+        </p:txBody>
+      </p:sp>
+      <p:sp>
+        <p:nvSpPr>
+          <p:cNvPr id="11" name="Rectangle 10">
+            <a:extLst>
+              <a:ext uri="{FF2B5EF4-FFF2-40B4-BE49-F238E27FC236}">
+                <a16:creationId xmlns:a16="http://schemas.microsoft.com/office/drawing/2014/main" id="{3B2E3793-BFE6-45A2-9B7B-E18844431C99}"/>
+              </a:ext>
+              <a:ext uri="{C183D7F6-B498-43B3-948B-1728B52AA6E4}">
+                <adec:decorative xmlns:adec="http://schemas.microsoft.com/office/drawing/2017/decorative" val="1"/>
+              </a:ext>
+            </a:extLst>
+          </p:cNvPr>
+          <p:cNvSpPr>
+            <a:spLocks noGrp="1" noRot="1" noChangeAspect="1" noMove="1" noResize="1" noEditPoints="1" noAdjustHandles="1" noChangeArrowheads="1" noChangeShapeType="1" noTextEdit="1"/>
+          </p:cNvSpPr>
+          <p:nvPr>
+            <p:extLst>
+              <p:ext uri="{386F3935-93C4-4BCD-93E2-E3B085C9AB24}">
+                <p16:designElem xmlns:p16="http://schemas.microsoft.com/office/powerpoint/2015/main" val="1"/>
+              </p:ext>
+            </p:extLst>
+          </p:nvPr>
+        </p:nvSpPr>
+        <p:spPr>
+          <a:xfrm flipH="1">
+            <a:off x="-1" y="-1"/>
+            <a:ext cx="12191998" cy="1590742"/>
+          </a:xfrm>
+          <a:prstGeom prst="rect">
+            <a:avLst/>
+          </a:prstGeom>
+          <a:gradFill>
+            <a:gsLst>
+              <a:gs pos="0">
+                <a:srgbClr val="000000"/>
+              </a:gs>
+              <a:gs pos="100000">
+                <a:schemeClr val="accent1">
+                  <a:lumMod val="75000"/>
+                </a:schemeClr>
+              </a:gs>
+            </a:gsLst>
+            <a:lin ang="8400000" scaled="0"/>
+          </a:gradFill>
+          <a:ln>
+            <a:noFill/>
+          </a:ln>
+        </p:spPr>
+        <p:style>
+          <a:lnRef idx="2">
+            <a:schemeClr val="accent1">
+              <a:shade val="50000"/>
+            </a:schemeClr>
+          </a:lnRef>
+          <a:fillRef idx="1">
+            <a:schemeClr val="accent1"/>
+          </a:fillRef>
+          <a:effectRef idx="0">
+            <a:schemeClr val="accent1"/>
+          </a:effectRef>
+          <a:fontRef idx="minor">
+            <a:schemeClr val="lt1"/>
+          </a:fontRef>
+        </p:style>
+        <p:txBody>
+          <a:bodyPr rtlCol="0" anchor="ctr"/>
+          <a:lstStyle/>
+          <a:p>
+            <a:pPr algn="ctr"/>
+            <a:endParaRPr lang="en-US"/>
+          </a:p>
+        </p:txBody>
+      </p:sp>
+      <p:sp>
+        <p:nvSpPr>
+          <p:cNvPr id="13" name="Rectangle 12">
+            <a:extLst>
+              <a:ext uri="{FF2B5EF4-FFF2-40B4-BE49-F238E27FC236}">
+                <a16:creationId xmlns:a16="http://schemas.microsoft.com/office/drawing/2014/main" id="{BC4C4868-CB8F-4AF9-9CDB-8108F2C19B67}"/>
+              </a:ext>
+              <a:ext uri="{C183D7F6-B498-43B3-948B-1728B52AA6E4}">
+                <adec:decorative xmlns:adec="http://schemas.microsoft.com/office/drawing/2017/decorative" val="1"/>
+              </a:ext>
+            </a:extLst>
+          </p:cNvPr>
+          <p:cNvSpPr>
+            <a:spLocks noGrp="1" noRot="1" noChangeAspect="1" noMove="1" noResize="1" noEditPoints="1" noAdjustHandles="1" noChangeArrowheads="1" noChangeShapeType="1" noTextEdit="1"/>
+          </p:cNvSpPr>
+          <p:nvPr>
+            <p:extLst>
+              <p:ext uri="{386F3935-93C4-4BCD-93E2-E3B085C9AB24}">
+                <p16:designElem xmlns:p16="http://schemas.microsoft.com/office/powerpoint/2015/main" val="1"/>
+              </p:ext>
+            </p:extLst>
+          </p:nvPr>
+        </p:nvSpPr>
+        <p:spPr>
+          <a:xfrm rot="10800000" flipH="1">
+            <a:off x="-3" y="0"/>
+            <a:ext cx="8115306" cy="1590742"/>
+          </a:xfrm>
+          <a:prstGeom prst="rect">
+            <a:avLst/>
+          </a:prstGeom>
+          <a:gradFill>
+            <a:gsLst>
+              <a:gs pos="20000">
+                <a:schemeClr val="accent1">
+                  <a:alpha val="0"/>
+                </a:schemeClr>
+              </a:gs>
+              <a:gs pos="100000">
+                <a:schemeClr val="accent1">
+                  <a:lumMod val="50000"/>
+                  <a:alpha val="55000"/>
+                </a:schemeClr>
+              </a:gs>
+            </a:gsLst>
+            <a:lin ang="13800000" scaled="0"/>
+          </a:gradFill>
+          <a:ln>
+            <a:noFill/>
+          </a:ln>
+        </p:spPr>
+        <p:style>
+          <a:lnRef idx="2">
+            <a:schemeClr val="accent1">
+              <a:shade val="50000"/>
+            </a:schemeClr>
+          </a:lnRef>
+          <a:fillRef idx="1">
+            <a:schemeClr val="accent1"/>
+          </a:fillRef>
+          <a:effectRef idx="0">
+            <a:schemeClr val="accent1"/>
+          </a:effectRef>
+          <a:fontRef idx="minor">
+            <a:schemeClr val="lt1"/>
+          </a:fontRef>
+        </p:style>
+        <p:txBody>
+          <a:bodyPr rtlCol="0" anchor="ctr"/>
+          <a:lstStyle/>
+          <a:p>
+            <a:pPr algn="ctr"/>
+            <a:endParaRPr lang="en-US"/>
+          </a:p>
+        </p:txBody>
+      </p:sp>
+      <p:sp>
+        <p:nvSpPr>
+          <p:cNvPr id="15" name="Rectangle 14">
+            <a:extLst>
+              <a:ext uri="{FF2B5EF4-FFF2-40B4-BE49-F238E27FC236}">
+                <a16:creationId xmlns:a16="http://schemas.microsoft.com/office/drawing/2014/main" id="{375E0459-6403-40CD-989D-56A4407CA12E}"/>
+              </a:ext>
+              <a:ext uri="{C183D7F6-B498-43B3-948B-1728B52AA6E4}">
+                <adec:decorative xmlns:adec="http://schemas.microsoft.com/office/drawing/2017/decorative" val="1"/>
+              </a:ext>
+            </a:extLst>
+          </p:cNvPr>
+          <p:cNvSpPr>
+            <a:spLocks noGrp="1" noRot="1" noChangeAspect="1" noMove="1" noResize="1" noEditPoints="1" noAdjustHandles="1" noChangeArrowheads="1" noChangeShapeType="1" noTextEdit="1"/>
+          </p:cNvSpPr>
+          <p:nvPr>
+            <p:extLst>
+              <p:ext uri="{386F3935-93C4-4BCD-93E2-E3B085C9AB24}">
+                <p16:designElem xmlns:p16="http://schemas.microsoft.com/office/powerpoint/2015/main" val="1"/>
+              </p:ext>
+            </p:extLst>
+          </p:nvPr>
+        </p:nvSpPr>
+        <p:spPr>
+          <a:xfrm flipH="1">
+            <a:off x="8115299" y="-1"/>
+            <a:ext cx="4076698" cy="1590742"/>
+          </a:xfrm>
+          <a:prstGeom prst="rect">
+            <a:avLst/>
+          </a:prstGeom>
+          <a:gradFill>
+            <a:gsLst>
+              <a:gs pos="0">
+                <a:schemeClr val="accent1">
+                  <a:alpha val="66000"/>
+                </a:schemeClr>
+              </a:gs>
+              <a:gs pos="100000">
+                <a:srgbClr val="000000">
+                  <a:alpha val="30000"/>
+                </a:srgbClr>
+              </a:gs>
+            </a:gsLst>
+            <a:lin ang="13200000" scaled="0"/>
+          </a:gradFill>
+          <a:ln>
+            <a:noFill/>
+          </a:ln>
+        </p:spPr>
+        <p:style>
+          <a:lnRef idx="2">
+            <a:schemeClr val="accent1">
+              <a:shade val="50000"/>
+            </a:schemeClr>
+          </a:lnRef>
+          <a:fillRef idx="1">
+            <a:schemeClr val="accent1"/>
+          </a:fillRef>
+          <a:effectRef idx="0">
+            <a:schemeClr val="accent1"/>
+          </a:effectRef>
+          <a:fontRef idx="minor">
+            <a:schemeClr val="lt1"/>
+          </a:fontRef>
+        </p:style>
+        <p:txBody>
+          <a:bodyPr rtlCol="0" anchor="ctr"/>
+          <a:lstStyle/>
+          <a:p>
+            <a:pPr algn="ctr"/>
+            <a:endParaRPr lang="en-US"/>
+          </a:p>
+        </p:txBody>
+      </p:sp>
+      <p:sp>
+        <p:nvSpPr>
+          <p:cNvPr id="17" name="Rectangle 16">
+            <a:extLst>
+              <a:ext uri="{FF2B5EF4-FFF2-40B4-BE49-F238E27FC236}">
+                <a16:creationId xmlns:a16="http://schemas.microsoft.com/office/drawing/2014/main" id="{53E5B1A8-3AC9-4BD1-9BBC-78CA94F2D1BA}"/>
+              </a:ext>
+              <a:ext uri="{C183D7F6-B498-43B3-948B-1728B52AA6E4}">
+                <adec:decorative xmlns:adec="http://schemas.microsoft.com/office/drawing/2017/decorative" val="1"/>
+              </a:ext>
+            </a:extLst>
+          </p:cNvPr>
+          <p:cNvSpPr>
+            <a:spLocks noGrp="1" noRot="1" noChangeAspect="1" noMove="1" noResize="1" noEditPoints="1" noAdjustHandles="1" noChangeArrowheads="1" noChangeShapeType="1" noTextEdit="1"/>
+          </p:cNvSpPr>
+          <p:nvPr>
+            <p:extLst>
+              <p:ext uri="{386F3935-93C4-4BCD-93E2-E3B085C9AB24}">
+                <p16:designElem xmlns:p16="http://schemas.microsoft.com/office/powerpoint/2015/main" val="1"/>
+              </p:ext>
+            </p:extLst>
+          </p:nvPr>
+        </p:nvSpPr>
+        <p:spPr>
+          <a:xfrm>
+            <a:off x="459350" y="-1"/>
+            <a:ext cx="11732646" cy="1597433"/>
+          </a:xfrm>
+          <a:prstGeom prst="rect">
+            <a:avLst/>
+          </a:prstGeom>
+          <a:gradFill>
+            <a:gsLst>
+              <a:gs pos="50000">
+                <a:srgbClr val="000000">
+                  <a:alpha val="0"/>
+                </a:srgbClr>
+              </a:gs>
+              <a:gs pos="99000">
+                <a:schemeClr val="accent1">
+                  <a:lumMod val="50000"/>
+                  <a:alpha val="52000"/>
+                </a:schemeClr>
+              </a:gs>
+            </a:gsLst>
+            <a:lin ang="16800000" scaled="0"/>
+          </a:gradFill>
+          <a:ln>
+            <a:noFill/>
+          </a:ln>
+        </p:spPr>
+        <p:style>
+          <a:lnRef idx="2">
+            <a:schemeClr val="accent1">
+              <a:shade val="50000"/>
+            </a:schemeClr>
+          </a:lnRef>
+          <a:fillRef idx="1">
+            <a:schemeClr val="accent1"/>
+          </a:fillRef>
+          <a:effectRef idx="0">
+            <a:schemeClr val="accent1"/>
+          </a:effectRef>
+          <a:fontRef idx="minor">
+            <a:schemeClr val="lt1"/>
+          </a:fontRef>
+        </p:style>
+        <p:txBody>
+          <a:bodyPr rtlCol="0" anchor="ctr"/>
+          <a:lstStyle/>
+          <a:p>
+            <a:pPr algn="ctr"/>
+            <a:endParaRPr lang="en-US"/>
+          </a:p>
+        </p:txBody>
+      </p:sp>
+      <p:sp>
+        <p:nvSpPr>
+          <p:cNvPr id="2" name="Title 1">
+            <a:extLst>
+              <a:ext uri="{FF2B5EF4-FFF2-40B4-BE49-F238E27FC236}">
+                <a16:creationId xmlns:a16="http://schemas.microsoft.com/office/drawing/2014/main" id="{54BDCA70-AC36-A2DB-369D-252EBADAA5DD}"/>
+              </a:ext>
+            </a:extLst>
+          </p:cNvPr>
+          <p:cNvSpPr>
+            <a:spLocks noGrp="1"/>
+          </p:cNvSpPr>
+          <p:nvPr>
+            <p:ph type="ctrTitle"/>
+          </p:nvPr>
+        </p:nvSpPr>
+        <p:spPr>
+          <a:xfrm>
+            <a:off x="1371599" y="294538"/>
+            <a:ext cx="9895951" cy="1033669"/>
+          </a:xfrm>
+        </p:spPr>
+        <p:txBody>
+          <a:bodyPr vert="horz" lIns="91440" tIns="45720" rIns="91440" bIns="45720" rtlCol="0" anchor="ctr">
+            <a:normAutofit/>
+          </a:bodyPr>
+          <a:lstStyle/>
+          <a:p>
+            <a:pPr algn="l"/>
+            <a:r>
+              <a:rPr lang="en-US" sz="4000" kern="1200">
+                <a:solidFill>
+                  <a:srgbClr val="FFFFFF"/>
+                </a:solidFill>
+                <a:latin typeface="+mj-lt"/>
+                <a:ea typeface="+mj-ea"/>
+                <a:cs typeface="+mj-cs"/>
+              </a:rPr>
+              <a:t>Συνολικά Συμπεράσματα &amp; Επισημάνσεις</a:t>
+            </a:r>
+          </a:p>
+        </p:txBody>
+      </p:sp>
+      <p:sp>
+        <p:nvSpPr>
+          <p:cNvPr id="4" name="Rectangle 1">
+            <a:extLst>
+              <a:ext uri="{FF2B5EF4-FFF2-40B4-BE49-F238E27FC236}">
+                <a16:creationId xmlns:a16="http://schemas.microsoft.com/office/drawing/2014/main" id="{9F5FA380-A221-0E4F-892F-C37216E76781}"/>
+              </a:ext>
+            </a:extLst>
+          </p:cNvPr>
+          <p:cNvSpPr>
+            <a:spLocks noGrp="1" noChangeArrowheads="1"/>
+          </p:cNvSpPr>
+          <p:nvPr>
+            <p:ph type="subTitle" idx="1"/>
+          </p:nvPr>
+        </p:nvSpPr>
+        <p:spPr bwMode="auto">
+          <a:xfrm>
+            <a:off x="1371599" y="2622997"/>
+            <a:ext cx="9724031" cy="3683358"/>
+          </a:xfrm>
+          <a:prstGeom prst="rect">
+            <a:avLst/>
+          </a:prstGeom>
+          <a:extLst>
+            <a:ext uri="{909E8E84-426E-40DD-AFC4-6F175D3DCCD1}">
+              <a14:hiddenFill xmlns:a14="http://schemas.microsoft.com/office/drawing/2010/main">
+                <a:solidFill>
+                  <a:schemeClr val="accent1"/>
+                </a:solidFill>
+              </a14:hiddenFill>
+            </a:ext>
+            <a:ext uri="{91240B29-F687-4F45-9708-019B960494DF}">
+              <a14:hiddenLine xmlns:a14="http://schemas.microsoft.com/office/drawing/2010/main" w="9525">
+                <a:solidFill>
+                  <a:schemeClr val="tx1"/>
+                </a:solidFill>
+                <a:miter lim="800000"/>
+                <a:headEnd/>
+                <a:tailEnd/>
+              </a14:hiddenLine>
+            </a:ext>
+            <a:ext uri="{AF507438-7753-43E0-B8FC-AC1667EBCBE1}">
+              <a14:hiddenEffects xmlns:a14="http://schemas.microsoft.com/office/drawing/2010/main">
+                <a:effectLst>
+                  <a:outerShdw dist="35921" dir="2700000" algn="ctr" rotWithShape="0">
+                    <a:schemeClr val="bg2"/>
+                  </a:outerShdw>
+                </a:effectLst>
+              </a14:hiddenEffects>
+            </a:ext>
+          </a:extLst>
+        </p:spPr>
+        <p:txBody>
+          <a:bodyPr vert="horz" lIns="91440" tIns="45720" rIns="91440" bIns="45720" numCol="1" rtlCol="0" anchor="ctr" anchorCtr="0" compatLnSpc="1">
+            <a:prstTxWarp prst="textNoShape">
+              <a:avLst/>
+            </a:prstTxWarp>
+            <a:noAutofit/>
+          </a:bodyPr>
+          <a:lstStyle/>
+          <a:p>
+            <a:pPr marL="0" marR="0" lvl="0" indent="-228600" algn="l" fontAlgn="base">
+              <a:spcBef>
+                <a:spcPct val="0"/>
+              </a:spcBef>
+              <a:spcAft>
+                <a:spcPts val="600"/>
+              </a:spcAft>
+              <a:buClrTx/>
+              <a:buSzTx/>
+              <a:buFont typeface="Arial" panose="020B0604020202020204" pitchFamily="34" charset="0"/>
+              <a:buChar char="•"/>
+              <a:tabLst/>
+            </a:pPr>
+            <a:r>
+              <a:rPr kumimoji="0" lang="en-US" altLang="en-US" sz="1800" b="1" i="0" u="none" strike="noStrike" cap="none" normalizeH="0" baseline="0" dirty="0">
+                <a:ln>
+                  <a:noFill/>
+                </a:ln>
+                <a:effectLst/>
+              </a:rPr>
+              <a:t>Η "</a:t>
+            </a:r>
+            <a:r>
+              <a:rPr kumimoji="0" lang="en-US" altLang="en-US" sz="1800" b="1" i="0" u="none" strike="noStrike" cap="none" normalizeH="0" baseline="0" dirty="0" err="1">
+                <a:ln>
+                  <a:noFill/>
+                </a:ln>
+                <a:effectLst/>
+              </a:rPr>
+              <a:t>Εξίσωση</a:t>
+            </a:r>
+            <a:r>
+              <a:rPr kumimoji="0" lang="en-US" altLang="en-US" sz="1800" b="1" i="0" u="none" strike="noStrike" cap="none" normalizeH="0" baseline="0" dirty="0">
+                <a:ln>
+                  <a:noFill/>
+                </a:ln>
+                <a:effectLst/>
+              </a:rPr>
+              <a:t>" </a:t>
+            </a:r>
+            <a:r>
+              <a:rPr kumimoji="0" lang="en-US" altLang="en-US" sz="1800" b="1" i="0" u="none" strike="noStrike" cap="none" normalizeH="0" baseline="0" dirty="0" err="1">
+                <a:ln>
+                  <a:noFill/>
+                </a:ln>
+                <a:effectLst/>
+              </a:rPr>
+              <a:t>της</a:t>
+            </a:r>
+            <a:r>
+              <a:rPr kumimoji="0" lang="en-US" altLang="en-US" sz="1800" b="1" i="0" u="none" strike="noStrike" cap="none" normalizeH="0" baseline="0" dirty="0">
+                <a:ln>
+                  <a:noFill/>
+                </a:ln>
+                <a:effectLst/>
+              </a:rPr>
+              <a:t> </a:t>
+            </a:r>
+            <a:r>
+              <a:rPr kumimoji="0" lang="en-US" altLang="en-US" sz="1800" b="1" i="0" u="none" strike="noStrike" cap="none" normalizeH="0" baseline="0" dirty="0" err="1">
+                <a:ln>
+                  <a:noFill/>
+                </a:ln>
+                <a:effectLst/>
+              </a:rPr>
+              <a:t>Συμφόρησης</a:t>
+            </a:r>
+            <a:r>
+              <a:rPr kumimoji="0" lang="en-US" altLang="en-US" sz="1800" b="1" i="0" u="none" strike="noStrike" cap="none" normalizeH="0" baseline="0" dirty="0">
+                <a:ln>
+                  <a:noFill/>
+                </a:ln>
+                <a:effectLst/>
+              </a:rPr>
+              <a:t>:</a:t>
+            </a:r>
+            <a:endParaRPr kumimoji="0" lang="en-US" altLang="en-US" sz="1800" b="0" i="0" u="none" strike="noStrike" cap="none" normalizeH="0" baseline="0" dirty="0">
+              <a:ln>
+                <a:noFill/>
+              </a:ln>
+              <a:effectLst/>
+            </a:endParaRPr>
+          </a:p>
+          <a:p>
+            <a:pPr marL="0" marR="0" lvl="0" indent="-228600" algn="l" fontAlgn="base">
+              <a:spcBef>
+                <a:spcPct val="0"/>
+              </a:spcBef>
+              <a:spcAft>
+                <a:spcPts val="600"/>
+              </a:spcAft>
+              <a:buClrTx/>
+              <a:buSzTx/>
+              <a:buFont typeface="Arial" panose="020B0604020202020204" pitchFamily="34" charset="0"/>
+              <a:buChar char="•"/>
+              <a:tabLst/>
+            </a:pPr>
+            <a:r>
+              <a:rPr kumimoji="0" lang="en-US" altLang="en-US" sz="1800" b="0" i="0" u="none" strike="noStrike" cap="none" normalizeH="0" baseline="0" dirty="0">
+                <a:ln>
+                  <a:noFill/>
+                </a:ln>
+                <a:effectLst/>
+              </a:rPr>
+              <a:t>Η απ</a:t>
+            </a:r>
+            <a:r>
+              <a:rPr kumimoji="0" lang="en-US" altLang="en-US" sz="1800" b="0" i="0" u="none" strike="noStrike" cap="none" normalizeH="0" baseline="0" dirty="0" err="1">
+                <a:ln>
+                  <a:noFill/>
+                </a:ln>
+                <a:effectLst/>
+              </a:rPr>
+              <a:t>όδοση</a:t>
+            </a:r>
+            <a:r>
+              <a:rPr kumimoji="0" lang="en-US" altLang="en-US" sz="1800" b="0" i="0" u="none" strike="noStrike" cap="none" normalizeH="0" baseline="0" dirty="0">
+                <a:ln>
+                  <a:noFill/>
+                </a:ln>
+                <a:effectLst/>
+              </a:rPr>
+              <a:t> </a:t>
+            </a:r>
+            <a:r>
+              <a:rPr kumimoji="0" lang="en-US" altLang="en-US" sz="1800" b="0" i="0" u="none" strike="noStrike" cap="none" normalizeH="0" baseline="0" dirty="0" err="1">
+                <a:ln>
+                  <a:noFill/>
+                </a:ln>
+                <a:effectLst/>
+              </a:rPr>
+              <a:t>του</a:t>
+            </a:r>
+            <a:r>
+              <a:rPr kumimoji="0" lang="en-US" altLang="en-US" sz="1800" b="0" i="0" u="none" strike="noStrike" cap="none" normalizeH="0" baseline="0" dirty="0">
+                <a:ln>
+                  <a:noFill/>
+                </a:ln>
+                <a:effectLst/>
+              </a:rPr>
+              <a:t> </a:t>
+            </a:r>
+            <a:r>
+              <a:rPr kumimoji="0" lang="en-US" altLang="en-US" sz="1800" b="0" i="0" u="none" strike="noStrike" cap="none" normalizeH="0" baseline="0" dirty="0" err="1">
+                <a:ln>
+                  <a:noFill/>
+                </a:ln>
+                <a:effectLst/>
+              </a:rPr>
+              <a:t>δικτύου</a:t>
+            </a:r>
+            <a:r>
+              <a:rPr kumimoji="0" lang="en-US" altLang="en-US" sz="1800" b="0" i="0" u="none" strike="noStrike" cap="none" normalizeH="0" baseline="0" dirty="0">
+                <a:ln>
+                  <a:noFill/>
+                </a:ln>
+                <a:effectLst/>
+              </a:rPr>
+              <a:t> κατα</a:t>
+            </a:r>
+            <a:r>
+              <a:rPr kumimoji="0" lang="en-US" altLang="en-US" sz="1800" b="0" i="0" u="none" strike="noStrike" cap="none" normalizeH="0" baseline="0" dirty="0" err="1">
+                <a:ln>
+                  <a:noFill/>
+                </a:ln>
+                <a:effectLst/>
+              </a:rPr>
+              <a:t>ρρέει</a:t>
+            </a:r>
+            <a:r>
+              <a:rPr kumimoji="0" lang="en-US" altLang="en-US" sz="1800" b="0" i="0" u="none" strike="noStrike" cap="none" normalizeH="0" baseline="0" dirty="0">
+                <a:ln>
+                  <a:noFill/>
+                </a:ln>
+                <a:effectLst/>
+              </a:rPr>
+              <a:t> </a:t>
+            </a:r>
+            <a:r>
+              <a:rPr kumimoji="0" lang="en-US" altLang="en-US" sz="1800" b="0" i="0" u="none" strike="noStrike" cap="none" normalizeH="0" baseline="0" dirty="0" err="1">
+                <a:ln>
+                  <a:noFill/>
+                </a:ln>
+                <a:effectLst/>
+              </a:rPr>
+              <a:t>ότ</a:t>
+            </a:r>
+            <a:r>
+              <a:rPr kumimoji="0" lang="en-US" altLang="en-US" sz="1800" b="0" i="0" u="none" strike="noStrike" cap="none" normalizeH="0" baseline="0" dirty="0">
+                <a:ln>
+                  <a:noFill/>
+                </a:ln>
+                <a:effectLst/>
+              </a:rPr>
+              <a:t>αν ο </a:t>
+            </a:r>
+            <a:r>
+              <a:rPr kumimoji="0" lang="en-US" altLang="en-US" sz="1800" b="1" i="0" u="none" strike="noStrike" cap="none" normalizeH="0" baseline="0" dirty="0">
+                <a:ln>
+                  <a:noFill/>
+                </a:ln>
+                <a:effectLst/>
+              </a:rPr>
+              <a:t>Ρυθμός Εισόδου (Load)</a:t>
+            </a:r>
+            <a:r>
+              <a:rPr kumimoji="0" lang="en-US" altLang="en-US" sz="1800" b="0" i="0" u="none" strike="noStrike" cap="none" normalizeH="0" baseline="0" dirty="0">
+                <a:ln>
+                  <a:noFill/>
+                </a:ln>
+                <a:effectLst/>
+              </a:rPr>
+              <a:t> ξεπερνά τον </a:t>
+            </a:r>
+            <a:r>
+              <a:rPr kumimoji="0" lang="en-US" altLang="en-US" sz="1800" b="1" i="0" u="none" strike="noStrike" cap="none" normalizeH="0" baseline="0" dirty="0">
+                <a:ln>
+                  <a:noFill/>
+                </a:ln>
+                <a:effectLst/>
+              </a:rPr>
+              <a:t>Ρυθμό Εξυπηρέτησης (Bandwidth)</a:t>
+            </a:r>
+            <a:r>
+              <a:rPr kumimoji="0" lang="en-US" altLang="en-US" sz="1800" b="0" i="0" u="none" strike="noStrike" cap="none" normalizeH="0" baseline="0" dirty="0">
+                <a:ln>
+                  <a:noFill/>
+                </a:ln>
+                <a:effectLst/>
+              </a:rPr>
+              <a:t>.</a:t>
+            </a:r>
+          </a:p>
+          <a:p>
+            <a:pPr marL="0" marR="0" lvl="0" indent="-228600" algn="l" fontAlgn="base">
+              <a:spcBef>
+                <a:spcPct val="0"/>
+              </a:spcBef>
+              <a:spcAft>
+                <a:spcPts val="600"/>
+              </a:spcAft>
+              <a:buClrTx/>
+              <a:buSzTx/>
+              <a:buFont typeface="Arial" panose="020B0604020202020204" pitchFamily="34" charset="0"/>
+              <a:buChar char="•"/>
+              <a:tabLst/>
+            </a:pPr>
+            <a:r>
+              <a:rPr kumimoji="0" lang="en-US" altLang="en-US" sz="1800" b="0" i="0" u="none" strike="noStrike" cap="none" normalizeH="0" baseline="0" dirty="0" err="1">
+                <a:ln>
+                  <a:noFill/>
+                </a:ln>
+                <a:effectLst/>
+              </a:rPr>
+              <a:t>Αυτό</a:t>
+            </a:r>
+            <a:r>
+              <a:rPr kumimoji="0" lang="en-US" altLang="en-US" sz="1800" b="0" i="0" u="none" strike="noStrike" cap="none" normalizeH="0" baseline="0" dirty="0">
+                <a:ln>
+                  <a:noFill/>
+                </a:ln>
+                <a:effectLst/>
+              </a:rPr>
+              <a:t> </a:t>
+            </a:r>
+            <a:r>
+              <a:rPr kumimoji="0" lang="en-US" altLang="en-US" sz="1800" b="0" i="0" u="none" strike="noStrike" cap="none" normalizeH="0" baseline="0" dirty="0" err="1">
+                <a:ln>
+                  <a:noFill/>
+                </a:ln>
+                <a:effectLst/>
+              </a:rPr>
+              <a:t>οδηγεί</a:t>
+            </a:r>
+            <a:r>
+              <a:rPr kumimoji="0" lang="en-US" altLang="en-US" sz="1800" b="0" i="0" u="none" strike="noStrike" cap="none" normalizeH="0" baseline="0" dirty="0">
+                <a:ln>
+                  <a:noFill/>
+                </a:ln>
+                <a:effectLst/>
+              </a:rPr>
+              <a:t> </a:t>
+            </a:r>
+            <a:r>
+              <a:rPr kumimoji="0" lang="en-US" altLang="en-US" sz="1800" b="0" i="0" u="none" strike="noStrike" cap="none" normalizeH="0" baseline="0" dirty="0" err="1">
+                <a:ln>
+                  <a:noFill/>
+                </a:ln>
+                <a:effectLst/>
+              </a:rPr>
+              <a:t>σε</a:t>
+            </a:r>
+            <a:r>
+              <a:rPr kumimoji="0" lang="en-US" altLang="en-US" sz="1800" b="0" i="0" u="none" strike="noStrike" cap="none" normalizeH="0" baseline="0" dirty="0">
+                <a:ln>
+                  <a:noFill/>
+                </a:ln>
+                <a:effectLst/>
+              </a:rPr>
+              <a:t> </a:t>
+            </a:r>
+            <a:r>
+              <a:rPr kumimoji="0" lang="en-US" altLang="en-US" sz="1800" b="0" i="0" u="none" strike="noStrike" cap="none" normalizeH="0" baseline="0" dirty="0" err="1">
+                <a:ln>
+                  <a:noFill/>
+                </a:ln>
+                <a:effectLst/>
+              </a:rPr>
+              <a:t>εκθετική</a:t>
+            </a:r>
+            <a:r>
+              <a:rPr kumimoji="0" lang="en-US" altLang="en-US" sz="1800" b="0" i="0" u="none" strike="noStrike" cap="none" normalizeH="0" baseline="0" dirty="0">
+                <a:ln>
+                  <a:noFill/>
+                </a:ln>
+                <a:effectLst/>
+              </a:rPr>
+              <a:t> α</a:t>
+            </a:r>
+            <a:r>
+              <a:rPr kumimoji="0" lang="en-US" altLang="en-US" sz="1800" b="0" i="0" u="none" strike="noStrike" cap="none" normalizeH="0" baseline="0" dirty="0" err="1">
+                <a:ln>
+                  <a:noFill/>
+                </a:ln>
+                <a:effectLst/>
+              </a:rPr>
+              <a:t>ύξηση</a:t>
+            </a:r>
+            <a:r>
+              <a:rPr kumimoji="0" lang="en-US" altLang="en-US" sz="1800" b="0" i="0" u="none" strike="noStrike" cap="none" normalizeH="0" baseline="0" dirty="0">
+                <a:ln>
+                  <a:noFill/>
+                </a:ln>
+                <a:effectLst/>
+              </a:rPr>
+              <a:t> κα</a:t>
+            </a:r>
+            <a:r>
+              <a:rPr kumimoji="0" lang="en-US" altLang="en-US" sz="1800" b="0" i="0" u="none" strike="noStrike" cap="none" normalizeH="0" baseline="0" dirty="0" err="1">
+                <a:ln>
+                  <a:noFill/>
+                </a:ln>
+                <a:effectLst/>
+              </a:rPr>
+              <a:t>θυστέρησης</a:t>
+            </a:r>
+            <a:r>
+              <a:rPr kumimoji="0" lang="en-US" altLang="en-US" sz="1800" b="0" i="0" u="none" strike="noStrike" cap="none" normalizeH="0" baseline="0" dirty="0">
+                <a:ln>
+                  <a:noFill/>
+                </a:ln>
+                <a:effectLst/>
+              </a:rPr>
+              <a:t> και μα</a:t>
+            </a:r>
+            <a:r>
+              <a:rPr kumimoji="0" lang="en-US" altLang="en-US" sz="1800" b="0" i="0" u="none" strike="noStrike" cap="none" normalizeH="0" baseline="0" dirty="0" err="1">
+                <a:ln>
+                  <a:noFill/>
+                </a:ln>
+                <a:effectLst/>
+              </a:rPr>
+              <a:t>ζική</a:t>
+            </a:r>
+            <a:r>
+              <a:rPr kumimoji="0" lang="en-US" altLang="en-US" sz="1800" b="0" i="0" u="none" strike="noStrike" cap="none" normalizeH="0" baseline="0" dirty="0">
+                <a:ln>
+                  <a:noFill/>
+                </a:ln>
+                <a:effectLst/>
+              </a:rPr>
+              <a:t> απ</a:t>
+            </a:r>
+            <a:r>
+              <a:rPr kumimoji="0" lang="en-US" altLang="en-US" sz="1800" b="0" i="0" u="none" strike="noStrike" cap="none" normalizeH="0" baseline="0" dirty="0" err="1">
+                <a:ln>
+                  <a:noFill/>
+                </a:ln>
+                <a:effectLst/>
+              </a:rPr>
+              <a:t>ώλει</a:t>
+            </a:r>
+            <a:r>
+              <a:rPr kumimoji="0" lang="en-US" altLang="en-US" sz="1800" b="0" i="0" u="none" strike="noStrike" cap="none" normalizeH="0" baseline="0" dirty="0">
+                <a:ln>
+                  <a:noFill/>
+                </a:ln>
+                <a:effectLst/>
+              </a:rPr>
+              <a:t>α πακέτων.</a:t>
+            </a:r>
+          </a:p>
+          <a:p>
+            <a:pPr marL="0" marR="0" lvl="0" indent="-228600" algn="l" fontAlgn="base">
+              <a:spcBef>
+                <a:spcPct val="0"/>
+              </a:spcBef>
+              <a:spcAft>
+                <a:spcPts val="600"/>
+              </a:spcAft>
+              <a:buClrTx/>
+              <a:buSzTx/>
+              <a:buFont typeface="Arial" panose="020B0604020202020204" pitchFamily="34" charset="0"/>
+              <a:buChar char="•"/>
+              <a:tabLst/>
+            </a:pPr>
+            <a:r>
+              <a:rPr kumimoji="0" lang="en-US" altLang="en-US" sz="1800" b="1" i="0" u="none" strike="noStrike" cap="none" normalizeH="0" baseline="0" dirty="0" err="1">
+                <a:ln>
+                  <a:noFill/>
+                </a:ln>
+                <a:effectLst/>
+              </a:rPr>
+              <a:t>Οι</a:t>
+            </a:r>
+            <a:r>
+              <a:rPr kumimoji="0" lang="en-US" altLang="en-US" sz="1800" b="1" i="0" u="none" strike="noStrike" cap="none" normalizeH="0" baseline="0" dirty="0">
+                <a:ln>
+                  <a:noFill/>
+                </a:ln>
+                <a:effectLst/>
+              </a:rPr>
+              <a:t> </a:t>
+            </a:r>
+            <a:r>
+              <a:rPr kumimoji="0" lang="en-US" altLang="en-US" sz="1800" b="1" i="0" u="none" strike="noStrike" cap="none" normalizeH="0" baseline="0" dirty="0" err="1">
+                <a:ln>
+                  <a:noFill/>
+                </a:ln>
+                <a:effectLst/>
+              </a:rPr>
+              <a:t>Δύο</a:t>
+            </a:r>
+            <a:r>
+              <a:rPr kumimoji="0" lang="en-US" altLang="en-US" sz="1800" b="1" i="0" u="none" strike="noStrike" cap="none" normalizeH="0" baseline="0" dirty="0">
+                <a:ln>
+                  <a:noFill/>
+                </a:ln>
+                <a:effectLst/>
+              </a:rPr>
+              <a:t> </a:t>
+            </a:r>
+            <a:r>
+              <a:rPr kumimoji="0" lang="en-US" altLang="en-US" sz="1800" b="1" i="0" u="none" strike="noStrike" cap="none" normalizeH="0" baseline="0" dirty="0" err="1">
+                <a:ln>
+                  <a:noFill/>
+                </a:ln>
+                <a:effectLst/>
+              </a:rPr>
+              <a:t>Κρίσιμοι</a:t>
+            </a:r>
+            <a:r>
+              <a:rPr kumimoji="0" lang="en-US" altLang="en-US" sz="1800" b="1" i="0" u="none" strike="noStrike" cap="none" normalizeH="0" baseline="0" dirty="0">
+                <a:ln>
+                  <a:noFill/>
+                </a:ln>
+                <a:effectLst/>
+              </a:rPr>
+              <a:t> Πα</a:t>
+            </a:r>
+            <a:r>
+              <a:rPr kumimoji="0" lang="en-US" altLang="en-US" sz="1800" b="1" i="0" u="none" strike="noStrike" cap="none" normalizeH="0" baseline="0" dirty="0" err="1">
+                <a:ln>
+                  <a:noFill/>
+                </a:ln>
+                <a:effectLst/>
+              </a:rPr>
+              <a:t>ράγοντες</a:t>
+            </a:r>
+            <a:r>
+              <a:rPr kumimoji="0" lang="en-US" altLang="en-US" sz="1800" b="1" i="0" u="none" strike="noStrike" cap="none" normalizeH="0" baseline="0" dirty="0">
+                <a:ln>
+                  <a:noFill/>
+                </a:ln>
+                <a:effectLst/>
+              </a:rPr>
+              <a:t>:</a:t>
+            </a:r>
+            <a:endParaRPr kumimoji="0" lang="en-US" altLang="en-US" sz="1800" b="0" i="0" u="none" strike="noStrike" cap="none" normalizeH="0" baseline="0" dirty="0">
+              <a:ln>
+                <a:noFill/>
+              </a:ln>
+              <a:effectLst/>
+            </a:endParaRPr>
+          </a:p>
+          <a:p>
+            <a:pPr marL="0" marR="0" lvl="0" indent="-228600" algn="l" fontAlgn="base">
+              <a:spcBef>
+                <a:spcPct val="0"/>
+              </a:spcBef>
+              <a:spcAft>
+                <a:spcPts val="600"/>
+              </a:spcAft>
+              <a:buClrTx/>
+              <a:buSzTx/>
+              <a:buFont typeface="Arial" panose="020B0604020202020204" pitchFamily="34" charset="0"/>
+              <a:buChar char="•"/>
+              <a:tabLst/>
+            </a:pPr>
+            <a:r>
+              <a:rPr kumimoji="0" lang="en-US" altLang="en-US" sz="1800" b="1" i="0" u="none" strike="noStrike" cap="none" normalizeH="0" baseline="0" dirty="0">
+                <a:ln>
+                  <a:noFill/>
+                </a:ln>
+                <a:effectLst/>
+              </a:rPr>
+              <a:t>Bandwidth:</a:t>
+            </a:r>
+            <a:r>
+              <a:rPr kumimoji="0" lang="en-US" altLang="en-US" sz="1800" b="0" i="0" u="none" strike="noStrike" cap="none" normalizeH="0" baseline="0" dirty="0">
+                <a:ln>
+                  <a:noFill/>
+                </a:ln>
+                <a:effectLst/>
+              </a:rPr>
+              <a:t> Η α</a:t>
+            </a:r>
+            <a:r>
+              <a:rPr kumimoji="0" lang="en-US" altLang="en-US" sz="1800" b="0" i="0" u="none" strike="noStrike" cap="none" normalizeH="0" baseline="0" dirty="0" err="1">
+                <a:ln>
+                  <a:noFill/>
+                </a:ln>
+                <a:effectLst/>
+              </a:rPr>
+              <a:t>ύξηση</a:t>
+            </a:r>
+            <a:r>
+              <a:rPr kumimoji="0" lang="en-US" altLang="en-US" sz="1800" b="0" i="0" u="none" strike="noStrike" cap="none" normalizeH="0" baseline="0" dirty="0">
+                <a:ln>
+                  <a:noFill/>
+                </a:ln>
+                <a:effectLst/>
+              </a:rPr>
+              <a:t> </a:t>
+            </a:r>
+            <a:r>
+              <a:rPr kumimoji="0" lang="en-US" altLang="en-US" sz="1800" b="0" i="0" u="none" strike="noStrike" cap="none" normalizeH="0" baseline="0" dirty="0" err="1">
+                <a:ln>
+                  <a:noFill/>
+                </a:ln>
+                <a:effectLst/>
+              </a:rPr>
+              <a:t>της</a:t>
+            </a:r>
+            <a:r>
+              <a:rPr kumimoji="0" lang="en-US" altLang="en-US" sz="1800" b="0" i="0" u="none" strike="noStrike" cap="none" normalizeH="0" baseline="0" dirty="0">
+                <a:ln>
+                  <a:noFill/>
+                </a:ln>
+                <a:effectLst/>
+              </a:rPr>
+              <a:t> </a:t>
+            </a:r>
+            <a:r>
+              <a:rPr kumimoji="0" lang="en-US" altLang="en-US" sz="1800" b="0" i="0" u="none" strike="noStrike" cap="none" normalizeH="0" baseline="0" dirty="0" err="1">
+                <a:ln>
+                  <a:noFill/>
+                </a:ln>
+                <a:effectLst/>
+              </a:rPr>
+              <a:t>χωρητικότητ</a:t>
+            </a:r>
+            <a:r>
+              <a:rPr kumimoji="0" lang="en-US" altLang="en-US" sz="1800" b="0" i="0" u="none" strike="noStrike" cap="none" normalizeH="0" baseline="0" dirty="0">
+                <a:ln>
+                  <a:noFill/>
+                </a:ln>
+                <a:effectLst/>
+              </a:rPr>
+              <a:t>ας (π.χ. 10 Mbps) </a:t>
+            </a:r>
+            <a:r>
+              <a:rPr kumimoji="0" lang="en-US" altLang="en-US" sz="1800" b="0" i="0" u="none" strike="noStrike" cap="none" normalizeH="0" baseline="0" dirty="0" err="1">
+                <a:ln>
+                  <a:noFill/>
+                </a:ln>
+                <a:effectLst/>
+              </a:rPr>
+              <a:t>είν</a:t>
+            </a:r>
+            <a:r>
+              <a:rPr kumimoji="0" lang="en-US" altLang="en-US" sz="1800" b="0" i="0" u="none" strike="noStrike" cap="none" normalizeH="0" baseline="0" dirty="0">
+                <a:ln>
+                  <a:noFill/>
+                </a:ln>
+                <a:effectLst/>
+              </a:rPr>
+              <a:t>αι η πιο άμεση λύση για την εξάλειψη της ουράς.</a:t>
+            </a:r>
+          </a:p>
+          <a:p>
+            <a:pPr marL="0" marR="0" lvl="0" indent="-228600" algn="l" fontAlgn="base">
+              <a:spcBef>
+                <a:spcPct val="0"/>
+              </a:spcBef>
+              <a:spcAft>
+                <a:spcPts val="600"/>
+              </a:spcAft>
+              <a:buClrTx/>
+              <a:buSzTx/>
+              <a:buFont typeface="Arial" panose="020B0604020202020204" pitchFamily="34" charset="0"/>
+              <a:buChar char="•"/>
+              <a:tabLst/>
+            </a:pPr>
+            <a:r>
+              <a:rPr kumimoji="0" lang="en-US" altLang="en-US" sz="1800" b="1" i="0" u="none" strike="noStrike" cap="none" normalizeH="0" baseline="0" dirty="0" err="1">
+                <a:ln>
+                  <a:noFill/>
+                </a:ln>
+                <a:effectLst/>
+              </a:rPr>
+              <a:t>Μέγεθος</a:t>
+            </a:r>
+            <a:r>
+              <a:rPr kumimoji="0" lang="en-US" altLang="en-US" sz="1800" b="1" i="0" u="none" strike="noStrike" cap="none" normalizeH="0" baseline="0" dirty="0">
+                <a:ln>
+                  <a:noFill/>
+                </a:ln>
+                <a:effectLst/>
+              </a:rPr>
+              <a:t> Πα</a:t>
+            </a:r>
+            <a:r>
+              <a:rPr kumimoji="0" lang="en-US" altLang="en-US" sz="1800" b="1" i="0" u="none" strike="noStrike" cap="none" normalizeH="0" baseline="0" dirty="0" err="1">
+                <a:ln>
+                  <a:noFill/>
+                </a:ln>
+                <a:effectLst/>
+              </a:rPr>
+              <a:t>κέτου</a:t>
+            </a:r>
+            <a:r>
+              <a:rPr kumimoji="0" lang="en-US" altLang="en-US" sz="1800" b="1" i="0" u="none" strike="noStrike" cap="none" normalizeH="0" baseline="0" dirty="0">
+                <a:ln>
+                  <a:noFill/>
+                </a:ln>
+                <a:effectLst/>
+              </a:rPr>
+              <a:t>:</a:t>
+            </a:r>
+            <a:r>
+              <a:rPr kumimoji="0" lang="en-US" altLang="en-US" sz="1800" b="0" i="0" u="none" strike="noStrike" cap="none" normalizeH="0" baseline="0" dirty="0">
+                <a:ln>
+                  <a:noFill/>
+                </a:ln>
+                <a:effectLst/>
+              </a:rPr>
+              <a:t> Τα </a:t>
+            </a:r>
+            <a:r>
+              <a:rPr kumimoji="0" lang="en-US" altLang="en-US" sz="1800" b="0" i="0" u="none" strike="noStrike" cap="none" normalizeH="0" baseline="0" dirty="0" err="1">
+                <a:ln>
+                  <a:noFill/>
+                </a:ln>
+                <a:effectLst/>
+              </a:rPr>
+              <a:t>μεγάλ</a:t>
+            </a:r>
+            <a:r>
+              <a:rPr kumimoji="0" lang="en-US" altLang="en-US" sz="1800" b="0" i="0" u="none" strike="noStrike" cap="none" normalizeH="0" baseline="0" dirty="0">
+                <a:ln>
+                  <a:noFill/>
+                </a:ln>
+                <a:effectLst/>
+              </a:rPr>
+              <a:t>α πακέτα (π.χ. 5000 Bytes) </a:t>
+            </a:r>
+            <a:r>
+              <a:rPr kumimoji="0" lang="en-US" altLang="en-US" sz="1800" b="0" i="0" u="none" strike="noStrike" cap="none" normalizeH="0" baseline="0" dirty="0" err="1">
+                <a:ln>
+                  <a:noFill/>
+                </a:ln>
+                <a:effectLst/>
+              </a:rPr>
+              <a:t>δεσμεύουν</a:t>
+            </a:r>
+            <a:r>
+              <a:rPr kumimoji="0" lang="en-US" altLang="en-US" sz="1800" b="0" i="0" u="none" strike="noStrike" cap="none" normalizeH="0" baseline="0" dirty="0">
+                <a:ln>
+                  <a:noFill/>
+                </a:ln>
+                <a:effectLst/>
+              </a:rPr>
+              <a:t> </a:t>
+            </a:r>
+            <a:r>
+              <a:rPr kumimoji="0" lang="en-US" altLang="en-US" sz="1800" b="0" i="0" u="none" strike="noStrike" cap="none" normalizeH="0" baseline="0" dirty="0" err="1">
+                <a:ln>
+                  <a:noFill/>
+                </a:ln>
+                <a:effectLst/>
+              </a:rPr>
+              <a:t>τον</a:t>
+            </a:r>
+            <a:r>
+              <a:rPr kumimoji="0" lang="en-US" altLang="en-US" sz="1800" b="0" i="0" u="none" strike="noStrike" cap="none" normalizeH="0" baseline="0" dirty="0">
+                <a:ln>
+                  <a:noFill/>
+                </a:ln>
+                <a:effectLst/>
+              </a:rPr>
+              <a:t> Router </a:t>
+            </a:r>
+            <a:r>
+              <a:rPr kumimoji="0" lang="en-US" altLang="en-US" sz="1800" b="0" i="0" u="none" strike="noStrike" cap="none" normalizeH="0" baseline="0" dirty="0" err="1">
+                <a:ln>
+                  <a:noFill/>
+                </a:ln>
+                <a:effectLst/>
+              </a:rPr>
+              <a:t>γι</a:t>
+            </a:r>
+            <a:r>
+              <a:rPr kumimoji="0" lang="en-US" altLang="en-US" sz="1800" b="0" i="0" u="none" strike="noStrike" cap="none" normalizeH="0" baseline="0" dirty="0">
+                <a:ln>
+                  <a:noFill/>
+                </a:ln>
+                <a:effectLst/>
+              </a:rPr>
+              <a:t>α μεγάλο χρονικό διάστημα (Transmission Delay), προκαλώντας εμπλοκές.</a:t>
+            </a:r>
+          </a:p>
+          <a:p>
+            <a:pPr marL="0" marR="0" lvl="0" indent="-228600" algn="l" fontAlgn="base">
+              <a:spcBef>
+                <a:spcPct val="0"/>
+              </a:spcBef>
+              <a:spcAft>
+                <a:spcPts val="600"/>
+              </a:spcAft>
+              <a:buClrTx/>
+              <a:buSzTx/>
+              <a:buFont typeface="Arial" panose="020B0604020202020204" pitchFamily="34" charset="0"/>
+              <a:buChar char="•"/>
+              <a:tabLst/>
+            </a:pPr>
+            <a:r>
+              <a:rPr kumimoji="0" lang="en-US" altLang="en-US" sz="1800" b="1" i="0" u="none" strike="noStrike" cap="none" normalizeH="0" baseline="0" dirty="0" err="1">
+                <a:ln>
+                  <a:noFill/>
+                </a:ln>
+                <a:effectLst/>
+              </a:rPr>
+              <a:t>Το</a:t>
+            </a:r>
+            <a:r>
+              <a:rPr kumimoji="0" lang="en-US" altLang="en-US" sz="1800" b="1" i="0" u="none" strike="noStrike" cap="none" normalizeH="0" baseline="0" dirty="0">
+                <a:ln>
+                  <a:noFill/>
+                </a:ln>
+                <a:effectLst/>
+              </a:rPr>
+              <a:t>πολογία &amp; Bottlenecks:</a:t>
+            </a:r>
+            <a:endParaRPr kumimoji="0" lang="en-US" altLang="en-US" sz="1800" b="0" i="0" u="none" strike="noStrike" cap="none" normalizeH="0" baseline="0" dirty="0">
+              <a:ln>
+                <a:noFill/>
+              </a:ln>
+              <a:effectLst/>
+            </a:endParaRPr>
+          </a:p>
+          <a:p>
+            <a:pPr marL="0" marR="0" lvl="0" indent="-228600" algn="l" fontAlgn="base">
+              <a:spcBef>
+                <a:spcPct val="0"/>
+              </a:spcBef>
+              <a:spcAft>
+                <a:spcPts val="600"/>
+              </a:spcAft>
+              <a:buClrTx/>
+              <a:buSzTx/>
+              <a:buFont typeface="Arial" panose="020B0604020202020204" pitchFamily="34" charset="0"/>
+              <a:buChar char="•"/>
+              <a:tabLst/>
+            </a:pPr>
+            <a:r>
+              <a:rPr kumimoji="0" lang="en-US" altLang="en-US" sz="1800" b="0" i="0" u="none" strike="noStrike" cap="none" normalizeH="0" baseline="0" dirty="0" err="1">
+                <a:ln>
+                  <a:noFill/>
+                </a:ln>
+                <a:effectLst/>
+              </a:rPr>
+              <a:t>Σε</a:t>
+            </a:r>
+            <a:r>
+              <a:rPr kumimoji="0" lang="en-US" altLang="en-US" sz="1800" b="0" i="0" u="none" strike="noStrike" cap="none" normalizeH="0" baseline="0" dirty="0">
+                <a:ln>
+                  <a:noFill/>
+                </a:ln>
+                <a:effectLst/>
+              </a:rPr>
+              <a:t> </a:t>
+            </a:r>
+            <a:r>
+              <a:rPr kumimoji="0" lang="en-US" altLang="en-US" sz="1800" b="0" i="0" u="none" strike="noStrike" cap="none" normalizeH="0" baseline="0" dirty="0" err="1">
+                <a:ln>
+                  <a:noFill/>
+                </a:ln>
+                <a:effectLst/>
+              </a:rPr>
+              <a:t>σύνθετ</a:t>
+            </a:r>
+            <a:r>
+              <a:rPr kumimoji="0" lang="en-US" altLang="en-US" sz="1800" b="0" i="0" u="none" strike="noStrike" cap="none" normalizeH="0" baseline="0" dirty="0">
+                <a:ln>
+                  <a:noFill/>
+                </a:ln>
+                <a:effectLst/>
+              </a:rPr>
+              <a:t>α δίκτυα, οι Routers που συγκεντρώνουν κίνηση (Aggregators) αποτελούν τα πιο ευάλωτα σημεία.</a:t>
+            </a:r>
+          </a:p>
+          <a:p>
+            <a:pPr marL="0" marR="0" lvl="0" indent="-228600" algn="l" fontAlgn="base">
+              <a:spcBef>
+                <a:spcPct val="0"/>
+              </a:spcBef>
+              <a:spcAft>
+                <a:spcPts val="600"/>
+              </a:spcAft>
+              <a:buClrTx/>
+              <a:buSzTx/>
+              <a:buFont typeface="Arial" panose="020B0604020202020204" pitchFamily="34" charset="0"/>
+              <a:buChar char="•"/>
+              <a:tabLst/>
+            </a:pPr>
+            <a:r>
+              <a:rPr kumimoji="0" lang="en-US" altLang="en-US" sz="1800" b="1" i="0" u="none" strike="noStrike" cap="none" normalizeH="0" baseline="0" dirty="0">
+                <a:ln>
+                  <a:noFill/>
+                </a:ln>
+                <a:effectLst/>
+              </a:rPr>
+              <a:t>Hardware vs. Software:</a:t>
+            </a:r>
+            <a:endParaRPr kumimoji="0" lang="en-US" altLang="en-US" sz="1800" b="0" i="0" u="none" strike="noStrike" cap="none" normalizeH="0" baseline="0" dirty="0">
+              <a:ln>
+                <a:noFill/>
+              </a:ln>
+              <a:effectLst/>
+            </a:endParaRPr>
+          </a:p>
+          <a:p>
+            <a:pPr marL="0" marR="0" lvl="0" indent="-228600" algn="l" fontAlgn="base">
+              <a:spcBef>
+                <a:spcPct val="0"/>
+              </a:spcBef>
+              <a:spcAft>
+                <a:spcPts val="600"/>
+              </a:spcAft>
+              <a:buClrTx/>
+              <a:buSzTx/>
+              <a:buFont typeface="Arial" panose="020B0604020202020204" pitchFamily="34" charset="0"/>
+              <a:buChar char="•"/>
+              <a:tabLst/>
+            </a:pPr>
+            <a:r>
+              <a:rPr kumimoji="0" lang="en-US" altLang="en-US" sz="1800" b="0" i="0" u="none" strike="noStrike" cap="none" normalizeH="0" baseline="0" dirty="0" err="1">
+                <a:ln>
+                  <a:noFill/>
+                </a:ln>
+                <a:effectLst/>
+              </a:rPr>
+              <a:t>Αν</a:t>
+            </a:r>
+            <a:r>
+              <a:rPr kumimoji="0" lang="en-US" altLang="en-US" sz="1800" b="0" i="0" u="none" strike="noStrike" cap="none" normalizeH="0" baseline="0" dirty="0">
+                <a:ln>
+                  <a:noFill/>
+                </a:ln>
+                <a:effectLst/>
+              </a:rPr>
+              <a:t> </a:t>
+            </a:r>
+            <a:r>
+              <a:rPr kumimoji="0" lang="en-US" altLang="en-US" sz="1800" b="0" i="0" u="none" strike="noStrike" cap="none" normalizeH="0" baseline="0" dirty="0" err="1">
+                <a:ln>
+                  <a:noFill/>
+                </a:ln>
+                <a:effectLst/>
+              </a:rPr>
+              <a:t>δεν</a:t>
+            </a:r>
+            <a:r>
+              <a:rPr kumimoji="0" lang="en-US" altLang="en-US" sz="1800" b="0" i="0" u="none" strike="noStrike" cap="none" normalizeH="0" baseline="0" dirty="0">
+                <a:ln>
+                  <a:noFill/>
+                </a:ln>
+                <a:effectLst/>
+              </a:rPr>
+              <a:t> μπ</a:t>
+            </a:r>
+            <a:r>
+              <a:rPr kumimoji="0" lang="en-US" altLang="en-US" sz="1800" b="0" i="0" u="none" strike="noStrike" cap="none" normalizeH="0" baseline="0" dirty="0" err="1">
+                <a:ln>
+                  <a:noFill/>
+                </a:ln>
+                <a:effectLst/>
+              </a:rPr>
+              <a:t>ορούμε</a:t>
+            </a:r>
+            <a:r>
+              <a:rPr kumimoji="0" lang="en-US" altLang="en-US" sz="1800" b="0" i="0" u="none" strike="noStrike" cap="none" normalizeH="0" baseline="0" dirty="0">
+                <a:ln>
+                  <a:noFill/>
+                </a:ln>
+                <a:effectLst/>
+              </a:rPr>
+              <a:t> να α</a:t>
+            </a:r>
+            <a:r>
+              <a:rPr kumimoji="0" lang="en-US" altLang="en-US" sz="1800" b="0" i="0" u="none" strike="noStrike" cap="none" normalizeH="0" baseline="0" dirty="0" err="1">
+                <a:ln>
+                  <a:noFill/>
+                </a:ln>
+                <a:effectLst/>
+              </a:rPr>
+              <a:t>υξήσουμε</a:t>
+            </a:r>
+            <a:r>
+              <a:rPr kumimoji="0" lang="en-US" altLang="en-US" sz="1800" b="0" i="0" u="none" strike="noStrike" cap="none" normalizeH="0" baseline="0" dirty="0">
+                <a:ln>
+                  <a:noFill/>
+                </a:ln>
+                <a:effectLst/>
+              </a:rPr>
+              <a:t> </a:t>
+            </a:r>
+            <a:r>
+              <a:rPr kumimoji="0" lang="en-US" altLang="en-US" sz="1800" b="0" i="0" u="none" strike="noStrike" cap="none" normalizeH="0" baseline="0" dirty="0" err="1">
+                <a:ln>
+                  <a:noFill/>
+                </a:ln>
+                <a:effectLst/>
+              </a:rPr>
+              <a:t>το</a:t>
+            </a:r>
+            <a:r>
+              <a:rPr kumimoji="0" lang="en-US" altLang="en-US" sz="1800" b="0" i="0" u="none" strike="noStrike" cap="none" normalizeH="0" baseline="0" dirty="0">
+                <a:ln>
+                  <a:noFill/>
+                </a:ln>
+                <a:effectLst/>
+              </a:rPr>
+              <a:t> Hardware (Bandwidth), π</a:t>
+            </a:r>
+            <a:r>
+              <a:rPr kumimoji="0" lang="en-US" altLang="en-US" sz="1800" b="0" i="0" u="none" strike="noStrike" cap="none" normalizeH="0" baseline="0" dirty="0" err="1">
+                <a:ln>
+                  <a:noFill/>
+                </a:ln>
+                <a:effectLst/>
+              </a:rPr>
+              <a:t>ρέ</a:t>
+            </a:r>
+            <a:r>
+              <a:rPr kumimoji="0" lang="en-US" altLang="en-US" sz="1800" b="0" i="0" u="none" strike="noStrike" cap="none" normalizeH="0" baseline="0" dirty="0">
+                <a:ln>
+                  <a:noFill/>
+                </a:ln>
+                <a:effectLst/>
+              </a:rPr>
+              <a:t>πει να βελτιώσουμε το Software (Scheduling).</a:t>
+            </a:r>
+          </a:p>
+          <a:p>
+            <a:pPr marL="0" marR="0" lvl="0" indent="-228600" algn="l" fontAlgn="base">
+              <a:spcBef>
+                <a:spcPct val="0"/>
+              </a:spcBef>
+              <a:spcAft>
+                <a:spcPts val="600"/>
+              </a:spcAft>
+              <a:buClrTx/>
+              <a:buSzTx/>
+              <a:buFont typeface="Arial" panose="020B0604020202020204" pitchFamily="34" charset="0"/>
+              <a:buChar char="•"/>
+              <a:tabLst/>
+            </a:pPr>
+            <a:r>
+              <a:rPr kumimoji="0" lang="en-US" altLang="en-US" sz="1800" b="0" i="0" u="none" strike="noStrike" cap="none" normalizeH="0" baseline="0" dirty="0" err="1">
+                <a:ln>
+                  <a:noFill/>
+                </a:ln>
+                <a:effectLst/>
+              </a:rPr>
+              <a:t>Αλγόριθμοι</a:t>
+            </a:r>
+            <a:r>
+              <a:rPr kumimoji="0" lang="en-US" altLang="en-US" sz="1800" b="0" i="0" u="none" strike="noStrike" cap="none" normalizeH="0" baseline="0" dirty="0">
+                <a:ln>
+                  <a:noFill/>
+                </a:ln>
+                <a:effectLst/>
+              </a:rPr>
+              <a:t> όπ</a:t>
+            </a:r>
+            <a:r>
+              <a:rPr kumimoji="0" lang="en-US" altLang="en-US" sz="1800" b="0" i="0" u="none" strike="noStrike" cap="none" normalizeH="0" baseline="0" dirty="0" err="1">
+                <a:ln>
+                  <a:noFill/>
+                </a:ln>
+                <a:effectLst/>
+              </a:rPr>
+              <a:t>ως</a:t>
+            </a:r>
+            <a:r>
+              <a:rPr kumimoji="0" lang="en-US" altLang="en-US" sz="1800" b="0" i="0" u="none" strike="noStrike" cap="none" normalizeH="0" baseline="0" dirty="0">
+                <a:ln>
+                  <a:noFill/>
+                </a:ln>
+                <a:effectLst/>
+              </a:rPr>
+              <a:t> ο </a:t>
+            </a:r>
+            <a:r>
+              <a:rPr kumimoji="0" lang="en-US" altLang="en-US" sz="1800" b="1" i="0" u="none" strike="noStrike" cap="none" normalizeH="0" baseline="0" dirty="0">
+                <a:ln>
+                  <a:noFill/>
+                </a:ln>
+                <a:effectLst/>
+              </a:rPr>
+              <a:t>Round-Robin</a:t>
+            </a:r>
+            <a:r>
+              <a:rPr kumimoji="0" lang="en-US" altLang="en-US" sz="1800" b="0" i="0" u="none" strike="noStrike" cap="none" normalizeH="0" baseline="0" dirty="0">
+                <a:ln>
+                  <a:noFill/>
+                </a:ln>
+                <a:effectLst/>
+              </a:rPr>
+              <a:t> </a:t>
+            </a:r>
+            <a:r>
+              <a:rPr kumimoji="0" lang="en-US" altLang="en-US" sz="1800" b="0" i="0" u="none" strike="noStrike" cap="none" normalizeH="0" baseline="0" dirty="0" err="1">
+                <a:ln>
+                  <a:noFill/>
+                </a:ln>
+                <a:effectLst/>
+              </a:rPr>
+              <a:t>εξ</a:t>
+            </a:r>
+            <a:r>
+              <a:rPr kumimoji="0" lang="en-US" altLang="en-US" sz="1800" b="0" i="0" u="none" strike="noStrike" cap="none" normalizeH="0" baseline="0" dirty="0">
+                <a:ln>
+                  <a:noFill/>
+                </a:ln>
+                <a:effectLst/>
+              </a:rPr>
+              <a:t>ασφαλίζουν ποιότητα υπηρεσίας (QoS) για ευαίσθητες εφαρμογές, ακόμα και υπό συνθήκες φόρτου.</a:t>
+            </a:r>
+          </a:p>
+          <a:p>
+            <a:pPr marL="0" marR="0" lvl="0" indent="-228600" algn="l" fontAlgn="base">
+              <a:spcBef>
+                <a:spcPct val="0"/>
+              </a:spcBef>
+              <a:spcAft>
+                <a:spcPts val="600"/>
+              </a:spcAft>
+              <a:buClrTx/>
+              <a:buSzTx/>
+              <a:buFont typeface="Arial" panose="020B0604020202020204" pitchFamily="34" charset="0"/>
+              <a:buChar char="•"/>
+              <a:tabLst/>
+            </a:pPr>
+            <a:endParaRPr kumimoji="0" lang="en-US" altLang="en-US" sz="1800" b="0" i="0" u="none" strike="noStrike" cap="none" normalizeH="0" baseline="0" dirty="0">
+              <a:ln>
+                <a:noFill/>
+              </a:ln>
+              <a:effectLst/>
+            </a:endParaRPr>
+          </a:p>
+        </p:txBody>
+      </p:sp>
+    </p:spTree>
+    <p:extLst>
+      <p:ext uri="{BB962C8B-B14F-4D97-AF65-F5344CB8AC3E}">
+        <p14:creationId xmlns:p14="http://schemas.microsoft.com/office/powerpoint/2010/main" val="3429874853"/>
+      </p:ext>
+    </p:extLst>
+  </p:cSld>
+  <p:clrMapOvr>
+    <a:masterClrMapping/>
+  </p:clrMapOvr>
+</p:sld>
+</file>
+
+<file path=ppt/slides/slide38.xml><?xml version="1.0" encoding="utf-8"?>
+<p:sld xmlns:a="http://schemas.openxmlformats.org/drawingml/2006/main" xmlns:r="http://schemas.openxmlformats.org/officeDocument/2006/relationships" xmlns:p="http://schemas.openxmlformats.org/presentationml/2006/main">
+  <p:cSld>
+    <p:bg>
+      <p:bgPr>
+        <a:solidFill>
+          <a:schemeClr val="bg1"/>
+        </a:solidFill>
+        <a:effectLst/>
+      </p:bgPr>
+    </p:bg>
+    <p:spTree>
+      <p:nvGrpSpPr>
+        <p:cNvPr id="1" name=""/>
+        <p:cNvGrpSpPr/>
+        <p:nvPr/>
+      </p:nvGrpSpPr>
+      <p:grpSpPr>
+        <a:xfrm>
+          <a:off x="0" y="0"/>
+          <a:ext cx="0" cy="0"/>
+          <a:chOff x="0" y="0"/>
+          <a:chExt cx="0" cy="0"/>
+        </a:xfrm>
+      </p:grpSpPr>
+      <p:sp useBgFill="1">
+        <p:nvSpPr>
           <p:cNvPr id="43" name="Rectangle 42">
             <a:extLst>
               <a:ext uri="{FF2B5EF4-FFF2-40B4-BE49-F238E27FC236}">
@@ -30202,7 +36637,7 @@
         </p:nvSpPr>
         <p:spPr>
           <a:xfrm>
-            <a:off x="1386865" y="818984"/>
+            <a:off x="2797876" y="1321904"/>
             <a:ext cx="6596245" cy="3268520"/>
           </a:xfrm>
         </p:spPr>
@@ -30212,9 +36647,9 @@
           </a:bodyPr>
           <a:lstStyle/>
           <a:p>
-            <a:pPr algn="r"/>
-            <a:r>
-              <a:rPr lang="en-US" sz="4800" b="1" kern="1200">
+            <a:pPr algn="ctr"/>
+            <a:r>
+              <a:rPr lang="en-US" sz="6600" b="1" kern="1200" dirty="0" err="1">
                 <a:solidFill>
                   <a:srgbClr val="FFFFFF"/>
                 </a:solidFill>
@@ -30222,7 +36657,18 @@
                 <a:ea typeface="+mj-ea"/>
                 <a:cs typeface="+mj-cs"/>
               </a:rPr>
-              <a:t>Ευχαριστούμε για τον χρόνο σας!</a:t>
+              <a:t>Ευχ</a:t>
+            </a:r>
+            <a:r>
+              <a:rPr lang="en-US" sz="6600" b="1" kern="1200" dirty="0">
+                <a:solidFill>
+                  <a:srgbClr val="FFFFFF"/>
+                </a:solidFill>
+                <a:latin typeface="+mj-lt"/>
+                <a:ea typeface="+mj-ea"/>
+                <a:cs typeface="+mj-cs"/>
+              </a:rPr>
+              <a:t>αριστούμε για τον χρόνο σας!</a:t>
             </a:r>
           </a:p>
         </p:txBody>

--- a/Παρουσίαση.pptx
+++ b/Παρουσίαση.pptx
@@ -14918,7 +14918,7 @@
           <a:p>
             <a:fld id="{C532137C-021D-4A9D-A859-D245201B58F6}" type="datetimeFigureOut">
               <a:rPr lang="en-US" smtClean="0"/>
-              <a:t>11/24/2025</a:t>
+              <a:t>11/29/2025</a:t>
             </a:fld>
             <a:endParaRPr lang="en-US"/>
           </a:p>
@@ -15185,6 +15185,90 @@
 </p:notesMaster>
 </file>
 
+<file path=ppt/notesSlides/notesSlide1.xml><?xml version="1.0" encoding="utf-8"?>
+<p:notes xmlns:a="http://schemas.openxmlformats.org/drawingml/2006/main" xmlns:r="http://schemas.openxmlformats.org/officeDocument/2006/relationships" xmlns:p="http://schemas.openxmlformats.org/presentationml/2006/main">
+  <p:cSld>
+    <p:spTree>
+      <p:nvGrpSpPr>
+        <p:cNvPr id="1" name=""/>
+        <p:cNvGrpSpPr/>
+        <p:nvPr/>
+      </p:nvGrpSpPr>
+      <p:grpSpPr>
+        <a:xfrm>
+          <a:off x="0" y="0"/>
+          <a:ext cx="0" cy="0"/>
+          <a:chOff x="0" y="0"/>
+          <a:chExt cx="0" cy="0"/>
+        </a:xfrm>
+      </p:grpSpPr>
+      <p:sp>
+        <p:nvSpPr>
+          <p:cNvPr id="2" name="Slide Image Placeholder 1"/>
+          <p:cNvSpPr>
+            <a:spLocks noGrp="1" noRot="1" noChangeAspect="1"/>
+          </p:cNvSpPr>
+          <p:nvPr>
+            <p:ph type="sldImg"/>
+          </p:nvPr>
+        </p:nvSpPr>
+        <p:spPr/>
+      </p:sp>
+      <p:sp>
+        <p:nvSpPr>
+          <p:cNvPr id="3" name="Notes Placeholder 2"/>
+          <p:cNvSpPr>
+            <a:spLocks noGrp="1"/>
+          </p:cNvSpPr>
+          <p:nvPr>
+            <p:ph type="body" idx="1"/>
+          </p:nvPr>
+        </p:nvSpPr>
+        <p:spPr/>
+        <p:txBody>
+          <a:bodyPr/>
+          <a:lstStyle/>
+          <a:p>
+            <a:endParaRPr lang="en-US" dirty="0"/>
+          </a:p>
+        </p:txBody>
+      </p:sp>
+      <p:sp>
+        <p:nvSpPr>
+          <p:cNvPr id="4" name="Slide Number Placeholder 3"/>
+          <p:cNvSpPr>
+            <a:spLocks noGrp="1"/>
+          </p:cNvSpPr>
+          <p:nvPr>
+            <p:ph type="sldNum" sz="quarter" idx="5"/>
+          </p:nvPr>
+        </p:nvSpPr>
+        <p:spPr/>
+        <p:txBody>
+          <a:bodyPr/>
+          <a:lstStyle/>
+          <a:p>
+            <a:fld id="{DCD9DC48-A198-457F-ABAC-AE902410F194}" type="slidenum">
+              <a:rPr lang="en-US" smtClean="0"/>
+              <a:t>8</a:t>
+            </a:fld>
+            <a:endParaRPr lang="en-US"/>
+          </a:p>
+        </p:txBody>
+      </p:sp>
+    </p:spTree>
+    <p:extLst>
+      <p:ext uri="{BB962C8B-B14F-4D97-AF65-F5344CB8AC3E}">
+        <p14:creationId xmlns:p14="http://schemas.microsoft.com/office/powerpoint/2010/main" val="2175186504"/>
+      </p:ext>
+    </p:extLst>
+  </p:cSld>
+  <p:clrMapOvr>
+    <a:masterClrMapping/>
+  </p:clrMapOvr>
+</p:notes>
+</file>
+
 <file path=ppt/slideLayouts/slideLayout1.xml><?xml version="1.0" encoding="utf-8"?>
 <p:sldLayout xmlns:a="http://schemas.openxmlformats.org/drawingml/2006/main" xmlns:r="http://schemas.openxmlformats.org/officeDocument/2006/relationships" xmlns:p="http://schemas.openxmlformats.org/presentationml/2006/main" type="title" preserve="1">
   <p:cSld name="Title Slide">
@@ -15332,7 +15416,7 @@
           <a:p>
             <a:fld id="{962F6855-2B44-4D26-9C54-0F94AD6A38AE}" type="datetimeFigureOut">
               <a:rPr lang="en-US" smtClean="0"/>
-              <a:t>11/24/2025</a:t>
+              <a:t>11/29/2025</a:t>
             </a:fld>
             <a:endParaRPr lang="en-US"/>
           </a:p>
@@ -15530,7 +15614,7 @@
           <a:p>
             <a:fld id="{962F6855-2B44-4D26-9C54-0F94AD6A38AE}" type="datetimeFigureOut">
               <a:rPr lang="en-US" smtClean="0"/>
-              <a:t>11/24/2025</a:t>
+              <a:t>11/29/2025</a:t>
             </a:fld>
             <a:endParaRPr lang="en-US"/>
           </a:p>
@@ -15738,7 +15822,7 @@
           <a:p>
             <a:fld id="{962F6855-2B44-4D26-9C54-0F94AD6A38AE}" type="datetimeFigureOut">
               <a:rPr lang="en-US" smtClean="0"/>
-              <a:t>11/24/2025</a:t>
+              <a:t>11/29/2025</a:t>
             </a:fld>
             <a:endParaRPr lang="en-US"/>
           </a:p>
@@ -15936,7 +16020,7 @@
           <a:p>
             <a:fld id="{962F6855-2B44-4D26-9C54-0F94AD6A38AE}" type="datetimeFigureOut">
               <a:rPr lang="en-US" smtClean="0"/>
-              <a:t>11/24/2025</a:t>
+              <a:t>11/29/2025</a:t>
             </a:fld>
             <a:endParaRPr lang="en-US"/>
           </a:p>
@@ -16211,7 +16295,7 @@
           <a:p>
             <a:fld id="{962F6855-2B44-4D26-9C54-0F94AD6A38AE}" type="datetimeFigureOut">
               <a:rPr lang="en-US" smtClean="0"/>
-              <a:t>11/24/2025</a:t>
+              <a:t>11/29/2025</a:t>
             </a:fld>
             <a:endParaRPr lang="en-US"/>
           </a:p>
@@ -16476,7 +16560,7 @@
           <a:p>
             <a:fld id="{962F6855-2B44-4D26-9C54-0F94AD6A38AE}" type="datetimeFigureOut">
               <a:rPr lang="en-US" smtClean="0"/>
-              <a:t>11/24/2025</a:t>
+              <a:t>11/29/2025</a:t>
             </a:fld>
             <a:endParaRPr lang="en-US"/>
           </a:p>
@@ -16888,7 +16972,7 @@
           <a:p>
             <a:fld id="{962F6855-2B44-4D26-9C54-0F94AD6A38AE}" type="datetimeFigureOut">
               <a:rPr lang="en-US" smtClean="0"/>
-              <a:t>11/24/2025</a:t>
+              <a:t>11/29/2025</a:t>
             </a:fld>
             <a:endParaRPr lang="en-US"/>
           </a:p>
@@ -17029,7 +17113,7 @@
           <a:p>
             <a:fld id="{962F6855-2B44-4D26-9C54-0F94AD6A38AE}" type="datetimeFigureOut">
               <a:rPr lang="en-US" smtClean="0"/>
-              <a:t>11/24/2025</a:t>
+              <a:t>11/29/2025</a:t>
             </a:fld>
             <a:endParaRPr lang="en-US"/>
           </a:p>
@@ -17142,7 +17226,7 @@
           <a:p>
             <a:fld id="{962F6855-2B44-4D26-9C54-0F94AD6A38AE}" type="datetimeFigureOut">
               <a:rPr lang="en-US" smtClean="0"/>
-              <a:t>11/24/2025</a:t>
+              <a:t>11/29/2025</a:t>
             </a:fld>
             <a:endParaRPr lang="en-US"/>
           </a:p>
@@ -17453,7 +17537,7 @@
           <a:p>
             <a:fld id="{962F6855-2B44-4D26-9C54-0F94AD6A38AE}" type="datetimeFigureOut">
               <a:rPr lang="en-US" smtClean="0"/>
-              <a:t>11/24/2025</a:t>
+              <a:t>11/29/2025</a:t>
             </a:fld>
             <a:endParaRPr lang="en-US"/>
           </a:p>
@@ -17741,7 +17825,7 @@
           <a:p>
             <a:fld id="{962F6855-2B44-4D26-9C54-0F94AD6A38AE}" type="datetimeFigureOut">
               <a:rPr lang="en-US" smtClean="0"/>
-              <a:t>11/24/2025</a:t>
+              <a:t>11/29/2025</a:t>
             </a:fld>
             <a:endParaRPr lang="en-US"/>
           </a:p>
@@ -17982,7 +18066,7 @@
           <a:p>
             <a:fld id="{962F6855-2B44-4D26-9C54-0F94AD6A38AE}" type="datetimeFigureOut">
               <a:rPr lang="en-US" smtClean="0"/>
-              <a:t>11/24/2025</a:t>
+              <a:t>11/29/2025</a:t>
             </a:fld>
             <a:endParaRPr lang="en-US"/>
           </a:p>
@@ -30565,7 +30649,7 @@
           </a:bodyPr>
           <a:lstStyle/>
           <a:p>
-            <a:pPr marL="0" marR="0" lvl="0" indent="-228600" algn="l" fontAlgn="base">
+            <a:pPr marR="0" lvl="0" algn="l" fontAlgn="base">
               <a:spcBef>
                 <a:spcPct val="0"/>
               </a:spcBef>
@@ -30574,8 +30658,6 @@
               </a:spcAft>
               <a:buClrTx/>
               <a:buSzTx/>
-              <a:buFont typeface="Arial" panose="020B0604020202020204" pitchFamily="34" charset="0"/>
-              <a:buChar char="•"/>
               <a:tabLst/>
             </a:pPr>
             <a:r>
@@ -30725,93 +30807,14 @@
               </a:rPr>
               <a:t>.</a:t>
             </a:r>
-          </a:p>
-          <a:p>
-            <a:pPr marL="0" marR="0" lvl="0" indent="-228600" algn="l" fontAlgn="base">
-              <a:spcBef>
-                <a:spcPct val="0"/>
-              </a:spcBef>
-              <a:spcAft>
-                <a:spcPts val="600"/>
-              </a:spcAft>
-              <a:buClrTx/>
-              <a:buSzTx/>
-              <a:buFont typeface="Arial" panose="020B0604020202020204" pitchFamily="34" charset="0"/>
-              <a:buChar char="•"/>
-              <a:tabLst/>
-            </a:pPr>
-            <a:r>
-              <a:rPr kumimoji="0" lang="en-US" altLang="en-US" sz="2000" b="1" i="0" u="none" strike="noStrike" cap="none" normalizeH="0" baseline="0" dirty="0" err="1">
-                <a:ln>
-                  <a:noFill/>
-                </a:ln>
-                <a:effectLst/>
-              </a:rPr>
-              <a:t>Το</a:t>
-            </a:r>
-            <a:r>
-              <a:rPr kumimoji="0" lang="en-US" altLang="en-US" sz="2000" b="1" i="0" u="none" strike="noStrike" cap="none" normalizeH="0" baseline="0" dirty="0">
-                <a:ln>
-                  <a:noFill/>
-                </a:ln>
-                <a:effectLst/>
-              </a:rPr>
-              <a:t> </a:t>
-            </a:r>
-            <a:r>
-              <a:rPr kumimoji="0" lang="en-US" altLang="en-US" sz="2000" b="1" i="0" u="none" strike="noStrike" cap="none" normalizeH="0" baseline="0" dirty="0" err="1">
-                <a:ln>
-                  <a:noFill/>
-                </a:ln>
-                <a:effectLst/>
-              </a:rPr>
-              <a:t>Σενάριο</a:t>
-            </a:r>
-            <a:r>
-              <a:rPr kumimoji="0" lang="en-US" altLang="en-US" sz="2000" b="1" i="0" u="none" strike="noStrike" cap="none" normalizeH="0" baseline="0" dirty="0">
-                <a:ln>
-                  <a:noFill/>
-                </a:ln>
-                <a:effectLst/>
-              </a:rPr>
-              <a:t> "Mixed Traffic" (</a:t>
-            </a:r>
-            <a:r>
-              <a:rPr kumimoji="0" lang="en-US" altLang="en-US" sz="2000" b="1" i="0" u="none" strike="noStrike" cap="none" normalizeH="0" baseline="0" dirty="0" err="1">
-                <a:ln>
-                  <a:noFill/>
-                </a:ln>
-                <a:effectLst/>
-              </a:rPr>
-              <a:t>Ασύμμετρη</a:t>
-            </a:r>
-            <a:r>
-              <a:rPr kumimoji="0" lang="en-US" altLang="en-US" sz="2000" b="1" i="0" u="none" strike="noStrike" cap="none" normalizeH="0" baseline="0" dirty="0">
-                <a:ln>
-                  <a:noFill/>
-                </a:ln>
-                <a:effectLst/>
-              </a:rPr>
-              <a:t> </a:t>
-            </a:r>
-            <a:r>
-              <a:rPr kumimoji="0" lang="en-US" altLang="en-US" sz="2000" b="1" i="0" u="none" strike="noStrike" cap="none" normalizeH="0" baseline="0" dirty="0" err="1">
-                <a:ln>
-                  <a:noFill/>
-                </a:ln>
-                <a:effectLst/>
-              </a:rPr>
-              <a:t>Κίνηση</a:t>
-            </a:r>
-            <a:r>
-              <a:rPr kumimoji="0" lang="en-US" altLang="en-US" sz="2000" b="1" i="0" u="none" strike="noStrike" cap="none" normalizeH="0" baseline="0" dirty="0">
-                <a:ln>
-                  <a:noFill/>
-                </a:ln>
-                <a:effectLst/>
-              </a:rPr>
-              <a:t>):</a:t>
-            </a:r>
+            <a:br>
+              <a:rPr kumimoji="0" lang="en-US" altLang="en-US" sz="2000" b="0" i="0" u="none" strike="noStrike" cap="none" normalizeH="0" baseline="0" dirty="0">
+                <a:ln>
+                  <a:noFill/>
+                </a:ln>
+                <a:effectLst/>
+              </a:rPr>
+            </a:br>
             <a:endParaRPr kumimoji="0" lang="en-US" altLang="en-US" sz="2000" b="0" i="0" u="none" strike="noStrike" cap="none" normalizeH="0" baseline="0" dirty="0">
               <a:ln>
                 <a:noFill/>
@@ -30834,6 +30837,97 @@
               <a:tabLst/>
             </a:pPr>
             <a:r>
+              <a:rPr kumimoji="0" lang="en-US" altLang="en-US" sz="2000" b="1" i="0" u="none" strike="noStrike" cap="none" normalizeH="0" baseline="0" dirty="0" err="1">
+                <a:ln>
+                  <a:noFill/>
+                </a:ln>
+                <a:effectLst/>
+              </a:rPr>
+              <a:t>Το</a:t>
+            </a:r>
+            <a:r>
+              <a:rPr kumimoji="0" lang="en-US" altLang="en-US" sz="2000" b="1" i="0" u="none" strike="noStrike" cap="none" normalizeH="0" baseline="0" dirty="0">
+                <a:ln>
+                  <a:noFill/>
+                </a:ln>
+                <a:effectLst/>
+              </a:rPr>
+              <a:t> </a:t>
+            </a:r>
+            <a:r>
+              <a:rPr kumimoji="0" lang="en-US" altLang="en-US" sz="2000" b="1" i="0" u="none" strike="noStrike" cap="none" normalizeH="0" baseline="0" dirty="0" err="1">
+                <a:ln>
+                  <a:noFill/>
+                </a:ln>
+                <a:effectLst/>
+              </a:rPr>
+              <a:t>Σενάριο</a:t>
+            </a:r>
+            <a:r>
+              <a:rPr kumimoji="0" lang="en-US" altLang="en-US" sz="2000" b="1" i="0" u="none" strike="noStrike" cap="none" normalizeH="0" baseline="0" dirty="0">
+                <a:ln>
+                  <a:noFill/>
+                </a:ln>
+                <a:effectLst/>
+              </a:rPr>
+              <a:t> "Mixed Traffic" (</a:t>
+            </a:r>
+            <a:r>
+              <a:rPr kumimoji="0" lang="en-US" altLang="en-US" sz="2000" b="1" i="0" u="none" strike="noStrike" cap="none" normalizeH="0" baseline="0" dirty="0" err="1">
+                <a:ln>
+                  <a:noFill/>
+                </a:ln>
+                <a:effectLst/>
+              </a:rPr>
+              <a:t>Ασύμμετρη</a:t>
+            </a:r>
+            <a:r>
+              <a:rPr kumimoji="0" lang="en-US" altLang="en-US" sz="2000" b="1" i="0" u="none" strike="noStrike" cap="none" normalizeH="0" baseline="0" dirty="0">
+                <a:ln>
+                  <a:noFill/>
+                </a:ln>
+                <a:effectLst/>
+              </a:rPr>
+              <a:t> </a:t>
+            </a:r>
+            <a:r>
+              <a:rPr kumimoji="0" lang="en-US" altLang="en-US" sz="2000" b="1" i="0" u="none" strike="noStrike" cap="none" normalizeH="0" baseline="0" dirty="0" err="1">
+                <a:ln>
+                  <a:noFill/>
+                </a:ln>
+                <a:effectLst/>
+              </a:rPr>
+              <a:t>Κίνηση</a:t>
+            </a:r>
+            <a:r>
+              <a:rPr kumimoji="0" lang="en-US" altLang="en-US" sz="2000" b="1" i="0" u="none" strike="noStrike" cap="none" normalizeH="0" baseline="0" dirty="0">
+                <a:ln>
+                  <a:noFill/>
+                </a:ln>
+                <a:effectLst/>
+              </a:rPr>
+              <a:t>):</a:t>
+            </a:r>
+            <a:endParaRPr kumimoji="0" lang="en-US" altLang="en-US" sz="2000" b="0" i="0" u="none" strike="noStrike" cap="none" normalizeH="0" baseline="0" dirty="0">
+              <a:ln>
+                <a:noFill/>
+              </a:ln>
+              <a:effectLst/>
+            </a:endParaRPr>
+          </a:p>
+          <a:p>
+            <a:pPr marR="0" lvl="0" algn="l" fontAlgn="base">
+              <a:spcBef>
+                <a:spcPct val="0"/>
+              </a:spcBef>
+              <a:spcAft>
+                <a:spcPts val="600"/>
+              </a:spcAft>
+              <a:buClrTx/>
+              <a:buSzTx/>
+              <a:tabLst/>
+            </a:pPr>
+            <a:r>
               <a:rPr kumimoji="0" lang="en-US" altLang="en-US" sz="2000" b="0" i="0" u="none" strike="noStrike" cap="none" normalizeH="0" baseline="0" dirty="0" err="1">
                 <a:ln>
                   <a:noFill/>
@@ -30947,9 +31041,131 @@
               </a:rPr>
               <a:t>.</a:t>
             </a:r>
+            <a:r>
+              <a:rPr kumimoji="0" lang="el-GR" altLang="en-US" sz="2000" b="0" i="0" u="none" strike="noStrike" cap="none" normalizeH="0" baseline="0" dirty="0">
+                <a:ln>
+                  <a:noFill/>
+                </a:ln>
+                <a:effectLst/>
+              </a:rPr>
+              <a:t>(με ρυθμό 0.002</a:t>
+            </a:r>
+            <a:r>
+              <a:rPr kumimoji="0" lang="en-US" altLang="en-US" sz="2000" b="0" i="0" u="none" strike="noStrike" cap="none" normalizeH="0" baseline="0" dirty="0">
+                <a:ln>
+                  <a:noFill/>
+                </a:ln>
+                <a:effectLst/>
+              </a:rPr>
+              <a:t>s)</a:t>
+            </a:r>
           </a:p>
           <a:p>
-            <a:pPr marL="0" marR="0" lvl="0" indent="-228600" algn="l" fontAlgn="base">
+            <a:pPr indent="-228600" algn="l" fontAlgn="base">
+              <a:spcBef>
+                <a:spcPct val="0"/>
+              </a:spcBef>
+              <a:spcAft>
+                <a:spcPts val="600"/>
+              </a:spcAft>
+              <a:buFont typeface="Arial" panose="020B0604020202020204" pitchFamily="34" charset="0"/>
+              <a:buChar char="•"/>
+            </a:pPr>
+            <a:r>
+              <a:rPr kumimoji="0" lang="en-US" altLang="en-US" sz="2000" b="1" i="0" u="none" strike="noStrike" cap="none" normalizeH="0" baseline="0" dirty="0">
+                <a:ln>
+                  <a:noFill/>
+                </a:ln>
+                <a:effectLst/>
+              </a:rPr>
+              <a:t>Host B:</a:t>
+            </a:r>
+            <a:r>
+              <a:rPr kumimoji="0" lang="en-US" altLang="en-US" sz="2000" b="0" i="0" u="none" strike="noStrike" cap="none" normalizeH="0" baseline="0" dirty="0">
+                <a:ln>
+                  <a:noFill/>
+                </a:ln>
+                <a:effectLst/>
+              </a:rPr>
+              <a:t> </a:t>
+            </a:r>
+            <a:r>
+              <a:rPr kumimoji="0" lang="en-US" altLang="en-US" sz="2000" b="0" i="0" u="none" strike="noStrike" cap="none" normalizeH="0" baseline="0" dirty="0" err="1">
+                <a:ln>
+                  <a:noFill/>
+                </a:ln>
+                <a:effectLst/>
+              </a:rPr>
+              <a:t>Στέλνει</a:t>
+            </a:r>
+            <a:r>
+              <a:rPr kumimoji="0" lang="en-US" altLang="en-US" sz="2000" b="0" i="0" u="none" strike="noStrike" cap="none" normalizeH="0" baseline="0" dirty="0">
+                <a:ln>
+                  <a:noFill/>
+                </a:ln>
+                <a:effectLst/>
+              </a:rPr>
+              <a:t> </a:t>
+            </a:r>
+            <a:r>
+              <a:rPr kumimoji="0" lang="en-US" altLang="en-US" sz="2000" b="1" i="0" u="none" strike="noStrike" cap="none" normalizeH="0" baseline="0" dirty="0" err="1">
+                <a:ln>
+                  <a:noFill/>
+                </a:ln>
+                <a:effectLst/>
+              </a:rPr>
+              <a:t>μεγάλ</a:t>
+            </a:r>
+            <a:r>
+              <a:rPr kumimoji="0" lang="en-US" altLang="en-US" sz="2000" b="1" i="0" u="none" strike="noStrike" cap="none" normalizeH="0" baseline="0" dirty="0">
+                <a:ln>
+                  <a:noFill/>
+                </a:ln>
+                <a:effectLst/>
+              </a:rPr>
+              <a:t>α πακέτα</a:t>
+            </a:r>
+            <a:r>
+              <a:rPr kumimoji="0" lang="en-US" altLang="en-US" sz="2000" b="0" i="0" u="none" strike="noStrike" cap="none" normalizeH="0" baseline="0" dirty="0">
+                <a:ln>
+                  <a:noFill/>
+                </a:ln>
+                <a:effectLst/>
+              </a:rPr>
+              <a:t> (3000 Bytes).</a:t>
+            </a:r>
+            <a:r>
+              <a:rPr lang="el-GR" altLang="en-US" sz="2000" dirty="0"/>
+              <a:t> (με ρυθμό 0.02</a:t>
+            </a:r>
+            <a:r>
+              <a:rPr lang="en-US" altLang="en-US" sz="2000" dirty="0"/>
+              <a:t>s)</a:t>
+            </a:r>
+            <a:br>
+              <a:rPr lang="el-GR" altLang="en-US" sz="2000" dirty="0"/>
+            </a:br>
+            <a:r>
+              <a:rPr lang="el-GR" altLang="en-US" sz="2000" dirty="0"/>
+              <a:t>Κάθε </a:t>
+            </a:r>
+            <a:r>
+              <a:rPr lang="en-US" altLang="en-US" sz="2000" dirty="0"/>
+              <a:t>Host </a:t>
+            </a:r>
+            <a:r>
+              <a:rPr lang="el-GR" altLang="en-US" sz="2000" dirty="0"/>
+              <a:t>στέλνει 1000 πακέτα.</a:t>
+            </a:r>
+            <a:endParaRPr kumimoji="0" lang="en-US" altLang="en-US" sz="2000" b="0" i="0" u="none" strike="noStrike" cap="none" normalizeH="0" baseline="0" dirty="0">
+              <a:ln>
+                <a:noFill/>
+              </a:ln>
+              <a:effectLst/>
+            </a:endParaRPr>
+          </a:p>
+          <a:p>
+            <a:pPr marR="0" lvl="0" algn="l" fontAlgn="base">
               <a:spcBef>
                 <a:spcPct val="0"/>
               </a:spcBef>
@@ -30958,86 +31174,6 @@
               </a:spcAft>
               <a:buClrTx/>
               <a:buSzTx/>
-              <a:buFont typeface="Arial" panose="020B0604020202020204" pitchFamily="34" charset="0"/>
-              <a:buChar char="•"/>
-              <a:tabLst/>
-            </a:pPr>
-            <a:r>
-              <a:rPr kumimoji="0" lang="en-US" altLang="en-US" sz="2000" b="1" i="0" u="none" strike="noStrike" cap="none" normalizeH="0" baseline="0" dirty="0">
-                <a:ln>
-                  <a:noFill/>
-                </a:ln>
-                <a:effectLst/>
-              </a:rPr>
-              <a:t>Host B:</a:t>
-            </a:r>
-            <a:r>
-              <a:rPr kumimoji="0" lang="en-US" altLang="en-US" sz="2000" b="0" i="0" u="none" strike="noStrike" cap="none" normalizeH="0" baseline="0" dirty="0">
-                <a:ln>
-                  <a:noFill/>
-                </a:ln>
-                <a:effectLst/>
-              </a:rPr>
-              <a:t> </a:t>
-            </a:r>
-            <a:r>
-              <a:rPr kumimoji="0" lang="en-US" altLang="en-US" sz="2000" b="0" i="0" u="none" strike="noStrike" cap="none" normalizeH="0" baseline="0" dirty="0" err="1">
-                <a:ln>
-                  <a:noFill/>
-                </a:ln>
-                <a:effectLst/>
-              </a:rPr>
-              <a:t>Στέλνει</a:t>
-            </a:r>
-            <a:r>
-              <a:rPr kumimoji="0" lang="en-US" altLang="en-US" sz="2000" b="0" i="0" u="none" strike="noStrike" cap="none" normalizeH="0" baseline="0" dirty="0">
-                <a:ln>
-                  <a:noFill/>
-                </a:ln>
-                <a:effectLst/>
-              </a:rPr>
-              <a:t> </a:t>
-            </a:r>
-            <a:r>
-              <a:rPr kumimoji="0" lang="en-US" altLang="en-US" sz="2000" b="1" i="0" u="none" strike="noStrike" cap="none" normalizeH="0" baseline="0" dirty="0" err="1">
-                <a:ln>
-                  <a:noFill/>
-                </a:ln>
-                <a:effectLst/>
-              </a:rPr>
-              <a:t>μεγάλ</a:t>
-            </a:r>
-            <a:r>
-              <a:rPr kumimoji="0" lang="en-US" altLang="en-US" sz="2000" b="1" i="0" u="none" strike="noStrike" cap="none" normalizeH="0" baseline="0" dirty="0">
-                <a:ln>
-                  <a:noFill/>
-                </a:ln>
-                <a:effectLst/>
-              </a:rPr>
-              <a:t>α πακέτα</a:t>
-            </a:r>
-            <a:r>
-              <a:rPr kumimoji="0" lang="en-US" altLang="en-US" sz="2000" b="0" i="0" u="none" strike="noStrike" cap="none" normalizeH="0" baseline="0" dirty="0">
-                <a:ln>
-                  <a:noFill/>
-                </a:ln>
-                <a:effectLst/>
-              </a:rPr>
-              <a:t> (3000 Bytes).</a:t>
-            </a:r>
-          </a:p>
-          <a:p>
-            <a:pPr marL="0" marR="0" lvl="0" indent="-228600" algn="l" fontAlgn="base">
-              <a:spcBef>
-                <a:spcPct val="0"/>
-              </a:spcBef>
-              <a:spcAft>
-                <a:spcPts val="600"/>
-              </a:spcAft>
-              <a:buClrTx/>
-              <a:buSzTx/>
-              <a:buFont typeface="Arial" panose="020B0604020202020204" pitchFamily="34" charset="0"/>
-              <a:buChar char="•"/>
               <a:tabLst/>
             </a:pPr>
             <a:r>
@@ -32069,43 +32205,7 @@
                 </a:ln>
                 <a:effectLst/>
               </a:rPr>
-              <a:t>α κοινή ουρά για όλους. "Όπ</a:t>
-            </a:r>
-            <a:r>
-              <a:rPr kumimoji="0" lang="en-US" altLang="en-US" sz="2000" b="0" i="0" u="none" strike="noStrike" cap="none" normalizeH="0" baseline="0" dirty="0" err="1">
-                <a:ln>
-                  <a:noFill/>
-                </a:ln>
-                <a:effectLst/>
-              </a:rPr>
-              <a:t>οιος</a:t>
-            </a:r>
-            <a:r>
-              <a:rPr kumimoji="0" lang="en-US" altLang="en-US" sz="2000" b="0" i="0" u="none" strike="noStrike" cap="none" normalizeH="0" baseline="0" dirty="0">
-                <a:ln>
-                  <a:noFill/>
-                </a:ln>
-                <a:effectLst/>
-              </a:rPr>
-              <a:t> π</a:t>
-            </a:r>
-            <a:r>
-              <a:rPr kumimoji="0" lang="en-US" altLang="en-US" sz="2000" b="0" i="0" u="none" strike="noStrike" cap="none" normalizeH="0" baseline="0" dirty="0" err="1">
-                <a:ln>
-                  <a:noFill/>
-                </a:ln>
-                <a:effectLst/>
-              </a:rPr>
-              <a:t>ρόλ</a:t>
-            </a:r>
-            <a:r>
-              <a:rPr kumimoji="0" lang="en-US" altLang="en-US" sz="2000" b="0" i="0" u="none" strike="noStrike" cap="none" normalizeH="0" baseline="0" dirty="0">
-                <a:ln>
-                  <a:noFill/>
-                </a:ln>
-                <a:effectLst/>
-              </a:rPr>
-              <a:t>αβε, μπήκε".</a:t>
+              <a:t>α κοινή ουρά για όλους.</a:t>
             </a:r>
           </a:p>
           <a:p>
@@ -32321,7 +32421,7 @@
                 </a:ln>
                 <a:effectLst/>
               </a:rPr>
-              <a:t>α "εγκλωβίζονται".</a:t>
+              <a:t>α εγκλωβίζονται.</a:t>
             </a:r>
           </a:p>
           <a:p>
@@ -32439,10 +32539,10 @@
       </p:grpSpPr>
       <p:pic>
         <p:nvPicPr>
-          <p:cNvPr id="2" name="Picture 1" descr="A screenshot of a graph&#10;&#10;AI-generated content may be incorrect.">
+          <p:cNvPr id="6" name="Picture 5">
             <a:extLst>
               <a:ext uri="{FF2B5EF4-FFF2-40B4-BE49-F238E27FC236}">
-                <a16:creationId xmlns:a16="http://schemas.microsoft.com/office/drawing/2014/main" id="{08BFC549-7E73-2A79-7636-E3900891CB1E}"/>
+                <a16:creationId xmlns:a16="http://schemas.microsoft.com/office/drawing/2014/main" id="{B089F4A0-3491-5CFA-3F5C-3344FF2822F8}"/>
               </a:ext>
             </a:extLst>
           </p:cNvPr>
@@ -32460,7 +32560,7 @@
         <p:spPr>
           <a:xfrm>
             <a:off x="0" y="0"/>
-            <a:ext cx="12192000" cy="6857999"/>
+            <a:ext cx="12192000" cy="6858000"/>
           </a:xfrm>
           <a:prstGeom prst="rect">
             <a:avLst/>
@@ -33699,10 +33799,10 @@
       </p:grpSpPr>
       <p:pic>
         <p:nvPicPr>
-          <p:cNvPr id="2" name="Picture 1" descr="A screenshot of a graph&#10;&#10;AI-generated content may be incorrect.">
+          <p:cNvPr id="3" name="Picture 2">
             <a:extLst>
               <a:ext uri="{FF2B5EF4-FFF2-40B4-BE49-F238E27FC236}">
-                <a16:creationId xmlns:a16="http://schemas.microsoft.com/office/drawing/2014/main" id="{CE8ABB29-1192-1C67-B741-20932D4A6E64}"/>
+                <a16:creationId xmlns:a16="http://schemas.microsoft.com/office/drawing/2014/main" id="{3721D003-CD4E-0597-E1F1-419AE0B40BBC}"/>
               </a:ext>
             </a:extLst>
           </p:cNvPr>
@@ -33719,8 +33819,8 @@
         </p:blipFill>
         <p:spPr>
           <a:xfrm>
-            <a:off x="0" y="0"/>
-            <a:ext cx="12192000" cy="6857999"/>
+            <a:off x="0" y="-1"/>
+            <a:ext cx="12192000" cy="6858001"/>
           </a:xfrm>
           <a:prstGeom prst="rect">
             <a:avLst/>
@@ -33741,7 +33841,7 @@
         </p:nvSpPr>
         <p:spPr>
           <a:xfrm>
-            <a:off x="0" y="146304"/>
+            <a:off x="0" y="89154"/>
             <a:ext cx="1673856" cy="400110"/>
           </a:xfrm>
           <a:prstGeom prst="rect">
@@ -34237,8 +34337,8 @@
         </p:nvSpPr>
         <p:spPr bwMode="auto">
           <a:xfrm>
-            <a:off x="1371599" y="2318197"/>
-            <a:ext cx="9724031" cy="3683358"/>
+            <a:off x="347473" y="1691640"/>
+            <a:ext cx="10748158" cy="4309915"/>
           </a:xfrm>
           <a:prstGeom prst="rect">
             <a:avLst/>
@@ -34281,7 +34381,7 @@
           </a:bodyPr>
           <a:lstStyle/>
           <a:p>
-            <a:pPr marL="0" marR="0" lvl="0" indent="-228600" algn="l" fontAlgn="base">
+            <a:pPr marR="0" lvl="0" algn="l" fontAlgn="base">
               <a:spcBef>
                 <a:spcPct val="0"/>
               </a:spcBef>
@@ -34290,8 +34390,6 @@
               </a:spcAft>
               <a:buClrTx/>
               <a:buSzTx/>
-              <a:buFont typeface="Arial" panose="020B0604020202020204" pitchFamily="34" charset="0"/>
-              <a:buChar char="•"/>
               <a:tabLst/>
             </a:pPr>
             <a:r>
@@ -34427,11 +34525,25 @@
                 </a:ln>
                 <a:effectLst/>
               </a:rPr>
-              <a:t> για μικτή κίνηση (Mixed Load), καθώς οι βαριές ροές πνίγουν τις ευαίσθητες ροές.</a:t>
-            </a:r>
+              <a:t> για μικτή κίνηση, καθώς οι βαριές ροές πνίγουν τις ευαίσθητες ροές.</a:t>
+            </a:r>
+            <a:br>
+              <a:rPr kumimoji="0" lang="en-US" altLang="en-US" sz="2000" b="0" i="0" u="none" strike="noStrike" cap="none" normalizeH="0" baseline="0" dirty="0">
+                <a:ln>
+                  <a:noFill/>
+                </a:ln>
+                <a:effectLst/>
+              </a:rPr>
+            </a:br>
+            <a:endParaRPr kumimoji="0" lang="en-US" altLang="en-US" sz="2000" b="0" i="0" u="none" strike="noStrike" cap="none" normalizeH="0" baseline="0" dirty="0">
+              <a:ln>
+                <a:noFill/>
+              </a:ln>
+              <a:effectLst/>
+            </a:endParaRPr>
           </a:p>
           <a:p>
-            <a:pPr marL="0" marR="0" lvl="0" indent="-228600" algn="l" fontAlgn="base">
+            <a:pPr marR="0" lvl="0" algn="l" fontAlgn="base">
               <a:spcBef>
                 <a:spcPct val="0"/>
               </a:spcBef>
@@ -34440,8 +34552,6 @@
               </a:spcAft>
               <a:buClrTx/>
               <a:buSzTx/>
-              <a:buFont typeface="Arial" panose="020B0604020202020204" pitchFamily="34" charset="0"/>
-              <a:buChar char="•"/>
               <a:tabLst/>
             </a:pPr>
             <a:r>
@@ -34585,21 +34695,14 @@
               </a:rPr>
               <a:t>ασφαλίζει ότι η διαδραστική κίνηση (μικρά πακέτα) περνάει γρήγορα, ακόμα κι αν το δίκτυο είναι φορτωμένο με μεγάλα αρχεία.</a:t>
             </a:r>
-          </a:p>
-          <a:p>
-            <a:pPr marL="0" marR="0" lvl="0" indent="-228600" algn="l" fontAlgn="base">
-              <a:spcBef>
-                <a:spcPct val="0"/>
-              </a:spcBef>
-              <a:spcAft>
-                <a:spcPts val="600"/>
-              </a:spcAft>
-              <a:buClrTx/>
-              <a:buSzTx/>
-              <a:buFont typeface="Arial" panose="020B0604020202020204" pitchFamily="34" charset="0"/>
-              <a:buChar char="•"/>
-              <a:tabLst/>
-            </a:pPr>
+            <a:br>
+              <a:rPr kumimoji="0" lang="en-US" altLang="en-US" sz="2000" b="0" i="0" u="none" strike="noStrike" cap="none" normalizeH="0" baseline="0" dirty="0">
+                <a:ln>
+                  <a:noFill/>
+                </a:ln>
+                <a:effectLst/>
+              </a:rPr>
+            </a:br>
             <a:endParaRPr kumimoji="0" lang="en-US" altLang="en-US" sz="2000" b="0" i="0" u="none" strike="noStrike" cap="none" normalizeH="0" baseline="0" dirty="0">
               <a:ln>
                 <a:noFill/>
@@ -40025,7 +40128,7 @@
           <p:nvPr/>
         </p:nvPicPr>
         <p:blipFill>
-          <a:blip r:embed="rId2"/>
+          <a:blip r:embed="rId3"/>
           <a:stretch>
             <a:fillRect/>
           </a:stretch>
